--- a/course/lectures/act-2-delegation-and-control/02-modeling/2-2-Modeling-1-Purposeful-Reduction.pptx
+++ b/course/lectures/act-2-delegation-and-control/02-modeling/2-2-Modeling-1-Purposeful-Reduction.pptx
@@ -5,41 +5,41 @@
     <p:sldMasterId id="2147483708" r:id="rId1"/>
   </p:sldMasterIdLst>
   <p:notesMasterIdLst>
-    <p:notesMasterId r:id="rId43"/>
+    <p:notesMasterId r:id="rId34"/>
   </p:notesMasterIdLst>
   <p:sldIdLst>
-    <p:sldId id="701" r:id="rId48"/>
-    <p:sldId id="702" r:id="rId49"/>
-    <p:sldId id="703" r:id="rId50"/>
-    <p:sldId id="704" r:id="rId51"/>
-    <p:sldId id="705" r:id="rId52"/>
-    <p:sldId id="706" r:id="rId53"/>
-    <p:sldId id="707" r:id="rId54"/>
-    <p:sldId id="708" r:id="rId55"/>
-    <p:sldId id="709" r:id="rId56"/>
-    <p:sldId id="710" r:id="rId57"/>
-    <p:sldId id="711" r:id="rId58"/>
-    <p:sldId id="712" r:id="rId59"/>
-    <p:sldId id="713" r:id="rId60"/>
-    <p:sldId id="714" r:id="rId61"/>
-    <p:sldId id="715" r:id="rId62"/>
-    <p:sldId id="716" r:id="rId63"/>
-    <p:sldId id="717" r:id="rId64"/>
-    <p:sldId id="718" r:id="rId65"/>
-    <p:sldId id="719" r:id="rId66"/>
-    <p:sldId id="720" r:id="rId67"/>
-    <p:sldId id="721" r:id="rId68"/>
-    <p:sldId id="722" r:id="rId69"/>
-    <p:sldId id="723" r:id="rId70"/>
-    <p:sldId id="724" r:id="rId71"/>
-    <p:sldId id="725" r:id="rId72"/>
-    <p:sldId id="726" r:id="rId73"/>
-    <p:sldId id="727" r:id="rId74"/>
-    <p:sldId id="728" r:id="rId75"/>
-    <p:sldId id="729" r:id="rId76"/>
-    <p:sldId id="730" r:id="rId77"/>
-    <p:sldId id="731" r:id="rId78"/>
-    <p:sldId id="732" r:id="rId79"/>
+    <p:sldId id="701" r:id="rId2"/>
+    <p:sldId id="702" r:id="rId3"/>
+    <p:sldId id="703" r:id="rId4"/>
+    <p:sldId id="704" r:id="rId5"/>
+    <p:sldId id="705" r:id="rId6"/>
+    <p:sldId id="706" r:id="rId7"/>
+    <p:sldId id="707" r:id="rId8"/>
+    <p:sldId id="708" r:id="rId9"/>
+    <p:sldId id="709" r:id="rId10"/>
+    <p:sldId id="710" r:id="rId11"/>
+    <p:sldId id="711" r:id="rId12"/>
+    <p:sldId id="712" r:id="rId13"/>
+    <p:sldId id="713" r:id="rId14"/>
+    <p:sldId id="714" r:id="rId15"/>
+    <p:sldId id="715" r:id="rId16"/>
+    <p:sldId id="716" r:id="rId17"/>
+    <p:sldId id="717" r:id="rId18"/>
+    <p:sldId id="718" r:id="rId19"/>
+    <p:sldId id="719" r:id="rId20"/>
+    <p:sldId id="720" r:id="rId21"/>
+    <p:sldId id="721" r:id="rId22"/>
+    <p:sldId id="722" r:id="rId23"/>
+    <p:sldId id="723" r:id="rId24"/>
+    <p:sldId id="724" r:id="rId25"/>
+    <p:sldId id="725" r:id="rId26"/>
+    <p:sldId id="726" r:id="rId27"/>
+    <p:sldId id="727" r:id="rId28"/>
+    <p:sldId id="728" r:id="rId29"/>
+    <p:sldId id="729" r:id="rId30"/>
+    <p:sldId id="730" r:id="rId31"/>
+    <p:sldId id="731" r:id="rId32"/>
+    <p:sldId id="732" r:id="rId33"/>
   </p:sldIdLst>
   <p:sldSz cx="9144000" cy="6858000" type="screen4x3"/>
   <p:notesSz cx="6858000" cy="9144000"/>
@@ -230,7 +230,7 @@
           </a:lstStyle>
           <a:p>
             <a:fld id="{27E8B4C4-0720-F64E-9EEE-9472CF165DC6}" type="datetimeFigureOut">
-              <a:t>9/29/26</a:t>
+              <a:t>9/30/26</a:t>
             </a:fld>
             <a:endParaRPr lang="en-US"/>
           </a:p>
@@ -4823,7 +4823,7 @@
             </a:r>
             <a:r>
               <a:rPr lang="en-US" b="1" u="none" dirty="0"/>
-              <a:t xml:space="preserve">		Details</a:t>
+              <a:t>		Details</a:t>
             </a:r>
           </a:p>
           <a:p>
@@ -5000,7 +5000,7 @@
             </a:r>
             <a:r>
               <a:rPr lang="en-US" b="1" u="none" dirty="0"/>
-              <a:t xml:space="preserve">		Details</a:t>
+              <a:t>		Details</a:t>
             </a:r>
           </a:p>
           <a:p>
@@ -5960,6 +5960,13 @@
             <a:noFill/>
           </a:ln>
         </p:spPr>
+        <p:txBody>
+          <a:bodyPr/>
+          <a:lstStyle/>
+          <a:p>
+            <a:endParaRPr lang="en-US"/>
+          </a:p>
+        </p:txBody>
       </p:sp>
       <p:sp>
         <p:nvSpPr>
@@ -5982,6 +5989,13 @@
             <a:noFill/>
           </a:ln>
         </p:spPr>
+        <p:txBody>
+          <a:bodyPr/>
+          <a:lstStyle/>
+          <a:p>
+            <a:endParaRPr lang="en-US"/>
+          </a:p>
+        </p:txBody>
       </p:sp>
       <p:sp>
         <p:nvSpPr>
@@ -6004,6 +6018,13 @@
             <a:noFill/>
           </a:ln>
         </p:spPr>
+        <p:txBody>
+          <a:bodyPr/>
+          <a:lstStyle/>
+          <a:p>
+            <a:endParaRPr lang="en-US"/>
+          </a:p>
+        </p:txBody>
       </p:sp>
       <p:sp>
         <p:nvSpPr>
@@ -6026,6 +6047,13 @@
             <a:noFill/>
           </a:ln>
         </p:spPr>
+        <p:txBody>
+          <a:bodyPr/>
+          <a:lstStyle/>
+          <a:p>
+            <a:endParaRPr lang="en-US"/>
+          </a:p>
+        </p:txBody>
       </p:sp>
       <p:sp>
         <p:nvSpPr>
@@ -6048,6 +6076,13 @@
             <a:noFill/>
           </a:ln>
         </p:spPr>
+        <p:txBody>
+          <a:bodyPr/>
+          <a:lstStyle/>
+          <a:p>
+            <a:endParaRPr lang="en-US"/>
+          </a:p>
+        </p:txBody>
       </p:sp>
       <p:sp>
         <p:nvSpPr>
@@ -6070,6 +6105,13 @@
             <a:noFill/>
           </a:ln>
         </p:spPr>
+        <p:txBody>
+          <a:bodyPr/>
+          <a:lstStyle/>
+          <a:p>
+            <a:endParaRPr lang="en-US"/>
+          </a:p>
+        </p:txBody>
       </p:sp>
       <p:sp>
         <p:nvSpPr>
@@ -6092,6 +6134,13 @@
             <a:noFill/>
           </a:ln>
         </p:spPr>
+        <p:txBody>
+          <a:bodyPr/>
+          <a:lstStyle/>
+          <a:p>
+            <a:endParaRPr lang="en-US"/>
+          </a:p>
+        </p:txBody>
       </p:sp>
       <p:sp>
         <p:nvSpPr>
@@ -6114,6 +6163,13 @@
             <a:noFill/>
           </a:ln>
         </p:spPr>
+        <p:txBody>
+          <a:bodyPr/>
+          <a:lstStyle/>
+          <a:p>
+            <a:endParaRPr lang="en-US"/>
+          </a:p>
+        </p:txBody>
       </p:sp>
       <p:sp>
         <p:nvSpPr>
@@ -6136,6 +6192,13 @@
             <a:noFill/>
           </a:ln>
         </p:spPr>
+        <p:txBody>
+          <a:bodyPr/>
+          <a:lstStyle/>
+          <a:p>
+            <a:endParaRPr lang="en-US"/>
+          </a:p>
+        </p:txBody>
       </p:sp>
       <p:sp>
         <p:nvSpPr>
@@ -6158,6 +6221,13 @@
             <a:noFill/>
           </a:ln>
         </p:spPr>
+        <p:txBody>
+          <a:bodyPr/>
+          <a:lstStyle/>
+          <a:p>
+            <a:endParaRPr lang="en-US"/>
+          </a:p>
+        </p:txBody>
       </p:sp>
       <p:sp>
         <p:nvSpPr>
@@ -6180,6 +6250,13 @@
             <a:noFill/>
           </a:ln>
         </p:spPr>
+        <p:txBody>
+          <a:bodyPr/>
+          <a:lstStyle/>
+          <a:p>
+            <a:endParaRPr lang="en-US"/>
+          </a:p>
+        </p:txBody>
       </p:sp>
       <p:sp>
         <p:nvSpPr>
@@ -6202,6 +6279,13 @@
             <a:noFill/>
           </a:ln>
         </p:spPr>
+        <p:txBody>
+          <a:bodyPr/>
+          <a:lstStyle/>
+          <a:p>
+            <a:endParaRPr lang="en-US"/>
+          </a:p>
+        </p:txBody>
       </p:sp>
       <p:cxnSp>
         <p:nvCxnSpPr>
@@ -6246,6 +6330,13 @@
             <a:noFill/>
           </a:ln>
         </p:spPr>
+        <p:txBody>
+          <a:bodyPr/>
+          <a:lstStyle/>
+          <a:p>
+            <a:endParaRPr lang="en-US"/>
+          </a:p>
+        </p:txBody>
       </p:sp>
       <p:sp>
         <p:nvSpPr>
@@ -6268,6 +6359,13 @@
             <a:noFill/>
           </a:ln>
         </p:spPr>
+        <p:txBody>
+          <a:bodyPr/>
+          <a:lstStyle/>
+          <a:p>
+            <a:endParaRPr lang="en-US"/>
+          </a:p>
+        </p:txBody>
       </p:sp>
       <p:sp>
         <p:nvSpPr>
@@ -6290,6 +6388,13 @@
             <a:noFill/>
           </a:ln>
         </p:spPr>
+        <p:txBody>
+          <a:bodyPr/>
+          <a:lstStyle/>
+          <a:p>
+            <a:endParaRPr lang="en-US"/>
+          </a:p>
+        </p:txBody>
       </p:sp>
       <p:sp>
         <p:nvSpPr>
@@ -6312,6 +6417,13 @@
             <a:noFill/>
           </a:ln>
         </p:spPr>
+        <p:txBody>
+          <a:bodyPr/>
+          <a:lstStyle/>
+          <a:p>
+            <a:endParaRPr lang="en-US"/>
+          </a:p>
+        </p:txBody>
       </p:sp>
       <p:sp>
         <p:nvSpPr>
@@ -6345,7 +6457,39 @@
                   <a:srgbClr val="555960"/>
                 </a:solidFill>
               </a:rPr>
-              <a:t>Lecture 1 of 2: one model, one question.</a:t>
+              <a:t>Lecture 1 </a:t>
+            </a:r>
+            <a:r>
+              <a:rPr lang="en-US" sz="2000" dirty="0">
+                <a:solidFill>
+                  <a:srgbClr val="555960"/>
+                </a:solidFill>
+              </a:rPr>
+              <a:t>(today)</a:t>
+            </a:r>
+            <a:r>
+              <a:rPr lang="en-US" sz="2000" b="0" i="0" dirty="0">
+                <a:solidFill>
+                  <a:srgbClr val="555960"/>
+                </a:solidFill>
+              </a:rPr>
+              <a:t>: </a:t>
+            </a:r>
+            <a:r>
+              <a:rPr lang="en-US" sz="2000" dirty="0">
+                <a:solidFill>
+                  <a:srgbClr val="555960"/>
+                </a:solidFill>
+              </a:rPr>
+              <a:t>O</a:t>
+            </a:r>
+            <a:r>
+              <a:rPr lang="en-US" sz="2000" b="0" i="0" dirty="0">
+                <a:solidFill>
+                  <a:srgbClr val="555960"/>
+                </a:solidFill>
+              </a:rPr>
+              <a:t>ne model, one question.</a:t>
             </a:r>
           </a:p>
           <a:p>
@@ -6361,7 +6505,7 @@
                   <a:srgbClr val="555960"/>
                 </a:solidFill>
               </a:rPr>
-              <a:t>Lecture 2 turns to systems of many models.</a:t>
+              <a:t>Lecture 2: Modeling larger systems</a:t>
             </a:r>
           </a:p>
         </p:txBody>
@@ -6432,7 +6576,7 @@
           <a:p>
             <a:fld id="{B7EB45DA-9A0D-DC49-8E02-F30A5DDC21C3}" type="slidenum">
               <a:rPr lang="en-US" smtClean="0"/>
-              <a:t>1</a:t>
+              <a:t>10</a:t>
             </a:fld>
             <a:endParaRPr lang="en-US"/>
           </a:p>
@@ -6926,7 +7070,7 @@
           <a:p>
             <a:fld id="{B7EB45DA-9A0D-DC49-8E02-F30A5DDC21C3}" type="slidenum">
               <a:rPr lang="en-US" smtClean="0"/>
-              <a:t>1</a:t>
+              <a:t>11</a:t>
             </a:fld>
             <a:endParaRPr lang="en-US"/>
           </a:p>
@@ -8441,7 +8585,7 @@
           <a:p>
             <a:fld id="{B7EB45DA-9A0D-DC49-8E02-F30A5DDC21C3}" type="slidenum">
               <a:rPr lang="en-US" smtClean="0"/>
-              <a:t>1</a:t>
+              <a:t>12</a:t>
             </a:fld>
             <a:endParaRPr lang="en-US"/>
           </a:p>
@@ -9547,7 +9691,7 @@
           <a:p>
             <a:fld id="{B7EB45DA-9A0D-DC49-8E02-F30A5DDC21C3}" type="slidenum">
               <a:rPr lang="en-US" smtClean="0"/>
-              <a:t>1</a:t>
+              <a:t>13</a:t>
             </a:fld>
             <a:endParaRPr lang="en-US"/>
           </a:p>
@@ -9916,7 +10060,7 @@
           <a:p>
             <a:fld id="{B7EB45DA-9A0D-DC49-8E02-F30A5DDC21C3}" type="slidenum">
               <a:rPr lang="en-US" smtClean="0"/>
-              <a:t>1</a:t>
+              <a:t>14</a:t>
             </a:fld>
             <a:endParaRPr lang="en-US"/>
           </a:p>
@@ -10288,7 +10432,7 @@
           <a:p>
             <a:fld id="{B7EB45DA-9A0D-DC49-8E02-F30A5DDC21C3}" type="slidenum">
               <a:rPr lang="en-US" smtClean="0"/>
-              <a:t>1</a:t>
+              <a:t>15</a:t>
             </a:fld>
             <a:endParaRPr lang="en-US"/>
           </a:p>
@@ -10623,6 +10767,7 @@
               </a:spcAft>
               <a:buNone/>
             </a:pPr>
+            <a:endParaRPr/>
           </a:p>
         </p:txBody>
       </p:sp>
@@ -10657,6 +10802,7 @@
               </a:spcAft>
               <a:buNone/>
             </a:pPr>
+            <a:endParaRPr/>
           </a:p>
         </p:txBody>
       </p:sp>
@@ -10691,6 +10837,7 @@
               </a:spcAft>
               <a:buNone/>
             </a:pPr>
+            <a:endParaRPr/>
           </a:p>
         </p:txBody>
       </p:sp>
@@ -11007,7 +11154,7 @@
           <a:p>
             <a:fld id="{B7EB45DA-9A0D-DC49-8E02-F30A5DDC21C3}" type="slidenum">
               <a:rPr lang="en-US" smtClean="0"/>
-              <a:t>1</a:t>
+              <a:t>16</a:t>
             </a:fld>
             <a:endParaRPr lang="en-US"/>
           </a:p>
@@ -11452,6 +11599,7 @@
               </a:spcAft>
               <a:buNone/>
             </a:pPr>
+            <a:endParaRPr/>
           </a:p>
         </p:txBody>
       </p:sp>
@@ -11791,7 +11939,7 @@
           <a:p>
             <a:fld id="{B7EB45DA-9A0D-DC49-8E02-F30A5DDC21C3}" type="slidenum">
               <a:rPr lang="en-US" smtClean="0"/>
-              <a:t>1</a:t>
+              <a:t>17</a:t>
             </a:fld>
             <a:endParaRPr lang="en-US"/>
           </a:p>
@@ -12528,7 +12676,7 @@
                   <a:srgbClr val="8E6F3E"/>
                 </a:solidFill>
               </a:rPr>
-              <a:t xml:space="preserve">PROPERTY:  </a:t>
+              <a:t>PROPERTY:  </a:t>
             </a:r>
             <a:r>
               <a:rPr lang="en-US" sz="2200" b="1" dirty="0">
@@ -12649,7 +12797,7 @@
           <a:p>
             <a:fld id="{B7EB45DA-9A0D-DC49-8E02-F30A5DDC21C3}" type="slidenum">
               <a:rPr lang="en-US" smtClean="0"/>
-              <a:t>1</a:t>
+              <a:t>18</a:t>
             </a:fld>
             <a:endParaRPr lang="en-US"/>
           </a:p>
@@ -13465,7 +13613,7 @@
           <a:p>
             <a:fld id="{B7EB45DA-9A0D-DC49-8E02-F30A5DDC21C3}" type="slidenum">
               <a:rPr lang="en-US" smtClean="0"/>
-              <a:t>1</a:t>
+              <a:t>19</a:t>
             </a:fld>
             <a:endParaRPr lang="en-US"/>
           </a:p>
@@ -14266,7 +14414,7 @@
           <a:p>
             <a:fld id="{B7EB45DA-9A0D-DC49-8E02-F30A5DDC21C3}" type="slidenum">
               <a:rPr lang="en-US" smtClean="0"/>
-              <a:t>1</a:t>
+              <a:t>2</a:t>
             </a:fld>
             <a:endParaRPr lang="en-US"/>
           </a:p>
@@ -14549,6 +14697,13 @@
             <a:prstDash val="dash"/>
           </a:ln>
         </p:spPr>
+        <p:txBody>
+          <a:bodyPr/>
+          <a:lstStyle/>
+          <a:p>
+            <a:endParaRPr lang="en-US"/>
+          </a:p>
+        </p:txBody>
       </p:sp>
       <p:sp>
         <p:nvSpPr>
@@ -14816,7 +14971,7 @@
           <a:p>
             <a:fld id="{B7EB45DA-9A0D-DC49-8E02-F30A5DDC21C3}" type="slidenum">
               <a:rPr lang="en-US" smtClean="0"/>
-              <a:t>1</a:t>
+              <a:t>20</a:t>
             </a:fld>
             <a:endParaRPr lang="en-US"/>
           </a:p>
@@ -15305,7 +15460,7 @@
           <a:p>
             <a:fld id="{B7EB45DA-9A0D-DC49-8E02-F30A5DDC21C3}" type="slidenum">
               <a:rPr lang="en-US" smtClean="0"/>
-              <a:t>1</a:t>
+              <a:t>21</a:t>
             </a:fld>
             <a:endParaRPr lang="en-US"/>
           </a:p>
@@ -15860,7 +16015,7 @@
           <a:p>
             <a:fld id="{B7EB45DA-9A0D-DC49-8E02-F30A5DDC21C3}" type="slidenum">
               <a:rPr lang="en-US" smtClean="0"/>
-              <a:t>1</a:t>
+              <a:t>22</a:t>
             </a:fld>
             <a:endParaRPr lang="en-US"/>
           </a:p>
@@ -16452,7 +16607,7 @@
           <a:p>
             <a:fld id="{B7EB45DA-9A0D-DC49-8E02-F30A5DDC21C3}" type="slidenum">
               <a:rPr lang="en-US" smtClean="0"/>
-              <a:t>1</a:t>
+              <a:t>23</a:t>
             </a:fld>
             <a:endParaRPr lang="en-US"/>
           </a:p>
@@ -17212,7 +17367,7 @@
           <a:p>
             <a:fld id="{B7EB45DA-9A0D-DC49-8E02-F30A5DDC21C3}" type="slidenum">
               <a:rPr lang="en-US" smtClean="0"/>
-              <a:t>1</a:t>
+              <a:t>24</a:t>
             </a:fld>
             <a:endParaRPr lang="en-US"/>
           </a:p>
@@ -17768,7 +17923,7 @@
           <a:p>
             <a:fld id="{B7EB45DA-9A0D-DC49-8E02-F30A5DDC21C3}" type="slidenum">
               <a:rPr lang="en-US" smtClean="0"/>
-              <a:t>1</a:t>
+              <a:t>25</a:t>
             </a:fld>
             <a:endParaRPr lang="en-US"/>
           </a:p>
@@ -18377,7 +18532,7 @@
           <a:p>
             <a:fld id="{B7EB45DA-9A0D-DC49-8E02-F30A5DDC21C3}" type="slidenum">
               <a:rPr lang="en-US" smtClean="0"/>
-              <a:t>1</a:t>
+              <a:t>26</a:t>
             </a:fld>
             <a:endParaRPr lang="en-US"/>
           </a:p>
@@ -18943,7 +19098,7 @@
           <a:p>
             <a:fld id="{B7EB45DA-9A0D-DC49-8E02-F30A5DDC21C3}" type="slidenum">
               <a:rPr lang="en-US" smtClean="0"/>
-              <a:t>1</a:t>
+              <a:t>27</a:t>
             </a:fld>
             <a:endParaRPr lang="en-US"/>
           </a:p>
@@ -18973,7 +19128,7 @@
           <a:p>
             <a:r>
               <a:rPr lang="en-US" dirty="0"/>
-              <a:t xml:space="preserve">Same controller, new question: </a:t>
+              <a:t>Same controller, new question: </a:t>
             </a:r>
             <a:r>
               <a:rPr lang="en-US" sz="1800" b="1" dirty="0">
@@ -19228,7 +19383,7 @@
                   <a:srgbClr val="5C4826"/>
                 </a:solidFill>
               </a:rPr>
-              <a:t xml:space="preserve"> + T</a:t>
+              <a:t> + T</a:t>
             </a:r>
             <a:r>
               <a:rPr lang="en-US" sz="1400" b="1" baseline="-25000" dirty="0">
@@ -19244,7 +19399,7 @@
                   <a:srgbClr val="5C4826"/>
                 </a:solidFill>
               </a:rPr>
-              <a:t xml:space="preserve"> + T</a:t>
+              <a:t> + T</a:t>
             </a:r>
             <a:r>
               <a:rPr lang="en-US" sz="1400" b="1" baseline="-25000" dirty="0">
@@ -19260,7 +19415,7 @@
                   <a:srgbClr val="5C4826"/>
                 </a:solidFill>
               </a:rPr>
-              <a:t xml:space="preserve"> + T</a:t>
+              <a:t> + T</a:t>
             </a:r>
             <a:r>
               <a:rPr lang="en-US" sz="1400" b="1" baseline="-25000" dirty="0">
@@ -19276,7 +19431,7 @@
                   <a:srgbClr val="5C4826"/>
                 </a:solidFill>
               </a:rPr>
-              <a:t xml:space="preserve"> ≤ 50 ms</a:t>
+              <a:t> ≤ 50 ms</a:t>
             </a:r>
           </a:p>
         </p:txBody>
@@ -19678,7 +19833,7 @@
           <a:p>
             <a:fld id="{B7EB45DA-9A0D-DC49-8E02-F30A5DDC21C3}" type="slidenum">
               <a:rPr lang="en-US" smtClean="0"/>
-              <a:t>1</a:t>
+              <a:t>28</a:t>
             </a:fld>
             <a:endParaRPr lang="en-US"/>
           </a:p>
@@ -19782,7 +19937,7 @@
           <a:p>
             <a:fld id="{B7EB45DA-9A0D-DC49-8E02-F30A5DDC21C3}" type="slidenum">
               <a:rPr lang="en-US" smtClean="0"/>
-              <a:t>1</a:t>
+              <a:t>29</a:t>
             </a:fld>
             <a:endParaRPr lang="en-US"/>
           </a:p>
@@ -19868,7 +20023,7 @@
                   <a:srgbClr val="555960"/>
                 </a:solidFill>
               </a:rPr>
-              <a:t xml:space="preserve"> — a purposeful reduction of some territory that preserves selected properties for engineering questions.</a:t>
+              <a:t> — a purposeful reduction of some territory that preserves selected properties for engineering questions.</a:t>
             </a:r>
           </a:p>
           <a:p>
@@ -19892,7 +20047,7 @@
                   <a:srgbClr val="555960"/>
                 </a:solidFill>
               </a:rPr>
-              <a:t xml:space="preserve"> — a concrete form in which a model is inspected, manipulated, analyzed, or consumed.</a:t>
+              <a:t> — a concrete form in which a model is inspected, manipulated, analyzed, or consumed.</a:t>
             </a:r>
           </a:p>
         </p:txBody>
@@ -20386,7 +20541,7 @@
                   <a:srgbClr val="5C4826"/>
                 </a:solidFill>
               </a:rPr>
-              <a:t xml:space="preserve">  staged: published</a:t>
+              <a:t>  staged: published</a:t>
             </a:r>
           </a:p>
           <a:p>
@@ -20402,7 +20557,7 @@
                   <a:srgbClr val="5C4826"/>
                 </a:solidFill>
               </a:rPr>
-              <a:t xml:space="preserve">  published: recorded</a:t>
+              <a:t>  published: recorded</a:t>
             </a:r>
           </a:p>
           <a:p>
@@ -20565,7 +20720,7 @@
           <a:p>
             <a:fld id="{B7EB45DA-9A0D-DC49-8E02-F30A5DDC21C3}" type="slidenum">
               <a:rPr lang="en-US" smtClean="0"/>
-              <a:t>1</a:t>
+              <a:t>3</a:t>
             </a:fld>
             <a:endParaRPr lang="en-US"/>
           </a:p>
@@ -20594,6 +20749,13 @@
             </a:solidFill>
           </a:ln>
         </p:spPr>
+        <p:txBody>
+          <a:bodyPr/>
+          <a:lstStyle/>
+          <a:p>
+            <a:endParaRPr lang="en-US"/>
+          </a:p>
+        </p:txBody>
       </p:sp>
       <p:sp>
         <p:nvSpPr>
@@ -20655,6 +20817,13 @@
             </a:solidFill>
           </a:ln>
         </p:spPr>
+        <p:txBody>
+          <a:bodyPr/>
+          <a:lstStyle/>
+          <a:p>
+            <a:endParaRPr lang="en-US"/>
+          </a:p>
+        </p:txBody>
       </p:sp>
       <p:sp>
         <p:nvSpPr>
@@ -20679,6 +20848,13 @@
             </a:solidFill>
           </a:ln>
         </p:spPr>
+        <p:txBody>
+          <a:bodyPr/>
+          <a:lstStyle/>
+          <a:p>
+            <a:endParaRPr lang="en-US"/>
+          </a:p>
+        </p:txBody>
       </p:sp>
       <p:sp>
         <p:nvSpPr>
@@ -20703,6 +20879,13 @@
             </a:solidFill>
           </a:ln>
         </p:spPr>
+        <p:txBody>
+          <a:bodyPr/>
+          <a:lstStyle/>
+          <a:p>
+            <a:endParaRPr lang="en-US"/>
+          </a:p>
+        </p:txBody>
       </p:sp>
       <p:sp>
         <p:nvSpPr>
@@ -20727,6 +20910,13 @@
             </a:solidFill>
           </a:ln>
         </p:spPr>
+        <p:txBody>
+          <a:bodyPr/>
+          <a:lstStyle/>
+          <a:p>
+            <a:endParaRPr lang="en-US"/>
+          </a:p>
+        </p:txBody>
       </p:sp>
       <p:sp>
         <p:nvSpPr>
@@ -20751,6 +20941,13 @@
             </a:solidFill>
           </a:ln>
         </p:spPr>
+        <p:txBody>
+          <a:bodyPr/>
+          <a:lstStyle/>
+          <a:p>
+            <a:endParaRPr lang="en-US"/>
+          </a:p>
+        </p:txBody>
       </p:sp>
       <p:sp>
         <p:nvSpPr>
@@ -20775,6 +20972,13 @@
             </a:solidFill>
           </a:ln>
         </p:spPr>
+        <p:txBody>
+          <a:bodyPr/>
+          <a:lstStyle/>
+          <a:p>
+            <a:endParaRPr lang="en-US"/>
+          </a:p>
+        </p:txBody>
       </p:sp>
       <p:sp>
         <p:nvSpPr>
@@ -20797,6 +21001,13 @@
             <a:noFill/>
           </a:ln>
         </p:spPr>
+        <p:txBody>
+          <a:bodyPr/>
+          <a:lstStyle/>
+          <a:p>
+            <a:endParaRPr lang="en-US"/>
+          </a:p>
+        </p:txBody>
       </p:sp>
       <p:sp>
         <p:nvSpPr>
@@ -20819,6 +21030,13 @@
             <a:noFill/>
           </a:ln>
         </p:spPr>
+        <p:txBody>
+          <a:bodyPr/>
+          <a:lstStyle/>
+          <a:p>
+            <a:endParaRPr lang="en-US"/>
+          </a:p>
+        </p:txBody>
       </p:sp>
       <p:sp>
         <p:nvSpPr>
@@ -20841,6 +21059,13 @@
             <a:noFill/>
           </a:ln>
         </p:spPr>
+        <p:txBody>
+          <a:bodyPr/>
+          <a:lstStyle/>
+          <a:p>
+            <a:endParaRPr lang="en-US"/>
+          </a:p>
+        </p:txBody>
       </p:sp>
       <p:sp>
         <p:nvSpPr>
@@ -20865,6 +21090,13 @@
             </a:solidFill>
           </a:ln>
         </p:spPr>
+        <p:txBody>
+          <a:bodyPr/>
+          <a:lstStyle/>
+          <a:p>
+            <a:endParaRPr lang="en-US"/>
+          </a:p>
+        </p:txBody>
       </p:sp>
       <p:sp>
         <p:nvSpPr>
@@ -20889,6 +21121,13 @@
             </a:solidFill>
           </a:ln>
         </p:spPr>
+        <p:txBody>
+          <a:bodyPr/>
+          <a:lstStyle/>
+          <a:p>
+            <a:endParaRPr lang="en-US"/>
+          </a:p>
+        </p:txBody>
       </p:sp>
       <p:sp>
         <p:nvSpPr>
@@ -20913,6 +21152,13 @@
             </a:solidFill>
           </a:ln>
         </p:spPr>
+        <p:txBody>
+          <a:bodyPr/>
+          <a:lstStyle/>
+          <a:p>
+            <a:endParaRPr lang="en-US"/>
+          </a:p>
+        </p:txBody>
       </p:sp>
       <p:sp>
         <p:nvSpPr>
@@ -21337,6 +21583,13 @@
             </a:solidFill>
           </a:ln>
         </p:spPr>
+        <p:txBody>
+          <a:bodyPr/>
+          <a:lstStyle/>
+          <a:p>
+            <a:endParaRPr lang="en-US"/>
+          </a:p>
+        </p:txBody>
       </p:sp>
       <p:sp>
         <p:nvSpPr>
@@ -21400,6 +21653,13 @@
             </a:solidFill>
           </a:ln>
         </p:spPr>
+        <p:txBody>
+          <a:bodyPr/>
+          <a:lstStyle/>
+          <a:p>
+            <a:endParaRPr lang="en-US"/>
+          </a:p>
+        </p:txBody>
       </p:sp>
       <p:sp>
         <p:nvSpPr>
@@ -21463,6 +21723,13 @@
             </a:solidFill>
           </a:ln>
         </p:spPr>
+        <p:txBody>
+          <a:bodyPr/>
+          <a:lstStyle/>
+          <a:p>
+            <a:endParaRPr lang="en-US"/>
+          </a:p>
+        </p:txBody>
       </p:sp>
       <p:sp>
         <p:nvSpPr>
@@ -21487,6 +21754,13 @@
             </a:solidFill>
           </a:ln>
         </p:spPr>
+        <p:txBody>
+          <a:bodyPr/>
+          <a:lstStyle/>
+          <a:p>
+            <a:endParaRPr lang="en-US"/>
+          </a:p>
+        </p:txBody>
       </p:sp>
       <p:sp>
         <p:nvSpPr>
@@ -21511,6 +21785,13 @@
             </a:solidFill>
           </a:ln>
         </p:spPr>
+        <p:txBody>
+          <a:bodyPr/>
+          <a:lstStyle/>
+          <a:p>
+            <a:endParaRPr lang="en-US"/>
+          </a:p>
+        </p:txBody>
       </p:sp>
       <p:sp>
         <p:nvSpPr>
@@ -21535,6 +21816,13 @@
             </a:solidFill>
           </a:ln>
         </p:spPr>
+        <p:txBody>
+          <a:bodyPr/>
+          <a:lstStyle/>
+          <a:p>
+            <a:endParaRPr lang="en-US"/>
+          </a:p>
+        </p:txBody>
       </p:sp>
       <p:sp>
         <p:nvSpPr>
@@ -21559,6 +21847,13 @@
             </a:solidFill>
           </a:ln>
         </p:spPr>
+        <p:txBody>
+          <a:bodyPr/>
+          <a:lstStyle/>
+          <a:p>
+            <a:endParaRPr lang="en-US"/>
+          </a:p>
+        </p:txBody>
       </p:sp>
       <p:cxnSp>
         <p:nvCxnSpPr>
@@ -21671,6 +21966,13 @@
             </a:solidFill>
           </a:ln>
         </p:spPr>
+        <p:txBody>
+          <a:bodyPr/>
+          <a:lstStyle/>
+          <a:p>
+            <a:endParaRPr lang="en-US"/>
+          </a:p>
+        </p:txBody>
       </p:sp>
       <p:sp>
         <p:nvSpPr>
@@ -21695,6 +21997,13 @@
             </a:solidFill>
           </a:ln>
         </p:spPr>
+        <p:txBody>
+          <a:bodyPr/>
+          <a:lstStyle/>
+          <a:p>
+            <a:endParaRPr lang="en-US"/>
+          </a:p>
+        </p:txBody>
       </p:sp>
       <p:sp>
         <p:nvSpPr>
@@ -21719,6 +22028,13 @@
             </a:solidFill>
           </a:ln>
         </p:spPr>
+        <p:txBody>
+          <a:bodyPr/>
+          <a:lstStyle/>
+          <a:p>
+            <a:endParaRPr lang="en-US"/>
+          </a:p>
+        </p:txBody>
       </p:sp>
       <p:cxnSp>
         <p:nvCxnSpPr>
@@ -21872,6 +22188,13 @@
             </a:solidFill>
           </a:ln>
         </p:spPr>
+        <p:txBody>
+          <a:bodyPr/>
+          <a:lstStyle/>
+          <a:p>
+            <a:endParaRPr lang="en-US"/>
+          </a:p>
+        </p:txBody>
       </p:sp>
       <p:sp>
         <p:nvSpPr>
@@ -21896,6 +22219,13 @@
             </a:solidFill>
           </a:ln>
         </p:spPr>
+        <p:txBody>
+          <a:bodyPr/>
+          <a:lstStyle/>
+          <a:p>
+            <a:endParaRPr lang="en-US"/>
+          </a:p>
+        </p:txBody>
       </p:sp>
       <p:sp>
         <p:nvSpPr>
@@ -21920,6 +22250,13 @@
             </a:solidFill>
           </a:ln>
         </p:spPr>
+        <p:txBody>
+          <a:bodyPr/>
+          <a:lstStyle/>
+          <a:p>
+            <a:endParaRPr lang="en-US"/>
+          </a:p>
+        </p:txBody>
       </p:sp>
       <p:cxnSp>
         <p:nvCxnSpPr>
@@ -22048,7 +22385,7 @@
           <a:p>
             <a:fld id="{B7EB45DA-9A0D-DC49-8E02-F30A5DDC21C3}" type="slidenum">
               <a:rPr lang="en-US" smtClean="0"/>
-              <a:t>1</a:t>
+              <a:t>30</a:t>
             </a:fld>
             <a:endParaRPr lang="en-US"/>
           </a:p>
@@ -22462,7 +22799,7 @@
                   <a:srgbClr val="555960"/>
                 </a:solidFill>
               </a:rPr>
-              <a:t xml:space="preserve"> where meaning is consequential.</a:t>
+              <a:t> where meaning is consequential.</a:t>
             </a:r>
           </a:p>
           <a:p>
@@ -22486,7 +22823,7 @@
                   <a:srgbClr val="555960"/>
                 </a:solidFill>
               </a:rPr>
-              <a:t xml:space="preserve"> where it is not.</a:t>
+              <a:t> where it is not.</a:t>
             </a:r>
           </a:p>
         </p:txBody>
@@ -22597,7 +22934,7 @@
           <a:p>
             <a:fld id="{B7EB45DA-9A0D-DC49-8E02-F30A5DDC21C3}" type="slidenum">
               <a:rPr lang="en-US" smtClean="0"/>
-              <a:t>1</a:t>
+              <a:t>31</a:t>
             </a:fld>
             <a:endParaRPr lang="en-US"/>
           </a:p>
@@ -23216,7 +23553,7 @@
             </a:r>
             <a:r>
               <a:rPr lang="en-US" dirty="0"/>
-              <a:t xml:space="preserve"> what must I preserve to answer the engineering question?</a:t>
+              <a:t> what must I preserve to answer the engineering question?</a:t>
             </a:r>
           </a:p>
           <a:p>
@@ -23226,7 +23563,7 @@
             </a:r>
             <a:r>
               <a:rPr lang="en-US" dirty="0"/>
-              <a:t xml:space="preserve"> why am I carrying each distinction that remains?</a:t>
+              <a:t> why am I carrying each distinction that remains?</a:t>
             </a:r>
           </a:p>
         </p:txBody>
@@ -23272,7 +23609,7 @@
           <a:p>
             <a:fld id="{B7EB45DA-9A0D-DC49-8E02-F30A5DDC21C3}" type="slidenum">
               <a:rPr lang="en-US" smtClean="0"/>
-              <a:t>1</a:t>
+              <a:t>32</a:t>
             </a:fld>
             <a:endParaRPr lang="en-US"/>
           </a:p>
@@ -23401,7 +23738,7 @@
                   <a:srgbClr val="5C4826"/>
                 </a:solidFill>
               </a:rPr>
-              <a:t xml:space="preserve">Tomorrow: </a:t>
+              <a:t>Tomorrow: </a:t>
             </a:r>
             <a:r>
               <a:rPr lang="en-US" sz="1800" b="0" i="1" dirty="0">
@@ -23480,7 +23817,7 @@
           <a:p>
             <a:fld id="{B7EB45DA-9A0D-DC49-8E02-F30A5DDC21C3}" type="slidenum">
               <a:rPr lang="en-US" smtClean="0"/>
-              <a:t>1</a:t>
+              <a:t>4</a:t>
             </a:fld>
             <a:endParaRPr lang="en-US"/>
           </a:p>
@@ -23509,6 +23846,13 @@
             </a:solidFill>
           </a:ln>
         </p:spPr>
+        <p:txBody>
+          <a:bodyPr/>
+          <a:lstStyle/>
+          <a:p>
+            <a:endParaRPr lang="en-US"/>
+          </a:p>
+        </p:txBody>
       </p:sp>
       <p:sp>
         <p:nvSpPr>
@@ -23570,6 +23914,13 @@
             </a:solidFill>
           </a:ln>
         </p:spPr>
+        <p:txBody>
+          <a:bodyPr/>
+          <a:lstStyle/>
+          <a:p>
+            <a:endParaRPr lang="en-US"/>
+          </a:p>
+        </p:txBody>
       </p:sp>
       <p:sp>
         <p:nvSpPr>
@@ -23594,6 +23945,13 @@
             </a:solidFill>
           </a:ln>
         </p:spPr>
+        <p:txBody>
+          <a:bodyPr/>
+          <a:lstStyle/>
+          <a:p>
+            <a:endParaRPr lang="en-US"/>
+          </a:p>
+        </p:txBody>
       </p:sp>
       <p:sp>
         <p:nvSpPr>
@@ -23618,6 +23976,13 @@
             </a:solidFill>
           </a:ln>
         </p:spPr>
+        <p:txBody>
+          <a:bodyPr/>
+          <a:lstStyle/>
+          <a:p>
+            <a:endParaRPr lang="en-US"/>
+          </a:p>
+        </p:txBody>
       </p:sp>
       <p:sp>
         <p:nvSpPr>
@@ -23642,6 +24007,13 @@
             </a:solidFill>
           </a:ln>
         </p:spPr>
+        <p:txBody>
+          <a:bodyPr/>
+          <a:lstStyle/>
+          <a:p>
+            <a:endParaRPr lang="en-US"/>
+          </a:p>
+        </p:txBody>
       </p:sp>
       <p:sp>
         <p:nvSpPr>
@@ -23666,6 +24038,13 @@
             </a:solidFill>
           </a:ln>
         </p:spPr>
+        <p:txBody>
+          <a:bodyPr/>
+          <a:lstStyle/>
+          <a:p>
+            <a:endParaRPr lang="en-US"/>
+          </a:p>
+        </p:txBody>
       </p:sp>
       <p:sp>
         <p:nvSpPr>
@@ -23690,6 +24069,13 @@
             </a:solidFill>
           </a:ln>
         </p:spPr>
+        <p:txBody>
+          <a:bodyPr/>
+          <a:lstStyle/>
+          <a:p>
+            <a:endParaRPr lang="en-US"/>
+          </a:p>
+        </p:txBody>
       </p:sp>
       <p:sp>
         <p:nvSpPr>
@@ -23712,6 +24098,13 @@
             <a:noFill/>
           </a:ln>
         </p:spPr>
+        <p:txBody>
+          <a:bodyPr/>
+          <a:lstStyle/>
+          <a:p>
+            <a:endParaRPr lang="en-US"/>
+          </a:p>
+        </p:txBody>
       </p:sp>
       <p:sp>
         <p:nvSpPr>
@@ -23734,6 +24127,13 @@
             <a:noFill/>
           </a:ln>
         </p:spPr>
+        <p:txBody>
+          <a:bodyPr/>
+          <a:lstStyle/>
+          <a:p>
+            <a:endParaRPr lang="en-US"/>
+          </a:p>
+        </p:txBody>
       </p:sp>
       <p:sp>
         <p:nvSpPr>
@@ -23756,6 +24156,13 @@
             <a:noFill/>
           </a:ln>
         </p:spPr>
+        <p:txBody>
+          <a:bodyPr/>
+          <a:lstStyle/>
+          <a:p>
+            <a:endParaRPr lang="en-US"/>
+          </a:p>
+        </p:txBody>
       </p:sp>
       <p:sp>
         <p:nvSpPr>
@@ -23780,6 +24187,13 @@
             </a:solidFill>
           </a:ln>
         </p:spPr>
+        <p:txBody>
+          <a:bodyPr/>
+          <a:lstStyle/>
+          <a:p>
+            <a:endParaRPr lang="en-US"/>
+          </a:p>
+        </p:txBody>
       </p:sp>
       <p:sp>
         <p:nvSpPr>
@@ -23804,6 +24218,13 @@
             </a:solidFill>
           </a:ln>
         </p:spPr>
+        <p:txBody>
+          <a:bodyPr/>
+          <a:lstStyle/>
+          <a:p>
+            <a:endParaRPr lang="en-US"/>
+          </a:p>
+        </p:txBody>
       </p:sp>
       <p:sp>
         <p:nvSpPr>
@@ -23828,6 +24249,13 @@
             </a:solidFill>
           </a:ln>
         </p:spPr>
+        <p:txBody>
+          <a:bodyPr/>
+          <a:lstStyle/>
+          <a:p>
+            <a:endParaRPr lang="en-US"/>
+          </a:p>
+        </p:txBody>
       </p:sp>
       <p:sp>
         <p:nvSpPr>
@@ -24252,6 +24680,13 @@
             </a:solidFill>
           </a:ln>
         </p:spPr>
+        <p:txBody>
+          <a:bodyPr/>
+          <a:lstStyle/>
+          <a:p>
+            <a:endParaRPr lang="en-US"/>
+          </a:p>
+        </p:txBody>
       </p:sp>
       <p:sp>
         <p:nvSpPr>
@@ -24315,6 +24750,13 @@
             </a:solidFill>
           </a:ln>
         </p:spPr>
+        <p:txBody>
+          <a:bodyPr/>
+          <a:lstStyle/>
+          <a:p>
+            <a:endParaRPr lang="en-US"/>
+          </a:p>
+        </p:txBody>
       </p:sp>
       <p:sp>
         <p:nvSpPr>
@@ -24378,6 +24820,13 @@
             </a:solidFill>
           </a:ln>
         </p:spPr>
+        <p:txBody>
+          <a:bodyPr/>
+          <a:lstStyle/>
+          <a:p>
+            <a:endParaRPr lang="en-US"/>
+          </a:p>
+        </p:txBody>
       </p:sp>
       <p:sp>
         <p:nvSpPr>
@@ -24402,6 +24851,13 @@
             </a:solidFill>
           </a:ln>
         </p:spPr>
+        <p:txBody>
+          <a:bodyPr/>
+          <a:lstStyle/>
+          <a:p>
+            <a:endParaRPr lang="en-US"/>
+          </a:p>
+        </p:txBody>
       </p:sp>
       <p:sp>
         <p:nvSpPr>
@@ -24426,6 +24882,13 @@
             </a:solidFill>
           </a:ln>
         </p:spPr>
+        <p:txBody>
+          <a:bodyPr/>
+          <a:lstStyle/>
+          <a:p>
+            <a:endParaRPr lang="en-US"/>
+          </a:p>
+        </p:txBody>
       </p:sp>
       <p:sp>
         <p:nvSpPr>
@@ -24450,6 +24913,13 @@
             </a:solidFill>
           </a:ln>
         </p:spPr>
+        <p:txBody>
+          <a:bodyPr/>
+          <a:lstStyle/>
+          <a:p>
+            <a:endParaRPr lang="en-US"/>
+          </a:p>
+        </p:txBody>
       </p:sp>
       <p:sp>
         <p:nvSpPr>
@@ -24474,6 +24944,13 @@
             </a:solidFill>
           </a:ln>
         </p:spPr>
+        <p:txBody>
+          <a:bodyPr/>
+          <a:lstStyle/>
+          <a:p>
+            <a:endParaRPr lang="en-US"/>
+          </a:p>
+        </p:txBody>
       </p:sp>
       <p:cxnSp>
         <p:nvCxnSpPr>
@@ -24586,6 +25063,13 @@
             </a:solidFill>
           </a:ln>
         </p:spPr>
+        <p:txBody>
+          <a:bodyPr/>
+          <a:lstStyle/>
+          <a:p>
+            <a:endParaRPr lang="en-US"/>
+          </a:p>
+        </p:txBody>
       </p:sp>
       <p:sp>
         <p:nvSpPr>
@@ -24610,6 +25094,13 @@
             </a:solidFill>
           </a:ln>
         </p:spPr>
+        <p:txBody>
+          <a:bodyPr/>
+          <a:lstStyle/>
+          <a:p>
+            <a:endParaRPr lang="en-US"/>
+          </a:p>
+        </p:txBody>
       </p:sp>
       <p:sp>
         <p:nvSpPr>
@@ -24634,6 +25125,13 @@
             </a:solidFill>
           </a:ln>
         </p:spPr>
+        <p:txBody>
+          <a:bodyPr/>
+          <a:lstStyle/>
+          <a:p>
+            <a:endParaRPr lang="en-US"/>
+          </a:p>
+        </p:txBody>
       </p:sp>
       <p:cxnSp>
         <p:nvCxnSpPr>
@@ -24787,6 +25285,13 @@
             </a:solidFill>
           </a:ln>
         </p:spPr>
+        <p:txBody>
+          <a:bodyPr/>
+          <a:lstStyle/>
+          <a:p>
+            <a:endParaRPr lang="en-US"/>
+          </a:p>
+        </p:txBody>
       </p:sp>
       <p:sp>
         <p:nvSpPr>
@@ -24811,6 +25316,13 @@
             </a:solidFill>
           </a:ln>
         </p:spPr>
+        <p:txBody>
+          <a:bodyPr/>
+          <a:lstStyle/>
+          <a:p>
+            <a:endParaRPr lang="en-US"/>
+          </a:p>
+        </p:txBody>
       </p:sp>
       <p:sp>
         <p:nvSpPr>
@@ -24835,6 +25347,13 @@
             </a:solidFill>
           </a:ln>
         </p:spPr>
+        <p:txBody>
+          <a:bodyPr/>
+          <a:lstStyle/>
+          <a:p>
+            <a:endParaRPr lang="en-US"/>
+          </a:p>
+        </p:txBody>
       </p:sp>
       <p:cxnSp>
         <p:nvCxnSpPr>
@@ -25074,7 +25593,7 @@
           <a:p>
             <a:fld id="{B7EB45DA-9A0D-DC49-8E02-F30A5DDC21C3}" type="slidenum">
               <a:rPr lang="en-US" smtClean="0"/>
-              <a:t>1</a:t>
+              <a:t>5</a:t>
             </a:fld>
             <a:endParaRPr lang="en-US"/>
           </a:p>
@@ -25213,6 +25732,13 @@
             <a:noFill/>
           </a:ln>
         </p:spPr>
+        <p:txBody>
+          <a:bodyPr/>
+          <a:lstStyle/>
+          <a:p>
+            <a:endParaRPr lang="en-US"/>
+          </a:p>
+        </p:txBody>
       </p:sp>
       <p:sp>
         <p:nvSpPr>
@@ -25235,6 +25761,13 @@
             <a:noFill/>
           </a:ln>
         </p:spPr>
+        <p:txBody>
+          <a:bodyPr/>
+          <a:lstStyle/>
+          <a:p>
+            <a:endParaRPr lang="en-US"/>
+          </a:p>
+        </p:txBody>
       </p:sp>
       <p:sp>
         <p:nvSpPr>
@@ -25257,6 +25790,13 @@
             <a:noFill/>
           </a:ln>
         </p:spPr>
+        <p:txBody>
+          <a:bodyPr/>
+          <a:lstStyle/>
+          <a:p>
+            <a:endParaRPr lang="en-US"/>
+          </a:p>
+        </p:txBody>
       </p:sp>
       <p:sp>
         <p:nvSpPr>
@@ -25279,6 +25819,13 @@
             <a:noFill/>
           </a:ln>
         </p:spPr>
+        <p:txBody>
+          <a:bodyPr/>
+          <a:lstStyle/>
+          <a:p>
+            <a:endParaRPr lang="en-US"/>
+          </a:p>
+        </p:txBody>
       </p:sp>
       <p:sp>
         <p:nvSpPr>
@@ -25301,6 +25848,13 @@
             <a:noFill/>
           </a:ln>
         </p:spPr>
+        <p:txBody>
+          <a:bodyPr/>
+          <a:lstStyle/>
+          <a:p>
+            <a:endParaRPr lang="en-US"/>
+          </a:p>
+        </p:txBody>
       </p:sp>
       <p:sp>
         <p:nvSpPr>
@@ -25323,6 +25877,13 @@
             <a:noFill/>
           </a:ln>
         </p:spPr>
+        <p:txBody>
+          <a:bodyPr/>
+          <a:lstStyle/>
+          <a:p>
+            <a:endParaRPr lang="en-US"/>
+          </a:p>
+        </p:txBody>
       </p:sp>
       <p:sp>
         <p:nvSpPr>
@@ -25345,6 +25906,13 @@
             <a:noFill/>
           </a:ln>
         </p:spPr>
+        <p:txBody>
+          <a:bodyPr/>
+          <a:lstStyle/>
+          <a:p>
+            <a:endParaRPr lang="en-US"/>
+          </a:p>
+        </p:txBody>
       </p:sp>
       <p:sp>
         <p:nvSpPr>
@@ -25367,6 +25935,13 @@
             <a:noFill/>
           </a:ln>
         </p:spPr>
+        <p:txBody>
+          <a:bodyPr/>
+          <a:lstStyle/>
+          <a:p>
+            <a:endParaRPr lang="en-US"/>
+          </a:p>
+        </p:txBody>
       </p:sp>
       <p:sp>
         <p:nvSpPr>
@@ -25389,6 +25964,13 @@
             <a:noFill/>
           </a:ln>
         </p:spPr>
+        <p:txBody>
+          <a:bodyPr/>
+          <a:lstStyle/>
+          <a:p>
+            <a:endParaRPr lang="en-US"/>
+          </a:p>
+        </p:txBody>
       </p:sp>
       <p:sp>
         <p:nvSpPr>
@@ -25411,6 +25993,13 @@
             <a:noFill/>
           </a:ln>
         </p:spPr>
+        <p:txBody>
+          <a:bodyPr/>
+          <a:lstStyle/>
+          <a:p>
+            <a:endParaRPr lang="en-US"/>
+          </a:p>
+        </p:txBody>
       </p:sp>
       <p:sp>
         <p:nvSpPr>
@@ -25433,6 +26022,13 @@
             <a:noFill/>
           </a:ln>
         </p:spPr>
+        <p:txBody>
+          <a:bodyPr/>
+          <a:lstStyle/>
+          <a:p>
+            <a:endParaRPr lang="en-US"/>
+          </a:p>
+        </p:txBody>
       </p:sp>
       <p:sp>
         <p:nvSpPr>
@@ -25455,6 +26051,13 @@
             <a:noFill/>
           </a:ln>
         </p:spPr>
+        <p:txBody>
+          <a:bodyPr/>
+          <a:lstStyle/>
+          <a:p>
+            <a:endParaRPr lang="en-US"/>
+          </a:p>
+        </p:txBody>
       </p:sp>
       <p:cxnSp>
         <p:nvCxnSpPr>
@@ -25499,6 +26102,13 @@
             <a:noFill/>
           </a:ln>
         </p:spPr>
+        <p:txBody>
+          <a:bodyPr/>
+          <a:lstStyle/>
+          <a:p>
+            <a:endParaRPr lang="en-US"/>
+          </a:p>
+        </p:txBody>
       </p:sp>
       <p:sp>
         <p:nvSpPr>
@@ -25521,6 +26131,13 @@
             <a:noFill/>
           </a:ln>
         </p:spPr>
+        <p:txBody>
+          <a:bodyPr/>
+          <a:lstStyle/>
+          <a:p>
+            <a:endParaRPr lang="en-US"/>
+          </a:p>
+        </p:txBody>
       </p:sp>
       <p:sp>
         <p:nvSpPr>
@@ -25543,6 +26160,13 @@
             <a:noFill/>
           </a:ln>
         </p:spPr>
+        <p:txBody>
+          <a:bodyPr/>
+          <a:lstStyle/>
+          <a:p>
+            <a:endParaRPr lang="en-US"/>
+          </a:p>
+        </p:txBody>
       </p:sp>
       <p:sp>
         <p:nvSpPr>
@@ -25565,6 +26189,13 @@
             <a:noFill/>
           </a:ln>
         </p:spPr>
+        <p:txBody>
+          <a:bodyPr/>
+          <a:lstStyle/>
+          <a:p>
+            <a:endParaRPr lang="en-US"/>
+          </a:p>
+        </p:txBody>
       </p:sp>
       <p:sp>
         <p:nvSpPr>
@@ -25758,7 +26389,7 @@
           <a:p>
             <a:fld id="{B7EB45DA-9A0D-DC49-8E02-F30A5DDC21C3}" type="slidenum">
               <a:rPr lang="en-US" smtClean="0"/>
-              <a:t>1</a:t>
+              <a:t>6</a:t>
             </a:fld>
             <a:endParaRPr lang="en-US"/>
           </a:p>
@@ -26127,7 +26758,7 @@
           <a:p>
             <a:fld id="{B7EB45DA-9A0D-DC49-8E02-F30A5DDC21C3}" type="slidenum">
               <a:rPr lang="en-US" smtClean="0"/>
-              <a:t>1</a:t>
+              <a:t>7</a:t>
             </a:fld>
             <a:endParaRPr lang="en-US"/>
           </a:p>
@@ -26324,6 +26955,13 @@
             <a:noFill/>
           </a:ln>
         </p:spPr>
+        <p:txBody>
+          <a:bodyPr/>
+          <a:lstStyle/>
+          <a:p>
+            <a:endParaRPr lang="en-US"/>
+          </a:p>
+        </p:txBody>
       </p:sp>
       <p:sp>
         <p:nvSpPr>
@@ -26346,6 +26984,13 @@
             <a:noFill/>
           </a:ln>
         </p:spPr>
+        <p:txBody>
+          <a:bodyPr/>
+          <a:lstStyle/>
+          <a:p>
+            <a:endParaRPr lang="en-US"/>
+          </a:p>
+        </p:txBody>
       </p:sp>
       <p:sp>
         <p:nvSpPr>
@@ -26368,6 +27013,13 @@
             <a:noFill/>
           </a:ln>
         </p:spPr>
+        <p:txBody>
+          <a:bodyPr/>
+          <a:lstStyle/>
+          <a:p>
+            <a:endParaRPr lang="en-US"/>
+          </a:p>
+        </p:txBody>
       </p:sp>
       <p:cxnSp>
         <p:nvCxnSpPr>
@@ -28531,7 +29183,7 @@
           <a:p>
             <a:fld id="{B7EB45DA-9A0D-DC49-8E02-F30A5DDC21C3}" type="slidenum">
               <a:rPr lang="en-US" smtClean="0"/>
-              <a:t>1</a:t>
+              <a:t>8</a:t>
             </a:fld>
             <a:endParaRPr lang="en-US"/>
           </a:p>
@@ -29782,7 +30434,7 @@
           <a:p>
             <a:fld id="{B7EB45DA-9A0D-DC49-8E02-F30A5DDC21C3}" type="slidenum">
               <a:rPr lang="en-US" smtClean="0"/>
-              <a:t>1</a:t>
+              <a:t>9</a:t>
             </a:fld>
             <a:endParaRPr lang="en-US"/>
           </a:p>

--- a/course/lectures/act-2-delegation-and-control/02-modeling/2-2-Modeling-1-Purposeful-Reduction.pptx
+++ b/course/lectures/act-2-delegation-and-control/02-modeling/2-2-Modeling-1-Purposeful-Reduction.pptx
@@ -5773,33 +5773,73 @@
       </p:grpSpPr>
       <p:sp>
         <p:nvSpPr>
-          <p:cNvPr id="2" name="Title 2"/>
-          <p:cNvSpPr>
-            <a:spLocks noGrp="1"/>
+          <p:cNvPr id="2" name="Title 2">
+            <a:extLst>
+              <a:ext uri="{FF2B5EF4-FFF2-40B4-BE49-F238E27FC236}">
+                <a16:creationId xmlns:a16="http://schemas.microsoft.com/office/drawing/2014/main" id="{DD7291C3-5AE9-477A-3F39-34A06A62D99C}"/>
+              </a:ext>
+            </a:extLst>
+          </p:cNvPr>
+          <p:cNvSpPr txBox="1">
+            <a:spLocks/>
           </p:cNvSpPr>
-          <p:nvPr>
-            <p:ph type="ctrTitle"/>
-          </p:nvPr>
-        </p:nvSpPr>
-        <p:spPr>
-          <a:xfrm>
-            <a:off x="439339" y="565150"/>
-            <a:ext cx="8265319" cy="700000"/>
-          </a:xfrm>
-        </p:spPr>
-        <p:txBody>
-          <a:bodyPr>
+          <p:nvPr/>
+        </p:nvSpPr>
+        <p:spPr bwMode="black">
+          <a:xfrm>
+            <a:off x="439339" y="565149"/>
+            <a:ext cx="8265319" cy="1195411"/>
+          </a:xfrm>
+          <a:prstGeom prst="rect">
+            <a:avLst/>
+          </a:prstGeom>
+          <a:solidFill>
+            <a:srgbClr val="FFFFFF"/>
+          </a:solidFill>
+          <a:ln w="31750" cap="sq">
+            <a:noFill/>
+            <a:miter lim="800000"/>
+          </a:ln>
+        </p:spPr>
+        <p:txBody>
+          <a:bodyPr vert="horz" lIns="182880" tIns="182880" rIns="182880" bIns="182880" rtlCol="0" anchor="ctr">
             <a:normAutofit/>
           </a:bodyPr>
-          <a:lstStyle/>
-          <a:p>
-            <a:pPr>
-              <a:defRPr b="0"/>
-            </a:pPr>
-            <a:r>
-              <a:rPr lang="en-US" sz="2000" b="0" i="1" dirty="0"/>
-              <a:t>ECE 30861/46100: Software Engineering</a:t>
-            </a:r>
+          <a:lstStyle>
+            <a:lvl1pPr algn="ctr" defTabSz="914400" rtl="0" eaLnBrk="1" latinLnBrk="0" hangingPunct="1">
+              <a:lnSpc>
+                <a:spcPct val="90000"/>
+              </a:lnSpc>
+              <a:spcBef>
+                <a:spcPct val="0"/>
+              </a:spcBef>
+              <a:buNone/>
+              <a:defRPr sz="3600" kern="1200" cap="none" spc="200" baseline="0">
+                <a:solidFill>
+                  <a:srgbClr val="000000"/>
+                </a:solidFill>
+                <a:latin typeface="Calibri" panose="020F0502020204030204" pitchFamily="34" charset="0"/>
+                <a:ea typeface="+mj-ea"/>
+                <a:cs typeface="Calibri" panose="020F0502020204030204" pitchFamily="34" charset="0"/>
+              </a:defRPr>
+            </a:lvl1pPr>
+          </a:lstStyle>
+          <a:p>
+            <a:r>
+              <a:rPr lang="en-US" sz="2000" i="1" dirty="0"/>
+              <a:t>Software Engineering</a:t>
+            </a:r>
+            <a:br>
+              <a:rPr lang="en-US" sz="2000" i="1" dirty="0"/>
+            </a:br>
+            <a:br>
+              <a:rPr lang="en-US" sz="2000" i="1" dirty="0"/>
+            </a:br>
+            <a:r>
+              <a:rPr lang="en-US" sz="1600" i="1" dirty="0"/>
+              <a:t>ECE 30861 / CSCI 45000</a:t>
+            </a:r>
+            <a:endParaRPr lang="en-US" sz="2000" i="1" dirty="0"/>
           </a:p>
         </p:txBody>
       </p:sp>

--- a/course/lectures/act-2-delegation-and-control/02-modeling/2-2-Modeling-1-Purposeful-Reduction.pptx
+++ b/course/lectures/act-2-delegation-and-control/02-modeling/2-2-Modeling-1-Purposeful-Reduction.pptx
@@ -2484,49 +2484,32 @@
       </p:sp>
       <p:pic>
         <p:nvPicPr>
-          <p:cNvPr id="1026" name="Picture 2" descr="Electrical and Computer Engineering Black and Gold Co-Brand Logo">
+          <p:cNvPr id="1026" name="Purdue CoBrand">
             <a:extLst>
               <a:ext uri="{FF2B5EF4-FFF2-40B4-BE49-F238E27FC236}">
-                <a16:creationId xmlns:a16="http://schemas.microsoft.com/office/drawing/2014/main" id="{DA2A365A-4E3B-2A48-8812-990B2A2EE92D}"/>
+                <a16:creationId xmlns:a16="http://schemas.microsoft.com/office/drawing/2014/main" id="{BCBD89D8-43BD-5D41-99C6-91B0B6A51904}"/>
               </a:ext>
             </a:extLst>
           </p:cNvPr>
           <p:cNvPicPr>
-            <a:picLocks noChangeAspect="1" noChangeArrowheads="1"/>
+            <a:picLocks noChangeAspect="1"/>
           </p:cNvPicPr>
           <p:nvPr userDrawn="1"/>
         </p:nvPicPr>
         <p:blipFill>
-          <a:blip r:embed="rId2">
-            <a:extLst>
-              <a:ext uri="{28A0092B-C50C-407E-A947-70E740481C1C}">
-                <a14:useLocalDpi xmlns:a14="http://schemas.microsoft.com/office/drawing/2010/main" val="0"/>
-              </a:ext>
-            </a:extLst>
-          </a:blip>
-          <a:srcRect/>
+          <a:blip r:embed="rId2"/>
           <a:stretch>
             <a:fillRect/>
           </a:stretch>
         </p:blipFill>
-        <p:spPr bwMode="auto">
-          <a:xfrm>
-            <a:off x="3876158" y="5721845"/>
-            <a:ext cx="1264684" cy="999630"/>
-          </a:xfrm>
-          <a:prstGeom prst="rect">
-            <a:avLst/>
-          </a:prstGeom>
-          <a:noFill/>
-          <a:extLst>
-            <a:ext uri="{909E8E84-426E-40DD-AFC4-6F175D3DCCD1}">
-              <a14:hiddenFill xmlns:a14="http://schemas.microsoft.com/office/drawing/2010/main">
-                <a:solidFill>
-                  <a:srgbClr val="FFFFFF"/>
-                </a:solidFill>
-              </a14:hiddenFill>
-            </a:ext>
-          </a:extLst>
+        <p:spPr>
+          <a:xfrm>
+            <a:off x="2097131" y="5715964"/>
+            <a:ext cx="5091026" cy="542584"/>
+          </a:xfrm>
+          <a:prstGeom prst="rect">
+            <a:avLst/>
+          </a:prstGeom>
         </p:spPr>
       </p:pic>
     </p:spTree>

--- a/course/lectures/act-2-delegation-and-control/02-modeling/2-2-Modeling-1-Purposeful-Reduction.pptx
+++ b/course/lectures/act-2-delegation-and-control/02-modeling/2-2-Modeling-1-Purposeful-Reduction.pptx
@@ -5970,7 +5970,7 @@
         </p:nvSpPr>
         <p:spPr>
           <a:xfrm>
-            <a:off x="2880360" y="4114800"/>
+            <a:off x="2331720" y="4050792"/>
             <a:ext cx="182880" cy="182880"/>
           </a:xfrm>
           <a:prstGeom prst="rect">
@@ -5999,7 +5999,7 @@
         </p:nvSpPr>
         <p:spPr>
           <a:xfrm>
-            <a:off x="3108960" y="4343400"/>
+            <a:off x="2560320" y="4279392"/>
             <a:ext cx="137160" cy="137160"/>
           </a:xfrm>
           <a:prstGeom prst="ellipse">
@@ -6028,8 +6028,8 @@
         </p:nvSpPr>
         <p:spPr>
           <a:xfrm>
-            <a:off x="3017520" y="4617720"/>
-            <a:ext cx="160020" cy="114300"/>
+            <a:off x="2434590" y="4576572"/>
+            <a:ext cx="228600" cy="68580"/>
           </a:xfrm>
           <a:prstGeom prst="rect">
             <a:avLst/>
@@ -6057,7 +6057,7 @@
         </p:nvSpPr>
         <p:spPr>
           <a:xfrm>
-            <a:off x="3291840" y="4087368"/>
+            <a:off x="2743200" y="4023360"/>
             <a:ext cx="205740" cy="137160"/>
           </a:xfrm>
           <a:prstGeom prst="rect">
@@ -6086,7 +6086,7 @@
         </p:nvSpPr>
         <p:spPr>
           <a:xfrm>
-            <a:off x="3383280" y="4480560"/>
+            <a:off x="2834640" y="4416552"/>
             <a:ext cx="182880" cy="182880"/>
           </a:xfrm>
           <a:prstGeom prst="ellipse">
@@ -6115,7 +6115,7 @@
         </p:nvSpPr>
         <p:spPr>
           <a:xfrm>
-            <a:off x="3566160" y="4114800"/>
+            <a:off x="3017520" y="4050792"/>
             <a:ext cx="137160" cy="205740"/>
           </a:xfrm>
           <a:prstGeom prst="rect">
@@ -6144,7 +6144,7 @@
         </p:nvSpPr>
         <p:spPr>
           <a:xfrm>
-            <a:off x="3703320" y="4526280"/>
+            <a:off x="3154680" y="4462272"/>
             <a:ext cx="114300" cy="114300"/>
           </a:xfrm>
           <a:prstGeom prst="ellipse">
@@ -6173,7 +6173,7 @@
         </p:nvSpPr>
         <p:spPr>
           <a:xfrm>
-            <a:off x="3794760" y="4297680"/>
+            <a:off x="3246120" y="4233672"/>
             <a:ext cx="160020" cy="160020"/>
           </a:xfrm>
           <a:prstGeom prst="rect">
@@ -6202,7 +6202,7 @@
         </p:nvSpPr>
         <p:spPr>
           <a:xfrm>
-            <a:off x="3931920" y="4087368"/>
+            <a:off x="3383280" y="4023360"/>
             <a:ext cx="137160" cy="137160"/>
           </a:xfrm>
           <a:prstGeom prst="rect">
@@ -6231,7 +6231,7 @@
         </p:nvSpPr>
         <p:spPr>
           <a:xfrm>
-            <a:off x="4023360" y="4526280"/>
+            <a:off x="3474720" y="4462272"/>
             <a:ext cx="137160" cy="137160"/>
           </a:xfrm>
           <a:prstGeom prst="ellipse">
@@ -6260,7 +6260,7 @@
         </p:nvSpPr>
         <p:spPr>
           <a:xfrm>
-            <a:off x="4160520" y="4343400"/>
+            <a:off x="3611880" y="4279392"/>
             <a:ext cx="114300" cy="114300"/>
           </a:xfrm>
           <a:prstGeom prst="rect">
@@ -6289,7 +6289,7 @@
         </p:nvSpPr>
         <p:spPr>
           <a:xfrm>
-            <a:off x="4297680" y="4160520"/>
+            <a:off x="3749040" y="4096512"/>
             <a:ext cx="91440" cy="91440"/>
           </a:xfrm>
           <a:prstGeom prst="ellipse">
@@ -6318,7 +6318,7 @@
         </p:nvCxnSpPr>
         <p:spPr>
           <a:xfrm>
-            <a:off x="4754880" y="4407408"/>
+            <a:off x="4097655" y="4345686"/>
             <a:ext cx="548640" cy="0"/>
           </a:xfrm>
           <a:prstGeom prst="straightConnector1">
@@ -6334,20 +6334,20 @@
       </p:cxnSp>
       <p:sp>
         <p:nvSpPr>
-          <p:cNvPr id="213" name="MdlM"/>
-          <p:cNvSpPr/>
-          <p:nvPr/>
-        </p:nvSpPr>
-        <p:spPr>
-          <a:xfrm>
-            <a:off x="5440680" y="4224528"/>
-            <a:ext cx="731520" cy="365760"/>
-          </a:xfrm>
-          <a:prstGeom prst="rect">
-            <a:avLst/>
-          </a:prstGeom>
-          <a:solidFill>
-            <a:srgbClr val="555960"/>
+          <p:cNvPr id="220" name="MS0"/>
+          <p:cNvSpPr/>
+          <p:nvPr/>
+        </p:nvSpPr>
+        <p:spPr>
+          <a:xfrm>
+            <a:off x="4903470" y="4254246"/>
+            <a:ext cx="182880" cy="182880"/>
+          </a:xfrm>
+          <a:prstGeom prst="rect">
+            <a:avLst/>
+          </a:prstGeom>
+          <a:solidFill>
+            <a:srgbClr val="C9B991"/>
           </a:solidFill>
           <a:ln>
             <a:noFill/>
@@ -6363,20 +6363,20 @@
       </p:sp>
       <p:sp>
         <p:nvSpPr>
-          <p:cNvPr id="214" name="KM0"/>
-          <p:cNvSpPr/>
-          <p:nvPr/>
-        </p:nvSpPr>
-        <p:spPr>
-          <a:xfrm>
-            <a:off x="5577840" y="4315968"/>
-            <a:ext cx="457200" cy="27432"/>
-          </a:xfrm>
-          <a:prstGeom prst="rect">
-            <a:avLst/>
-          </a:prstGeom>
-          <a:solidFill>
-            <a:srgbClr val="FFFFFF"/>
+          <p:cNvPr id="221" name="MS1"/>
+          <p:cNvSpPr/>
+          <p:nvPr/>
+        </p:nvSpPr>
+        <p:spPr>
+          <a:xfrm>
+            <a:off x="5177790" y="4254246"/>
+            <a:ext cx="182880" cy="182880"/>
+          </a:xfrm>
+          <a:prstGeom prst="ellipse">
+            <a:avLst/>
+          </a:prstGeom>
+          <a:solidFill>
+            <a:srgbClr val="C9B991"/>
           </a:solidFill>
           <a:ln>
             <a:noFill/>
@@ -6392,20 +6392,20 @@
       </p:sp>
       <p:sp>
         <p:nvSpPr>
-          <p:cNvPr id="215" name="KM1"/>
-          <p:cNvSpPr/>
-          <p:nvPr/>
-        </p:nvSpPr>
-        <p:spPr>
-          <a:xfrm>
-            <a:off x="5577840" y="4389120"/>
-            <a:ext cx="457200" cy="27432"/>
-          </a:xfrm>
-          <a:prstGeom prst="rect">
-            <a:avLst/>
-          </a:prstGeom>
-          <a:solidFill>
-            <a:srgbClr val="FFFFFF"/>
+          <p:cNvPr id="222" name="MS2"/>
+          <p:cNvSpPr/>
+          <p:nvPr/>
+        </p:nvSpPr>
+        <p:spPr>
+          <a:xfrm>
+            <a:off x="5452110" y="4311396"/>
+            <a:ext cx="228600" cy="68580"/>
+          </a:xfrm>
+          <a:prstGeom prst="rect">
+            <a:avLst/>
+          </a:prstGeom>
+          <a:solidFill>
+            <a:srgbClr val="C9B991"/>
           </a:solidFill>
           <a:ln>
             <a:noFill/>
@@ -6419,32 +6419,192 @@
           </a:p>
         </p:txBody>
       </p:sp>
-      <p:sp>
-        <p:nvSpPr>
-          <p:cNvPr id="216" name="KM2"/>
-          <p:cNvSpPr/>
-          <p:nvPr/>
-        </p:nvSpPr>
-        <p:spPr>
-          <a:xfrm>
-            <a:off x="5577840" y="4462272"/>
-            <a:ext cx="457200" cy="27432"/>
-          </a:xfrm>
-          <a:prstGeom prst="rect">
-            <a:avLst/>
-          </a:prstGeom>
-          <a:solidFill>
-            <a:srgbClr val="FFFFFF"/>
-          </a:solidFill>
+      <p:cxnSp>
+        <p:nvCxnSpPr>
+          <p:cNvPr id="223" name="RAr2"/>
+          <p:cNvCxnSpPr/>
+          <p:nvPr/>
+        </p:nvCxnSpPr>
+        <p:spPr>
+          <a:xfrm>
+            <a:off x="5829840" y="4345686"/>
+            <a:ext cx="548640" cy="0"/>
+          </a:xfrm>
+          <a:prstGeom prst="straightConnector1">
+            <a:avLst/>
+          </a:prstGeom>
+          <a:ln w="28575">
+            <a:solidFill>
+              <a:srgbClr val="8E6F3E"/>
+            </a:solidFill>
+            <a:headEnd type="triangle" w="med" len="med"/>
+          </a:ln>
+        </p:spPr>
+      </p:cxnSp>
+      <p:sp>
+        <p:nvSpPr>
+          <p:cNvPr id="224" name="ReqIcon"/>
+          <p:cNvSpPr/>
+          <p:nvPr/>
+        </p:nvSpPr>
+        <p:spPr>
+          <a:xfrm>
+            <a:off x="6515640" y="4185666"/>
+            <a:ext cx="320040" cy="320040"/>
+          </a:xfrm>
+          <a:custGeom>
+            <a:avLst/>
+            <a:gdLst/>
+            <a:ahLst/>
+            <a:cxnLst/>
+            <a:rect l="0" t="0" r="320040" b="320040"/>
+            <a:pathLst>
+              <a:path w="320040" h="320040" fill="none">
+                <a:moveTo>
+                  <a:pt x="48006" y="176022"/>
+                </a:moveTo>
+                <a:lnTo>
+                  <a:pt x="128016" y="264033"/>
+                </a:lnTo>
+                <a:lnTo>
+                  <a:pt x="272034" y="64008"/>
+                </a:lnTo>
+              </a:path>
+            </a:pathLst>
+          </a:custGeom>
+          <a:noFill/>
+          <a:ln w="57150" cap="rnd">
+            <a:solidFill>
+              <a:srgbClr val="8E6F3E"/>
+            </a:solidFill>
+            <a:round/>
+          </a:ln>
+        </p:spPr>
+        <p:txBody>
+          <a:bodyPr/>
+          <a:lstStyle/>
+          <a:p>
+            <a:endParaRPr lang="en-US"/>
+          </a:p>
+        </p:txBody>
+      </p:sp>
+      <p:sp>
+        <p:nvSpPr>
+          <p:cNvPr id="225" name="LblTerritory"/>
+          <p:cNvSpPr txBox="1"/>
+          <p:nvPr/>
+        </p:nvSpPr>
+        <p:spPr>
+          <a:xfrm>
+            <a:off x="2400300" y="4699000"/>
+            <a:ext cx="1371600" cy="240000"/>
+          </a:xfrm>
+          <a:prstGeom prst="rect">
+            <a:avLst/>
+          </a:prstGeom>
+          <a:noFill/>
           <a:ln>
             <a:noFill/>
           </a:ln>
         </p:spPr>
         <p:txBody>
-          <a:bodyPr/>
-          <a:lstStyle/>
-          <a:p>
-            <a:endParaRPr lang="en-US"/>
+          <a:bodyPr wrap="square" lIns="0" tIns="0" rIns="0" bIns="0" anchor="t"/>
+          <a:lstStyle/>
+          <a:p>
+            <a:pPr algn="ctr">
+              <a:spcAft>
+                <a:spcPts val="0"/>
+              </a:spcAft>
+              <a:buNone/>
+            </a:pPr>
+            <a:r>
+              <a:rPr lang="en-US" sz="1400" b="1" dirty="0">
+                <a:solidFill>
+                  <a:srgbClr val="8E6F3E"/>
+                </a:solidFill>
+              </a:rPr>
+              <a:t>TERRITORY</a:t>
+            </a:r>
+          </a:p>
+        </p:txBody>
+      </p:sp>
+      <p:sp>
+        <p:nvSpPr>
+          <p:cNvPr id="226" name="LblModel"/>
+          <p:cNvSpPr txBox="1"/>
+          <p:nvPr/>
+        </p:nvSpPr>
+        <p:spPr>
+          <a:xfrm>
+            <a:off x="4606290" y="4699000"/>
+            <a:ext cx="1371600" cy="240000"/>
+          </a:xfrm>
+          <a:prstGeom prst="rect">
+            <a:avLst/>
+          </a:prstGeom>
+          <a:noFill/>
+          <a:ln>
+            <a:noFill/>
+          </a:ln>
+        </p:spPr>
+        <p:txBody>
+          <a:bodyPr wrap="square" lIns="0" tIns="0" rIns="0" bIns="0" anchor="t"/>
+          <a:lstStyle/>
+          <a:p>
+            <a:pPr algn="ctr">
+              <a:spcAft>
+                <a:spcPts val="0"/>
+              </a:spcAft>
+              <a:buNone/>
+            </a:pPr>
+            <a:r>
+              <a:rPr lang="en-US" sz="1400" b="1" dirty="0">
+                <a:solidFill>
+                  <a:srgbClr val="8E6F3E"/>
+                </a:solidFill>
+              </a:rPr>
+              <a:t>MODEL</a:t>
+            </a:r>
+          </a:p>
+        </p:txBody>
+      </p:sp>
+      <p:sp>
+        <p:nvSpPr>
+          <p:cNvPr id="227" name="LblObligation"/>
+          <p:cNvSpPr txBox="1"/>
+          <p:nvPr/>
+        </p:nvSpPr>
+        <p:spPr>
+          <a:xfrm>
+            <a:off x="5989860" y="4699000"/>
+            <a:ext cx="1371600" cy="240000"/>
+          </a:xfrm>
+          <a:prstGeom prst="rect">
+            <a:avLst/>
+          </a:prstGeom>
+          <a:noFill/>
+          <a:ln>
+            <a:noFill/>
+          </a:ln>
+        </p:spPr>
+        <p:txBody>
+          <a:bodyPr wrap="square" lIns="0" tIns="0" rIns="0" bIns="0" anchor="t"/>
+          <a:lstStyle/>
+          <a:p>
+            <a:pPr algn="ctr">
+              <a:spcAft>
+                <a:spcPts val="0"/>
+              </a:spcAft>
+              <a:buNone/>
+            </a:pPr>
+            <a:r>
+              <a:rPr lang="en-US" sz="1400" b="1" dirty="0">
+                <a:solidFill>
+                  <a:srgbClr val="8E6F3E"/>
+                </a:solidFill>
+              </a:rPr>
+              <a:t>OBLIGATION</a:t>
+            </a:r>
           </a:p>
         </p:txBody>
       </p:sp>

--- a/course/lectures/act-2-delegation-and-control/02-modeling/2-2-Modeling-1-Purposeful-Reduction.pptx
+++ b/course/lectures/act-2-delegation-and-control/02-modeling/2-2-Modeling-1-Purposeful-Reduction.pptx
@@ -5857,7 +5857,7 @@
         </p:nvSpPr>
         <p:spPr>
           <a:xfrm>
-            <a:off x="224028" y="1371600"/>
+            <a:off x="224028" y="1829140"/>
             <a:ext cx="8695944" cy="2148840"/>
           </a:xfrm>
           <a:prstGeom prst="rect">
@@ -5922,391 +5922,6 @@
               </a:rPr>
               <a:t>Prof. Steve France</a:t>
             </a:r>
-          </a:p>
-        </p:txBody>
-      </p:sp>
-      <p:sp>
-        <p:nvSpPr>
-          <p:cNvPr id="101" name="Label"/>
-          <p:cNvSpPr txBox="1"/>
-          <p:nvPr/>
-        </p:nvSpPr>
-        <p:spPr>
-          <a:xfrm>
-            <a:off x="224028" y="3639312"/>
-            <a:ext cx="8695944" cy="301752"/>
-          </a:xfrm>
-          <a:prstGeom prst="rect">
-            <a:avLst/>
-          </a:prstGeom>
-          <a:noFill/>
-          <a:ln>
-            <a:noFill/>
-          </a:ln>
-        </p:spPr>
-        <p:txBody>
-          <a:bodyPr wrap="square" lIns="0" tIns="0" rIns="0" bIns="0" anchor="t"/>
-          <a:lstStyle/>
-          <a:p>
-            <a:pPr algn="ctr">
-              <a:buNone/>
-            </a:pPr>
-            <a:r>
-              <a:rPr lang="en-US" sz="2000" b="1" i="0" dirty="0">
-                <a:solidFill>
-                  <a:srgbClr val="8E6F3E"/>
-                </a:solidFill>
-              </a:rPr>
-              <a:t>THE MOVE THIS LECTURE TEACHES</a:t>
-            </a:r>
-          </a:p>
-        </p:txBody>
-      </p:sp>
-      <p:sp>
-        <p:nvSpPr>
-          <p:cNvPr id="200" name="M0"/>
-          <p:cNvSpPr/>
-          <p:nvPr/>
-        </p:nvSpPr>
-        <p:spPr>
-          <a:xfrm>
-            <a:off x="2331720" y="4050792"/>
-            <a:ext cx="182880" cy="182880"/>
-          </a:xfrm>
-          <a:prstGeom prst="rect">
-            <a:avLst/>
-          </a:prstGeom>
-          <a:solidFill>
-            <a:srgbClr val="C9B991"/>
-          </a:solidFill>
-          <a:ln>
-            <a:noFill/>
-          </a:ln>
-        </p:spPr>
-        <p:txBody>
-          <a:bodyPr/>
-          <a:lstStyle/>
-          <a:p>
-            <a:endParaRPr lang="en-US"/>
-          </a:p>
-        </p:txBody>
-      </p:sp>
-      <p:sp>
-        <p:nvSpPr>
-          <p:cNvPr id="201" name="M1"/>
-          <p:cNvSpPr/>
-          <p:nvPr/>
-        </p:nvSpPr>
-        <p:spPr>
-          <a:xfrm>
-            <a:off x="2560320" y="4279392"/>
-            <a:ext cx="137160" cy="137160"/>
-          </a:xfrm>
-          <a:prstGeom prst="ellipse">
-            <a:avLst/>
-          </a:prstGeom>
-          <a:solidFill>
-            <a:srgbClr val="C9B991"/>
-          </a:solidFill>
-          <a:ln>
-            <a:noFill/>
-          </a:ln>
-        </p:spPr>
-        <p:txBody>
-          <a:bodyPr/>
-          <a:lstStyle/>
-          <a:p>
-            <a:endParaRPr lang="en-US"/>
-          </a:p>
-        </p:txBody>
-      </p:sp>
-      <p:sp>
-        <p:nvSpPr>
-          <p:cNvPr id="202" name="M2"/>
-          <p:cNvSpPr/>
-          <p:nvPr/>
-        </p:nvSpPr>
-        <p:spPr>
-          <a:xfrm>
-            <a:off x="2434590" y="4576572"/>
-            <a:ext cx="228600" cy="68580"/>
-          </a:xfrm>
-          <a:prstGeom prst="rect">
-            <a:avLst/>
-          </a:prstGeom>
-          <a:solidFill>
-            <a:srgbClr val="C9B991"/>
-          </a:solidFill>
-          <a:ln>
-            <a:noFill/>
-          </a:ln>
-        </p:spPr>
-        <p:txBody>
-          <a:bodyPr/>
-          <a:lstStyle/>
-          <a:p>
-            <a:endParaRPr lang="en-US"/>
-          </a:p>
-        </p:txBody>
-      </p:sp>
-      <p:sp>
-        <p:nvSpPr>
-          <p:cNvPr id="203" name="M3"/>
-          <p:cNvSpPr/>
-          <p:nvPr/>
-        </p:nvSpPr>
-        <p:spPr>
-          <a:xfrm>
-            <a:off x="2743200" y="4023360"/>
-            <a:ext cx="205740" cy="137160"/>
-          </a:xfrm>
-          <a:prstGeom prst="rect">
-            <a:avLst/>
-          </a:prstGeom>
-          <a:solidFill>
-            <a:srgbClr val="C9B991"/>
-          </a:solidFill>
-          <a:ln>
-            <a:noFill/>
-          </a:ln>
-        </p:spPr>
-        <p:txBody>
-          <a:bodyPr/>
-          <a:lstStyle/>
-          <a:p>
-            <a:endParaRPr lang="en-US"/>
-          </a:p>
-        </p:txBody>
-      </p:sp>
-      <p:sp>
-        <p:nvSpPr>
-          <p:cNvPr id="204" name="M4"/>
-          <p:cNvSpPr/>
-          <p:nvPr/>
-        </p:nvSpPr>
-        <p:spPr>
-          <a:xfrm>
-            <a:off x="2834640" y="4416552"/>
-            <a:ext cx="182880" cy="182880"/>
-          </a:xfrm>
-          <a:prstGeom prst="ellipse">
-            <a:avLst/>
-          </a:prstGeom>
-          <a:solidFill>
-            <a:srgbClr val="C9B991"/>
-          </a:solidFill>
-          <a:ln>
-            <a:noFill/>
-          </a:ln>
-        </p:spPr>
-        <p:txBody>
-          <a:bodyPr/>
-          <a:lstStyle/>
-          <a:p>
-            <a:endParaRPr lang="en-US"/>
-          </a:p>
-        </p:txBody>
-      </p:sp>
-      <p:sp>
-        <p:nvSpPr>
-          <p:cNvPr id="205" name="M5"/>
-          <p:cNvSpPr/>
-          <p:nvPr/>
-        </p:nvSpPr>
-        <p:spPr>
-          <a:xfrm>
-            <a:off x="3017520" y="4050792"/>
-            <a:ext cx="137160" cy="205740"/>
-          </a:xfrm>
-          <a:prstGeom prst="rect">
-            <a:avLst/>
-          </a:prstGeom>
-          <a:solidFill>
-            <a:srgbClr val="C9B991"/>
-          </a:solidFill>
-          <a:ln>
-            <a:noFill/>
-          </a:ln>
-        </p:spPr>
-        <p:txBody>
-          <a:bodyPr/>
-          <a:lstStyle/>
-          <a:p>
-            <a:endParaRPr lang="en-US"/>
-          </a:p>
-        </p:txBody>
-      </p:sp>
-      <p:sp>
-        <p:nvSpPr>
-          <p:cNvPr id="206" name="M6"/>
-          <p:cNvSpPr/>
-          <p:nvPr/>
-        </p:nvSpPr>
-        <p:spPr>
-          <a:xfrm>
-            <a:off x="3154680" y="4462272"/>
-            <a:ext cx="114300" cy="114300"/>
-          </a:xfrm>
-          <a:prstGeom prst="ellipse">
-            <a:avLst/>
-          </a:prstGeom>
-          <a:solidFill>
-            <a:srgbClr val="C9B991"/>
-          </a:solidFill>
-          <a:ln>
-            <a:noFill/>
-          </a:ln>
-        </p:spPr>
-        <p:txBody>
-          <a:bodyPr/>
-          <a:lstStyle/>
-          <a:p>
-            <a:endParaRPr lang="en-US"/>
-          </a:p>
-        </p:txBody>
-      </p:sp>
-      <p:sp>
-        <p:nvSpPr>
-          <p:cNvPr id="207" name="M7"/>
-          <p:cNvSpPr/>
-          <p:nvPr/>
-        </p:nvSpPr>
-        <p:spPr>
-          <a:xfrm>
-            <a:off x="3246120" y="4233672"/>
-            <a:ext cx="160020" cy="160020"/>
-          </a:xfrm>
-          <a:prstGeom prst="rect">
-            <a:avLst/>
-          </a:prstGeom>
-          <a:solidFill>
-            <a:srgbClr val="C9B991"/>
-          </a:solidFill>
-          <a:ln>
-            <a:noFill/>
-          </a:ln>
-        </p:spPr>
-        <p:txBody>
-          <a:bodyPr/>
-          <a:lstStyle/>
-          <a:p>
-            <a:endParaRPr lang="en-US"/>
-          </a:p>
-        </p:txBody>
-      </p:sp>
-      <p:sp>
-        <p:nvSpPr>
-          <p:cNvPr id="208" name="M8"/>
-          <p:cNvSpPr/>
-          <p:nvPr/>
-        </p:nvSpPr>
-        <p:spPr>
-          <a:xfrm>
-            <a:off x="3383280" y="4023360"/>
-            <a:ext cx="137160" cy="137160"/>
-          </a:xfrm>
-          <a:prstGeom prst="rect">
-            <a:avLst/>
-          </a:prstGeom>
-          <a:solidFill>
-            <a:srgbClr val="C9B991"/>
-          </a:solidFill>
-          <a:ln>
-            <a:noFill/>
-          </a:ln>
-        </p:spPr>
-        <p:txBody>
-          <a:bodyPr/>
-          <a:lstStyle/>
-          <a:p>
-            <a:endParaRPr lang="en-US"/>
-          </a:p>
-        </p:txBody>
-      </p:sp>
-      <p:sp>
-        <p:nvSpPr>
-          <p:cNvPr id="209" name="M9"/>
-          <p:cNvSpPr/>
-          <p:nvPr/>
-        </p:nvSpPr>
-        <p:spPr>
-          <a:xfrm>
-            <a:off x="3474720" y="4462272"/>
-            <a:ext cx="137160" cy="137160"/>
-          </a:xfrm>
-          <a:prstGeom prst="ellipse">
-            <a:avLst/>
-          </a:prstGeom>
-          <a:solidFill>
-            <a:srgbClr val="C9B991"/>
-          </a:solidFill>
-          <a:ln>
-            <a:noFill/>
-          </a:ln>
-        </p:spPr>
-        <p:txBody>
-          <a:bodyPr/>
-          <a:lstStyle/>
-          <a:p>
-            <a:endParaRPr lang="en-US"/>
-          </a:p>
-        </p:txBody>
-      </p:sp>
-      <p:sp>
-        <p:nvSpPr>
-          <p:cNvPr id="210" name="M10"/>
-          <p:cNvSpPr/>
-          <p:nvPr/>
-        </p:nvSpPr>
-        <p:spPr>
-          <a:xfrm>
-            <a:off x="3611880" y="4279392"/>
-            <a:ext cx="114300" cy="114300"/>
-          </a:xfrm>
-          <a:prstGeom prst="rect">
-            <a:avLst/>
-          </a:prstGeom>
-          <a:solidFill>
-            <a:srgbClr val="C9B991"/>
-          </a:solidFill>
-          <a:ln>
-            <a:noFill/>
-          </a:ln>
-        </p:spPr>
-        <p:txBody>
-          <a:bodyPr/>
-          <a:lstStyle/>
-          <a:p>
-            <a:endParaRPr lang="en-US"/>
-          </a:p>
-        </p:txBody>
-      </p:sp>
-      <p:sp>
-        <p:nvSpPr>
-          <p:cNvPr id="211" name="M11"/>
-          <p:cNvSpPr/>
-          <p:nvPr/>
-        </p:nvSpPr>
-        <p:spPr>
-          <a:xfrm>
-            <a:off x="3749040" y="4096512"/>
-            <a:ext cx="91440" cy="91440"/>
-          </a:xfrm>
-          <a:prstGeom prst="ellipse">
-            <a:avLst/>
-          </a:prstGeom>
-          <a:solidFill>
-            <a:srgbClr val="C9B991"/>
-          </a:solidFill>
-          <a:ln>
-            <a:noFill/>
-          </a:ln>
-        </p:spPr>
-        <p:txBody>
-          <a:bodyPr/>
-          <a:lstStyle/>
-          <a:p>
-            <a:endParaRPr lang="en-US"/>
           </a:p>
         </p:txBody>
       </p:sp>
@@ -6318,13 +5933,13 @@
         </p:nvCxnSpPr>
         <p:spPr>
           <a:xfrm>
-            <a:off x="4097655" y="4345686"/>
+            <a:off x="2903015" y="3963221"/>
             <a:ext cx="548640" cy="0"/>
           </a:xfrm>
           <a:prstGeom prst="straightConnector1">
             <a:avLst/>
           </a:prstGeom>
-          <a:ln w="28575">
+          <a:ln w="57150">
             <a:solidFill>
               <a:srgbClr val="8E6F3E"/>
             </a:solidFill>
@@ -6332,93 +5947,6 @@
           </a:ln>
         </p:spPr>
       </p:cxnSp>
-      <p:sp>
-        <p:nvSpPr>
-          <p:cNvPr id="220" name="MS0"/>
-          <p:cNvSpPr/>
-          <p:nvPr/>
-        </p:nvSpPr>
-        <p:spPr>
-          <a:xfrm>
-            <a:off x="4903470" y="4254246"/>
-            <a:ext cx="182880" cy="182880"/>
-          </a:xfrm>
-          <a:prstGeom prst="rect">
-            <a:avLst/>
-          </a:prstGeom>
-          <a:solidFill>
-            <a:srgbClr val="C9B991"/>
-          </a:solidFill>
-          <a:ln>
-            <a:noFill/>
-          </a:ln>
-        </p:spPr>
-        <p:txBody>
-          <a:bodyPr/>
-          <a:lstStyle/>
-          <a:p>
-            <a:endParaRPr lang="en-US"/>
-          </a:p>
-        </p:txBody>
-      </p:sp>
-      <p:sp>
-        <p:nvSpPr>
-          <p:cNvPr id="221" name="MS1"/>
-          <p:cNvSpPr/>
-          <p:nvPr/>
-        </p:nvSpPr>
-        <p:spPr>
-          <a:xfrm>
-            <a:off x="5177790" y="4254246"/>
-            <a:ext cx="182880" cy="182880"/>
-          </a:xfrm>
-          <a:prstGeom prst="ellipse">
-            <a:avLst/>
-          </a:prstGeom>
-          <a:solidFill>
-            <a:srgbClr val="C9B991"/>
-          </a:solidFill>
-          <a:ln>
-            <a:noFill/>
-          </a:ln>
-        </p:spPr>
-        <p:txBody>
-          <a:bodyPr/>
-          <a:lstStyle/>
-          <a:p>
-            <a:endParaRPr lang="en-US"/>
-          </a:p>
-        </p:txBody>
-      </p:sp>
-      <p:sp>
-        <p:nvSpPr>
-          <p:cNvPr id="222" name="MS2"/>
-          <p:cNvSpPr/>
-          <p:nvPr/>
-        </p:nvSpPr>
-        <p:spPr>
-          <a:xfrm>
-            <a:off x="5452110" y="4311396"/>
-            <a:ext cx="228600" cy="68580"/>
-          </a:xfrm>
-          <a:prstGeom prst="rect">
-            <a:avLst/>
-          </a:prstGeom>
-          <a:solidFill>
-            <a:srgbClr val="C9B991"/>
-          </a:solidFill>
-          <a:ln>
-            <a:noFill/>
-          </a:ln>
-        </p:spPr>
-        <p:txBody>
-          <a:bodyPr/>
-          <a:lstStyle/>
-          <a:p>
-            <a:endParaRPr lang="en-US"/>
-          </a:p>
-        </p:txBody>
-      </p:sp>
       <p:cxnSp>
         <p:nvCxnSpPr>
           <p:cNvPr id="223" name="RAr2"/>
@@ -6427,13 +5955,13 @@
         </p:nvCxnSpPr>
         <p:spPr>
           <a:xfrm>
-            <a:off x="5829840" y="4345686"/>
+            <a:off x="5615862" y="3963221"/>
             <a:ext cx="548640" cy="0"/>
           </a:xfrm>
           <a:prstGeom prst="straightConnector1">
             <a:avLst/>
           </a:prstGeom>
-          <a:ln w="28575">
+          <a:ln w="57150">
             <a:solidFill>
               <a:srgbClr val="8E6F3E"/>
             </a:solidFill>
@@ -6441,173 +5969,262 @@
           </a:ln>
         </p:spPr>
       </p:cxnSp>
-      <p:sp>
-        <p:nvSpPr>
-          <p:cNvPr id="224" name="ReqIcon"/>
-          <p:cNvSpPr/>
-          <p:nvPr/>
-        </p:nvSpPr>
-        <p:spPr>
-          <a:xfrm>
-            <a:off x="6515640" y="4185666"/>
-            <a:ext cx="320040" cy="320040"/>
-          </a:xfrm>
-          <a:custGeom>
-            <a:avLst/>
-            <a:gdLst/>
-            <a:ahLst/>
-            <a:cxnLst/>
-            <a:rect l="0" t="0" r="320040" b="320040"/>
-            <a:pathLst>
-              <a:path w="320040" h="320040" fill="none">
-                <a:moveTo>
-                  <a:pt x="48006" y="176022"/>
-                </a:moveTo>
-                <a:lnTo>
-                  <a:pt x="128016" y="264033"/>
-                </a:lnTo>
-                <a:lnTo>
-                  <a:pt x="272034" y="64008"/>
-                </a:lnTo>
-              </a:path>
-            </a:pathLst>
-          </a:custGeom>
-          <a:noFill/>
-          <a:ln w="57150" cap="rnd">
-            <a:solidFill>
-              <a:srgbClr val="8E6F3E"/>
-            </a:solidFill>
-            <a:round/>
-          </a:ln>
-        </p:spPr>
-        <p:txBody>
-          <a:bodyPr/>
-          <a:lstStyle/>
-          <a:p>
-            <a:endParaRPr lang="en-US"/>
-          </a:p>
-        </p:txBody>
-      </p:sp>
-      <p:sp>
-        <p:nvSpPr>
-          <p:cNvPr id="225" name="LblTerritory"/>
-          <p:cNvSpPr txBox="1"/>
-          <p:nvPr/>
-        </p:nvSpPr>
-        <p:spPr>
-          <a:xfrm>
-            <a:off x="2400300" y="4699000"/>
-            <a:ext cx="1371600" cy="240000"/>
-          </a:xfrm>
-          <a:prstGeom prst="rect">
-            <a:avLst/>
-          </a:prstGeom>
-          <a:noFill/>
-          <a:ln>
+      <p:grpSp>
+        <p:nvGrpSpPr>
+          <p:cNvPr id="17" name="Group 16">
+            <a:extLst>
+              <a:ext uri="{FF2B5EF4-FFF2-40B4-BE49-F238E27FC236}">
+                <a16:creationId xmlns:a16="http://schemas.microsoft.com/office/drawing/2014/main" id="{AC5098E7-4E8B-C248-A6EB-785537FE5FB8}"/>
+              </a:ext>
+            </a:extLst>
+          </p:cNvPr>
+          <p:cNvGrpSpPr/>
+          <p:nvPr/>
+        </p:nvGrpSpPr>
+        <p:grpSpPr>
+          <a:xfrm>
+            <a:off x="3928755" y="3870568"/>
+            <a:ext cx="1371600" cy="684754"/>
+            <a:chOff x="4606290" y="4254246"/>
+            <a:chExt cx="1371600" cy="684754"/>
+          </a:xfrm>
+        </p:grpSpPr>
+        <p:sp>
+          <p:nvSpPr>
+            <p:cNvPr id="220" name="MS0"/>
+            <p:cNvSpPr/>
+            <p:nvPr/>
+          </p:nvSpPr>
+          <p:spPr>
+            <a:xfrm>
+              <a:off x="4903470" y="4254246"/>
+              <a:ext cx="182880" cy="182880"/>
+            </a:xfrm>
+            <a:prstGeom prst="rect">
+              <a:avLst/>
+            </a:prstGeom>
+            <a:solidFill>
+              <a:srgbClr val="C9B991"/>
+            </a:solidFill>
+            <a:ln>
+              <a:noFill/>
+            </a:ln>
+          </p:spPr>
+          <p:txBody>
+            <a:bodyPr/>
+            <a:lstStyle/>
+            <a:p>
+              <a:endParaRPr lang="en-US"/>
+            </a:p>
+          </p:txBody>
+        </p:sp>
+        <p:sp>
+          <p:nvSpPr>
+            <p:cNvPr id="221" name="MS1"/>
+            <p:cNvSpPr/>
+            <p:nvPr/>
+          </p:nvSpPr>
+          <p:spPr>
+            <a:xfrm>
+              <a:off x="5177790" y="4254246"/>
+              <a:ext cx="182880" cy="182880"/>
+            </a:xfrm>
+            <a:prstGeom prst="ellipse">
+              <a:avLst/>
+            </a:prstGeom>
+            <a:solidFill>
+              <a:srgbClr val="C9B991"/>
+            </a:solidFill>
+            <a:ln>
+              <a:noFill/>
+            </a:ln>
+          </p:spPr>
+          <p:txBody>
+            <a:bodyPr/>
+            <a:lstStyle/>
+            <a:p>
+              <a:endParaRPr lang="en-US"/>
+            </a:p>
+          </p:txBody>
+        </p:sp>
+        <p:sp>
+          <p:nvSpPr>
+            <p:cNvPr id="222" name="MS2"/>
+            <p:cNvSpPr/>
+            <p:nvPr/>
+          </p:nvSpPr>
+          <p:spPr>
+            <a:xfrm>
+              <a:off x="5452110" y="4311396"/>
+              <a:ext cx="228600" cy="68580"/>
+            </a:xfrm>
+            <a:prstGeom prst="rect">
+              <a:avLst/>
+            </a:prstGeom>
+            <a:solidFill>
+              <a:srgbClr val="C9B991"/>
+            </a:solidFill>
+            <a:ln>
+              <a:noFill/>
+            </a:ln>
+          </p:spPr>
+          <p:txBody>
+            <a:bodyPr/>
+            <a:lstStyle/>
+            <a:p>
+              <a:endParaRPr lang="en-US"/>
+            </a:p>
+          </p:txBody>
+        </p:sp>
+        <p:sp>
+          <p:nvSpPr>
+            <p:cNvPr id="226" name="LblModel"/>
+            <p:cNvSpPr txBox="1"/>
+            <p:nvPr/>
+          </p:nvSpPr>
+          <p:spPr>
+            <a:xfrm>
+              <a:off x="4606290" y="4699000"/>
+              <a:ext cx="1371600" cy="240000"/>
+            </a:xfrm>
+            <a:prstGeom prst="rect">
+              <a:avLst/>
+            </a:prstGeom>
             <a:noFill/>
-          </a:ln>
-        </p:spPr>
-        <p:txBody>
-          <a:bodyPr wrap="square" lIns="0" tIns="0" rIns="0" bIns="0" anchor="t"/>
-          <a:lstStyle/>
-          <a:p>
-            <a:pPr algn="ctr">
-              <a:spcAft>
-                <a:spcPts val="0"/>
-              </a:spcAft>
-              <a:buNone/>
-            </a:pPr>
-            <a:r>
-              <a:rPr lang="en-US" sz="1400" b="1" dirty="0">
-                <a:solidFill>
-                  <a:srgbClr val="8E6F3E"/>
-                </a:solidFill>
-              </a:rPr>
-              <a:t>TERRITORY</a:t>
-            </a:r>
-          </a:p>
-        </p:txBody>
-      </p:sp>
-      <p:sp>
-        <p:nvSpPr>
-          <p:cNvPr id="226" name="LblModel"/>
-          <p:cNvSpPr txBox="1"/>
-          <p:nvPr/>
-        </p:nvSpPr>
-        <p:spPr>
-          <a:xfrm>
-            <a:off x="4606290" y="4699000"/>
-            <a:ext cx="1371600" cy="240000"/>
-          </a:xfrm>
-          <a:prstGeom prst="rect">
-            <a:avLst/>
-          </a:prstGeom>
-          <a:noFill/>
-          <a:ln>
+            <a:ln>
+              <a:noFill/>
+            </a:ln>
+          </p:spPr>
+          <p:txBody>
+            <a:bodyPr wrap="square" lIns="0" tIns="0" rIns="0" bIns="0" anchor="t"/>
+            <a:lstStyle/>
+            <a:p>
+              <a:pPr algn="ctr">
+                <a:spcAft>
+                  <a:spcPts val="0"/>
+                </a:spcAft>
+                <a:buNone/>
+              </a:pPr>
+              <a:r>
+                <a:rPr lang="en-US" sz="1400" b="1" dirty="0">
+                  <a:solidFill>
+                    <a:srgbClr val="8E6F3E"/>
+                  </a:solidFill>
+                </a:rPr>
+                <a:t>MODEL</a:t>
+              </a:r>
+            </a:p>
+          </p:txBody>
+        </p:sp>
+      </p:grpSp>
+      <p:grpSp>
+        <p:nvGrpSpPr>
+          <p:cNvPr id="18" name="Group 17">
+            <a:extLst>
+              <a:ext uri="{FF2B5EF4-FFF2-40B4-BE49-F238E27FC236}">
+                <a16:creationId xmlns:a16="http://schemas.microsoft.com/office/drawing/2014/main" id="{DD69ACE2-8677-E377-1F0F-4C6678A1F180}"/>
+              </a:ext>
+            </a:extLst>
+          </p:cNvPr>
+          <p:cNvGrpSpPr/>
+          <p:nvPr/>
+        </p:nvGrpSpPr>
+        <p:grpSpPr>
+          <a:xfrm>
+            <a:off x="1262400" y="3757776"/>
+            <a:ext cx="1371600" cy="753334"/>
+            <a:chOff x="2146730" y="4130536"/>
+            <a:chExt cx="1371600" cy="753334"/>
+          </a:xfrm>
+        </p:grpSpPr>
+        <p:sp>
+          <p:nvSpPr>
+            <p:cNvPr id="224" name="ReqIcon"/>
+            <p:cNvSpPr/>
+            <p:nvPr/>
+          </p:nvSpPr>
+          <p:spPr>
+            <a:xfrm>
+              <a:off x="2672510" y="4130536"/>
+              <a:ext cx="320040" cy="320040"/>
+            </a:xfrm>
+            <a:custGeom>
+              <a:avLst/>
+              <a:gdLst/>
+              <a:ahLst/>
+              <a:cxnLst/>
+              <a:rect l="0" t="0" r="320040" b="320040"/>
+              <a:pathLst>
+                <a:path w="320040" h="320040" fill="none">
+                  <a:moveTo>
+                    <a:pt x="48006" y="176022"/>
+                  </a:moveTo>
+                  <a:lnTo>
+                    <a:pt x="128016" y="264033"/>
+                  </a:lnTo>
+                  <a:lnTo>
+                    <a:pt x="272034" y="64008"/>
+                  </a:lnTo>
+                </a:path>
+              </a:pathLst>
+            </a:custGeom>
             <a:noFill/>
-          </a:ln>
-        </p:spPr>
-        <p:txBody>
-          <a:bodyPr wrap="square" lIns="0" tIns="0" rIns="0" bIns="0" anchor="t"/>
-          <a:lstStyle/>
-          <a:p>
-            <a:pPr algn="ctr">
-              <a:spcAft>
-                <a:spcPts val="0"/>
-              </a:spcAft>
-              <a:buNone/>
-            </a:pPr>
-            <a:r>
-              <a:rPr lang="en-US" sz="1400" b="1" dirty="0">
-                <a:solidFill>
-                  <a:srgbClr val="8E6F3E"/>
-                </a:solidFill>
-              </a:rPr>
-              <a:t>MODEL</a:t>
-            </a:r>
-          </a:p>
-        </p:txBody>
-      </p:sp>
-      <p:sp>
-        <p:nvSpPr>
-          <p:cNvPr id="227" name="LblObligation"/>
-          <p:cNvSpPr txBox="1"/>
-          <p:nvPr/>
-        </p:nvSpPr>
-        <p:spPr>
-          <a:xfrm>
-            <a:off x="5989860" y="4699000"/>
-            <a:ext cx="1371600" cy="240000"/>
-          </a:xfrm>
-          <a:prstGeom prst="rect">
-            <a:avLst/>
-          </a:prstGeom>
-          <a:noFill/>
-          <a:ln>
+            <a:ln w="57150" cap="rnd">
+              <a:solidFill>
+                <a:srgbClr val="8E6F3E"/>
+              </a:solidFill>
+              <a:round/>
+            </a:ln>
+          </p:spPr>
+          <p:txBody>
+            <a:bodyPr/>
+            <a:lstStyle/>
+            <a:p>
+              <a:endParaRPr lang="en-US"/>
+            </a:p>
+          </p:txBody>
+        </p:sp>
+        <p:sp>
+          <p:nvSpPr>
+            <p:cNvPr id="227" name="LblObligation"/>
+            <p:cNvSpPr txBox="1"/>
+            <p:nvPr/>
+          </p:nvSpPr>
+          <p:spPr>
+            <a:xfrm>
+              <a:off x="2146730" y="4643870"/>
+              <a:ext cx="1371600" cy="240000"/>
+            </a:xfrm>
+            <a:prstGeom prst="rect">
+              <a:avLst/>
+            </a:prstGeom>
             <a:noFill/>
-          </a:ln>
-        </p:spPr>
-        <p:txBody>
-          <a:bodyPr wrap="square" lIns="0" tIns="0" rIns="0" bIns="0" anchor="t"/>
-          <a:lstStyle/>
-          <a:p>
-            <a:pPr algn="ctr">
-              <a:spcAft>
-                <a:spcPts val="0"/>
-              </a:spcAft>
-              <a:buNone/>
-            </a:pPr>
-            <a:r>
-              <a:rPr lang="en-US" sz="1400" b="1" dirty="0">
-                <a:solidFill>
-                  <a:srgbClr val="8E6F3E"/>
-                </a:solidFill>
-              </a:rPr>
-              <a:t>OBLIGATION</a:t>
-            </a:r>
-          </a:p>
-        </p:txBody>
-      </p:sp>
+            <a:ln>
+              <a:noFill/>
+            </a:ln>
+          </p:spPr>
+          <p:txBody>
+            <a:bodyPr wrap="square" lIns="0" tIns="0" rIns="0" bIns="0" anchor="t"/>
+            <a:lstStyle/>
+            <a:p>
+              <a:pPr algn="ctr">
+                <a:spcAft>
+                  <a:spcPts val="0"/>
+                </a:spcAft>
+                <a:buNone/>
+              </a:pPr>
+              <a:r>
+                <a:rPr lang="en-US" sz="1400" b="1" dirty="0">
+                  <a:solidFill>
+                    <a:srgbClr val="8E6F3E"/>
+                  </a:solidFill>
+                </a:rPr>
+                <a:t>OBLIGATION</a:t>
+              </a:r>
+            </a:p>
+          </p:txBody>
+        </p:sp>
+      </p:grpSp>
       <p:sp>
         <p:nvSpPr>
           <p:cNvPr id="109" name="TwoLines"/>
@@ -6693,6 +6310,493 @@
           </a:p>
         </p:txBody>
       </p:sp>
+      <p:grpSp>
+        <p:nvGrpSpPr>
+          <p:cNvPr id="19" name="Group 18">
+            <a:extLst>
+              <a:ext uri="{FF2B5EF4-FFF2-40B4-BE49-F238E27FC236}">
+                <a16:creationId xmlns:a16="http://schemas.microsoft.com/office/drawing/2014/main" id="{6F3A5A9A-02FE-680C-23F4-3B3CEC707CD7}"/>
+              </a:ext>
+            </a:extLst>
+          </p:cNvPr>
+          <p:cNvGrpSpPr/>
+          <p:nvPr/>
+        </p:nvGrpSpPr>
+        <p:grpSpPr>
+          <a:xfrm>
+            <a:off x="6732270" y="3639682"/>
+            <a:ext cx="1508760" cy="915640"/>
+            <a:chOff x="6691685" y="4023360"/>
+            <a:chExt cx="1508760" cy="915640"/>
+          </a:xfrm>
+        </p:grpSpPr>
+        <p:sp>
+          <p:nvSpPr>
+            <p:cNvPr id="4" name="M0">
+              <a:extLst>
+                <a:ext uri="{FF2B5EF4-FFF2-40B4-BE49-F238E27FC236}">
+                  <a16:creationId xmlns:a16="http://schemas.microsoft.com/office/drawing/2014/main" id="{E193AD8B-3A76-AD0C-5D1D-311D7DD87F69}"/>
+                </a:ext>
+              </a:extLst>
+            </p:cNvPr>
+            <p:cNvSpPr/>
+            <p:nvPr/>
+          </p:nvSpPr>
+          <p:spPr>
+            <a:xfrm>
+              <a:off x="6691685" y="4050792"/>
+              <a:ext cx="182880" cy="182880"/>
+            </a:xfrm>
+            <a:prstGeom prst="rect">
+              <a:avLst/>
+            </a:prstGeom>
+            <a:solidFill>
+              <a:srgbClr val="C9B991"/>
+            </a:solidFill>
+            <a:ln>
+              <a:noFill/>
+            </a:ln>
+          </p:spPr>
+          <p:txBody>
+            <a:bodyPr/>
+            <a:lstStyle/>
+            <a:p>
+              <a:endParaRPr lang="en-US"/>
+            </a:p>
+          </p:txBody>
+        </p:sp>
+        <p:sp>
+          <p:nvSpPr>
+            <p:cNvPr id="5" name="M1">
+              <a:extLst>
+                <a:ext uri="{FF2B5EF4-FFF2-40B4-BE49-F238E27FC236}">
+                  <a16:creationId xmlns:a16="http://schemas.microsoft.com/office/drawing/2014/main" id="{0DC84FBB-88D2-3F25-9332-9C5D93E6ED90}"/>
+                </a:ext>
+              </a:extLst>
+            </p:cNvPr>
+            <p:cNvSpPr/>
+            <p:nvPr/>
+          </p:nvSpPr>
+          <p:spPr>
+            <a:xfrm>
+              <a:off x="6920285" y="4279392"/>
+              <a:ext cx="137160" cy="137160"/>
+            </a:xfrm>
+            <a:prstGeom prst="ellipse">
+              <a:avLst/>
+            </a:prstGeom>
+            <a:solidFill>
+              <a:srgbClr val="C9B991"/>
+            </a:solidFill>
+            <a:ln>
+              <a:noFill/>
+            </a:ln>
+          </p:spPr>
+          <p:txBody>
+            <a:bodyPr/>
+            <a:lstStyle/>
+            <a:p>
+              <a:endParaRPr lang="en-US"/>
+            </a:p>
+          </p:txBody>
+        </p:sp>
+        <p:sp>
+          <p:nvSpPr>
+            <p:cNvPr id="6" name="M2">
+              <a:extLst>
+                <a:ext uri="{FF2B5EF4-FFF2-40B4-BE49-F238E27FC236}">
+                  <a16:creationId xmlns:a16="http://schemas.microsoft.com/office/drawing/2014/main" id="{8DA0E25E-2504-8971-F95B-6AD925DBEA12}"/>
+                </a:ext>
+              </a:extLst>
+            </p:cNvPr>
+            <p:cNvSpPr/>
+            <p:nvPr/>
+          </p:nvSpPr>
+          <p:spPr>
+            <a:xfrm>
+              <a:off x="6794555" y="4576572"/>
+              <a:ext cx="228600" cy="68580"/>
+            </a:xfrm>
+            <a:prstGeom prst="rect">
+              <a:avLst/>
+            </a:prstGeom>
+            <a:solidFill>
+              <a:srgbClr val="C9B991"/>
+            </a:solidFill>
+            <a:ln>
+              <a:noFill/>
+            </a:ln>
+          </p:spPr>
+          <p:txBody>
+            <a:bodyPr/>
+            <a:lstStyle/>
+            <a:p>
+              <a:endParaRPr lang="en-US"/>
+            </a:p>
+          </p:txBody>
+        </p:sp>
+        <p:sp>
+          <p:nvSpPr>
+            <p:cNvPr id="7" name="M3">
+              <a:extLst>
+                <a:ext uri="{FF2B5EF4-FFF2-40B4-BE49-F238E27FC236}">
+                  <a16:creationId xmlns:a16="http://schemas.microsoft.com/office/drawing/2014/main" id="{1EACDCAA-95F5-D55D-4A87-F9995EFD0504}"/>
+                </a:ext>
+              </a:extLst>
+            </p:cNvPr>
+            <p:cNvSpPr/>
+            <p:nvPr/>
+          </p:nvSpPr>
+          <p:spPr>
+            <a:xfrm>
+              <a:off x="7103165" y="4023360"/>
+              <a:ext cx="205740" cy="137160"/>
+            </a:xfrm>
+            <a:prstGeom prst="rect">
+              <a:avLst/>
+            </a:prstGeom>
+            <a:solidFill>
+              <a:srgbClr val="C9B991"/>
+            </a:solidFill>
+            <a:ln>
+              <a:noFill/>
+            </a:ln>
+          </p:spPr>
+          <p:txBody>
+            <a:bodyPr/>
+            <a:lstStyle/>
+            <a:p>
+              <a:endParaRPr lang="en-US"/>
+            </a:p>
+          </p:txBody>
+        </p:sp>
+        <p:sp>
+          <p:nvSpPr>
+            <p:cNvPr id="8" name="M4">
+              <a:extLst>
+                <a:ext uri="{FF2B5EF4-FFF2-40B4-BE49-F238E27FC236}">
+                  <a16:creationId xmlns:a16="http://schemas.microsoft.com/office/drawing/2014/main" id="{09EF95A2-2E68-EF3F-7FF4-9A978E1E2A29}"/>
+                </a:ext>
+              </a:extLst>
+            </p:cNvPr>
+            <p:cNvSpPr/>
+            <p:nvPr/>
+          </p:nvSpPr>
+          <p:spPr>
+            <a:xfrm>
+              <a:off x="7194605" y="4416552"/>
+              <a:ext cx="182880" cy="182880"/>
+            </a:xfrm>
+            <a:prstGeom prst="ellipse">
+              <a:avLst/>
+            </a:prstGeom>
+            <a:solidFill>
+              <a:srgbClr val="C9B991"/>
+            </a:solidFill>
+            <a:ln>
+              <a:noFill/>
+            </a:ln>
+          </p:spPr>
+          <p:txBody>
+            <a:bodyPr/>
+            <a:lstStyle/>
+            <a:p>
+              <a:endParaRPr lang="en-US"/>
+            </a:p>
+          </p:txBody>
+        </p:sp>
+        <p:sp>
+          <p:nvSpPr>
+            <p:cNvPr id="9" name="M5">
+              <a:extLst>
+                <a:ext uri="{FF2B5EF4-FFF2-40B4-BE49-F238E27FC236}">
+                  <a16:creationId xmlns:a16="http://schemas.microsoft.com/office/drawing/2014/main" id="{F53C05BC-A0C0-1BBB-EFC3-2FB3993E0BF7}"/>
+                </a:ext>
+              </a:extLst>
+            </p:cNvPr>
+            <p:cNvSpPr/>
+            <p:nvPr/>
+          </p:nvSpPr>
+          <p:spPr>
+            <a:xfrm>
+              <a:off x="7377485" y="4050792"/>
+              <a:ext cx="137160" cy="205740"/>
+            </a:xfrm>
+            <a:prstGeom prst="rect">
+              <a:avLst/>
+            </a:prstGeom>
+            <a:solidFill>
+              <a:srgbClr val="C9B991"/>
+            </a:solidFill>
+            <a:ln>
+              <a:noFill/>
+            </a:ln>
+          </p:spPr>
+          <p:txBody>
+            <a:bodyPr/>
+            <a:lstStyle/>
+            <a:p>
+              <a:endParaRPr lang="en-US"/>
+            </a:p>
+          </p:txBody>
+        </p:sp>
+        <p:sp>
+          <p:nvSpPr>
+            <p:cNvPr id="10" name="M6">
+              <a:extLst>
+                <a:ext uri="{FF2B5EF4-FFF2-40B4-BE49-F238E27FC236}">
+                  <a16:creationId xmlns:a16="http://schemas.microsoft.com/office/drawing/2014/main" id="{79FA4EDC-A64A-D907-D600-8253B15D50DD}"/>
+                </a:ext>
+              </a:extLst>
+            </p:cNvPr>
+            <p:cNvSpPr/>
+            <p:nvPr/>
+          </p:nvSpPr>
+          <p:spPr>
+            <a:xfrm>
+              <a:off x="7514645" y="4462272"/>
+              <a:ext cx="114300" cy="114300"/>
+            </a:xfrm>
+            <a:prstGeom prst="ellipse">
+              <a:avLst/>
+            </a:prstGeom>
+            <a:solidFill>
+              <a:srgbClr val="C9B991"/>
+            </a:solidFill>
+            <a:ln>
+              <a:noFill/>
+            </a:ln>
+          </p:spPr>
+          <p:txBody>
+            <a:bodyPr/>
+            <a:lstStyle/>
+            <a:p>
+              <a:endParaRPr lang="en-US"/>
+            </a:p>
+          </p:txBody>
+        </p:sp>
+        <p:sp>
+          <p:nvSpPr>
+            <p:cNvPr id="11" name="M7">
+              <a:extLst>
+                <a:ext uri="{FF2B5EF4-FFF2-40B4-BE49-F238E27FC236}">
+                  <a16:creationId xmlns:a16="http://schemas.microsoft.com/office/drawing/2014/main" id="{CF75CA27-268A-39A9-6383-319BA9C46270}"/>
+                </a:ext>
+              </a:extLst>
+            </p:cNvPr>
+            <p:cNvSpPr/>
+            <p:nvPr/>
+          </p:nvSpPr>
+          <p:spPr>
+            <a:xfrm>
+              <a:off x="7606085" y="4233672"/>
+              <a:ext cx="160020" cy="160020"/>
+            </a:xfrm>
+            <a:prstGeom prst="rect">
+              <a:avLst/>
+            </a:prstGeom>
+            <a:solidFill>
+              <a:srgbClr val="C9B991"/>
+            </a:solidFill>
+            <a:ln>
+              <a:noFill/>
+            </a:ln>
+          </p:spPr>
+          <p:txBody>
+            <a:bodyPr/>
+            <a:lstStyle/>
+            <a:p>
+              <a:endParaRPr lang="en-US"/>
+            </a:p>
+          </p:txBody>
+        </p:sp>
+        <p:sp>
+          <p:nvSpPr>
+            <p:cNvPr id="12" name="M8">
+              <a:extLst>
+                <a:ext uri="{FF2B5EF4-FFF2-40B4-BE49-F238E27FC236}">
+                  <a16:creationId xmlns:a16="http://schemas.microsoft.com/office/drawing/2014/main" id="{4A5BECD4-2388-9AD4-0481-7AB90168AA17}"/>
+                </a:ext>
+              </a:extLst>
+            </p:cNvPr>
+            <p:cNvSpPr/>
+            <p:nvPr/>
+          </p:nvSpPr>
+          <p:spPr>
+            <a:xfrm>
+              <a:off x="7743245" y="4023360"/>
+              <a:ext cx="137160" cy="137160"/>
+            </a:xfrm>
+            <a:prstGeom prst="rect">
+              <a:avLst/>
+            </a:prstGeom>
+            <a:solidFill>
+              <a:srgbClr val="C9B991"/>
+            </a:solidFill>
+            <a:ln>
+              <a:noFill/>
+            </a:ln>
+          </p:spPr>
+          <p:txBody>
+            <a:bodyPr/>
+            <a:lstStyle/>
+            <a:p>
+              <a:endParaRPr lang="en-US"/>
+            </a:p>
+          </p:txBody>
+        </p:sp>
+        <p:sp>
+          <p:nvSpPr>
+            <p:cNvPr id="13" name="M9">
+              <a:extLst>
+                <a:ext uri="{FF2B5EF4-FFF2-40B4-BE49-F238E27FC236}">
+                  <a16:creationId xmlns:a16="http://schemas.microsoft.com/office/drawing/2014/main" id="{B0E6D59E-D285-754B-0E11-9D054B7C88D4}"/>
+                </a:ext>
+              </a:extLst>
+            </p:cNvPr>
+            <p:cNvSpPr/>
+            <p:nvPr/>
+          </p:nvSpPr>
+          <p:spPr>
+            <a:xfrm>
+              <a:off x="7834685" y="4462272"/>
+              <a:ext cx="137160" cy="137160"/>
+            </a:xfrm>
+            <a:prstGeom prst="ellipse">
+              <a:avLst/>
+            </a:prstGeom>
+            <a:solidFill>
+              <a:srgbClr val="C9B991"/>
+            </a:solidFill>
+            <a:ln>
+              <a:noFill/>
+            </a:ln>
+          </p:spPr>
+          <p:txBody>
+            <a:bodyPr/>
+            <a:lstStyle/>
+            <a:p>
+              <a:endParaRPr lang="en-US"/>
+            </a:p>
+          </p:txBody>
+        </p:sp>
+        <p:sp>
+          <p:nvSpPr>
+            <p:cNvPr id="14" name="M10">
+              <a:extLst>
+                <a:ext uri="{FF2B5EF4-FFF2-40B4-BE49-F238E27FC236}">
+                  <a16:creationId xmlns:a16="http://schemas.microsoft.com/office/drawing/2014/main" id="{A2233ED2-5254-3491-BD9F-5B1D4BF7FC6A}"/>
+                </a:ext>
+              </a:extLst>
+            </p:cNvPr>
+            <p:cNvSpPr/>
+            <p:nvPr/>
+          </p:nvSpPr>
+          <p:spPr>
+            <a:xfrm>
+              <a:off x="7971845" y="4279392"/>
+              <a:ext cx="114300" cy="114300"/>
+            </a:xfrm>
+            <a:prstGeom prst="rect">
+              <a:avLst/>
+            </a:prstGeom>
+            <a:solidFill>
+              <a:srgbClr val="C9B991"/>
+            </a:solidFill>
+            <a:ln>
+              <a:noFill/>
+            </a:ln>
+          </p:spPr>
+          <p:txBody>
+            <a:bodyPr/>
+            <a:lstStyle/>
+            <a:p>
+              <a:endParaRPr lang="en-US"/>
+            </a:p>
+          </p:txBody>
+        </p:sp>
+        <p:sp>
+          <p:nvSpPr>
+            <p:cNvPr id="15" name="M11">
+              <a:extLst>
+                <a:ext uri="{FF2B5EF4-FFF2-40B4-BE49-F238E27FC236}">
+                  <a16:creationId xmlns:a16="http://schemas.microsoft.com/office/drawing/2014/main" id="{BA4AA580-D524-D7D5-3646-1FB9EED67736}"/>
+                </a:ext>
+              </a:extLst>
+            </p:cNvPr>
+            <p:cNvSpPr/>
+            <p:nvPr/>
+          </p:nvSpPr>
+          <p:spPr>
+            <a:xfrm>
+              <a:off x="8109005" y="4096512"/>
+              <a:ext cx="91440" cy="91440"/>
+            </a:xfrm>
+            <a:prstGeom prst="ellipse">
+              <a:avLst/>
+            </a:prstGeom>
+            <a:solidFill>
+              <a:srgbClr val="C9B991"/>
+            </a:solidFill>
+            <a:ln>
+              <a:noFill/>
+            </a:ln>
+          </p:spPr>
+          <p:txBody>
+            <a:bodyPr/>
+            <a:lstStyle/>
+            <a:p>
+              <a:endParaRPr lang="en-US"/>
+            </a:p>
+          </p:txBody>
+        </p:sp>
+        <p:sp>
+          <p:nvSpPr>
+            <p:cNvPr id="16" name="LblTerritory">
+              <a:extLst>
+                <a:ext uri="{FF2B5EF4-FFF2-40B4-BE49-F238E27FC236}">
+                  <a16:creationId xmlns:a16="http://schemas.microsoft.com/office/drawing/2014/main" id="{2A59FBC1-031C-6BC5-A6ED-2D11AE925F0C}"/>
+                </a:ext>
+              </a:extLst>
+            </p:cNvPr>
+            <p:cNvSpPr txBox="1"/>
+            <p:nvPr/>
+          </p:nvSpPr>
+          <p:spPr>
+            <a:xfrm>
+              <a:off x="6760265" y="4699000"/>
+              <a:ext cx="1371600" cy="240000"/>
+            </a:xfrm>
+            <a:prstGeom prst="rect">
+              <a:avLst/>
+            </a:prstGeom>
+            <a:noFill/>
+            <a:ln>
+              <a:noFill/>
+            </a:ln>
+          </p:spPr>
+          <p:txBody>
+            <a:bodyPr wrap="square" lIns="0" tIns="0" rIns="0" bIns="0" anchor="t"/>
+            <a:lstStyle/>
+            <a:p>
+              <a:pPr algn="ctr">
+                <a:spcAft>
+                  <a:spcPts val="0"/>
+                </a:spcAft>
+                <a:buNone/>
+              </a:pPr>
+              <a:r>
+                <a:rPr lang="en-US" sz="1400" b="1" dirty="0">
+                  <a:solidFill>
+                    <a:srgbClr val="8E6F3E"/>
+                  </a:solidFill>
+                </a:rPr>
+                <a:t>TERRITORY</a:t>
+              </a:r>
+            </a:p>
+          </p:txBody>
+        </p:sp>
+      </p:grpSp>
     </p:spTree>
   </p:cSld>
   <p:clrMapOvr>
@@ -6731,7 +6835,7 @@
         <p:spPr/>
         <p:txBody>
           <a:bodyPr>
-            <a:normAutofit/>
+            <a:normAutofit fontScale="90000"/>
           </a:bodyPr>
           <a:lstStyle/>
           <a:p>
@@ -7225,7 +7329,7 @@
         <p:spPr/>
         <p:txBody>
           <a:bodyPr>
-            <a:normAutofit/>
+            <a:normAutofit fontScale="90000"/>
           </a:bodyPr>
           <a:lstStyle/>
           <a:p>
@@ -8740,7 +8844,7 @@
         <p:spPr/>
         <p:txBody>
           <a:bodyPr>
-            <a:normAutofit/>
+            <a:normAutofit fontScale="90000"/>
           </a:bodyPr>
           <a:lstStyle/>
           <a:p>
@@ -9838,7 +9942,7 @@
         </p:spPr>
         <p:txBody>
           <a:bodyPr>
-            <a:normAutofit/>
+            <a:normAutofit fontScale="90000"/>
           </a:bodyPr>
           <a:lstStyle/>
           <a:p>
@@ -10215,7 +10319,7 @@
         <p:spPr/>
         <p:txBody>
           <a:bodyPr>
-            <a:normAutofit/>
+            <a:normAutofit fontScale="90000"/>
           </a:bodyPr>
           <a:lstStyle/>
           <a:p>
@@ -10587,7 +10691,7 @@
         <p:spPr/>
         <p:txBody>
           <a:bodyPr>
-            <a:normAutofit/>
+            <a:normAutofit fontScale="90000"/>
           </a:bodyPr>
           <a:lstStyle/>
           <a:p>
@@ -11309,7 +11413,7 @@
         <p:spPr/>
         <p:txBody>
           <a:bodyPr>
-            <a:normAutofit/>
+            <a:normAutofit fontScale="90000"/>
           </a:bodyPr>
           <a:lstStyle/>
           <a:p>
@@ -12094,7 +12198,7 @@
         <p:spPr/>
         <p:txBody>
           <a:bodyPr>
-            <a:normAutofit/>
+            <a:normAutofit fontScale="90000"/>
           </a:bodyPr>
           <a:lstStyle/>
           <a:p>
@@ -12952,7 +13056,7 @@
         <p:spPr/>
         <p:txBody>
           <a:bodyPr>
-            <a:normAutofit/>
+            <a:normAutofit fontScale="90000"/>
           </a:bodyPr>
           <a:lstStyle/>
           <a:p>
@@ -13768,7 +13872,7 @@
         <p:spPr/>
         <p:txBody>
           <a:bodyPr>
-            <a:normAutofit/>
+            <a:normAutofit fontScale="90000"/>
           </a:bodyPr>
           <a:lstStyle/>
           <a:p>
@@ -14569,7 +14673,7 @@
         <p:spPr/>
         <p:txBody>
           <a:bodyPr>
-            <a:normAutofit/>
+            <a:normAutofit fontScale="90000"/>
           </a:bodyPr>
           <a:lstStyle/>
           <a:p>
@@ -15615,7 +15719,7 @@
         <p:spPr/>
         <p:txBody>
           <a:bodyPr>
-            <a:normAutofit/>
+            <a:normAutofit fontScale="90000"/>
           </a:bodyPr>
           <a:lstStyle/>
           <a:p>
@@ -16170,7 +16274,7 @@
         <p:spPr/>
         <p:txBody>
           <a:bodyPr>
-            <a:normAutofit/>
+            <a:normAutofit fontScale="90000"/>
           </a:bodyPr>
           <a:lstStyle/>
           <a:p>
@@ -16762,7 +16866,7 @@
         <p:spPr/>
         <p:txBody>
           <a:bodyPr>
-            <a:normAutofit/>
+            <a:normAutofit fontScale="90000"/>
           </a:bodyPr>
           <a:lstStyle/>
           <a:p>
@@ -17522,7 +17626,7 @@
         <p:spPr/>
         <p:txBody>
           <a:bodyPr>
-            <a:normAutofit/>
+            <a:normAutofit fontScale="90000"/>
           </a:bodyPr>
           <a:lstStyle/>
           <a:p>
@@ -18078,7 +18182,7 @@
         <p:spPr/>
         <p:txBody>
           <a:bodyPr>
-            <a:normAutofit/>
+            <a:normAutofit fontScale="90000"/>
           </a:bodyPr>
           <a:lstStyle/>
           <a:p>
@@ -18687,7 +18791,7 @@
         <p:spPr/>
         <p:txBody>
           <a:bodyPr>
-            <a:normAutofit/>
+            <a:normAutofit fontScale="90000"/>
           </a:bodyPr>
           <a:lstStyle/>
           <a:p>
@@ -19252,7 +19356,7 @@
         <p:spPr/>
         <p:txBody>
           <a:bodyPr>
-            <a:normAutofit/>
+            <a:normAutofit fontScale="90000"/>
           </a:bodyPr>
           <a:lstStyle/>
           <a:p>
@@ -20092,7 +20196,7 @@
         <p:spPr/>
         <p:txBody>
           <a:bodyPr>
-            <a:normAutofit/>
+            <a:normAutofit fontScale="90000"/>
           </a:bodyPr>
           <a:lstStyle/>
           <a:p>
@@ -20875,7 +20979,7 @@
         <p:spPr/>
         <p:txBody>
           <a:bodyPr>
-            <a:normAutofit/>
+            <a:normAutofit fontScale="90000"/>
           </a:bodyPr>
           <a:lstStyle/>
           <a:p>
@@ -22540,7 +22644,7 @@
         <p:spPr/>
         <p:txBody>
           <a:bodyPr>
-            <a:normAutofit/>
+            <a:normAutofit fontScale="90000"/>
           </a:bodyPr>
           <a:lstStyle/>
           <a:p>
@@ -23088,7 +23192,7 @@
         <p:spPr/>
         <p:txBody>
           <a:bodyPr>
-            <a:normAutofit/>
+            <a:normAutofit fontScale="90000"/>
           </a:bodyPr>
           <a:lstStyle/>
           <a:p>
@@ -23764,7 +23868,7 @@
         <p:spPr/>
         <p:txBody>
           <a:bodyPr>
-            <a:normAutofit/>
+            <a:normAutofit fontScale="90000"/>
           </a:bodyPr>
           <a:lstStyle/>
           <a:p>
@@ -23972,7 +24076,7 @@
         <p:spPr/>
         <p:txBody>
           <a:bodyPr>
-            <a:normAutofit/>
+            <a:normAutofit fontScale="90000"/>
           </a:bodyPr>
           <a:lstStyle/>
           <a:p>
@@ -25748,7 +25852,7 @@
         <p:spPr/>
         <p:txBody>
           <a:bodyPr>
-            <a:normAutofit/>
+            <a:normAutofit fontScale="90000"/>
           </a:bodyPr>
           <a:lstStyle/>
           <a:p>
@@ -26913,7 +27017,7 @@
         <p:spPr/>
         <p:txBody>
           <a:bodyPr>
-            <a:normAutofit/>
+            <a:normAutofit fontScale="90000"/>
           </a:bodyPr>
           <a:lstStyle/>
           <a:p>
@@ -29338,7 +29442,7 @@
         <p:spPr/>
         <p:txBody>
           <a:bodyPr>
-            <a:normAutofit/>
+            <a:normAutofit fontScale="90000"/>
           </a:bodyPr>
           <a:lstStyle/>
           <a:p>
@@ -30589,7 +30693,7 @@
         <p:spPr/>
         <p:txBody>
           <a:bodyPr>
-            <a:normAutofit/>
+            <a:normAutofit fontScale="90000"/>
           </a:bodyPr>
           <a:lstStyle/>
           <a:p>
@@ -31017,46 +31121,6 @@
           </a:ln>
         </p:spPr>
       </p:cxnSp>
-      <p:sp>
-        <p:nvSpPr>
-          <p:cNvPr id="40" name="Ital"/>
-          <p:cNvSpPr/>
-          <p:nvPr/>
-        </p:nvSpPr>
-        <p:spPr>
-          <a:xfrm>
-            <a:off x="274320" y="4297680"/>
-            <a:ext cx="8595360" cy="365760"/>
-          </a:xfrm>
-          <a:prstGeom prst="rect">
-            <a:avLst/>
-          </a:prstGeom>
-          <a:noFill/>
-          <a:ln>
-            <a:noFill/>
-          </a:ln>
-        </p:spPr>
-        <p:txBody>
-          <a:bodyPr wrap="square" lIns="0" tIns="0" rIns="0" bIns="0" anchor="t"/>
-          <a:lstStyle/>
-          <a:p>
-            <a:pPr algn="ctr">
-              <a:spcAft>
-                <a:spcPts val="0"/>
-              </a:spcAft>
-              <a:buNone/>
-            </a:pPr>
-            <a:r>
-              <a:rPr lang="en-US" sz="1700" b="0" i="1" dirty="0">
-                <a:solidFill>
-                  <a:srgbClr val="555960"/>
-                </a:solidFill>
-              </a:rPr>
-              <a:t>They return at every section break in this unit.</a:t>
-            </a:r>
-          </a:p>
-        </p:txBody>
-      </p:sp>
       <p:sp>
         <p:nvSpPr>
           <p:cNvPr id="199" name="FooterBand"/>

--- a/course/lectures/act-2-delegation-and-control/02-modeling/2-2-Modeling-1-Purposeful-Reduction.pptx
+++ b/course/lectures/act-2-delegation-and-control/02-modeling/2-2-Modeling-1-Purposeful-Reduction.pptx
@@ -19415,7 +19415,7 @@
           <a:p>
             <a:r>
               <a:rPr lang="en-US" dirty="0"/>
-              <a:t>Same controller, new question: </a:t>
+              <a:t xml:space="preserve">Same controller, new question: </a:t>
             </a:r>
             <a:r>
               <a:rPr lang="en-US" sz="1800" b="1" dirty="0">
@@ -19670,7 +19670,7 @@
                   <a:srgbClr val="5C4826"/>
                 </a:solidFill>
               </a:rPr>
-              <a:t> + T</a:t>
+              <a:t xml:space="preserve"> + T</a:t>
             </a:r>
             <a:r>
               <a:rPr lang="en-US" sz="1400" b="1" baseline="-25000" dirty="0">
@@ -19686,7 +19686,7 @@
                   <a:srgbClr val="5C4826"/>
                 </a:solidFill>
               </a:rPr>
-              <a:t> + T</a:t>
+              <a:t xml:space="preserve"> + T</a:t>
             </a:r>
             <a:r>
               <a:rPr lang="en-US" sz="1400" b="1" baseline="-25000" dirty="0">
@@ -19702,7 +19702,7 @@
                   <a:srgbClr val="5C4826"/>
                 </a:solidFill>
               </a:rPr>
-              <a:t> + T</a:t>
+              <a:t xml:space="preserve"> + T</a:t>
             </a:r>
             <a:r>
               <a:rPr lang="en-US" sz="1400" b="1" baseline="-25000" dirty="0">
@@ -19718,14 +19718,14 @@
                   <a:srgbClr val="5C4826"/>
                 </a:solidFill>
               </a:rPr>
-              <a:t> ≤ 50 ms</a:t>
-            </a:r>
-          </a:p>
-        </p:txBody>
-      </p:sp>
-      <p:sp>
-        <p:nvSpPr>
-          <p:cNvPr id="15" name="QRPlaceholder"/>
+              <a:t xml:space="preserve"> ≤ 50 ms</a:t>
+            </a:r>
+          </a:p>
+        </p:txBody>
+      </p:sp>
+      <p:sp>
+        <p:nvSpPr>
+          <p:cNvPr id="15" name="QRPlaceholder" descr="Dashed outline marking the slot where the activity's QR code will go."/>
           <p:cNvSpPr/>
           <p:nvPr/>
         </p:nvSpPr>
@@ -19748,36 +19748,82 @@
           </a:ln>
         </p:spPr>
         <p:txBody>
-          <a:bodyPr wrap="square" lIns="91440" tIns="91440" rIns="91440" bIns="91440" anchor="ctr"/>
+          <a:bodyPr wrap="square" lIns="91440" tIns="91440" rIns="91440" bIns="91440" anchor="b"/>
           <a:lstStyle/>
           <a:p>
             <a:pPr algn="ctr">
               <a:buNone/>
             </a:pPr>
             <a:r>
-              <a:rPr lang="en-US" sz="1800" b="1" i="0" dirty="0">
-                <a:solidFill>
-                  <a:srgbClr val="8E6F3E"/>
-                </a:solidFill>
-              </a:rPr>
-              <a:t>QR PLACEHOLDER</a:t>
-            </a:r>
-          </a:p>
-          <a:p>
-            <a:pPr algn="ctr">
-              <a:buNone/>
-            </a:pPr>
-            <a:r>
-              <a:rPr lang="en-US" sz="1800" b="0" i="1" dirty="0">
+              <a:rPr lang="en-US" sz="1800" b="0" i="0" dirty="0">
                 <a:solidFill>
                   <a:srgbClr val="555960"/>
                 </a:solidFill>
               </a:rPr>
-              <a:t>form URL pending</a:t>
-            </a:r>
-          </a:p>
-        </p:txBody>
-      </p:sp>
+              <a:t>Activity QR</a:t>
+            </a:r>
+          </a:p>
+        </p:txBody>
+      </p:sp>
+      <p:grpSp>
+        <p:nvGrpSpPr>
+          <p:cNvPr id="16" name="QRVoidMark" descr="A large red X across the slot: the activity QR code has not been added yet."/>
+          <p:cNvGrpSpPr/>
+          <p:nvPr/>
+        </p:nvGrpSpPr>
+        <p:grpSpPr>
+          <a:xfrm>
+            <a:off x="6763542" y="2049620"/>
+            <a:ext cx="1947612" cy="1947612"/>
+            <a:chOff x="6763542" y="2049620"/>
+            <a:chExt cx="1947612" cy="1947612"/>
+          </a:xfrm>
+        </p:grpSpPr>
+        <p:cxnSp>
+          <p:nvCxnSpPr>
+            <p:cNvPr id="17" name="QRVoidStrokeTLBR"/>
+            <p:cNvCxnSpPr/>
+            <p:nvPr/>
+          </p:nvCxnSpPr>
+          <p:spPr>
+            <a:xfrm>
+              <a:off x="6763542" y="2049620"/>
+              <a:ext cx="1947612" cy="1947612"/>
+            </a:xfrm>
+            <a:prstGeom prst="straightConnector1">
+              <a:avLst/>
+            </a:prstGeom>
+            <a:ln w="101600" cap="rnd">
+              <a:solidFill>
+                <a:srgbClr val="C00000"/>
+              </a:solidFill>
+              <a:round/>
+            </a:ln>
+          </p:spPr>
+        </p:cxnSp>
+        <p:cxnSp>
+          <p:nvCxnSpPr>
+            <p:cNvPr id="18" name="QRVoidStrokeTRBL"/>
+            <p:cNvCxnSpPr/>
+            <p:nvPr/>
+          </p:nvCxnSpPr>
+          <p:spPr>
+            <a:xfrm flipH="1">
+              <a:off x="6763542" y="2049620"/>
+              <a:ext cx="1947612" cy="1947612"/>
+            </a:xfrm>
+            <a:prstGeom prst="straightConnector1">
+              <a:avLst/>
+            </a:prstGeom>
+            <a:ln w="101600" cap="rnd">
+              <a:solidFill>
+                <a:srgbClr val="C00000"/>
+              </a:solidFill>
+              <a:round/>
+            </a:ln>
+          </p:spPr>
+        </p:cxnSp>
+      </p:grpSp>
       <p:sp>
         <p:nvSpPr>
           <p:cNvPr id="12" name="TextBox 11"/>
@@ -23596,7 +23642,7 @@
       </p:sp>
       <p:sp>
         <p:nvSpPr>
-          <p:cNvPr id="15" name="QRPlaceholder"/>
+          <p:cNvPr id="15" name="QRPlaceholder" descr="Dashed outline marking the slot where the activity's QR code will go."/>
           <p:cNvSpPr/>
           <p:nvPr/>
         </p:nvSpPr>
@@ -23619,36 +23665,82 @@
           </a:ln>
         </p:spPr>
         <p:txBody>
-          <a:bodyPr wrap="square" lIns="91440" tIns="91440" rIns="91440" bIns="91440" anchor="ctr"/>
+          <a:bodyPr wrap="square" lIns="91440" tIns="91440" rIns="91440" bIns="91440" anchor="b"/>
           <a:lstStyle/>
           <a:p>
             <a:pPr algn="ctr">
               <a:buNone/>
             </a:pPr>
             <a:r>
-              <a:rPr lang="en-US" sz="1800" b="1" i="0" dirty="0">
-                <a:solidFill>
-                  <a:srgbClr val="8E6F3E"/>
-                </a:solidFill>
-              </a:rPr>
-              <a:t>QR PLACEHOLDER</a:t>
-            </a:r>
-          </a:p>
-          <a:p>
-            <a:pPr algn="ctr">
-              <a:buNone/>
-            </a:pPr>
-            <a:r>
-              <a:rPr lang="en-US" sz="1800" b="0" i="1" dirty="0">
+              <a:rPr lang="en-US" sz="1800" b="0" i="0" dirty="0">
                 <a:solidFill>
                   <a:srgbClr val="555960"/>
                 </a:solidFill>
               </a:rPr>
-              <a:t>form URL pending</a:t>
-            </a:r>
-          </a:p>
-        </p:txBody>
-      </p:sp>
+              <a:t>Activity QR</a:t>
+            </a:r>
+          </a:p>
+        </p:txBody>
+      </p:sp>
+      <p:grpSp>
+        <p:nvGrpSpPr>
+          <p:cNvPr id="18" name="QRVoidMark" descr="A large red X across the slot: the activity QR code has not been added yet."/>
+          <p:cNvGrpSpPr/>
+          <p:nvPr/>
+        </p:nvGrpSpPr>
+        <p:grpSpPr>
+          <a:xfrm>
+            <a:off x="6763542" y="2049620"/>
+            <a:ext cx="1947612" cy="1947612"/>
+            <a:chOff x="6763542" y="2049620"/>
+            <a:chExt cx="1947612" cy="1947612"/>
+          </a:xfrm>
+        </p:grpSpPr>
+        <p:cxnSp>
+          <p:nvCxnSpPr>
+            <p:cNvPr id="19" name="QRVoidStrokeTLBR"/>
+            <p:cNvCxnSpPr/>
+            <p:nvPr/>
+          </p:nvCxnSpPr>
+          <p:spPr>
+            <a:xfrm>
+              <a:off x="6763542" y="2049620"/>
+              <a:ext cx="1947612" cy="1947612"/>
+            </a:xfrm>
+            <a:prstGeom prst="straightConnector1">
+              <a:avLst/>
+            </a:prstGeom>
+            <a:ln w="101600" cap="rnd">
+              <a:solidFill>
+                <a:srgbClr val="C00000"/>
+              </a:solidFill>
+              <a:round/>
+            </a:ln>
+          </p:spPr>
+        </p:cxnSp>
+        <p:cxnSp>
+          <p:nvCxnSpPr>
+            <p:cNvPr id="20" name="QRVoidStrokeTRBL"/>
+            <p:cNvCxnSpPr/>
+            <p:nvPr/>
+          </p:nvCxnSpPr>
+          <p:spPr>
+            <a:xfrm flipH="1">
+              <a:off x="6763542" y="2049620"/>
+              <a:ext cx="1947612" cy="1947612"/>
+            </a:xfrm>
+            <a:prstGeom prst="straightConnector1">
+              <a:avLst/>
+            </a:prstGeom>
+            <a:ln w="101600" cap="rnd">
+              <a:solidFill>
+                <a:srgbClr val="C00000"/>
+              </a:solidFill>
+              <a:round/>
+            </a:ln>
+          </p:spPr>
+        </p:cxnSp>
+      </p:grpSp>
       <p:sp>
         <p:nvSpPr>
           <p:cNvPr id="12" name="TextBox 11"/>
@@ -23840,7 +23932,7 @@
             </a:r>
             <a:r>
               <a:rPr lang="en-US" dirty="0"/>
-              <a:t> what must I preserve to answer the engineering question?</a:t>
+              <a:t xml:space="preserve"> what must I preserve to answer the engineering question?</a:t>
             </a:r>
           </a:p>
           <a:p>
@@ -23850,7 +23942,7 @@
             </a:r>
             <a:r>
               <a:rPr lang="en-US" dirty="0"/>
-              <a:t> why am I carrying each distinction that remains?</a:t>
+              <a:t xml:space="preserve"> why am I carrying each distinction that remains?</a:t>
             </a:r>
           </a:p>
         </p:txBody>
@@ -23904,7 +23996,7 @@
       </p:sp>
       <p:sp>
         <p:nvSpPr>
-          <p:cNvPr id="5" name="QRPlaceholder"/>
+          <p:cNvPr id="5" name="QRPlaceholder" descr="Dashed outline marking the slot where the feedback form's QR code will go."/>
           <p:cNvSpPr/>
           <p:nvPr/>
         </p:nvSpPr>
@@ -23927,36 +24019,82 @@
           </a:ln>
         </p:spPr>
         <p:txBody>
-          <a:bodyPr wrap="square" lIns="91440" tIns="91440" rIns="91440" bIns="91440" anchor="ctr"/>
+          <a:bodyPr wrap="square" lIns="91440" tIns="91440" rIns="91440" bIns="91440" anchor="b"/>
           <a:lstStyle/>
           <a:p>
             <a:pPr algn="ctr">
               <a:buNone/>
             </a:pPr>
             <a:r>
-              <a:rPr lang="en-US" sz="1800" b="1" i="0" dirty="0">
-                <a:solidFill>
-                  <a:srgbClr val="8E6F3E"/>
-                </a:solidFill>
-              </a:rPr>
-              <a:t>QR PLACEHOLDER</a:t>
-            </a:r>
-          </a:p>
-          <a:p>
-            <a:pPr algn="ctr">
-              <a:buNone/>
-            </a:pPr>
-            <a:r>
-              <a:rPr lang="en-US" sz="1800" b="0" i="1" dirty="0">
+              <a:rPr lang="en-US" sz="1800" b="0" i="0" dirty="0">
                 <a:solidFill>
                   <a:srgbClr val="555960"/>
                 </a:solidFill>
               </a:rPr>
-              <a:t>feedback form pending</a:t>
-            </a:r>
-          </a:p>
-        </p:txBody>
-      </p:sp>
+              <a:t>Feedback QR</a:t>
+            </a:r>
+          </a:p>
+        </p:txBody>
+      </p:sp>
+      <p:grpSp>
+        <p:nvGrpSpPr>
+          <p:cNvPr id="152" name="QRVoidMark" descr="A large red X across the slot: the feedback form QR code has not been added yet."/>
+          <p:cNvGrpSpPr/>
+          <p:nvPr/>
+        </p:nvGrpSpPr>
+        <p:grpSpPr>
+          <a:xfrm>
+            <a:off x="3599505" y="2901513"/>
+            <a:ext cx="1944990" cy="1944990"/>
+            <a:chOff x="3599505" y="2901513"/>
+            <a:chExt cx="1944990" cy="1944990"/>
+          </a:xfrm>
+        </p:grpSpPr>
+        <p:cxnSp>
+          <p:nvCxnSpPr>
+            <p:cNvPr id="153" name="QRVoidStrokeTLBR"/>
+            <p:cNvCxnSpPr/>
+            <p:nvPr/>
+          </p:nvCxnSpPr>
+          <p:spPr>
+            <a:xfrm>
+              <a:off x="3599505" y="2901513"/>
+              <a:ext cx="1944990" cy="1944990"/>
+            </a:xfrm>
+            <a:prstGeom prst="straightConnector1">
+              <a:avLst/>
+            </a:prstGeom>
+            <a:ln w="101600" cap="rnd">
+              <a:solidFill>
+                <a:srgbClr val="C00000"/>
+              </a:solidFill>
+              <a:round/>
+            </a:ln>
+          </p:spPr>
+        </p:cxnSp>
+        <p:cxnSp>
+          <p:nvCxnSpPr>
+            <p:cNvPr id="154" name="QRVoidStrokeTRBL"/>
+            <p:cNvCxnSpPr/>
+            <p:nvPr/>
+          </p:nvCxnSpPr>
+          <p:spPr>
+            <a:xfrm flipH="1">
+              <a:off x="3599505" y="2901513"/>
+              <a:ext cx="1944990" cy="1944990"/>
+            </a:xfrm>
+            <a:prstGeom prst="straightConnector1">
+              <a:avLst/>
+            </a:prstGeom>
+            <a:ln w="101600" cap="rnd">
+              <a:solidFill>
+                <a:srgbClr val="C00000"/>
+              </a:solidFill>
+              <a:round/>
+            </a:ln>
+          </p:spPr>
+        </p:cxnSp>
+      </p:grpSp>
       <p:sp>
         <p:nvSpPr>
           <p:cNvPr id="150" name="Ital"/>
@@ -24025,7 +24163,7 @@
                   <a:srgbClr val="5C4826"/>
                 </a:solidFill>
               </a:rPr>
-              <a:t>Tomorrow: </a:t>
+              <a:t xml:space="preserve">Tomorrow: </a:t>
             </a:r>
             <a:r>
               <a:rPr lang="en-US" sz="1800" b="0" i="1" dirty="0">

--- a/course/lectures/act-2-delegation-and-control/02-modeling/2-2-Modeling-1-Purposeful-Reduction.pptx
+++ b/course/lectures/act-2-delegation-and-control/02-modeling/2-2-Modeling-1-Purposeful-Reduction.pptx
@@ -9,9 +9,9 @@
   </p:notesMasterIdLst>
   <p:sldIdLst>
     <p:sldId id="701" r:id="rId2"/>
+    <p:sldId id="900" r:id="rId39"/>
+    <p:sldId id="901" r:id="rId40"/>
     <p:sldId id="702" r:id="rId3"/>
-    <p:sldId id="703" r:id="rId4"/>
-    <p:sldId id="704" r:id="rId5"/>
     <p:sldId id="705" r:id="rId6"/>
     <p:sldId id="706" r:id="rId7"/>
     <p:sldId id="707" r:id="rId8"/>
@@ -533,6 +533,12 @@
               <a:t>Lecture 1 of 2 on Modeling: one model, one question. Lecture 2 turns to systems of many models. Today is learning how to make a model, not a catalogue of model types. [ASSUMPTION per plan section 8.1: deck filename 2-2-Modeling-1-Purposeful-Reduction.pptx pending author ratification.]</a:t>
             </a:r>
           </a:p>
+          <a:p>
+            <a:r>
+              <a:rPr dirty="0"/>
+              <a:t>Today’s spine is the production equation from the theory chapter. Delegation introduced that picture qualitatively; today we bring it back quantified and point at the one term Modeling acts on; Alignment will return to the same drawing from the other side. Open on it deliberately: the next two slides are the map for the whole of Act II, not a warm-up.</a:t>
+            </a:r>
+          </a:p>
         </p:txBody>
       </p:sp>
     </p:spTree>
@@ -1149,7 +1155,25 @@
           <a:p>
             <a:r>
               <a:rPr dirty="0"/>
-              <a:t>Bridge from the Agents unit (2-1): implementation is cheap to delegate, and we cannot and should not specify every realization choice. Delegation therefore creates a communication problem: what matters must survive the hop from engineer to agent. Modeling is the discipline that answers it.</a:t>
+              <a:t>Bridge from the Agents unit (2-1): implementation is cheap to delegate, and we cannot and should not specify every realization choice. Delegation therefore creates a problem of representation: what matters must survive the hop from engineer to agent. Modeling is the discipline that answers it.</a:t>
+            </a:r>
+          </a:p>
+          <a:p>
+            <a:r>
+              <a:rPr dirty="0"/>
+              <a:t>Retitle rationale: the previous two slides just named the problem as representational, not merely informational. The hop is not a bandwidth shortage; it is an encode-and-recover chain. The engineer encodes (E), the agent interprets (I), so this picture is the first two factors of the decomposition drawn as people rather than as arithmetic. That is why the gap now carries E and I tags.</a:t>
+            </a:r>
+          </a:p>
+          <a:p>
+            <a:r>
+              <a:rPr dirty="0"/>
+              <a:t>The gap is a property of delegation, not a failure of the agent. Keep that line — students reach for “the agent was not smart enough” first, and the whole lecture depends on refusing it.</a:t>
+            </a:r>
+          </a:p>
+          <a:p>
+            <a:r>
+              <a:rPr dirty="0"/>
+              <a:t>Leave the question standing and do not answer it here: what must a representation preserve for this task? The rest of the lecture is the answer. About 1.5 minutes.</a:t>
             </a:r>
           </a:p>
         </p:txBody>
@@ -1716,53 +1740,6 @@
 </p:notes>
 </file>
 
-<file path=ppt/notesSlides/notesSlide3.xml><?xml version="1.0" encoding="utf-8"?>
-<p:notes xmlns:a="http://schemas.openxmlformats.org/drawingml/2006/main" xmlns:r="http://schemas.openxmlformats.org/officeDocument/2006/relationships" xmlns:p="http://schemas.openxmlformats.org/presentationml/2006/main">
-  <p:cSld>
-    <p:spTree>
-      <p:nvGrpSpPr>
-        <p:cNvPr id="1" name=""/>
-        <p:cNvGrpSpPr/>
-        <p:nvPr/>
-      </p:nvGrpSpPr>
-      <p:grpSpPr>
-        <a:xfrm>
-          <a:off x="0" y="0"/>
-          <a:ext cx="0" cy="0"/>
-          <a:chOff x="0" y="0"/>
-          <a:chExt cx="0" cy="0"/>
-        </a:xfrm>
-      </p:grpSpPr>
-      <p:sp>
-        <p:nvSpPr>
-          <p:cNvPr id="2" name="Notes Placeholder 1"/>
-          <p:cNvSpPr>
-            <a:spLocks noGrp="1"/>
-          </p:cNvSpPr>
-          <p:nvPr>
-            <p:ph type="body" idx="1"/>
-          </p:nvPr>
-        </p:nvSpPr>
-        <p:spPr/>
-        <p:txBody>
-          <a:bodyPr/>
-          <a:lstStyle/>
-          <a:p>
-            <a:r>
-              <a:rPr dirty="0"/>
-              <a:t>One rich system, three radically smaller representations. Each card discards most of the program: a dependency graph keeps relationships, a state machine keeps transitions, a quantitative model keeps bounds. Build order on the board: remove information from copies of the panel rather than adding.</a:t>
-            </a:r>
-          </a:p>
-        </p:txBody>
-      </p:sp>
-    </p:spTree>
-  </p:cSld>
-  <p:clrMapOvr>
-    <a:masterClrMapping/>
-  </p:clrMapOvr>
-</p:notes>
-</file>
-
 <file path=ppt/notesSlides/notesSlide30.xml><?xml version="1.0" encoding="utf-8"?>
 <p:notes xmlns:a="http://schemas.openxmlformats.org/drawingml/2006/main" xmlns:r="http://schemas.openxmlformats.org/officeDocument/2006/relationships" xmlns:p="http://schemas.openxmlformats.org/presentationml/2006/main">
   <p:cSld>
@@ -1934,7 +1911,7 @@
 </p:notes>
 </file>
 
-<file path=ppt/notesSlides/notesSlide4.xml><?xml version="1.0" encoding="utf-8"?>
+<file path=ppt/notesSlides/notesSlide33.xml><?xml version="1.0" encoding="utf-8"?>
 <p:notes xmlns:a="http://schemas.openxmlformats.org/drawingml/2006/main" xmlns:r="http://schemas.openxmlformats.org/officeDocument/2006/relationships" xmlns:p="http://schemas.openxmlformats.org/presentationml/2006/main">
   <p:cSld>
     <p:spTree>
@@ -1968,7 +1945,108 @@
           <a:p>
             <a:r>
               <a:rPr dirty="0"/>
-              <a:t>The other half of the premise, on the same base figure: the few preserved distinctions in each of the three models, now accented. The edge set; the forbidden transition; the bound. The unit's premise verbatim: a model is useful because it leaves things out and makes explicit what must remain.</a:t>
+              <a:t>Whole system before the lever. Put the equation up and ask the class to name the four terms before you reveal the labels; give it about a minute, no more.</a:t>
+            </a:r>
+          </a:p>
+          <a:p>
+            <a:r>
+              <a:rPr dirty="0"/>
+              <a:t>T is an engineering task or task family, M the reasoning model, R the representation available to it, H the harness and process through which production is organized. For a fixed engineering environment, p(T,M,R,H) is the probability that one attempt produces an acceptable candidate.</a:t>
+            </a:r>
+          </a:p>
+          <a:p>
+            <a:r>
+              <a:rPr dirty="0"/>
+              <a:t>Keep the thing they care about on screen: does the engineering system produce the thing? Four levers sit inside that one number, and an engineering organization can reach for any of them.</a:t>
+            </a:r>
+          </a:p>
+          <a:p>
+            <a:r>
+              <a:rPr dirty="0"/>
+              <a:t>Do not say “Modeling” yet. Naming the lever here spends the next slide’s move, which is to open the probability and point at the one term Modeling acts on. About 2.5 minutes including the naming exchange.</a:t>
+            </a:r>
+          </a:p>
+        </p:txBody>
+      </p:sp>
+    </p:spTree>
+  </p:cSld>
+  <p:clrMapOvr>
+    <a:masterClrMapping/>
+  </p:clrMapOvr>
+</p:notes>
+</file>
+
+<file path=ppt/notesSlides/notesSlide34.xml><?xml version="1.0" encoding="utf-8"?>
+<p:notes xmlns:a="http://schemas.openxmlformats.org/drawingml/2006/main" xmlns:r="http://schemas.openxmlformats.org/officeDocument/2006/relationships" xmlns:p="http://schemas.openxmlformats.org/presentationml/2006/main">
+  <p:cSld>
+    <p:spTree>
+      <p:nvGrpSpPr>
+        <p:cNvPr id="1" name=""/>
+        <p:cNvGrpSpPr/>
+        <p:nvPr/>
+      </p:nvGrpSpPr>
+      <p:grpSpPr>
+        <a:xfrm>
+          <a:off x="0" y="0"/>
+          <a:ext cx="0" cy="0"/>
+          <a:chOff x="0" y="0"/>
+          <a:chExt cx="0" cy="0"/>
+        </a:xfrm>
+      </p:grpSpPr>
+      <p:sp>
+        <p:nvSpPr>
+          <p:cNvPr id="2" name="Notes Placeholder 1"/>
+          <p:cNvSpPr>
+            <a:spLocks noGrp="1"/>
+          </p:cNvSpPr>
+          <p:nvPr>
+            <p:ph type="body" idx="1"/>
+          </p:nvPr>
+        </p:nvSpPr>
+        <p:spPr/>
+        <p:txBody>
+          <a:bodyPr/>
+          <a:lstStyle/>
+          <a:p>
+            <a:r>
+              <a:rPr dirty="0"/>
+              <a:t>That single probability hides several distinct opportunities for failure. Open it: E is correct encoding of consequential intent, I correct interpretation of that encoding, L correct realization of the interpreted intent.</a:t>
+            </a:r>
+          </a:p>
+          <a:p>
+            <a:r>
+              <a:rPr dirty="0"/>
+              <a:t>Say the caveat out loud, and say it in these words: this is a chain decomposition, not an independence assumption. The stages will not in general be statistically independent. Students who have had a probability course will otherwise read the product as a claim of independence.</a:t>
+            </a:r>
+          </a:p>
+          <a:p>
+            <a:r>
+              <a:rPr dirty="0"/>
+              <a:t>LEVER DISTINCTION — the figure’s own annotations and the red arrow are about different levers, and a careless delivery makes the slide look self-contradicting. A better fabricator cannot raise P(E | R); a better representation can. Say exactly that. “Not raised by a better fabricator” sits under the first term, and the red arrow points at the same term, because the arrow is the representation lever and the annotation is the fabricator lever.</a:t>
+            </a:r>
+          </a:p>
+          <a:p>
+            <a:r>
+              <a:rPr dirty="0"/>
+              <a:t>R IN ALL THREE — long form puts an R in every factor, because one representation is held fixed across the whole chain. The overlay boxes only two. Name the asymmetry before a student asks: the lecture’s claim is about the two factors where representation does its work — did we manage to say the consequential thing, and did the agent manage to recover it. Realization is the agent doing work it already understood.</a:t>
+            </a:r>
+          </a:p>
+          <a:p>
+            <a:r>
+              <a:rPr dirty="0"/>
+              <a:t>The claim is deliberately twofold. Modeling helps the engineer encode consequential intent (P(E | R): did we manage to say it?) and helps the reasoner recover it (P(I | E, R): did the agent understand it?). After this slide, “we failed to say it” and “the agent failed to understand it” are two different failures with two different names.</a:t>
+            </a:r>
+          </a:p>
+          <a:p>
+            <a:r>
+              <a:rPr dirty="0"/>
+              <a:t>Do NOT show the limit equation here. It is held back to the capability slide later in the deck, where every symbol is already known.</a:t>
+            </a:r>
+          </a:p>
+          <a:p>
+            <a:r>
+              <a:rPr dirty="0"/>
+              <a:t>Click 2 brings in the red arrow and the closing question: so what makes one representation better than another? That question is the rest of the lecture. About 3 minutes.</a:t>
             </a:r>
           </a:p>
         </p:txBody>
@@ -4806,7 +4884,7 @@
             </a:r>
             <a:r>
               <a:rPr lang="en-US" b="1" u="none" dirty="0"/>
-              <a:t>		Details</a:t>
+              <a:t xml:space="preserve">		Details</a:t>
             </a:r>
           </a:p>
           <a:p>
@@ -4983,7 +5061,7 @@
             </a:r>
             <a:r>
               <a:rPr lang="en-US" b="1" u="none" dirty="0"/>
-              <a:t>		Details</a:t>
+              <a:t xml:space="preserve">		Details</a:t>
             </a:r>
           </a:p>
           <a:p>
@@ -6257,7 +6335,7 @@
                   <a:srgbClr val="555960"/>
                 </a:solidFill>
               </a:rPr>
-              <a:t>Lecture 1 </a:t>
+              <a:t xml:space="preserve">Lecture 1 </a:t>
             </a:r>
             <a:r>
               <a:rPr lang="en-US" sz="2000" dirty="0">
@@ -6273,7 +6351,7 @@
                   <a:srgbClr val="555960"/>
                 </a:solidFill>
               </a:rPr>
-              <a:t>: </a:t>
+              <a:t xml:space="preserve">: </a:t>
             </a:r>
             <a:r>
               <a:rPr lang="en-US" sz="2000" dirty="0">
@@ -12963,7 +13041,7 @@
                   <a:srgbClr val="8E6F3E"/>
                 </a:solidFill>
               </a:rPr>
-              <a:t>PROPERTY:  </a:t>
+              <a:t xml:space="preserve">PROPERTY:  </a:t>
             </a:r>
             <a:r>
               <a:rPr lang="en-US" sz="2200" b="1" dirty="0">
@@ -14679,7 +14757,7 @@
           <a:p>
             <a:r>
               <a:rPr lang="en-US" dirty="0"/>
-              <a:t>Delegation leaves an information problem</a:t>
+              <a:t>Delegation leaves a representation problem</a:t>
             </a:r>
           </a:p>
         </p:txBody>
@@ -14830,7 +14908,7 @@
                   <a:srgbClr val="5C4826"/>
                 </a:solidFill>
               </a:rPr>
-              <a:t>So what must remain explicit?</a:t>
+              <a:t>So what must a representation preserve for this task?</a:t>
             </a:r>
           </a:p>
         </p:txBody>
@@ -15062,6 +15140,102 @@
                 </a:solidFill>
               </a:rPr>
               <a:t>what matters must survive this hop</a:t>
+            </a:r>
+          </a:p>
+        </p:txBody>
+      </p:sp>
+      <p:sp>
+        <p:nvSpPr>
+          <p:cNvPr id="210" name="ETag"/>
+          <p:cNvSpPr txBox="1"/>
+          <p:nvPr/>
+        </p:nvSpPr>
+        <p:spPr>
+          <a:xfrm>
+            <a:off x="3200400" y="4130040"/>
+            <a:ext cx="1188720" cy="213360"/>
+          </a:xfrm>
+          <a:prstGeom prst="rect">
+            <a:avLst/>
+          </a:prstGeom>
+          <a:noFill/>
+          <a:ln>
+            <a:noFill/>
+          </a:ln>
+        </p:spPr>
+        <p:txBody>
+          <a:bodyPr wrap="square" lIns="0" tIns="0" rIns="0" bIns="0" anchor="t"/>
+          <a:lstStyle/>
+          <a:p>
+            <a:pPr algn="ctr">
+              <a:spcAft>
+                <a:spcPts val="0"/>
+              </a:spcAft>
+              <a:buNone/>
+            </a:pPr>
+            <a:r>
+              <a:rPr lang="en-US" sz="1200" b="1" i="1" dirty="0">
+                <a:solidFill>
+                  <a:srgbClr val="8E6F3E"/>
+                </a:solidFill>
+              </a:rPr>
+              <a:t>E</a:t>
+            </a:r>
+            <a:r>
+              <a:rPr lang="en-US" sz="1200" b="0" i="0" dirty="0">
+                <a:solidFill>
+                  <a:srgbClr val="555960"/>
+                </a:solidFill>
+              </a:rPr>
+              <a:t xml:space="preserve"> encode</a:t>
+            </a:r>
+          </a:p>
+        </p:txBody>
+      </p:sp>
+      <p:sp>
+        <p:nvSpPr>
+          <p:cNvPr id="211" name="ITag"/>
+          <p:cNvSpPr txBox="1"/>
+          <p:nvPr/>
+        </p:nvSpPr>
+        <p:spPr>
+          <a:xfrm>
+            <a:off x="4754880" y="4130040"/>
+            <a:ext cx="1188720" cy="213360"/>
+          </a:xfrm>
+          <a:prstGeom prst="rect">
+            <a:avLst/>
+          </a:prstGeom>
+          <a:noFill/>
+          <a:ln>
+            <a:noFill/>
+          </a:ln>
+        </p:spPr>
+        <p:txBody>
+          <a:bodyPr wrap="square" lIns="0" tIns="0" rIns="0" bIns="0" anchor="t"/>
+          <a:lstStyle/>
+          <a:p>
+            <a:pPr algn="ctr">
+              <a:spcAft>
+                <a:spcPts val="0"/>
+              </a:spcAft>
+              <a:buNone/>
+            </a:pPr>
+            <a:r>
+              <a:rPr lang="en-US" sz="1200" b="1" i="1" dirty="0">
+                <a:solidFill>
+                  <a:srgbClr val="8E6F3E"/>
+                </a:solidFill>
+              </a:rPr>
+              <a:t>I</a:t>
+            </a:r>
+            <a:r>
+              <a:rPr lang="en-US" sz="1200" b="0" i="0" dirty="0">
+                <a:solidFill>
+                  <a:srgbClr val="555960"/>
+                </a:solidFill>
+              </a:rPr>
+              <a:t xml:space="preserve"> interpret</a:t>
             </a:r>
           </a:p>
         </p:txBody>
@@ -20356,7 +20530,7 @@
                   <a:srgbClr val="555960"/>
                 </a:solidFill>
               </a:rPr>
-              <a:t> — a purposeful reduction of some territory that preserves selected properties for engineering questions.</a:t>
+              <a:t xml:space="preserve"> — a purposeful reduction of some territory that preserves selected properties for engineering questions.</a:t>
             </a:r>
           </a:p>
           <a:p>
@@ -20380,7 +20554,7 @@
                   <a:srgbClr val="555960"/>
                 </a:solidFill>
               </a:rPr>
-              <a:t> — a concrete form in which a model is inspected, manipulated, analyzed, or consumed.</a:t>
+              <a:t xml:space="preserve"> — a concrete form in which a model is inspected, manipulated, analyzed, or consumed.</a:t>
             </a:r>
           </a:p>
         </p:txBody>
@@ -20874,7 +21048,7 @@
                   <a:srgbClr val="5C4826"/>
                 </a:solidFill>
               </a:rPr>
-              <a:t>  staged: published</a:t>
+              <a:t xml:space="preserve">  staged: published</a:t>
             </a:r>
           </a:p>
           <a:p>
@@ -20890,7 +21064,7 @@
                   <a:srgbClr val="5C4826"/>
                 </a:solidFill>
               </a:rPr>
-              <a:t>  published: recorded</a:t>
+              <a:t xml:space="preserve">  published: recorded</a:t>
             </a:r>
           </a:p>
           <a:p>
@@ -20983,1671 +21157,6 @@
                 </a:solidFill>
               </a:rPr>
               <a:t>Three representations. One model.</a:t>
-            </a:r>
-          </a:p>
-        </p:txBody>
-      </p:sp>
-    </p:spTree>
-  </p:cSld>
-  <p:clrMapOvr>
-    <a:masterClrMapping/>
-  </p:clrMapOvr>
-</p:sld>
-</file>
-
-<file path=ppt/slides/slide3.xml><?xml version="1.0" encoding="utf-8"?>
-<p:sld xmlns:a="http://schemas.openxmlformats.org/drawingml/2006/main" xmlns:r="http://schemas.openxmlformats.org/officeDocument/2006/relationships" xmlns:p="http://schemas.openxmlformats.org/presentationml/2006/main">
-  <p:cSld>
-    <p:spTree>
-      <p:nvGrpSpPr>
-        <p:cNvPr id="1" name=""/>
-        <p:cNvGrpSpPr/>
-        <p:nvPr/>
-      </p:nvGrpSpPr>
-      <p:grpSpPr>
-        <a:xfrm>
-          <a:off x="0" y="0"/>
-          <a:ext cx="0" cy="0"/>
-          <a:chOff x="0" y="0"/>
-          <a:chExt cx="0" cy="0"/>
-        </a:xfrm>
-      </p:grpSpPr>
-      <p:sp>
-        <p:nvSpPr>
-          <p:cNvPr id="2" name="Title 1"/>
-          <p:cNvSpPr>
-            <a:spLocks noGrp="1"/>
-          </p:cNvSpPr>
-          <p:nvPr>
-            <p:ph type="title"/>
-          </p:nvPr>
-        </p:nvSpPr>
-        <p:spPr/>
-        <p:txBody>
-          <a:bodyPr>
-            <a:normAutofit fontScale="90000"/>
-          </a:bodyPr>
-          <a:lstStyle/>
-          <a:p>
-            <a:r>
-              <a:rPr lang="en-US" dirty="0"/>
-              <a:t>A model is useful because it leaves things out</a:t>
-            </a:r>
-          </a:p>
-        </p:txBody>
-      </p:sp>
-      <p:sp>
-        <p:nvSpPr>
-          <p:cNvPr id="3" name="Slide Number Placeholder 3"/>
-          <p:cNvSpPr>
-            <a:spLocks noGrp="1"/>
-          </p:cNvSpPr>
-          <p:nvPr>
-            <p:ph type="sldNum" sz="quarter" idx="4"/>
-          </p:nvPr>
-        </p:nvSpPr>
-        <p:spPr/>
-        <p:txBody>
-          <a:bodyPr/>
-          <a:lstStyle/>
-          <a:p>
-            <a:fld id="{B7EB45DA-9A0D-DC49-8E02-F30A5DDC21C3}" type="slidenum">
-              <a:rPr lang="en-US" smtClean="0"/>
-              <a:t>3</a:t>
-            </a:fld>
-            <a:endParaRPr lang="en-US"/>
-          </a:p>
-        </p:txBody>
-      </p:sp>
-      <p:sp>
-        <p:nvSpPr>
-          <p:cNvPr id="200" name="Panel"/>
-          <p:cNvSpPr/>
-          <p:nvPr/>
-        </p:nvSpPr>
-        <p:spPr>
-          <a:xfrm>
-            <a:off x="1371600" y="1005840"/>
-            <a:ext cx="6400800" cy="1554480"/>
-          </a:xfrm>
-          <a:prstGeom prst="rect">
-            <a:avLst/>
-          </a:prstGeom>
-          <a:solidFill>
-            <a:srgbClr val="F5F1E8"/>
-          </a:solidFill>
-          <a:ln w="12700">
-            <a:solidFill>
-              <a:srgbClr val="C9B991"/>
-            </a:solidFill>
-          </a:ln>
-        </p:spPr>
-        <p:txBody>
-          <a:bodyPr/>
-          <a:lstStyle/>
-          <a:p>
-            <a:endParaRPr lang="en-US"/>
-          </a:p>
-        </p:txBody>
-      </p:sp>
-      <p:sp>
-        <p:nvSpPr>
-          <p:cNvPr id="201" name="PL0"/>
-          <p:cNvSpPr txBox="1"/>
-          <p:nvPr/>
-        </p:nvSpPr>
-        <p:spPr>
-          <a:xfrm>
-            <a:off x="1463040" y="1051560"/>
-            <a:ext cx="1371600" cy="228600"/>
-          </a:xfrm>
-          <a:prstGeom prst="rect">
-            <a:avLst/>
-          </a:prstGeom>
-          <a:noFill/>
-          <a:ln>
-            <a:noFill/>
-          </a:ln>
-        </p:spPr>
-        <p:txBody>
-          <a:bodyPr wrap="square" lIns="0" tIns="0" rIns="0" bIns="0" anchor="t"/>
-          <a:lstStyle/>
-          <a:p>
-            <a:pPr algn="l">
-              <a:buNone/>
-            </a:pPr>
-            <a:r>
-              <a:rPr lang="en-US" sz="1400" b="0" i="0" dirty="0">
-                <a:solidFill>
-                  <a:srgbClr val="555960"/>
-                </a:solidFill>
-              </a:rPr>
-              <a:t>THE SYSTEM</a:t>
-            </a:r>
-          </a:p>
-        </p:txBody>
-      </p:sp>
-      <p:sp>
-        <p:nvSpPr>
-          <p:cNvPr id="210" name="SV0"/>
-          <p:cNvSpPr/>
-          <p:nvPr/>
-        </p:nvSpPr>
-        <p:spPr>
-          <a:xfrm>
-            <a:off x="1645920" y="1371600"/>
-            <a:ext cx="548640" cy="274320"/>
-          </a:xfrm>
-          <a:prstGeom prst="rect">
-            <a:avLst/>
-          </a:prstGeom>
-          <a:solidFill>
-            <a:srgbClr val="FBF8F2"/>
-          </a:solidFill>
-          <a:ln w="12700">
-            <a:solidFill>
-              <a:srgbClr val="C9B991"/>
-            </a:solidFill>
-          </a:ln>
-        </p:spPr>
-        <p:txBody>
-          <a:bodyPr/>
-          <a:lstStyle/>
-          <a:p>
-            <a:endParaRPr lang="en-US"/>
-          </a:p>
-        </p:txBody>
-      </p:sp>
-      <p:sp>
-        <p:nvSpPr>
-          <p:cNvPr id="211" name="SV1"/>
-          <p:cNvSpPr/>
-          <p:nvPr/>
-        </p:nvSpPr>
-        <p:spPr>
-          <a:xfrm>
-            <a:off x="2560320" y="1188720"/>
-            <a:ext cx="548640" cy="274320"/>
-          </a:xfrm>
-          <a:prstGeom prst="rect">
-            <a:avLst/>
-          </a:prstGeom>
-          <a:solidFill>
-            <a:srgbClr val="FBF8F2"/>
-          </a:solidFill>
-          <a:ln w="12700">
-            <a:solidFill>
-              <a:srgbClr val="C9B991"/>
-            </a:solidFill>
-          </a:ln>
-        </p:spPr>
-        <p:txBody>
-          <a:bodyPr/>
-          <a:lstStyle/>
-          <a:p>
-            <a:endParaRPr lang="en-US"/>
-          </a:p>
-        </p:txBody>
-      </p:sp>
-      <p:sp>
-        <p:nvSpPr>
-          <p:cNvPr id="212" name="SV2"/>
-          <p:cNvSpPr/>
-          <p:nvPr/>
-        </p:nvSpPr>
-        <p:spPr>
-          <a:xfrm>
-            <a:off x="2286000" y="1828800"/>
-            <a:ext cx="548640" cy="274320"/>
-          </a:xfrm>
-          <a:prstGeom prst="rect">
-            <a:avLst/>
-          </a:prstGeom>
-          <a:solidFill>
-            <a:srgbClr val="FBF8F2"/>
-          </a:solidFill>
-          <a:ln w="12700">
-            <a:solidFill>
-              <a:srgbClr val="C9B991"/>
-            </a:solidFill>
-          </a:ln>
-        </p:spPr>
-        <p:txBody>
-          <a:bodyPr/>
-          <a:lstStyle/>
-          <a:p>
-            <a:endParaRPr lang="en-US"/>
-          </a:p>
-        </p:txBody>
-      </p:sp>
-      <p:sp>
-        <p:nvSpPr>
-          <p:cNvPr id="213" name="SV3"/>
-          <p:cNvSpPr/>
-          <p:nvPr/>
-        </p:nvSpPr>
-        <p:spPr>
-          <a:xfrm>
-            <a:off x="3108960" y="1508760"/>
-            <a:ext cx="548640" cy="274320"/>
-          </a:xfrm>
-          <a:prstGeom prst="rect">
-            <a:avLst/>
-          </a:prstGeom>
-          <a:solidFill>
-            <a:srgbClr val="FBF8F2"/>
-          </a:solidFill>
-          <a:ln w="12700">
-            <a:solidFill>
-              <a:srgbClr val="C9B991"/>
-            </a:solidFill>
-          </a:ln>
-        </p:spPr>
-        <p:txBody>
-          <a:bodyPr/>
-          <a:lstStyle/>
-          <a:p>
-            <a:endParaRPr lang="en-US"/>
-          </a:p>
-        </p:txBody>
-      </p:sp>
-      <p:sp>
-        <p:nvSpPr>
-          <p:cNvPr id="214" name="SV4"/>
-          <p:cNvSpPr/>
-          <p:nvPr/>
-        </p:nvSpPr>
-        <p:spPr>
-          <a:xfrm>
-            <a:off x="3840480" y="1188720"/>
-            <a:ext cx="548640" cy="274320"/>
-          </a:xfrm>
-          <a:prstGeom prst="rect">
-            <a:avLst/>
-          </a:prstGeom>
-          <a:solidFill>
-            <a:srgbClr val="FBF8F2"/>
-          </a:solidFill>
-          <a:ln w="12700">
-            <a:solidFill>
-              <a:srgbClr val="C9B991"/>
-            </a:solidFill>
-          </a:ln>
-        </p:spPr>
-        <p:txBody>
-          <a:bodyPr/>
-          <a:lstStyle/>
-          <a:p>
-            <a:endParaRPr lang="en-US"/>
-          </a:p>
-        </p:txBody>
-      </p:sp>
-      <p:sp>
-        <p:nvSpPr>
-          <p:cNvPr id="215" name="SV5"/>
-          <p:cNvSpPr/>
-          <p:nvPr/>
-        </p:nvSpPr>
-        <p:spPr>
-          <a:xfrm>
-            <a:off x="3657600" y="1965960"/>
-            <a:ext cx="548640" cy="274320"/>
-          </a:xfrm>
-          <a:prstGeom prst="rect">
-            <a:avLst/>
-          </a:prstGeom>
-          <a:solidFill>
-            <a:srgbClr val="FBF8F2"/>
-          </a:solidFill>
-          <a:ln w="12700">
-            <a:solidFill>
-              <a:srgbClr val="C9B991"/>
-            </a:solidFill>
-          </a:ln>
-        </p:spPr>
-        <p:txBody>
-          <a:bodyPr/>
-          <a:lstStyle/>
-          <a:p>
-            <a:endParaRPr lang="en-US"/>
-          </a:p>
-        </p:txBody>
-      </p:sp>
-      <p:sp>
-        <p:nvSpPr>
-          <p:cNvPr id="216" name="Q0"/>
-          <p:cNvSpPr/>
-          <p:nvPr/>
-        </p:nvSpPr>
-        <p:spPr>
-          <a:xfrm>
-            <a:off x="4846320" y="1600200"/>
-            <a:ext cx="182880" cy="182880"/>
-          </a:xfrm>
-          <a:prstGeom prst="rect">
-            <a:avLst/>
-          </a:prstGeom>
-          <a:solidFill>
-            <a:srgbClr val="C9B991"/>
-          </a:solidFill>
-          <a:ln>
-            <a:noFill/>
-          </a:ln>
-        </p:spPr>
-        <p:txBody>
-          <a:bodyPr/>
-          <a:lstStyle/>
-          <a:p>
-            <a:endParaRPr lang="en-US"/>
-          </a:p>
-        </p:txBody>
-      </p:sp>
-      <p:sp>
-        <p:nvSpPr>
-          <p:cNvPr id="217" name="Q1"/>
-          <p:cNvSpPr/>
-          <p:nvPr/>
-        </p:nvSpPr>
-        <p:spPr>
-          <a:xfrm>
-            <a:off x="5074920" y="1600200"/>
-            <a:ext cx="182880" cy="182880"/>
-          </a:xfrm>
-          <a:prstGeom prst="rect">
-            <a:avLst/>
-          </a:prstGeom>
-          <a:solidFill>
-            <a:srgbClr val="C9B991"/>
-          </a:solidFill>
-          <a:ln>
-            <a:noFill/>
-          </a:ln>
-        </p:spPr>
-        <p:txBody>
-          <a:bodyPr/>
-          <a:lstStyle/>
-          <a:p>
-            <a:endParaRPr lang="en-US"/>
-          </a:p>
-        </p:txBody>
-      </p:sp>
-      <p:sp>
-        <p:nvSpPr>
-          <p:cNvPr id="218" name="Q2"/>
-          <p:cNvSpPr/>
-          <p:nvPr/>
-        </p:nvSpPr>
-        <p:spPr>
-          <a:xfrm>
-            <a:off x="5303520" y="1600200"/>
-            <a:ext cx="182880" cy="182880"/>
-          </a:xfrm>
-          <a:prstGeom prst="rect">
-            <a:avLst/>
-          </a:prstGeom>
-          <a:solidFill>
-            <a:srgbClr val="C9B991"/>
-          </a:solidFill>
-          <a:ln>
-            <a:noFill/>
-          </a:ln>
-        </p:spPr>
-        <p:txBody>
-          <a:bodyPr/>
-          <a:lstStyle/>
-          <a:p>
-            <a:endParaRPr lang="en-US"/>
-          </a:p>
-        </p:txBody>
-      </p:sp>
-      <p:sp>
-        <p:nvSpPr>
-          <p:cNvPr id="219" name="DB1"/>
-          <p:cNvSpPr/>
-          <p:nvPr/>
-        </p:nvSpPr>
-        <p:spPr>
-          <a:xfrm>
-            <a:off x="5943600" y="1280160"/>
-            <a:ext cx="457200" cy="548640"/>
-          </a:xfrm>
-          <a:prstGeom prst="can">
-            <a:avLst/>
-          </a:prstGeom>
-          <a:solidFill>
-            <a:srgbClr val="FBF8F2"/>
-          </a:solidFill>
-          <a:ln w="12700">
-            <a:solidFill>
-              <a:srgbClr val="555960"/>
-            </a:solidFill>
-          </a:ln>
-        </p:spPr>
-        <p:txBody>
-          <a:bodyPr/>
-          <a:lstStyle/>
-          <a:p>
-            <a:endParaRPr lang="en-US"/>
-          </a:p>
-        </p:txBody>
-      </p:sp>
-      <p:sp>
-        <p:nvSpPr>
-          <p:cNvPr id="220" name="U1"/>
-          <p:cNvSpPr/>
-          <p:nvPr/>
-        </p:nvSpPr>
-        <p:spPr>
-          <a:xfrm>
-            <a:off x="6583680" y="1965960"/>
-            <a:ext cx="182880" cy="182880"/>
-          </a:xfrm>
-          <a:prstGeom prst="ellipse">
-            <a:avLst/>
-          </a:prstGeom>
-          <a:solidFill>
-            <a:srgbClr val="FBF8F2"/>
-          </a:solidFill>
-          <a:ln w="12700">
-            <a:solidFill>
-              <a:srgbClr val="555960"/>
-            </a:solidFill>
-          </a:ln>
-        </p:spPr>
-        <p:txBody>
-          <a:bodyPr/>
-          <a:lstStyle/>
-          <a:p>
-            <a:endParaRPr lang="en-US"/>
-          </a:p>
-        </p:txBody>
-      </p:sp>
-      <p:sp>
-        <p:nvSpPr>
-          <p:cNvPr id="221" name="U2"/>
-          <p:cNvSpPr/>
-          <p:nvPr/>
-        </p:nvSpPr>
-        <p:spPr>
-          <a:xfrm>
-            <a:off x="6812280" y="1965960"/>
-            <a:ext cx="182880" cy="182880"/>
-          </a:xfrm>
-          <a:prstGeom prst="ellipse">
-            <a:avLst/>
-          </a:prstGeom>
-          <a:solidFill>
-            <a:srgbClr val="FBF8F2"/>
-          </a:solidFill>
-          <a:ln w="12700">
-            <a:solidFill>
-              <a:srgbClr val="555960"/>
-            </a:solidFill>
-          </a:ln>
-        </p:spPr>
-        <p:txBody>
-          <a:bodyPr/>
-          <a:lstStyle/>
-          <a:p>
-            <a:endParaRPr lang="en-US"/>
-          </a:p>
-        </p:txBody>
-      </p:sp>
-      <p:sp>
-        <p:nvSpPr>
-          <p:cNvPr id="222" name="PL1"/>
-          <p:cNvSpPr txBox="1"/>
-          <p:nvPr/>
-        </p:nvSpPr>
-        <p:spPr>
-          <a:xfrm>
-            <a:off x="1645920" y="2194560"/>
-            <a:ext cx="1005840" cy="228600"/>
-          </a:xfrm>
-          <a:prstGeom prst="rect">
-            <a:avLst/>
-          </a:prstGeom>
-          <a:noFill/>
-          <a:ln>
-            <a:noFill/>
-          </a:ln>
-        </p:spPr>
-        <p:txBody>
-          <a:bodyPr wrap="square" lIns="0" tIns="0" rIns="0" bIns="0" anchor="t"/>
-          <a:lstStyle/>
-          <a:p>
-            <a:pPr algn="l">
-              <a:buNone/>
-            </a:pPr>
-            <a:r>
-              <a:rPr lang="en-US" sz="1400" b="0" i="0" dirty="0">
-                <a:solidFill>
-                  <a:srgbClr val="555960"/>
-                </a:solidFill>
-              </a:rPr>
-              <a:t>SERVICES</a:t>
-            </a:r>
-          </a:p>
-        </p:txBody>
-      </p:sp>
-      <p:sp>
-        <p:nvSpPr>
-          <p:cNvPr id="223" name="PL2"/>
-          <p:cNvSpPr txBox="1"/>
-          <p:nvPr/>
-        </p:nvSpPr>
-        <p:spPr>
-          <a:xfrm>
-            <a:off x="4846320" y="1828800"/>
-            <a:ext cx="731520" cy="228600"/>
-          </a:xfrm>
-          <a:prstGeom prst="rect">
-            <a:avLst/>
-          </a:prstGeom>
-          <a:noFill/>
-          <a:ln>
-            <a:noFill/>
-          </a:ln>
-        </p:spPr>
-        <p:txBody>
-          <a:bodyPr wrap="square" lIns="0" tIns="0" rIns="0" bIns="0" anchor="t"/>
-          <a:lstStyle/>
-          <a:p>
-            <a:pPr algn="l">
-              <a:buNone/>
-            </a:pPr>
-            <a:r>
-              <a:rPr lang="en-US" sz="1400" b="0" i="0" dirty="0">
-                <a:solidFill>
-                  <a:srgbClr val="555960"/>
-                </a:solidFill>
-              </a:rPr>
-              <a:t>QUEUE</a:t>
-            </a:r>
-          </a:p>
-        </p:txBody>
-      </p:sp>
-      <p:sp>
-        <p:nvSpPr>
-          <p:cNvPr id="224" name="PL3"/>
-          <p:cNvSpPr txBox="1"/>
-          <p:nvPr/>
-        </p:nvSpPr>
-        <p:spPr>
-          <a:xfrm>
-            <a:off x="5897880" y="1874520"/>
-            <a:ext cx="548640" cy="228600"/>
-          </a:xfrm>
-          <a:prstGeom prst="rect">
-            <a:avLst/>
-          </a:prstGeom>
-          <a:noFill/>
-          <a:ln>
-            <a:noFill/>
-          </a:ln>
-        </p:spPr>
-        <p:txBody>
-          <a:bodyPr wrap="square" lIns="0" tIns="0" rIns="0" bIns="0" anchor="t"/>
-          <a:lstStyle/>
-          <a:p>
-            <a:pPr algn="l">
-              <a:buNone/>
-            </a:pPr>
-            <a:r>
-              <a:rPr lang="en-US" sz="1400" b="0" i="0" dirty="0">
-                <a:solidFill>
-                  <a:srgbClr val="555960"/>
-                </a:solidFill>
-              </a:rPr>
-              <a:t>DB</a:t>
-            </a:r>
-          </a:p>
-        </p:txBody>
-      </p:sp>
-      <p:sp>
-        <p:nvSpPr>
-          <p:cNvPr id="225" name="PL4"/>
-          <p:cNvSpPr txBox="1"/>
-          <p:nvPr/>
-        </p:nvSpPr>
-        <p:spPr>
-          <a:xfrm>
-            <a:off x="6492240" y="2194560"/>
-            <a:ext cx="731520" cy="228600"/>
-          </a:xfrm>
-          <a:prstGeom prst="rect">
-            <a:avLst/>
-          </a:prstGeom>
-          <a:noFill/>
-          <a:ln>
-            <a:noFill/>
-          </a:ln>
-        </p:spPr>
-        <p:txBody>
-          <a:bodyPr wrap="square" lIns="0" tIns="0" rIns="0" bIns="0" anchor="t"/>
-          <a:lstStyle/>
-          <a:p>
-            <a:pPr algn="l">
-              <a:buNone/>
-            </a:pPr>
-            <a:r>
-              <a:rPr lang="en-US" sz="1400" b="0" i="0" dirty="0">
-                <a:solidFill>
-                  <a:srgbClr val="555960"/>
-                </a:solidFill>
-              </a:rPr>
-              <a:t>USERS</a:t>
-            </a:r>
-          </a:p>
-        </p:txBody>
-      </p:sp>
-      <p:cxnSp>
-        <p:nvCxnSpPr>
-          <p:cNvPr id="230" name="W0"/>
-          <p:cNvCxnSpPr/>
-          <p:nvPr/>
-        </p:nvCxnSpPr>
-        <p:spPr>
-          <a:xfrm>
-            <a:off x="3108960" y="1325880"/>
-            <a:ext cx="731520" cy="0"/>
-          </a:xfrm>
-          <a:prstGeom prst="straightConnector1">
-            <a:avLst/>
-          </a:prstGeom>
-          <a:ln w="9525">
-            <a:solidFill>
-              <a:srgbClr val="555960"/>
-            </a:solidFill>
-          </a:ln>
-        </p:spPr>
-      </p:cxnSp>
-      <p:cxnSp>
-        <p:nvCxnSpPr>
-          <p:cNvPr id="231" name="W1"/>
-          <p:cNvCxnSpPr/>
-          <p:nvPr/>
-        </p:nvCxnSpPr>
-        <p:spPr>
-          <a:xfrm>
-            <a:off x="2194560" y="1645920"/>
-            <a:ext cx="365760" cy="182880"/>
-          </a:xfrm>
-          <a:prstGeom prst="straightConnector1">
-            <a:avLst/>
-          </a:prstGeom>
-          <a:ln w="9525">
-            <a:solidFill>
-              <a:srgbClr val="555960"/>
-            </a:solidFill>
-          </a:ln>
-        </p:spPr>
-      </p:cxnSp>
-      <p:cxnSp>
-        <p:nvCxnSpPr>
-          <p:cNvPr id="232" name="W2"/>
-          <p:cNvCxnSpPr/>
-          <p:nvPr/>
-        </p:nvCxnSpPr>
-        <p:spPr>
-          <a:xfrm>
-            <a:off x="3657600" y="1645920"/>
-            <a:ext cx="1188720" cy="45720"/>
-          </a:xfrm>
-          <a:prstGeom prst="straightConnector1">
-            <a:avLst/>
-          </a:prstGeom>
-          <a:ln w="9525">
-            <a:solidFill>
-              <a:srgbClr val="555960"/>
-            </a:solidFill>
-          </a:ln>
-        </p:spPr>
-      </p:cxnSp>
-      <p:cxnSp>
-        <p:nvCxnSpPr>
-          <p:cNvPr id="233" name="W3"/>
-          <p:cNvCxnSpPr/>
-          <p:nvPr/>
-        </p:nvCxnSpPr>
-        <p:spPr>
-          <a:xfrm>
-            <a:off x="4389120" y="1325880"/>
-            <a:ext cx="1554480" cy="228600"/>
-          </a:xfrm>
-          <a:prstGeom prst="straightConnector1">
-            <a:avLst/>
-          </a:prstGeom>
-          <a:ln w="9525">
-            <a:solidFill>
-              <a:srgbClr val="555960"/>
-            </a:solidFill>
-          </a:ln>
-        </p:spPr>
-      </p:cxnSp>
-      <p:cxnSp>
-        <p:nvCxnSpPr>
-          <p:cNvPr id="234" name="W4"/>
-          <p:cNvCxnSpPr/>
-          <p:nvPr/>
-        </p:nvCxnSpPr>
-        <p:spPr>
-          <a:xfrm>
-            <a:off x="2834640" y="1965960"/>
-            <a:ext cx="822960" cy="137160"/>
-          </a:xfrm>
-          <a:prstGeom prst="straightConnector1">
-            <a:avLst/>
-          </a:prstGeom>
-          <a:ln w="9525">
-            <a:solidFill>
-              <a:srgbClr val="555960"/>
-            </a:solidFill>
-          </a:ln>
-        </p:spPr>
-      </p:cxnSp>
-      <p:cxnSp>
-        <p:nvCxnSpPr>
-          <p:cNvPr id="235" name="W5"/>
-          <p:cNvCxnSpPr/>
-          <p:nvPr/>
-        </p:nvCxnSpPr>
-        <p:spPr>
-          <a:xfrm flipV="1">
-            <a:off x="5486400" y="1600200"/>
-            <a:ext cx="457200" cy="91440"/>
-          </a:xfrm>
-          <a:prstGeom prst="straightConnector1">
-            <a:avLst/>
-          </a:prstGeom>
-          <a:ln w="9525">
-            <a:solidFill>
-              <a:srgbClr val="555960"/>
-            </a:solidFill>
-          </a:ln>
-        </p:spPr>
-      </p:cxnSp>
-      <p:cxnSp>
-        <p:nvCxnSpPr>
-          <p:cNvPr id="236" name="W6"/>
-          <p:cNvCxnSpPr/>
-          <p:nvPr/>
-        </p:nvCxnSpPr>
-        <p:spPr>
-          <a:xfrm>
-            <a:off x="6400800" y="1554480"/>
-            <a:ext cx="182880" cy="502920"/>
-          </a:xfrm>
-          <a:prstGeom prst="straightConnector1">
-            <a:avLst/>
-          </a:prstGeom>
-          <a:ln w="9525">
-            <a:solidFill>
-              <a:srgbClr val="555960"/>
-            </a:solidFill>
-          </a:ln>
-        </p:spPr>
-      </p:cxnSp>
-      <p:cxnSp>
-        <p:nvCxnSpPr>
-          <p:cNvPr id="240" name="AR0"/>
-          <p:cNvCxnSpPr/>
-          <p:nvPr/>
-        </p:nvCxnSpPr>
-        <p:spPr>
-          <a:xfrm>
-            <a:off x="1613916" y="2606040"/>
-            <a:ext cx="0" cy="310896"/>
-          </a:xfrm>
-          <a:prstGeom prst="straightConnector1">
-            <a:avLst/>
-          </a:prstGeom>
-          <a:ln w="28575">
-            <a:solidFill>
-              <a:srgbClr val="8E6F3E"/>
-            </a:solidFill>
-            <a:tailEnd type="triangle" w="med" len="med"/>
-          </a:ln>
-        </p:spPr>
-      </p:cxnSp>
-      <p:cxnSp>
-        <p:nvCxnSpPr>
-          <p:cNvPr id="241" name="AR1"/>
-          <p:cNvCxnSpPr/>
-          <p:nvPr/>
-        </p:nvCxnSpPr>
-        <p:spPr>
-          <a:xfrm>
-            <a:off x="4567428" y="2606040"/>
-            <a:ext cx="0" cy="310896"/>
-          </a:xfrm>
-          <a:prstGeom prst="straightConnector1">
-            <a:avLst/>
-          </a:prstGeom>
-          <a:ln w="28575">
-            <a:solidFill>
-              <a:srgbClr val="8E6F3E"/>
-            </a:solidFill>
-            <a:tailEnd type="triangle" w="med" len="med"/>
-          </a:ln>
-        </p:spPr>
-      </p:cxnSp>
-      <p:cxnSp>
-        <p:nvCxnSpPr>
-          <p:cNvPr id="242" name="AR2"/>
-          <p:cNvCxnSpPr/>
-          <p:nvPr/>
-        </p:nvCxnSpPr>
-        <p:spPr>
-          <a:xfrm>
-            <a:off x="7520940" y="2606040"/>
-            <a:ext cx="0" cy="310896"/>
-          </a:xfrm>
-          <a:prstGeom prst="straightConnector1">
-            <a:avLst/>
-          </a:prstGeom>
-          <a:ln w="28575">
-            <a:solidFill>
-              <a:srgbClr val="8E6F3E"/>
-            </a:solidFill>
-            <a:tailEnd type="triangle" w="med" len="med"/>
-          </a:ln>
-        </p:spPr>
-      </p:cxnSp>
-      <p:sp>
-        <p:nvSpPr>
-          <p:cNvPr id="250" name="H0"/>
-          <p:cNvSpPr/>
-          <p:nvPr/>
-        </p:nvSpPr>
-        <p:spPr>
-          <a:xfrm>
-            <a:off x="274320" y="2926080"/>
-            <a:ext cx="2679192" cy="457200"/>
-          </a:xfrm>
-          <a:prstGeom prst="rect">
-            <a:avLst/>
-          </a:prstGeom>
-          <a:solidFill>
-            <a:srgbClr val="8E6F3E"/>
-          </a:solidFill>
-          <a:ln>
-            <a:noFill/>
-          </a:ln>
-        </p:spPr>
-        <p:txBody>
-          <a:bodyPr wrap="square" lIns="27432" tIns="22860" rIns="27432" bIns="22860" anchor="ctr"/>
-          <a:lstStyle/>
-          <a:p>
-            <a:pPr algn="ctr">
-              <a:buNone/>
-            </a:pPr>
-            <a:r>
-              <a:rPr lang="en-US" sz="2000" b="1" i="0" dirty="0">
-                <a:solidFill>
-                  <a:srgbClr val="FFFFFF"/>
-                </a:solidFill>
-              </a:rPr>
-              <a:t>DEPENDENCY</a:t>
-            </a:r>
-          </a:p>
-        </p:txBody>
-      </p:sp>
-      <p:sp>
-        <p:nvSpPr>
-          <p:cNvPr id="253" name="B0"/>
-          <p:cNvSpPr/>
-          <p:nvPr/>
-        </p:nvSpPr>
-        <p:spPr>
-          <a:xfrm>
-            <a:off x="274320" y="3429000"/>
-            <a:ext cx="2679192" cy="1371600"/>
-          </a:xfrm>
-          <a:prstGeom prst="rect">
-            <a:avLst/>
-          </a:prstGeom>
-          <a:solidFill>
-            <a:srgbClr val="FBF8F2"/>
-          </a:solidFill>
-          <a:ln w="12700">
-            <a:solidFill>
-              <a:srgbClr val="C9B991"/>
-            </a:solidFill>
-          </a:ln>
-        </p:spPr>
-        <p:txBody>
-          <a:bodyPr/>
-          <a:lstStyle/>
-          <a:p>
-            <a:endParaRPr lang="en-US"/>
-          </a:p>
-        </p:txBody>
-      </p:sp>
-      <p:sp>
-        <p:nvSpPr>
-          <p:cNvPr id="251" name="H1"/>
-          <p:cNvSpPr/>
-          <p:nvPr/>
-        </p:nvSpPr>
-        <p:spPr>
-          <a:xfrm>
-            <a:off x="3227832" y="2926080"/>
-            <a:ext cx="2679192" cy="457200"/>
-          </a:xfrm>
-          <a:prstGeom prst="rect">
-            <a:avLst/>
-          </a:prstGeom>
-          <a:solidFill>
-            <a:srgbClr val="8E6F3E"/>
-          </a:solidFill>
-          <a:ln>
-            <a:noFill/>
-          </a:ln>
-        </p:spPr>
-        <p:txBody>
-          <a:bodyPr wrap="square" lIns="27432" tIns="22860" rIns="27432" bIns="22860" anchor="ctr"/>
-          <a:lstStyle/>
-          <a:p>
-            <a:pPr algn="ctr">
-              <a:buNone/>
-            </a:pPr>
-            <a:r>
-              <a:rPr lang="en-US" sz="2000" b="1" i="0" dirty="0">
-                <a:solidFill>
-                  <a:srgbClr val="FFFFFF"/>
-                </a:solidFill>
-              </a:rPr>
-              <a:t>STATE MACHINE</a:t>
-            </a:r>
-          </a:p>
-        </p:txBody>
-      </p:sp>
-      <p:sp>
-        <p:nvSpPr>
-          <p:cNvPr id="254" name="B1"/>
-          <p:cNvSpPr/>
-          <p:nvPr/>
-        </p:nvSpPr>
-        <p:spPr>
-          <a:xfrm>
-            <a:off x="3227832" y="3429000"/>
-            <a:ext cx="2679192" cy="1371600"/>
-          </a:xfrm>
-          <a:prstGeom prst="rect">
-            <a:avLst/>
-          </a:prstGeom>
-          <a:solidFill>
-            <a:srgbClr val="FBF8F2"/>
-          </a:solidFill>
-          <a:ln w="12700">
-            <a:solidFill>
-              <a:srgbClr val="C9B991"/>
-            </a:solidFill>
-          </a:ln>
-        </p:spPr>
-        <p:txBody>
-          <a:bodyPr/>
-          <a:lstStyle/>
-          <a:p>
-            <a:endParaRPr lang="en-US"/>
-          </a:p>
-        </p:txBody>
-      </p:sp>
-      <p:sp>
-        <p:nvSpPr>
-          <p:cNvPr id="252" name="H2"/>
-          <p:cNvSpPr/>
-          <p:nvPr/>
-        </p:nvSpPr>
-        <p:spPr>
-          <a:xfrm>
-            <a:off x="6181344" y="2926080"/>
-            <a:ext cx="2679192" cy="457200"/>
-          </a:xfrm>
-          <a:prstGeom prst="rect">
-            <a:avLst/>
-          </a:prstGeom>
-          <a:solidFill>
-            <a:srgbClr val="8E6F3E"/>
-          </a:solidFill>
-          <a:ln>
-            <a:noFill/>
-          </a:ln>
-        </p:spPr>
-        <p:txBody>
-          <a:bodyPr wrap="square" lIns="27432" tIns="22860" rIns="27432" bIns="22860" anchor="ctr"/>
-          <a:lstStyle/>
-          <a:p>
-            <a:pPr algn="ctr">
-              <a:buNone/>
-            </a:pPr>
-            <a:r>
-              <a:rPr lang="en-US" sz="2000" b="1" i="0" dirty="0">
-                <a:solidFill>
-                  <a:srgbClr val="FFFFFF"/>
-                </a:solidFill>
-              </a:rPr>
-              <a:t>QUANTITATIVE</a:t>
-            </a:r>
-          </a:p>
-        </p:txBody>
-      </p:sp>
-      <p:sp>
-        <p:nvSpPr>
-          <p:cNvPr id="255" name="B2"/>
-          <p:cNvSpPr/>
-          <p:nvPr/>
-        </p:nvSpPr>
-        <p:spPr>
-          <a:xfrm>
-            <a:off x="6181344" y="3429000"/>
-            <a:ext cx="2679192" cy="1371600"/>
-          </a:xfrm>
-          <a:prstGeom prst="rect">
-            <a:avLst/>
-          </a:prstGeom>
-          <a:solidFill>
-            <a:srgbClr val="FBF8F2"/>
-          </a:solidFill>
-          <a:ln w="12700">
-            <a:solidFill>
-              <a:srgbClr val="C9B991"/>
-            </a:solidFill>
-          </a:ln>
-        </p:spPr>
-        <p:txBody>
-          <a:bodyPr/>
-          <a:lstStyle/>
-          <a:p>
-            <a:endParaRPr lang="en-US"/>
-          </a:p>
-        </p:txBody>
-      </p:sp>
-      <p:sp>
-        <p:nvSpPr>
-          <p:cNvPr id="260" name="N0"/>
-          <p:cNvSpPr/>
-          <p:nvPr/>
-        </p:nvSpPr>
-        <p:spPr>
-          <a:xfrm>
-            <a:off x="960120" y="3611880"/>
-            <a:ext cx="228600" cy="228600"/>
-          </a:xfrm>
-          <a:prstGeom prst="ellipse">
-            <a:avLst/>
-          </a:prstGeom>
-          <a:solidFill>
-            <a:srgbClr val="FFFFFF"/>
-          </a:solidFill>
-          <a:ln w="12700">
-            <a:solidFill>
-              <a:srgbClr val="555960"/>
-            </a:solidFill>
-          </a:ln>
-        </p:spPr>
-        <p:txBody>
-          <a:bodyPr/>
-          <a:lstStyle/>
-          <a:p>
-            <a:endParaRPr lang="en-US"/>
-          </a:p>
-        </p:txBody>
-      </p:sp>
-      <p:sp>
-        <p:nvSpPr>
-          <p:cNvPr id="261" name="N1"/>
-          <p:cNvSpPr/>
-          <p:nvPr/>
-        </p:nvSpPr>
-        <p:spPr>
-          <a:xfrm>
-            <a:off x="1874520" y="3611880"/>
-            <a:ext cx="228600" cy="228600"/>
-          </a:xfrm>
-          <a:prstGeom prst="ellipse">
-            <a:avLst/>
-          </a:prstGeom>
-          <a:solidFill>
-            <a:srgbClr val="FFFFFF"/>
-          </a:solidFill>
-          <a:ln w="12700">
-            <a:solidFill>
-              <a:srgbClr val="555960"/>
-            </a:solidFill>
-          </a:ln>
-        </p:spPr>
-        <p:txBody>
-          <a:bodyPr/>
-          <a:lstStyle/>
-          <a:p>
-            <a:endParaRPr lang="en-US"/>
-          </a:p>
-        </p:txBody>
-      </p:sp>
-      <p:sp>
-        <p:nvSpPr>
-          <p:cNvPr id="262" name="N2"/>
-          <p:cNvSpPr/>
-          <p:nvPr/>
-        </p:nvSpPr>
-        <p:spPr>
-          <a:xfrm>
-            <a:off x="594360" y="4206240"/>
-            <a:ext cx="228600" cy="228600"/>
-          </a:xfrm>
-          <a:prstGeom prst="ellipse">
-            <a:avLst/>
-          </a:prstGeom>
-          <a:solidFill>
-            <a:srgbClr val="FFFFFF"/>
-          </a:solidFill>
-          <a:ln w="12700">
-            <a:solidFill>
-              <a:srgbClr val="555960"/>
-            </a:solidFill>
-          </a:ln>
-        </p:spPr>
-        <p:txBody>
-          <a:bodyPr/>
-          <a:lstStyle/>
-          <a:p>
-            <a:endParaRPr lang="en-US"/>
-          </a:p>
-        </p:txBody>
-      </p:sp>
-      <p:sp>
-        <p:nvSpPr>
-          <p:cNvPr id="263" name="N3"/>
-          <p:cNvSpPr/>
-          <p:nvPr/>
-        </p:nvSpPr>
-        <p:spPr>
-          <a:xfrm>
-            <a:off x="1508760" y="4206240"/>
-            <a:ext cx="228600" cy="228600"/>
-          </a:xfrm>
-          <a:prstGeom prst="ellipse">
-            <a:avLst/>
-          </a:prstGeom>
-          <a:solidFill>
-            <a:srgbClr val="FFFFFF"/>
-          </a:solidFill>
-          <a:ln w="12700">
-            <a:solidFill>
-              <a:srgbClr val="555960"/>
-            </a:solidFill>
-          </a:ln>
-        </p:spPr>
-        <p:txBody>
-          <a:bodyPr/>
-          <a:lstStyle/>
-          <a:p>
-            <a:endParaRPr lang="en-US"/>
-          </a:p>
-        </p:txBody>
-      </p:sp>
-      <p:cxnSp>
-        <p:nvCxnSpPr>
-          <p:cNvPr id="264" name="E0"/>
-          <p:cNvCxnSpPr/>
-          <p:nvPr/>
-        </p:nvCxnSpPr>
-        <p:spPr>
-          <a:xfrm>
-            <a:off x="1188720" y="3726180"/>
-            <a:ext cx="685800" cy="0"/>
-          </a:xfrm>
-          <a:prstGeom prst="straightConnector1">
-            <a:avLst/>
-          </a:prstGeom>
-          <a:ln w="12700">
-            <a:solidFill>
-              <a:srgbClr val="555960"/>
-            </a:solidFill>
-            <a:tailEnd type="triangle" w="med" len="med"/>
-          </a:ln>
-        </p:spPr>
-      </p:cxnSp>
-      <p:cxnSp>
-        <p:nvCxnSpPr>
-          <p:cNvPr id="265" name="E1"/>
-          <p:cNvCxnSpPr/>
-          <p:nvPr/>
-        </p:nvCxnSpPr>
-        <p:spPr>
-          <a:xfrm flipH="1">
-            <a:off x="777240" y="3840480"/>
-            <a:ext cx="228600" cy="365760"/>
-          </a:xfrm>
-          <a:prstGeom prst="straightConnector1">
-            <a:avLst/>
-          </a:prstGeom>
-          <a:ln w="12700">
-            <a:solidFill>
-              <a:srgbClr val="555960"/>
-            </a:solidFill>
-            <a:tailEnd type="triangle" w="med" len="med"/>
-          </a:ln>
-        </p:spPr>
-      </p:cxnSp>
-      <p:cxnSp>
-        <p:nvCxnSpPr>
-          <p:cNvPr id="266" name="E2"/>
-          <p:cNvCxnSpPr/>
-          <p:nvPr/>
-        </p:nvCxnSpPr>
-        <p:spPr>
-          <a:xfrm flipH="1">
-            <a:off x="1691640" y="3840480"/>
-            <a:ext cx="251460" cy="365760"/>
-          </a:xfrm>
-          <a:prstGeom prst="straightConnector1">
-            <a:avLst/>
-          </a:prstGeom>
-          <a:ln w="12700">
-            <a:solidFill>
-              <a:srgbClr val="555960"/>
-            </a:solidFill>
-            <a:tailEnd type="triangle" w="med" len="med"/>
-          </a:ln>
-        </p:spPr>
-      </p:cxnSp>
-      <p:cxnSp>
-        <p:nvCxnSpPr>
-          <p:cNvPr id="267" name="E3"/>
-          <p:cNvCxnSpPr/>
-          <p:nvPr/>
-        </p:nvCxnSpPr>
-        <p:spPr>
-          <a:xfrm>
-            <a:off x="822960" y="4320540"/>
-            <a:ext cx="685800" cy="0"/>
-          </a:xfrm>
-          <a:prstGeom prst="straightConnector1">
-            <a:avLst/>
-          </a:prstGeom>
-          <a:ln w="12700">
-            <a:solidFill>
-              <a:srgbClr val="555960"/>
-            </a:solidFill>
-            <a:tailEnd type="triangle" w="med" len="med"/>
-          </a:ln>
-        </p:spPr>
-      </p:cxnSp>
-      <p:sp>
-        <p:nvSpPr>
-          <p:cNvPr id="270" name="R0"/>
-          <p:cNvSpPr/>
-          <p:nvPr/>
-        </p:nvSpPr>
-        <p:spPr>
-          <a:xfrm>
-            <a:off x="3529584" y="3611880"/>
-            <a:ext cx="640080" cy="274320"/>
-          </a:xfrm>
-          <a:prstGeom prst="roundRect">
-            <a:avLst/>
-          </a:prstGeom>
-          <a:solidFill>
-            <a:srgbClr val="FFFFFF"/>
-          </a:solidFill>
-          <a:ln w="12700">
-            <a:solidFill>
-              <a:srgbClr val="555960"/>
-            </a:solidFill>
-          </a:ln>
-        </p:spPr>
-        <p:txBody>
-          <a:bodyPr/>
-          <a:lstStyle/>
-          <a:p>
-            <a:endParaRPr lang="en-US"/>
-          </a:p>
-        </p:txBody>
-      </p:sp>
-      <p:sp>
-        <p:nvSpPr>
-          <p:cNvPr id="271" name="R1"/>
-          <p:cNvSpPr/>
-          <p:nvPr/>
-        </p:nvSpPr>
-        <p:spPr>
-          <a:xfrm>
-            <a:off x="4754880" y="3611880"/>
-            <a:ext cx="640080" cy="274320"/>
-          </a:xfrm>
-          <a:prstGeom prst="roundRect">
-            <a:avLst/>
-          </a:prstGeom>
-          <a:solidFill>
-            <a:srgbClr val="FFFFFF"/>
-          </a:solidFill>
-          <a:ln w="12700">
-            <a:solidFill>
-              <a:srgbClr val="555960"/>
-            </a:solidFill>
-          </a:ln>
-        </p:spPr>
-        <p:txBody>
-          <a:bodyPr/>
-          <a:lstStyle/>
-          <a:p>
-            <a:endParaRPr lang="en-US"/>
-          </a:p>
-        </p:txBody>
-      </p:sp>
-      <p:sp>
-        <p:nvSpPr>
-          <p:cNvPr id="272" name="R2"/>
-          <p:cNvSpPr/>
-          <p:nvPr/>
-        </p:nvSpPr>
-        <p:spPr>
-          <a:xfrm>
-            <a:off x="4142232" y="4389120"/>
-            <a:ext cx="640080" cy="274320"/>
-          </a:xfrm>
-          <a:prstGeom prst="roundRect">
-            <a:avLst/>
-          </a:prstGeom>
-          <a:solidFill>
-            <a:srgbClr val="FFFFFF"/>
-          </a:solidFill>
-          <a:ln w="12700">
-            <a:solidFill>
-              <a:srgbClr val="555960"/>
-            </a:solidFill>
-          </a:ln>
-        </p:spPr>
-        <p:txBody>
-          <a:bodyPr/>
-          <a:lstStyle/>
-          <a:p>
-            <a:endParaRPr lang="en-US"/>
-          </a:p>
-        </p:txBody>
-      </p:sp>
-      <p:cxnSp>
-        <p:nvCxnSpPr>
-          <p:cNvPr id="273" name="TR0"/>
-          <p:cNvCxnSpPr/>
-          <p:nvPr/>
-        </p:nvCxnSpPr>
-        <p:spPr>
-          <a:xfrm>
-            <a:off x="4169664" y="3749040"/>
-            <a:ext cx="585216" cy="0"/>
-          </a:xfrm>
-          <a:prstGeom prst="straightConnector1">
-            <a:avLst/>
-          </a:prstGeom>
-          <a:ln w="12700">
-            <a:solidFill>
-              <a:srgbClr val="555960"/>
-            </a:solidFill>
-            <a:tailEnd type="triangle" w="med" len="med"/>
-          </a:ln>
-        </p:spPr>
-      </p:cxnSp>
-      <p:cxnSp>
-        <p:nvCxnSpPr>
-          <p:cNvPr id="274" name="TR1"/>
-          <p:cNvCxnSpPr/>
-          <p:nvPr/>
-        </p:nvCxnSpPr>
-        <p:spPr>
-          <a:xfrm flipH="1">
-            <a:off x="4462272" y="3886200"/>
-            <a:ext cx="612648" cy="502920"/>
-          </a:xfrm>
-          <a:prstGeom prst="straightConnector1">
-            <a:avLst/>
-          </a:prstGeom>
-          <a:ln w="12700">
-            <a:solidFill>
-              <a:srgbClr val="555960"/>
-            </a:solidFill>
-            <a:tailEnd type="triangle" w="med" len="med"/>
-          </a:ln>
-        </p:spPr>
-      </p:cxnSp>
-      <p:cxnSp>
-        <p:nvCxnSpPr>
-          <p:cNvPr id="275" name="TR2"/>
-          <p:cNvCxnSpPr/>
-          <p:nvPr/>
-        </p:nvCxnSpPr>
-        <p:spPr>
-          <a:xfrm>
-            <a:off x="3849624" y="3886200"/>
-            <a:ext cx="292608" cy="502920"/>
-          </a:xfrm>
-          <a:prstGeom prst="straightConnector1">
-            <a:avLst/>
-          </a:prstGeom>
-          <a:ln w="12700">
-            <a:solidFill>
-              <a:srgbClr val="555960"/>
-            </a:solidFill>
-            <a:tailEnd type="triangle" w="med" len="med"/>
-          </a:ln>
-        </p:spPr>
-      </p:cxnSp>
-      <p:cxnSp>
-        <p:nvCxnSpPr>
-          <p:cNvPr id="276" name="X1"/>
-          <p:cNvCxnSpPr/>
-          <p:nvPr/>
-        </p:nvCxnSpPr>
-        <p:spPr>
-          <a:xfrm>
-            <a:off x="3927348" y="4068900"/>
-            <a:ext cx="137160" cy="137160"/>
-          </a:xfrm>
-          <a:prstGeom prst="straightConnector1">
-            <a:avLst/>
-          </a:prstGeom>
-          <a:ln w="19050">
-            <a:solidFill>
-              <a:srgbClr val="555960"/>
-            </a:solidFill>
-          </a:ln>
-        </p:spPr>
-      </p:cxnSp>
-      <p:cxnSp>
-        <p:nvCxnSpPr>
-          <p:cNvPr id="277" name="X2"/>
-          <p:cNvCxnSpPr/>
-          <p:nvPr/>
-        </p:nvCxnSpPr>
-        <p:spPr>
-          <a:xfrm flipV="1">
-            <a:off x="3927348" y="4068900"/>
-            <a:ext cx="137160" cy="137160"/>
-          </a:xfrm>
-          <a:prstGeom prst="straightConnector1">
-            <a:avLst/>
-          </a:prstGeom>
-          <a:ln w="19050">
-            <a:solidFill>
-              <a:srgbClr val="555960"/>
-            </a:solidFill>
-          </a:ln>
-        </p:spPr>
-      </p:cxnSp>
-      <p:cxnSp>
-        <p:nvCxnSpPr>
-          <p:cNvPr id="280" name="AX1"/>
-          <p:cNvCxnSpPr/>
-          <p:nvPr/>
-        </p:nvCxnSpPr>
-        <p:spPr>
-          <a:xfrm>
-            <a:off x="6400800" y="4617720"/>
-            <a:ext cx="2240280" cy="0"/>
-          </a:xfrm>
-          <a:prstGeom prst="straightConnector1">
-            <a:avLst/>
-          </a:prstGeom>
-          <a:ln w="9525">
-            <a:solidFill>
-              <a:srgbClr val="555960"/>
-            </a:solidFill>
-          </a:ln>
-        </p:spPr>
-      </p:cxnSp>
-      <p:sp>
-        <p:nvSpPr>
-          <p:cNvPr id="281" name="BA0"/>
-          <p:cNvSpPr/>
-          <p:nvPr/>
-        </p:nvSpPr>
-        <p:spPr>
-          <a:xfrm>
-            <a:off x="6675120" y="4389120"/>
-            <a:ext cx="228600" cy="228600"/>
-          </a:xfrm>
-          <a:prstGeom prst="rect">
-            <a:avLst/>
-          </a:prstGeom>
-          <a:solidFill>
-            <a:srgbClr val="FBF8F2"/>
-          </a:solidFill>
-          <a:ln w="12700">
-            <a:solidFill>
-              <a:srgbClr val="555960"/>
-            </a:solidFill>
-          </a:ln>
-        </p:spPr>
-        <p:txBody>
-          <a:bodyPr/>
-          <a:lstStyle/>
-          <a:p>
-            <a:endParaRPr lang="en-US"/>
-          </a:p>
-        </p:txBody>
-      </p:sp>
-      <p:sp>
-        <p:nvSpPr>
-          <p:cNvPr id="282" name="BA1"/>
-          <p:cNvSpPr/>
-          <p:nvPr/>
-        </p:nvSpPr>
-        <p:spPr>
-          <a:xfrm>
-            <a:off x="7086600" y="4206240"/>
-            <a:ext cx="228600" cy="411480"/>
-          </a:xfrm>
-          <a:prstGeom prst="rect">
-            <a:avLst/>
-          </a:prstGeom>
-          <a:solidFill>
-            <a:srgbClr val="FBF8F2"/>
-          </a:solidFill>
-          <a:ln w="12700">
-            <a:solidFill>
-              <a:srgbClr val="555960"/>
-            </a:solidFill>
-          </a:ln>
-        </p:spPr>
-        <p:txBody>
-          <a:bodyPr/>
-          <a:lstStyle/>
-          <a:p>
-            <a:endParaRPr lang="en-US"/>
-          </a:p>
-        </p:txBody>
-      </p:sp>
-      <p:sp>
-        <p:nvSpPr>
-          <p:cNvPr id="283" name="BA2"/>
-          <p:cNvSpPr/>
-          <p:nvPr/>
-        </p:nvSpPr>
-        <p:spPr>
-          <a:xfrm>
-            <a:off x="7498080" y="3977640"/>
-            <a:ext cx="228600" cy="640080"/>
-          </a:xfrm>
-          <a:prstGeom prst="rect">
-            <a:avLst/>
-          </a:prstGeom>
-          <a:solidFill>
-            <a:srgbClr val="FBF8F2"/>
-          </a:solidFill>
-          <a:ln w="12700">
-            <a:solidFill>
-              <a:srgbClr val="555960"/>
-            </a:solidFill>
-          </a:ln>
-        </p:spPr>
-        <p:txBody>
-          <a:bodyPr/>
-          <a:lstStyle/>
-          <a:p>
-            <a:endParaRPr lang="en-US"/>
-          </a:p>
-        </p:txBody>
-      </p:sp>
-      <p:cxnSp>
-        <p:nvCxnSpPr>
-          <p:cNvPr id="284" name="BD1"/>
-          <p:cNvCxnSpPr/>
-          <p:nvPr/>
-        </p:nvCxnSpPr>
-        <p:spPr>
-          <a:xfrm>
-            <a:off x="6400800" y="3886200"/>
-            <a:ext cx="2240280" cy="0"/>
-          </a:xfrm>
-          <a:prstGeom prst="straightConnector1">
-            <a:avLst/>
-          </a:prstGeom>
-          <a:ln w="12700">
-            <a:solidFill>
-              <a:srgbClr val="555960"/>
-            </a:solidFill>
-            <a:prstDash val="dash"/>
-          </a:ln>
-        </p:spPr>
-      </p:cxnSp>
-      <p:sp>
-        <p:nvSpPr>
-          <p:cNvPr id="199" name="FooterBand"/>
-          <p:cNvSpPr/>
-          <p:nvPr/>
-        </p:nvSpPr>
-        <p:spPr>
-          <a:xfrm>
-            <a:off x="274320" y="5852160"/>
-            <a:ext cx="8595360" cy="566928"/>
-          </a:xfrm>
-          <a:prstGeom prst="rect">
-            <a:avLst/>
-          </a:prstGeom>
-          <a:solidFill>
-            <a:srgbClr val="8E6F3E"/>
-          </a:solidFill>
-          <a:ln>
-            <a:noFill/>
-          </a:ln>
-        </p:spPr>
-        <p:txBody>
-          <a:bodyPr wrap="square" lIns="27432" tIns="22860" rIns="27432" bIns="22860" anchor="ctr"/>
-          <a:lstStyle/>
-          <a:p>
-            <a:pPr algn="ctr">
-              <a:buNone/>
-            </a:pPr>
-            <a:r>
-              <a:rPr lang="en-US" sz="2000" b="1" i="0" dirty="0">
-                <a:solidFill>
-                  <a:srgbClr val="FFFFFF"/>
-                </a:solidFill>
-              </a:rPr>
-              <a:t>Each model discards most of the program.</a:t>
             </a:r>
           </a:p>
         </p:txBody>
@@ -23132,7 +21641,7 @@
                   <a:srgbClr val="555960"/>
                 </a:solidFill>
               </a:rPr>
-              <a:t> where meaning is consequential.</a:t>
+              <a:t xml:space="preserve"> where meaning is consequential.</a:t>
             </a:r>
           </a:p>
           <a:p>
@@ -23156,7 +21665,7 @@
                   <a:srgbClr val="555960"/>
                 </a:solidFill>
               </a:rPr>
-              <a:t> where it is not.</a:t>
+              <a:t xml:space="preserve"> where it is not.</a:t>
             </a:r>
           </a:p>
         </p:txBody>
@@ -24184,7 +22693,7 @@
 </p:sld>
 </file>
 
-<file path=ppt/slides/slide4.xml><?xml version="1.0" encoding="utf-8"?>
+<file path=ppt/slides/slide33.xml><?xml version="1.0" encoding="utf-8"?>
 <p:sld xmlns:a="http://schemas.openxmlformats.org/drawingml/2006/main" xmlns:r="http://schemas.openxmlformats.org/officeDocument/2006/relationships" xmlns:p="http://schemas.openxmlformats.org/presentationml/2006/main">
   <p:cSld>
     <p:spTree>
@@ -24220,7 +22729,7 @@
           <a:p>
             <a:r>
               <a:rPr lang="en-US" dirty="0"/>
-              <a:t>…and makes explicit what must remain</a:t>
+              <a:t>The production equation</a:t>
             </a:r>
           </a:p>
         </p:txBody>
@@ -24242,7 +22751,7 @@
           <a:p>
             <a:fld id="{B7EB45DA-9A0D-DC49-8E02-F30A5DDC21C3}" type="slidenum">
               <a:rPr lang="en-US" smtClean="0"/>
-              <a:t>4</a:t>
+              <a:t>2</a:t>
             </a:fld>
             <a:endParaRPr lang="en-US"/>
           </a:p>
@@ -24250,45 +22759,14 @@
       </p:sp>
       <p:sp>
         <p:nvSpPr>
-          <p:cNvPr id="200" name="Panel"/>
-          <p:cNvSpPr/>
-          <p:nvPr/>
-        </p:nvSpPr>
-        <p:spPr>
-          <a:xfrm>
-            <a:off x="1371600" y="1005840"/>
-            <a:ext cx="6400800" cy="1554480"/>
-          </a:xfrm>
-          <a:prstGeom prst="rect">
-            <a:avLst/>
-          </a:prstGeom>
-          <a:solidFill>
-            <a:srgbClr val="F5F1E8"/>
-          </a:solidFill>
-          <a:ln w="12700">
-            <a:solidFill>
-              <a:srgbClr val="C9B991"/>
-            </a:solidFill>
-          </a:ln>
-        </p:spPr>
-        <p:txBody>
-          <a:bodyPr/>
-          <a:lstStyle/>
-          <a:p>
-            <a:endParaRPr lang="en-US"/>
-          </a:p>
-        </p:txBody>
-      </p:sp>
-      <p:sp>
-        <p:nvSpPr>
-          <p:cNvPr id="201" name="PL0"/>
+          <p:cNvPr id="10" name="Kicker"/>
           <p:cNvSpPr txBox="1"/>
           <p:nvPr/>
         </p:nvSpPr>
         <p:spPr>
           <a:xfrm>
-            <a:off x="1463040" y="1051560"/>
-            <a:ext cx="1371600" cy="228600"/>
+            <a:off x="274320" y="942975"/>
+            <a:ext cx="8595360" cy="320040"/>
           </a:xfrm>
           <a:prstGeom prst="rect">
             <a:avLst/>
@@ -24302,396 +22780,33 @@
           <a:bodyPr wrap="square" lIns="0" tIns="0" rIns="0" bIns="0" anchor="t"/>
           <a:lstStyle/>
           <a:p>
-            <a:pPr algn="l">
-              <a:buNone/>
-            </a:pPr>
-            <a:r>
-              <a:rPr lang="en-US" sz="1400" b="0" i="0" dirty="0">
-                <a:solidFill>
-                  <a:srgbClr val="555960"/>
-                </a:solidFill>
-              </a:rPr>
-              <a:t>THE SYSTEM</a:t>
-            </a:r>
-          </a:p>
-        </p:txBody>
-      </p:sp>
-      <p:sp>
-        <p:nvSpPr>
-          <p:cNvPr id="210" name="SV0"/>
-          <p:cNvSpPr/>
-          <p:nvPr/>
-        </p:nvSpPr>
-        <p:spPr>
-          <a:xfrm>
-            <a:off x="1645920" y="1371600"/>
-            <a:ext cx="548640" cy="274320"/>
-          </a:xfrm>
-          <a:prstGeom prst="rect">
-            <a:avLst/>
-          </a:prstGeom>
-          <a:solidFill>
-            <a:srgbClr val="FBF8F2"/>
-          </a:solidFill>
-          <a:ln w="12700">
-            <a:solidFill>
-              <a:srgbClr val="C9B991"/>
-            </a:solidFill>
-          </a:ln>
-        </p:spPr>
-        <p:txBody>
-          <a:bodyPr/>
-          <a:lstStyle/>
-          <a:p>
-            <a:endParaRPr lang="en-US"/>
-          </a:p>
-        </p:txBody>
-      </p:sp>
-      <p:sp>
-        <p:nvSpPr>
-          <p:cNvPr id="211" name="SV1"/>
-          <p:cNvSpPr/>
-          <p:nvPr/>
-        </p:nvSpPr>
-        <p:spPr>
-          <a:xfrm>
-            <a:off x="2560320" y="1188720"/>
-            <a:ext cx="548640" cy="274320"/>
-          </a:xfrm>
-          <a:prstGeom prst="rect">
-            <a:avLst/>
-          </a:prstGeom>
-          <a:solidFill>
-            <a:srgbClr val="FBF8F2"/>
-          </a:solidFill>
-          <a:ln w="12700">
-            <a:solidFill>
-              <a:srgbClr val="C9B991"/>
-            </a:solidFill>
-          </a:ln>
-        </p:spPr>
-        <p:txBody>
-          <a:bodyPr/>
-          <a:lstStyle/>
-          <a:p>
-            <a:endParaRPr lang="en-US"/>
-          </a:p>
-        </p:txBody>
-      </p:sp>
-      <p:sp>
-        <p:nvSpPr>
-          <p:cNvPr id="212" name="SV2"/>
-          <p:cNvSpPr/>
-          <p:nvPr/>
-        </p:nvSpPr>
-        <p:spPr>
-          <a:xfrm>
-            <a:off x="2286000" y="1828800"/>
-            <a:ext cx="548640" cy="274320"/>
-          </a:xfrm>
-          <a:prstGeom prst="rect">
-            <a:avLst/>
-          </a:prstGeom>
-          <a:solidFill>
-            <a:srgbClr val="FBF8F2"/>
-          </a:solidFill>
-          <a:ln w="12700">
-            <a:solidFill>
-              <a:srgbClr val="C9B991"/>
-            </a:solidFill>
-          </a:ln>
-        </p:spPr>
-        <p:txBody>
-          <a:bodyPr/>
-          <a:lstStyle/>
-          <a:p>
-            <a:endParaRPr lang="en-US"/>
-          </a:p>
-        </p:txBody>
-      </p:sp>
-      <p:sp>
-        <p:nvSpPr>
-          <p:cNvPr id="213" name="SV3"/>
-          <p:cNvSpPr/>
-          <p:nvPr/>
-        </p:nvSpPr>
-        <p:spPr>
-          <a:xfrm>
-            <a:off x="3108960" y="1508760"/>
-            <a:ext cx="548640" cy="274320"/>
-          </a:xfrm>
-          <a:prstGeom prst="rect">
-            <a:avLst/>
-          </a:prstGeom>
-          <a:solidFill>
-            <a:srgbClr val="FBF8F2"/>
-          </a:solidFill>
-          <a:ln w="12700">
-            <a:solidFill>
-              <a:srgbClr val="C9B991"/>
-            </a:solidFill>
-          </a:ln>
-        </p:spPr>
-        <p:txBody>
-          <a:bodyPr/>
-          <a:lstStyle/>
-          <a:p>
-            <a:endParaRPr lang="en-US"/>
-          </a:p>
-        </p:txBody>
-      </p:sp>
-      <p:sp>
-        <p:nvSpPr>
-          <p:cNvPr id="214" name="SV4"/>
-          <p:cNvSpPr/>
-          <p:nvPr/>
-        </p:nvSpPr>
-        <p:spPr>
-          <a:xfrm>
-            <a:off x="3840480" y="1188720"/>
-            <a:ext cx="548640" cy="274320"/>
-          </a:xfrm>
-          <a:prstGeom prst="rect">
-            <a:avLst/>
-          </a:prstGeom>
-          <a:solidFill>
-            <a:srgbClr val="FBF8F2"/>
-          </a:solidFill>
-          <a:ln w="12700">
-            <a:solidFill>
-              <a:srgbClr val="C9B991"/>
-            </a:solidFill>
-          </a:ln>
-        </p:spPr>
-        <p:txBody>
-          <a:bodyPr/>
-          <a:lstStyle/>
-          <a:p>
-            <a:endParaRPr lang="en-US"/>
-          </a:p>
-        </p:txBody>
-      </p:sp>
-      <p:sp>
-        <p:nvSpPr>
-          <p:cNvPr id="215" name="SV5"/>
-          <p:cNvSpPr/>
-          <p:nvPr/>
-        </p:nvSpPr>
-        <p:spPr>
-          <a:xfrm>
-            <a:off x="3657600" y="1965960"/>
-            <a:ext cx="548640" cy="274320"/>
-          </a:xfrm>
-          <a:prstGeom prst="rect">
-            <a:avLst/>
-          </a:prstGeom>
-          <a:solidFill>
-            <a:srgbClr val="FBF8F2"/>
-          </a:solidFill>
-          <a:ln w="12700">
-            <a:solidFill>
-              <a:srgbClr val="C9B991"/>
-            </a:solidFill>
-          </a:ln>
-        </p:spPr>
-        <p:txBody>
-          <a:bodyPr/>
-          <a:lstStyle/>
-          <a:p>
-            <a:endParaRPr lang="en-US"/>
-          </a:p>
-        </p:txBody>
-      </p:sp>
-      <p:sp>
-        <p:nvSpPr>
-          <p:cNvPr id="216" name="Q0"/>
-          <p:cNvSpPr/>
-          <p:nvPr/>
-        </p:nvSpPr>
-        <p:spPr>
-          <a:xfrm>
-            <a:off x="4846320" y="1600200"/>
-            <a:ext cx="182880" cy="182880"/>
-          </a:xfrm>
-          <a:prstGeom prst="rect">
-            <a:avLst/>
-          </a:prstGeom>
-          <a:solidFill>
-            <a:srgbClr val="C9B991"/>
-          </a:solidFill>
-          <a:ln>
-            <a:noFill/>
-          </a:ln>
-        </p:spPr>
-        <p:txBody>
-          <a:bodyPr/>
-          <a:lstStyle/>
-          <a:p>
-            <a:endParaRPr lang="en-US"/>
-          </a:p>
-        </p:txBody>
-      </p:sp>
-      <p:sp>
-        <p:nvSpPr>
-          <p:cNvPr id="217" name="Q1"/>
-          <p:cNvSpPr/>
-          <p:nvPr/>
-        </p:nvSpPr>
-        <p:spPr>
-          <a:xfrm>
-            <a:off x="5074920" y="1600200"/>
-            <a:ext cx="182880" cy="182880"/>
-          </a:xfrm>
-          <a:prstGeom prst="rect">
-            <a:avLst/>
-          </a:prstGeom>
-          <a:solidFill>
-            <a:srgbClr val="C9B991"/>
-          </a:solidFill>
-          <a:ln>
-            <a:noFill/>
-          </a:ln>
-        </p:spPr>
-        <p:txBody>
-          <a:bodyPr/>
-          <a:lstStyle/>
-          <a:p>
-            <a:endParaRPr lang="en-US"/>
-          </a:p>
-        </p:txBody>
-      </p:sp>
-      <p:sp>
-        <p:nvSpPr>
-          <p:cNvPr id="218" name="Q2"/>
-          <p:cNvSpPr/>
-          <p:nvPr/>
-        </p:nvSpPr>
-        <p:spPr>
-          <a:xfrm>
-            <a:off x="5303520" y="1600200"/>
-            <a:ext cx="182880" cy="182880"/>
-          </a:xfrm>
-          <a:prstGeom prst="rect">
-            <a:avLst/>
-          </a:prstGeom>
-          <a:solidFill>
-            <a:srgbClr val="C9B991"/>
-          </a:solidFill>
-          <a:ln>
-            <a:noFill/>
-          </a:ln>
-        </p:spPr>
-        <p:txBody>
-          <a:bodyPr/>
-          <a:lstStyle/>
-          <a:p>
-            <a:endParaRPr lang="en-US"/>
-          </a:p>
-        </p:txBody>
-      </p:sp>
-      <p:sp>
-        <p:nvSpPr>
-          <p:cNvPr id="219" name="DB1"/>
-          <p:cNvSpPr/>
-          <p:nvPr/>
-        </p:nvSpPr>
-        <p:spPr>
-          <a:xfrm>
-            <a:off x="5943600" y="1280160"/>
-            <a:ext cx="457200" cy="548640"/>
-          </a:xfrm>
-          <a:prstGeom prst="can">
-            <a:avLst/>
-          </a:prstGeom>
-          <a:solidFill>
-            <a:srgbClr val="FBF8F2"/>
-          </a:solidFill>
-          <a:ln w="12700">
-            <a:solidFill>
-              <a:srgbClr val="555960"/>
-            </a:solidFill>
-          </a:ln>
-        </p:spPr>
-        <p:txBody>
-          <a:bodyPr/>
-          <a:lstStyle/>
-          <a:p>
-            <a:endParaRPr lang="en-US"/>
-          </a:p>
-        </p:txBody>
-      </p:sp>
-      <p:sp>
-        <p:nvSpPr>
-          <p:cNvPr id="220" name="U1"/>
-          <p:cNvSpPr/>
-          <p:nvPr/>
-        </p:nvSpPr>
-        <p:spPr>
-          <a:xfrm>
-            <a:off x="6583680" y="1965960"/>
-            <a:ext cx="182880" cy="182880"/>
-          </a:xfrm>
-          <a:prstGeom prst="ellipse">
-            <a:avLst/>
-          </a:prstGeom>
-          <a:solidFill>
-            <a:srgbClr val="FBF8F2"/>
-          </a:solidFill>
-          <a:ln w="12700">
-            <a:solidFill>
-              <a:srgbClr val="555960"/>
-            </a:solidFill>
-          </a:ln>
-        </p:spPr>
-        <p:txBody>
-          <a:bodyPr/>
-          <a:lstStyle/>
-          <a:p>
-            <a:endParaRPr lang="en-US"/>
-          </a:p>
-        </p:txBody>
-      </p:sp>
-      <p:sp>
-        <p:nvSpPr>
-          <p:cNvPr id="221" name="U2"/>
-          <p:cNvSpPr/>
-          <p:nvPr/>
-        </p:nvSpPr>
-        <p:spPr>
-          <a:xfrm>
-            <a:off x="6812280" y="1965960"/>
-            <a:ext cx="182880" cy="182880"/>
-          </a:xfrm>
-          <a:prstGeom prst="ellipse">
-            <a:avLst/>
-          </a:prstGeom>
-          <a:solidFill>
-            <a:srgbClr val="FBF8F2"/>
-          </a:solidFill>
-          <a:ln w="12700">
-            <a:solidFill>
-              <a:srgbClr val="555960"/>
-            </a:solidFill>
-          </a:ln>
-        </p:spPr>
-        <p:txBody>
-          <a:bodyPr/>
-          <a:lstStyle/>
-          <a:p>
-            <a:endParaRPr lang="en-US"/>
-          </a:p>
-        </p:txBody>
-      </p:sp>
-      <p:sp>
-        <p:nvSpPr>
-          <p:cNvPr id="222" name="PL1"/>
+            <a:pPr algn="ctr">
+              <a:spcAft>
+                <a:spcPts val="0"/>
+              </a:spcAft>
+              <a:buNone/>
+            </a:pPr>
+            <a:r>
+              <a:rPr lang="en-US" sz="1500" b="1" spc="120" dirty="0">
+                <a:solidFill>
+                  <a:srgbClr val="8E6F3E"/>
+                </a:solidFill>
+              </a:rPr>
+              <a:t>FOR A FIXED ENGINEERING ENVIRONMENT</a:t>
+            </a:r>
+          </a:p>
+        </p:txBody>
+      </p:sp>
+      <p:sp>
+        <p:nvSpPr>
+          <p:cNvPr id="11" name="EqBox"/>
           <p:cNvSpPr txBox="1"/>
           <p:nvPr/>
         </p:nvSpPr>
         <p:spPr>
           <a:xfrm>
-            <a:off x="1645920" y="2194560"/>
-            <a:ext cx="1005840" cy="228600"/>
+            <a:off x="274320" y="1280160"/>
+            <a:ext cx="8595360" cy="914400"/>
           </a:xfrm>
           <a:prstGeom prst="rect">
             <a:avLst/>
@@ -24702,33 +22817,36 @@
           </a:ln>
         </p:spPr>
         <p:txBody>
-          <a:bodyPr wrap="square" lIns="0" tIns="0" rIns="0" bIns="0" anchor="t"/>
-          <a:lstStyle/>
-          <a:p>
-            <a:pPr algn="l">
-              <a:buNone/>
-            </a:pPr>
-            <a:r>
-              <a:rPr lang="en-US" sz="1400" b="0" i="0" dirty="0">
-                <a:solidFill>
-                  <a:srgbClr val="555960"/>
-                </a:solidFill>
-              </a:rPr>
-              <a:t>SERVICES</a:t>
-            </a:r>
-          </a:p>
-        </p:txBody>
-      </p:sp>
-      <p:sp>
-        <p:nvSpPr>
-          <p:cNvPr id="223" name="PL2"/>
+          <a:bodyPr wrap="square" lIns="0" tIns="0" rIns="0" bIns="0" anchor="ctr"/>
+          <a:lstStyle/>
+          <a:p>
+            <a:pPr algn="ctr">
+              <a:spcAft>
+                <a:spcPts val="0"/>
+              </a:spcAft>
+              <a:buNone/>
+            </a:pPr>
+            <a:r>
+              <a:rPr lang="en-US" sz="5400" b="0" i="1" dirty="0">
+                <a:solidFill>
+                  <a:srgbClr val="5C4826"/>
+                </a:solidFill>
+              </a:rPr>
+              <a:t>p(T,M,R,H)</a:t>
+            </a:r>
+          </a:p>
+        </p:txBody>
+      </p:sp>
+      <p:sp>
+        <p:nvSpPr>
+          <p:cNvPr id="12" name="EqGloss"/>
           <p:cNvSpPr txBox="1"/>
           <p:nvPr/>
         </p:nvSpPr>
         <p:spPr>
           <a:xfrm>
-            <a:off x="4846320" y="1828800"/>
-            <a:ext cx="731520" cy="228600"/>
+            <a:off x="274320" y="2194560"/>
+            <a:ext cx="8595360" cy="365760"/>
           </a:xfrm>
           <a:prstGeom prst="rect">
             <a:avLst/>
@@ -24742,317 +22860,33 @@
           <a:bodyPr wrap="square" lIns="0" tIns="0" rIns="0" bIns="0" anchor="t"/>
           <a:lstStyle/>
           <a:p>
-            <a:pPr algn="l">
-              <a:buNone/>
-            </a:pPr>
-            <a:r>
-              <a:rPr lang="en-US" sz="1400" b="0" i="0" dirty="0">
+            <a:pPr algn="ctr">
+              <a:spcAft>
+                <a:spcPts val="0"/>
+              </a:spcAft>
+              <a:buNone/>
+            </a:pPr>
+            <a:r>
+              <a:rPr lang="en-US" sz="1800" b="0" i="1" dirty="0">
                 <a:solidFill>
                   <a:srgbClr val="555960"/>
                 </a:solidFill>
               </a:rPr>
-              <a:t>QUEUE</a:t>
-            </a:r>
-          </a:p>
-        </p:txBody>
-      </p:sp>
-      <p:sp>
-        <p:nvSpPr>
-          <p:cNvPr id="224" name="PL3"/>
-          <p:cNvSpPr txBox="1"/>
-          <p:nvPr/>
-        </p:nvSpPr>
-        <p:spPr>
-          <a:xfrm>
-            <a:off x="5897880" y="1874520"/>
-            <a:ext cx="548640" cy="228600"/>
-          </a:xfrm>
-          <a:prstGeom prst="rect">
-            <a:avLst/>
-          </a:prstGeom>
-          <a:noFill/>
-          <a:ln>
-            <a:noFill/>
-          </a:ln>
-        </p:spPr>
-        <p:txBody>
-          <a:bodyPr wrap="square" lIns="0" tIns="0" rIns="0" bIns="0" anchor="t"/>
-          <a:lstStyle/>
-          <a:p>
-            <a:pPr algn="l">
-              <a:buNone/>
-            </a:pPr>
-            <a:r>
-              <a:rPr lang="en-US" sz="1400" b="0" i="0" dirty="0">
-                <a:solidFill>
-                  <a:srgbClr val="555960"/>
-                </a:solidFill>
-              </a:rPr>
-              <a:t>DB</a:t>
-            </a:r>
-          </a:p>
-        </p:txBody>
-      </p:sp>
-      <p:sp>
-        <p:nvSpPr>
-          <p:cNvPr id="225" name="PL4"/>
-          <p:cNvSpPr txBox="1"/>
-          <p:nvPr/>
-        </p:nvSpPr>
-        <p:spPr>
-          <a:xfrm>
-            <a:off x="6492240" y="2194560"/>
-            <a:ext cx="731520" cy="228600"/>
-          </a:xfrm>
-          <a:prstGeom prst="rect">
-            <a:avLst/>
-          </a:prstGeom>
-          <a:noFill/>
-          <a:ln>
-            <a:noFill/>
-          </a:ln>
-        </p:spPr>
-        <p:txBody>
-          <a:bodyPr wrap="square" lIns="0" tIns="0" rIns="0" bIns="0" anchor="t"/>
-          <a:lstStyle/>
-          <a:p>
-            <a:pPr algn="l">
-              <a:buNone/>
-            </a:pPr>
-            <a:r>
-              <a:rPr lang="en-US" sz="1400" b="0" i="0" dirty="0">
-                <a:solidFill>
-                  <a:srgbClr val="555960"/>
-                </a:solidFill>
-              </a:rPr>
-              <a:t>USERS</a:t>
-            </a:r>
-          </a:p>
-        </p:txBody>
-      </p:sp>
-      <p:cxnSp>
-        <p:nvCxnSpPr>
-          <p:cNvPr id="230" name="W0"/>
-          <p:cNvCxnSpPr/>
-          <p:nvPr/>
-        </p:nvCxnSpPr>
-        <p:spPr>
-          <a:xfrm>
-            <a:off x="3108960" y="1325880"/>
-            <a:ext cx="731520" cy="0"/>
-          </a:xfrm>
-          <a:prstGeom prst="straightConnector1">
-            <a:avLst/>
-          </a:prstGeom>
-          <a:ln w="9525">
-            <a:solidFill>
-              <a:srgbClr val="555960"/>
-            </a:solidFill>
-          </a:ln>
-        </p:spPr>
-      </p:cxnSp>
-      <p:cxnSp>
-        <p:nvCxnSpPr>
-          <p:cNvPr id="231" name="W1"/>
-          <p:cNvCxnSpPr/>
-          <p:nvPr/>
-        </p:nvCxnSpPr>
-        <p:spPr>
-          <a:xfrm>
-            <a:off x="2194560" y="1645920"/>
-            <a:ext cx="365760" cy="182880"/>
-          </a:xfrm>
-          <a:prstGeom prst="straightConnector1">
-            <a:avLst/>
-          </a:prstGeom>
-          <a:ln w="9525">
-            <a:solidFill>
-              <a:srgbClr val="555960"/>
-            </a:solidFill>
-          </a:ln>
-        </p:spPr>
-      </p:cxnSp>
-      <p:cxnSp>
-        <p:nvCxnSpPr>
-          <p:cNvPr id="232" name="W2"/>
-          <p:cNvCxnSpPr/>
-          <p:nvPr/>
-        </p:nvCxnSpPr>
-        <p:spPr>
-          <a:xfrm>
-            <a:off x="3657600" y="1645920"/>
-            <a:ext cx="1188720" cy="45720"/>
-          </a:xfrm>
-          <a:prstGeom prst="straightConnector1">
-            <a:avLst/>
-          </a:prstGeom>
-          <a:ln w="9525">
-            <a:solidFill>
-              <a:srgbClr val="555960"/>
-            </a:solidFill>
-          </a:ln>
-        </p:spPr>
-      </p:cxnSp>
-      <p:cxnSp>
-        <p:nvCxnSpPr>
-          <p:cNvPr id="233" name="W3"/>
-          <p:cNvCxnSpPr/>
-          <p:nvPr/>
-        </p:nvCxnSpPr>
-        <p:spPr>
-          <a:xfrm>
-            <a:off x="4389120" y="1325880"/>
-            <a:ext cx="1554480" cy="228600"/>
-          </a:xfrm>
-          <a:prstGeom prst="straightConnector1">
-            <a:avLst/>
-          </a:prstGeom>
-          <a:ln w="9525">
-            <a:solidFill>
-              <a:srgbClr val="555960"/>
-            </a:solidFill>
-          </a:ln>
-        </p:spPr>
-      </p:cxnSp>
-      <p:cxnSp>
-        <p:nvCxnSpPr>
-          <p:cNvPr id="234" name="W4"/>
-          <p:cNvCxnSpPr/>
-          <p:nvPr/>
-        </p:nvCxnSpPr>
-        <p:spPr>
-          <a:xfrm>
-            <a:off x="2834640" y="1965960"/>
-            <a:ext cx="822960" cy="137160"/>
-          </a:xfrm>
-          <a:prstGeom prst="straightConnector1">
-            <a:avLst/>
-          </a:prstGeom>
-          <a:ln w="9525">
-            <a:solidFill>
-              <a:srgbClr val="555960"/>
-            </a:solidFill>
-          </a:ln>
-        </p:spPr>
-      </p:cxnSp>
-      <p:cxnSp>
-        <p:nvCxnSpPr>
-          <p:cNvPr id="235" name="W5"/>
-          <p:cNvCxnSpPr/>
-          <p:nvPr/>
-        </p:nvCxnSpPr>
-        <p:spPr>
-          <a:xfrm flipV="1">
-            <a:off x="5486400" y="1600200"/>
-            <a:ext cx="457200" cy="91440"/>
-          </a:xfrm>
-          <a:prstGeom prst="straightConnector1">
-            <a:avLst/>
-          </a:prstGeom>
-          <a:ln w="9525">
-            <a:solidFill>
-              <a:srgbClr val="555960"/>
-            </a:solidFill>
-          </a:ln>
-        </p:spPr>
-      </p:cxnSp>
-      <p:cxnSp>
-        <p:nvCxnSpPr>
-          <p:cNvPr id="236" name="W6"/>
-          <p:cNvCxnSpPr/>
-          <p:nvPr/>
-        </p:nvCxnSpPr>
-        <p:spPr>
-          <a:xfrm>
-            <a:off x="6400800" y="1554480"/>
-            <a:ext cx="182880" cy="502920"/>
-          </a:xfrm>
-          <a:prstGeom prst="straightConnector1">
-            <a:avLst/>
-          </a:prstGeom>
-          <a:ln w="9525">
-            <a:solidFill>
-              <a:srgbClr val="555960"/>
-            </a:solidFill>
-          </a:ln>
-        </p:spPr>
-      </p:cxnSp>
-      <p:cxnSp>
-        <p:nvCxnSpPr>
-          <p:cNvPr id="240" name="AR0"/>
-          <p:cNvCxnSpPr/>
-          <p:nvPr/>
-        </p:nvCxnSpPr>
-        <p:spPr>
-          <a:xfrm>
-            <a:off x="1613916" y="2606040"/>
-            <a:ext cx="0" cy="310896"/>
-          </a:xfrm>
-          <a:prstGeom prst="straightConnector1">
-            <a:avLst/>
-          </a:prstGeom>
-          <a:ln w="28575">
-            <a:solidFill>
-              <a:srgbClr val="8E6F3E"/>
-            </a:solidFill>
-            <a:tailEnd type="triangle" w="med" len="med"/>
-          </a:ln>
-        </p:spPr>
-      </p:cxnSp>
-      <p:cxnSp>
-        <p:nvCxnSpPr>
-          <p:cNvPr id="241" name="AR1"/>
-          <p:cNvCxnSpPr/>
-          <p:nvPr/>
-        </p:nvCxnSpPr>
-        <p:spPr>
-          <a:xfrm>
-            <a:off x="4567428" y="2606040"/>
-            <a:ext cx="0" cy="310896"/>
-          </a:xfrm>
-          <a:prstGeom prst="straightConnector1">
-            <a:avLst/>
-          </a:prstGeom>
-          <a:ln w="28575">
-            <a:solidFill>
-              <a:srgbClr val="8E6F3E"/>
-            </a:solidFill>
-            <a:tailEnd type="triangle" w="med" len="med"/>
-          </a:ln>
-        </p:spPr>
-      </p:cxnSp>
-      <p:cxnSp>
-        <p:nvCxnSpPr>
-          <p:cNvPr id="242" name="AR2"/>
-          <p:cNvCxnSpPr/>
-          <p:nvPr/>
-        </p:nvCxnSpPr>
-        <p:spPr>
-          <a:xfrm>
-            <a:off x="7520940" y="2606040"/>
-            <a:ext cx="0" cy="310896"/>
-          </a:xfrm>
-          <a:prstGeom prst="straightConnector1">
-            <a:avLst/>
-          </a:prstGeom>
-          <a:ln w="28575">
-            <a:solidFill>
-              <a:srgbClr val="8E6F3E"/>
-            </a:solidFill>
-            <a:tailEnd type="triangle" w="med" len="med"/>
-          </a:ln>
-        </p:spPr>
-      </p:cxnSp>
-      <p:sp>
-        <p:nvSpPr>
-          <p:cNvPr id="250" name="H0"/>
-          <p:cNvSpPr/>
-          <p:nvPr/>
-        </p:nvSpPr>
-        <p:spPr>
-          <a:xfrm>
-            <a:off x="274320" y="2926080"/>
-            <a:ext cx="2679192" cy="457200"/>
+              <a:t>the probability that one attempt produces an acceptable candidate</a:t>
+            </a:r>
+          </a:p>
+        </p:txBody>
+      </p:sp>
+      <p:sp>
+        <p:nvSpPr>
+          <p:cNvPr id="20" name="N0"/>
+          <p:cNvSpPr/>
+          <p:nvPr/>
+        </p:nvSpPr>
+        <p:spPr>
+          <a:xfrm>
+            <a:off x="365760" y="2834640"/>
+            <a:ext cx="1920240" cy="548640"/>
           </a:xfrm>
           <a:prstGeom prst="rect">
             <a:avLst/>
@@ -25069,60 +22903,72 @@
           <a:lstStyle/>
           <a:p>
             <a:pPr algn="ctr">
-              <a:buNone/>
-            </a:pPr>
-            <a:r>
-              <a:rPr lang="en-US" sz="2000" b="1" i="0" dirty="0">
+              <a:spcAft>
+                <a:spcPts val="0"/>
+              </a:spcAft>
+              <a:buNone/>
+            </a:pPr>
+            <a:r>
+              <a:rPr lang="en-US" sz="2800" b="1" i="1" dirty="0">
                 <a:solidFill>
                   <a:srgbClr val="FFFFFF"/>
                 </a:solidFill>
               </a:rPr>
-              <a:t>DEPENDENCY</a:t>
-            </a:r>
-          </a:p>
-        </p:txBody>
-      </p:sp>
-      <p:sp>
-        <p:nvSpPr>
-          <p:cNvPr id="253" name="B0"/>
-          <p:cNvSpPr/>
-          <p:nvPr/>
-        </p:nvSpPr>
-        <p:spPr>
-          <a:xfrm>
-            <a:off x="274320" y="3429000"/>
-            <a:ext cx="2679192" cy="1371600"/>
-          </a:xfrm>
-          <a:prstGeom prst="rect">
-            <a:avLst/>
-          </a:prstGeom>
-          <a:solidFill>
-            <a:srgbClr val="FBF8F2"/>
-          </a:solidFill>
-          <a:ln w="12700">
-            <a:solidFill>
-              <a:srgbClr val="C9B991"/>
-            </a:solidFill>
-          </a:ln>
-        </p:spPr>
-        <p:txBody>
-          <a:bodyPr/>
-          <a:lstStyle/>
-          <a:p>
-            <a:endParaRPr lang="en-US"/>
-          </a:p>
-        </p:txBody>
-      </p:sp>
-      <p:sp>
-        <p:nvSpPr>
-          <p:cNvPr id="251" name="H1"/>
-          <p:cNvSpPr/>
-          <p:nvPr/>
-        </p:nvSpPr>
-        <p:spPr>
-          <a:xfrm>
-            <a:off x="3227832" y="2926080"/>
-            <a:ext cx="2679192" cy="457200"/>
+              <a:t>T</a:t>
+            </a:r>
+          </a:p>
+        </p:txBody>
+      </p:sp>
+      <p:sp>
+        <p:nvSpPr>
+          <p:cNvPr id="21" name="Q0"/>
+          <p:cNvSpPr txBox="1"/>
+          <p:nvPr/>
+        </p:nvSpPr>
+        <p:spPr>
+          <a:xfrm>
+            <a:off x="365760" y="3474720"/>
+            <a:ext cx="1920240" cy="1005840"/>
+          </a:xfrm>
+          <a:prstGeom prst="rect">
+            <a:avLst/>
+          </a:prstGeom>
+          <a:noFill/>
+          <a:ln>
+            <a:noFill/>
+          </a:ln>
+        </p:spPr>
+        <p:txBody>
+          <a:bodyPr wrap="square" lIns="0" tIns="0" rIns="0" bIns="0" anchor="t"/>
+          <a:lstStyle/>
+          <a:p>
+            <a:pPr algn="ctr">
+              <a:spcAft>
+                <a:spcPts val="0"/>
+              </a:spcAft>
+              <a:buNone/>
+            </a:pPr>
+            <a:r>
+              <a:rPr lang="en-US" sz="1500" b="0" dirty="0">
+                <a:solidFill>
+                  <a:srgbClr val="555960"/>
+                </a:solidFill>
+              </a:rPr>
+              <a:t>an engineering task or task family</a:t>
+            </a:r>
+          </a:p>
+        </p:txBody>
+      </p:sp>
+      <p:sp>
+        <p:nvSpPr>
+          <p:cNvPr id="22" name="N1"/>
+          <p:cNvSpPr/>
+          <p:nvPr/>
+        </p:nvSpPr>
+        <p:spPr>
+          <a:xfrm>
+            <a:off x="2529840" y="2834640"/>
+            <a:ext cx="1920240" cy="548640"/>
           </a:xfrm>
           <a:prstGeom prst="rect">
             <a:avLst/>
@@ -25139,60 +22985,72 @@
           <a:lstStyle/>
           <a:p>
             <a:pPr algn="ctr">
-              <a:buNone/>
-            </a:pPr>
-            <a:r>
-              <a:rPr lang="en-US" sz="2000" b="1" i="0" dirty="0">
+              <a:spcAft>
+                <a:spcPts val="0"/>
+              </a:spcAft>
+              <a:buNone/>
+            </a:pPr>
+            <a:r>
+              <a:rPr lang="en-US" sz="2800" b="1" i="1" dirty="0">
                 <a:solidFill>
                   <a:srgbClr val="FFFFFF"/>
                 </a:solidFill>
               </a:rPr>
-              <a:t>STATE MACHINE</a:t>
-            </a:r>
-          </a:p>
-        </p:txBody>
-      </p:sp>
-      <p:sp>
-        <p:nvSpPr>
-          <p:cNvPr id="254" name="B1"/>
-          <p:cNvSpPr/>
-          <p:nvPr/>
-        </p:nvSpPr>
-        <p:spPr>
-          <a:xfrm>
-            <a:off x="3227832" y="3429000"/>
-            <a:ext cx="2679192" cy="1371600"/>
-          </a:xfrm>
-          <a:prstGeom prst="rect">
-            <a:avLst/>
-          </a:prstGeom>
-          <a:solidFill>
-            <a:srgbClr val="FBF8F2"/>
-          </a:solidFill>
-          <a:ln w="12700">
-            <a:solidFill>
-              <a:srgbClr val="C9B991"/>
-            </a:solidFill>
-          </a:ln>
-        </p:spPr>
-        <p:txBody>
-          <a:bodyPr/>
-          <a:lstStyle/>
-          <a:p>
-            <a:endParaRPr lang="en-US"/>
-          </a:p>
-        </p:txBody>
-      </p:sp>
-      <p:sp>
-        <p:nvSpPr>
-          <p:cNvPr id="252" name="H2"/>
-          <p:cNvSpPr/>
-          <p:nvPr/>
-        </p:nvSpPr>
-        <p:spPr>
-          <a:xfrm>
-            <a:off x="6181344" y="2926080"/>
-            <a:ext cx="2679192" cy="457200"/>
+              <a:t>M</a:t>
+            </a:r>
+          </a:p>
+        </p:txBody>
+      </p:sp>
+      <p:sp>
+        <p:nvSpPr>
+          <p:cNvPr id="23" name="Q1"/>
+          <p:cNvSpPr txBox="1"/>
+          <p:nvPr/>
+        </p:nvSpPr>
+        <p:spPr>
+          <a:xfrm>
+            <a:off x="2529840" y="3474720"/>
+            <a:ext cx="1920240" cy="1005840"/>
+          </a:xfrm>
+          <a:prstGeom prst="rect">
+            <a:avLst/>
+          </a:prstGeom>
+          <a:noFill/>
+          <a:ln>
+            <a:noFill/>
+          </a:ln>
+        </p:spPr>
+        <p:txBody>
+          <a:bodyPr wrap="square" lIns="0" tIns="0" rIns="0" bIns="0" anchor="t"/>
+          <a:lstStyle/>
+          <a:p>
+            <a:pPr algn="ctr">
+              <a:spcAft>
+                <a:spcPts val="0"/>
+              </a:spcAft>
+              <a:buNone/>
+            </a:pPr>
+            <a:r>
+              <a:rPr lang="en-US" sz="1500" b="0" dirty="0">
+                <a:solidFill>
+                  <a:srgbClr val="555960"/>
+                </a:solidFill>
+              </a:rPr>
+              <a:t>the reasoning model</a:t>
+            </a:r>
+          </a:p>
+        </p:txBody>
+      </p:sp>
+      <p:sp>
+        <p:nvSpPr>
+          <p:cNvPr id="24" name="N2"/>
+          <p:cNvSpPr/>
+          <p:nvPr/>
+        </p:nvSpPr>
+        <p:spPr>
+          <a:xfrm>
+            <a:off x="4693920" y="2834640"/>
+            <a:ext cx="1920240" cy="548640"/>
           </a:xfrm>
           <a:prstGeom prst="rect">
             <a:avLst/>
@@ -25209,609 +23067,32 @@
           <a:lstStyle/>
           <a:p>
             <a:pPr algn="ctr">
-              <a:buNone/>
-            </a:pPr>
-            <a:r>
-              <a:rPr lang="en-US" sz="2000" b="1" i="0" dirty="0">
+              <a:spcAft>
+                <a:spcPts val="0"/>
+              </a:spcAft>
+              <a:buNone/>
+            </a:pPr>
+            <a:r>
+              <a:rPr lang="en-US" sz="2800" b="1" i="1" dirty="0">
                 <a:solidFill>
                   <a:srgbClr val="FFFFFF"/>
                 </a:solidFill>
               </a:rPr>
-              <a:t>QUANTITATIVE</a:t>
-            </a:r>
-          </a:p>
-        </p:txBody>
-      </p:sp>
-      <p:sp>
-        <p:nvSpPr>
-          <p:cNvPr id="255" name="B2"/>
-          <p:cNvSpPr/>
-          <p:nvPr/>
-        </p:nvSpPr>
-        <p:spPr>
-          <a:xfrm>
-            <a:off x="6181344" y="3429000"/>
-            <a:ext cx="2679192" cy="1371600"/>
-          </a:xfrm>
-          <a:prstGeom prst="rect">
-            <a:avLst/>
-          </a:prstGeom>
-          <a:solidFill>
-            <a:srgbClr val="FBF8F2"/>
-          </a:solidFill>
-          <a:ln w="12700">
-            <a:solidFill>
-              <a:srgbClr val="C9B991"/>
-            </a:solidFill>
-          </a:ln>
-        </p:spPr>
-        <p:txBody>
-          <a:bodyPr/>
-          <a:lstStyle/>
-          <a:p>
-            <a:endParaRPr lang="en-US"/>
-          </a:p>
-        </p:txBody>
-      </p:sp>
-      <p:sp>
-        <p:nvSpPr>
-          <p:cNvPr id="260" name="N0"/>
-          <p:cNvSpPr/>
-          <p:nvPr/>
-        </p:nvSpPr>
-        <p:spPr>
-          <a:xfrm>
-            <a:off x="960120" y="3611880"/>
-            <a:ext cx="228600" cy="228600"/>
-          </a:xfrm>
-          <a:prstGeom prst="ellipse">
-            <a:avLst/>
-          </a:prstGeom>
-          <a:solidFill>
-            <a:srgbClr val="FFFFFF"/>
-          </a:solidFill>
-          <a:ln w="12700">
-            <a:solidFill>
-              <a:srgbClr val="555960"/>
-            </a:solidFill>
-          </a:ln>
-        </p:spPr>
-        <p:txBody>
-          <a:bodyPr/>
-          <a:lstStyle/>
-          <a:p>
-            <a:endParaRPr lang="en-US"/>
-          </a:p>
-        </p:txBody>
-      </p:sp>
-      <p:sp>
-        <p:nvSpPr>
-          <p:cNvPr id="261" name="N1"/>
-          <p:cNvSpPr/>
-          <p:nvPr/>
-        </p:nvSpPr>
-        <p:spPr>
-          <a:xfrm>
-            <a:off x="1874520" y="3611880"/>
-            <a:ext cx="228600" cy="228600"/>
-          </a:xfrm>
-          <a:prstGeom prst="ellipse">
-            <a:avLst/>
-          </a:prstGeom>
-          <a:solidFill>
-            <a:srgbClr val="FFFFFF"/>
-          </a:solidFill>
-          <a:ln w="12700">
-            <a:solidFill>
-              <a:srgbClr val="555960"/>
-            </a:solidFill>
-          </a:ln>
-        </p:spPr>
-        <p:txBody>
-          <a:bodyPr/>
-          <a:lstStyle/>
-          <a:p>
-            <a:endParaRPr lang="en-US"/>
-          </a:p>
-        </p:txBody>
-      </p:sp>
-      <p:sp>
-        <p:nvSpPr>
-          <p:cNvPr id="262" name="N2"/>
-          <p:cNvSpPr/>
-          <p:nvPr/>
-        </p:nvSpPr>
-        <p:spPr>
-          <a:xfrm>
-            <a:off x="594360" y="4206240"/>
-            <a:ext cx="228600" cy="228600"/>
-          </a:xfrm>
-          <a:prstGeom prst="ellipse">
-            <a:avLst/>
-          </a:prstGeom>
-          <a:solidFill>
-            <a:srgbClr val="FFFFFF"/>
-          </a:solidFill>
-          <a:ln w="12700">
-            <a:solidFill>
-              <a:srgbClr val="555960"/>
-            </a:solidFill>
-          </a:ln>
-        </p:spPr>
-        <p:txBody>
-          <a:bodyPr/>
-          <a:lstStyle/>
-          <a:p>
-            <a:endParaRPr lang="en-US"/>
-          </a:p>
-        </p:txBody>
-      </p:sp>
-      <p:sp>
-        <p:nvSpPr>
-          <p:cNvPr id="263" name="N3"/>
-          <p:cNvSpPr/>
-          <p:nvPr/>
-        </p:nvSpPr>
-        <p:spPr>
-          <a:xfrm>
-            <a:off x="1508760" y="4206240"/>
-            <a:ext cx="228600" cy="228600"/>
-          </a:xfrm>
-          <a:prstGeom prst="ellipse">
-            <a:avLst/>
-          </a:prstGeom>
-          <a:solidFill>
-            <a:srgbClr val="FFFFFF"/>
-          </a:solidFill>
-          <a:ln w="12700">
-            <a:solidFill>
-              <a:srgbClr val="555960"/>
-            </a:solidFill>
-          </a:ln>
-        </p:spPr>
-        <p:txBody>
-          <a:bodyPr/>
-          <a:lstStyle/>
-          <a:p>
-            <a:endParaRPr lang="en-US"/>
-          </a:p>
-        </p:txBody>
-      </p:sp>
-      <p:cxnSp>
-        <p:nvCxnSpPr>
-          <p:cNvPr id="264" name="E0"/>
-          <p:cNvCxnSpPr/>
-          <p:nvPr/>
-        </p:nvCxnSpPr>
-        <p:spPr>
-          <a:xfrm>
-            <a:off x="1188720" y="3726180"/>
-            <a:ext cx="685800" cy="0"/>
-          </a:xfrm>
-          <a:prstGeom prst="straightConnector1">
-            <a:avLst/>
-          </a:prstGeom>
-          <a:ln w="28575">
-            <a:solidFill>
-              <a:srgbClr val="8E6F3E"/>
-            </a:solidFill>
-            <a:tailEnd type="triangle" w="med" len="med"/>
-          </a:ln>
-        </p:spPr>
-      </p:cxnSp>
-      <p:cxnSp>
-        <p:nvCxnSpPr>
-          <p:cNvPr id="265" name="E1"/>
-          <p:cNvCxnSpPr/>
-          <p:nvPr/>
-        </p:nvCxnSpPr>
-        <p:spPr>
-          <a:xfrm flipH="1">
-            <a:off x="777240" y="3840480"/>
-            <a:ext cx="228600" cy="365760"/>
-          </a:xfrm>
-          <a:prstGeom prst="straightConnector1">
-            <a:avLst/>
-          </a:prstGeom>
-          <a:ln w="28575">
-            <a:solidFill>
-              <a:srgbClr val="8E6F3E"/>
-            </a:solidFill>
-            <a:tailEnd type="triangle" w="med" len="med"/>
-          </a:ln>
-        </p:spPr>
-      </p:cxnSp>
-      <p:cxnSp>
-        <p:nvCxnSpPr>
-          <p:cNvPr id="266" name="E2"/>
-          <p:cNvCxnSpPr/>
-          <p:nvPr/>
-        </p:nvCxnSpPr>
-        <p:spPr>
-          <a:xfrm flipH="1">
-            <a:off x="1691640" y="3840480"/>
-            <a:ext cx="251460" cy="365760"/>
-          </a:xfrm>
-          <a:prstGeom prst="straightConnector1">
-            <a:avLst/>
-          </a:prstGeom>
-          <a:ln w="28575">
-            <a:solidFill>
-              <a:srgbClr val="8E6F3E"/>
-            </a:solidFill>
-            <a:tailEnd type="triangle" w="med" len="med"/>
-          </a:ln>
-        </p:spPr>
-      </p:cxnSp>
-      <p:cxnSp>
-        <p:nvCxnSpPr>
-          <p:cNvPr id="267" name="E3"/>
-          <p:cNvCxnSpPr/>
-          <p:nvPr/>
-        </p:nvCxnSpPr>
-        <p:spPr>
-          <a:xfrm>
-            <a:off x="822960" y="4320540"/>
-            <a:ext cx="685800" cy="0"/>
-          </a:xfrm>
-          <a:prstGeom prst="straightConnector1">
-            <a:avLst/>
-          </a:prstGeom>
-          <a:ln w="28575">
-            <a:solidFill>
-              <a:srgbClr val="8E6F3E"/>
-            </a:solidFill>
-            <a:tailEnd type="triangle" w="med" len="med"/>
-          </a:ln>
-        </p:spPr>
-      </p:cxnSp>
-      <p:sp>
-        <p:nvSpPr>
-          <p:cNvPr id="270" name="R0"/>
-          <p:cNvSpPr/>
-          <p:nvPr/>
-        </p:nvSpPr>
-        <p:spPr>
-          <a:xfrm>
-            <a:off x="3529584" y="3611880"/>
-            <a:ext cx="640080" cy="274320"/>
-          </a:xfrm>
-          <a:prstGeom prst="roundRect">
-            <a:avLst/>
-          </a:prstGeom>
-          <a:solidFill>
-            <a:srgbClr val="FFFFFF"/>
-          </a:solidFill>
-          <a:ln w="12700">
-            <a:solidFill>
-              <a:srgbClr val="555960"/>
-            </a:solidFill>
-          </a:ln>
-        </p:spPr>
-        <p:txBody>
-          <a:bodyPr/>
-          <a:lstStyle/>
-          <a:p>
-            <a:endParaRPr lang="en-US"/>
-          </a:p>
-        </p:txBody>
-      </p:sp>
-      <p:sp>
-        <p:nvSpPr>
-          <p:cNvPr id="271" name="R1"/>
-          <p:cNvSpPr/>
-          <p:nvPr/>
-        </p:nvSpPr>
-        <p:spPr>
-          <a:xfrm>
-            <a:off x="4754880" y="3611880"/>
-            <a:ext cx="640080" cy="274320"/>
-          </a:xfrm>
-          <a:prstGeom prst="roundRect">
-            <a:avLst/>
-          </a:prstGeom>
-          <a:solidFill>
-            <a:srgbClr val="FFFFFF"/>
-          </a:solidFill>
-          <a:ln w="12700">
-            <a:solidFill>
-              <a:srgbClr val="555960"/>
-            </a:solidFill>
-          </a:ln>
-        </p:spPr>
-        <p:txBody>
-          <a:bodyPr/>
-          <a:lstStyle/>
-          <a:p>
-            <a:endParaRPr lang="en-US"/>
-          </a:p>
-        </p:txBody>
-      </p:sp>
-      <p:sp>
-        <p:nvSpPr>
-          <p:cNvPr id="272" name="R2"/>
-          <p:cNvSpPr/>
-          <p:nvPr/>
-        </p:nvSpPr>
-        <p:spPr>
-          <a:xfrm>
-            <a:off x="4142232" y="4389120"/>
-            <a:ext cx="640080" cy="274320"/>
-          </a:xfrm>
-          <a:prstGeom prst="roundRect">
-            <a:avLst/>
-          </a:prstGeom>
-          <a:solidFill>
-            <a:srgbClr val="FFFFFF"/>
-          </a:solidFill>
-          <a:ln w="12700">
-            <a:solidFill>
-              <a:srgbClr val="555960"/>
-            </a:solidFill>
-          </a:ln>
-        </p:spPr>
-        <p:txBody>
-          <a:bodyPr/>
-          <a:lstStyle/>
-          <a:p>
-            <a:endParaRPr lang="en-US"/>
-          </a:p>
-        </p:txBody>
-      </p:sp>
-      <p:cxnSp>
-        <p:nvCxnSpPr>
-          <p:cNvPr id="273" name="TR0"/>
-          <p:cNvCxnSpPr/>
-          <p:nvPr/>
-        </p:nvCxnSpPr>
-        <p:spPr>
-          <a:xfrm>
-            <a:off x="4169664" y="3749040"/>
-            <a:ext cx="585216" cy="0"/>
-          </a:xfrm>
-          <a:prstGeom prst="straightConnector1">
-            <a:avLst/>
-          </a:prstGeom>
-          <a:ln w="12700">
-            <a:solidFill>
-              <a:srgbClr val="555960"/>
-            </a:solidFill>
-            <a:tailEnd type="triangle" w="med" len="med"/>
-          </a:ln>
-        </p:spPr>
-      </p:cxnSp>
-      <p:cxnSp>
-        <p:nvCxnSpPr>
-          <p:cNvPr id="274" name="TR1"/>
-          <p:cNvCxnSpPr/>
-          <p:nvPr/>
-        </p:nvCxnSpPr>
-        <p:spPr>
-          <a:xfrm flipH="1">
-            <a:off x="4462272" y="3886200"/>
-            <a:ext cx="612648" cy="502920"/>
-          </a:xfrm>
-          <a:prstGeom prst="straightConnector1">
-            <a:avLst/>
-          </a:prstGeom>
-          <a:ln w="12700">
-            <a:solidFill>
-              <a:srgbClr val="555960"/>
-            </a:solidFill>
-            <a:tailEnd type="triangle" w="med" len="med"/>
-          </a:ln>
-        </p:spPr>
-      </p:cxnSp>
-      <p:cxnSp>
-        <p:nvCxnSpPr>
-          <p:cNvPr id="275" name="TR2"/>
-          <p:cNvCxnSpPr/>
-          <p:nvPr/>
-        </p:nvCxnSpPr>
-        <p:spPr>
-          <a:xfrm>
-            <a:off x="3849624" y="3886200"/>
-            <a:ext cx="292608" cy="502920"/>
-          </a:xfrm>
-          <a:prstGeom prst="straightConnector1">
-            <a:avLst/>
-          </a:prstGeom>
-          <a:ln w="28575">
-            <a:solidFill>
-              <a:srgbClr val="8E6F3E"/>
-            </a:solidFill>
-            <a:tailEnd type="triangle" w="med" len="med"/>
-          </a:ln>
-        </p:spPr>
-      </p:cxnSp>
-      <p:cxnSp>
-        <p:nvCxnSpPr>
-          <p:cNvPr id="276" name="X1"/>
-          <p:cNvCxnSpPr/>
-          <p:nvPr/>
-        </p:nvCxnSpPr>
-        <p:spPr>
-          <a:xfrm>
-            <a:off x="3893058" y="4034610"/>
-            <a:ext cx="205740" cy="205740"/>
-          </a:xfrm>
-          <a:prstGeom prst="straightConnector1">
-            <a:avLst/>
-          </a:prstGeom>
-          <a:ln w="38100">
-            <a:solidFill>
-              <a:srgbClr val="5C4826"/>
-            </a:solidFill>
-          </a:ln>
-        </p:spPr>
-      </p:cxnSp>
-      <p:cxnSp>
-        <p:nvCxnSpPr>
-          <p:cNvPr id="277" name="X2"/>
-          <p:cNvCxnSpPr/>
-          <p:nvPr/>
-        </p:nvCxnSpPr>
-        <p:spPr>
-          <a:xfrm flipV="1">
-            <a:off x="3893058" y="4034610"/>
-            <a:ext cx="205740" cy="205740"/>
-          </a:xfrm>
-          <a:prstGeom prst="straightConnector1">
-            <a:avLst/>
-          </a:prstGeom>
-          <a:ln w="38100">
-            <a:solidFill>
-              <a:srgbClr val="5C4826"/>
-            </a:solidFill>
-          </a:ln>
-        </p:spPr>
-      </p:cxnSp>
-      <p:cxnSp>
-        <p:nvCxnSpPr>
-          <p:cNvPr id="280" name="AX1"/>
-          <p:cNvCxnSpPr/>
-          <p:nvPr/>
-        </p:nvCxnSpPr>
-        <p:spPr>
-          <a:xfrm>
-            <a:off x="6400800" y="4617720"/>
-            <a:ext cx="2240280" cy="0"/>
-          </a:xfrm>
-          <a:prstGeom prst="straightConnector1">
-            <a:avLst/>
-          </a:prstGeom>
-          <a:ln w="9525">
-            <a:solidFill>
-              <a:srgbClr val="555960"/>
-            </a:solidFill>
-          </a:ln>
-        </p:spPr>
-      </p:cxnSp>
-      <p:sp>
-        <p:nvSpPr>
-          <p:cNvPr id="281" name="BA0"/>
-          <p:cNvSpPr/>
-          <p:nvPr/>
-        </p:nvSpPr>
-        <p:spPr>
-          <a:xfrm>
-            <a:off x="6675120" y="4389120"/>
-            <a:ext cx="228600" cy="228600"/>
-          </a:xfrm>
-          <a:prstGeom prst="rect">
-            <a:avLst/>
-          </a:prstGeom>
-          <a:solidFill>
-            <a:srgbClr val="FBF8F2"/>
-          </a:solidFill>
-          <a:ln w="12700">
-            <a:solidFill>
-              <a:srgbClr val="555960"/>
-            </a:solidFill>
-          </a:ln>
-        </p:spPr>
-        <p:txBody>
-          <a:bodyPr/>
-          <a:lstStyle/>
-          <a:p>
-            <a:endParaRPr lang="en-US"/>
-          </a:p>
-        </p:txBody>
-      </p:sp>
-      <p:sp>
-        <p:nvSpPr>
-          <p:cNvPr id="282" name="BA1"/>
-          <p:cNvSpPr/>
-          <p:nvPr/>
-        </p:nvSpPr>
-        <p:spPr>
-          <a:xfrm>
-            <a:off x="7086600" y="4206240"/>
-            <a:ext cx="228600" cy="411480"/>
-          </a:xfrm>
-          <a:prstGeom prst="rect">
-            <a:avLst/>
-          </a:prstGeom>
-          <a:solidFill>
-            <a:srgbClr val="FBF8F2"/>
-          </a:solidFill>
-          <a:ln w="12700">
-            <a:solidFill>
-              <a:srgbClr val="555960"/>
-            </a:solidFill>
-          </a:ln>
-        </p:spPr>
-        <p:txBody>
-          <a:bodyPr/>
-          <a:lstStyle/>
-          <a:p>
-            <a:endParaRPr lang="en-US"/>
-          </a:p>
-        </p:txBody>
-      </p:sp>
-      <p:sp>
-        <p:nvSpPr>
-          <p:cNvPr id="283" name="BA2"/>
-          <p:cNvSpPr/>
-          <p:nvPr/>
-        </p:nvSpPr>
-        <p:spPr>
-          <a:xfrm>
-            <a:off x="7498080" y="3977640"/>
-            <a:ext cx="228600" cy="640080"/>
-          </a:xfrm>
-          <a:prstGeom prst="rect">
-            <a:avLst/>
-          </a:prstGeom>
-          <a:solidFill>
-            <a:srgbClr val="FBF8F2"/>
-          </a:solidFill>
-          <a:ln w="12700">
-            <a:solidFill>
-              <a:srgbClr val="555960"/>
-            </a:solidFill>
-          </a:ln>
-        </p:spPr>
-        <p:txBody>
-          <a:bodyPr/>
-          <a:lstStyle/>
-          <a:p>
-            <a:endParaRPr lang="en-US"/>
-          </a:p>
-        </p:txBody>
-      </p:sp>
-      <p:cxnSp>
-        <p:nvCxnSpPr>
-          <p:cNvPr id="284" name="BD1"/>
-          <p:cNvCxnSpPr/>
-          <p:nvPr/>
-        </p:nvCxnSpPr>
-        <p:spPr>
-          <a:xfrm>
-            <a:off x="6400800" y="3886200"/>
-            <a:ext cx="2240280" cy="0"/>
-          </a:xfrm>
-          <a:prstGeom prst="straightConnector1">
-            <a:avLst/>
-          </a:prstGeom>
-          <a:ln w="28575">
-            <a:solidFill>
-              <a:srgbClr val="8E6F3E"/>
-            </a:solidFill>
-            <a:prstDash val="dash"/>
-          </a:ln>
-        </p:spPr>
-      </p:cxnSp>
-      <p:sp>
-        <p:nvSpPr>
-          <p:cNvPr id="290" name="C0"/>
+              <a:t>R</a:t>
+            </a:r>
+          </a:p>
+        </p:txBody>
+      </p:sp>
+      <p:sp>
+        <p:nvSpPr>
+          <p:cNvPr id="25" name="Q2"/>
           <p:cNvSpPr txBox="1"/>
           <p:nvPr/>
         </p:nvSpPr>
         <p:spPr>
           <a:xfrm>
-            <a:off x="274320" y="4892040"/>
-            <a:ext cx="2679192" cy="274320"/>
+            <a:off x="4693920" y="3474720"/>
+            <a:ext cx="1920240" cy="1005840"/>
           </a:xfrm>
           <a:prstGeom prst="rect">
             <a:avLst/>
@@ -25826,103 +23107,32 @@
           <a:lstStyle/>
           <a:p>
             <a:pPr algn="ctr">
-              <a:buNone/>
-            </a:pPr>
-            <a:r>
-              <a:rPr lang="en-US" sz="1400" b="1" i="0" dirty="0">
-                <a:solidFill>
-                  <a:srgbClr val="8E6F3E"/>
-                </a:solidFill>
-              </a:rPr>
-              <a:t>the edge set</a:t>
-            </a:r>
-          </a:p>
-        </p:txBody>
-      </p:sp>
-      <p:sp>
-        <p:nvSpPr>
-          <p:cNvPr id="291" name="C1"/>
-          <p:cNvSpPr txBox="1"/>
-          <p:nvPr/>
-        </p:nvSpPr>
-        <p:spPr>
-          <a:xfrm>
-            <a:off x="3227832" y="4892040"/>
-            <a:ext cx="2679192" cy="274320"/>
-          </a:xfrm>
-          <a:prstGeom prst="rect">
-            <a:avLst/>
-          </a:prstGeom>
-          <a:noFill/>
-          <a:ln>
-            <a:noFill/>
-          </a:ln>
-        </p:spPr>
-        <p:txBody>
-          <a:bodyPr wrap="square" lIns="0" tIns="0" rIns="0" bIns="0" anchor="t"/>
-          <a:lstStyle/>
-          <a:p>
-            <a:pPr algn="ctr">
-              <a:buNone/>
-            </a:pPr>
-            <a:r>
-              <a:rPr lang="en-US" sz="1400" b="1" i="0" dirty="0">
-                <a:solidFill>
-                  <a:srgbClr val="8E6F3E"/>
-                </a:solidFill>
-              </a:rPr>
-              <a:t>the forbidden transition</a:t>
-            </a:r>
-          </a:p>
-        </p:txBody>
-      </p:sp>
-      <p:sp>
-        <p:nvSpPr>
-          <p:cNvPr id="292" name="C2"/>
-          <p:cNvSpPr txBox="1"/>
-          <p:nvPr/>
-        </p:nvSpPr>
-        <p:spPr>
-          <a:xfrm>
-            <a:off x="6181344" y="4892040"/>
-            <a:ext cx="2679192" cy="274320"/>
-          </a:xfrm>
-          <a:prstGeom prst="rect">
-            <a:avLst/>
-          </a:prstGeom>
-          <a:noFill/>
-          <a:ln>
-            <a:noFill/>
-          </a:ln>
-        </p:spPr>
-        <p:txBody>
-          <a:bodyPr wrap="square" lIns="0" tIns="0" rIns="0" bIns="0" anchor="t"/>
-          <a:lstStyle/>
-          <a:p>
-            <a:pPr algn="ctr">
-              <a:buNone/>
-            </a:pPr>
-            <a:r>
-              <a:rPr lang="en-US" sz="1400" b="1" i="0" dirty="0">
-                <a:solidFill>
-                  <a:srgbClr val="8E6F3E"/>
-                </a:solidFill>
-              </a:rPr>
-              <a:t>the bound</a:t>
-            </a:r>
-          </a:p>
-        </p:txBody>
-      </p:sp>
-      <p:sp>
-        <p:nvSpPr>
-          <p:cNvPr id="199" name="FooterBand"/>
-          <p:cNvSpPr/>
-          <p:nvPr/>
-        </p:nvSpPr>
-        <p:spPr>
-          <a:xfrm>
-            <a:off x="274320" y="5852160"/>
-            <a:ext cx="8595360" cy="566928"/>
+              <a:spcAft>
+                <a:spcPts val="0"/>
+              </a:spcAft>
+              <a:buNone/>
+            </a:pPr>
+            <a:r>
+              <a:rPr lang="en-US" sz="1500" b="0" dirty="0">
+                <a:solidFill>
+                  <a:srgbClr val="555960"/>
+                </a:solidFill>
+              </a:rPr>
+              <a:t>the representation available to it</a:t>
+            </a:r>
+          </a:p>
+        </p:txBody>
+      </p:sp>
+      <p:sp>
+        <p:nvSpPr>
+          <p:cNvPr id="26" name="N3"/>
+          <p:cNvSpPr/>
+          <p:nvPr/>
+        </p:nvSpPr>
+        <p:spPr>
+          <a:xfrm>
+            <a:off x="6858000" y="2834640"/>
+            <a:ext cx="1920240" cy="548640"/>
           </a:xfrm>
           <a:prstGeom prst="rect">
             <a:avLst/>
@@ -25939,6 +23149,125 @@
           <a:lstStyle/>
           <a:p>
             <a:pPr algn="ctr">
+              <a:spcAft>
+                <a:spcPts val="0"/>
+              </a:spcAft>
+              <a:buNone/>
+            </a:pPr>
+            <a:r>
+              <a:rPr lang="en-US" sz="2800" b="1" i="1" dirty="0">
+                <a:solidFill>
+                  <a:srgbClr val="FFFFFF"/>
+                </a:solidFill>
+              </a:rPr>
+              <a:t>H</a:t>
+            </a:r>
+          </a:p>
+        </p:txBody>
+      </p:sp>
+      <p:sp>
+        <p:nvSpPr>
+          <p:cNvPr id="27" name="Q3"/>
+          <p:cNvSpPr txBox="1"/>
+          <p:nvPr/>
+        </p:nvSpPr>
+        <p:spPr>
+          <a:xfrm>
+            <a:off x="6858000" y="3474720"/>
+            <a:ext cx="1920240" cy="1005840"/>
+          </a:xfrm>
+          <a:prstGeom prst="rect">
+            <a:avLst/>
+          </a:prstGeom>
+          <a:noFill/>
+          <a:ln>
+            <a:noFill/>
+          </a:ln>
+        </p:spPr>
+        <p:txBody>
+          <a:bodyPr wrap="square" lIns="0" tIns="0" rIns="0" bIns="0" anchor="t"/>
+          <a:lstStyle/>
+          <a:p>
+            <a:pPr algn="ctr">
+              <a:spcAft>
+                <a:spcPts val="0"/>
+              </a:spcAft>
+              <a:buNone/>
+            </a:pPr>
+            <a:r>
+              <a:rPr lang="en-US" sz="1500" b="0" dirty="0">
+                <a:solidFill>
+                  <a:srgbClr val="555960"/>
+                </a:solidFill>
+              </a:rPr>
+              <a:t>the harness and process through which production is organized</a:t>
+            </a:r>
+          </a:p>
+        </p:txBody>
+      </p:sp>
+      <p:sp>
+        <p:nvSpPr>
+          <p:cNvPr id="150" name="Ital"/>
+          <p:cNvSpPr txBox="1"/>
+          <p:nvPr/>
+        </p:nvSpPr>
+        <p:spPr>
+          <a:xfrm>
+            <a:off x="274320" y="4983480"/>
+            <a:ext cx="8595360" cy="457200"/>
+          </a:xfrm>
+          <a:prstGeom prst="rect">
+            <a:avLst/>
+          </a:prstGeom>
+          <a:noFill/>
+          <a:ln>
+            <a:noFill/>
+          </a:ln>
+        </p:spPr>
+        <p:txBody>
+          <a:bodyPr wrap="square" lIns="0" tIns="0" rIns="0" bIns="0" anchor="t"/>
+          <a:lstStyle/>
+          <a:p>
+            <a:pPr algn="ctr">
+              <a:buNone/>
+            </a:pPr>
+            <a:r>
+              <a:rPr lang="en-US" sz="1700" b="0" i="1" dirty="0">
+                <a:solidFill>
+                  <a:srgbClr val="555960"/>
+                </a:solidFill>
+              </a:rPr>
+              <a:t>Change any one of the four and the probability changes.</a:t>
+            </a:r>
+          </a:p>
+        </p:txBody>
+      </p:sp>
+      <p:sp>
+        <p:nvSpPr>
+          <p:cNvPr id="199" name="FooterBand"/>
+          <p:cNvSpPr/>
+          <p:nvPr/>
+        </p:nvSpPr>
+        <p:spPr>
+          <a:xfrm>
+            <a:off x="274320" y="5852160"/>
+            <a:ext cx="8595360" cy="566928"/>
+          </a:xfrm>
+          <a:prstGeom prst="rect">
+            <a:avLst/>
+          </a:prstGeom>
+          <a:solidFill>
+            <a:srgbClr val="8E6F3E"/>
+          </a:solidFill>
+          <a:ln>
+            <a:noFill/>
+          </a:ln>
+        </p:spPr>
+        <p:txBody>
+          <a:bodyPr wrap="square" lIns="27432" tIns="22860" rIns="27432" bIns="22860" anchor="ctr"/>
+          <a:lstStyle/>
+          <a:p>
+            <a:pPr algn="ctr">
               <a:buNone/>
             </a:pPr>
             <a:r>
@@ -25947,7 +23276,7 @@
                   <a:srgbClr val="FFFFFF"/>
                 </a:solidFill>
               </a:rPr>
-              <a:t>The kept distinctions do the model’s work.</a:t>
+              <a:t>Does the engineering system produce the thing?</a:t>
             </a:r>
           </a:p>
         </p:txBody>
@@ -25957,6 +23286,707 @@
   <p:clrMapOvr>
     <a:masterClrMapping/>
   </p:clrMapOvr>
+</p:sld>
+</file>
+
+<file path=ppt/slides/slide34.xml><?xml version="1.0" encoding="utf-8"?>
+<p:sld xmlns:a="http://schemas.openxmlformats.org/drawingml/2006/main" xmlns:r="http://schemas.openxmlformats.org/officeDocument/2006/relationships" xmlns:p="http://schemas.openxmlformats.org/presentationml/2006/main">
+  <p:cSld>
+    <p:spTree>
+      <p:nvGrpSpPr>
+        <p:cNvPr id="1" name=""/>
+        <p:cNvGrpSpPr/>
+        <p:nvPr/>
+      </p:nvGrpSpPr>
+      <p:grpSpPr>
+        <a:xfrm>
+          <a:off x="0" y="0"/>
+          <a:ext cx="0" cy="0"/>
+          <a:chOff x="0" y="0"/>
+          <a:chExt cx="0" cy="0"/>
+        </a:xfrm>
+      </p:grpSpPr>
+      <p:sp>
+        <p:nvSpPr>
+          <p:cNvPr id="2" name="Title 1"/>
+          <p:cNvSpPr>
+            <a:spLocks noGrp="1"/>
+          </p:cNvSpPr>
+          <p:nvPr>
+            <p:ph type="title"/>
+          </p:nvPr>
+        </p:nvSpPr>
+        <p:spPr/>
+        <p:txBody>
+          <a:bodyPr>
+            <a:normAutofit fontScale="90000"/>
+          </a:bodyPr>
+          <a:lstStyle/>
+          <a:p>
+            <a:r>
+              <a:rPr lang="en-US" dirty="0"/>
+              <a:t>Open the box — where things can go wrong</a:t>
+            </a:r>
+          </a:p>
+        </p:txBody>
+      </p:sp>
+      <p:sp>
+        <p:nvSpPr>
+          <p:cNvPr id="3" name="Slide Number Placeholder 3"/>
+          <p:cNvSpPr>
+            <a:spLocks noGrp="1"/>
+          </p:cNvSpPr>
+          <p:nvPr>
+            <p:ph type="sldNum" sz="quarter" idx="4"/>
+          </p:nvPr>
+        </p:nvSpPr>
+        <p:spPr/>
+        <p:txBody>
+          <a:bodyPr/>
+          <a:lstStyle/>
+          <a:p>
+            <a:fld id="{B7EB45DA-9A0D-DC49-8E02-F30A5DDC21C3}" type="slidenum">
+              <a:rPr lang="en-US" smtClean="0"/>
+              <a:t>3</a:t>
+            </a:fld>
+            <a:endParaRPr lang="en-US"/>
+          </a:p>
+        </p:txBody>
+      </p:sp>
+      <p:sp>
+        <p:nvSpPr>
+          <p:cNvPr id="11" name="EqBox"/>
+          <p:cNvSpPr txBox="1"/>
+          <p:nvPr/>
+        </p:nvSpPr>
+        <p:spPr>
+          <a:xfrm>
+            <a:off x="274320" y="914400"/>
+            <a:ext cx="8595360" cy="594360"/>
+          </a:xfrm>
+          <a:prstGeom prst="rect">
+            <a:avLst/>
+          </a:prstGeom>
+          <a:noFill/>
+          <a:ln>
+            <a:noFill/>
+          </a:ln>
+        </p:spPr>
+        <p:txBody>
+          <a:bodyPr wrap="square" lIns="0" tIns="0" rIns="0" bIns="0" anchor="ctr"/>
+          <a:lstStyle/>
+          <a:p>
+            <a:pPr algn="ctr">
+              <a:spcAft>
+                <a:spcPts val="0"/>
+              </a:spcAft>
+              <a:buNone/>
+            </a:pPr>
+            <a:r>
+              <a:rPr lang="en-US" sz="3000" b="0" i="1" dirty="0">
+                <a:solidFill>
+                  <a:srgbClr val="5C4826"/>
+                </a:solidFill>
+              </a:rPr>
+              <a:t>p</a:t>
+            </a:r>
+            <a:r>
+              <a:rPr lang="en-US" sz="3000" b="0" i="1" baseline="-25000" dirty="0">
+                <a:solidFill>
+                  <a:srgbClr val="5C4826"/>
+                </a:solidFill>
+              </a:rPr>
+              <a:t>R</a:t>
+            </a:r>
+            <a:r>
+              <a:rPr lang="en-US" sz="3000" b="0" i="1" dirty="0">
+                <a:solidFill>
+                  <a:srgbClr val="5C4826"/>
+                </a:solidFill>
+              </a:rPr>
+              <a:t xml:space="preserve"> = P(E | R) · P(I | E, R) · P(L | I, E, R)</a:t>
+            </a:r>
+          </a:p>
+        </p:txBody>
+      </p:sp>
+      <p:sp>
+        <p:nvSpPr>
+          <p:cNvPr id="20" name="N0"/>
+          <p:cNvSpPr/>
+          <p:nvPr/>
+        </p:nvSpPr>
+        <p:spPr>
+          <a:xfrm>
+            <a:off x="365760" y="1554480"/>
+            <a:ext cx="2377440" cy="457200"/>
+          </a:xfrm>
+          <a:prstGeom prst="rect">
+            <a:avLst/>
+          </a:prstGeom>
+          <a:solidFill>
+            <a:srgbClr val="8E6F3E"/>
+          </a:solidFill>
+          <a:ln>
+            <a:noFill/>
+          </a:ln>
+        </p:spPr>
+        <p:txBody>
+          <a:bodyPr wrap="square" lIns="27432" tIns="22860" rIns="27432" bIns="22860" anchor="ctr"/>
+          <a:lstStyle/>
+          <a:p>
+            <a:pPr algn="ctr">
+              <a:spcAft>
+                <a:spcPts val="0"/>
+              </a:spcAft>
+              <a:buNone/>
+            </a:pPr>
+            <a:r>
+              <a:rPr lang="en-US" sz="1800" b="1" dirty="0">
+                <a:solidFill>
+                  <a:srgbClr val="FFFFFF"/>
+                </a:solidFill>
+              </a:rPr>
+              <a:t>ENCODE</a:t>
+            </a:r>
+          </a:p>
+        </p:txBody>
+      </p:sp>
+      <p:cxnSp>
+        <p:nvCxnSpPr>
+          <p:cNvPr id="30" name="A0"/>
+          <p:cNvCxnSpPr/>
+          <p:nvPr/>
+        </p:nvCxnSpPr>
+        <p:spPr>
+          <a:xfrm>
+            <a:off x="2926080" y="1783080"/>
+            <a:ext cx="274320" cy="0"/>
+          </a:xfrm>
+          <a:prstGeom prst="straightConnector1">
+            <a:avLst/>
+          </a:prstGeom>
+          <a:ln w="19050">
+            <a:solidFill>
+              <a:srgbClr val="C9B991"/>
+            </a:solidFill>
+            <a:tailEnd type="triangle" w="med" len="med"/>
+          </a:ln>
+        </p:spPr>
+      </p:cxnSp>
+      <p:sp>
+        <p:nvSpPr>
+          <p:cNvPr id="21" name="N1"/>
+          <p:cNvSpPr/>
+          <p:nvPr/>
+        </p:nvSpPr>
+        <p:spPr>
+          <a:xfrm>
+            <a:off x="3383280" y="1554480"/>
+            <a:ext cx="2377440" cy="457200"/>
+          </a:xfrm>
+          <a:prstGeom prst="rect">
+            <a:avLst/>
+          </a:prstGeom>
+          <a:solidFill>
+            <a:srgbClr val="8E6F3E"/>
+          </a:solidFill>
+          <a:ln>
+            <a:noFill/>
+          </a:ln>
+        </p:spPr>
+        <p:txBody>
+          <a:bodyPr wrap="square" lIns="27432" tIns="22860" rIns="27432" bIns="22860" anchor="ctr"/>
+          <a:lstStyle/>
+          <a:p>
+            <a:pPr algn="ctr">
+              <a:spcAft>
+                <a:spcPts val="0"/>
+              </a:spcAft>
+              <a:buNone/>
+            </a:pPr>
+            <a:r>
+              <a:rPr lang="en-US" sz="1800" b="1" dirty="0">
+                <a:solidFill>
+                  <a:srgbClr val="FFFFFF"/>
+                </a:solidFill>
+              </a:rPr>
+              <a:t>INTERPRET</a:t>
+            </a:r>
+          </a:p>
+        </p:txBody>
+      </p:sp>
+      <p:cxnSp>
+        <p:nvCxnSpPr>
+          <p:cNvPr id="31" name="A1"/>
+          <p:cNvCxnSpPr/>
+          <p:nvPr/>
+        </p:nvCxnSpPr>
+        <p:spPr>
+          <a:xfrm>
+            <a:off x="5943600" y="1783080"/>
+            <a:ext cx="274320" cy="0"/>
+          </a:xfrm>
+          <a:prstGeom prst="straightConnector1">
+            <a:avLst/>
+          </a:prstGeom>
+          <a:ln w="19050">
+            <a:solidFill>
+              <a:srgbClr val="C9B991"/>
+            </a:solidFill>
+            <a:tailEnd type="triangle" w="med" len="med"/>
+          </a:ln>
+        </p:spPr>
+      </p:cxnSp>
+      <p:sp>
+        <p:nvSpPr>
+          <p:cNvPr id="22" name="N2"/>
+          <p:cNvSpPr/>
+          <p:nvPr/>
+        </p:nvSpPr>
+        <p:spPr>
+          <a:xfrm>
+            <a:off x="6400800" y="1554480"/>
+            <a:ext cx="2377440" cy="457200"/>
+          </a:xfrm>
+          <a:prstGeom prst="rect">
+            <a:avLst/>
+          </a:prstGeom>
+          <a:solidFill>
+            <a:srgbClr val="8E6F3E"/>
+          </a:solidFill>
+          <a:ln>
+            <a:noFill/>
+          </a:ln>
+        </p:spPr>
+        <p:txBody>
+          <a:bodyPr wrap="square" lIns="27432" tIns="22860" rIns="27432" bIns="22860" anchor="ctr"/>
+          <a:lstStyle/>
+          <a:p>
+            <a:pPr algn="ctr">
+              <a:spcAft>
+                <a:spcPts val="0"/>
+              </a:spcAft>
+              <a:buNone/>
+            </a:pPr>
+            <a:r>
+              <a:rPr lang="en-US" sz="1800" b="1" dirty="0">
+                <a:solidFill>
+                  <a:srgbClr val="FFFFFF"/>
+                </a:solidFill>
+              </a:rPr>
+              <a:t>REALIZE</a:t>
+            </a:r>
+          </a:p>
+        </p:txBody>
+      </p:sp>
+      <p:sp>
+        <p:nvSpPr>
+          <p:cNvPr id="40" name="ChainTag"/>
+          <p:cNvSpPr txBox="1"/>
+          <p:nvPr/>
+        </p:nvSpPr>
+        <p:spPr>
+          <a:xfrm>
+            <a:off x="274320" y="2103120"/>
+            <a:ext cx="8595360" cy="320040"/>
+          </a:xfrm>
+          <a:prstGeom prst="rect">
+            <a:avLst/>
+          </a:prstGeom>
+          <a:noFill/>
+          <a:ln>
+            <a:noFill/>
+          </a:ln>
+        </p:spPr>
+        <p:txBody>
+          <a:bodyPr wrap="square" lIns="0" tIns="0" rIns="0" bIns="0" anchor="t"/>
+          <a:lstStyle/>
+          <a:p>
+            <a:pPr algn="ctr">
+              <a:spcAft>
+                <a:spcPts val="0"/>
+              </a:spcAft>
+              <a:buNone/>
+            </a:pPr>
+            <a:r>
+              <a:rPr lang="en-US" sz="1600" b="0" i="1" dirty="0">
+                <a:solidFill>
+                  <a:srgbClr val="555960"/>
+                </a:solidFill>
+              </a:rPr>
+              <a:t>a chain decomposition, not an independence assumption</a:t>
+            </a:r>
+          </a:p>
+        </p:txBody>
+      </p:sp>
+      <p:pic>
+        <p:nvPicPr>
+          <p:cNvPr id="60" name="BandFigure" descr="Production process band: Engineering intent to Encoded property to Fabricator to Realization, with the three probability terms P(E | R), P(I | E, R) and P(L | I, E, R) bracketed beneath."/>
+          <p:cNvPicPr>
+            <a:picLocks noChangeAspect="1"/>
+          </p:cNvPicPr>
+          <p:nvPr/>
+        </p:nvPicPr>
+        <p:blipFill>
+          <a:blip r:embed="rId2"/>
+          <a:stretch>
+            <a:fillRect/>
+          </a:stretch>
+        </p:blipFill>
+        <p:spPr>
+          <a:xfrm>
+            <a:off x="685800" y="2560320"/>
+            <a:ext cx="7772400" cy="2878667"/>
+          </a:xfrm>
+          <a:prstGeom prst="rect">
+            <a:avLst/>
+          </a:prstGeom>
+        </p:spPr>
+      </p:pic>
+      <p:grpSp>
+        <p:nvGrpSpPr>
+          <p:cNvPr id="100" name="ModelingLeverOverlay"/>
+          <p:cNvGrpSpPr/>
+          <p:nvPr/>
+        </p:nvGrpSpPr>
+        <p:grpSpPr>
+          <a:xfrm>
+            <a:off x="2908770" y="2688261"/>
+            <a:ext cx="5213586" cy="2166996"/>
+            <a:chOff x="2908770" y="2688261"/>
+            <a:chExt cx="5213586" cy="2166996"/>
+          </a:xfrm>
+        </p:grpSpPr>
+        <p:sp>
+          <p:nvSpPr>
+            <p:cNvPr id="101" name="LeverLabel"/>
+            <p:cNvSpPr txBox="1"/>
+            <p:nvPr/>
+          </p:nvSpPr>
+          <p:spPr>
+            <a:xfrm>
+              <a:off x="4572000" y="2688261"/>
+              <a:ext cx="3550356" cy="655696"/>
+            </a:xfrm>
+            <a:prstGeom prst="rect">
+              <a:avLst/>
+            </a:prstGeom>
+            <a:noFill/>
+            <a:ln>
+              <a:noFill/>
+            </a:ln>
+          </p:spPr>
+          <p:txBody>
+            <a:bodyPr wrap="square" lIns="0" tIns="0" rIns="0" bIns="0" anchor="ctr"/>
+            <a:lstStyle/>
+            <a:p>
+              <a:pPr algn="r">
+                <a:lnSpc>
+                  <a:spcPct val="110000"/>
+                </a:lnSpc>
+                <a:spcAft>
+                  <a:spcPts val="0"/>
+                </a:spcAft>
+                <a:buNone/>
+              </a:pPr>
+              <a:r>
+                <a:rPr lang="en-US" sz="2100" b="1" spc="126" dirty="0">
+                  <a:solidFill>
+                    <a:srgbClr val="C8102E"/>
+                  </a:solidFill>
+                </a:rPr>
+                <a:t>MODELING CHANGES</a:t>
+              </a:r>
+            </a:p>
+            <a:p>
+              <a:pPr algn="r">
+                <a:lnSpc>
+                  <a:spcPct val="110000"/>
+                </a:lnSpc>
+                <a:spcAft>
+                  <a:spcPts val="0"/>
+                </a:spcAft>
+                <a:buNone/>
+              </a:pPr>
+              <a:r>
+                <a:rPr lang="en-US" sz="2100" b="1" spc="126" dirty="0">
+                  <a:solidFill>
+                    <a:srgbClr val="C8102E"/>
+                  </a:solidFill>
+                </a:rPr>
+                <a:t>THE REPRESENTATION</a:t>
+              </a:r>
+            </a:p>
+          </p:txBody>
+        </p:sp>
+        <p:cxnSp>
+          <p:nvCxnSpPr>
+            <p:cNvPr id="102" name="LeverArrowH"/>
+            <p:cNvCxnSpPr/>
+            <p:nvPr/>
+          </p:nvCxnSpPr>
+          <p:spPr>
+            <a:xfrm>
+              <a:off x="3676415" y="3088076"/>
+              <a:ext cx="895585" cy="0"/>
+            </a:xfrm>
+            <a:prstGeom prst="straightConnector1">
+              <a:avLst/>
+            </a:prstGeom>
+            <a:ln w="44450" cap="sq">
+              <a:solidFill>
+                <a:srgbClr val="C8102E"/>
+              </a:solidFill>
+            </a:ln>
+          </p:spPr>
+        </p:cxnSp>
+        <p:cxnSp>
+          <p:nvCxnSpPr>
+            <p:cNvPr id="103" name="LeverArrowV"/>
+            <p:cNvCxnSpPr/>
+            <p:nvPr/>
+          </p:nvCxnSpPr>
+          <p:spPr>
+            <a:xfrm>
+              <a:off x="3676415" y="3088076"/>
+              <a:ext cx="0" cy="607719"/>
+            </a:xfrm>
+            <a:prstGeom prst="straightConnector1">
+              <a:avLst/>
+            </a:prstGeom>
+            <a:ln w="44450" cap="sq">
+              <a:solidFill>
+                <a:srgbClr val="C8102E"/>
+              </a:solidFill>
+              <a:tailEnd type="triangle" w="med" len="med"/>
+            </a:ln>
+          </p:spPr>
+        </p:cxnSp>
+        <p:sp>
+          <p:nvSpPr>
+            <p:cNvPr id="104" name="LeverBoxA"/>
+            <p:cNvSpPr/>
+            <p:nvPr/>
+          </p:nvSpPr>
+          <p:spPr>
+            <a:xfrm>
+              <a:off x="2908770" y="4535405"/>
+              <a:ext cx="319852" cy="319852"/>
+            </a:xfrm>
+            <a:prstGeom prst="roundRect">
+              <a:avLst>
+                <a:gd name="adj" fmla="val 15000"/>
+              </a:avLst>
+            </a:prstGeom>
+            <a:noFill/>
+            <a:ln w="28575">
+              <a:solidFill>
+                <a:srgbClr val="C8102E"/>
+              </a:solidFill>
+            </a:ln>
+          </p:spPr>
+          <p:txBody>
+            <a:bodyPr/>
+            <a:lstStyle/>
+            <a:p>
+              <a:endParaRPr lang="en-US"/>
+            </a:p>
+          </p:txBody>
+        </p:sp>
+        <p:sp>
+          <p:nvSpPr>
+            <p:cNvPr id="105" name="LeverBoxB"/>
+            <p:cNvSpPr/>
+            <p:nvPr/>
+          </p:nvSpPr>
+          <p:spPr>
+            <a:xfrm>
+              <a:off x="4827881" y="4535405"/>
+              <a:ext cx="319852" cy="319852"/>
+            </a:xfrm>
+            <a:prstGeom prst="roundRect">
+              <a:avLst>
+                <a:gd name="adj" fmla="val 15000"/>
+              </a:avLst>
+            </a:prstGeom>
+            <a:noFill/>
+            <a:ln w="28575">
+              <a:solidFill>
+                <a:srgbClr val="C8102E"/>
+              </a:solidFill>
+            </a:ln>
+          </p:spPr>
+          <p:txBody>
+            <a:bodyPr/>
+            <a:lstStyle/>
+            <a:p>
+              <a:endParaRPr lang="en-US"/>
+            </a:p>
+          </p:txBody>
+        </p:sp>
+      </p:grpSp>
+      <p:sp>
+        <p:nvSpPr>
+          <p:cNvPr id="199" name="FooterBand"/>
+          <p:cNvSpPr/>
+          <p:nvPr/>
+        </p:nvSpPr>
+        <p:spPr>
+          <a:xfrm>
+            <a:off x="274320" y="5852160"/>
+            <a:ext cx="8595360" cy="566928"/>
+          </a:xfrm>
+          <a:prstGeom prst="rect">
+            <a:avLst/>
+          </a:prstGeom>
+          <a:solidFill>
+            <a:srgbClr val="8E6F3E"/>
+          </a:solidFill>
+          <a:ln>
+            <a:noFill/>
+          </a:ln>
+        </p:spPr>
+        <p:txBody>
+          <a:bodyPr wrap="square" lIns="27432" tIns="22860" rIns="27432" bIns="22860" anchor="ctr"/>
+          <a:lstStyle/>
+          <a:p>
+            <a:pPr algn="ctr">
+              <a:buNone/>
+            </a:pPr>
+            <a:r>
+              <a:rPr lang="en-US" sz="2000" b="1" i="0" dirty="0">
+                <a:solidFill>
+                  <a:srgbClr val="FFFFFF"/>
+                </a:solidFill>
+              </a:rPr>
+              <a:t>So what makes one representation better than another?</a:t>
+            </a:r>
+          </a:p>
+        </p:txBody>
+      </p:sp>
+    </p:spTree>
+  </p:cSld>
+  <p:clrMapOvr>
+    <a:masterClrMapping/>
+  </p:clrMapOvr>
+  <p:timing>
+    <p:tnLst>
+      <p:par>
+        <p:cTn id="1" dur="indefinite" restart="never" nodeType="tmRoot">
+          <p:childTnLst>
+            <p:seq concurrent="1" nextAc="seek">
+              <p:cTn id="2" dur="indefinite" nodeType="mainSeq">
+                <p:childTnLst>
+                  <p:par>
+                    <p:cTn id="3" fill="hold">
+                      <p:stCondLst>
+                        <p:cond delay="indefinite"/>
+                      </p:stCondLst>
+                      <p:childTnLst>
+                        <p:par>
+                          <p:cTn id="4" fill="hold">
+                            <p:stCondLst>
+                              <p:cond delay="0"/>
+                            </p:stCondLst>
+                            <p:childTnLst>
+                              <p:par>
+                                <p:cTn id="5" presetID="10" presetClass="entr" presetSubtype="0" fill="hold" nodeType="clickEffect">
+                                  <p:stCondLst>
+                                    <p:cond delay="0"/>
+                                  </p:stCondLst>
+                                  <p:childTnLst>
+                                    <p:set>
+                                      <p:cBhvr>
+                                        <p:cTn id="6" dur="1" fill="hold">
+                                          <p:stCondLst>
+                                            <p:cond delay="0"/>
+                                          </p:stCondLst>
+                                        </p:cTn>
+                                        <p:tgtEl>
+                                          <p:spTgt spid="100"/>
+                                        </p:tgtEl>
+                                        <p:attrNameLst>
+                                          <p:attrName>style.visibility</p:attrName>
+                                        </p:attrNameLst>
+                                      </p:cBhvr>
+                                      <p:to>
+                                        <p:strVal val="visible"/>
+                                      </p:to>
+                                    </p:set>
+                                    <p:animEffect transition="in" filter="fade">
+                                      <p:cBhvr>
+                                        <p:cTn id="7" dur="500"/>
+                                        <p:tgtEl>
+                                          <p:spTgt spid="100"/>
+                                        </p:tgtEl>
+                                      </p:cBhvr>
+                                    </p:animEffect>
+                                  </p:childTnLst>
+                                </p:cTn>
+                              </p:par>
+                              <p:par>
+                                <p:cTn id="8" presetID="10" presetClass="entr" presetSubtype="0" fill="hold" nodeType="withEffect">
+                                  <p:stCondLst>
+                                    <p:cond delay="0"/>
+                                  </p:stCondLst>
+                                  <p:childTnLst>
+                                    <p:set>
+                                      <p:cBhvr>
+                                        <p:cTn id="9" dur="1" fill="hold">
+                                          <p:stCondLst>
+                                            <p:cond delay="0"/>
+                                          </p:stCondLst>
+                                        </p:cTn>
+                                        <p:tgtEl>
+                                          <p:spTgt spid="199"/>
+                                        </p:tgtEl>
+                                        <p:attrNameLst>
+                                          <p:attrName>style.visibility</p:attrName>
+                                        </p:attrNameLst>
+                                      </p:cBhvr>
+                                      <p:to>
+                                        <p:strVal val="visible"/>
+                                      </p:to>
+                                    </p:set>
+                                    <p:animEffect transition="in" filter="fade">
+                                      <p:cBhvr>
+                                        <p:cTn id="10" dur="500"/>
+                                        <p:tgtEl>
+                                          <p:spTgt spid="199"/>
+                                        </p:tgtEl>
+                                      </p:cBhvr>
+                                    </p:animEffect>
+                                  </p:childTnLst>
+                                </p:cTn>
+                              </p:par>
+                            </p:childTnLst>
+                          </p:cTn>
+                        </p:par>
+                      </p:childTnLst>
+                    </p:cTn>
+                  </p:par>
+                </p:childTnLst>
+              </p:cTn>
+              <p:prevCondLst>
+                <p:cond evt="onPrev" delay="0">
+                  <p:tgtEl>
+                    <p:sldTgt/>
+                  </p:tgtEl>
+                </p:cond>
+              </p:prevCondLst>
+              <p:nextCondLst>
+                <p:cond evt="onNext" delay="0">
+                  <p:tgtEl>
+                    <p:sldTgt/>
+                  </p:tgtEl>
+                </p:cond>
+              </p:nextCondLst>
+            </p:seq>
+          </p:childTnLst>
+        </p:cTn>
+      </p:par>
+    </p:tnLst>
+  </p:timing>
 </p:sld>
 </file>
 

--- a/course/lectures/act-2-delegation-and-control/02-modeling/2-2-Modeling-1-Purposeful-Reduction.pptx
+++ b/course/lectures/act-2-delegation-and-control/02-modeling/2-2-Modeling-1-Purposeful-Reduction.pptx
@@ -15115,7 +15115,7 @@
         </p:nvSpPr>
         <p:spPr>
           <a:xfrm>
-            <a:off x="2743200" y="4343400"/>
+            <a:off x="2743200" y="4419600"/>
             <a:ext cx="3657600" cy="274320"/>
           </a:xfrm>
           <a:prstGeom prst="rect">
@@ -22765,8 +22765,8 @@
         </p:nvSpPr>
         <p:spPr>
           <a:xfrm>
-            <a:off x="274320" y="942975"/>
-            <a:ext cx="8595360" cy="320040"/>
+            <a:off x="365760" y="1097280"/>
+            <a:ext cx="8412480" cy="393192"/>
           </a:xfrm>
           <a:prstGeom prst="rect">
             <a:avLst/>
@@ -22780,14 +22780,14 @@
           <a:bodyPr wrap="square" lIns="0" tIns="0" rIns="0" bIns="0" anchor="t"/>
           <a:lstStyle/>
           <a:p>
-            <a:pPr algn="ctr">
+            <a:pPr algn="l">
               <a:spcAft>
                 <a:spcPts val="0"/>
               </a:spcAft>
               <a:buNone/>
             </a:pPr>
             <a:r>
-              <a:rPr lang="en-US" sz="1500" b="1" spc="120" dirty="0">
+              <a:rPr lang="en-US" sz="2000" b="1" dirty="0">
                 <a:solidFill>
                   <a:srgbClr val="8E6F3E"/>
                 </a:solidFill>
@@ -22805,8 +22805,8 @@
         </p:nvSpPr>
         <p:spPr>
           <a:xfrm>
-            <a:off x="274320" y="1280160"/>
-            <a:ext cx="8595360" cy="914400"/>
+            <a:off x="274320" y="1554480"/>
+            <a:ext cx="8595360" cy="822960"/>
           </a:xfrm>
           <a:prstGeom prst="rect">
             <a:avLst/>
@@ -22845,7 +22845,7 @@
         </p:nvSpPr>
         <p:spPr>
           <a:xfrm>
-            <a:off x="274320" y="2194560"/>
+            <a:off x="274320" y="2423160"/>
             <a:ext cx="8595360" cy="365760"/>
           </a:xfrm>
           <a:prstGeom prst="rect">
@@ -22885,8 +22885,8 @@
         </p:nvSpPr>
         <p:spPr>
           <a:xfrm>
-            <a:off x="365760" y="2834640"/>
-            <a:ext cx="1920240" cy="548640"/>
+            <a:off x="1508760" y="3017520"/>
+            <a:ext cx="548640" cy="320040"/>
           </a:xfrm>
           <a:prstGeom prst="rect">
             <a:avLst/>
@@ -22909,7 +22909,7 @@
               <a:buNone/>
             </a:pPr>
             <a:r>
-              <a:rPr lang="en-US" sz="2800" b="1" i="1" dirty="0">
+              <a:rPr lang="en-US" sz="2000" b="1" i="1" dirty="0">
                 <a:solidFill>
                   <a:srgbClr val="FFFFFF"/>
                 </a:solidFill>
@@ -22927,8 +22927,8 @@
         </p:nvSpPr>
         <p:spPr>
           <a:xfrm>
-            <a:off x="365760" y="3474720"/>
-            <a:ext cx="1920240" cy="1005840"/>
+            <a:off x="2148840" y="3017520"/>
+            <a:ext cx="5486400" cy="320040"/>
           </a:xfrm>
           <a:prstGeom prst="rect">
             <a:avLst/>
@@ -22939,17 +22939,17 @@
           </a:ln>
         </p:spPr>
         <p:txBody>
-          <a:bodyPr wrap="square" lIns="0" tIns="0" rIns="0" bIns="0" anchor="t"/>
-          <a:lstStyle/>
-          <a:p>
-            <a:pPr algn="ctr">
+          <a:bodyPr wrap="square" lIns="0" tIns="0" rIns="0" bIns="0" anchor="ctr"/>
+          <a:lstStyle/>
+          <a:p>
+            <a:pPr algn="l">
               <a:spcAft>
                 <a:spcPts val="0"/>
               </a:spcAft>
               <a:buNone/>
             </a:pPr>
             <a:r>
-              <a:rPr lang="en-US" sz="1500" b="0" dirty="0">
+              <a:rPr lang="en-US" sz="1600" b="0" dirty="0">
                 <a:solidFill>
                   <a:srgbClr val="555960"/>
                 </a:solidFill>
@@ -22967,8 +22967,8 @@
         </p:nvSpPr>
         <p:spPr>
           <a:xfrm>
-            <a:off x="2529840" y="2834640"/>
-            <a:ext cx="1920240" cy="548640"/>
+            <a:off x="1508760" y="3465576"/>
+            <a:ext cx="548640" cy="320040"/>
           </a:xfrm>
           <a:prstGeom prst="rect">
             <a:avLst/>
@@ -22991,7 +22991,7 @@
               <a:buNone/>
             </a:pPr>
             <a:r>
-              <a:rPr lang="en-US" sz="2800" b="1" i="1" dirty="0">
+              <a:rPr lang="en-US" sz="2000" b="1" i="1" dirty="0">
                 <a:solidFill>
                   <a:srgbClr val="FFFFFF"/>
                 </a:solidFill>
@@ -23009,8 +23009,8 @@
         </p:nvSpPr>
         <p:spPr>
           <a:xfrm>
-            <a:off x="2529840" y="3474720"/>
-            <a:ext cx="1920240" cy="1005840"/>
+            <a:off x="2148840" y="3465576"/>
+            <a:ext cx="5486400" cy="320040"/>
           </a:xfrm>
           <a:prstGeom prst="rect">
             <a:avLst/>
@@ -23021,17 +23021,17 @@
           </a:ln>
         </p:spPr>
         <p:txBody>
-          <a:bodyPr wrap="square" lIns="0" tIns="0" rIns="0" bIns="0" anchor="t"/>
-          <a:lstStyle/>
-          <a:p>
-            <a:pPr algn="ctr">
+          <a:bodyPr wrap="square" lIns="0" tIns="0" rIns="0" bIns="0" anchor="ctr"/>
+          <a:lstStyle/>
+          <a:p>
+            <a:pPr algn="l">
               <a:spcAft>
                 <a:spcPts val="0"/>
               </a:spcAft>
               <a:buNone/>
             </a:pPr>
             <a:r>
-              <a:rPr lang="en-US" sz="1500" b="0" dirty="0">
+              <a:rPr lang="en-US" sz="1600" b="0" dirty="0">
                 <a:solidFill>
                   <a:srgbClr val="555960"/>
                 </a:solidFill>
@@ -23049,8 +23049,8 @@
         </p:nvSpPr>
         <p:spPr>
           <a:xfrm>
-            <a:off x="4693920" y="2834640"/>
-            <a:ext cx="1920240" cy="548640"/>
+            <a:off x="1508760" y="3913632"/>
+            <a:ext cx="548640" cy="320040"/>
           </a:xfrm>
           <a:prstGeom prst="rect">
             <a:avLst/>
@@ -23073,7 +23073,7 @@
               <a:buNone/>
             </a:pPr>
             <a:r>
-              <a:rPr lang="en-US" sz="2800" b="1" i="1" dirty="0">
+              <a:rPr lang="en-US" sz="2000" b="1" i="1" dirty="0">
                 <a:solidFill>
                   <a:srgbClr val="FFFFFF"/>
                 </a:solidFill>
@@ -23091,8 +23091,8 @@
         </p:nvSpPr>
         <p:spPr>
           <a:xfrm>
-            <a:off x="4693920" y="3474720"/>
-            <a:ext cx="1920240" cy="1005840"/>
+            <a:off x="2148840" y="3913632"/>
+            <a:ext cx="5486400" cy="320040"/>
           </a:xfrm>
           <a:prstGeom prst="rect">
             <a:avLst/>
@@ -23103,17 +23103,17 @@
           </a:ln>
         </p:spPr>
         <p:txBody>
-          <a:bodyPr wrap="square" lIns="0" tIns="0" rIns="0" bIns="0" anchor="t"/>
-          <a:lstStyle/>
-          <a:p>
-            <a:pPr algn="ctr">
+          <a:bodyPr wrap="square" lIns="0" tIns="0" rIns="0" bIns="0" anchor="ctr"/>
+          <a:lstStyle/>
+          <a:p>
+            <a:pPr algn="l">
               <a:spcAft>
                 <a:spcPts val="0"/>
               </a:spcAft>
               <a:buNone/>
             </a:pPr>
             <a:r>
-              <a:rPr lang="en-US" sz="1500" b="0" dirty="0">
+              <a:rPr lang="en-US" sz="1600" b="0" dirty="0">
                 <a:solidFill>
                   <a:srgbClr val="555960"/>
                 </a:solidFill>
@@ -23131,8 +23131,8 @@
         </p:nvSpPr>
         <p:spPr>
           <a:xfrm>
-            <a:off x="6858000" y="2834640"/>
-            <a:ext cx="1920240" cy="548640"/>
+            <a:off x="1508760" y="4361688"/>
+            <a:ext cx="548640" cy="320040"/>
           </a:xfrm>
           <a:prstGeom prst="rect">
             <a:avLst/>
@@ -23155,7 +23155,7 @@
               <a:buNone/>
             </a:pPr>
             <a:r>
-              <a:rPr lang="en-US" sz="2800" b="1" i="1" dirty="0">
+              <a:rPr lang="en-US" sz="2000" b="1" i="1" dirty="0">
                 <a:solidFill>
                   <a:srgbClr val="FFFFFF"/>
                 </a:solidFill>
@@ -23173,8 +23173,8 @@
         </p:nvSpPr>
         <p:spPr>
           <a:xfrm>
-            <a:off x="6858000" y="3474720"/>
-            <a:ext cx="1920240" cy="1005840"/>
+            <a:off x="2148840" y="4361688"/>
+            <a:ext cx="5486400" cy="320040"/>
           </a:xfrm>
           <a:prstGeom prst="rect">
             <a:avLst/>
@@ -23185,17 +23185,17 @@
           </a:ln>
         </p:spPr>
         <p:txBody>
-          <a:bodyPr wrap="square" lIns="0" tIns="0" rIns="0" bIns="0" anchor="t"/>
-          <a:lstStyle/>
-          <a:p>
-            <a:pPr algn="ctr">
+          <a:bodyPr wrap="square" lIns="0" tIns="0" rIns="0" bIns="0" anchor="ctr"/>
+          <a:lstStyle/>
+          <a:p>
+            <a:pPr algn="l">
               <a:spcAft>
                 <a:spcPts val="0"/>
               </a:spcAft>
               <a:buNone/>
             </a:pPr>
             <a:r>
-              <a:rPr lang="en-US" sz="1500" b="0" dirty="0">
+              <a:rPr lang="en-US" sz="1600" b="0" dirty="0">
                 <a:solidFill>
                   <a:srgbClr val="555960"/>
                 </a:solidFill>
@@ -23361,7 +23361,7 @@
         </p:nvSpPr>
         <p:spPr>
           <a:xfrm>
-            <a:off x="274320" y="914400"/>
+            <a:off x="274320" y="868680"/>
             <a:ext cx="8595360" cy="594360"/>
           </a:xfrm>
           <a:prstGeom prst="rect">
@@ -23417,7 +23417,7 @@
         </p:nvSpPr>
         <p:spPr>
           <a:xfrm>
-            <a:off x="365760" y="1554480"/>
+            <a:off x="365760" y="1600200"/>
             <a:ext cx="2377440" cy="457200"/>
           </a:xfrm>
           <a:prstGeom prst="rect">
@@ -23459,7 +23459,7 @@
         </p:nvCxnSpPr>
         <p:spPr>
           <a:xfrm>
-            <a:off x="2926080" y="1783080"/>
+            <a:off x="2926080" y="1828800"/>
             <a:ext cx="274320" cy="0"/>
           </a:xfrm>
           <a:prstGeom prst="straightConnector1">
@@ -23467,7 +23467,7 @@
           </a:prstGeom>
           <a:ln w="19050">
             <a:solidFill>
-              <a:srgbClr val="C9B991"/>
+              <a:srgbClr val="8E6F3E"/>
             </a:solidFill>
             <a:tailEnd type="triangle" w="med" len="med"/>
           </a:ln>
@@ -23481,7 +23481,7 @@
         </p:nvSpPr>
         <p:spPr>
           <a:xfrm>
-            <a:off x="3383280" y="1554480"/>
+            <a:off x="3383280" y="1600200"/>
             <a:ext cx="2377440" cy="457200"/>
           </a:xfrm>
           <a:prstGeom prst="rect">
@@ -23523,7 +23523,7 @@
         </p:nvCxnSpPr>
         <p:spPr>
           <a:xfrm>
-            <a:off x="5943600" y="1783080"/>
+            <a:off x="5943600" y="1828800"/>
             <a:ext cx="274320" cy="0"/>
           </a:xfrm>
           <a:prstGeom prst="straightConnector1">
@@ -23531,7 +23531,7 @@
           </a:prstGeom>
           <a:ln w="19050">
             <a:solidFill>
-              <a:srgbClr val="C9B991"/>
+              <a:srgbClr val="8E6F3E"/>
             </a:solidFill>
             <a:tailEnd type="triangle" w="med" len="med"/>
           </a:ln>
@@ -23545,7 +23545,7 @@
         </p:nvSpPr>
         <p:spPr>
           <a:xfrm>
-            <a:off x="6400800" y="1554480"/>
+            <a:off x="6400800" y="1600200"/>
             <a:ext cx="2377440" cy="457200"/>
           </a:xfrm>
           <a:prstGeom prst="rect">
@@ -23587,7 +23587,7 @@
         </p:nvSpPr>
         <p:spPr>
           <a:xfrm>
-            <a:off x="274320" y="2103120"/>
+            <a:off x="274320" y="2194560"/>
             <a:ext cx="8595360" cy="320040"/>
           </a:xfrm>
           <a:prstGeom prst="rect">
@@ -23651,10 +23651,10 @@
         </p:nvGrpSpPr>
         <p:grpSpPr>
           <a:xfrm>
-            <a:off x="2908770" y="2688261"/>
-            <a:ext cx="5213586" cy="2166996"/>
-            <a:chOff x="2908770" y="2688261"/>
-            <a:chExt cx="5213586" cy="2166996"/>
+            <a:off x="2908770" y="2624290"/>
+            <a:ext cx="5213586" cy="2230967"/>
+            <a:chOff x="2908770" y="2624290"/>
+            <a:chExt cx="5213586" cy="2230967"/>
           </a:xfrm>
         </p:grpSpPr>
         <p:sp>
@@ -23665,7 +23665,7 @@
           </p:nvSpPr>
           <p:spPr>
             <a:xfrm>
-              <a:off x="4572000" y="2688261"/>
+              <a:off x="4572000" y="2624290"/>
               <a:ext cx="3550356" cy="655696"/>
             </a:xfrm>
             <a:prstGeom prst="rect">
@@ -23680,7 +23680,7 @@
             <a:bodyPr wrap="square" lIns="0" tIns="0" rIns="0" bIns="0" anchor="ctr"/>
             <a:lstStyle/>
             <a:p>
-              <a:pPr algn="r">
+              <a:pPr algn="l">
                 <a:lnSpc>
                   <a:spcPct val="110000"/>
                 </a:lnSpc>
@@ -23699,7 +23699,7 @@
               </a:r>
             </a:p>
             <a:p>
-              <a:pPr algn="r">
+              <a:pPr algn="l">
                 <a:lnSpc>
                   <a:spcPct val="110000"/>
                 </a:lnSpc>
@@ -23727,7 +23727,7 @@
           </p:nvCxnSpPr>
           <p:spPr>
             <a:xfrm>
-              <a:off x="3676415" y="3088076"/>
+              <a:off x="3676415" y="2952139"/>
               <a:ext cx="895585" cy="0"/>
             </a:xfrm>
             <a:prstGeom prst="straightConnector1">
@@ -23748,8 +23748,8 @@
           </p:nvCxnSpPr>
           <p:spPr>
             <a:xfrm>
-              <a:off x="3676415" y="3088076"/>
-              <a:ext cx="0" cy="607719"/>
+              <a:off x="3676415" y="2952139"/>
+              <a:ext cx="0" cy="743655"/>
             </a:xfrm>
             <a:prstGeom prst="straightConnector1">
               <a:avLst/>

--- a/course/lectures/act-2-delegation-and-control/02-modeling/2-2-Modeling-1-Purposeful-Reduction.pptx
+++ b/course/lectures/act-2-delegation-and-control/02-modeling/2-2-Modeling-1-Purposeful-Reduction.pptx
@@ -21980,7 +21980,7 @@
                   <a:srgbClr val="5C4826"/>
                 </a:solidFill>
               </a:rPr>
-              <a:t>An established engineering practice with living tools — not a vocabulary invented for agents.</a:t>
+              <a:t>An engineering practice with living tools, decades older than the agents.</a:t>
             </a:r>
           </a:p>
         </p:txBody>
@@ -22007,6 +22007,11 @@
           <a:prstGeom prst="rect">
             <a:avLst/>
           </a:prstGeom>
+          <a:ln w="12700">
+            <a:solidFill>
+              <a:srgbClr val="C9B991"/>
+            </a:solidFill>
+          </a:ln>
         </p:spPr>
       </p:pic>
       <p:sp>

--- a/course/lectures/act-2-delegation-and-control/02-modeling/2-2-Modeling-1-Purposeful-Reduction.pptx
+++ b/course/lectures/act-2-delegation-and-control/02-modeling/2-2-Modeling-1-Purposeful-Reduction.pptx
@@ -2258,6 +2258,12 @@
             <a:r>
               <a:rPr lang="en-US" dirty="0"/>
               <a:t>Callback anchor: this slide is what the embedded battery example later reprises. When the controller's energy model and thermal model arrive in Section 2, the line is — you have seen this already, in software, on the tour; here it is on territory you can feel.</a:t>
+            </a:r>
+          </a:p>
+          <a:p>
+            <a:r>
+              <a:rPr lang="en-US" dirty="0"/>
+              <a:t>NAME THE FIVE DISTINCTIONS ALOUD while pointing, one per card — this is the evidence for the second half of the thesis, and the thumbnails are too small to carry it on their own: structure, order, lifecycle, branching, intent. Five questions, five things worth keeping, one territory.</a:t>
             </a:r>
           </a:p>
         </p:txBody>
@@ -21170,6 +21176,38 @@
           </a:p>
         </p:txBody>
       </p:sp>
+      <p:sp>
+        <p:nvSpPr>
+          <p:cNvPr id="50" name="FigPanel"/>
+          <p:cNvSpPr/>
+          <p:nvPr/>
+        </p:nvSpPr>
+        <p:spPr>
+          <a:xfrm>
+            <a:off x="274320" y="1341120"/>
+            <a:ext cx="8595360" cy="4785360"/>
+          </a:xfrm>
+          <a:prstGeom prst="rect">
+            <a:avLst/>
+          </a:prstGeom>
+          <a:solidFill>
+            <a:srgbClr val="FDFCF9"/>
+          </a:solidFill>
+          <a:ln>
+            <a:noFill/>
+          </a:ln>
+        </p:spPr>
+        <p:txBody>
+          <a:bodyPr wrap="square" lIns="0" tIns="0" rIns="0" bIns="0" anchor="ctr"/>
+          <a:lstStyle/>
+          <a:p>
+            <a:pPr>
+              <a:buNone/>
+            </a:pPr>
+            <a:endParaRPr lang="en-US"/>
+          </a:p>
+        </p:txBody>
+      </p:sp>
       <p:pic>
         <p:nvPicPr>
           <p:cNvPr id="60" name="TourFigure" descr="A UML class diagram of a course-registration system: Student, Enrollment, Section, Course and Instructor, with multiplicities on the Student-Enrollment-Section chain."/>
@@ -21301,8 +21339,40 @@
                   <a:srgbClr val="5C4826"/>
                 </a:solidFill>
               </a:rPr>
-              <a:t>Who talks to whom, and in what order?</a:t>
-            </a:r>
+              <a:t>In what order do the parts of one registration happen?</a:t>
+            </a:r>
+          </a:p>
+        </p:txBody>
+      </p:sp>
+      <p:sp>
+        <p:nvSpPr>
+          <p:cNvPr id="50" name="FigPanel"/>
+          <p:cNvSpPr/>
+          <p:nvPr/>
+        </p:nvSpPr>
+        <p:spPr>
+          <a:xfrm>
+            <a:off x="274320" y="1341120"/>
+            <a:ext cx="8595360" cy="4785360"/>
+          </a:xfrm>
+          <a:prstGeom prst="rect">
+            <a:avLst/>
+          </a:prstGeom>
+          <a:solidFill>
+            <a:srgbClr val="FDFCF9"/>
+          </a:solidFill>
+          <a:ln>
+            <a:noFill/>
+          </a:ln>
+        </p:spPr>
+        <p:txBody>
+          <a:bodyPr wrap="square" lIns="0" tIns="0" rIns="0" bIns="0" anchor="ctr"/>
+          <a:lstStyle/>
+          <a:p>
+            <a:pPr>
+              <a:buNone/>
+            </a:pPr>
+            <a:endParaRPr lang="en-US"/>
           </a:p>
         </p:txBody>
       </p:sp>
@@ -21442,6 +21512,38 @@
           </a:p>
         </p:txBody>
       </p:sp>
+      <p:sp>
+        <p:nvSpPr>
+          <p:cNvPr id="50" name="FigPanel"/>
+          <p:cNvSpPr/>
+          <p:nvPr/>
+        </p:nvSpPr>
+        <p:spPr>
+          <a:xfrm>
+            <a:off x="274320" y="1341120"/>
+            <a:ext cx="8595360" cy="4785360"/>
+          </a:xfrm>
+          <a:prstGeom prst="rect">
+            <a:avLst/>
+          </a:prstGeom>
+          <a:solidFill>
+            <a:srgbClr val="FDFCF9"/>
+          </a:solidFill>
+          <a:ln>
+            <a:noFill/>
+          </a:ln>
+        </p:spPr>
+        <p:txBody>
+          <a:bodyPr wrap="square" lIns="0" tIns="0" rIns="0" bIns="0" anchor="ctr"/>
+          <a:lstStyle/>
+          <a:p>
+            <a:pPr>
+              <a:buNone/>
+            </a:pPr>
+            <a:endParaRPr lang="en-US"/>
+          </a:p>
+        </p:txBody>
+      </p:sp>
       <p:pic>
         <p:nvPicPr>
           <p:cNvPr id="60" name="TourFigure" descr="A UML state machine for a course proposal: Draft to Submitted to Approved to Published, with a revise transition returning Submitted to Draft, and a final state after Published."/>
@@ -21578,6 +21680,38 @@
           </a:p>
         </p:txBody>
       </p:sp>
+      <p:sp>
+        <p:nvSpPr>
+          <p:cNvPr id="50" name="FigPanel"/>
+          <p:cNvSpPr/>
+          <p:nvPr/>
+        </p:nvSpPr>
+        <p:spPr>
+          <a:xfrm>
+            <a:off x="274320" y="1341120"/>
+            <a:ext cx="8595360" cy="4785360"/>
+          </a:xfrm>
+          <a:prstGeom prst="rect">
+            <a:avLst/>
+          </a:prstGeom>
+          <a:solidFill>
+            <a:srgbClr val="FDFCF9"/>
+          </a:solidFill>
+          <a:ln>
+            <a:noFill/>
+          </a:ln>
+        </p:spPr>
+        <p:txBody>
+          <a:bodyPr wrap="square" lIns="0" tIns="0" rIns="0" bIns="0" anchor="ctr"/>
+          <a:lstStyle/>
+          <a:p>
+            <a:pPr>
+              <a:buNone/>
+            </a:pPr>
+            <a:endParaRPr lang="en-US"/>
+          </a:p>
+        </p:txBody>
+      </p:sp>
       <p:pic>
         <p:nvPicPr>
           <p:cNvPr id="60" name="TourFigure" descr="A UML activity diagram: request a section, check capacity, then a decision — create an enrollment when seats are available, add to the waitlist when they are not — merging into notify student."/>
@@ -21709,8 +21843,40 @@
                   <a:srgbClr val="5C4826"/>
                 </a:solidFill>
               </a:rPr>
-              <a:t>Who needs what from the system?</a:t>
-            </a:r>
+              <a:t>What does each actor want from the system?</a:t>
+            </a:r>
+          </a:p>
+        </p:txBody>
+      </p:sp>
+      <p:sp>
+        <p:nvSpPr>
+          <p:cNvPr id="50" name="FigPanel"/>
+          <p:cNvSpPr/>
+          <p:nvPr/>
+        </p:nvSpPr>
+        <p:spPr>
+          <a:xfrm>
+            <a:off x="274320" y="1341120"/>
+            <a:ext cx="8595360" cy="4785360"/>
+          </a:xfrm>
+          <a:prstGeom prst="rect">
+            <a:avLst/>
+          </a:prstGeom>
+          <a:solidFill>
+            <a:srgbClr val="FDFCF9"/>
+          </a:solidFill>
+          <a:ln>
+            <a:noFill/>
+          </a:ln>
+        </p:spPr>
+        <p:txBody>
+          <a:bodyPr wrap="square" lIns="0" tIns="0" rIns="0" bIns="0" anchor="ctr"/>
+          <a:lstStyle/>
+          <a:p>
+            <a:pPr>
+              <a:buNone/>
+            </a:pPr>
+            <a:endParaRPr lang="en-US"/>
           </a:p>
         </p:txBody>
       </p:sp>
@@ -22001,8 +22167,8 @@
         </p:blipFill>
         <p:spPr>
           <a:xfrm>
-            <a:off x="274320" y="1382082"/>
-            <a:ext cx="8595360" cy="3651875"/>
+            <a:off x="274320" y="1454369"/>
+            <a:ext cx="8595360" cy="3507302"/>
           </a:xfrm>
           <a:prstGeom prst="rect">
             <a:avLst/>

--- a/course/lectures/act-2-delegation-and-control/02-modeling/2-2-Modeling-1-Purposeful-Reduction.pptx
+++ b/course/lectures/act-2-delegation-and-control/02-modeling/2-2-Modeling-1-Purposeful-Reduction.pptx
@@ -28,15 +28,14 @@
     <p:sldId id="273" r:id="rId58"/>
     <p:sldId id="274" r:id="rId59"/>
     <p:sldId id="275" r:id="rId60"/>
+    <p:sldId id="280" r:id="rId65"/>
+    <p:sldId id="282" r:id="rId67"/>
+    <p:sldId id="283" r:id="rId68"/>
+    <p:sldId id="284" r:id="rId69"/>
     <p:sldId id="276" r:id="rId61"/>
     <p:sldId id="277" r:id="rId62"/>
     <p:sldId id="278" r:id="rId63"/>
     <p:sldId id="279" r:id="rId64"/>
-    <p:sldId id="280" r:id="rId65"/>
-    <p:sldId id="281" r:id="rId66"/>
-    <p:sldId id="282" r:id="rId67"/>
-    <p:sldId id="283" r:id="rId68"/>
-    <p:sldId id="284" r:id="rId69"/>
     <p:sldId id="285" r:id="rId70"/>
     <p:sldId id="286" r:id="rId71"/>
     <p:sldId id="287" r:id="rId72"/>
@@ -932,19 +931,19 @@
           <a:p>
             <a:r>
               <a:rPr dirty="0"/>
-              <a:t>Worded as a CALLBACK to slides 7-8: the software version made this point with three questions; the embedded version closes the loop on territory you can feel (plan section 7.5). Say callback aloud, not re-teach.</a:t>
+              <a:t>Worded as a CALLBACK to the diagram tour that closed on “Same territory, different questions”: the software version made this point across five models of one registration system; the embedded version closes the loop on territory you can feel. Say the callback aloud, do not re-teach it.</a:t>
             </a:r>
           </a:p>
           <a:p>
             <a:r>
               <a:rPr dirty="0"/>
-              <a:t>Suddenly thermal mass, ambient temperature, heat generation, airflow matter - and battery capacity largely disappears.</a:t>
+              <a:t>Suddenly thermal mass, ambient temperature, heat generation and airflow matter — and battery capacity largely disappears.</a:t>
             </a:r>
           </a:p>
           <a:p>
             <a:r>
               <a:rPr dirty="0"/>
-              <a:t>Closing hinge line, spoken over the slide: the method is judgment - and nothing in this room can tell us whether we judged right. A hypothetical cannot. Production can. That is Section 3.</a:t>
+              <a:t>Closing hinge, spoken over the slide: we have judged what must remain. The next question is not whether we judged right — correspondence answers that, later — but how much of what must remain we are obliged to write down. That is the boundaries slide.</a:t>
             </a:r>
           </a:p>
         </p:txBody>
@@ -1280,66 +1279,19 @@
           <a:p>
             <a:r>
               <a:rPr dirty="0"/>
-              <a:t>Scaffolding is what this particular agent needs to interpret and realize the obligation reliably — examples, decomposition, intermediate structure.</a:t>
+              <a:t>CLICK 1 — the two boundaries. The obligation boundary encloses what must be true. The specification boundary encloses what we actually write down. Between them sits the scaffolding: what this particular agent needs to interpret and realize the obligation reliably — examples, decomposition, intermediate structure. Outside the specification boundary, degrees of freedom, left to the realization.</a:t>
             </a:r>
           </a:p>
           <a:p>
             <a:r>
               <a:rPr dirty="0"/>
-              <a:t>The obligation boundary encloses what must be true. The specification boundary encloses what we actually write down. Between them: scaffolding. Outside the specification boundary: degrees of freedom, left to the realization.</a:t>
-            </a:r>
-          </a:p>
-        </p:txBody>
-      </p:sp>
-    </p:spTree>
-  </p:cSld>
-  <p:clrMapOvr>
-    <a:masterClrMapping/>
-  </p:clrMapOvr>
-</p:notes>
-</file>
-
-<file path=ppt/notesSlides/notesSlide25.xml><?xml version="1.0" encoding="utf-8"?>
-<p:notes xmlns:a="http://schemas.openxmlformats.org/drawingml/2006/main" xmlns:r="http://schemas.openxmlformats.org/officeDocument/2006/relationships" xmlns:p="http://schemas.openxmlformats.org/presentationml/2006/main">
-  <p:cSld>
-    <p:spTree>
-      <p:nvGrpSpPr>
-        <p:cNvPr id="1" name=""/>
-        <p:cNvGrpSpPr/>
-        <p:nvPr/>
-      </p:nvGrpSpPr>
-      <p:grpSpPr>
-        <a:xfrm>
-          <a:off x="0" y="0"/>
-          <a:ext cx="0" cy="0"/>
-          <a:chOff x="0" y="0"/>
-          <a:chExt cx="0" cy="0"/>
-        </a:xfrm>
-      </p:grpSpPr>
-      <p:sp>
-        <p:nvSpPr>
-          <p:cNvPr id="2" name="Notes Placeholder 1"/>
-          <p:cNvSpPr>
-            <a:spLocks noGrp="1"/>
-          </p:cNvSpPr>
-          <p:nvPr>
-            <p:ph type="body" idx="1"/>
-          </p:nvPr>
-        </p:nvSpPr>
-        <p:spPr/>
-        <p:txBody>
-          <a:bodyPr/>
-          <a:lstStyle/>
+              <a:t>CLICK 2 — parsimony restated for delegation: how little must we specify while still preserving the obligation and still enabling THIS agent to realize it? A more capable agent needs fewer examples, less decomposition, less intermediate structure, so the dashed boundary moves toward the obligation.</a:t>
+            </a:r>
+          </a:p>
           <a:p>
             <a:r>
               <a:rPr dirty="0"/>
-              <a:t>Parsimony restated for delegation: how little must we specify while still preserving the obligation and enabling THIS agent to realize it (lander). A more capable agent needs fewer examples, less decomposition, less intermediate structure — the specification boundary moves toward the obligation boundary.</a:t>
-            </a:r>
-          </a:p>
-          <a:p>
-            <a:r>
-              <a:rPr dirty="0"/>
-              <a:t>Watch what did not move: the core. That is the next slide.</a:t>
+              <a:t>Watch what did NOT move: the core. That is the next slide.</a:t>
             </a:r>
           </a:p>
         </p:txBody>
@@ -1386,13 +1338,31 @@
           <a:p>
             <a:r>
               <a:rPr dirty="0"/>
-              <a:t>Entitlement anchors this: the crossed-out tag is the same unlimited distinction the reduction dropped three slides ago. However capable the downstream agent, nothing arrives for it to recover — the distinction no longer exists in the model.</a:t>
+              <a:t>The reduction happened upstream. However capable the downstream agent, nothing arrives for it to recover — the distinction no longer exists in the model. The obligation boundary is capability-invariant; the specification boundary is not. The limit is semantic, not a capability shortfall.</a:t>
             </a:r>
           </a:p>
           <a:p>
             <a:r>
               <a:rPr dirty="0"/>
-              <a:t>The obligation boundary is capability-invariant; the specification boundary is not. The limit is semantic, not a capability shortfall. Second payoff of the evidence section.</a:t>
+              <a:t>THE REVEAL. The limit case makes the asymmetry exact: for a fixed representation R, as M approaches a perfect reasoner and the interpretation and realization factors approach one, p_R goes to P(E | R). Every symbol is already known — T, M, R and H from the production equation, E, I and L from the chain decomposition, obligation and scaffolding and degrees of freedom from the argument just made. That is why it was held back until here.</a:t>
+            </a:r>
+          </a:p>
+          <a:p>
+            <a:r>
+              <a:rPr dirty="0"/>
+              <a:t>Say it in these words: a better M cannot recover a distinction that R failed to carry. An organization that has not determined and externalized the obligations governing its work cannot discharge them by purchasing a more capable reasoner.</a:t>
+            </a:r>
+          </a:p>
+          <a:p>
+            <a:r>
+              <a:rPr dirty="0"/>
+              <a:t>The band is the figure from “Open the box” and it is deliberately BARE here — no red MODELING CHANGES THE REPRESENTATION overlay. This slide argues that even a perfect reasoner stays bounded by P(E | R); the Modeling-lever annotation would fight that claim. Point at the FIRST term as you read the limit.</a:t>
+            </a:r>
+          </a:p>
+          <a:p>
+            <a:r>
+              <a:rPr dirty="0"/>
+              <a:t>Forward tag: you will watch this limit reach production in the correspondence section, on the account-quota case — a distinction the model could not express, and production said so.</a:t>
             </a:r>
           </a:p>
         </p:txBody>
@@ -11790,7 +11760,7 @@
                   <a:srgbClr val="FFFFFF"/>
                 </a:solidFill>
               </a:rPr>
-              <a:t>How do we find out whether we judged right?</a:t>
+              <a:t>We judged what must remain. How much of it must we write down?</a:t>
             </a:r>
           </a:p>
         </p:txBody>
@@ -15320,6 +15290,117 @@
       </p:cxnSp>
       <p:sp>
         <p:nvSpPr>
+          <p:cNvPr id="20" name="Scaf2"/>
+          <p:cNvSpPr/>
+          <p:nvPr/>
+        </p:nvSpPr>
+        <p:spPr>
+          <a:xfrm>
+            <a:off x="1371600" y="2331720"/>
+            <a:ext cx="3291840" cy="1965960"/>
+          </a:xfrm>
+          <a:prstGeom prst="rect">
+            <a:avLst/>
+          </a:prstGeom>
+          <a:noFill/>
+          <a:ln w="19050">
+            <a:solidFill>
+              <a:srgbClr val="5C4826"/>
+            </a:solidFill>
+            <a:prstDash val="dash"/>
+          </a:ln>
+        </p:spPr>
+        <p:txBody>
+          <a:bodyPr wrap="square" lIns="27432" tIns="22860" rIns="27432" bIns="22860" anchor="ctr"/>
+          <a:lstStyle/>
+          <a:p>
+            <a:pPr>
+              <a:buNone/>
+            </a:pPr>
+            <a:endParaRPr lang="en-US"/>
+          </a:p>
+        </p:txBody>
+      </p:sp>
+      <p:cxnSp>
+        <p:nvCxnSpPr>
+          <p:cNvPr id="21" name="MvA"/>
+          <p:cNvCxnSpPr/>
+          <p:nvPr/>
+        </p:nvCxnSpPr>
+        <p:spPr>
+          <a:xfrm>
+            <a:off x="4663440" y="3566160"/>
+            <a:ext cx="1097280" cy="0"/>
+          </a:xfrm>
+          <a:prstGeom prst="straightConnector1">
+            <a:avLst/>
+          </a:prstGeom>
+          <a:ln w="28575">
+            <a:solidFill>
+              <a:srgbClr val="5C4826"/>
+            </a:solidFill>
+            <a:headEnd type="triangle" w="med" len="med"/>
+          </a:ln>
+        </p:spPr>
+      </p:cxnSp>
+      <p:sp>
+        <p:nvSpPr>
+          <p:cNvPr id="22" name="CapLbl"/>
+          <p:cNvSpPr txBox="1"/>
+          <p:nvPr/>
+        </p:nvSpPr>
+        <p:spPr>
+          <a:xfrm>
+            <a:off x="5806440" y="3429000"/>
+            <a:ext cx="3017520" cy="868680"/>
+          </a:xfrm>
+          <a:prstGeom prst="rect">
+            <a:avLst/>
+          </a:prstGeom>
+          <a:noFill/>
+          <a:ln>
+            <a:noFill/>
+          </a:ln>
+        </p:spPr>
+        <p:txBody>
+          <a:bodyPr wrap="square" lIns="0" tIns="0" rIns="0" bIns="0" anchor="t"/>
+          <a:lstStyle/>
+          <a:p>
+            <a:pPr algn="l">
+              <a:spcAft>
+                <a:spcPts val="200"/>
+              </a:spcAft>
+              <a:buNone/>
+            </a:pPr>
+            <a:r>
+              <a:rPr lang="en-US" sz="1500" b="1" dirty="0">
+                <a:solidFill>
+                  <a:srgbClr val="5C4826"/>
+                </a:solidFill>
+              </a:rPr>
+              <a:t>a more capable agent</a:t>
+            </a:r>
+          </a:p>
+          <a:p>
+            <a:pPr algn="l">
+              <a:spcAft>
+                <a:spcPts val="0"/>
+              </a:spcAft>
+              <a:buNone/>
+            </a:pPr>
+            <a:r>
+              <a:rPr lang="en-US" sz="1400" b="0" dirty="0">
+                <a:solidFill>
+                  <a:srgbClr val="555960"/>
+                </a:solidFill>
+              </a:rPr>
+              <a:t>needs less scaffolding, so this boundary moves in</a:t>
+            </a:r>
+          </a:p>
+        </p:txBody>
+      </p:sp>
+      <p:sp>
+        <p:nvSpPr>
           <p:cNvPr id="150" name="Ital"/>
           <p:cNvSpPr txBox="1"/>
           <p:nvPr/>
@@ -15395,7 +15476,7 @@
                   <a:srgbClr val="FFFFFF"/>
                 </a:solidFill>
               </a:rPr>
-              <a:t>Two boundaries, not one.</a:t>
+              <a:t>Two boundaries, not one. Only one of them moves.</a:t>
             </a:r>
           </a:p>
         </p:txBody>
@@ -15405,615 +15486,159 @@
   <p:clrMapOvr>
     <a:masterClrMapping/>
   </p:clrMapOvr>
-</p:sld>
-</file>
-
-<file path=ppt/slides/slide25.xml><?xml version="1.0" encoding="utf-8"?>
-<p:sld xmlns:a="http://schemas.openxmlformats.org/drawingml/2006/main" xmlns:r="http://schemas.openxmlformats.org/officeDocument/2006/relationships" xmlns:p="http://schemas.openxmlformats.org/presentationml/2006/main">
-  <p:cSld>
-    <p:spTree>
-      <p:nvGrpSpPr>
-        <p:cNvPr id="1" name=""/>
-        <p:cNvGrpSpPr/>
-        <p:nvPr/>
-      </p:nvGrpSpPr>
-      <p:grpSpPr>
-        <a:xfrm>
-          <a:off x="0" y="0"/>
-          <a:ext cx="0" cy="0"/>
-          <a:chOff x="0" y="0"/>
-          <a:chExt cx="0" cy="0"/>
-        </a:xfrm>
-      </p:grpSpPr>
-      <p:sp>
-        <p:nvSpPr>
-          <p:cNvPr id="2" name="Title 1"/>
-          <p:cNvSpPr>
-            <a:spLocks noGrp="1"/>
-          </p:cNvSpPr>
-          <p:nvPr>
-            <p:ph type="title"/>
-          </p:nvPr>
-        </p:nvSpPr>
-        <p:spPr/>
-        <p:txBody>
-          <a:bodyPr>
-            <a:normAutofit fontScale="90000"/>
-          </a:bodyPr>
-          <a:lstStyle/>
-          <a:p>
-            <a:r>
-              <a:rPr lang="en-US" dirty="0"/>
-              <a:t>Capability can reduce scaffolding</a:t>
-            </a:r>
-          </a:p>
-        </p:txBody>
-      </p:sp>
-      <p:sp>
-        <p:nvSpPr>
-          <p:cNvPr id="3" name="Slide Number Placeholder 3"/>
-          <p:cNvSpPr>
-            <a:spLocks noGrp="1"/>
-          </p:cNvSpPr>
-          <p:nvPr>
-            <p:ph type="sldNum" sz="quarter" idx="4"/>
-          </p:nvPr>
-        </p:nvSpPr>
-        <p:spPr/>
-        <p:txBody>
-          <a:bodyPr/>
-          <a:lstStyle/>
-          <a:p>
-            <a:fld id="{B7EB45DA-9A0D-DC49-8E02-F30A5DDC21C3}" type="slidenum">
-              <a:rPr lang="en-US" smtClean="0"/>
-              <a:t>25</a:t>
-            </a:fld>
-            <a:endParaRPr lang="en-US"/>
-          </a:p>
-        </p:txBody>
-      </p:sp>
-      <p:sp>
-        <p:nvSpPr>
-          <p:cNvPr id="10" name="DOF1"/>
-          <p:cNvSpPr/>
-          <p:nvPr/>
-        </p:nvSpPr>
-        <p:spPr>
-          <a:xfrm>
-            <a:off x="502920" y="1737360"/>
-            <a:ext cx="5029200" cy="3108960"/>
-          </a:xfrm>
-          <a:prstGeom prst="rect">
-            <a:avLst/>
-          </a:prstGeom>
-          <a:solidFill>
-            <a:srgbClr val="FBF8F2"/>
-          </a:solidFill>
-          <a:ln w="12700">
-            <a:solidFill>
-              <a:srgbClr val="C9B991"/>
-            </a:solidFill>
-          </a:ln>
-        </p:spPr>
-        <p:txBody>
-          <a:bodyPr wrap="square" lIns="27432" tIns="22860" rIns="27432" bIns="22860" anchor="ctr"/>
-          <a:lstStyle/>
-          <a:p>
-            <a:pPr>
-              <a:buNone/>
-            </a:pPr>
-            <a:endParaRPr lang="en-US"/>
-          </a:p>
-        </p:txBody>
-      </p:sp>
-      <p:sp>
-        <p:nvSpPr>
-          <p:cNvPr id="11" name="OldB1"/>
-          <p:cNvSpPr/>
-          <p:nvPr/>
-        </p:nvSpPr>
-        <p:spPr>
-          <a:xfrm>
-            <a:off x="777240" y="1943100"/>
-            <a:ext cx="4480560" cy="2697480"/>
-          </a:xfrm>
-          <a:prstGeom prst="rect">
-            <a:avLst/>
-          </a:prstGeom>
-          <a:noFill/>
-          <a:ln w="12700">
-            <a:solidFill>
-              <a:srgbClr val="8E6F3E"/>
-            </a:solidFill>
-            <a:prstDash val="dash"/>
-          </a:ln>
-        </p:spPr>
-        <p:txBody>
-          <a:bodyPr wrap="square" lIns="27432" tIns="22860" rIns="27432" bIns="22860" anchor="ctr"/>
-          <a:lstStyle/>
-          <a:p>
-            <a:pPr>
-              <a:buNone/>
-            </a:pPr>
-            <a:endParaRPr lang="en-US"/>
-          </a:p>
-        </p:txBody>
-      </p:sp>
-      <p:sp>
-        <p:nvSpPr>
-          <p:cNvPr id="12" name="Scaf1"/>
-          <p:cNvSpPr/>
-          <p:nvPr/>
-        </p:nvSpPr>
-        <p:spPr>
-          <a:xfrm>
-            <a:off x="1280160" y="2286000"/>
-            <a:ext cx="3520440" cy="2011680"/>
-          </a:xfrm>
-          <a:prstGeom prst="rect">
-            <a:avLst/>
-          </a:prstGeom>
-          <a:solidFill>
-            <a:srgbClr val="C9B991"/>
-          </a:solidFill>
-          <a:ln>
-            <a:noFill/>
-          </a:ln>
-        </p:spPr>
-        <p:txBody>
-          <a:bodyPr wrap="square" lIns="27432" tIns="22860" rIns="27432" bIns="22860" anchor="ctr"/>
-          <a:lstStyle/>
-          <a:p>
-            <a:pPr>
-              <a:buNone/>
-            </a:pPr>
-            <a:endParaRPr lang="en-US"/>
-          </a:p>
-        </p:txBody>
-      </p:sp>
-      <p:sp>
-        <p:nvSpPr>
-          <p:cNvPr id="13" name="Oblig1"/>
-          <p:cNvSpPr/>
-          <p:nvPr/>
-        </p:nvSpPr>
-        <p:spPr>
-          <a:xfrm>
-            <a:off x="1737360" y="2743200"/>
-            <a:ext cx="2606040" cy="1005840"/>
-          </a:xfrm>
-          <a:prstGeom prst="rect">
-            <a:avLst/>
-          </a:prstGeom>
-          <a:solidFill>
-            <a:srgbClr val="5C4826"/>
-          </a:solidFill>
-          <a:ln>
-            <a:noFill/>
-          </a:ln>
-        </p:spPr>
-        <p:txBody>
-          <a:bodyPr wrap="square" lIns="27432" tIns="22860" rIns="27432" bIns="22860" anchor="ctr"/>
-          <a:lstStyle/>
-          <a:p>
-            <a:pPr algn="ctr">
-              <a:spcAft>
-                <a:spcPts val="400"/>
-              </a:spcAft>
-              <a:buNone/>
-            </a:pPr>
-            <a:r>
-              <a:rPr lang="en-US" sz="1600" b="1" dirty="0">
-                <a:solidFill>
-                  <a:srgbClr val="FFFFFF"/>
-                </a:solidFill>
-              </a:rPr>
-              <a:t>OBLIGATION</a:t>
-            </a:r>
-          </a:p>
-          <a:p>
-            <a:pPr algn="ctr">
-              <a:spcAft>
-                <a:spcPts val="0"/>
-              </a:spcAft>
-              <a:buNone/>
-            </a:pPr>
-            <a:r>
-              <a:rPr lang="en-US" sz="1400" b="0" dirty="0">
-                <a:solidFill>
-                  <a:srgbClr val="FFFFFF"/>
-                </a:solidFill>
-              </a:rPr>
-              <a:t>what must be true</a:t>
-            </a:r>
-          </a:p>
-        </p:txBody>
-      </p:sp>
-      <p:sp>
-        <p:nvSpPr>
-          <p:cNvPr id="14" name="ScafL"/>
-          <p:cNvSpPr txBox="1"/>
-          <p:nvPr/>
-        </p:nvSpPr>
-        <p:spPr>
-          <a:xfrm>
-            <a:off x="1280160" y="3886200"/>
-            <a:ext cx="3520440" cy="329184"/>
-          </a:xfrm>
-          <a:prstGeom prst="rect">
-            <a:avLst/>
-          </a:prstGeom>
-          <a:noFill/>
-          <a:ln>
-            <a:noFill/>
-          </a:ln>
-        </p:spPr>
-        <p:txBody>
-          <a:bodyPr wrap="square" lIns="0" tIns="0" rIns="0" bIns="0" anchor="t"/>
-          <a:lstStyle/>
-          <a:p>
-            <a:pPr algn="ctr">
-              <a:spcAft>
-                <a:spcPts val="0"/>
-              </a:spcAft>
-              <a:buNone/>
-            </a:pPr>
-            <a:r>
-              <a:rPr lang="en-US" sz="1400" b="1" dirty="0">
-                <a:solidFill>
-                  <a:srgbClr val="5C4826"/>
-                </a:solidFill>
-              </a:rPr>
-              <a:t>SCAFFOLDING — what this agent needs</a:t>
-            </a:r>
-          </a:p>
-        </p:txBody>
-      </p:sp>
-      <p:sp>
-        <p:nvSpPr>
-          <p:cNvPr id="15" name="OldL"/>
-          <p:cNvSpPr txBox="1"/>
-          <p:nvPr/>
-        </p:nvSpPr>
-        <p:spPr>
-          <a:xfrm>
-            <a:off x="5806440" y="1897380"/>
-            <a:ext cx="3017520" cy="548640"/>
-          </a:xfrm>
-          <a:prstGeom prst="rect">
-            <a:avLst/>
-          </a:prstGeom>
-          <a:noFill/>
-          <a:ln>
-            <a:noFill/>
-          </a:ln>
-        </p:spPr>
-        <p:txBody>
-          <a:bodyPr wrap="square" lIns="0" tIns="0" rIns="0" bIns="0" anchor="t"/>
-          <a:lstStyle/>
-          <a:p>
-            <a:pPr algn="l">
-              <a:spcAft>
-                <a:spcPts val="200"/>
-              </a:spcAft>
-              <a:buNone/>
-            </a:pPr>
-            <a:r>
-              <a:rPr lang="en-US" sz="1500" b="1" dirty="0">
-                <a:solidFill>
-                  <a:srgbClr val="8E6F3E"/>
-                </a:solidFill>
-              </a:rPr>
-              <a:t>specification boundary</a:t>
-            </a:r>
-          </a:p>
-          <a:p>
-            <a:pPr algn="l">
-              <a:spcAft>
-                <a:spcPts val="0"/>
-              </a:spcAft>
-              <a:buNone/>
-            </a:pPr>
-            <a:r>
-              <a:rPr lang="en-US" sz="1400" b="0" dirty="0">
-                <a:solidFill>
-                  <a:srgbClr val="555960"/>
-                </a:solidFill>
-              </a:rPr>
-              <a:t>less capable agent</a:t>
-            </a:r>
-          </a:p>
-        </p:txBody>
-      </p:sp>
-      <p:cxnSp>
-        <p:nvCxnSpPr>
-          <p:cNvPr id="16" name="OldLd"/>
-          <p:cNvCxnSpPr/>
-          <p:nvPr/>
-        </p:nvCxnSpPr>
-        <p:spPr>
-          <a:xfrm>
-            <a:off x="5303520" y="2171700"/>
-            <a:ext cx="457200" cy="0"/>
-          </a:xfrm>
-          <a:prstGeom prst="straightConnector1">
-            <a:avLst/>
-          </a:prstGeom>
-          <a:ln w="12700">
-            <a:solidFill>
-              <a:srgbClr val="555960"/>
-            </a:solidFill>
-            <a:headEnd type="triangle" w="med" len="med"/>
-          </a:ln>
-        </p:spPr>
-      </p:cxnSp>
-      <p:sp>
-        <p:nvSpPr>
-          <p:cNvPr id="17" name="NewL"/>
-          <p:cNvSpPr txBox="1"/>
-          <p:nvPr/>
-        </p:nvSpPr>
-        <p:spPr>
-          <a:xfrm>
-            <a:off x="5806440" y="2651760"/>
-            <a:ext cx="3017520" cy="548640"/>
-          </a:xfrm>
-          <a:prstGeom prst="rect">
-            <a:avLst/>
-          </a:prstGeom>
-          <a:noFill/>
-          <a:ln>
-            <a:noFill/>
-          </a:ln>
-        </p:spPr>
-        <p:txBody>
-          <a:bodyPr wrap="square" lIns="0" tIns="0" rIns="0" bIns="0" anchor="t"/>
-          <a:lstStyle/>
-          <a:p>
-            <a:pPr algn="l">
-              <a:spcAft>
-                <a:spcPts val="200"/>
-              </a:spcAft>
-              <a:buNone/>
-            </a:pPr>
-            <a:r>
-              <a:rPr lang="en-US" sz="1500" b="1" dirty="0">
-                <a:solidFill>
-                  <a:srgbClr val="8E6F3E"/>
-                </a:solidFill>
-              </a:rPr>
-              <a:t>specification boundary</a:t>
-            </a:r>
-          </a:p>
-          <a:p>
-            <a:pPr algn="l">
-              <a:spcAft>
-                <a:spcPts val="0"/>
-              </a:spcAft>
-              <a:buNone/>
-            </a:pPr>
-            <a:r>
-              <a:rPr lang="en-US" sz="1400" b="0" dirty="0">
-                <a:solidFill>
-                  <a:srgbClr val="555960"/>
-                </a:solidFill>
-              </a:rPr>
-              <a:t>more capable agent</a:t>
-            </a:r>
-          </a:p>
-        </p:txBody>
-      </p:sp>
-      <p:cxnSp>
-        <p:nvCxnSpPr>
-          <p:cNvPr id="18" name="NewLd"/>
-          <p:cNvCxnSpPr/>
-          <p:nvPr/>
-        </p:nvCxnSpPr>
-        <p:spPr>
-          <a:xfrm>
-            <a:off x="4846320" y="2926080"/>
-            <a:ext cx="914400" cy="0"/>
-          </a:xfrm>
-          <a:prstGeom prst="straightConnector1">
-            <a:avLst/>
-          </a:prstGeom>
-          <a:ln w="12700">
-            <a:solidFill>
-              <a:srgbClr val="555960"/>
-            </a:solidFill>
-            <a:headEnd type="triangle" w="med" len="med"/>
-          </a:ln>
-        </p:spPr>
-      </p:cxnSp>
-      <p:cxnSp>
-        <p:nvCxnSpPr>
-          <p:cNvPr id="19" name="MvA"/>
-          <p:cNvCxnSpPr/>
-          <p:nvPr/>
-        </p:nvCxnSpPr>
-        <p:spPr>
-          <a:xfrm>
-            <a:off x="4800600" y="3520440"/>
-            <a:ext cx="457200" cy="0"/>
-          </a:xfrm>
-          <a:prstGeom prst="straightConnector1">
-            <a:avLst/>
-          </a:prstGeom>
-          <a:ln w="28575">
-            <a:solidFill>
-              <a:srgbClr val="8E6F3E"/>
-            </a:solidFill>
-            <a:headEnd type="triangle" w="med" len="med"/>
-          </a:ln>
-        </p:spPr>
-      </p:cxnSp>
-      <p:sp>
-        <p:nvSpPr>
-          <p:cNvPr id="20" name="MvLbl"/>
-          <p:cNvSpPr txBox="1"/>
-          <p:nvPr/>
-        </p:nvSpPr>
-        <p:spPr>
-          <a:xfrm>
-            <a:off x="5806440" y="3291840"/>
-            <a:ext cx="3017520" cy="868680"/>
-          </a:xfrm>
-          <a:prstGeom prst="rect">
-            <a:avLst/>
-          </a:prstGeom>
-          <a:noFill/>
-          <a:ln>
-            <a:noFill/>
-          </a:ln>
-        </p:spPr>
-        <p:txBody>
-          <a:bodyPr wrap="square" lIns="0" tIns="0" rIns="0" bIns="0" anchor="t"/>
-          <a:lstStyle/>
-          <a:p>
-            <a:pPr algn="l">
-              <a:spcAft>
-                <a:spcPts val="0"/>
-              </a:spcAft>
-              <a:buNone/>
-            </a:pPr>
-            <a:r>
-              <a:rPr lang="en-US" sz="1500" b="1" dirty="0">
-                <a:solidFill>
-                  <a:srgbClr val="5C4826"/>
-                </a:solidFill>
-              </a:rPr>
-              <a:t>greater agent capability can reduce required scaffolding</a:t>
-            </a:r>
-          </a:p>
-        </p:txBody>
-      </p:sp>
-      <p:sp>
-        <p:nvSpPr>
-          <p:cNvPr id="150" name="Ital"/>
-          <p:cNvSpPr txBox="1"/>
-          <p:nvPr/>
-        </p:nvSpPr>
-        <p:spPr>
-          <a:xfrm>
-            <a:off x="274320" y="4983480"/>
-            <a:ext cx="8595360" cy="457200"/>
-          </a:xfrm>
-          <a:prstGeom prst="rect">
-            <a:avLst/>
-          </a:prstGeom>
-          <a:noFill/>
-          <a:ln>
-            <a:noFill/>
-          </a:ln>
-        </p:spPr>
-        <p:txBody>
-          <a:bodyPr wrap="square" lIns="0" tIns="0" rIns="0" bIns="0" anchor="t"/>
-          <a:lstStyle/>
-          <a:p>
-            <a:pPr algn="ctr">
-              <a:spcAft>
-                <a:spcPts val="0"/>
-              </a:spcAft>
-              <a:buNone/>
-            </a:pPr>
-            <a:r>
-              <a:rPr lang="en-US" sz="1700" b="0" i="1" dirty="0">
-                <a:solidFill>
-                  <a:srgbClr val="555960"/>
-                </a:solidFill>
-              </a:rPr>
-              <a:t>How little must we specify for this agent, while preserving the obligation?</a:t>
-            </a:r>
-          </a:p>
-        </p:txBody>
-      </p:sp>
-      <p:sp>
-        <p:nvSpPr>
-          <p:cNvPr id="199" name="FooterBand"/>
-          <p:cNvSpPr/>
-          <p:nvPr/>
-        </p:nvSpPr>
-        <p:spPr>
-          <a:xfrm>
-            <a:off x="274320" y="5852160"/>
-            <a:ext cx="8595360" cy="566928"/>
-          </a:xfrm>
-          <a:prstGeom prst="rect">
-            <a:avLst/>
-          </a:prstGeom>
-          <a:solidFill>
-            <a:srgbClr val="8E6F3E"/>
-          </a:solidFill>
-          <a:ln>
-            <a:noFill/>
-          </a:ln>
-        </p:spPr>
-        <p:txBody>
-          <a:bodyPr wrap="square" lIns="27432" tIns="22860" rIns="27432" bIns="22860" anchor="ctr"/>
-          <a:lstStyle/>
-          <a:p>
-            <a:pPr algn="ctr">
-              <a:spcAft>
-                <a:spcPts val="0"/>
-              </a:spcAft>
-              <a:buNone/>
-            </a:pPr>
-            <a:r>
-              <a:rPr lang="en-US" sz="2000" b="1" dirty="0">
-                <a:solidFill>
-                  <a:srgbClr val="FFFFFF"/>
-                </a:solidFill>
-              </a:rPr>
-              <a:t>The specification boundary moves inward.</a:t>
-            </a:r>
-          </a:p>
-        </p:txBody>
-      </p:sp>
-      <p:sp>
-        <p:nvSpPr>
-          <p:cNvPr id="200" name="DofL25"/>
-          <p:cNvSpPr txBox="1"/>
-          <p:nvPr/>
-        </p:nvSpPr>
-        <p:spPr>
-          <a:xfrm>
-            <a:off x="502920" y="4640580"/>
-            <a:ext cx="5029200" cy="205740"/>
-          </a:xfrm>
-          <a:prstGeom prst="rect">
-            <a:avLst/>
-          </a:prstGeom>
-          <a:noFill/>
-          <a:ln>
-            <a:noFill/>
-          </a:ln>
-        </p:spPr>
-        <p:txBody>
-          <a:bodyPr wrap="square" lIns="0" tIns="0" rIns="0" bIns="0" anchor="ctr"/>
-          <a:lstStyle/>
-          <a:p>
-            <a:pPr algn="ctr">
-              <a:spcAft>
-                <a:spcPts val="0"/>
-              </a:spcAft>
-              <a:buNone/>
-            </a:pPr>
-            <a:r>
-              <a:rPr lang="en-US" sz="1300" b="0" dirty="0">
-                <a:solidFill>
-                  <a:srgbClr val="555960"/>
-                </a:solidFill>
-              </a:rPr>
-              <a:t>DEGREES OF FREEDOM</a:t>
-            </a:r>
-          </a:p>
-        </p:txBody>
-      </p:sp>
-    </p:spTree>
-  </p:cSld>
-  <p:clrMapOvr>
-    <a:masterClrMapping/>
-  </p:clrMapOvr>
+  <p:timing>
+    <p:tnLst>
+      <p:par>
+        <p:cTn id="1" dur="indefinite" restart="never" nodeType="tmRoot">
+          <p:childTnLst>
+            <p:seq concurrent="1" nextAc="seek">
+              <p:cTn id="2" dur="indefinite" nodeType="mainSeq">
+                <p:childTnLst>
+                  <p:par>
+                    <p:cTn id="3" fill="hold">
+                      <p:stCondLst>
+                        <p:cond delay="indefinite"/>
+                      </p:stCondLst>
+                      <p:childTnLst>
+                        <p:par>
+                          <p:cTn id="4" fill="hold">
+                            <p:stCondLst>
+                              <p:cond delay="0"/>
+                            </p:stCondLst>
+                            <p:childTnLst>
+                              <p:par>
+                                <p:cTn id="5" presetID="10" presetClass="entr" presetSubtype="0" fill="hold" nodeType="clickEffect">
+                                  <p:stCondLst>
+                                    <p:cond delay="0"/>
+                                  </p:stCondLst>
+                                  <p:childTnLst>
+                                    <p:set>
+                                      <p:cBhvr>
+                                        <p:cTn id="6" dur="1" fill="hold">
+                                          <p:stCondLst>
+                                            <p:cond delay="0"/>
+                                          </p:stCondLst>
+                                        </p:cTn>
+                                        <p:tgtEl>
+                                          <p:spTgt spid="20"/>
+                                        </p:tgtEl>
+                                        <p:attrNameLst>
+                                          <p:attrName>style.visibility</p:attrName>
+                                        </p:attrNameLst>
+                                      </p:cBhvr>
+                                      <p:to>
+                                        <p:strVal val="visible"/>
+                                      </p:to>
+                                    </p:set>
+                                    <p:animEffect transition="in" filter="fade">
+                                      <p:cBhvr>
+                                        <p:cTn id="7" dur="500"/>
+                                        <p:tgtEl>
+                                          <p:spTgt spid="20"/>
+                                        </p:tgtEl>
+                                      </p:cBhvr>
+                                    </p:animEffect>
+                                  </p:childTnLst>
+                                </p:cTn>
+                              </p:par>
+                              <p:par>
+                                <p:cTn id="8" presetID="10" presetClass="entr" presetSubtype="0" fill="hold" nodeType="withEffect">
+                                  <p:stCondLst>
+                                    <p:cond delay="0"/>
+                                  </p:stCondLst>
+                                  <p:childTnLst>
+                                    <p:set>
+                                      <p:cBhvr>
+                                        <p:cTn id="9" dur="1" fill="hold">
+                                          <p:stCondLst>
+                                            <p:cond delay="0"/>
+                                          </p:stCondLst>
+                                        </p:cTn>
+                                        <p:tgtEl>
+                                          <p:spTgt spid="21"/>
+                                        </p:tgtEl>
+                                        <p:attrNameLst>
+                                          <p:attrName>style.visibility</p:attrName>
+                                        </p:attrNameLst>
+                                      </p:cBhvr>
+                                      <p:to>
+                                        <p:strVal val="visible"/>
+                                      </p:to>
+                                    </p:set>
+                                    <p:animEffect transition="in" filter="fade">
+                                      <p:cBhvr>
+                                        <p:cTn id="10" dur="500"/>
+                                        <p:tgtEl>
+                                          <p:spTgt spid="21"/>
+                                        </p:tgtEl>
+                                      </p:cBhvr>
+                                    </p:animEffect>
+                                  </p:childTnLst>
+                                </p:cTn>
+                              </p:par>
+                              <p:par>
+                                <p:cTn id="11" presetID="10" presetClass="entr" presetSubtype="0" fill="hold" nodeType="withEffect">
+                                  <p:stCondLst>
+                                    <p:cond delay="0"/>
+                                  </p:stCondLst>
+                                  <p:childTnLst>
+                                    <p:set>
+                                      <p:cBhvr>
+                                        <p:cTn id="12" dur="1" fill="hold">
+                                          <p:stCondLst>
+                                            <p:cond delay="0"/>
+                                          </p:stCondLst>
+                                        </p:cTn>
+                                        <p:tgtEl>
+                                          <p:spTgt spid="22"/>
+                                        </p:tgtEl>
+                                        <p:attrNameLst>
+                                          <p:attrName>style.visibility</p:attrName>
+                                        </p:attrNameLst>
+                                      </p:cBhvr>
+                                      <p:to>
+                                        <p:strVal val="visible"/>
+                                      </p:to>
+                                    </p:set>
+                                    <p:animEffect transition="in" filter="fade">
+                                      <p:cBhvr>
+                                        <p:cTn id="13" dur="500"/>
+                                        <p:tgtEl>
+                                          <p:spTgt spid="22"/>
+                                        </p:tgtEl>
+                                      </p:cBhvr>
+                                    </p:animEffect>
+                                  </p:childTnLst>
+                                </p:cTn>
+                              </p:par>
+                            </p:childTnLst>
+                          </p:cTn>
+                        </p:par>
+                      </p:childTnLst>
+                    </p:cTn>
+                  </p:par>
+                </p:childTnLst>
+              </p:cTn>
+              <p:prevCondLst>
+                <p:cond evt="onPrev" delay="0">
+                  <p:tgtEl>
+                    <p:sldTgt/>
+                  </p:tgtEl>
+                </p:cond>
+              </p:prevCondLst>
+              <p:nextCondLst>
+                <p:cond evt="onNext" delay="0">
+                  <p:tgtEl>
+                    <p:sldTgt/>
+                  </p:tgtEl>
+                </p:cond>
+              </p:nextCondLst>
+            </p:seq>
+          </p:childTnLst>
+        </p:cTn>
+      </p:par>
+    </p:tnLst>
+  </p:timing>
 </p:sld>
 </file>
 
@@ -16089,7 +15714,7 @@
         </p:nvSpPr>
         <p:spPr>
           <a:xfrm>
-            <a:off x="365760" y="1188720"/>
+            <a:off x="365760" y="914400"/>
             <a:ext cx="8412480" cy="365760"/>
           </a:xfrm>
           <a:prstGeom prst="rect">
@@ -16131,8 +15756,8 @@
         </p:nvSpPr>
         <p:spPr>
           <a:xfrm>
-            <a:off x="548640" y="2240280"/>
-            <a:ext cx="2377440" cy="868680"/>
+            <a:off x="548640" y="1508760"/>
+            <a:ext cx="2377440" cy="731520"/>
           </a:xfrm>
           <a:prstGeom prst="rect">
             <a:avLst/>
@@ -16191,7 +15816,7 @@
         </p:nvCxnSpPr>
         <p:spPr>
           <a:xfrm>
-            <a:off x="2971800" y="2674620"/>
+            <a:off x="2971800" y="1874520"/>
             <a:ext cx="594360" cy="0"/>
           </a:xfrm>
           <a:prstGeom prst="straightConnector1">
@@ -16213,8 +15838,8 @@
         </p:nvSpPr>
         <p:spPr>
           <a:xfrm>
-            <a:off x="3611880" y="2240280"/>
-            <a:ext cx="1874520" cy="868680"/>
+            <a:off x="3611880" y="1508760"/>
+            <a:ext cx="1874520" cy="731520"/>
           </a:xfrm>
           <a:prstGeom prst="rect">
             <a:avLst/>
@@ -16273,7 +15898,7 @@
         </p:nvCxnSpPr>
         <p:spPr>
           <a:xfrm>
-            <a:off x="5532120" y="2674620"/>
+            <a:off x="5532120" y="1874520"/>
             <a:ext cx="594360" cy="0"/>
           </a:xfrm>
           <a:prstGeom prst="straightConnector1">
@@ -16295,8 +15920,8 @@
         </p:nvSpPr>
         <p:spPr>
           <a:xfrm>
-            <a:off x="6172200" y="2240280"/>
-            <a:ext cx="2423160" cy="868680"/>
+            <a:off x="6172200" y="1508760"/>
+            <a:ext cx="2423160" cy="731520"/>
           </a:xfrm>
           <a:prstGeom prst="rect">
             <a:avLst/>
@@ -16353,8 +15978,8 @@
         </p:nvCxnSpPr>
         <p:spPr>
           <a:xfrm>
-            <a:off x="1737360" y="3108960"/>
-            <a:ext cx="0" cy="777240"/>
+            <a:off x="1737360" y="2240280"/>
+            <a:ext cx="0" cy="411480"/>
           </a:xfrm>
           <a:prstGeom prst="straightConnector1">
             <a:avLst/>
@@ -16376,7 +16001,7 @@
         </p:nvSpPr>
         <p:spPr>
           <a:xfrm>
-            <a:off x="845820" y="3931920"/>
+            <a:off x="845820" y="2697480"/>
             <a:ext cx="1783080" cy="402336"/>
           </a:xfrm>
           <a:prstGeom prst="rect">
@@ -16407,7 +16032,7 @@
                   <a:srgbClr val="8E6F3E"/>
                 </a:solidFill>
               </a:rPr>
-              <a:t>✗ unlimited</a:t>
+              <a:t>✗ a distinction</a:t>
             </a:r>
           </a:p>
         </p:txBody>
@@ -16420,7 +16045,7 @@
         </p:nvSpPr>
         <p:spPr>
           <a:xfrm>
-            <a:off x="685800" y="4434840"/>
+            <a:off x="685800" y="3154680"/>
             <a:ext cx="2103120" cy="274320"/>
           </a:xfrm>
           <a:prstGeom prst="rect">
@@ -16460,7 +16085,7 @@
         </p:nvSpPr>
         <p:spPr>
           <a:xfrm>
-            <a:off x="6126480" y="3291840"/>
+            <a:off x="6126480" y="2423160"/>
             <a:ext cx="2743200" cy="548640"/>
           </a:xfrm>
           <a:prstGeom prst="rect">
@@ -16500,8 +16125,8 @@
         </p:nvSpPr>
         <p:spPr>
           <a:xfrm>
-            <a:off x="274320" y="4983480"/>
-            <a:ext cx="8595360" cy="457200"/>
+            <a:off x="274320" y="3566160"/>
+            <a:ext cx="8595360" cy="365760"/>
           </a:xfrm>
           <a:prstGeom prst="rect">
             <a:avLst/>
@@ -16528,6 +16153,182 @@
                 </a:solidFill>
               </a:rPr>
               <a:t>The limit is semantic, not a shortfall of intelligence.</a:t>
+            </a:r>
+          </a:p>
+        </p:txBody>
+      </p:sp>
+      <p:pic>
+        <p:nvPicPr>
+          <p:cNvPr id="30" name="BandPic" descr="Small reprise of the production process band: Engineering intent to Encoded property to Fabricator to Realization, with the three probability terms P(E | R), P(I | E, R) and P(L | I, E, R) bracketed beneath."/>
+          <p:cNvPicPr>
+            <a:picLocks noChangeAspect="1"/>
+          </p:cNvPicPr>
+          <p:nvPr/>
+        </p:nvPicPr>
+        <p:blipFill>
+          <a:blip r:embed="rId3"/>
+          <a:stretch>
+            <a:fillRect/>
+          </a:stretch>
+        </p:blipFill>
+        <p:spPr>
+          <a:xfrm>
+            <a:off x="365760" y="4200000"/>
+            <a:ext cx="3200400" cy="1185206"/>
+          </a:xfrm>
+          <a:prstGeom prst="rect">
+            <a:avLst/>
+          </a:prstGeom>
+        </p:spPr>
+      </p:pic>
+      <p:sp>
+        <p:nvSpPr>
+          <p:cNvPr id="31" name="LimK"/>
+          <p:cNvSpPr txBox="1"/>
+          <p:nvPr/>
+        </p:nvSpPr>
+        <p:spPr>
+          <a:xfrm>
+            <a:off x="3886200" y="4114800"/>
+            <a:ext cx="4983480" cy="274320"/>
+          </a:xfrm>
+          <a:prstGeom prst="rect">
+            <a:avLst/>
+          </a:prstGeom>
+          <a:noFill/>
+          <a:ln>
+            <a:noFill/>
+          </a:ln>
+        </p:spPr>
+        <p:txBody>
+          <a:bodyPr wrap="square" lIns="0" tIns="0" rIns="0" bIns="0" anchor="t"/>
+          <a:lstStyle/>
+          <a:p>
+            <a:pPr algn="l">
+              <a:spcAft>
+                <a:spcPts val="0"/>
+              </a:spcAft>
+              <a:buNone/>
+            </a:pPr>
+            <a:r>
+              <a:rPr lang="en-US" sz="1400" b="1" dirty="0">
+                <a:solidFill>
+                  <a:srgbClr val="8E6F3E"/>
+                </a:solidFill>
+              </a:rPr>
+              <a:t>THE LIMIT CASE</a:t>
+            </a:r>
+          </a:p>
+        </p:txBody>
+      </p:sp>
+      <p:sp>
+        <p:nvSpPr>
+          <p:cNvPr id="32" name="LimEq"/>
+          <p:cNvSpPr txBox="1"/>
+          <p:nvPr/>
+        </p:nvSpPr>
+        <p:spPr>
+          <a:xfrm>
+            <a:off x="3886200" y="4457700"/>
+            <a:ext cx="4983480" cy="594360"/>
+          </a:xfrm>
+          <a:prstGeom prst="rect">
+            <a:avLst/>
+          </a:prstGeom>
+          <a:noFill/>
+          <a:ln>
+            <a:noFill/>
+          </a:ln>
+        </p:spPr>
+        <p:txBody>
+          <a:bodyPr wrap="square" lIns="0" tIns="0" rIns="0" bIns="0" anchor="ctr"/>
+          <a:lstStyle/>
+          <a:p>
+            <a:pPr algn="l">
+              <a:spcAft>
+                <a:spcPts val="0"/>
+              </a:spcAft>
+              <a:buNone/>
+            </a:pPr>
+            <a:r>
+              <a:rPr lang="en-US" sz="2600" b="0" i="1" dirty="0">
+                <a:solidFill>
+                  <a:srgbClr val="5C4826"/>
+                </a:solidFill>
+              </a:rPr>
+              <a:t>lim</a:t>
+            </a:r>
+            <a:r>
+              <a:rPr lang="en-US" sz="1500" b="0" i="1" baseline="-25000" dirty="0">
+                <a:solidFill>
+                  <a:srgbClr val="5C4826"/>
+                </a:solidFill>
+              </a:rPr>
+              <a:t xml:space="preserve">M → perfect reasoner</a:t>
+            </a:r>
+            <a:r>
+              <a:rPr lang="en-US" sz="2600" b="0" i="1" dirty="0">
+                <a:solidFill>
+                  <a:srgbClr val="5C4826"/>
+                </a:solidFill>
+              </a:rPr>
+              <a:t xml:space="preserve">  p</a:t>
+            </a:r>
+            <a:r>
+              <a:rPr lang="en-US" sz="2600" b="0" i="1" baseline="-25000" dirty="0">
+                <a:solidFill>
+                  <a:srgbClr val="5C4826"/>
+                </a:solidFill>
+              </a:rPr>
+              <a:t>R</a:t>
+            </a:r>
+            <a:r>
+              <a:rPr lang="en-US" sz="2600" b="0" i="1" dirty="0">
+                <a:solidFill>
+                  <a:srgbClr val="5C4826"/>
+                </a:solidFill>
+              </a:rPr>
+              <a:t xml:space="preserve"> = P(E | R)</a:t>
+            </a:r>
+          </a:p>
+        </p:txBody>
+      </p:sp>
+      <p:sp>
+        <p:nvSpPr>
+          <p:cNvPr id="33" name="LimCap"/>
+          <p:cNvSpPr txBox="1"/>
+          <p:nvPr/>
+        </p:nvSpPr>
+        <p:spPr>
+          <a:xfrm>
+            <a:off x="3886200" y="5111750"/>
+            <a:ext cx="4983480" cy="457200"/>
+          </a:xfrm>
+          <a:prstGeom prst="rect">
+            <a:avLst/>
+          </a:prstGeom>
+          <a:noFill/>
+          <a:ln>
+            <a:noFill/>
+          </a:ln>
+        </p:spPr>
+        <p:txBody>
+          <a:bodyPr wrap="square" lIns="0" tIns="0" rIns="0" bIns="0" anchor="t"/>
+          <a:lstStyle/>
+          <a:p>
+            <a:pPr algn="l">
+              <a:spcAft>
+                <a:spcPts val="0"/>
+              </a:spcAft>
+              <a:buNone/>
+            </a:pPr>
+            <a:r>
+              <a:rPr lang="en-US" sz="1400" b="0" dirty="0">
+                <a:solidFill>
+                  <a:srgbClr val="555960"/>
+                </a:solidFill>
+              </a:rPr>
+              <a:t>Even perfect interpretation and realization remain bounded by what was encoded.</a:t>
             </a:r>
           </a:p>
         </p:txBody>
@@ -16579,6 +16380,194 @@
   <p:clrMapOvr>
     <a:masterClrMapping/>
   </p:clrMapOvr>
+  <p:timing>
+    <p:tnLst>
+      <p:par>
+        <p:cTn id="1" dur="indefinite" restart="never" nodeType="tmRoot">
+          <p:childTnLst>
+            <p:seq concurrent="1" nextAc="seek">
+              <p:cTn id="2" dur="indefinite" nodeType="mainSeq">
+                <p:childTnLst>
+                  <p:par>
+                    <p:cTn id="3" fill="hold">
+                      <p:stCondLst>
+                        <p:cond delay="indefinite"/>
+                      </p:stCondLst>
+                      <p:childTnLst>
+                        <p:par>
+                          <p:cTn id="4" fill="hold">
+                            <p:stCondLst>
+                              <p:cond delay="0"/>
+                            </p:stCondLst>
+                            <p:childTnLst>
+                              <p:par>
+                                <p:cTn id="5" presetID="10" presetClass="entr" presetSubtype="0" fill="hold" nodeType="clickEffect">
+                                  <p:stCondLst>
+                                    <p:cond delay="0"/>
+                                  </p:stCondLst>
+                                  <p:childTnLst>
+                                    <p:set>
+                                      <p:cBhvr>
+                                        <p:cTn id="6" dur="1" fill="hold">
+                                          <p:stCondLst>
+                                            <p:cond delay="0"/>
+                                          </p:stCondLst>
+                                        </p:cTn>
+                                        <p:tgtEl>
+                                          <p:spTgt spid="30"/>
+                                        </p:tgtEl>
+                                        <p:attrNameLst>
+                                          <p:attrName>style.visibility</p:attrName>
+                                        </p:attrNameLst>
+                                      </p:cBhvr>
+                                      <p:to>
+                                        <p:strVal val="visible"/>
+                                      </p:to>
+                                    </p:set>
+                                    <p:animEffect transition="in" filter="fade">
+                                      <p:cBhvr>
+                                        <p:cTn id="7" dur="500"/>
+                                        <p:tgtEl>
+                                          <p:spTgt spid="30"/>
+                                        </p:tgtEl>
+                                      </p:cBhvr>
+                                    </p:animEffect>
+                                  </p:childTnLst>
+                                </p:cTn>
+                              </p:par>
+                              <p:par>
+                                <p:cTn id="8" presetID="10" presetClass="entr" presetSubtype="0" fill="hold" nodeType="withEffect">
+                                  <p:stCondLst>
+                                    <p:cond delay="0"/>
+                                  </p:stCondLst>
+                                  <p:childTnLst>
+                                    <p:set>
+                                      <p:cBhvr>
+                                        <p:cTn id="9" dur="1" fill="hold">
+                                          <p:stCondLst>
+                                            <p:cond delay="0"/>
+                                          </p:stCondLst>
+                                        </p:cTn>
+                                        <p:tgtEl>
+                                          <p:spTgt spid="31"/>
+                                        </p:tgtEl>
+                                        <p:attrNameLst>
+                                          <p:attrName>style.visibility</p:attrName>
+                                        </p:attrNameLst>
+                                      </p:cBhvr>
+                                      <p:to>
+                                        <p:strVal val="visible"/>
+                                      </p:to>
+                                    </p:set>
+                                    <p:animEffect transition="in" filter="fade">
+                                      <p:cBhvr>
+                                        <p:cTn id="10" dur="500"/>
+                                        <p:tgtEl>
+                                          <p:spTgt spid="31"/>
+                                        </p:tgtEl>
+                                      </p:cBhvr>
+                                    </p:animEffect>
+                                  </p:childTnLst>
+                                </p:cTn>
+                              </p:par>
+                              <p:par>
+                                <p:cTn id="11" presetID="10" presetClass="entr" presetSubtype="0" fill="hold" nodeType="withEffect">
+                                  <p:stCondLst>
+                                    <p:cond delay="0"/>
+                                  </p:stCondLst>
+                                  <p:childTnLst>
+                                    <p:set>
+                                      <p:cBhvr>
+                                        <p:cTn id="12" dur="1" fill="hold">
+                                          <p:stCondLst>
+                                            <p:cond delay="0"/>
+                                          </p:stCondLst>
+                                        </p:cTn>
+                                        <p:tgtEl>
+                                          <p:spTgt spid="32"/>
+                                        </p:tgtEl>
+                                        <p:attrNameLst>
+                                          <p:attrName>style.visibility</p:attrName>
+                                        </p:attrNameLst>
+                                      </p:cBhvr>
+                                      <p:to>
+                                        <p:strVal val="visible"/>
+                                      </p:to>
+                                    </p:set>
+                                    <p:animEffect transition="in" filter="fade">
+                                      <p:cBhvr>
+                                        <p:cTn id="13" dur="500"/>
+                                        <p:tgtEl>
+                                          <p:spTgt spid="32"/>
+                                        </p:tgtEl>
+                                      </p:cBhvr>
+                                    </p:animEffect>
+                                  </p:childTnLst>
+                                </p:cTn>
+                              </p:par>
+                              <p:par>
+                                <p:cTn id="14" presetID="10" presetClass="entr" presetSubtype="0" fill="hold" nodeType="withEffect">
+                                  <p:stCondLst>
+                                    <p:cond delay="0"/>
+                                  </p:stCondLst>
+                                  <p:childTnLst>
+                                    <p:set>
+                                      <p:cBhvr>
+                                        <p:cTn id="15" dur="1" fill="hold">
+                                          <p:stCondLst>
+                                            <p:cond delay="0"/>
+                                          </p:stCondLst>
+                                        </p:cTn>
+                                        <p:tgtEl>
+                                          <p:spTgt spid="33"/>
+                                        </p:tgtEl>
+                                        <p:attrNameLst>
+                                          <p:attrName>style.visibility</p:attrName>
+                                        </p:attrNameLst>
+                                      </p:cBhvr>
+                                      <p:to>
+                                        <p:strVal val="visible"/>
+                                      </p:to>
+                                    </p:set>
+                                    <p:animEffect transition="in" filter="fade">
+                                      <p:cBhvr>
+                                        <p:cTn id="16" dur="500"/>
+                                        <p:tgtEl>
+                                          <p:spTgt spid="33"/>
+                                        </p:tgtEl>
+                                      </p:cBhvr>
+                                    </p:animEffect>
+                                  </p:childTnLst>
+                                </p:cTn>
+                              </p:par>
+                            </p:childTnLst>
+                          </p:cTn>
+                        </p:par>
+                      </p:childTnLst>
+                    </p:cTn>
+                  </p:par>
+                </p:childTnLst>
+              </p:cTn>
+              <p:prevCondLst>
+                <p:cond evt="onPrev" delay="0">
+                  <p:tgtEl>
+                    <p:sldTgt/>
+                  </p:tgtEl>
+                </p:cond>
+              </p:prevCondLst>
+              <p:nextCondLst>
+                <p:cond evt="onNext" delay="0">
+                  <p:tgtEl>
+                    <p:sldTgt/>
+                  </p:tgtEl>
+                </p:cond>
+              </p:nextCondLst>
+            </p:seq>
+          </p:childTnLst>
+        </p:cTn>
+      </p:par>
+    </p:tnLst>
+  </p:timing>
 </p:sld>
 </file>
 

--- a/course/lectures/act-2-delegation-and-control/02-modeling/2-2-Modeling-1-Purposeful-Reduction.pptx
+++ b/course/lectures/act-2-delegation-and-control/02-modeling/2-2-Modeling-1-Purposeful-Reduction.pptx
@@ -15330,7 +15330,7 @@
         <p:spPr>
           <a:xfrm>
             <a:off x="4663440" y="3566160"/>
-            <a:ext cx="1097280" cy="0"/>
+            <a:ext cx="1005840" cy="0"/>
           </a:xfrm>
           <a:prstGeom prst="straightConnector1">
             <a:avLst/>

--- a/course/lectures/act-2-delegation-and-control/02-modeling/2-2-Modeling-1-Purposeful-Reduction.pptx
+++ b/course/lectures/act-2-delegation-and-control/02-modeling/2-2-Modeling-1-Purposeful-Reduction.pptx
@@ -1344,7 +1344,13 @@
           <a:p>
             <a:r>
               <a:rPr dirty="0"/>
-              <a:t>THE REVEAL. The limit case makes the asymmetry exact: for a fixed representation R, as M approaches a perfect reasoner and the interpretation and realization factors approach one, p_R goes to P(E | R). Every symbol is already known — T, M, R and H from the production equation, E, I and L from the chain decomposition, obligation and scaffolding and degrees of freedom from the argument just made. That is why it was held back until here.</a:t>
+              <a:t>THE REVEAL, in three beats. Beat 1: the chain from “Open the box”, unchanged, with the encoding factor set in bold. Beat 2: a perfect reasoner drives interpretation and realization to one. Beat 3: what is left is the limit — for a fixed representation R, p_R goes to P(E | R).</a:t>
+            </a:r>
+          </a:p>
+          <a:p>
+            <a:r>
+              <a:rPr dirty="0"/>
+              <a:t>Every symbol is already known: T, M, R and H from the production equation, E, I and L from the chain decomposition, obligation and scaffolding and degrees of freedom from the argument just made. That is why the limit was held back until here. Read it off the chain rather than announcing it — the room should watch the last two factors go to one.</a:t>
             </a:r>
           </a:p>
           <a:p>
@@ -1356,7 +1362,7 @@
           <a:p>
             <a:r>
               <a:rPr dirty="0"/>
-              <a:t>The band is the figure from “Open the box” and it is deliberately BARE here — no red MODELING CHANGES THE REPRESENTATION overlay. This slide argues that even a perfect reasoner stays bounded by P(E | R); the Modeling-lever annotation would fight that claim. Point at the FIRST term as you read the limit.</a:t>
+              <a:t>The opening band figure is deliberately NOT reprised here. At the size this slide can spare, its internal type projects at four to seven pixels, and its red MODELING CHANGES THE REPRESENTATION overlay would in any case fight a slide that argues a perfect reasoner stays bounded by P(E | R). The chain line carries the same recall at a size the back row can read.</a:t>
             </a:r>
           </a:p>
           <a:p>
@@ -14970,8 +14976,8 @@
         </p:nvSpPr>
         <p:spPr>
           <a:xfrm>
-            <a:off x="1005840" y="2103120"/>
-            <a:ext cx="4023360" cy="2377440"/>
+            <a:off x="777240" y="1943100"/>
+            <a:ext cx="4480560" cy="2697480"/>
           </a:xfrm>
           <a:prstGeom prst="rect">
             <a:avLst/>
@@ -15002,8 +15008,8 @@
         </p:nvSpPr>
         <p:spPr>
           <a:xfrm>
-            <a:off x="1508760" y="2560320"/>
-            <a:ext cx="3017520" cy="1005840"/>
+            <a:off x="1737360" y="2743200"/>
+            <a:ext cx="2606040" cy="1005840"/>
           </a:xfrm>
           <a:prstGeom prst="rect">
             <a:avLst/>
@@ -15031,7 +15037,7 @@
                   <a:srgbClr val="FFFFFF"/>
                 </a:solidFill>
               </a:rPr>
-              <a:t>OBLIGATION</a:t>
+              <a:t xml:space="preserve">OBLIGATION</a:t>
             </a:r>
           </a:p>
           <a:p>
@@ -15047,7 +15053,7 @@
                   <a:srgbClr val="FFFFFF"/>
                 </a:solidFill>
               </a:rPr>
-              <a:t>what must be true</a:t>
+              <a:t xml:space="preserve">what must be true</a:t>
             </a:r>
           </a:p>
         </p:txBody>
@@ -15060,8 +15066,8 @@
         </p:nvSpPr>
         <p:spPr>
           <a:xfrm>
-            <a:off x="1005840" y="3794760"/>
-            <a:ext cx="4023360" cy="329184"/>
+            <a:off x="1280160" y="3886200"/>
+            <a:ext cx="3520440" cy="329184"/>
           </a:xfrm>
           <a:prstGeom prst="rect">
             <a:avLst/>
@@ -15087,7 +15093,7 @@
                   <a:srgbClr val="5C4826"/>
                 </a:solidFill>
               </a:rPr>
-              <a:t>SCAFFOLDING — what this agent needs</a:t>
+              <a:t xml:space="preserve">SCAFFOLDING — what this agent needs</a:t>
             </a:r>
           </a:p>
         </p:txBody>
@@ -15100,8 +15106,8 @@
         </p:nvSpPr>
         <p:spPr>
           <a:xfrm>
-            <a:off x="502920" y="4526280"/>
-            <a:ext cx="5029200" cy="274320"/>
+            <a:off x="502920" y="4640580"/>
+            <a:ext cx="5029200" cy="205740"/>
           </a:xfrm>
           <a:prstGeom prst="rect">
             <a:avLst/>
@@ -15112,7 +15118,7 @@
           </a:ln>
         </p:spPr>
         <p:txBody>
-          <a:bodyPr wrap="square" lIns="0" tIns="0" rIns="0" bIns="0" anchor="t"/>
+          <a:bodyPr wrap="square" lIns="0" tIns="0" rIns="0" bIns="0" anchor="ctr"/>
           <a:lstStyle/>
           <a:p>
             <a:pPr algn="ctr">
@@ -15122,12 +15128,12 @@
               <a:buNone/>
             </a:pPr>
             <a:r>
-              <a:rPr lang="en-US" sz="1400" b="0" dirty="0">
+              <a:rPr lang="en-US" sz="1300" b="0" dirty="0">
                 <a:solidFill>
                   <a:srgbClr val="555960"/>
                 </a:solidFill>
               </a:rPr>
-              <a:t>DEGREES OF FREEDOM — the rest is the agent’s</a:t>
+              <a:t xml:space="preserve">DEGREES OF FREEDOM — the rest is the agent’s</a:t>
             </a:r>
           </a:p>
         </p:txBody>
@@ -15140,7 +15146,7 @@
         </p:nvSpPr>
         <p:spPr>
           <a:xfrm>
-            <a:off x="5806440" y="1965960"/>
+            <a:off x="5806440" y="1897380"/>
             <a:ext cx="3017520" cy="548640"/>
           </a:xfrm>
           <a:prstGeom prst="rect">
@@ -15162,12 +15168,12 @@
               <a:buNone/>
             </a:pPr>
             <a:r>
-              <a:rPr lang="en-US" sz="1600" b="1" dirty="0">
+              <a:rPr lang="en-US" sz="1500" b="1" dirty="0">
                 <a:solidFill>
                   <a:srgbClr val="8E6F3E"/>
                 </a:solidFill>
               </a:rPr>
-              <a:t>specification boundary</a:t>
+              <a:t xml:space="preserve">specification boundary</a:t>
             </a:r>
           </a:p>
           <a:p>
@@ -15183,7 +15189,7 @@
                   <a:srgbClr val="555960"/>
                 </a:solidFill>
               </a:rPr>
-              <a:t>the edge of what we write down</a:t>
+              <a:t xml:space="preserve">the edge of what we write down</a:t>
             </a:r>
           </a:p>
         </p:txBody>
@@ -15196,8 +15202,8 @@
         </p:nvCxnSpPr>
         <p:spPr>
           <a:xfrm>
-            <a:off x="5074920" y="2240280"/>
-            <a:ext cx="685800" cy="0"/>
+            <a:off x="5303520" y="2171700"/>
+            <a:ext cx="457200" cy="0"/>
           </a:xfrm>
           <a:prstGeom prst="straightConnector1">
             <a:avLst/>
@@ -15218,7 +15224,7 @@
         </p:nvSpPr>
         <p:spPr>
           <a:xfrm>
-            <a:off x="5806440" y="2743200"/>
+            <a:off x="5806440" y="2651760"/>
             <a:ext cx="3017520" cy="548640"/>
           </a:xfrm>
           <a:prstGeom prst="rect">
@@ -15240,12 +15246,12 @@
               <a:buNone/>
             </a:pPr>
             <a:r>
-              <a:rPr lang="en-US" sz="1600" b="1" dirty="0">
+              <a:rPr lang="en-US" sz="1500" b="1" dirty="0">
                 <a:solidFill>
                   <a:srgbClr val="5C4826"/>
                 </a:solidFill>
               </a:rPr>
-              <a:t>obligation boundary</a:t>
+              <a:t xml:space="preserve">obligation boundary</a:t>
             </a:r>
           </a:p>
           <a:p>
@@ -15261,7 +15267,7 @@
                   <a:srgbClr val="555960"/>
                 </a:solidFill>
               </a:rPr>
-              <a:t>fixed by what must be true</a:t>
+              <a:t xml:space="preserve">fixed by what must be true</a:t>
             </a:r>
           </a:p>
         </p:txBody>
@@ -15274,8 +15280,8 @@
         </p:nvCxnSpPr>
         <p:spPr>
           <a:xfrm>
-            <a:off x="4572000" y="3017520"/>
-            <a:ext cx="1188720" cy="0"/>
+            <a:off x="4389120" y="2926080"/>
+            <a:ext cx="1371600" cy="0"/>
           </a:xfrm>
           <a:prstGeom prst="straightConnector1">
             <a:avLst/>
@@ -15296,8 +15302,8 @@
         </p:nvSpPr>
         <p:spPr>
           <a:xfrm>
-            <a:off x="1371600" y="2331720"/>
-            <a:ext cx="3291840" cy="1965960"/>
+            <a:off x="1280160" y="2286000"/>
+            <a:ext cx="3520440" cy="2011680"/>
           </a:xfrm>
           <a:prstGeom prst="rect">
             <a:avLst/>
@@ -15329,8 +15335,8 @@
         </p:nvCxnSpPr>
         <p:spPr>
           <a:xfrm>
-            <a:off x="4663440" y="3566160"/>
-            <a:ext cx="1005840" cy="0"/>
+            <a:off x="4846320" y="3520440"/>
+            <a:ext cx="822960" cy="0"/>
           </a:xfrm>
           <a:prstGeom prst="straightConnector1">
             <a:avLst/>
@@ -15351,7 +15357,7 @@
         </p:nvSpPr>
         <p:spPr>
           <a:xfrm>
-            <a:off x="5806440" y="3429000"/>
+            <a:off x="5806440" y="3383280"/>
             <a:ext cx="3017520" cy="868680"/>
           </a:xfrm>
           <a:prstGeom prst="rect">
@@ -15375,10 +15381,10 @@
             <a:r>
               <a:rPr lang="en-US" sz="1500" b="1" dirty="0">
                 <a:solidFill>
-                  <a:srgbClr val="5C4826"/>
-                </a:solidFill>
-              </a:rPr>
-              <a:t>a more capable agent</a:t>
+                  <a:srgbClr val="8E6F3E"/>
+                </a:solidFill>
+              </a:rPr>
+              <a:t xml:space="preserve">specification boundary</a:t>
             </a:r>
           </a:p>
           <a:p>
@@ -15394,7 +15400,7 @@
                   <a:srgbClr val="555960"/>
                 </a:solidFill>
               </a:rPr>
-              <a:t>needs less scaffolding, so this boundary moves in</a:t>
+              <a:t xml:space="preserve">for a more capable agent, it moves in</a:t>
             </a:r>
           </a:p>
         </p:txBody>
@@ -15979,7 +15985,7 @@
         <p:spPr>
           <a:xfrm>
             <a:off x="1737360" y="2240280"/>
-            <a:ext cx="0" cy="411480"/>
+            <a:ext cx="0" cy="320040"/>
           </a:xfrm>
           <a:prstGeom prst="straightConnector1">
             <a:avLst/>
@@ -16001,7 +16007,7 @@
         </p:nvSpPr>
         <p:spPr>
           <a:xfrm>
-            <a:off x="845820" y="2697480"/>
+            <a:off x="845820" y="2606040"/>
             <a:ext cx="1783080" cy="402336"/>
           </a:xfrm>
           <a:prstGeom prst="rect">
@@ -16045,7 +16051,7 @@
         </p:nvSpPr>
         <p:spPr>
           <a:xfrm>
-            <a:off x="685800" y="3154680"/>
+            <a:off x="685800" y="3063240"/>
             <a:ext cx="2103120" cy="274320"/>
           </a:xfrm>
           <a:prstGeom prst="rect">
@@ -16085,8 +16091,8 @@
         </p:nvSpPr>
         <p:spPr>
           <a:xfrm>
-            <a:off x="6126480" y="2423160"/>
-            <a:ext cx="2743200" cy="548640"/>
+            <a:off x="6172200" y="2514600"/>
+            <a:ext cx="2697480" cy="548640"/>
           </a:xfrm>
           <a:prstGeom prst="rect">
             <a:avLst/>
@@ -16125,7 +16131,7 @@
         </p:nvSpPr>
         <p:spPr>
           <a:xfrm>
-            <a:off x="274320" y="3566160"/>
+            <a:off x="274320" y="3474720"/>
             <a:ext cx="8595360" cy="365760"/>
           </a:xfrm>
           <a:prstGeom prst="rect">
@@ -16157,40 +16163,16 @@
           </a:p>
         </p:txBody>
       </p:sp>
-      <p:pic>
-        <p:nvPicPr>
-          <p:cNvPr id="30" name="BandPic" descr="Small reprise of the production process band: Engineering intent to Encoded property to Fabricator to Realization, with the three probability terms P(E | R), P(I | E, R) and P(L | I, E, R) bracketed beneath."/>
-          <p:cNvPicPr>
-            <a:picLocks noChangeAspect="1"/>
-          </p:cNvPicPr>
-          <p:nvPr/>
-        </p:nvPicPr>
-        <p:blipFill>
-          <a:blip r:embed="rId3"/>
-          <a:stretch>
-            <a:fillRect/>
-          </a:stretch>
-        </p:blipFill>
-        <p:spPr>
-          <a:xfrm>
-            <a:off x="365760" y="4200000"/>
-            <a:ext cx="3200400" cy="1185206"/>
-          </a:xfrm>
-          <a:prstGeom prst="rect">
-            <a:avLst/>
-          </a:prstGeom>
-        </p:spPr>
-      </p:pic>
-      <p:sp>
-        <p:nvSpPr>
-          <p:cNvPr id="31" name="LimK"/>
+      <p:sp>
+        <p:nvSpPr>
+          <p:cNvPr id="30" name="ChEq"/>
           <p:cNvSpPr txBox="1"/>
           <p:nvPr/>
         </p:nvSpPr>
         <p:spPr>
           <a:xfrm>
-            <a:off x="3886200" y="4114800"/>
-            <a:ext cx="4983480" cy="274320"/>
+            <a:off x="274320" y="4023360"/>
+            <a:ext cx="8595360" cy="365760"/>
           </a:xfrm>
           <a:prstGeom prst="rect">
             <a:avLst/>
@@ -16201,36 +16183,68 @@
           </a:ln>
         </p:spPr>
         <p:txBody>
-          <a:bodyPr wrap="square" lIns="0" tIns="0" rIns="0" bIns="0" anchor="t"/>
-          <a:lstStyle/>
-          <a:p>
-            <a:pPr algn="l">
+          <a:bodyPr wrap="square" lIns="0" tIns="0" rIns="0" bIns="0" anchor="ctr"/>
+          <a:lstStyle/>
+          <a:p>
+            <a:pPr algn="ctr">
               <a:spcAft>
                 <a:spcPts val="0"/>
               </a:spcAft>
               <a:buNone/>
             </a:pPr>
             <a:r>
-              <a:rPr lang="en-US" sz="1400" b="1" dirty="0">
-                <a:solidFill>
-                  <a:srgbClr val="8E6F3E"/>
-                </a:solidFill>
-              </a:rPr>
-              <a:t>THE LIMIT CASE</a:t>
-            </a:r>
-          </a:p>
-        </p:txBody>
-      </p:sp>
-      <p:sp>
-        <p:nvSpPr>
-          <p:cNvPr id="32" name="LimEq"/>
+              <a:rPr lang="en-US" sz="1600" b="0" i="1" dirty="0">
+                <a:solidFill>
+                  <a:srgbClr val="5C4826"/>
+                </a:solidFill>
+              </a:rPr>
+              <a:t xml:space="preserve">p</a:t>
+            </a:r>
+            <a:r>
+              <a:rPr lang="en-US" sz="1600" b="0" i="1" baseline="-25000" dirty="0">
+                <a:solidFill>
+                  <a:srgbClr val="5C4826"/>
+                </a:solidFill>
+              </a:rPr>
+              <a:t xml:space="preserve">R</a:t>
+            </a:r>
+            <a:r>
+              <a:rPr lang="en-US" sz="1600" b="0" i="1" dirty="0">
+                <a:solidFill>
+                  <a:srgbClr val="5C4826"/>
+                </a:solidFill>
+              </a:rPr>
+              <a:t xml:space="preserve"> = </a:t>
+            </a:r>
+            <a:r>
+              <a:rPr lang="en-US" sz="1600" b="1" i="1" dirty="0">
+                <a:solidFill>
+                  <a:srgbClr val="5C4826"/>
+                </a:solidFill>
+              </a:rPr>
+              <a:t xml:space="preserve">P(E | R)</a:t>
+            </a:r>
+            <a:r>
+              <a:rPr lang="en-US" sz="1600" b="0" i="1" dirty="0">
+                <a:solidFill>
+                  <a:srgbClr val="555960"/>
+                </a:solidFill>
+              </a:rPr>
+              <a:t xml:space="preserve"> · P(I | E, R) · P(L | I, E, R)</a:t>
+            </a:r>
+          </a:p>
+        </p:txBody>
+      </p:sp>
+      <p:sp>
+        <p:nvSpPr>
+          <p:cNvPr id="31" name="ChCap"/>
           <p:cNvSpPr txBox="1"/>
           <p:nvPr/>
         </p:nvSpPr>
         <p:spPr>
           <a:xfrm>
-            <a:off x="3886200" y="4457700"/>
-            <a:ext cx="4983480" cy="594360"/>
+            <a:off x="274320" y="4389120"/>
+            <a:ext cx="8595360" cy="274320"/>
           </a:xfrm>
           <a:prstGeom prst="rect">
             <a:avLst/>
@@ -16241,68 +16255,36 @@
           </a:ln>
         </p:spPr>
         <p:txBody>
-          <a:bodyPr wrap="square" lIns="0" tIns="0" rIns="0" bIns="0" anchor="ctr"/>
-          <a:lstStyle/>
-          <a:p>
-            <a:pPr algn="l">
+          <a:bodyPr wrap="square" lIns="0" tIns="0" rIns="0" bIns="0" anchor="t"/>
+          <a:lstStyle/>
+          <a:p>
+            <a:pPr algn="ctr">
               <a:spcAft>
                 <a:spcPts val="0"/>
               </a:spcAft>
               <a:buNone/>
             </a:pPr>
             <a:r>
-              <a:rPr lang="en-US" sz="2600" b="0" i="1" dirty="0">
-                <a:solidFill>
-                  <a:srgbClr val="5C4826"/>
-                </a:solidFill>
-              </a:rPr>
-              <a:t>lim</a:t>
-            </a:r>
-            <a:r>
-              <a:rPr lang="en-US" sz="1500" b="0" i="1" baseline="-25000" dirty="0">
-                <a:solidFill>
-                  <a:srgbClr val="5C4826"/>
-                </a:solidFill>
-              </a:rPr>
-              <a:t xml:space="preserve">M → perfect reasoner</a:t>
-            </a:r>
-            <a:r>
-              <a:rPr lang="en-US" sz="2600" b="0" i="1" dirty="0">
-                <a:solidFill>
-                  <a:srgbClr val="5C4826"/>
-                </a:solidFill>
-              </a:rPr>
-              <a:t xml:space="preserve">  p</a:t>
-            </a:r>
-            <a:r>
-              <a:rPr lang="en-US" sz="2600" b="0" i="1" baseline="-25000" dirty="0">
-                <a:solidFill>
-                  <a:srgbClr val="5C4826"/>
-                </a:solidFill>
-              </a:rPr>
-              <a:t>R</a:t>
-            </a:r>
-            <a:r>
-              <a:rPr lang="en-US" sz="2600" b="0" i="1" dirty="0">
-                <a:solidFill>
-                  <a:srgbClr val="5C4826"/>
-                </a:solidFill>
-              </a:rPr>
-              <a:t xml:space="preserve"> = P(E | R)</a:t>
-            </a:r>
-          </a:p>
-        </p:txBody>
-      </p:sp>
-      <p:sp>
-        <p:nvSpPr>
-          <p:cNvPr id="33" name="LimCap"/>
+              <a:rPr lang="en-US" sz="1400" b="0" i="1" dirty="0">
+                <a:solidFill>
+                  <a:srgbClr val="555960"/>
+                </a:solidFill>
+              </a:rPr>
+              <a:t xml:space="preserve">a perfect reasoner drives the last two factors to one</a:t>
+            </a:r>
+          </a:p>
+        </p:txBody>
+      </p:sp>
+      <p:sp>
+        <p:nvSpPr>
+          <p:cNvPr id="32" name="LimEq"/>
           <p:cNvSpPr txBox="1"/>
           <p:nvPr/>
         </p:nvSpPr>
         <p:spPr>
           <a:xfrm>
-            <a:off x="3886200" y="5111750"/>
-            <a:ext cx="4983480" cy="457200"/>
+            <a:off x="274320" y="4800600"/>
+            <a:ext cx="8595360" cy="685800"/>
           </a:xfrm>
           <a:prstGeom prst="rect">
             <a:avLst/>
@@ -16313,22 +16295,54 @@
           </a:ln>
         </p:spPr>
         <p:txBody>
-          <a:bodyPr wrap="square" lIns="0" tIns="0" rIns="0" bIns="0" anchor="t"/>
-          <a:lstStyle/>
-          <a:p>
-            <a:pPr algn="l">
+          <a:bodyPr wrap="square" lIns="0" tIns="0" rIns="0" bIns="0" anchor="ctr"/>
+          <a:lstStyle/>
+          <a:p>
+            <a:pPr algn="ctr">
               <a:spcAft>
                 <a:spcPts val="0"/>
               </a:spcAft>
               <a:buNone/>
             </a:pPr>
             <a:r>
-              <a:rPr lang="en-US" sz="1400" b="0" dirty="0">
-                <a:solidFill>
-                  <a:srgbClr val="555960"/>
-                </a:solidFill>
-              </a:rPr>
-              <a:t>Even perfect interpretation and realization remain bounded by what was encoded.</a:t>
+              <a:rPr lang="en-US" sz="3000" b="0" i="1" dirty="0">
+                <a:solidFill>
+                  <a:srgbClr val="5C4826"/>
+                </a:solidFill>
+              </a:rPr>
+              <a:t xml:space="preserve">lim</a:t>
+            </a:r>
+            <a:r>
+              <a:rPr lang="en-US" sz="3000" b="0" i="1" baseline="-25000" dirty="0">
+                <a:solidFill>
+                  <a:srgbClr val="5C4826"/>
+                </a:solidFill>
+              </a:rPr>
+              <a:t xml:space="preserve">M → perfect reasoner</a:t>
+            </a:r>
+            <a:r>
+              <a:rPr lang="en-US" sz="3000" b="0" i="1" dirty="0">
+                <a:solidFill>
+                  <a:srgbClr val="5C4826"/>
+                </a:solidFill>
+              </a:rPr>
+              <a:t xml:space="preserve">  p</a:t>
+            </a:r>
+            <a:r>
+              <a:rPr lang="en-US" sz="3000" b="0" i="1" baseline="-25000" dirty="0">
+                <a:solidFill>
+                  <a:srgbClr val="5C4826"/>
+                </a:solidFill>
+              </a:rPr>
+              <a:t xml:space="preserve">R</a:t>
+            </a:r>
+            <a:r>
+              <a:rPr lang="en-US" sz="3000" b="0" i="1" dirty="0">
+                <a:solidFill>
+                  <a:srgbClr val="5C4826"/>
+                </a:solidFill>
+              </a:rPr>
+              <a:t xml:space="preserve"> = P(E | R)</a:t>
             </a:r>
           </a:p>
         </p:txBody>
@@ -16499,41 +16513,6 @@
                                         <p:cTn id="13" dur="500"/>
                                         <p:tgtEl>
                                           <p:spTgt spid="32"/>
-                                        </p:tgtEl>
-                                      </p:cBhvr>
-                                    </p:animEffect>
-                                  </p:childTnLst>
-                                </p:cTn>
-                              </p:par>
-                              <p:par>
-                                <p:cTn id="14" presetID="10" presetClass="entr" presetSubtype="0" fill="hold" nodeType="withEffect">
-                                  <p:stCondLst>
-                                    <p:cond delay="0"/>
-                                  </p:stCondLst>
-                                  <p:childTnLst>
-                                    <p:set>
-                                      <p:cBhvr>
-                                        <p:cTn id="15" dur="1" fill="hold">
-                                          <p:stCondLst>
-                                            <p:cond delay="0"/>
-                                          </p:stCondLst>
-                                        </p:cTn>
-                                        <p:tgtEl>
-                                          <p:spTgt spid="33"/>
-                                        </p:tgtEl>
-                                        <p:attrNameLst>
-                                          <p:attrName>style.visibility</p:attrName>
-                                        </p:attrNameLst>
-                                      </p:cBhvr>
-                                      <p:to>
-                                        <p:strVal val="visible"/>
-                                      </p:to>
-                                    </p:set>
-                                    <p:animEffect transition="in" filter="fade">
-                                      <p:cBhvr>
-                                        <p:cTn id="16" dur="500"/>
-                                        <p:tgtEl>
-                                          <p:spTgt spid="33"/>
                                         </p:tgtEl>
                                       </p:cBhvr>
                                     </p:animEffect>

--- a/course/lectures/act-2-delegation-and-control/02-modeling/2-2-Modeling-1-Purposeful-Reduction.pptx
+++ b/course/lectures/act-2-delegation-and-control/02-modeling/2-2-Modeling-1-Purposeful-Reduction.pptx
@@ -9,6 +9,7 @@
   </p:notesMasterIdLst>
   <p:sldIdLst>
     <p:sldId id="256" r:id="rId41"/>
+    <p:sldId id="289" r:id="rId74"/>
     <p:sldId id="257" r:id="rId42"/>
     <p:sldId id="258" r:id="rId43"/>
     <p:sldId id="259" r:id="rId44"/>
@@ -30,12 +31,12 @@
     <p:sldId id="275" r:id="rId60"/>
     <p:sldId id="280" r:id="rId65"/>
     <p:sldId id="282" r:id="rId67"/>
-    <p:sldId id="283" r:id="rId68"/>
-    <p:sldId id="284" r:id="rId69"/>
     <p:sldId id="276" r:id="rId61"/>
     <p:sldId id="277" r:id="rId62"/>
     <p:sldId id="278" r:id="rId63"/>
     <p:sldId id="279" r:id="rId64"/>
+    <p:sldId id="283" r:id="rId68"/>
+    <p:sldId id="284" r:id="rId69"/>
     <p:sldId id="285" r:id="rId70"/>
     <p:sldId id="286" r:id="rId71"/>
     <p:sldId id="287" r:id="rId72"/>
@@ -536,7 +537,7 @@
           <a:p>
             <a:r>
               <a:rPr dirty="0"/>
-              <a:t>Today’s spine is the production equation from the theory chapter. Delegation introduced that picture qualitatively; today we bring it back quantified and point at the one term Modeling acts on; Alignment will return to the same drawing from the other side. Open on it deliberately: the next two slides are the map for the whole of Act II, not a warm-up.</a:t>
+              <a:t>Today’s spine is the production equation from the theory chapter. Delegation introduced that picture qualitatively; today we bring it back quantified and point at the one term Modeling acts on; Alignment will return to the same drawing from the other side. Open on it deliberately: the next three slides are the map for the whole of Act II, not a warm-up.</a:t>
             </a:r>
           </a:p>
         </p:txBody>
@@ -943,7 +944,7 @@
           <a:p>
             <a:r>
               <a:rPr dirty="0"/>
-              <a:t>Closing hinge, spoken over the slide: we have judged what must remain. The next question is not whether we judged right — correspondence answers that, later — but how much of what must remain we are obliged to write down. That is the boundaries slide.</a:t>
+              <a:t>Closing hinge, spoken over the slide: we have judged what must remain. The next question is not whether we judged right — correspondence answers that, later — but how much of the answer we must tell the agent. That is the boundaries slide.</a:t>
             </a:r>
           </a:p>
         </p:txBody>
@@ -1061,7 +1062,7 @@
           <a:p>
             <a:r>
               <a:rPr dirty="0"/>
-              <a:t>Both are production cases from DocAble. The lease's omission was vindicated; entitlement's was refuted. A hypothetical can teach judgment; only production can grade it. (Plan §7 — this section break exists to make the method/evidence split visible.)</a:t>
+              <a:t>Both production cases come from the instructor's production system. The lease's omission was vindicated; the account quota's was refuted. A hypothetical can teach judgment; only production can grade it. (Plan §7 — this section break exists to make the method/evidence split visible.)</a:t>
             </a:r>
           </a:p>
         </p:txBody>
@@ -1108,19 +1109,19 @@
           <a:p>
             <a:r>
               <a:rPr dirty="0"/>
-              <a:t>The account object carried the entitlement; the reduction kept one scalar, credits_remaining. The implementation knew the account was unlimited, but the scalar had nowhere to keep the distinction: an unlimited user hit zero credits and was refused.</a:t>
+              <a:t>The account carried a quota; the reduction kept one scalar, credits_remaining. Unlimited and exhausted are two different states of that account, and a single integer has room for only one of them — both arrive at the model as 0.</a:t>
             </a:r>
           </a:p>
           <a:p>
             <a:r>
               <a:rPr dirty="0"/>
-              <a:t>Bottom-up said removable; the obligation said no. This is refutation — the omitted distinction actually mattered, and production said so.</a:t>
+              <a:t>Keep this off the user: the failure is not that somebody was refused, it is that the representation could not express a distinction the obligation required. Bottom-up said removable; the obligation said no. This is refutation — the omitted distinction actually mattered, and production said so.</a:t>
             </a:r>
           </a:p>
           <a:p>
             <a:r>
               <a:rPr dirty="0"/>
-              <a:t>Once a distinction is discarded, no downstream reasoning can recover it. That limit returns at the end of this section.</a:t>
+              <a:t>Once a distinction is discarded, no downstream reasoning can recover it. That is the limit you stated on “Capability cannot reduce what must be true” — here it is reaching production.</a:t>
             </a:r>
           </a:p>
         </p:txBody>
@@ -1344,13 +1345,7 @@
           <a:p>
             <a:r>
               <a:rPr dirty="0"/>
-              <a:t>THE REVEAL, in three beats. Beat 1: the chain from “Open the box”, unchanged, with the encoding factor set in bold. Beat 2: a perfect reasoner drives interpretation and realization to one. Beat 3: what is left is the limit — for a fixed representation R, p_R goes to P(E | R).</a:t>
-            </a:r>
-          </a:p>
-          <a:p>
-            <a:r>
-              <a:rPr dirty="0"/>
-              <a:t>Every symbol is already known: T, M, R and H from the production equation, E, I and L from the chain decomposition, obligation and scaffolding and degrees of freedom from the argument just made. That is why the limit was held back until here. Read it off the chain rather than announcing it — the room should watch the last two factors go to one.</a:t>
+              <a:t>THE REVEAL. The limit case makes the asymmetry exact: for a fixed representation R, as M approaches a perfect reasoner and the interpretation and realization factors approach one, p_R goes to P(E | R). Every symbol is already known — T, M, R and H from the production equation, E, I and L from the chain decomposition, obligation and scaffolding and degrees of freedom from the argument just made. That is why it was held back until here.</a:t>
             </a:r>
           </a:p>
           <a:p>
@@ -1362,7 +1357,7 @@
           <a:p>
             <a:r>
               <a:rPr dirty="0"/>
-              <a:t>The opening band figure is deliberately NOT reprised here. At the size this slide can spare, its internal type projects at four to seven pixels, and its red MODELING CHANGES THE REPRESENTATION overlay would in any case fight a slide that argues a perfect reasoner stays bounded by P(E | R). The chain line carries the same recall at a size the back row can read.</a:t>
+              <a:t>The band is the figure from “Open the box” and it is deliberately BARE here — no red MODELING CHANGES THE REPRESENTATION overlay. This slide argues that even a perfect reasoner stays bounded by P(E | R); the Modeling-lever annotation would fight that claim. Point at the FIRST term as you read the limit.</a:t>
             </a:r>
           </a:p>
           <a:p>
@@ -1415,7 +1410,7 @@
           <a:p>
             <a:r>
               <a:rPr dirty="0"/>
-              <a:t>Deck slide 27. ~10 minutes including debrief. Students re-enter the controller cold — that is the retention test.</a:t>
+              <a:t>~10 minutes including debrief. Students re-enter the controller cold — that is the retention test.</a:t>
             </a:r>
           </a:p>
           <a:p>
@@ -1480,7 +1475,7 @@
           <a:p>
             <a:r>
               <a:rPr dirty="0"/>
-              <a:t>Deck slide 28. ~2-3 minutes. Post-Reduce placement; also the natural re-entry point if Reduce ran long.</a:t>
+              <a:t>~2-3 minutes. Post-Reduce placement; also the natural re-entry point if Reduce ran long.</a:t>
             </a:r>
           </a:p>
           <a:p>
@@ -1775,7 +1770,7 @@
           <a:p>
             <a:r>
               <a:rPr dirty="0"/>
-              <a:t>Do not say “Modeling” yet. Naming the lever here spends the next slide’s move, which is to open the probability and point at the one term Modeling acts on. About 2.5 minutes including the naming exchange.</a:t>
+              <a:t>Modeling is named on the picture behind you, but do not yet say which term it acts on. Naming the lever here spends the next slide’s move, which is to open the probability and point at the one term Modeling acts on. About 2.5 minutes including the naming exchange.</a:t>
             </a:r>
           </a:p>
         </p:txBody>
@@ -2320,6 +2315,114 @@
       </p:sp>
     </p:spTree>
   </p:cSld>
+</p:notes>
+</file>
+
+<file path=ppt/notesSlides/notesSlide42.xml><?xml version="1.0" encoding="utf-8"?>
+<p:notes xmlns:a="http://schemas.openxmlformats.org/drawingml/2006/main" xmlns:r="http://schemas.openxmlformats.org/officeDocument/2006/relationships" xmlns:p="http://schemas.openxmlformats.org/presentationml/2006/main">
+  <p:cSld>
+    <p:spTree>
+      <p:nvGrpSpPr>
+        <p:cNvPr id="1" name=""/>
+        <p:cNvGrpSpPr/>
+        <p:nvPr/>
+      </p:nvGrpSpPr>
+      <p:grpSpPr>
+        <a:xfrm>
+          <a:off x="0" y="0"/>
+          <a:ext cx="0" cy="0"/>
+          <a:chOff x="0" y="0"/>
+          <a:chExt cx="0" cy="0"/>
+        </a:xfrm>
+      </p:grpSpPr>
+      <p:sp>
+        <p:nvSpPr>
+          <p:cNvPr id="2" name="Notes Placeholder 1"/>
+          <p:cNvSpPr>
+            <a:spLocks noGrp="1"/>
+          </p:cNvSpPr>
+          <p:nvPr>
+            <p:ph type="body" idx="1"/>
+          </p:nvPr>
+        </p:nvSpPr>
+        <p:spPr/>
+        <p:txBody>
+          <a:bodyPr/>
+          <a:lstStyle/>
+          <a:p>
+            <a:r>
+              <a:rPr dirty="0"/>
+              <a:t>1.5 minutes — We ended Delegation with this picture. The agent does not work alone; it works inside an engineered environment.</a:t>
+            </a:r>
+          </a:p>
+          <a:p/>
+          <a:p>
+            <a:r>
+              <a:rPr dirty="0"/>
+              <a:t>- This is the master picture for the rest of Act II, and here it is still entirely qualitative. We are the ones bringing it back and putting numbers on it, starting today.</a:t>
+            </a:r>
+          </a:p>
+          <a:p>
+            <a:r>
+              <a:rPr dirty="0"/>
+              <a:t>- The path first. A task enters, a reasoner works, an artifact comes out. Nothing on this row is new — read it back, do not re-teach it.</a:t>
+            </a:r>
+          </a:p>
+          <a:p>
+            <a:r>
+              <a:rPr dirty="0"/>
+              <a:t>- Click one. MODELS is the one station drawn with a heavy rim, and its arrow enters the path BEFORE the reasoner runs. Leave the claim open: the arrow lands before the reasoner, and why that should matter is the question this lecture answers. Do NOT say what the models "set" — you have not earned it yet.</a:t>
+            </a:r>
+          </a:p>
+          <a:p>
+            <a:r>
+              <a:rPr dirty="0"/>
+              <a:t>- Today we are going to open up the left-hand side. In particular, what does putting a model between engineering intent and the reasoner actually change?</a:t>
+            </a:r>
+          </a:p>
+          <a:p>
+            <a:r>
+              <a:rPr dirty="0"/>
+              <a:t>- Click two. ALIGNMENT is the only annotation whose arrow crosses the boundary of the environment. We will return to the blue Alignment boundary later. For now, leave it in the picture but do not explain it — the on-slide gloss "governs what may pass" is all it gets, and declining to open a door you just revealed is a stronger deferral than never drawing it.</a:t>
+            </a:r>
+          </a:p>
+          <a:p>
+            <a:r>
+              <a:rPr dirty="0"/>
+              <a:t>- Click three raises the question the rest of the lecture answers. Ask it, then leave it standing: what must a representation preserve for this task?</a:t>
+            </a:r>
+          </a:p>
+          <a:p>
+            <a:r>
+              <a:rPr dirty="0"/>
+              <a:t>- The colour code belongs to this PICTURE, not to the deck: red is Modeling's lever, blue is Alignment's, and it returns whenever the picture returns. Nothing here rests on colour alone — the words carry it, and so does the drawing: Modeling's stroke is solid and lands on the path, Alignment's are dashed because passage is conditional, and only Alignment's crosses the boundary.</a:t>
+            </a:r>
+          </a:p>
+          <a:p>
+            <a:r>
+              <a:rPr dirty="0"/>
+              <a:t>- Leave the space under the station row empty and do not fill it. Two slides from here, on "Open the box", that is exactly where the arithmetic arrives.</a:t>
+            </a:r>
+          </a:p>
+          <a:p>
+            <a:r>
+              <a:rPr dirty="0"/>
+              <a:t>- FORWARD HOOK, and you must say it out loud when you get there: on "Open the box", beat two, name this red arrow — "there it is: R is in the first two factors; that is what the arrow was pointing at." The visual rhyme will not connect itself.</a:t>
+            </a:r>
+          </a:p>
+          <a:p>
+            <a:r>
+              <a:rPr dirty="0"/>
+              <a:t>- Next we put a number on the production process.</a:t>
+            </a:r>
+          </a:p>
+        </p:txBody>
+      </p:sp>
+    </p:spTree>
+  </p:cSld>
+  <p:clrMapOvr>
+    <a:masterClrMapping/>
+  </p:clrMapOvr>
 </p:notes>
 </file>
 
@@ -11766,7 +11869,7 @@
                   <a:srgbClr val="FFFFFF"/>
                 </a:solidFill>
               </a:rPr>
-              <a:t>We judged what must remain. How much of it must we write down?</a:t>
+              <a:t>How much of the answer must we tell the agent?</a:t>
             </a:r>
           </a:p>
         </p:txBody>
@@ -12828,7 +12931,7 @@
                   <a:srgbClr val="555960"/>
                 </a:solidFill>
               </a:rPr>
-              <a:t>Two production cases from DocAble — one vindicated, one refuted.</a:t>
+              <a:t>Two production reductions — one vindicated, one refuted.</a:t>
             </a:r>
           </a:p>
         </p:txBody>
@@ -12908,7 +13011,7 @@
                   <a:srgbClr val="8E6F3E"/>
                 </a:solidFill>
               </a:rPr>
-              <a:t>✗ ENTITLEMENT</a:t>
+              <a:t>✗ ACCOUNT QUOTA</a:t>
             </a:r>
           </a:p>
         </p:txBody>
@@ -13022,7 +13125,7 @@
                   <a:srgbClr val="555960"/>
                 </a:solidFill>
               </a:rPr>
-              <a:t>An admission decision reduced entitlement to a single credit count.</a:t>
+              <a:t>An account quota was reduced to a single credit count.</a:t>
             </a:r>
           </a:p>
         </p:txBody>
@@ -13077,12 +13180,12 @@
               <a:buNone/>
             </a:pPr>
             <a:r>
-              <a:rPr lang="en-US" sz="1500" b="0" dirty="0">
-                <a:solidFill>
-                  <a:srgbClr val="555960"/>
-                </a:solidFill>
-              </a:rPr>
-              <a:t>plan: professional</a:t>
+              <a:rPr lang="en-US" sz="1500" b="1" dirty="0">
+                <a:solidFill>
+                  <a:srgbClr val="5C4826"/>
+                </a:solidFill>
+              </a:rPr>
+              <a:t>quota: unlimited</a:t>
             </a:r>
           </a:p>
           <a:p>
@@ -13093,22 +13196,6 @@
               <a:buNone/>
             </a:pPr>
             <a:r>
-              <a:rPr lang="en-US" sz="1500" b="1" dirty="0">
-                <a:solidFill>
-                  <a:srgbClr val="5C4826"/>
-                </a:solidFill>
-              </a:rPr>
-              <a:t>entitlement: unlimited</a:t>
-            </a:r>
-          </a:p>
-          <a:p>
-            <a:pPr algn="ctr">
-              <a:spcAft>
-                <a:spcPts val="600"/>
-              </a:spcAft>
-              <a:buNone/>
-            </a:pPr>
-            <a:r>
               <a:rPr lang="en-US" sz="1500" b="0" dirty="0">
                 <a:solidFill>
                   <a:srgbClr val="555960"/>
@@ -13130,7 +13217,7 @@
                   <a:srgbClr val="555960"/>
                 </a:solidFill>
               </a:rPr>
-              <a:t>org, roles, history …</a:t>
+              <a:t>usage history …</a:t>
             </a:r>
           </a:p>
         </p:txBody>
@@ -13274,7 +13361,7 @@
                   <a:srgbClr val="555960"/>
                 </a:solidFill>
               </a:rPr>
-              <a:t>the whole model of entitlement</a:t>
+              <a:t>the whole model of the quota</a:t>
             </a:r>
           </a:p>
         </p:txBody>
@@ -13381,7 +13468,7 @@
                   <a:srgbClr val="555960"/>
                 </a:solidFill>
               </a:rPr>
-              <a:t>nowhere to live in a scalar</a:t>
+              <a:t>has nowhere to live in a scalar</a:t>
             </a:r>
           </a:p>
         </p:txBody>
@@ -13395,7 +13482,7 @@
         <p:spPr>
           <a:xfrm>
             <a:off x="365760" y="4709160"/>
-            <a:ext cx="8412480" cy="548640"/>
+            <a:ext cx="8412480" cy="640080"/>
           </a:xfrm>
           <a:prstGeom prst="rect">
             <a:avLst/>
@@ -13421,7 +13508,7 @@
                   <a:srgbClr val="555960"/>
                 </a:solidFill>
               </a:rPr>
-              <a:t>The implementation knew the account was unlimited. The model could not say so.</a:t>
+              <a:t>The implementation distinguished unlimited from exhausted. The model represented both as 0.</a:t>
             </a:r>
           </a:p>
         </p:txBody>
@@ -13463,7 +13550,7 @@
                   <a:srgbClr val="FFFFFF"/>
                 </a:solidFill>
               </a:rPr>
-              <a:t>An unlimited user became zero credits.</a:t>
+              <a:t>The reduction erased a distinction the obligation required.</a:t>
             </a:r>
           </a:p>
         </p:txBody>
@@ -14211,7 +14298,7 @@
                   <a:srgbClr val="FFFFFF"/>
                 </a:solidFill>
               </a:rPr>
-              <a:t>ENTITLEMENT</a:t>
+              <a:t>ACCOUNT QUOTA</a:t>
             </a:r>
           </a:p>
         </p:txBody>
@@ -14343,7 +14430,7 @@
                   <a:srgbClr val="555960"/>
                 </a:solidFill>
               </a:rPr>
-              <a:t>the unlimited plan</a:t>
+              <a:t>unlimited vs. exhausted</a:t>
             </a:r>
           </a:p>
         </p:txBody>
@@ -14733,7 +14820,7 @@
                   <a:srgbClr val="FFFFFF"/>
                 </a:solidFill>
               </a:rPr>
-              <a:t>a wrong production decision ✗</a:t>
+              <a:t>production decision exposed the loss ✗</a:t>
             </a:r>
           </a:p>
         </p:txBody>
@@ -14976,8 +15063,8 @@
         </p:nvSpPr>
         <p:spPr>
           <a:xfrm>
-            <a:off x="777240" y="1943100"/>
-            <a:ext cx="4480560" cy="2697480"/>
+            <a:off x="1005840" y="2103120"/>
+            <a:ext cx="4023360" cy="2377440"/>
           </a:xfrm>
           <a:prstGeom prst="rect">
             <a:avLst/>
@@ -15008,8 +15095,8 @@
         </p:nvSpPr>
         <p:spPr>
           <a:xfrm>
-            <a:off x="1737360" y="2743200"/>
-            <a:ext cx="2606040" cy="1005840"/>
+            <a:off x="1508760" y="2560320"/>
+            <a:ext cx="3017520" cy="1005840"/>
           </a:xfrm>
           <a:prstGeom prst="rect">
             <a:avLst/>
@@ -15037,7 +15124,7 @@
                   <a:srgbClr val="FFFFFF"/>
                 </a:solidFill>
               </a:rPr>
-              <a:t xml:space="preserve">OBLIGATION</a:t>
+              <a:t>OBLIGATION</a:t>
             </a:r>
           </a:p>
           <a:p>
@@ -15053,7 +15140,7 @@
                   <a:srgbClr val="FFFFFF"/>
                 </a:solidFill>
               </a:rPr>
-              <a:t xml:space="preserve">what must be true</a:t>
+              <a:t>what must be true</a:t>
             </a:r>
           </a:p>
         </p:txBody>
@@ -15066,8 +15153,8 @@
         </p:nvSpPr>
         <p:spPr>
           <a:xfrm>
-            <a:off x="1280160" y="3886200"/>
-            <a:ext cx="3520440" cy="329184"/>
+            <a:off x="1005840" y="3794760"/>
+            <a:ext cx="4023360" cy="329184"/>
           </a:xfrm>
           <a:prstGeom prst="rect">
             <a:avLst/>
@@ -15093,7 +15180,7 @@
                   <a:srgbClr val="5C4826"/>
                 </a:solidFill>
               </a:rPr>
-              <a:t xml:space="preserve">SCAFFOLDING — what this agent needs</a:t>
+              <a:t>SCAFFOLDING — what this agent needs</a:t>
             </a:r>
           </a:p>
         </p:txBody>
@@ -15106,8 +15193,8 @@
         </p:nvSpPr>
         <p:spPr>
           <a:xfrm>
-            <a:off x="502920" y="4640580"/>
-            <a:ext cx="5029200" cy="205740"/>
+            <a:off x="502920" y="4526280"/>
+            <a:ext cx="5029200" cy="274320"/>
           </a:xfrm>
           <a:prstGeom prst="rect">
             <a:avLst/>
@@ -15118,7 +15205,7 @@
           </a:ln>
         </p:spPr>
         <p:txBody>
-          <a:bodyPr wrap="square" lIns="0" tIns="0" rIns="0" bIns="0" anchor="ctr"/>
+          <a:bodyPr wrap="square" lIns="0" tIns="0" rIns="0" bIns="0" anchor="t"/>
           <a:lstStyle/>
           <a:p>
             <a:pPr algn="ctr">
@@ -15128,12 +15215,12 @@
               <a:buNone/>
             </a:pPr>
             <a:r>
-              <a:rPr lang="en-US" sz="1300" b="0" dirty="0">
+              <a:rPr lang="en-US" sz="1400" b="0" dirty="0">
                 <a:solidFill>
                   <a:srgbClr val="555960"/>
                 </a:solidFill>
               </a:rPr>
-              <a:t xml:space="preserve">DEGREES OF FREEDOM — the rest is the agent’s</a:t>
+              <a:t>DEGREES OF FREEDOM — the rest is the agent’s</a:t>
             </a:r>
           </a:p>
         </p:txBody>
@@ -15146,7 +15233,7 @@
         </p:nvSpPr>
         <p:spPr>
           <a:xfrm>
-            <a:off x="5806440" y="1897380"/>
+            <a:off x="5806440" y="1965960"/>
             <a:ext cx="3017520" cy="548640"/>
           </a:xfrm>
           <a:prstGeom prst="rect">
@@ -15168,12 +15255,12 @@
               <a:buNone/>
             </a:pPr>
             <a:r>
-              <a:rPr lang="en-US" sz="1500" b="1" dirty="0">
+              <a:rPr lang="en-US" sz="1600" b="1" dirty="0">
                 <a:solidFill>
                   <a:srgbClr val="8E6F3E"/>
                 </a:solidFill>
               </a:rPr>
-              <a:t xml:space="preserve">specification boundary</a:t>
+              <a:t>specification boundary</a:t>
             </a:r>
           </a:p>
           <a:p>
@@ -15189,7 +15276,7 @@
                   <a:srgbClr val="555960"/>
                 </a:solidFill>
               </a:rPr>
-              <a:t xml:space="preserve">the edge of what we write down</a:t>
+              <a:t>the edge of what we write down</a:t>
             </a:r>
           </a:p>
         </p:txBody>
@@ -15202,8 +15289,8 @@
         </p:nvCxnSpPr>
         <p:spPr>
           <a:xfrm>
-            <a:off x="5303520" y="2171700"/>
-            <a:ext cx="457200" cy="0"/>
+            <a:off x="5074920" y="2240280"/>
+            <a:ext cx="685800" cy="0"/>
           </a:xfrm>
           <a:prstGeom prst="straightConnector1">
             <a:avLst/>
@@ -15224,7 +15311,7 @@
         </p:nvSpPr>
         <p:spPr>
           <a:xfrm>
-            <a:off x="5806440" y="2651760"/>
+            <a:off x="5806440" y="2743200"/>
             <a:ext cx="3017520" cy="548640"/>
           </a:xfrm>
           <a:prstGeom prst="rect">
@@ -15246,12 +15333,12 @@
               <a:buNone/>
             </a:pPr>
             <a:r>
-              <a:rPr lang="en-US" sz="1500" b="1" dirty="0">
+              <a:rPr lang="en-US" sz="1600" b="1" dirty="0">
                 <a:solidFill>
                   <a:srgbClr val="5C4826"/>
                 </a:solidFill>
               </a:rPr>
-              <a:t xml:space="preserve">obligation boundary</a:t>
+              <a:t>obligation boundary</a:t>
             </a:r>
           </a:p>
           <a:p>
@@ -15267,7 +15354,7 @@
                   <a:srgbClr val="555960"/>
                 </a:solidFill>
               </a:rPr>
-              <a:t xml:space="preserve">fixed by what must be true</a:t>
+              <a:t>fixed by what must be true</a:t>
             </a:r>
           </a:p>
         </p:txBody>
@@ -15280,8 +15367,8 @@
         </p:nvCxnSpPr>
         <p:spPr>
           <a:xfrm>
-            <a:off x="4389120" y="2926080"/>
-            <a:ext cx="1371600" cy="0"/>
+            <a:off x="4572000" y="3017520"/>
+            <a:ext cx="1188720" cy="0"/>
           </a:xfrm>
           <a:prstGeom prst="straightConnector1">
             <a:avLst/>
@@ -15302,8 +15389,8 @@
         </p:nvSpPr>
         <p:spPr>
           <a:xfrm>
-            <a:off x="1280160" y="2286000"/>
-            <a:ext cx="3520440" cy="2011680"/>
+            <a:off x="1371600" y="2331720"/>
+            <a:ext cx="3291840" cy="1965960"/>
           </a:xfrm>
           <a:prstGeom prst="rect">
             <a:avLst/>
@@ -15335,8 +15422,8 @@
         </p:nvCxnSpPr>
         <p:spPr>
           <a:xfrm>
-            <a:off x="4846320" y="3520440"/>
-            <a:ext cx="822960" cy="0"/>
+            <a:off x="4663440" y="3566160"/>
+            <a:ext cx="1005840" cy="0"/>
           </a:xfrm>
           <a:prstGeom prst="straightConnector1">
             <a:avLst/>
@@ -15357,7 +15444,7 @@
         </p:nvSpPr>
         <p:spPr>
           <a:xfrm>
-            <a:off x="5806440" y="3383280"/>
+            <a:off x="5806440" y="3429000"/>
             <a:ext cx="3017520" cy="868680"/>
           </a:xfrm>
           <a:prstGeom prst="rect">
@@ -15381,10 +15468,10 @@
             <a:r>
               <a:rPr lang="en-US" sz="1500" b="1" dirty="0">
                 <a:solidFill>
-                  <a:srgbClr val="8E6F3E"/>
-                </a:solidFill>
-              </a:rPr>
-              <a:t xml:space="preserve">specification boundary</a:t>
+                  <a:srgbClr val="5C4826"/>
+                </a:solidFill>
+              </a:rPr>
+              <a:t>a more capable agent</a:t>
             </a:r>
           </a:p>
           <a:p>
@@ -15400,7 +15487,7 @@
                   <a:srgbClr val="555960"/>
                 </a:solidFill>
               </a:rPr>
-              <a:t xml:space="preserve">for a more capable agent, it moves in</a:t>
+              <a:t>needs less scaffolding, so this boundary moves in</a:t>
             </a:r>
           </a:p>
         </p:txBody>
@@ -15985,7 +16072,7 @@
         <p:spPr>
           <a:xfrm>
             <a:off x="1737360" y="2240280"/>
-            <a:ext cx="0" cy="320040"/>
+            <a:ext cx="0" cy="411480"/>
           </a:xfrm>
           <a:prstGeom prst="straightConnector1">
             <a:avLst/>
@@ -16007,7 +16094,7 @@
         </p:nvSpPr>
         <p:spPr>
           <a:xfrm>
-            <a:off x="845820" y="2606040"/>
+            <a:off x="845820" y="2697480"/>
             <a:ext cx="1783080" cy="402336"/>
           </a:xfrm>
           <a:prstGeom prst="rect">
@@ -16051,7 +16138,7 @@
         </p:nvSpPr>
         <p:spPr>
           <a:xfrm>
-            <a:off x="685800" y="3063240"/>
+            <a:off x="685800" y="3154680"/>
             <a:ext cx="2103120" cy="274320"/>
           </a:xfrm>
           <a:prstGeom prst="rect">
@@ -16091,8 +16178,8 @@
         </p:nvSpPr>
         <p:spPr>
           <a:xfrm>
-            <a:off x="6172200" y="2514600"/>
-            <a:ext cx="2697480" cy="548640"/>
+            <a:off x="6126480" y="2423160"/>
+            <a:ext cx="2743200" cy="548640"/>
           </a:xfrm>
           <a:prstGeom prst="rect">
             <a:avLst/>
@@ -16131,7 +16218,7 @@
         </p:nvSpPr>
         <p:spPr>
           <a:xfrm>
-            <a:off x="274320" y="3474720"/>
+            <a:off x="274320" y="3566160"/>
             <a:ext cx="8595360" cy="365760"/>
           </a:xfrm>
           <a:prstGeom prst="rect">
@@ -16163,16 +16250,40 @@
           </a:p>
         </p:txBody>
       </p:sp>
-      <p:sp>
-        <p:nvSpPr>
-          <p:cNvPr id="30" name="ChEq"/>
+      <p:pic>
+        <p:nvPicPr>
+          <p:cNvPr id="30" name="BandPic" descr="Small reprise of the production process band: Engineering intent to Encoded property to Fabricator to Realization, with the three probability terms P(E | R), P(I | E, R) and P(L | I, E, R) bracketed beneath."/>
+          <p:cNvPicPr>
+            <a:picLocks noChangeAspect="1"/>
+          </p:cNvPicPr>
+          <p:nvPr/>
+        </p:nvPicPr>
+        <p:blipFill>
+          <a:blip r:embed="rId3"/>
+          <a:stretch>
+            <a:fillRect/>
+          </a:stretch>
+        </p:blipFill>
+        <p:spPr>
+          <a:xfrm>
+            <a:off x="365760" y="4200000"/>
+            <a:ext cx="3200400" cy="1185206"/>
+          </a:xfrm>
+          <a:prstGeom prst="rect">
+            <a:avLst/>
+          </a:prstGeom>
+        </p:spPr>
+      </p:pic>
+      <p:sp>
+        <p:nvSpPr>
+          <p:cNvPr id="31" name="LimK"/>
           <p:cNvSpPr txBox="1"/>
           <p:nvPr/>
         </p:nvSpPr>
         <p:spPr>
           <a:xfrm>
-            <a:off x="274320" y="4023360"/>
-            <a:ext cx="8595360" cy="365760"/>
+            <a:off x="3886200" y="4114800"/>
+            <a:ext cx="4983480" cy="274320"/>
           </a:xfrm>
           <a:prstGeom prst="rect">
             <a:avLst/>
@@ -16183,68 +16294,36 @@
           </a:ln>
         </p:spPr>
         <p:txBody>
-          <a:bodyPr wrap="square" lIns="0" tIns="0" rIns="0" bIns="0" anchor="ctr"/>
-          <a:lstStyle/>
-          <a:p>
-            <a:pPr algn="ctr">
+          <a:bodyPr wrap="square" lIns="0" tIns="0" rIns="0" bIns="0" anchor="t"/>
+          <a:lstStyle/>
+          <a:p>
+            <a:pPr algn="l">
               <a:spcAft>
                 <a:spcPts val="0"/>
               </a:spcAft>
               <a:buNone/>
             </a:pPr>
             <a:r>
-              <a:rPr lang="en-US" sz="1600" b="0" i="1" dirty="0">
-                <a:solidFill>
-                  <a:srgbClr val="5C4826"/>
-                </a:solidFill>
-              </a:rPr>
-              <a:t xml:space="preserve">p</a:t>
-            </a:r>
-            <a:r>
-              <a:rPr lang="en-US" sz="1600" b="0" i="1" baseline="-25000" dirty="0">
-                <a:solidFill>
-                  <a:srgbClr val="5C4826"/>
-                </a:solidFill>
-              </a:rPr>
-              <a:t xml:space="preserve">R</a:t>
-            </a:r>
-            <a:r>
-              <a:rPr lang="en-US" sz="1600" b="0" i="1" dirty="0">
-                <a:solidFill>
-                  <a:srgbClr val="5C4826"/>
-                </a:solidFill>
-              </a:rPr>
-              <a:t xml:space="preserve"> = </a:t>
-            </a:r>
-            <a:r>
-              <a:rPr lang="en-US" sz="1600" b="1" i="1" dirty="0">
-                <a:solidFill>
-                  <a:srgbClr val="5C4826"/>
-                </a:solidFill>
-              </a:rPr>
-              <a:t xml:space="preserve">P(E | R)</a:t>
-            </a:r>
-            <a:r>
-              <a:rPr lang="en-US" sz="1600" b="0" i="1" dirty="0">
-                <a:solidFill>
-                  <a:srgbClr val="555960"/>
-                </a:solidFill>
-              </a:rPr>
-              <a:t xml:space="preserve"> · P(I | E, R) · P(L | I, E, R)</a:t>
-            </a:r>
-          </a:p>
-        </p:txBody>
-      </p:sp>
-      <p:sp>
-        <p:nvSpPr>
-          <p:cNvPr id="31" name="ChCap"/>
+              <a:rPr lang="en-US" sz="1400" b="1" dirty="0">
+                <a:solidFill>
+                  <a:srgbClr val="8E6F3E"/>
+                </a:solidFill>
+              </a:rPr>
+              <a:t>THE LIMIT CASE</a:t>
+            </a:r>
+          </a:p>
+        </p:txBody>
+      </p:sp>
+      <p:sp>
+        <p:nvSpPr>
+          <p:cNvPr id="32" name="LimEq"/>
           <p:cNvSpPr txBox="1"/>
           <p:nvPr/>
         </p:nvSpPr>
         <p:spPr>
           <a:xfrm>
-            <a:off x="274320" y="4389120"/>
-            <a:ext cx="8595360" cy="274320"/>
+            <a:off x="3886200" y="4457700"/>
+            <a:ext cx="4983480" cy="594360"/>
           </a:xfrm>
           <a:prstGeom prst="rect">
             <a:avLst/>
@@ -16255,36 +16334,68 @@
           </a:ln>
         </p:spPr>
         <p:txBody>
-          <a:bodyPr wrap="square" lIns="0" tIns="0" rIns="0" bIns="0" anchor="t"/>
-          <a:lstStyle/>
-          <a:p>
-            <a:pPr algn="ctr">
+          <a:bodyPr wrap="square" lIns="0" tIns="0" rIns="0" bIns="0" anchor="ctr"/>
+          <a:lstStyle/>
+          <a:p>
+            <a:pPr algn="l">
               <a:spcAft>
                 <a:spcPts val="0"/>
               </a:spcAft>
               <a:buNone/>
             </a:pPr>
             <a:r>
-              <a:rPr lang="en-US" sz="1400" b="0" i="1" dirty="0">
-                <a:solidFill>
-                  <a:srgbClr val="555960"/>
-                </a:solidFill>
-              </a:rPr>
-              <a:t xml:space="preserve">a perfect reasoner drives the last two factors to one</a:t>
-            </a:r>
-          </a:p>
-        </p:txBody>
-      </p:sp>
-      <p:sp>
-        <p:nvSpPr>
-          <p:cNvPr id="32" name="LimEq"/>
+              <a:rPr lang="en-US" sz="2600" b="0" i="1" dirty="0">
+                <a:solidFill>
+                  <a:srgbClr val="5C4826"/>
+                </a:solidFill>
+              </a:rPr>
+              <a:t>lim</a:t>
+            </a:r>
+            <a:r>
+              <a:rPr lang="en-US" sz="1500" b="0" i="1" baseline="-25000" dirty="0">
+                <a:solidFill>
+                  <a:srgbClr val="5C4826"/>
+                </a:solidFill>
+              </a:rPr>
+              <a:t xml:space="preserve">M → perfect reasoner</a:t>
+            </a:r>
+            <a:r>
+              <a:rPr lang="en-US" sz="2600" b="0" i="1" dirty="0">
+                <a:solidFill>
+                  <a:srgbClr val="5C4826"/>
+                </a:solidFill>
+              </a:rPr>
+              <a:t xml:space="preserve">  p</a:t>
+            </a:r>
+            <a:r>
+              <a:rPr lang="en-US" sz="2600" b="0" i="1" baseline="-25000" dirty="0">
+                <a:solidFill>
+                  <a:srgbClr val="5C4826"/>
+                </a:solidFill>
+              </a:rPr>
+              <a:t>R</a:t>
+            </a:r>
+            <a:r>
+              <a:rPr lang="en-US" sz="2600" b="0" i="1" dirty="0">
+                <a:solidFill>
+                  <a:srgbClr val="5C4826"/>
+                </a:solidFill>
+              </a:rPr>
+              <a:t xml:space="preserve"> = P(E | R)</a:t>
+            </a:r>
+          </a:p>
+        </p:txBody>
+      </p:sp>
+      <p:sp>
+        <p:nvSpPr>
+          <p:cNvPr id="33" name="LimCap"/>
           <p:cNvSpPr txBox="1"/>
           <p:nvPr/>
         </p:nvSpPr>
         <p:spPr>
           <a:xfrm>
-            <a:off x="274320" y="4800600"/>
-            <a:ext cx="8595360" cy="685800"/>
+            <a:off x="3886200" y="5111750"/>
+            <a:ext cx="4983480" cy="457200"/>
           </a:xfrm>
           <a:prstGeom prst="rect">
             <a:avLst/>
@@ -16295,54 +16406,22 @@
           </a:ln>
         </p:spPr>
         <p:txBody>
-          <a:bodyPr wrap="square" lIns="0" tIns="0" rIns="0" bIns="0" anchor="ctr"/>
-          <a:lstStyle/>
-          <a:p>
-            <a:pPr algn="ctr">
+          <a:bodyPr wrap="square" lIns="0" tIns="0" rIns="0" bIns="0" anchor="t"/>
+          <a:lstStyle/>
+          <a:p>
+            <a:pPr algn="l">
               <a:spcAft>
                 <a:spcPts val="0"/>
               </a:spcAft>
               <a:buNone/>
             </a:pPr>
             <a:r>
-              <a:rPr lang="en-US" sz="3000" b="0" i="1" dirty="0">
-                <a:solidFill>
-                  <a:srgbClr val="5C4826"/>
-                </a:solidFill>
-              </a:rPr>
-              <a:t xml:space="preserve">lim</a:t>
-            </a:r>
-            <a:r>
-              <a:rPr lang="en-US" sz="3000" b="0" i="1" baseline="-25000" dirty="0">
-                <a:solidFill>
-                  <a:srgbClr val="5C4826"/>
-                </a:solidFill>
-              </a:rPr>
-              <a:t xml:space="preserve">M → perfect reasoner</a:t>
-            </a:r>
-            <a:r>
-              <a:rPr lang="en-US" sz="3000" b="0" i="1" dirty="0">
-                <a:solidFill>
-                  <a:srgbClr val="5C4826"/>
-                </a:solidFill>
-              </a:rPr>
-              <a:t xml:space="preserve">  p</a:t>
-            </a:r>
-            <a:r>
-              <a:rPr lang="en-US" sz="3000" b="0" i="1" baseline="-25000" dirty="0">
-                <a:solidFill>
-                  <a:srgbClr val="5C4826"/>
-                </a:solidFill>
-              </a:rPr>
-              <a:t xml:space="preserve">R</a:t>
-            </a:r>
-            <a:r>
-              <a:rPr lang="en-US" sz="3000" b="0" i="1" dirty="0">
-                <a:solidFill>
-                  <a:srgbClr val="5C4826"/>
-                </a:solidFill>
-              </a:rPr>
-              <a:t xml:space="preserve"> = P(E | R)</a:t>
+              <a:rPr lang="en-US" sz="1400" b="0" dirty="0">
+                <a:solidFill>
+                  <a:srgbClr val="555960"/>
+                </a:solidFill>
+              </a:rPr>
+              <a:t>Better reasoning cannot recover consequential intent the representation failed to encode.</a:t>
             </a:r>
           </a:p>
         </p:txBody>
@@ -16513,6 +16592,41 @@
                                         <p:cTn id="13" dur="500"/>
                                         <p:tgtEl>
                                           <p:spTgt spid="32"/>
+                                        </p:tgtEl>
+                                      </p:cBhvr>
+                                    </p:animEffect>
+                                  </p:childTnLst>
+                                </p:cTn>
+                              </p:par>
+                              <p:par>
+                                <p:cTn id="14" presetID="10" presetClass="entr" presetSubtype="0" fill="hold" nodeType="withEffect">
+                                  <p:stCondLst>
+                                    <p:cond delay="0"/>
+                                  </p:stCondLst>
+                                  <p:childTnLst>
+                                    <p:set>
+                                      <p:cBhvr>
+                                        <p:cTn id="15" dur="1" fill="hold">
+                                          <p:stCondLst>
+                                            <p:cond delay="0"/>
+                                          </p:stCondLst>
+                                        </p:cTn>
+                                        <p:tgtEl>
+                                          <p:spTgt spid="33"/>
+                                        </p:tgtEl>
+                                        <p:attrNameLst>
+                                          <p:attrName>style.visibility</p:attrName>
+                                        </p:attrNameLst>
+                                      </p:cBhvr>
+                                      <p:to>
+                                        <p:strVal val="visible"/>
+                                      </p:to>
+                                    </p:set>
+                                    <p:animEffect transition="in" filter="fade">
+                                      <p:cBhvr>
+                                        <p:cTn id="16" dur="500"/>
+                                        <p:tgtEl>
+                                          <p:spTgt spid="33"/>
                                         </p:tgtEl>
                                       </p:cBhvr>
                                     </p:animEffect>
@@ -22232,6 +22346,1071 @@
   <p:clrMapOvr>
     <a:masterClrMapping/>
   </p:clrMapOvr>
+</p:sld>
+</file>
+
+<file path=ppt/slides/slide42.xml><?xml version="1.0" encoding="utf-8"?>
+<p:sld xmlns:a="http://schemas.openxmlformats.org/drawingml/2006/main" xmlns:p="http://schemas.openxmlformats.org/presentationml/2006/main" xmlns:r="http://schemas.openxmlformats.org/officeDocument/2006/relationships">
+  <p:cSld>
+    <p:spTree>
+      <p:nvGrpSpPr>
+        <p:cNvPr id="1" name=""/>
+        <p:cNvGrpSpPr/>
+        <p:nvPr/>
+      </p:nvGrpSpPr>
+      <p:grpSpPr/>
+      <p:sp>
+        <p:nvSpPr>
+          <p:cNvPr id="2" name="Title 1"/>
+          <p:cNvSpPr>
+            <a:spLocks noGrp="1"/>
+          </p:cNvSpPr>
+          <p:nvPr>
+            <p:ph type="title"/>
+          </p:nvPr>
+        </p:nvSpPr>
+        <p:spPr>
+          <a:xfrm>
+            <a:off x="277148" y="118428"/>
+            <a:ext cx="8590000" cy="638175"/>
+          </a:xfrm>
+        </p:spPr>
+        <p:txBody>
+          <a:bodyPr>
+            <a:normAutofit fontScale="90000"/>
+          </a:bodyPr>
+          <a:lstStyle/>
+          <a:p>
+            <a:pPr>
+              <a:buNone/>
+              <a:defRPr b="0"/>
+            </a:pPr>
+            <a:r>
+              <a:rPr lang="en-US" sz="2400" b="0" i="0" dirty="0">
+                <a:solidFill>
+                  <a:srgbClr val="000000"/>
+                </a:solidFill>
+              </a:rPr>
+              <a:t>The agent works inside an engineered environment</a:t>
+            </a:r>
+          </a:p>
+        </p:txBody>
+      </p:sp>
+      <p:sp>
+        <p:nvSpPr>
+          <p:cNvPr id="3" name="Slide Number Placeholder 3"/>
+          <p:cNvSpPr>
+            <a:spLocks noGrp="1"/>
+          </p:cNvSpPr>
+          <p:nvPr>
+            <p:ph type="sldNum" sz="quarter" idx="4"/>
+          </p:nvPr>
+        </p:nvSpPr>
+        <p:spPr/>
+        <p:txBody>
+          <a:bodyPr/>
+          <a:lstStyle/>
+          <a:p>
+            <a:fld id="{B7EB45DA-9A0D-DC49-8E02-F30A5DDC21C3}" type="slidenum">
+              <a:rPr lang="en-US" smtClean="0"/>
+              <a:t>2</a:t>
+            </a:fld>
+            <a:endParaRPr lang="en-US"/>
+          </a:p>
+        </p:txBody>
+      </p:sp>
+      <p:sp>
+        <p:nvSpPr>
+          <p:cNvPr id="100" name="Env" descr="Enclosure labelled ENGINEERING ENVIRONMENT containing the whole delegation path: a task enters, a reasoner works, an artifact comes out, and a models station feeds the path before the reasoner runs."/>
+          <p:cNvSpPr/>
+          <p:nvPr/>
+        </p:nvSpPr>
+        <p:spPr>
+          <a:xfrm>
+            <a:off x="274320" y="896112"/>
+            <a:ext cx="7498080" cy="4370832"/>
+          </a:xfrm>
+          <a:prstGeom prst="rect">
+            <a:avLst/>
+          </a:prstGeom>
+          <a:noFill/>
+          <a:ln w="25400">
+            <a:solidFill>
+              <a:srgbClr val="8E6F3E"/>
+            </a:solidFill>
+          </a:ln>
+        </p:spPr>
+        <p:txBody>
+          <a:bodyPr/>
+          <a:lstStyle/>
+          <a:p>
+            <a:endParaRPr/>
+          </a:p>
+        </p:txBody>
+      </p:sp>
+      <p:sp>
+        <p:nvSpPr>
+          <p:cNvPr id="101" name="EnvLbl" descr="Label: ENGINEERING ENVIRONMENT"/>
+          <p:cNvSpPr txBox="1"/>
+          <p:nvPr/>
+        </p:nvSpPr>
+        <p:spPr>
+          <a:xfrm>
+            <a:off x="548640" y="969264"/>
+            <a:ext cx="6949440" cy="384048"/>
+          </a:xfrm>
+          <a:prstGeom prst="rect">
+            <a:avLst/>
+          </a:prstGeom>
+          <a:noFill/>
+          <a:ln>
+            <a:noFill/>
+          </a:ln>
+        </p:spPr>
+        <p:txBody>
+          <a:bodyPr wrap="square" lIns="0" tIns="0" rIns="0" bIns="0" anchor="ctr"/>
+          <a:lstStyle/>
+          <a:p>
+            <a:pPr algn="ctr">
+              <a:buNone/>
+            </a:pPr>
+            <a:r>
+              <a:rPr lang="en-US" sz="2000" b="1" i="0" dirty="0">
+                <a:solidFill>
+                  <a:srgbClr val="8E6F3E"/>
+                </a:solidFill>
+              </a:rPr>
+              <a:t>ENGINEERING ENVIRONMENT</a:t>
+            </a:r>
+          </a:p>
+        </p:txBody>
+      </p:sp>
+      <p:sp>
+        <p:nvSpPr>
+          <p:cNvPr id="102" name="Task" descr="Station 1 of 4: TASK, what we want done."/>
+          <p:cNvSpPr/>
+          <p:nvPr/>
+        </p:nvSpPr>
+        <p:spPr>
+          <a:xfrm>
+            <a:off x="548640" y="3438144"/>
+            <a:ext cx="1645920" cy="731520"/>
+          </a:xfrm>
+          <a:prstGeom prst="rect">
+            <a:avLst/>
+          </a:prstGeom>
+          <a:solidFill>
+            <a:srgbClr val="F5F1E8"/>
+          </a:solidFill>
+          <a:ln w="19050">
+            <a:solidFill>
+              <a:srgbClr val="C9B991"/>
+            </a:solidFill>
+          </a:ln>
+        </p:spPr>
+        <p:txBody>
+          <a:bodyPr wrap="square" lIns="27432" tIns="22860" rIns="27432" bIns="22860" anchor="ctr"/>
+          <a:lstStyle/>
+          <a:p>
+            <a:pPr algn="ctr">
+              <a:buNone/>
+            </a:pPr>
+            <a:r>
+              <a:rPr lang="en-US" sz="1800" b="1" i="0" dirty="0">
+                <a:solidFill>
+                  <a:srgbClr val="5C4826"/>
+                </a:solidFill>
+              </a:rPr>
+              <a:t>TASK</a:t>
+            </a:r>
+          </a:p>
+        </p:txBody>
+      </p:sp>
+      <p:cxnSp>
+        <p:nvCxnSpPr>
+          <p:cNvPr id="103" name="Conn1" descr="Arrow from TASK to REASONER; the models station feeds this segment."/>
+          <p:cNvCxnSpPr/>
+          <p:nvPr/>
+        </p:nvCxnSpPr>
+        <p:spPr>
+          <a:xfrm>
+            <a:off x="2258568" y="3803904"/>
+            <a:ext cx="886968" cy="0"/>
+          </a:xfrm>
+          <a:prstGeom prst="straightConnector1">
+            <a:avLst/>
+          </a:prstGeom>
+          <a:ln w="34925">
+            <a:solidFill>
+              <a:srgbClr val="8E6F3E"/>
+            </a:solidFill>
+            <a:tailEnd type="triangle" w="lg" len="lg"/>
+          </a:ln>
+        </p:spPr>
+      </p:cxnSp>
+      <p:sp>
+        <p:nvSpPr>
+          <p:cNvPr id="104" name="Reasoner" descr="Station 3 of 4: REASONER, what does the work."/>
+          <p:cNvSpPr/>
+          <p:nvPr/>
+        </p:nvSpPr>
+        <p:spPr>
+          <a:xfrm>
+            <a:off x="3200400" y="3438144"/>
+            <a:ext cx="1645920" cy="731520"/>
+          </a:xfrm>
+          <a:prstGeom prst="rect">
+            <a:avLst/>
+          </a:prstGeom>
+          <a:solidFill>
+            <a:srgbClr val="F5F1E8"/>
+          </a:solidFill>
+          <a:ln w="19050">
+            <a:solidFill>
+              <a:srgbClr val="C9B991"/>
+            </a:solidFill>
+          </a:ln>
+        </p:spPr>
+        <p:txBody>
+          <a:bodyPr wrap="square" lIns="27432" tIns="22860" rIns="27432" bIns="22860" anchor="ctr"/>
+          <a:lstStyle/>
+          <a:p>
+            <a:pPr algn="ctr">
+              <a:buNone/>
+            </a:pPr>
+            <a:r>
+              <a:rPr lang="en-US" sz="1800" b="1" i="0" dirty="0">
+                <a:solidFill>
+                  <a:srgbClr val="5C4826"/>
+                </a:solidFill>
+              </a:rPr>
+              <a:t>REASONER</a:t>
+            </a:r>
+          </a:p>
+        </p:txBody>
+      </p:sp>
+      <p:sp>
+        <p:nvSpPr>
+          <p:cNvPr id="105" name="RealLbl" descr="Label on the arrow from REASONER to ARTIFACT: realization."/>
+          <p:cNvSpPr txBox="1"/>
+          <p:nvPr/>
+        </p:nvSpPr>
+        <p:spPr>
+          <a:xfrm>
+            <a:off x="4846320" y="3456432"/>
+            <a:ext cx="1005840" cy="292608"/>
+          </a:xfrm>
+          <a:prstGeom prst="rect">
+            <a:avLst/>
+          </a:prstGeom>
+          <a:noFill/>
+          <a:ln>
+            <a:noFill/>
+          </a:ln>
+        </p:spPr>
+        <p:txBody>
+          <a:bodyPr wrap="none" lIns="0" tIns="0" rIns="0" bIns="0" anchor="ctr"/>
+          <a:lstStyle/>
+          <a:p>
+            <a:pPr algn="ctr">
+              <a:buNone/>
+            </a:pPr>
+            <a:r>
+              <a:rPr lang="en-US" sz="1500" b="0" i="1" dirty="0">
+                <a:solidFill>
+                  <a:srgbClr val="555960"/>
+                </a:solidFill>
+              </a:rPr>
+              <a:t>realization</a:t>
+            </a:r>
+          </a:p>
+        </p:txBody>
+      </p:sp>
+      <p:cxnSp>
+        <p:nvCxnSpPr>
+          <p:cNvPr id="106" name="Conn2" descr="Arrow from REASONER to ARTIFACT, labelled realization."/>
+          <p:cNvCxnSpPr/>
+          <p:nvPr/>
+        </p:nvCxnSpPr>
+        <p:spPr>
+          <a:xfrm>
+            <a:off x="4910328" y="3803904"/>
+            <a:ext cx="886968" cy="0"/>
+          </a:xfrm>
+          <a:prstGeom prst="straightConnector1">
+            <a:avLst/>
+          </a:prstGeom>
+          <a:ln w="34925">
+            <a:solidFill>
+              <a:srgbClr val="8E6F3E"/>
+            </a:solidFill>
+            <a:tailEnd type="triangle" w="lg" len="lg"/>
+          </a:ln>
+        </p:spPr>
+      </p:cxnSp>
+      <p:sp>
+        <p:nvSpPr>
+          <p:cNvPr id="107" name="Artifact" descr="Station 4 of 4: ARTIFACT, what comes out."/>
+          <p:cNvSpPr/>
+          <p:nvPr/>
+        </p:nvSpPr>
+        <p:spPr>
+          <a:xfrm>
+            <a:off x="5852160" y="3438144"/>
+            <a:ext cx="1645920" cy="731520"/>
+          </a:xfrm>
+          <a:prstGeom prst="rect">
+            <a:avLst/>
+          </a:prstGeom>
+          <a:solidFill>
+            <a:srgbClr val="F5F1E8"/>
+          </a:solidFill>
+          <a:ln w="19050">
+            <a:solidFill>
+              <a:srgbClr val="C9B991"/>
+            </a:solidFill>
+          </a:ln>
+        </p:spPr>
+        <p:txBody>
+          <a:bodyPr wrap="square" lIns="27432" tIns="22860" rIns="27432" bIns="22860" anchor="ctr"/>
+          <a:lstStyle/>
+          <a:p>
+            <a:pPr algn="ctr">
+              <a:buNone/>
+            </a:pPr>
+            <a:r>
+              <a:rPr lang="en-US" sz="1800" b="1" i="0" dirty="0">
+                <a:solidFill>
+                  <a:srgbClr val="5C4826"/>
+                </a:solidFill>
+              </a:rPr>
+              <a:t>ARTIFACT</a:t>
+            </a:r>
+          </a:p>
+        </p:txBody>
+      </p:sp>
+      <p:sp>
+        <p:nvSpPr>
+          <p:cNvPr id="110" name="ModAnn" descr="Annotation, left: MODELING changes the reasoning surface."/>
+          <p:cNvSpPr txBox="1"/>
+          <p:nvPr/>
+        </p:nvSpPr>
+        <p:spPr>
+          <a:xfrm>
+            <a:off x="1143000" y="1399032"/>
+            <a:ext cx="3108960" cy="640080"/>
+          </a:xfrm>
+          <a:prstGeom prst="rect">
+            <a:avLst/>
+          </a:prstGeom>
+          <a:noFill/>
+          <a:ln>
+            <a:noFill/>
+          </a:ln>
+        </p:spPr>
+        <p:txBody>
+          <a:bodyPr wrap="square" lIns="0" tIns="0" rIns="0" bIns="0" anchor="ctr"/>
+          <a:lstStyle/>
+          <a:p>
+            <a:pPr algn="ctr">
+              <a:buNone/>
+            </a:pPr>
+            <a:r>
+              <a:rPr lang="en-US" sz="1800" b="1" i="0" dirty="0">
+                <a:solidFill>
+                  <a:srgbClr val="C8102E"/>
+                </a:solidFill>
+              </a:rPr>
+              <a:t>MODELING</a:t>
+            </a:r>
+          </a:p>
+          <a:p>
+            <a:pPr algn="ctr">
+              <a:spcBef>
+                <a:spcPts val="120"/>
+              </a:spcBef>
+              <a:buNone/>
+            </a:pPr>
+            <a:r>
+              <a:rPr lang="en-US" sz="1500" b="0" i="1" dirty="0">
+                <a:solidFill>
+                  <a:srgbClr val="555960"/>
+                </a:solidFill>
+              </a:rPr>
+              <a:t>changes the reasoning surface</a:t>
+            </a:r>
+          </a:p>
+        </p:txBody>
+      </p:sp>
+      <p:sp>
+        <p:nvSpPr>
+          <p:cNvPr id="111" name="Models" descr="Station 2 of 4, drawn with the heavy rim because it is the one station this lecture pair is about: MODELS, the representation."/>
+          <p:cNvSpPr/>
+          <p:nvPr/>
+        </p:nvSpPr>
+        <p:spPr>
+          <a:xfrm>
+            <a:off x="1874520" y="2148840"/>
+            <a:ext cx="1645920" cy="731520"/>
+          </a:xfrm>
+          <a:prstGeom prst="rect">
+            <a:avLst/>
+          </a:prstGeom>
+          <a:solidFill>
+            <a:srgbClr val="FFFFFF"/>
+          </a:solidFill>
+          <a:ln w="28575">
+            <a:solidFill>
+              <a:srgbClr val="8E6F3E"/>
+            </a:solidFill>
+          </a:ln>
+        </p:spPr>
+        <p:txBody>
+          <a:bodyPr wrap="square" lIns="27432" tIns="22860" rIns="27432" bIns="22860" anchor="ctr"/>
+          <a:lstStyle/>
+          <a:p>
+            <a:pPr algn="ctr">
+              <a:buNone/>
+            </a:pPr>
+            <a:r>
+              <a:rPr lang="en-US" sz="1800" b="1" i="0" dirty="0">
+                <a:solidFill>
+                  <a:srgbClr val="5C4826"/>
+                </a:solidFill>
+              </a:rPr>
+              <a:t>MODELS</a:t>
+            </a:r>
+          </a:p>
+        </p:txBody>
+      </p:sp>
+      <p:cxnSp>
+        <p:nvCxnSpPr>
+          <p:cNvPr id="112" name="ModArrow" descr="Modeling's lever, one solid stroke ending in an arrowhead that lands on the segment between TASK and REASONER: the representation is on the path before the reasoner ever runs."/>
+          <p:cNvCxnSpPr/>
+          <p:nvPr/>
+        </p:nvCxnSpPr>
+        <p:spPr>
+          <a:xfrm>
+            <a:off x="2697480" y="2916936"/>
+            <a:ext cx="0" cy="877824"/>
+          </a:xfrm>
+          <a:prstGeom prst="straightConnector1">
+            <a:avLst/>
+          </a:prstGeom>
+          <a:ln w="34925">
+            <a:solidFill>
+              <a:srgbClr val="C8102E"/>
+            </a:solidFill>
+            <a:tailEnd type="triangle" w="lg" len="lg"/>
+          </a:ln>
+        </p:spPr>
+      </p:cxnSp>
+      <p:sp>
+        <p:nvSpPr>
+          <p:cNvPr id="120" name="AlnAnn" descr="Annotation, right: ALIGNMENT governs what may pass."/>
+          <p:cNvSpPr txBox="1"/>
+          <p:nvPr/>
+        </p:nvSpPr>
+        <p:spPr>
+          <a:xfrm>
+            <a:off x="5440680" y="1399032"/>
+            <a:ext cx="2468880" cy="640080"/>
+          </a:xfrm>
+          <a:prstGeom prst="rect">
+            <a:avLst/>
+          </a:prstGeom>
+          <a:noFill/>
+          <a:ln>
+            <a:noFill/>
+          </a:ln>
+        </p:spPr>
+        <p:txBody>
+          <a:bodyPr wrap="square" lIns="0" tIns="0" rIns="0" bIns="0" anchor="ctr"/>
+          <a:lstStyle/>
+          <a:p>
+            <a:pPr algn="ctr">
+              <a:buNone/>
+            </a:pPr>
+            <a:r>
+              <a:rPr lang="en-US" sz="1800" b="1" i="0" dirty="0">
+                <a:solidFill>
+                  <a:srgbClr val="2E74B5"/>
+                </a:solidFill>
+              </a:rPr>
+              <a:t>ALIGNMENT</a:t>
+            </a:r>
+          </a:p>
+          <a:p>
+            <a:pPr algn="ctr">
+              <a:spcBef>
+                <a:spcPts val="120"/>
+              </a:spcBef>
+              <a:buNone/>
+            </a:pPr>
+            <a:r>
+              <a:rPr lang="en-US" sz="1500" b="0" i="1" dirty="0">
+                <a:solidFill>
+                  <a:srgbClr val="555960"/>
+                </a:solidFill>
+              </a:rPr>
+              <a:t>governs what may pass</a:t>
+            </a:r>
+          </a:p>
+        </p:txBody>
+      </p:sp>
+      <p:cxnSp>
+        <p:nvCxnSpPr>
+          <p:cNvPr id="121" name="AlnArrow" descr="Alignment's gate, part one: a solid stroke down from the annotation onto the ARTIFACT. It ends in a bar rather than an arrowhead because the gate always acts."/>
+          <p:cNvCxnSpPr/>
+          <p:nvPr/>
+        </p:nvCxnSpPr>
+        <p:spPr>
+          <a:xfrm>
+            <a:off x="6675120" y="2148840"/>
+            <a:ext cx="0" cy="1261872"/>
+          </a:xfrm>
+          <a:prstGeom prst="straightConnector1">
+            <a:avLst/>
+          </a:prstGeom>
+          <a:ln w="34925">
+            <a:solidFill>
+              <a:srgbClr val="2E74B5"/>
+            </a:solidFill>
+          </a:ln>
+        </p:spPr>
+      </p:cxnSp>
+      <p:sp>
+        <p:nvSpPr>
+          <p:cNvPr id="124" name="AlnGate" descr="Alignment's gate, part two: a bar laid across the top edge of the ARTIFACT, the checkpoint every realization is judged at."/>
+          <p:cNvSpPr/>
+          <p:nvPr/>
+        </p:nvSpPr>
+        <p:spPr>
+          <a:xfrm>
+            <a:off x="6263640" y="3406140"/>
+            <a:ext cx="822960" cy="64008"/>
+          </a:xfrm>
+          <a:prstGeom prst="rect">
+            <a:avLst/>
+          </a:prstGeom>
+          <a:solidFill>
+            <a:srgbClr val="2E74B5"/>
+          </a:solidFill>
+          <a:ln>
+            <a:noFill/>
+          </a:ln>
+        </p:spPr>
+        <p:txBody>
+          <a:bodyPr/>
+          <a:lstStyle/>
+          <a:p>
+            <a:endParaRPr/>
+          </a:p>
+        </p:txBody>
+      </p:sp>
+      <p:cxnSp>
+        <p:nvCxnSpPr>
+          <p:cNvPr id="122" name="ExitArrow" descr="The egress, and the only stroke that crosses the environment's boundary. It is dashed because that passage is the one conditional thing in the picture: the artifact leaves the engineering environment and acquires consequence only if Alignment's gate lets it."/>
+          <p:cNvCxnSpPr/>
+          <p:nvPr/>
+        </p:nvCxnSpPr>
+        <p:spPr>
+          <a:xfrm>
+            <a:off x="7562088" y="3803904"/>
+            <a:ext cx="1170432" cy="0"/>
+          </a:xfrm>
+          <a:prstGeom prst="straightConnector1">
+            <a:avLst/>
+          </a:prstGeom>
+          <a:ln w="34925">
+            <a:solidFill>
+              <a:srgbClr val="2E74B5"/>
+            </a:solidFill>
+            <a:prstDash val="dash"/>
+            <a:tailEnd type="triangle" w="lg" len="lg"/>
+          </a:ln>
+        </p:spPr>
+      </p:cxnSp>
+      <p:sp>
+        <p:nvSpPr>
+          <p:cNvPr id="123" name="ExitLbl" descr="Label on the arrow leaving the environment: consequence."/>
+          <p:cNvSpPr txBox="1"/>
+          <p:nvPr/>
+        </p:nvSpPr>
+        <p:spPr>
+          <a:xfrm>
+            <a:off x="7891272" y="3456432"/>
+            <a:ext cx="978408" cy="292608"/>
+          </a:xfrm>
+          <a:prstGeom prst="rect">
+            <a:avLst/>
+          </a:prstGeom>
+          <a:noFill/>
+          <a:ln>
+            <a:noFill/>
+          </a:ln>
+        </p:spPr>
+        <p:txBody>
+          <a:bodyPr wrap="none" lIns="0" tIns="0" rIns="0" bIns="0" anchor="ctr"/>
+          <a:lstStyle/>
+          <a:p>
+            <a:pPr algn="ctr">
+              <a:buNone/>
+            </a:pPr>
+            <a:r>
+              <a:rPr lang="en-US" sz="1500" b="0" i="1" dirty="0">
+                <a:solidFill>
+                  <a:srgbClr val="555960"/>
+                </a:solidFill>
+              </a:rPr>
+              <a:t>consequence</a:t>
+            </a:r>
+          </a:p>
+        </p:txBody>
+      </p:sp>
+      <p:sp>
+        <p:nvSpPr>
+          <p:cNvPr id="199" name="FooterBand" descr="Footer: Today: what does Modeling change about this production system?"/>
+          <p:cNvSpPr/>
+          <p:nvPr/>
+        </p:nvSpPr>
+        <p:spPr>
+          <a:xfrm>
+            <a:off x="274320" y="5603443"/>
+            <a:ext cx="8595360" cy="777240"/>
+          </a:xfrm>
+          <a:prstGeom prst="rect">
+            <a:avLst/>
+          </a:prstGeom>
+          <a:solidFill>
+            <a:srgbClr val="8E6F3E"/>
+          </a:solidFill>
+          <a:ln>
+            <a:noFill/>
+          </a:ln>
+        </p:spPr>
+        <p:txBody>
+          <a:bodyPr wrap="square" lIns="27432" tIns="22860" rIns="27432" bIns="22860" anchor="ctr"/>
+          <a:lstStyle/>
+          <a:p>
+            <a:pPr algn="ctr">
+              <a:buNone/>
+            </a:pPr>
+            <a:r>
+              <a:rPr lang="en-US" sz="2000" b="1" i="0" dirty="0">
+                <a:solidFill>
+                  <a:srgbClr val="FFFFFF"/>
+                </a:solidFill>
+              </a:rPr>
+              <a:t>Today: what does Modeling change about this production system?</a:t>
+            </a:r>
+          </a:p>
+        </p:txBody>
+      </p:sp>
+    </p:spTree>
+  </p:cSld>
+  <p:clrMapOvr>
+    <a:masterClrMapping/>
+  </p:clrMapOvr>
+  <p:timing>
+    <p:tnLst>
+      <p:par>
+        <p:cTn id="1" dur="indefinite" restart="never" nodeType="tmRoot">
+          <p:childTnLst>
+            <p:seq concurrent="1" nextAc="seek">
+              <p:cTn id="2" dur="indefinite" nodeType="mainSeq">
+                <p:childTnLst>
+                  <p:par>
+                    <p:cTn id="3" fill="hold">
+                      <p:stCondLst>
+                        <p:cond delay="indefinite"/>
+                      </p:stCondLst>
+                      <p:childTnLst>
+                        <p:par>
+                          <p:cTn id="4" fill="hold">
+                            <p:stCondLst>
+                              <p:cond delay="0"/>
+                            </p:stCondLst>
+                            <p:childTnLst>
+                              <p:par>
+                                <p:cTn id="5" presetID="10" presetClass="entr" presetSubtype="0" fill="hold" nodeType="clickEffect">
+                                  <p:stCondLst>
+                                    <p:cond delay="0"/>
+                                  </p:stCondLst>
+                                  <p:childTnLst>
+                                    <p:set>
+                                      <p:cBhvr>
+                                        <p:cTn id="6" dur="1" fill="hold">
+                                          <p:stCondLst>
+                                            <p:cond delay="0"/>
+                                          </p:stCondLst>
+                                        </p:cTn>
+                                        <p:tgtEl>
+                                          <p:spTgt spid="110"/>
+                                        </p:tgtEl>
+                                        <p:attrNameLst>
+                                          <p:attrName>style.visibility</p:attrName>
+                                        </p:attrNameLst>
+                                      </p:cBhvr>
+                                      <p:to>
+                                        <p:strVal val="visible"/>
+                                      </p:to>
+                                    </p:set>
+                                    <p:animEffect transition="in" filter="fade">
+                                      <p:cBhvr>
+                                        <p:cTn id="7" dur="500"/>
+                                        <p:tgtEl>
+                                          <p:spTgt spid="110"/>
+                                        </p:tgtEl>
+                                      </p:cBhvr>
+                                    </p:animEffect>
+                                  </p:childTnLst>
+                                </p:cTn>
+                              </p:par>
+                              <p:par>
+                                <p:cTn id="8" presetID="10" presetClass="entr" presetSubtype="0" fill="hold" nodeType="withEffect">
+                                  <p:stCondLst>
+                                    <p:cond delay="0"/>
+                                  </p:stCondLst>
+                                  <p:childTnLst>
+                                    <p:set>
+                                      <p:cBhvr>
+                                        <p:cTn id="9" dur="1" fill="hold">
+                                          <p:stCondLst>
+                                            <p:cond delay="0"/>
+                                          </p:stCondLst>
+                                        </p:cTn>
+                                        <p:tgtEl>
+                                          <p:spTgt spid="111"/>
+                                        </p:tgtEl>
+                                        <p:attrNameLst>
+                                          <p:attrName>style.visibility</p:attrName>
+                                        </p:attrNameLst>
+                                      </p:cBhvr>
+                                      <p:to>
+                                        <p:strVal val="visible"/>
+                                      </p:to>
+                                    </p:set>
+                                    <p:animEffect transition="in" filter="fade">
+                                      <p:cBhvr>
+                                        <p:cTn id="10" dur="500"/>
+                                        <p:tgtEl>
+                                          <p:spTgt spid="111"/>
+                                        </p:tgtEl>
+                                      </p:cBhvr>
+                                    </p:animEffect>
+                                  </p:childTnLst>
+                                </p:cTn>
+                              </p:par>
+                              <p:par>
+                                <p:cTn id="11" presetID="10" presetClass="entr" presetSubtype="0" fill="hold" nodeType="withEffect">
+                                  <p:stCondLst>
+                                    <p:cond delay="0"/>
+                                  </p:stCondLst>
+                                  <p:childTnLst>
+                                    <p:set>
+                                      <p:cBhvr>
+                                        <p:cTn id="12" dur="1" fill="hold">
+                                          <p:stCondLst>
+                                            <p:cond delay="0"/>
+                                          </p:stCondLst>
+                                        </p:cTn>
+                                        <p:tgtEl>
+                                          <p:spTgt spid="112"/>
+                                        </p:tgtEl>
+                                        <p:attrNameLst>
+                                          <p:attrName>style.visibility</p:attrName>
+                                        </p:attrNameLst>
+                                      </p:cBhvr>
+                                      <p:to>
+                                        <p:strVal val="visible"/>
+                                      </p:to>
+                                    </p:set>
+                                    <p:animEffect transition="in" filter="fade">
+                                      <p:cBhvr>
+                                        <p:cTn id="13" dur="500"/>
+                                        <p:tgtEl>
+                                          <p:spTgt spid="112"/>
+                                        </p:tgtEl>
+                                      </p:cBhvr>
+                                    </p:animEffect>
+                                  </p:childTnLst>
+                                </p:cTn>
+                              </p:par>
+                            </p:childTnLst>
+                          </p:cTn>
+                        </p:par>
+                      </p:childTnLst>
+                    </p:cTn>
+                  </p:par>
+                  <p:par>
+                    <p:cTn id="14" fill="hold">
+                      <p:stCondLst>
+                        <p:cond delay="indefinite"/>
+                      </p:stCondLst>
+                      <p:childTnLst>
+                        <p:par>
+                          <p:cTn id="15" fill="hold">
+                            <p:stCondLst>
+                              <p:cond delay="0"/>
+                            </p:stCondLst>
+                            <p:childTnLst>
+                              <p:par>
+                                <p:cTn id="16" presetID="10" presetClass="entr" presetSubtype="0" fill="hold" nodeType="clickEffect">
+                                  <p:stCondLst>
+                                    <p:cond delay="0"/>
+                                  </p:stCondLst>
+                                  <p:childTnLst>
+                                    <p:set>
+                                      <p:cBhvr>
+                                        <p:cTn id="17" dur="1" fill="hold">
+                                          <p:stCondLst>
+                                            <p:cond delay="0"/>
+                                          </p:stCondLst>
+                                        </p:cTn>
+                                        <p:tgtEl>
+                                          <p:spTgt spid="120"/>
+                                        </p:tgtEl>
+                                        <p:attrNameLst>
+                                          <p:attrName>style.visibility</p:attrName>
+                                        </p:attrNameLst>
+                                      </p:cBhvr>
+                                      <p:to>
+                                        <p:strVal val="visible"/>
+                                      </p:to>
+                                    </p:set>
+                                    <p:animEffect transition="in" filter="fade">
+                                      <p:cBhvr>
+                                        <p:cTn id="18" dur="500"/>
+                                        <p:tgtEl>
+                                          <p:spTgt spid="120"/>
+                                        </p:tgtEl>
+                                      </p:cBhvr>
+                                    </p:animEffect>
+                                  </p:childTnLst>
+                                </p:cTn>
+                              </p:par>
+                              <p:par>
+                                <p:cTn id="19" presetID="10" presetClass="entr" presetSubtype="0" fill="hold" nodeType="withEffect">
+                                  <p:stCondLst>
+                                    <p:cond delay="0"/>
+                                  </p:stCondLst>
+                                  <p:childTnLst>
+                                    <p:set>
+                                      <p:cBhvr>
+                                        <p:cTn id="20" dur="1" fill="hold">
+                                          <p:stCondLst>
+                                            <p:cond delay="0"/>
+                                          </p:stCondLst>
+                                        </p:cTn>
+                                        <p:tgtEl>
+                                          <p:spTgt spid="121"/>
+                                        </p:tgtEl>
+                                        <p:attrNameLst>
+                                          <p:attrName>style.visibility</p:attrName>
+                                        </p:attrNameLst>
+                                      </p:cBhvr>
+                                      <p:to>
+                                        <p:strVal val="visible"/>
+                                      </p:to>
+                                    </p:set>
+                                    <p:animEffect transition="in" filter="fade">
+                                      <p:cBhvr>
+                                        <p:cTn id="21" dur="500"/>
+                                        <p:tgtEl>
+                                          <p:spTgt spid="121"/>
+                                        </p:tgtEl>
+                                      </p:cBhvr>
+                                    </p:animEffect>
+                                  </p:childTnLst>
+                                </p:cTn>
+                              </p:par>
+                              <p:par>
+                                <p:cTn id="22" presetID="10" presetClass="entr" presetSubtype="0" fill="hold" nodeType="withEffect">
+                                  <p:stCondLst>
+                                    <p:cond delay="0"/>
+                                  </p:stCondLst>
+                                  <p:childTnLst>
+                                    <p:set>
+                                      <p:cBhvr>
+                                        <p:cTn id="23" dur="1" fill="hold">
+                                          <p:stCondLst>
+                                            <p:cond delay="0"/>
+                                          </p:stCondLst>
+                                        </p:cTn>
+                                        <p:tgtEl>
+                                          <p:spTgt spid="124"/>
+                                        </p:tgtEl>
+                                        <p:attrNameLst>
+                                          <p:attrName>style.visibility</p:attrName>
+                                        </p:attrNameLst>
+                                      </p:cBhvr>
+                                      <p:to>
+                                        <p:strVal val="visible"/>
+                                      </p:to>
+                                    </p:set>
+                                    <p:animEffect transition="in" filter="fade">
+                                      <p:cBhvr>
+                                        <p:cTn id="24" dur="500"/>
+                                        <p:tgtEl>
+                                          <p:spTgt spid="124"/>
+                                        </p:tgtEl>
+                                      </p:cBhvr>
+                                    </p:animEffect>
+                                  </p:childTnLst>
+                                </p:cTn>
+                              </p:par>
+                              <p:par>
+                                <p:cTn id="25" presetID="10" presetClass="entr" presetSubtype="0" fill="hold" nodeType="withEffect">
+                                  <p:stCondLst>
+                                    <p:cond delay="0"/>
+                                  </p:stCondLst>
+                                  <p:childTnLst>
+                                    <p:set>
+                                      <p:cBhvr>
+                                        <p:cTn id="26" dur="1" fill="hold">
+                                          <p:stCondLst>
+                                            <p:cond delay="0"/>
+                                          </p:stCondLst>
+                                        </p:cTn>
+                                        <p:tgtEl>
+                                          <p:spTgt spid="122"/>
+                                        </p:tgtEl>
+                                        <p:attrNameLst>
+                                          <p:attrName>style.visibility</p:attrName>
+                                        </p:attrNameLst>
+                                      </p:cBhvr>
+                                      <p:to>
+                                        <p:strVal val="visible"/>
+                                      </p:to>
+                                    </p:set>
+                                    <p:animEffect transition="in" filter="fade">
+                                      <p:cBhvr>
+                                        <p:cTn id="27" dur="500"/>
+                                        <p:tgtEl>
+                                          <p:spTgt spid="122"/>
+                                        </p:tgtEl>
+                                      </p:cBhvr>
+                                    </p:animEffect>
+                                  </p:childTnLst>
+                                </p:cTn>
+                              </p:par>
+                              <p:par>
+                                <p:cTn id="28" presetID="10" presetClass="entr" presetSubtype="0" fill="hold" nodeType="withEffect">
+                                  <p:stCondLst>
+                                    <p:cond delay="0"/>
+                                  </p:stCondLst>
+                                  <p:childTnLst>
+                                    <p:set>
+                                      <p:cBhvr>
+                                        <p:cTn id="29" dur="1" fill="hold">
+                                          <p:stCondLst>
+                                            <p:cond delay="0"/>
+                                          </p:stCondLst>
+                                        </p:cTn>
+                                        <p:tgtEl>
+                                          <p:spTgt spid="123"/>
+                                        </p:tgtEl>
+                                        <p:attrNameLst>
+                                          <p:attrName>style.visibility</p:attrName>
+                                        </p:attrNameLst>
+                                      </p:cBhvr>
+                                      <p:to>
+                                        <p:strVal val="visible"/>
+                                      </p:to>
+                                    </p:set>
+                                    <p:animEffect transition="in" filter="fade">
+                                      <p:cBhvr>
+                                        <p:cTn id="30" dur="500"/>
+                                        <p:tgtEl>
+                                          <p:spTgt spid="123"/>
+                                        </p:tgtEl>
+                                      </p:cBhvr>
+                                    </p:animEffect>
+                                  </p:childTnLst>
+                                </p:cTn>
+                              </p:par>
+                            </p:childTnLst>
+                          </p:cTn>
+                        </p:par>
+                      </p:childTnLst>
+                    </p:cTn>
+                  </p:par>
+                  <p:par>
+                    <p:cTn id="31" fill="hold">
+                      <p:stCondLst>
+                        <p:cond delay="indefinite"/>
+                      </p:stCondLst>
+                      <p:childTnLst>
+                        <p:par>
+                          <p:cTn id="32" fill="hold">
+                            <p:stCondLst>
+                              <p:cond delay="0"/>
+                            </p:stCondLst>
+                            <p:childTnLst>
+                              <p:par>
+                                <p:cTn id="33" presetID="10" presetClass="entr" presetSubtype="0" fill="hold" nodeType="clickEffect">
+                                  <p:stCondLst>
+                                    <p:cond delay="0"/>
+                                  </p:stCondLst>
+                                  <p:childTnLst>
+                                    <p:set>
+                                      <p:cBhvr>
+                                        <p:cTn id="34" dur="1" fill="hold">
+                                          <p:stCondLst>
+                                            <p:cond delay="0"/>
+                                          </p:stCondLst>
+                                        </p:cTn>
+                                        <p:tgtEl>
+                                          <p:spTgt spid="199"/>
+                                        </p:tgtEl>
+                                        <p:attrNameLst>
+                                          <p:attrName>style.visibility</p:attrName>
+                                        </p:attrNameLst>
+                                      </p:cBhvr>
+                                      <p:to>
+                                        <p:strVal val="visible"/>
+                                      </p:to>
+                                    </p:set>
+                                    <p:animEffect transition="in" filter="fade">
+                                      <p:cBhvr>
+                                        <p:cTn id="35" dur="500"/>
+                                        <p:tgtEl>
+                                          <p:spTgt spid="199"/>
+                                        </p:tgtEl>
+                                      </p:cBhvr>
+                                    </p:animEffect>
+                                  </p:childTnLst>
+                                </p:cTn>
+                              </p:par>
+                            </p:childTnLst>
+                          </p:cTn>
+                        </p:par>
+                      </p:childTnLst>
+                    </p:cTn>
+                  </p:par>
+                </p:childTnLst>
+              </p:cTn>
+              <p:prevCondLst>
+                <p:cond evt="onPrev" delay="0">
+                  <p:tgtEl>
+                    <p:sldTgt/>
+                  </p:tgtEl>
+                </p:cond>
+              </p:prevCondLst>
+              <p:nextCondLst>
+                <p:cond evt="onNext" delay="0">
+                  <p:tgtEl>
+                    <p:sldTgt/>
+                  </p:tgtEl>
+                </p:cond>
+              </p:nextCondLst>
+            </p:seq>
+          </p:childTnLst>
+        </p:cTn>
+      </p:par>
+    </p:tnLst>
+  </p:timing>
 </p:sld>
 </file>
 

--- a/course/lectures/act-2-delegation-and-control/02-modeling/2-2-Modeling-1-Purposeful-Reduction.pptx
+++ b/course/lectures/act-2-delegation-and-control/02-modeling/2-2-Modeling-1-Purposeful-Reduction.pptx
@@ -1528,7 +1528,7 @@
           <a:p>
             <a:r>
               <a:rPr dirty="0"/>
-              <a:t>Deck slide 29. A diagram is a representation, not a synonym for a model. The same recovery relation renders as a state diagram, a transition table, or structured text; the property — publication precedes the record — is statable whatever the encoding.</a:t>
+              <a:t>A diagram is a representation, not a synonym for a model. The same recovery relation renders as a state diagram, a transition table, or structured text; the property — publication precedes the record — is statable whatever the encoding.</a:t>
             </a:r>
           </a:p>
           <a:p>
@@ -1581,7 +1581,7 @@
           <a:p>
             <a:r>
               <a:rPr dirty="0"/>
-              <a:t>Deck slide 30. Merged R1.s25+s26 — the probabilistic seed motivates the asymmetry in one move. Seed P(agent correctly interprets c | r) and STOP THERE: no expected loss, no utility, no economics. Two representations of the same intended model differ in how reliably the claim is recovered.</a:t>
+              <a:t>Merged R1.s25+s26 — the probabilistic seed motivates the asymmetry in one move. Seed P(agent correctly interprets c | r) and STOP THERE: no expected loss, no utility, no economics. Two representations of the same intended model differ in how reliably the claim is recovered.</a:t>
             </a:r>
           </a:p>
           <a:p>
@@ -1634,7 +1634,7 @@
           <a:p>
             <a:r>
               <a:rPr dirty="0"/>
-              <a:t>Deck slide 31. ~9 minutes. Makes P(interpret) tangible without estimating a number — do not ask students for a number.</a:t>
+              <a:t>~9 minutes. Makes P(interpret) tangible without estimating a number — do not ask students for a number.</a:t>
             </a:r>
           </a:p>
           <a:p>
@@ -1699,7 +1699,7 @@
           <a:p>
             <a:r>
               <a:rPr dirty="0"/>
-              <a:t>Deck slide 32. ~2 minutes; compresses to 1 if needed. Reprise, not new content — the couplet was earned at slides 15/17/18 and adjudicated at 23. Read the couplet, land the ital line, then the teaser names Deck 2's problem in one sentence and stops.</a:t>
+              <a:t>~2 minutes; compresses to 1 if needed. Reprise, not new content — the couplet was earned in Section 2 — top-down, bottom-up, then the worked controller — and adjudicated on “Capability cannot reduce what must be true”. Read the couplet, land the ital line, then the teaser names Deck 2's problem in one sentence and stops.</a:t>
             </a:r>
           </a:p>
           <a:p>

--- a/course/lectures/act-2-delegation-and-control/02-modeling/2-2-Modeling-1-Purposeful-Reduction.pptx
+++ b/course/lectures/act-2-delegation-and-control/02-modeling/2-2-Modeling-1-Purposeful-Reduction.pptx
@@ -1345,7 +1345,13 @@
           <a:p>
             <a:r>
               <a:rPr dirty="0"/>
-              <a:t>THE REVEAL. The limit case makes the asymmetry exact: for a fixed representation R, as M approaches a perfect reasoner and the interpretation and realization factors approach one, p_R goes to P(E | R). Every symbol is already known — T, M, R and H from the production equation, E, I and L from the chain decomposition, obligation and scaffolding and degrees of freedom from the argument just made. That is why it was held back until here.</a:t>
+              <a:t>THE REVEAL, in three beats. Beat 1: the chain from “Open the box”, unchanged, with the encoding factor set in bold. Beat 2: a perfect reasoner drives interpretation and realization to one. Beat 3: what is left is the limit — for a fixed representation R, p_R goes to P(E | R).</a:t>
+            </a:r>
+          </a:p>
+          <a:p>
+            <a:r>
+              <a:rPr dirty="0"/>
+              <a:t>Every symbol is already known: T, M, R and H from the production equation, E, I and L from the chain decomposition, obligation and scaffolding and degrees of freedom from the argument just made. That is why the limit was held back until here. Read it off the chain rather than announcing it — the room should watch the last two factors go to one.</a:t>
             </a:r>
           </a:p>
           <a:p>
@@ -1357,7 +1363,7 @@
           <a:p>
             <a:r>
               <a:rPr dirty="0"/>
-              <a:t>The band is the figure from “Open the box” and it is deliberately BARE here — no red MODELING CHANGES THE REPRESENTATION overlay. This slide argues that even a perfect reasoner stays bounded by P(E | R); the Modeling-lever annotation would fight that claim. Point at the FIRST term as you read the limit.</a:t>
+              <a:t>The opening band figure is deliberately NOT reprised here. At the size this slide can spare, its internal type projects at four to seven pixels, and its red MODELING CHANGES THE REPRESENTATION overlay would in any case fight a slide that argues a perfect reasoner stays bounded by P(E | R). The chain line carries the same recall at a size the back row can read.</a:t>
             </a:r>
           </a:p>
           <a:p>
@@ -15063,8 +15069,8 @@
         </p:nvSpPr>
         <p:spPr>
           <a:xfrm>
-            <a:off x="1005840" y="2103120"/>
-            <a:ext cx="4023360" cy="2377440"/>
+            <a:off x="777240" y="1943100"/>
+            <a:ext cx="4480560" cy="2697480"/>
           </a:xfrm>
           <a:prstGeom prst="rect">
             <a:avLst/>
@@ -15095,8 +15101,8 @@
         </p:nvSpPr>
         <p:spPr>
           <a:xfrm>
-            <a:off x="1508760" y="2560320"/>
-            <a:ext cx="3017520" cy="1005840"/>
+            <a:off x="1737360" y="2743200"/>
+            <a:ext cx="2606040" cy="1005840"/>
           </a:xfrm>
           <a:prstGeom prst="rect">
             <a:avLst/>
@@ -15124,7 +15130,7 @@
                   <a:srgbClr val="FFFFFF"/>
                 </a:solidFill>
               </a:rPr>
-              <a:t>OBLIGATION</a:t>
+              <a:t xml:space="preserve">OBLIGATION</a:t>
             </a:r>
           </a:p>
           <a:p>
@@ -15140,7 +15146,7 @@
                   <a:srgbClr val="FFFFFF"/>
                 </a:solidFill>
               </a:rPr>
-              <a:t>what must be true</a:t>
+              <a:t xml:space="preserve">what must be true</a:t>
             </a:r>
           </a:p>
         </p:txBody>
@@ -15153,8 +15159,8 @@
         </p:nvSpPr>
         <p:spPr>
           <a:xfrm>
-            <a:off x="1005840" y="3794760"/>
-            <a:ext cx="4023360" cy="329184"/>
+            <a:off x="1280160" y="3886200"/>
+            <a:ext cx="3520440" cy="329184"/>
           </a:xfrm>
           <a:prstGeom prst="rect">
             <a:avLst/>
@@ -15180,7 +15186,7 @@
                   <a:srgbClr val="5C4826"/>
                 </a:solidFill>
               </a:rPr>
-              <a:t>SCAFFOLDING — what this agent needs</a:t>
+              <a:t xml:space="preserve">SCAFFOLDING — what this agent needs</a:t>
             </a:r>
           </a:p>
         </p:txBody>
@@ -15193,8 +15199,8 @@
         </p:nvSpPr>
         <p:spPr>
           <a:xfrm>
-            <a:off x="502920" y="4526280"/>
-            <a:ext cx="5029200" cy="274320"/>
+            <a:off x="502920" y="4640580"/>
+            <a:ext cx="5029200" cy="205740"/>
           </a:xfrm>
           <a:prstGeom prst="rect">
             <a:avLst/>
@@ -15205,7 +15211,7 @@
           </a:ln>
         </p:spPr>
         <p:txBody>
-          <a:bodyPr wrap="square" lIns="0" tIns="0" rIns="0" bIns="0" anchor="t"/>
+          <a:bodyPr wrap="square" lIns="0" tIns="0" rIns="0" bIns="0" anchor="ctr"/>
           <a:lstStyle/>
           <a:p>
             <a:pPr algn="ctr">
@@ -15215,12 +15221,12 @@
               <a:buNone/>
             </a:pPr>
             <a:r>
-              <a:rPr lang="en-US" sz="1400" b="0" dirty="0">
+              <a:rPr lang="en-US" sz="1300" b="0" dirty="0">
                 <a:solidFill>
                   <a:srgbClr val="555960"/>
                 </a:solidFill>
               </a:rPr>
-              <a:t>DEGREES OF FREEDOM — the rest is the agent’s</a:t>
+              <a:t xml:space="preserve">DEGREES OF FREEDOM — the rest is the agent’s</a:t>
             </a:r>
           </a:p>
         </p:txBody>
@@ -15233,7 +15239,7 @@
         </p:nvSpPr>
         <p:spPr>
           <a:xfrm>
-            <a:off x="5806440" y="1965960"/>
+            <a:off x="5806440" y="1897380"/>
             <a:ext cx="3017520" cy="548640"/>
           </a:xfrm>
           <a:prstGeom prst="rect">
@@ -15255,12 +15261,12 @@
               <a:buNone/>
             </a:pPr>
             <a:r>
-              <a:rPr lang="en-US" sz="1600" b="1" dirty="0">
+              <a:rPr lang="en-US" sz="1500" b="1" dirty="0">
                 <a:solidFill>
                   <a:srgbClr val="8E6F3E"/>
                 </a:solidFill>
               </a:rPr>
-              <a:t>specification boundary</a:t>
+              <a:t xml:space="preserve">specification boundary</a:t>
             </a:r>
           </a:p>
           <a:p>
@@ -15276,7 +15282,7 @@
                   <a:srgbClr val="555960"/>
                 </a:solidFill>
               </a:rPr>
-              <a:t>the edge of what we write down</a:t>
+              <a:t xml:space="preserve">the edge of what we write down</a:t>
             </a:r>
           </a:p>
         </p:txBody>
@@ -15289,8 +15295,8 @@
         </p:nvCxnSpPr>
         <p:spPr>
           <a:xfrm>
-            <a:off x="5074920" y="2240280"/>
-            <a:ext cx="685800" cy="0"/>
+            <a:off x="5303520" y="2171700"/>
+            <a:ext cx="457200" cy="0"/>
           </a:xfrm>
           <a:prstGeom prst="straightConnector1">
             <a:avLst/>
@@ -15311,7 +15317,7 @@
         </p:nvSpPr>
         <p:spPr>
           <a:xfrm>
-            <a:off x="5806440" y="2743200"/>
+            <a:off x="5806440" y="2651760"/>
             <a:ext cx="3017520" cy="548640"/>
           </a:xfrm>
           <a:prstGeom prst="rect">
@@ -15333,12 +15339,12 @@
               <a:buNone/>
             </a:pPr>
             <a:r>
-              <a:rPr lang="en-US" sz="1600" b="1" dirty="0">
+              <a:rPr lang="en-US" sz="1500" b="1" dirty="0">
                 <a:solidFill>
                   <a:srgbClr val="5C4826"/>
                 </a:solidFill>
               </a:rPr>
-              <a:t>obligation boundary</a:t>
+              <a:t xml:space="preserve">obligation boundary</a:t>
             </a:r>
           </a:p>
           <a:p>
@@ -15354,7 +15360,7 @@
                   <a:srgbClr val="555960"/>
                 </a:solidFill>
               </a:rPr>
-              <a:t>fixed by what must be true</a:t>
+              <a:t xml:space="preserve">fixed by what must be true</a:t>
             </a:r>
           </a:p>
         </p:txBody>
@@ -15367,8 +15373,8 @@
         </p:nvCxnSpPr>
         <p:spPr>
           <a:xfrm>
-            <a:off x="4572000" y="3017520"/>
-            <a:ext cx="1188720" cy="0"/>
+            <a:off x="4389120" y="2926080"/>
+            <a:ext cx="1371600" cy="0"/>
           </a:xfrm>
           <a:prstGeom prst="straightConnector1">
             <a:avLst/>
@@ -15389,8 +15395,8 @@
         </p:nvSpPr>
         <p:spPr>
           <a:xfrm>
-            <a:off x="1371600" y="2331720"/>
-            <a:ext cx="3291840" cy="1965960"/>
+            <a:off x="1280160" y="2286000"/>
+            <a:ext cx="3520440" cy="2011680"/>
           </a:xfrm>
           <a:prstGeom prst="rect">
             <a:avLst/>
@@ -15422,8 +15428,8 @@
         </p:nvCxnSpPr>
         <p:spPr>
           <a:xfrm>
-            <a:off x="4663440" y="3566160"/>
-            <a:ext cx="1005840" cy="0"/>
+            <a:off x="4846320" y="3520440"/>
+            <a:ext cx="822960" cy="0"/>
           </a:xfrm>
           <a:prstGeom prst="straightConnector1">
             <a:avLst/>
@@ -15444,7 +15450,7 @@
         </p:nvSpPr>
         <p:spPr>
           <a:xfrm>
-            <a:off x="5806440" y="3429000"/>
+            <a:off x="5806440" y="3383280"/>
             <a:ext cx="3017520" cy="868680"/>
           </a:xfrm>
           <a:prstGeom prst="rect">
@@ -15468,10 +15474,10 @@
             <a:r>
               <a:rPr lang="en-US" sz="1500" b="1" dirty="0">
                 <a:solidFill>
-                  <a:srgbClr val="5C4826"/>
-                </a:solidFill>
-              </a:rPr>
-              <a:t>a more capable agent</a:t>
+                  <a:srgbClr val="8E6F3E"/>
+                </a:solidFill>
+              </a:rPr>
+              <a:t xml:space="preserve">specification boundary</a:t>
             </a:r>
           </a:p>
           <a:p>
@@ -15487,7 +15493,7 @@
                   <a:srgbClr val="555960"/>
                 </a:solidFill>
               </a:rPr>
-              <a:t>needs less scaffolding, so this boundary moves in</a:t>
+              <a:t xml:space="preserve">for a more capable agent, it moves in</a:t>
             </a:r>
           </a:p>
         </p:txBody>
@@ -16072,7 +16078,7 @@
         <p:spPr>
           <a:xfrm>
             <a:off x="1737360" y="2240280"/>
-            <a:ext cx="0" cy="411480"/>
+            <a:ext cx="0" cy="320040"/>
           </a:xfrm>
           <a:prstGeom prst="straightConnector1">
             <a:avLst/>
@@ -16094,7 +16100,7 @@
         </p:nvSpPr>
         <p:spPr>
           <a:xfrm>
-            <a:off x="845820" y="2697480"/>
+            <a:off x="845820" y="2606040"/>
             <a:ext cx="1783080" cy="402336"/>
           </a:xfrm>
           <a:prstGeom prst="rect">
@@ -16138,7 +16144,7 @@
         </p:nvSpPr>
         <p:spPr>
           <a:xfrm>
-            <a:off x="685800" y="3154680"/>
+            <a:off x="685800" y="3063240"/>
             <a:ext cx="2103120" cy="274320"/>
           </a:xfrm>
           <a:prstGeom prst="rect">
@@ -16178,8 +16184,8 @@
         </p:nvSpPr>
         <p:spPr>
           <a:xfrm>
-            <a:off x="6126480" y="2423160"/>
-            <a:ext cx="2743200" cy="548640"/>
+            <a:off x="6172200" y="2514600"/>
+            <a:ext cx="2697480" cy="548640"/>
           </a:xfrm>
           <a:prstGeom prst="rect">
             <a:avLst/>
@@ -16218,7 +16224,7 @@
         </p:nvSpPr>
         <p:spPr>
           <a:xfrm>
-            <a:off x="274320" y="3566160"/>
+            <a:off x="274320" y="3474720"/>
             <a:ext cx="8595360" cy="365760"/>
           </a:xfrm>
           <a:prstGeom prst="rect">
@@ -16250,40 +16256,16 @@
           </a:p>
         </p:txBody>
       </p:sp>
-      <p:pic>
-        <p:nvPicPr>
-          <p:cNvPr id="30" name="BandPic" descr="Small reprise of the production process band: Engineering intent to Encoded property to Fabricator to Realization, with the three probability terms P(E | R), P(I | E, R) and P(L | I, E, R) bracketed beneath."/>
-          <p:cNvPicPr>
-            <a:picLocks noChangeAspect="1"/>
-          </p:cNvPicPr>
-          <p:nvPr/>
-        </p:nvPicPr>
-        <p:blipFill>
-          <a:blip r:embed="rId3"/>
-          <a:stretch>
-            <a:fillRect/>
-          </a:stretch>
-        </p:blipFill>
-        <p:spPr>
-          <a:xfrm>
-            <a:off x="365760" y="4200000"/>
-            <a:ext cx="3200400" cy="1185206"/>
-          </a:xfrm>
-          <a:prstGeom prst="rect">
-            <a:avLst/>
-          </a:prstGeom>
-        </p:spPr>
-      </p:pic>
-      <p:sp>
-        <p:nvSpPr>
-          <p:cNvPr id="31" name="LimK"/>
+      <p:sp>
+        <p:nvSpPr>
+          <p:cNvPr id="30" name="ChEq"/>
           <p:cNvSpPr txBox="1"/>
           <p:nvPr/>
         </p:nvSpPr>
         <p:spPr>
           <a:xfrm>
-            <a:off x="3886200" y="4114800"/>
-            <a:ext cx="4983480" cy="274320"/>
+            <a:off x="274320" y="4023360"/>
+            <a:ext cx="8595360" cy="365760"/>
           </a:xfrm>
           <a:prstGeom prst="rect">
             <a:avLst/>
@@ -16294,36 +16276,68 @@
           </a:ln>
         </p:spPr>
         <p:txBody>
-          <a:bodyPr wrap="square" lIns="0" tIns="0" rIns="0" bIns="0" anchor="t"/>
-          <a:lstStyle/>
-          <a:p>
-            <a:pPr algn="l">
+          <a:bodyPr wrap="square" lIns="0" tIns="0" rIns="0" bIns="0" anchor="ctr"/>
+          <a:lstStyle/>
+          <a:p>
+            <a:pPr algn="ctr">
               <a:spcAft>
                 <a:spcPts val="0"/>
               </a:spcAft>
               <a:buNone/>
             </a:pPr>
             <a:r>
-              <a:rPr lang="en-US" sz="1400" b="1" dirty="0">
-                <a:solidFill>
-                  <a:srgbClr val="8E6F3E"/>
-                </a:solidFill>
-              </a:rPr>
-              <a:t>THE LIMIT CASE</a:t>
-            </a:r>
-          </a:p>
-        </p:txBody>
-      </p:sp>
-      <p:sp>
-        <p:nvSpPr>
-          <p:cNvPr id="32" name="LimEq"/>
+              <a:rPr lang="en-US" sz="1600" b="0" i="1" dirty="0">
+                <a:solidFill>
+                  <a:srgbClr val="5C4826"/>
+                </a:solidFill>
+              </a:rPr>
+              <a:t xml:space="preserve">p</a:t>
+            </a:r>
+            <a:r>
+              <a:rPr lang="en-US" sz="1600" b="0" i="1" baseline="-25000" dirty="0">
+                <a:solidFill>
+                  <a:srgbClr val="5C4826"/>
+                </a:solidFill>
+              </a:rPr>
+              <a:t xml:space="preserve">R</a:t>
+            </a:r>
+            <a:r>
+              <a:rPr lang="en-US" sz="1600" b="0" i="1" dirty="0">
+                <a:solidFill>
+                  <a:srgbClr val="5C4826"/>
+                </a:solidFill>
+              </a:rPr>
+              <a:t xml:space="preserve"> = </a:t>
+            </a:r>
+            <a:r>
+              <a:rPr lang="en-US" sz="1600" b="1" i="1" dirty="0">
+                <a:solidFill>
+                  <a:srgbClr val="5C4826"/>
+                </a:solidFill>
+              </a:rPr>
+              <a:t xml:space="preserve">P(E | R)</a:t>
+            </a:r>
+            <a:r>
+              <a:rPr lang="en-US" sz="1600" b="0" i="1" dirty="0">
+                <a:solidFill>
+                  <a:srgbClr val="555960"/>
+                </a:solidFill>
+              </a:rPr>
+              <a:t xml:space="preserve"> · P(I | E, R) · P(L | I, E, R)</a:t>
+            </a:r>
+          </a:p>
+        </p:txBody>
+      </p:sp>
+      <p:sp>
+        <p:nvSpPr>
+          <p:cNvPr id="31" name="ChCap"/>
           <p:cNvSpPr txBox="1"/>
           <p:nvPr/>
         </p:nvSpPr>
         <p:spPr>
           <a:xfrm>
-            <a:off x="3886200" y="4457700"/>
-            <a:ext cx="4983480" cy="594360"/>
+            <a:off x="274320" y="4389120"/>
+            <a:ext cx="8595360" cy="274320"/>
           </a:xfrm>
           <a:prstGeom prst="rect">
             <a:avLst/>
@@ -16334,68 +16348,36 @@
           </a:ln>
         </p:spPr>
         <p:txBody>
-          <a:bodyPr wrap="square" lIns="0" tIns="0" rIns="0" bIns="0" anchor="ctr"/>
-          <a:lstStyle/>
-          <a:p>
-            <a:pPr algn="l">
+          <a:bodyPr wrap="square" lIns="0" tIns="0" rIns="0" bIns="0" anchor="t"/>
+          <a:lstStyle/>
+          <a:p>
+            <a:pPr algn="ctr">
               <a:spcAft>
                 <a:spcPts val="0"/>
               </a:spcAft>
               <a:buNone/>
             </a:pPr>
             <a:r>
-              <a:rPr lang="en-US" sz="2600" b="0" i="1" dirty="0">
-                <a:solidFill>
-                  <a:srgbClr val="5C4826"/>
-                </a:solidFill>
-              </a:rPr>
-              <a:t>lim</a:t>
-            </a:r>
-            <a:r>
-              <a:rPr lang="en-US" sz="1500" b="0" i="1" baseline="-25000" dirty="0">
-                <a:solidFill>
-                  <a:srgbClr val="5C4826"/>
-                </a:solidFill>
-              </a:rPr>
-              <a:t xml:space="preserve">M → perfect reasoner</a:t>
-            </a:r>
-            <a:r>
-              <a:rPr lang="en-US" sz="2600" b="0" i="1" dirty="0">
-                <a:solidFill>
-                  <a:srgbClr val="5C4826"/>
-                </a:solidFill>
-              </a:rPr>
-              <a:t xml:space="preserve">  p</a:t>
-            </a:r>
-            <a:r>
-              <a:rPr lang="en-US" sz="2600" b="0" i="1" baseline="-25000" dirty="0">
-                <a:solidFill>
-                  <a:srgbClr val="5C4826"/>
-                </a:solidFill>
-              </a:rPr>
-              <a:t>R</a:t>
-            </a:r>
-            <a:r>
-              <a:rPr lang="en-US" sz="2600" b="0" i="1" dirty="0">
-                <a:solidFill>
-                  <a:srgbClr val="5C4826"/>
-                </a:solidFill>
-              </a:rPr>
-              <a:t xml:space="preserve"> = P(E | R)</a:t>
-            </a:r>
-          </a:p>
-        </p:txBody>
-      </p:sp>
-      <p:sp>
-        <p:nvSpPr>
-          <p:cNvPr id="33" name="LimCap"/>
+              <a:rPr lang="en-US" sz="1400" b="0" i="1" dirty="0">
+                <a:solidFill>
+                  <a:srgbClr val="555960"/>
+                </a:solidFill>
+              </a:rPr>
+              <a:t xml:space="preserve">a perfect reasoner drives the last two factors to one</a:t>
+            </a:r>
+          </a:p>
+        </p:txBody>
+      </p:sp>
+      <p:sp>
+        <p:nvSpPr>
+          <p:cNvPr id="32" name="LimEq"/>
           <p:cNvSpPr txBox="1"/>
           <p:nvPr/>
         </p:nvSpPr>
         <p:spPr>
           <a:xfrm>
-            <a:off x="3886200" y="5111750"/>
-            <a:ext cx="4983480" cy="457200"/>
+            <a:off x="274320" y="4800600"/>
+            <a:ext cx="8595360" cy="685800"/>
           </a:xfrm>
           <a:prstGeom prst="rect">
             <a:avLst/>
@@ -16406,17 +16388,89 @@
           </a:ln>
         </p:spPr>
         <p:txBody>
-          <a:bodyPr wrap="square" lIns="0" tIns="0" rIns="0" bIns="0" anchor="t"/>
-          <a:lstStyle/>
-          <a:p>
-            <a:pPr algn="l">
+          <a:bodyPr wrap="square" lIns="0" tIns="0" rIns="0" bIns="0" anchor="ctr"/>
+          <a:lstStyle/>
+          <a:p>
+            <a:pPr algn="ctr">
               <a:spcAft>
                 <a:spcPts val="0"/>
               </a:spcAft>
               <a:buNone/>
             </a:pPr>
             <a:r>
-              <a:rPr lang="en-US" sz="1400" b="0" dirty="0">
+              <a:rPr lang="en-US" sz="3000" b="0" i="1" dirty="0">
+                <a:solidFill>
+                  <a:srgbClr val="5C4826"/>
+                </a:solidFill>
+              </a:rPr>
+              <a:t xml:space="preserve">lim</a:t>
+            </a:r>
+            <a:r>
+              <a:rPr lang="en-US" sz="3000" b="0" i="1" baseline="-25000" dirty="0">
+                <a:solidFill>
+                  <a:srgbClr val="5C4826"/>
+                </a:solidFill>
+              </a:rPr>
+              <a:t xml:space="preserve">M → perfect reasoner</a:t>
+            </a:r>
+            <a:r>
+              <a:rPr lang="en-US" sz="3000" b="0" i="1" dirty="0">
+                <a:solidFill>
+                  <a:srgbClr val="5C4826"/>
+                </a:solidFill>
+              </a:rPr>
+              <a:t xml:space="preserve">  p</a:t>
+            </a:r>
+            <a:r>
+              <a:rPr lang="en-US" sz="3000" b="0" i="1" baseline="-25000" dirty="0">
+                <a:solidFill>
+                  <a:srgbClr val="5C4826"/>
+                </a:solidFill>
+              </a:rPr>
+              <a:t xml:space="preserve">R</a:t>
+            </a:r>
+            <a:r>
+              <a:rPr lang="en-US" sz="3000" b="0" i="1" dirty="0">
+                <a:solidFill>
+                  <a:srgbClr val="5C4826"/>
+                </a:solidFill>
+              </a:rPr>
+              <a:t xml:space="preserve"> = P(E | R)</a:t>
+            </a:r>
+          </a:p>
+        </p:txBody>
+      </p:sp>
+      <p:sp>
+        <p:nvSpPr>
+          <p:cNvPr id="33" name="LimCap"/>
+          <p:cNvSpPr txBox="1"/>
+          <p:nvPr/>
+        </p:nvSpPr>
+        <p:spPr>
+          <a:xfrm>
+            <a:off x="274320" y="5486400"/>
+            <a:ext cx="8595360" cy="274320"/>
+          </a:xfrm>
+          <a:prstGeom prst="rect">
+            <a:avLst/>
+          </a:prstGeom>
+          <a:noFill/>
+          <a:ln>
+            <a:noFill/>
+          </a:ln>
+        </p:spPr>
+        <p:txBody>
+          <a:bodyPr wrap="square" lIns="0" tIns="0" rIns="0" bIns="0" anchor="t"/>
+          <a:lstStyle/>
+          <a:p>
+            <a:pPr algn="ctr">
+              <a:spcAft>
+                <a:spcPts val="0"/>
+              </a:spcAft>
+              <a:buNone/>
+            </a:pPr>
+            <a:r>
+              <a:rPr lang="en-US" sz="1400" b="0" i="1" dirty="0">
                 <a:solidFill>
                   <a:srgbClr val="555960"/>
                 </a:solidFill>
@@ -16592,41 +16646,6 @@
                                         <p:cTn id="13" dur="500"/>
                                         <p:tgtEl>
                                           <p:spTgt spid="32"/>
-                                        </p:tgtEl>
-                                      </p:cBhvr>
-                                    </p:animEffect>
-                                  </p:childTnLst>
-                                </p:cTn>
-                              </p:par>
-                              <p:par>
-                                <p:cTn id="14" presetID="10" presetClass="entr" presetSubtype="0" fill="hold" nodeType="withEffect">
-                                  <p:stCondLst>
-                                    <p:cond delay="0"/>
-                                  </p:stCondLst>
-                                  <p:childTnLst>
-                                    <p:set>
-                                      <p:cBhvr>
-                                        <p:cTn id="15" dur="1" fill="hold">
-                                          <p:stCondLst>
-                                            <p:cond delay="0"/>
-                                          </p:stCondLst>
-                                        </p:cTn>
-                                        <p:tgtEl>
-                                          <p:spTgt spid="33"/>
-                                        </p:tgtEl>
-                                        <p:attrNameLst>
-                                          <p:attrName>style.visibility</p:attrName>
-                                        </p:attrNameLst>
-                                      </p:cBhvr>
-                                      <p:to>
-                                        <p:strVal val="visible"/>
-                                      </p:to>
-                                    </p:set>
-                                    <p:animEffect transition="in" filter="fade">
-                                      <p:cBhvr>
-                                        <p:cTn id="16" dur="500"/>
-                                        <p:tgtEl>
-                                          <p:spTgt spid="33"/>
                                         </p:tgtEl>
                                       </p:cBhvr>
                                     </p:animEffect>

--- a/course/lectures/act-2-delegation-and-control/02-modeling/2-2-Modeling-1-Purposeful-Reduction.pptx
+++ b/course/lectures/act-2-delegation-and-control/02-modeling/2-2-Modeling-1-Purposeful-Reduction.pptx
@@ -15078,8 +15078,10 @@
           <a:solidFill>
             <a:srgbClr val="C9B991"/>
           </a:solidFill>
-          <a:ln>
-            <a:noFill/>
+          <a:ln w="28575">
+            <a:solidFill>
+              <a:srgbClr val="8E6F3E"/>
+            </a:solidFill>
           </a:ln>
         </p:spPr>
         <p:txBody>
@@ -15239,7 +15241,7 @@
         </p:nvSpPr>
         <p:spPr>
           <a:xfrm>
-            <a:off x="5806440" y="1897380"/>
+            <a:off x="5806440" y="2011680"/>
             <a:ext cx="3017520" cy="548640"/>
           </a:xfrm>
           <a:prstGeom prst="rect">
@@ -15295,15 +15297,15 @@
         </p:nvCxnSpPr>
         <p:spPr>
           <a:xfrm>
-            <a:off x="5303520" y="2171700"/>
-            <a:ext cx="457200" cy="0"/>
+            <a:off x="5303520" y="2286000"/>
+            <a:ext cx="365760" cy="0"/>
           </a:xfrm>
           <a:prstGeom prst="straightConnector1">
             <a:avLst/>
           </a:prstGeom>
-          <a:ln w="12700">
+          <a:ln w="19050">
             <a:solidFill>
-              <a:srgbClr val="555960"/>
+              <a:srgbClr val="8E6F3E"/>
             </a:solidFill>
             <a:headEnd type="triangle" w="med" len="med"/>
           </a:ln>
@@ -15317,7 +15319,7 @@
         </p:nvSpPr>
         <p:spPr>
           <a:xfrm>
-            <a:off x="5806440" y="2651760"/>
+            <a:off x="5806440" y="2926080"/>
             <a:ext cx="3017520" cy="548640"/>
           </a:xfrm>
           <a:prstGeom prst="rect">
@@ -15373,39 +15375,39 @@
         </p:nvCxnSpPr>
         <p:spPr>
           <a:xfrm>
-            <a:off x="4389120" y="2926080"/>
-            <a:ext cx="1371600" cy="0"/>
+            <a:off x="4389120" y="3200400"/>
+            <a:ext cx="1280160" cy="0"/>
           </a:xfrm>
           <a:prstGeom prst="straightConnector1">
             <a:avLst/>
           </a:prstGeom>
-          <a:ln w="12700">
-            <a:solidFill>
-              <a:srgbClr val="555960"/>
-            </a:solidFill>
-            <a:headEnd type="triangle" w="med" len="med"/>
-          </a:ln>
-        </p:spPr>
-      </p:cxnSp>
-      <p:sp>
-        <p:nvSpPr>
-          <p:cNvPr id="20" name="Scaf2"/>
-          <p:cNvSpPr/>
-          <p:nvPr/>
-        </p:nvSpPr>
-        <p:spPr>
-          <a:xfrm>
-            <a:off x="1280160" y="2286000"/>
-            <a:ext cx="3520440" cy="2011680"/>
-          </a:xfrm>
-          <a:prstGeom prst="rect">
-            <a:avLst/>
-          </a:prstGeom>
-          <a:noFill/>
           <a:ln w="19050">
             <a:solidFill>
               <a:srgbClr val="5C4826"/>
             </a:solidFill>
+            <a:headEnd type="triangle" w="med" len="med"/>
+          </a:ln>
+        </p:spPr>
+      </p:cxnSp>
+      <p:sp>
+        <p:nvSpPr>
+          <p:cNvPr id="20" name="Scaf2"/>
+          <p:cNvSpPr/>
+          <p:nvPr/>
+        </p:nvSpPr>
+        <p:spPr>
+          <a:xfrm>
+            <a:off x="1280160" y="2286000"/>
+            <a:ext cx="3520440" cy="2011680"/>
+          </a:xfrm>
+          <a:prstGeom prst="rect">
+            <a:avLst/>
+          </a:prstGeom>
+          <a:noFill/>
+          <a:ln w="28575">
+            <a:solidFill>
+              <a:srgbClr val="8E6F3E"/>
+            </a:solidFill>
             <a:prstDash val="dash"/>
           </a:ln>
         </p:spPr>
@@ -15428,7 +15430,7 @@
         </p:nvCxnSpPr>
         <p:spPr>
           <a:xfrm>
-            <a:off x="4846320" y="3520440"/>
+            <a:off x="4846320" y="3931920"/>
             <a:ext cx="822960" cy="0"/>
           </a:xfrm>
           <a:prstGeom prst="straightConnector1">
@@ -15436,7 +15438,7 @@
           </a:prstGeom>
           <a:ln w="28575">
             <a:solidFill>
-              <a:srgbClr val="5C4826"/>
+              <a:srgbClr val="8E6F3E"/>
             </a:solidFill>
             <a:headEnd type="triangle" w="med" len="med"/>
           </a:ln>
@@ -15450,7 +15452,7 @@
         </p:nvSpPr>
         <p:spPr>
           <a:xfrm>
-            <a:off x="5806440" y="3383280"/>
+            <a:off x="5806440" y="3657600"/>
             <a:ext cx="3017520" cy="868680"/>
           </a:xfrm>
           <a:prstGeom prst="rect">
@@ -16264,8 +16266,8 @@
         </p:nvSpPr>
         <p:spPr>
           <a:xfrm>
-            <a:off x="274320" y="4023360"/>
-            <a:ext cx="8595360" cy="365760"/>
+            <a:off x="274320" y="3977640"/>
+            <a:ext cx="8595360" cy="411480"/>
           </a:xfrm>
           <a:prstGeom prst="rect">
             <a:avLst/>
@@ -16286,7 +16288,7 @@
               <a:buNone/>
             </a:pPr>
             <a:r>
-              <a:rPr lang="en-US" sz="1600" b="0" i="1" dirty="0">
+              <a:rPr lang="en-US" sz="2200" b="0" i="1" dirty="0">
                 <a:solidFill>
                   <a:srgbClr val="5C4826"/>
                 </a:solidFill>
@@ -16294,7 +16296,7 @@
               <a:t xml:space="preserve">p</a:t>
             </a:r>
             <a:r>
-              <a:rPr lang="en-US" sz="1600" b="0" i="1" baseline="-25000" dirty="0">
+              <a:rPr lang="en-US" sz="2200" b="0" i="1" baseline="-25000" dirty="0">
                 <a:solidFill>
                   <a:srgbClr val="5C4826"/>
                 </a:solidFill>
@@ -16302,7 +16304,7 @@
               <a:t xml:space="preserve">R</a:t>
             </a:r>
             <a:r>
-              <a:rPr lang="en-US" sz="1600" b="0" i="1" dirty="0">
+              <a:rPr lang="en-US" sz="2200" b="0" i="1" dirty="0">
                 <a:solidFill>
                   <a:srgbClr val="5C4826"/>
                 </a:solidFill>
@@ -16310,7 +16312,7 @@
               <a:t xml:space="preserve"> = </a:t>
             </a:r>
             <a:r>
-              <a:rPr lang="en-US" sz="1600" b="1" i="1" dirty="0">
+              <a:rPr lang="en-US" sz="2200" b="1" i="1" dirty="0">
                 <a:solidFill>
                   <a:srgbClr val="5C4826"/>
                 </a:solidFill>
@@ -16318,9 +16320,9 @@
               <a:t xml:space="preserve">P(E | R)</a:t>
             </a:r>
             <a:r>
-              <a:rPr lang="en-US" sz="1600" b="0" i="1" dirty="0">
-                <a:solidFill>
-                  <a:srgbClr val="555960"/>
+              <a:rPr lang="en-US" sz="2200" b="0" i="1" dirty="0">
+                <a:solidFill>
+                  <a:srgbClr val="5C4826"/>
                 </a:solidFill>
               </a:rPr>
               <a:t xml:space="preserve"> · P(I | E, R) · P(L | I, E, R)</a:t>
@@ -16398,28 +16400,28 @@
               <a:buNone/>
             </a:pPr>
             <a:r>
+              <a:rPr lang="en-US" sz="3000" b="0" dirty="0">
+                <a:solidFill>
+                  <a:srgbClr val="5C4826"/>
+                </a:solidFill>
+              </a:rPr>
+              <a:t xml:space="preserve">lim</a:t>
+            </a:r>
+            <a:r>
+              <a:rPr lang="en-US" sz="3000" b="0" baseline="-25000" dirty="0">
+                <a:solidFill>
+                  <a:srgbClr val="5C4826"/>
+                </a:solidFill>
+              </a:rPr>
+              <a:t xml:space="preserve">M → perfect reasoner</a:t>
+            </a:r>
+            <a:r>
               <a:rPr lang="en-US" sz="3000" b="0" i="1" dirty="0">
                 <a:solidFill>
                   <a:srgbClr val="5C4826"/>
                 </a:solidFill>
               </a:rPr>
-              <a:t xml:space="preserve">lim</a:t>
-            </a:r>
-            <a:r>
-              <a:rPr lang="en-US" sz="3000" b="0" i="1" baseline="-25000" dirty="0">
-                <a:solidFill>
-                  <a:srgbClr val="5C4826"/>
-                </a:solidFill>
-              </a:rPr>
-              <a:t xml:space="preserve">M → perfect reasoner</a:t>
-            </a:r>
-            <a:r>
-              <a:rPr lang="en-US" sz="3000" b="0" i="1" dirty="0">
-                <a:solidFill>
-                  <a:srgbClr val="5C4826"/>
-                </a:solidFill>
-              </a:rPr>
-              <a:t xml:space="preserve">  p</a:t>
+              <a:t xml:space="preserve">     p</a:t>
             </a:r>
             <a:r>
               <a:rPr lang="en-US" sz="3000" b="0" i="1" baseline="-25000" dirty="0">

--- a/course/lectures/act-2-delegation-and-control/02-modeling/2-2-Modeling-1-Purposeful-Reduction.pptx
+++ b/course/lectures/act-2-delegation-and-control/02-modeling/2-2-Modeling-1-Purposeful-Reduction.pptx
@@ -30,6 +30,7 @@
     <p:sldId id="274" r:id="rId59"/>
     <p:sldId id="275" r:id="rId60"/>
     <p:sldId id="280" r:id="rId65"/>
+    <p:sldId id="290" r:id="rId75"/>
     <p:sldId id="282" r:id="rId67"/>
     <p:sldId id="276" r:id="rId61"/>
     <p:sldId id="277" r:id="rId62"/>
@@ -2420,6 +2421,59 @@
             <a:r>
               <a:rPr dirty="0"/>
               <a:t>- Next we put a number on the production process.</a:t>
+            </a:r>
+          </a:p>
+        </p:txBody>
+      </p:sp>
+    </p:spTree>
+  </p:cSld>
+  <p:clrMapOvr>
+    <a:masterClrMapping/>
+  </p:clrMapOvr>
+</p:notes>
+</file>
+
+<file path=ppt/notesSlides/notesSlide43.xml><?xml version="1.0" encoding="utf-8"?>
+<p:notes xmlns:a="http://schemas.openxmlformats.org/drawingml/2006/main" xmlns:r="http://schemas.openxmlformats.org/officeDocument/2006/relationships" xmlns:p="http://schemas.openxmlformats.org/presentationml/2006/main">
+  <p:cSld>
+    <p:spTree>
+      <p:nvGrpSpPr>
+        <p:cNvPr id="1" name=""/>
+        <p:cNvGrpSpPr/>
+        <p:nvPr/>
+      </p:nvGrpSpPr>
+      <p:grpSpPr>
+        <a:xfrm>
+          <a:off x="0" y="0"/>
+          <a:ext cx="0" cy="0"/>
+          <a:chOff x="0" y="0"/>
+          <a:chExt cx="0" cy="0"/>
+        </a:xfrm>
+      </p:grpSpPr>
+      <p:sp>
+        <p:nvSpPr>
+          <p:cNvPr id="2" name="Notes Placeholder 1"/>
+          <p:cNvSpPr>
+            <a:spLocks noGrp="1"/>
+          </p:cNvSpPr>
+          <p:nvPr>
+            <p:ph type="body" idx="1"/>
+          </p:nvPr>
+        </p:nvSpPr>
+        <p:spPr/>
+        <p:txBody>
+          <a:bodyPr/>
+          <a:lstStyle/>
+          <a:p>
+            <a:r>
+              <a:rPr lang="en-US" dirty="0"/>
+              <a:t>This is why agent capability genuinely matters to Modeling. A stronger agent needs less realization scaffolding, so we can leave more legitimate degrees of freedom. But notice which boundary did not move.</a:t>
+            </a:r>
+          </a:p>
+          <a:p>
+            <a:r>
+              <a:rPr lang="en-US" dirty="0"/>
+              <a:t>Now take capability all the way to the limit.</a:t>
             </a:r>
           </a:p>
         </p:txBody>
@@ -23432,6 +23486,740 @@
       </p:par>
     </p:tnLst>
   </p:timing>
+</p:sld>
+</file>
+
+<file path=ppt/slides/slide43.xml><?xml version="1.0" encoding="utf-8"?>
+<p:sld xmlns:a="http://schemas.openxmlformats.org/drawingml/2006/main" xmlns:r="http://schemas.openxmlformats.org/officeDocument/2006/relationships" xmlns:p="http://schemas.openxmlformats.org/presentationml/2006/main">
+  <p:cSld>
+    <p:spTree>
+      <p:nvGrpSpPr>
+        <p:cNvPr id="1" name=""/>
+        <p:cNvGrpSpPr/>
+        <p:nvPr/>
+      </p:nvGrpSpPr>
+      <p:grpSpPr>
+        <a:xfrm>
+          <a:off x="0" y="0"/>
+          <a:ext cx="0" cy="0"/>
+          <a:chOff x="0" y="0"/>
+          <a:chExt cx="0" cy="0"/>
+        </a:xfrm>
+      </p:grpSpPr>
+      <p:sp>
+        <p:nvSpPr>
+          <p:cNvPr id="2" name="Title 1"/>
+          <p:cNvSpPr>
+            <a:spLocks noGrp="1"/>
+          </p:cNvSpPr>
+          <p:nvPr>
+            <p:ph type="title"/>
+          </p:nvPr>
+        </p:nvSpPr>
+        <p:spPr/>
+        <p:txBody>
+          <a:bodyPr>
+            <a:normAutofit/>
+          </a:bodyPr>
+          <a:lstStyle/>
+          <a:p>
+            <a:r>
+              <a:rPr lang="en-US" dirty="0"/>
+              <a:t>Capability can reduce scaffolding</a:t>
+            </a:r>
+          </a:p>
+        </p:txBody>
+      </p:sp>
+      <p:sp>
+        <p:nvSpPr>
+          <p:cNvPr id="3" name="Slide Number Placeholder 3"/>
+          <p:cNvSpPr>
+            <a:spLocks noGrp="1"/>
+          </p:cNvSpPr>
+          <p:nvPr>
+            <p:ph type="sldNum" sz="quarter" idx="4"/>
+          </p:nvPr>
+        </p:nvSpPr>
+        <p:spPr/>
+        <p:txBody>
+          <a:bodyPr/>
+          <a:lstStyle/>
+          <a:p>
+            <a:fld id="{B7EB45DA-9A0D-DC49-8E02-F30A5DDC21C3}" type="slidenum">
+              <a:rPr lang="en-US" smtClean="0"/>
+              <a:t>23</a:t>
+            </a:fld>
+            <a:endParaRPr lang="en-US"/>
+          </a:p>
+        </p:txBody>
+      </p:sp>
+      <p:sp>
+        <p:nvSpPr>
+          <p:cNvPr id="10" name="LeadLn"/>
+          <p:cNvSpPr txBox="1"/>
+          <p:nvPr/>
+        </p:nvSpPr>
+        <p:spPr>
+          <a:xfrm>
+            <a:off x="365760" y="914400"/>
+            <a:ext cx="8412480" cy="365760"/>
+          </a:xfrm>
+          <a:prstGeom prst="rect">
+            <a:avLst/>
+          </a:prstGeom>
+          <a:noFill/>
+          <a:ln>
+            <a:noFill/>
+          </a:ln>
+        </p:spPr>
+        <p:txBody>
+          <a:bodyPr wrap="square" lIns="0" tIns="0" rIns="0" bIns="0" anchor="t"/>
+          <a:lstStyle/>
+          <a:p>
+            <a:pPr algn="ctr">
+              <a:spcAft>
+                <a:spcPts val="0"/>
+              </a:spcAft>
+              <a:buNone/>
+            </a:pPr>
+            <a:r>
+              <a:rPr lang="en-US" sz="1800" b="0" i="0" dirty="0">
+                <a:solidFill>
+                  <a:srgbClr val="555960"/>
+                </a:solidFill>
+              </a:rPr>
+              <a:t xml:space="preserve">A more capable agent can infer more of the realization.</a:t>
+            </a:r>
+          </a:p>
+        </p:txBody>
+      </p:sp>
+      <p:sp>
+        <p:nvSpPr>
+          <p:cNvPr id="20" name="ColHdr1"/>
+          <p:cNvSpPr txBox="1"/>
+          <p:nvPr/>
+        </p:nvSpPr>
+        <p:spPr>
+          <a:xfrm>
+            <a:off x="274320" y="1417320"/>
+            <a:ext cx="4160520" cy="274320"/>
+          </a:xfrm>
+          <a:prstGeom prst="rect">
+            <a:avLst/>
+          </a:prstGeom>
+          <a:noFill/>
+          <a:ln>
+            <a:noFill/>
+          </a:ln>
+        </p:spPr>
+        <p:txBody>
+          <a:bodyPr wrap="square" lIns="0" tIns="0" rIns="0" bIns="0" anchor="ctr"/>
+          <a:lstStyle/>
+          <a:p>
+            <a:pPr algn="ctr">
+              <a:spcAft>
+                <a:spcPts val="0"/>
+              </a:spcAft>
+              <a:buNone/>
+            </a:pPr>
+            <a:r>
+              <a:rPr lang="en-US" sz="1400" b="1" i="0" dirty="0">
+                <a:solidFill>
+                  <a:srgbClr val="5C4826"/>
+                </a:solidFill>
+              </a:rPr>
+              <a:t xml:space="preserve">LESS CAPABLE AGENT</a:t>
+            </a:r>
+          </a:p>
+        </p:txBody>
+      </p:sp>
+      <p:sp>
+        <p:nvSpPr>
+          <p:cNvPr id="21" name="DOF1"/>
+          <p:cNvSpPr/>
+          <p:nvPr/>
+        </p:nvSpPr>
+        <p:spPr>
+          <a:xfrm>
+            <a:off x="342900" y="1783080"/>
+            <a:ext cx="4023360" cy="2528320"/>
+          </a:xfrm>
+          <a:prstGeom prst="rect">
+            <a:avLst/>
+          </a:prstGeom>
+          <a:solidFill>
+            <a:srgbClr val="FBF8F2"/>
+          </a:solidFill>
+          <a:ln w="12700">
+            <a:solidFill>
+              <a:srgbClr val="C9B991"/>
+            </a:solidFill>
+          </a:ln>
+        </p:spPr>
+        <p:txBody>
+          <a:bodyPr wrap="square" lIns="27432" tIns="22860" rIns="27432" bIns="22860" anchor="ctr"/>
+          <a:lstStyle/>
+          <a:p>
+            <a:pPr>
+              <a:buNone/>
+            </a:pPr>
+            <a:endParaRPr lang="en-US"/>
+          </a:p>
+        </p:txBody>
+      </p:sp>
+      <p:sp>
+        <p:nvSpPr>
+          <p:cNvPr id="22" name="Scaf1"/>
+          <p:cNvSpPr/>
+          <p:nvPr/>
+        </p:nvSpPr>
+        <p:spPr>
+          <a:xfrm>
+            <a:off x="562360" y="1947680"/>
+            <a:ext cx="3584440" cy="2157980"/>
+          </a:xfrm>
+          <a:prstGeom prst="rect">
+            <a:avLst/>
+          </a:prstGeom>
+          <a:solidFill>
+            <a:srgbClr val="C9B991"/>
+          </a:solidFill>
+          <a:ln w="28575">
+            <a:solidFill>
+              <a:srgbClr val="8E6F3E"/>
+            </a:solidFill>
+          </a:ln>
+        </p:spPr>
+        <p:txBody>
+          <a:bodyPr wrap="square" lIns="27432" tIns="22860" rIns="27432" bIns="22860" anchor="ctr"/>
+          <a:lstStyle/>
+          <a:p>
+            <a:pPr>
+              <a:buNone/>
+            </a:pPr>
+            <a:endParaRPr lang="en-US"/>
+          </a:p>
+        </p:txBody>
+      </p:sp>
+      <p:sp>
+        <p:nvSpPr>
+          <p:cNvPr id="23" name="Oblig1"/>
+          <p:cNvSpPr/>
+          <p:nvPr/>
+        </p:nvSpPr>
+        <p:spPr>
+          <a:xfrm>
+            <a:off x="1330460" y="2587760"/>
+            <a:ext cx="2084840" cy="804680"/>
+          </a:xfrm>
+          <a:prstGeom prst="rect">
+            <a:avLst/>
+          </a:prstGeom>
+          <a:solidFill>
+            <a:srgbClr val="5C4826"/>
+          </a:solidFill>
+          <a:ln>
+            <a:noFill/>
+          </a:ln>
+        </p:spPr>
+        <p:txBody>
+          <a:bodyPr wrap="square" lIns="27432" tIns="22860" rIns="27432" bIns="22860" anchor="ctr"/>
+          <a:lstStyle/>
+          <a:p>
+            <a:pPr algn="ctr">
+              <a:spcAft>
+                <a:spcPts val="0"/>
+              </a:spcAft>
+              <a:buNone/>
+            </a:pPr>
+            <a:r>
+              <a:rPr lang="en-US" sz="1300" b="1" i="0" dirty="0">
+                <a:solidFill>
+                  <a:srgbClr val="FFFFFF"/>
+                </a:solidFill>
+              </a:rPr>
+              <a:t xml:space="preserve">OBLIGATION</a:t>
+            </a:r>
+          </a:p>
+        </p:txBody>
+      </p:sp>
+      <p:sp>
+        <p:nvSpPr>
+          <p:cNvPr id="24" name="ScafL1"/>
+          <p:cNvSpPr txBox="1"/>
+          <p:nvPr/>
+        </p:nvSpPr>
+        <p:spPr>
+          <a:xfrm>
+            <a:off x="1330460" y="3623320"/>
+            <a:ext cx="2084840" cy="251460"/>
+          </a:xfrm>
+          <a:prstGeom prst="rect">
+            <a:avLst/>
+          </a:prstGeom>
+          <a:noFill/>
+          <a:ln>
+            <a:noFill/>
+          </a:ln>
+        </p:spPr>
+        <p:txBody>
+          <a:bodyPr wrap="square" lIns="0" tIns="0" rIns="0" bIns="0" anchor="ctr"/>
+          <a:lstStyle/>
+          <a:p>
+            <a:pPr algn="ctr">
+              <a:spcAft>
+                <a:spcPts val="0"/>
+              </a:spcAft>
+              <a:buNone/>
+            </a:pPr>
+            <a:r>
+              <a:rPr lang="en-US" sz="1300" b="1" i="0" dirty="0">
+                <a:solidFill>
+                  <a:srgbClr val="5C4826"/>
+                </a:solidFill>
+              </a:rPr>
+              <a:t xml:space="preserve">SCAFFOLDING</a:t>
+            </a:r>
+          </a:p>
+        </p:txBody>
+      </p:sp>
+      <p:sp>
+        <p:nvSpPr>
+          <p:cNvPr id="25" name="DofL1"/>
+          <p:cNvSpPr txBox="1"/>
+          <p:nvPr/>
+        </p:nvSpPr>
+        <p:spPr>
+          <a:xfrm>
+            <a:off x="342900" y="4105660"/>
+            <a:ext cx="4023360" cy="205740"/>
+          </a:xfrm>
+          <a:prstGeom prst="rect">
+            <a:avLst/>
+          </a:prstGeom>
+          <a:noFill/>
+          <a:ln>
+            <a:noFill/>
+          </a:ln>
+        </p:spPr>
+        <p:txBody>
+          <a:bodyPr wrap="square" lIns="0" tIns="0" rIns="0" bIns="0" anchor="ctr"/>
+          <a:lstStyle/>
+          <a:p>
+            <a:pPr algn="ctr">
+              <a:spcAft>
+                <a:spcPts val="0"/>
+              </a:spcAft>
+              <a:buNone/>
+            </a:pPr>
+            <a:r>
+              <a:rPr lang="en-US" sz="1300" b="0" i="0" dirty="0">
+                <a:solidFill>
+                  <a:srgbClr val="555960"/>
+                </a:solidFill>
+              </a:rPr>
+              <a:t xml:space="preserve">DEGREES OF FREEDOM</a:t>
+            </a:r>
+          </a:p>
+        </p:txBody>
+      </p:sp>
+      <p:sp>
+        <p:nvSpPr>
+          <p:cNvPr id="26" name="ColCap1"/>
+          <p:cNvSpPr txBox="1"/>
+          <p:nvPr/>
+        </p:nvSpPr>
+        <p:spPr>
+          <a:xfrm>
+            <a:off x="274320" y="4419600"/>
+            <a:ext cx="4160520" cy="502920"/>
+          </a:xfrm>
+          <a:prstGeom prst="rect">
+            <a:avLst/>
+          </a:prstGeom>
+          <a:noFill/>
+          <a:ln>
+            <a:noFill/>
+          </a:ln>
+        </p:spPr>
+        <p:txBody>
+          <a:bodyPr wrap="square" lIns="0" tIns="0" rIns="0" bIns="0" anchor="t"/>
+          <a:lstStyle/>
+          <a:p>
+            <a:pPr algn="ctr">
+              <a:spcAft>
+                <a:spcPts val="0"/>
+              </a:spcAft>
+              <a:buNone/>
+            </a:pPr>
+            <a:r>
+              <a:rPr lang="en-US" sz="1300" b="0" i="0" dirty="0">
+                <a:solidFill>
+                  <a:srgbClr val="555960"/>
+                </a:solidFill>
+              </a:rPr>
+              <a:t xml:space="preserve">Larger specification boundary — more scaffolding</a:t>
+            </a:r>
+          </a:p>
+        </p:txBody>
+      </p:sp>
+      <p:sp>
+        <p:nvSpPr>
+          <p:cNvPr id="40" name="ColHdr2"/>
+          <p:cNvSpPr txBox="1"/>
+          <p:nvPr/>
+        </p:nvSpPr>
+        <p:spPr>
+          <a:xfrm>
+            <a:off x="4709160" y="1417320"/>
+            <a:ext cx="4160520" cy="274320"/>
+          </a:xfrm>
+          <a:prstGeom prst="rect">
+            <a:avLst/>
+          </a:prstGeom>
+          <a:noFill/>
+          <a:ln>
+            <a:noFill/>
+          </a:ln>
+        </p:spPr>
+        <p:txBody>
+          <a:bodyPr wrap="square" lIns="0" tIns="0" rIns="0" bIns="0" anchor="ctr"/>
+          <a:lstStyle/>
+          <a:p>
+            <a:pPr algn="ctr">
+              <a:spcAft>
+                <a:spcPts val="0"/>
+              </a:spcAft>
+              <a:buNone/>
+            </a:pPr>
+            <a:r>
+              <a:rPr lang="en-US" sz="1400" b="1" i="0" dirty="0">
+                <a:solidFill>
+                  <a:srgbClr val="5C4826"/>
+                </a:solidFill>
+              </a:rPr>
+              <a:t xml:space="preserve">MORE CAPABLE AGENT</a:t>
+            </a:r>
+          </a:p>
+        </p:txBody>
+      </p:sp>
+      <p:sp>
+        <p:nvSpPr>
+          <p:cNvPr id="41" name="DOF2"/>
+          <p:cNvSpPr/>
+          <p:nvPr/>
+        </p:nvSpPr>
+        <p:spPr>
+          <a:xfrm>
+            <a:off x="4777740" y="1783080"/>
+            <a:ext cx="4023360" cy="2528320"/>
+          </a:xfrm>
+          <a:prstGeom prst="rect">
+            <a:avLst/>
+          </a:prstGeom>
+          <a:solidFill>
+            <a:srgbClr val="FBF8F2"/>
+          </a:solidFill>
+          <a:ln w="12700">
+            <a:solidFill>
+              <a:srgbClr val="C9B991"/>
+            </a:solidFill>
+          </a:ln>
+        </p:spPr>
+        <p:txBody>
+          <a:bodyPr wrap="square" lIns="27432" tIns="22860" rIns="27432" bIns="22860" anchor="ctr"/>
+          <a:lstStyle/>
+          <a:p>
+            <a:pPr>
+              <a:buNone/>
+            </a:pPr>
+            <a:endParaRPr lang="en-US"/>
+          </a:p>
+        </p:txBody>
+      </p:sp>
+      <p:sp>
+        <p:nvSpPr>
+          <p:cNvPr id="42" name="Scaf2"/>
+          <p:cNvSpPr/>
+          <p:nvPr/>
+        </p:nvSpPr>
+        <p:spPr>
+          <a:xfrm>
+            <a:off x="5399540" y="2222000"/>
+            <a:ext cx="2816360" cy="1609340"/>
+          </a:xfrm>
+          <a:prstGeom prst="rect">
+            <a:avLst/>
+          </a:prstGeom>
+          <a:solidFill>
+            <a:srgbClr val="C9B991"/>
+          </a:solidFill>
+          <a:ln w="28575">
+            <a:solidFill>
+              <a:srgbClr val="8E6F3E"/>
+            </a:solidFill>
+          </a:ln>
+        </p:spPr>
+        <p:txBody>
+          <a:bodyPr wrap="square" lIns="27432" tIns="22860" rIns="27432" bIns="22860" anchor="ctr"/>
+          <a:lstStyle/>
+          <a:p>
+            <a:pPr>
+              <a:buNone/>
+            </a:pPr>
+            <a:endParaRPr lang="en-US"/>
+          </a:p>
+        </p:txBody>
+      </p:sp>
+      <p:sp>
+        <p:nvSpPr>
+          <p:cNvPr id="43" name="Oblig2"/>
+          <p:cNvSpPr/>
+          <p:nvPr/>
+        </p:nvSpPr>
+        <p:spPr>
+          <a:xfrm>
+            <a:off x="5765300" y="2587760"/>
+            <a:ext cx="2084840" cy="804680"/>
+          </a:xfrm>
+          <a:prstGeom prst="rect">
+            <a:avLst/>
+          </a:prstGeom>
+          <a:solidFill>
+            <a:srgbClr val="5C4826"/>
+          </a:solidFill>
+          <a:ln>
+            <a:noFill/>
+          </a:ln>
+        </p:spPr>
+        <p:txBody>
+          <a:bodyPr wrap="square" lIns="27432" tIns="22860" rIns="27432" bIns="22860" anchor="ctr"/>
+          <a:lstStyle/>
+          <a:p>
+            <a:pPr algn="ctr">
+              <a:spcAft>
+                <a:spcPts val="0"/>
+              </a:spcAft>
+              <a:buNone/>
+            </a:pPr>
+            <a:r>
+              <a:rPr lang="en-US" sz="1300" b="1" i="0" dirty="0">
+                <a:solidFill>
+                  <a:srgbClr val="FFFFFF"/>
+                </a:solidFill>
+              </a:rPr>
+              <a:t xml:space="preserve">OBLIGATION</a:t>
+            </a:r>
+          </a:p>
+        </p:txBody>
+      </p:sp>
+      <p:sp>
+        <p:nvSpPr>
+          <p:cNvPr id="44" name="ScafL2"/>
+          <p:cNvSpPr txBox="1"/>
+          <p:nvPr/>
+        </p:nvSpPr>
+        <p:spPr>
+          <a:xfrm>
+            <a:off x="5765300" y="3486160"/>
+            <a:ext cx="2084840" cy="251460"/>
+          </a:xfrm>
+          <a:prstGeom prst="rect">
+            <a:avLst/>
+          </a:prstGeom>
+          <a:noFill/>
+          <a:ln>
+            <a:noFill/>
+          </a:ln>
+        </p:spPr>
+        <p:txBody>
+          <a:bodyPr wrap="square" lIns="0" tIns="0" rIns="0" bIns="0" anchor="ctr"/>
+          <a:lstStyle/>
+          <a:p>
+            <a:pPr algn="ctr">
+              <a:spcAft>
+                <a:spcPts val="0"/>
+              </a:spcAft>
+              <a:buNone/>
+            </a:pPr>
+            <a:r>
+              <a:rPr lang="en-US" sz="1300" b="1" i="0" dirty="0">
+                <a:solidFill>
+                  <a:srgbClr val="5C4826"/>
+                </a:solidFill>
+              </a:rPr>
+              <a:t xml:space="preserve">SCAFFOLDING</a:t>
+            </a:r>
+          </a:p>
+        </p:txBody>
+      </p:sp>
+      <p:sp>
+        <p:nvSpPr>
+          <p:cNvPr id="45" name="DofL2"/>
+          <p:cNvSpPr txBox="1"/>
+          <p:nvPr/>
+        </p:nvSpPr>
+        <p:spPr>
+          <a:xfrm>
+            <a:off x="4777740" y="4105660"/>
+            <a:ext cx="4023360" cy="205740"/>
+          </a:xfrm>
+          <a:prstGeom prst="rect">
+            <a:avLst/>
+          </a:prstGeom>
+          <a:noFill/>
+          <a:ln>
+            <a:noFill/>
+          </a:ln>
+        </p:spPr>
+        <p:txBody>
+          <a:bodyPr wrap="square" lIns="0" tIns="0" rIns="0" bIns="0" anchor="ctr"/>
+          <a:lstStyle/>
+          <a:p>
+            <a:pPr algn="ctr">
+              <a:spcAft>
+                <a:spcPts val="0"/>
+              </a:spcAft>
+              <a:buNone/>
+            </a:pPr>
+            <a:r>
+              <a:rPr lang="en-US" sz="1300" b="0" i="0" dirty="0">
+                <a:solidFill>
+                  <a:srgbClr val="555960"/>
+                </a:solidFill>
+              </a:rPr>
+              <a:t xml:space="preserve">DEGREES OF FREEDOM</a:t>
+            </a:r>
+          </a:p>
+        </p:txBody>
+      </p:sp>
+      <p:sp>
+        <p:nvSpPr>
+          <p:cNvPr id="46" name="ColCap2"/>
+          <p:cNvSpPr txBox="1"/>
+          <p:nvPr/>
+        </p:nvSpPr>
+        <p:spPr>
+          <a:xfrm>
+            <a:off x="4709160" y="4419600"/>
+            <a:ext cx="4160520" cy="502920"/>
+          </a:xfrm>
+          <a:prstGeom prst="rect">
+            <a:avLst/>
+          </a:prstGeom>
+          <a:noFill/>
+          <a:ln>
+            <a:noFill/>
+          </a:ln>
+        </p:spPr>
+        <p:txBody>
+          <a:bodyPr wrap="square" lIns="0" tIns="0" rIns="0" bIns="0" anchor="t"/>
+          <a:lstStyle/>
+          <a:p>
+            <a:pPr algn="ctr">
+              <a:spcAft>
+                <a:spcPts val="0"/>
+              </a:spcAft>
+              <a:buNone/>
+            </a:pPr>
+            <a:r>
+              <a:rPr lang="en-US" sz="1300" b="0" i="0" dirty="0">
+                <a:solidFill>
+                  <a:srgbClr val="555960"/>
+                </a:solidFill>
+              </a:rPr>
+              <a:t xml:space="preserve">Smaller specification boundary — less scaffolding, more degrees of freedom</a:t>
+            </a:r>
+          </a:p>
+        </p:txBody>
+      </p:sp>
+      <p:sp>
+        <p:nvSpPr>
+          <p:cNvPr id="150" name="Ital"/>
+          <p:cNvSpPr txBox="1"/>
+          <p:nvPr/>
+        </p:nvSpPr>
+        <p:spPr>
+          <a:xfrm>
+            <a:off x="274320" y="5029200"/>
+            <a:ext cx="8595360" cy="457200"/>
+          </a:xfrm>
+          <a:prstGeom prst="rect">
+            <a:avLst/>
+          </a:prstGeom>
+          <a:noFill/>
+          <a:ln>
+            <a:noFill/>
+          </a:ln>
+        </p:spPr>
+        <p:txBody>
+          <a:bodyPr wrap="square" lIns="0" tIns="0" rIns="0" bIns="0" anchor="t"/>
+          <a:lstStyle/>
+          <a:p>
+            <a:pPr algn="ctr">
+              <a:spcAft>
+                <a:spcPts val="0"/>
+              </a:spcAft>
+              <a:buNone/>
+            </a:pPr>
+            <a:r>
+              <a:rPr lang="en-US" sz="1700" b="0" i="1" dirty="0">
+                <a:solidFill>
+                  <a:srgbClr val="555960"/>
+                </a:solidFill>
+              </a:rPr>
+              <a:t xml:space="preserve">Capability can reduce what we must specify about how.</a:t>
+            </a:r>
+          </a:p>
+        </p:txBody>
+      </p:sp>
+      <p:sp>
+        <p:nvSpPr>
+          <p:cNvPr id="199" name="FooterBand"/>
+          <p:cNvSpPr/>
+          <p:nvPr/>
+        </p:nvSpPr>
+        <p:spPr>
+          <a:xfrm>
+            <a:off x="274320" y="5852160"/>
+            <a:ext cx="8595360" cy="566928"/>
+          </a:xfrm>
+          <a:prstGeom prst="rect">
+            <a:avLst/>
+          </a:prstGeom>
+          <a:solidFill>
+            <a:srgbClr val="8E6F3E"/>
+          </a:solidFill>
+          <a:ln>
+            <a:noFill/>
+          </a:ln>
+        </p:spPr>
+        <p:txBody>
+          <a:bodyPr wrap="square" lIns="27432" tIns="22860" rIns="27432" bIns="22860" anchor="ctr"/>
+          <a:lstStyle/>
+          <a:p>
+            <a:pPr algn="ctr">
+              <a:spcAft>
+                <a:spcPts val="0"/>
+              </a:spcAft>
+              <a:buNone/>
+            </a:pPr>
+            <a:r>
+              <a:rPr lang="en-US" sz="2000" b="1" i="0" dirty="0">
+                <a:solidFill>
+                  <a:srgbClr val="FFFFFF"/>
+                </a:solidFill>
+              </a:rPr>
+              <a:t xml:space="preserve">It does not reduce what must be true.</a:t>
+            </a:r>
+          </a:p>
+        </p:txBody>
+      </p:sp>
+    </p:spTree>
+  </p:cSld>
+  <p:clrMapOvr>
+    <a:masterClrMapping/>
+  </p:clrMapOvr>
 </p:sld>
 </file>
 

--- a/course/lectures/act-2-delegation-and-control/02-modeling/2-2-Modeling-1-Purposeful-Reduction.pptx
+++ b/course/lectures/act-2-delegation-and-control/02-modeling/2-2-Modeling-1-Purposeful-Reduction.pptx
@@ -36,6 +36,7 @@
     <p:sldId id="277" r:id="rId62"/>
     <p:sldId id="278" r:id="rId63"/>
     <p:sldId id="279" r:id="rId64"/>
+    <p:sldId id="291" r:id="rId76"/>
     <p:sldId id="283" r:id="rId68"/>
     <p:sldId id="284" r:id="rId69"/>
     <p:sldId id="285" r:id="rId70"/>
@@ -2474,6 +2475,77 @@
             <a:r>
               <a:rPr lang="en-US" dirty="0"/>
               <a:t>Now take capability all the way to the limit.</a:t>
+            </a:r>
+          </a:p>
+        </p:txBody>
+      </p:sp>
+    </p:spTree>
+  </p:cSld>
+  <p:clrMapOvr>
+    <a:masterClrMapping/>
+  </p:clrMapOvr>
+</p:notes>
+</file>
+
+<file path=ppt/notesSlides/notesSlide44.xml><?xml version="1.0" encoding="utf-8"?>
+<p:notes xmlns:a="http://schemas.openxmlformats.org/drawingml/2006/main" xmlns:r="http://schemas.openxmlformats.org/officeDocument/2006/relationships" xmlns:p="http://schemas.openxmlformats.org/presentationml/2006/main">
+  <p:cSld>
+    <p:spTree>
+      <p:nvGrpSpPr>
+        <p:cNvPr id="1" name=""/>
+        <p:cNvGrpSpPr/>
+        <p:nvPr/>
+      </p:nvGrpSpPr>
+      <p:grpSpPr>
+        <a:xfrm>
+          <a:off x="0" y="0"/>
+          <a:ext cx="0" cy="0"/>
+          <a:chOff x="0" y="0"/>
+          <a:chExt cx="0" cy="0"/>
+        </a:xfrm>
+      </p:grpSpPr>
+      <p:sp>
+        <p:nvSpPr>
+          <p:cNvPr id="2" name="Notes Placeholder 1"/>
+          <p:cNvSpPr>
+            <a:spLocks noGrp="1"/>
+          </p:cNvSpPr>
+          <p:nvPr>
+            <p:ph type="body" idx="1"/>
+          </p:nvPr>
+        </p:nvSpPr>
+        <p:spPr/>
+        <p:txBody>
+          <a:bodyPr/>
+          <a:lstStyle/>
+          <a:p>
+            <a:r>
+              <a:rPr lang="en-US" dirty="0"/>
+              <a:t>Cabot proposes keeping explicit software models central even when AI participates in production. Use our decomposition to analyze his process; do not start by deciding whether his proposal is right. Where is consequential intent encoded? Where must something interpret that encoding? Where is it realized?</a:t>
+            </a:r>
+          </a:p>
+          <a:p>
+            <a:r>
+              <a:rPr lang="en-US" dirty="0"/>
+              <a:t>In the model-to-deterministic-generator path, realization can become highly constrained. That does not establish that the model encoded the right consequential intent.</a:t>
+            </a:r>
+          </a:p>
+          <a:p>
+            <a:r>
+              <a:rPr lang="en-US" dirty="0"/>
+              <a:t>If AI helps construct the model, uncertainty can move upstream rather than disappear. If AI consumes the model to produce code, the model may improve interpretation or realization without making either deterministic.</a:t>
+            </a:r>
+          </a:p>
+          <a:p>
+            <a:r>
+              <a:rPr lang="en-US" dirty="0"/>
+              <a:t>The point is not that MDE wins. The point is that changing the representation changes where uncertainty lives in delegated production.</a:t>
+            </a:r>
+          </a:p>
+          <a:p>
+            <a:r>
+              <a:rPr lang="en-US" dirty="0"/>
+              <a:t>Then advance immediately to Activity: Reduce — "Now you choose the representation."</a:t>
             </a:r>
           </a:p>
         </p:txBody>
@@ -24220,6 +24292,885 @@
   <p:clrMapOvr>
     <a:masterClrMapping/>
   </p:clrMapOvr>
+</p:sld>
+</file>
+
+<file path=ppt/slides/slide44.xml><?xml version="1.0" encoding="utf-8"?>
+<p:sld xmlns:a="http://schemas.openxmlformats.org/drawingml/2006/main" xmlns:r="http://schemas.openxmlformats.org/officeDocument/2006/relationships" xmlns:p="http://schemas.openxmlformats.org/presentationml/2006/main">
+  <p:cSld>
+    <p:spTree>
+      <p:nvGrpSpPr>
+        <p:cNvPr id="1" name=""/>
+        <p:cNvGrpSpPr/>
+        <p:nvPr/>
+      </p:nvGrpSpPr>
+      <p:grpSpPr>
+        <a:xfrm>
+          <a:off x="0" y="0"/>
+          <a:ext cx="0" cy="0"/>
+          <a:chOff x="0" y="0"/>
+          <a:chExt cx="0" cy="0"/>
+        </a:xfrm>
+      </p:grpSpPr>
+      <p:sp>
+        <p:nvSpPr>
+          <p:cNvPr id="2" name="Title 1"/>
+          <p:cNvSpPr>
+            <a:spLocks noGrp="1"/>
+          </p:cNvSpPr>
+          <p:nvPr>
+            <p:ph type="title"/>
+          </p:nvPr>
+        </p:nvSpPr>
+        <p:spPr/>
+        <p:txBody>
+          <a:bodyPr>
+            <a:normAutofit/>
+          </a:bodyPr>
+          <a:lstStyle/>
+          <a:p>
+            <a:r>
+              <a:rPr lang="en-US" dirty="0"/>
+              <a:t>Where do the probabilities move?</a:t>
+            </a:r>
+          </a:p>
+        </p:txBody>
+      </p:sp>
+      <p:sp>
+        <p:nvSpPr>
+          <p:cNvPr id="3" name="Slide Number Placeholder 3"/>
+          <p:cNvSpPr>
+            <a:spLocks noGrp="1"/>
+          </p:cNvSpPr>
+          <p:nvPr>
+            <p:ph type="sldNum" sz="quarter" idx="4"/>
+          </p:nvPr>
+        </p:nvSpPr>
+        <p:spPr/>
+        <p:txBody>
+          <a:bodyPr/>
+          <a:lstStyle/>
+          <a:p>
+            <a:fld id="{B7EB45DA-9A0D-DC49-8E02-F30A5DDC21C3}" type="slidenum">
+              <a:rPr lang="en-US" smtClean="0"/>
+              <a:t>29</a:t>
+            </a:fld>
+            <a:endParaRPr lang="en-US"/>
+          </a:p>
+        </p:txBody>
+      </p:sp>
+      <p:pic>
+        <p:nvPicPr>
+          <p:cNvPr id="60" name="CabotFig1" descr="Cabot Figure 1: an engineer reaches an explicit software model either by modeling directly or by describing the system in natural language to a vibe modeling agent; from the model, code is reached either by code generation or by a vibe coding agent via spec-driven development."/>
+          <p:cNvPicPr>
+            <a:picLocks noChangeAspect="1"/>
+          </p:cNvPicPr>
+          <p:nvPr/>
+        </p:nvPicPr>
+        <p:blipFill>
+          <a:blip r:embed="rId2"/>
+          <a:stretch>
+            <a:fillRect/>
+          </a:stretch>
+        </p:blipFill>
+        <p:spPr>
+          <a:xfrm>
+            <a:off x="1231776" y="868680"/>
+            <a:ext cx="6680447" cy="3200400"/>
+          </a:xfrm>
+          <a:prstGeom prst="rect">
+            <a:avLst/>
+          </a:prstGeom>
+          <a:ln w="12700">
+            <a:solidFill>
+              <a:srgbClr val="C9B991"/>
+            </a:solidFill>
+          </a:ln>
+        </p:spPr>
+      </p:pic>
+      <p:sp>
+        <p:nvSpPr>
+          <p:cNvPr id="70" name="Src"/>
+          <p:cNvSpPr txBox="1"/>
+          <p:nvPr/>
+        </p:nvSpPr>
+        <p:spPr>
+          <a:xfrm>
+            <a:off x="1231776" y="4114800"/>
+            <a:ext cx="7637904" cy="251460"/>
+          </a:xfrm>
+          <a:prstGeom prst="rect">
+            <a:avLst/>
+          </a:prstGeom>
+          <a:noFill/>
+          <a:ln>
+            <a:noFill/>
+          </a:ln>
+        </p:spPr>
+        <p:txBody>
+          <a:bodyPr wrap="square" lIns="0" tIns="0" rIns="0" bIns="0" anchor="t"/>
+          <a:lstStyle/>
+          <a:p>
+            <a:pPr algn="l">
+              <a:spcAft>
+                <a:spcPts val="0"/>
+              </a:spcAft>
+              <a:buNone/>
+            </a:pPr>
+            <a:r>
+              <a:rPr lang="en-US" sz="1300" b="0" i="0" dirty="0">
+                <a:solidFill>
+                  <a:srgbClr val="5C4826"/>
+                </a:solidFill>
+              </a:rPr>
+              <a:t xml:space="preserve">Jordi Cabot, Vibe-driven model-based engineering (2026)  —  </a:t>
+            </a:r>
+            <a:r>
+              <a:rPr lang="en-US" sz="1300" b="0" i="0" dirty="0">
+                <a:solidFill>
+                  <a:srgbClr val="555960"/>
+                </a:solidFill>
+                <a:hlinkClick r:id="rId4"/>
+              </a:rPr>
+              <a:t xml:space="preserve">https://arxiv.org/pdf/2604.10645</a:t>
+            </a:r>
+          </a:p>
+        </p:txBody>
+      </p:sp>
+      <p:sp>
+        <p:nvSpPr>
+          <p:cNvPr id="80" name="RemHdr"/>
+          <p:cNvSpPr txBox="1"/>
+          <p:nvPr/>
+        </p:nvSpPr>
+        <p:spPr>
+          <a:xfrm>
+            <a:off x="365760" y="4434840"/>
+            <a:ext cx="3566160" cy="205740"/>
+          </a:xfrm>
+          <a:prstGeom prst="rect">
+            <a:avLst/>
+          </a:prstGeom>
+          <a:noFill/>
+          <a:ln>
+            <a:noFill/>
+          </a:ln>
+        </p:spPr>
+        <p:txBody>
+          <a:bodyPr wrap="square" lIns="0" tIns="0" rIns="0" bIns="0" anchor="ctr"/>
+          <a:lstStyle/>
+          <a:p>
+            <a:pPr algn="l">
+              <a:spcAft>
+                <a:spcPts val="0"/>
+              </a:spcAft>
+              <a:buNone/>
+            </a:pPr>
+            <a:r>
+              <a:rPr lang="en-US" sz="1300" b="1" i="0" dirty="0">
+                <a:solidFill>
+                  <a:srgbClr val="8E6F3E"/>
+                </a:solidFill>
+              </a:rPr>
+              <a:t xml:space="preserve">REMINDER</a:t>
+            </a:r>
+          </a:p>
+        </p:txBody>
+      </p:sp>
+      <p:sp>
+        <p:nvSpPr>
+          <p:cNvPr id="81" name="RemEq"/>
+          <p:cNvSpPr txBox="1"/>
+          <p:nvPr/>
+        </p:nvSpPr>
+        <p:spPr>
+          <a:xfrm>
+            <a:off x="365760" y="4686300"/>
+            <a:ext cx="3566160" cy="320040"/>
+          </a:xfrm>
+          <a:prstGeom prst="rect">
+            <a:avLst/>
+          </a:prstGeom>
+          <a:noFill/>
+          <a:ln>
+            <a:noFill/>
+          </a:ln>
+        </p:spPr>
+        <p:txBody>
+          <a:bodyPr wrap="square" lIns="0" tIns="0" rIns="0" bIns="0" anchor="ctr"/>
+          <a:lstStyle/>
+          <a:p>
+            <a:pPr algn="l">
+              <a:spcAft>
+                <a:spcPts val="0"/>
+              </a:spcAft>
+              <a:buNone/>
+            </a:pPr>
+            <a:r>
+              <a:rPr lang="en-US" sz="1300" b="0" i="1" dirty="0">
+                <a:solidFill>
+                  <a:srgbClr val="5C4826"/>
+                </a:solidFill>
+              </a:rPr>
+              <a:t xml:space="preserve">p</a:t>
+            </a:r>
+            <a:r>
+              <a:rPr lang="en-US" sz="1300" b="0" i="1" baseline="-25000" dirty="0">
+                <a:solidFill>
+                  <a:srgbClr val="5C4826"/>
+                </a:solidFill>
+              </a:rPr>
+              <a:t xml:space="preserve">R</a:t>
+            </a:r>
+            <a:r>
+              <a:rPr lang="en-US" sz="1300" b="0" i="1" dirty="0">
+                <a:solidFill>
+                  <a:srgbClr val="5C4826"/>
+                </a:solidFill>
+              </a:rPr>
+              <a:t xml:space="preserve"> = </a:t>
+            </a:r>
+            <a:r>
+              <a:rPr lang="en-US" sz="1300" b="1" i="1" dirty="0">
+                <a:solidFill>
+                  <a:srgbClr val="5C4826"/>
+                </a:solidFill>
+              </a:rPr>
+              <a:t xml:space="preserve">P(E | R)</a:t>
+            </a:r>
+            <a:r>
+              <a:rPr lang="en-US" sz="1300" b="0" i="1" dirty="0">
+                <a:solidFill>
+                  <a:srgbClr val="5C4826"/>
+                </a:solidFill>
+              </a:rPr>
+              <a:t xml:space="preserve"> · P(I | E, R) · P(L | I, E, R)</a:t>
+            </a:r>
+          </a:p>
+        </p:txBody>
+      </p:sp>
+      <p:sp>
+        <p:nvSpPr>
+          <p:cNvPr id="82" name="RemTrm"/>
+          <p:cNvSpPr txBox="1"/>
+          <p:nvPr/>
+        </p:nvSpPr>
+        <p:spPr>
+          <a:xfrm>
+            <a:off x="365760" y="5326380"/>
+            <a:ext cx="3566160" cy="457200"/>
+          </a:xfrm>
+          <a:prstGeom prst="rect">
+            <a:avLst/>
+          </a:prstGeom>
+          <a:noFill/>
+          <a:ln>
+            <a:noFill/>
+          </a:ln>
+        </p:spPr>
+        <p:txBody>
+          <a:bodyPr wrap="square" lIns="0" tIns="0" rIns="0" bIns="0" anchor="t"/>
+          <a:lstStyle/>
+          <a:p>
+            <a:pPr algn="l">
+              <a:lnSpc>
+                <a:spcPct val="90000"/>
+              </a:lnSpc>
+              <a:spcAft>
+                <a:spcPts val="0"/>
+              </a:spcAft>
+              <a:buNone/>
+            </a:pPr>
+            <a:r>
+              <a:rPr lang="en-US" sz="1300" b="1" i="0" dirty="0">
+                <a:solidFill>
+                  <a:srgbClr val="5C4826"/>
+                </a:solidFill>
+              </a:rPr>
+              <a:t xml:space="preserve">E</a:t>
+            </a:r>
+            <a:r>
+              <a:rPr lang="en-US" sz="1300" b="0" i="0" dirty="0">
+                <a:solidFill>
+                  <a:srgbClr val="555960"/>
+                </a:solidFill>
+              </a:rPr>
+              <a:t xml:space="preserve">  consequential intent is encoded</a:t>
+            </a:r>
+          </a:p>
+          <a:p>
+            <a:pPr algn="l">
+              <a:lnSpc>
+                <a:spcPct val="90000"/>
+              </a:lnSpc>
+              <a:spcAft>
+                <a:spcPts val="0"/>
+              </a:spcAft>
+              <a:buNone/>
+            </a:pPr>
+            <a:r>
+              <a:rPr lang="en-US" sz="1300" b="1" i="0" dirty="0">
+                <a:solidFill>
+                  <a:srgbClr val="5C4826"/>
+                </a:solidFill>
+              </a:rPr>
+              <a:t xml:space="preserve">I</a:t>
+            </a:r>
+            <a:r>
+              <a:rPr lang="en-US" sz="1300" b="0" i="0" dirty="0">
+                <a:solidFill>
+                  <a:srgbClr val="555960"/>
+                </a:solidFill>
+              </a:rPr>
+              <a:t xml:space="preserve">  encoding is interpreted</a:t>
+            </a:r>
+          </a:p>
+          <a:p>
+            <a:pPr algn="l">
+              <a:lnSpc>
+                <a:spcPct val="90000"/>
+              </a:lnSpc>
+              <a:spcAft>
+                <a:spcPts val="0"/>
+              </a:spcAft>
+              <a:buNone/>
+            </a:pPr>
+            <a:r>
+              <a:rPr lang="en-US" sz="1300" b="1" i="0" dirty="0">
+                <a:solidFill>
+                  <a:srgbClr val="5C4826"/>
+                </a:solidFill>
+              </a:rPr>
+              <a:t xml:space="preserve">L</a:t>
+            </a:r>
+            <a:r>
+              <a:rPr lang="en-US" sz="1300" b="0" i="0" dirty="0">
+                <a:solidFill>
+                  <a:srgbClr val="555960"/>
+                </a:solidFill>
+              </a:rPr>
+              <a:t xml:space="preserve">  interpretation is realized</a:t>
+            </a:r>
+          </a:p>
+        </p:txBody>
+      </p:sp>
+      <p:sp>
+        <p:nvSpPr>
+          <p:cNvPr id="90" name="TPSbadge"/>
+          <p:cNvSpPr/>
+          <p:nvPr/>
+        </p:nvSpPr>
+        <p:spPr>
+          <a:xfrm>
+            <a:off x="4114800" y="4434840"/>
+            <a:ext cx="3017520" cy="548640"/>
+          </a:xfrm>
+          <a:prstGeom prst="roundRect">
+            <a:avLst/>
+          </a:prstGeom>
+          <a:solidFill>
+            <a:srgbClr val="FBF8F2"/>
+          </a:solidFill>
+          <a:ln w="15875">
+            <a:solidFill>
+              <a:srgbClr val="8E6F3E"/>
+            </a:solidFill>
+          </a:ln>
+        </p:spPr>
+        <p:txBody>
+          <a:bodyPr wrap="square" lIns="27432" tIns="22860" rIns="27432" bIns="22860" anchor="ctr"/>
+          <a:lstStyle/>
+          <a:p>
+            <a:pPr algn="ctr">
+              <a:buNone/>
+            </a:pPr>
+            <a:r>
+              <a:rPr lang="en-US" sz="2000" b="1" i="0" dirty="0">
+                <a:solidFill>
+                  <a:srgbClr val="6B3FA0"/>
+                </a:solidFill>
+              </a:rPr>
+              <a:t xml:space="preserve">THINK</a:t>
+            </a:r>
+            <a:r>
+              <a:rPr lang="en-US" sz="2000" b="1" i="0" dirty="0">
+                <a:solidFill>
+                  <a:srgbClr val="9A9A9A"/>
+                </a:solidFill>
+              </a:rPr>
+              <a:t xml:space="preserve">  ·  </a:t>
+            </a:r>
+            <a:r>
+              <a:rPr lang="en-US" sz="2000" b="1" i="0" dirty="0">
+                <a:solidFill>
+                  <a:srgbClr val="2E74B5"/>
+                </a:solidFill>
+              </a:rPr>
+              <a:t xml:space="preserve">PAIR</a:t>
+            </a:r>
+            <a:r>
+              <a:rPr lang="en-US" sz="2000" b="1" i="0" dirty="0">
+                <a:solidFill>
+                  <a:srgbClr val="9A9A9A"/>
+                </a:solidFill>
+              </a:rPr>
+              <a:t xml:space="preserve">  ·  </a:t>
+            </a:r>
+            <a:r>
+              <a:rPr lang="en-US" sz="2000" b="1" i="0" dirty="0">
+                <a:solidFill>
+                  <a:srgbClr val="B8860B"/>
+                </a:solidFill>
+              </a:rPr>
+              <a:t xml:space="preserve">SHARE</a:t>
+            </a:r>
+          </a:p>
+        </p:txBody>
+      </p:sp>
+      <p:sp>
+        <p:nvSpPr>
+          <p:cNvPr id="91" name="CabHdr"/>
+          <p:cNvSpPr txBox="1"/>
+          <p:nvPr/>
+        </p:nvSpPr>
+        <p:spPr>
+          <a:xfrm>
+            <a:off x="4114800" y="5074920"/>
+            <a:ext cx="4754880" cy="205740"/>
+          </a:xfrm>
+          <a:prstGeom prst="rect">
+            <a:avLst/>
+          </a:prstGeom>
+          <a:noFill/>
+          <a:ln>
+            <a:noFill/>
+          </a:ln>
+        </p:spPr>
+        <p:txBody>
+          <a:bodyPr wrap="square" lIns="0" tIns="0" rIns="0" bIns="0" anchor="ctr"/>
+          <a:lstStyle/>
+          <a:p>
+            <a:pPr algn="l">
+              <a:spcAft>
+                <a:spcPts val="0"/>
+              </a:spcAft>
+              <a:buNone/>
+            </a:pPr>
+            <a:r>
+              <a:rPr lang="en-US" sz="1300" b="1" i="0" dirty="0">
+                <a:solidFill>
+                  <a:srgbClr val="8E6F3E"/>
+                </a:solidFill>
+              </a:rPr>
+              <a:t xml:space="preserve">IN CABOT'S PROCESS</a:t>
+            </a:r>
+          </a:p>
+        </p:txBody>
+      </p:sp>
+      <p:sp>
+        <p:nvSpPr>
+          <p:cNvPr id="92" name="CabItm"/>
+          <p:cNvSpPr txBox="1"/>
+          <p:nvPr/>
+        </p:nvSpPr>
+        <p:spPr>
+          <a:xfrm>
+            <a:off x="4114800" y="5326380"/>
+            <a:ext cx="4754880" cy="457200"/>
+          </a:xfrm>
+          <a:prstGeom prst="rect">
+            <a:avLst/>
+          </a:prstGeom>
+          <a:noFill/>
+          <a:ln>
+            <a:noFill/>
+          </a:ln>
+        </p:spPr>
+        <p:txBody>
+          <a:bodyPr wrap="square" lIns="0" tIns="0" rIns="0" bIns="0" anchor="t"/>
+          <a:lstStyle/>
+          <a:p>
+            <a:pPr algn="l">
+              <a:lnSpc>
+                <a:spcPct val="90000"/>
+              </a:lnSpc>
+              <a:spcAft>
+                <a:spcPts val="0"/>
+              </a:spcAft>
+              <a:buNone/>
+            </a:pPr>
+            <a:r>
+              <a:rPr lang="en-US" sz="1300" b="0" i="0" dirty="0">
+                <a:solidFill>
+                  <a:srgbClr val="555960"/>
+                </a:solidFill>
+              </a:rPr>
+              <a:t xml:space="preserve">Where do encoding, interpretation, and realization happen?</a:t>
+            </a:r>
+          </a:p>
+          <a:p>
+            <a:pPr algn="l">
+              <a:lnSpc>
+                <a:spcPct val="90000"/>
+              </a:lnSpc>
+              <a:spcAft>
+                <a:spcPts val="0"/>
+              </a:spcAft>
+              <a:buNone/>
+            </a:pPr>
+            <a:r>
+              <a:rPr lang="en-US" sz="1300" b="0" i="0" dirty="0">
+                <a:solidFill>
+                  <a:srgbClr val="555960"/>
+                </a:solidFill>
+              </a:rPr>
+              <a:t xml:space="preserve">Which transitions are probabilistic?</a:t>
+            </a:r>
+          </a:p>
+          <a:p>
+            <a:pPr algn="l">
+              <a:lnSpc>
+                <a:spcPct val="90000"/>
+              </a:lnSpc>
+              <a:spcAft>
+                <a:spcPts val="0"/>
+              </a:spcAft>
+              <a:buNone/>
+            </a:pPr>
+            <a:r>
+              <a:rPr lang="en-US" sz="1300" b="0" i="0" dirty="0">
+                <a:solidFill>
+                  <a:srgbClr val="555960"/>
+                </a:solidFill>
+              </a:rPr>
+              <a:t xml:space="preserve">Which are engineered to be deterministic?</a:t>
+            </a:r>
+          </a:p>
+        </p:txBody>
+      </p:sp>
+      <p:sp>
+        <p:nvSpPr>
+          <p:cNvPr id="199" name="FooterBand"/>
+          <p:cNvSpPr/>
+          <p:nvPr/>
+        </p:nvSpPr>
+        <p:spPr>
+          <a:xfrm>
+            <a:off x="274320" y="5852160"/>
+            <a:ext cx="8595360" cy="566928"/>
+          </a:xfrm>
+          <a:prstGeom prst="rect">
+            <a:avLst/>
+          </a:prstGeom>
+          <a:solidFill>
+            <a:srgbClr val="8E6F3E"/>
+          </a:solidFill>
+          <a:ln>
+            <a:noFill/>
+          </a:ln>
+        </p:spPr>
+        <p:txBody>
+          <a:bodyPr wrap="square" lIns="27432" tIns="22860" rIns="27432" bIns="22860" anchor="ctr"/>
+          <a:lstStyle/>
+          <a:p>
+            <a:pPr algn="ctr">
+              <a:spcAft>
+                <a:spcPts val="0"/>
+              </a:spcAft>
+              <a:buNone/>
+            </a:pPr>
+            <a:r>
+              <a:rPr lang="en-US" sz="2000" b="1" i="0" dirty="0">
+                <a:solidFill>
+                  <a:srgbClr val="FFFFFF"/>
+                </a:solidFill>
+              </a:rPr>
+              <a:t xml:space="preserve">What does putting an explicit model in the middle buy us?</a:t>
+            </a:r>
+          </a:p>
+        </p:txBody>
+      </p:sp>
+    </p:spTree>
+  </p:cSld>
+  <p:clrMapOvr>
+    <a:masterClrMapping/>
+  </p:clrMapOvr>
+  <p:timing>
+    <p:tnLst>
+      <p:par>
+        <p:cTn id="1" dur="indefinite" restart="never" nodeType="tmRoot">
+          <p:childTnLst>
+            <p:seq concurrent="1" nextAc="seek">
+              <p:cTn id="2" dur="indefinite" nodeType="mainSeq">
+                <p:childTnLst>
+                  <p:par>
+                    <p:cTn id="3" fill="hold">
+                      <p:stCondLst>
+                        <p:cond delay="indefinite"/>
+                      </p:stCondLst>
+                      <p:childTnLst>
+                        <p:par>
+                          <p:cTn id="4" fill="hold">
+                            <p:stCondLst>
+                              <p:cond delay="0"/>
+                            </p:stCondLst>
+                            <p:childTnLst>
+                              <p:par>
+                                <p:cTn id="5" presetID="10" presetClass="entr" presetSubtype="0" fill="hold" nodeType="clickEffect">
+                                  <p:stCondLst>
+                                    <p:cond delay="0"/>
+                                  </p:stCondLst>
+                                  <p:childTnLst>
+                                    <p:set>
+                                      <p:cBhvr>
+                                        <p:cTn id="6" dur="1" fill="hold">
+                                          <p:stCondLst>
+                                            <p:cond delay="0"/>
+                                          </p:stCondLst>
+                                        </p:cTn>
+                                        <p:tgtEl>
+                                          <p:spTgt spid="80"/>
+                                        </p:tgtEl>
+                                        <p:attrNameLst>
+                                          <p:attrName>style.visibility</p:attrName>
+                                        </p:attrNameLst>
+                                      </p:cBhvr>
+                                      <p:to>
+                                        <p:strVal val="visible"/>
+                                      </p:to>
+                                    </p:set>
+                                    <p:animEffect transition="in" filter="fade">
+                                      <p:cBhvr>
+                                        <p:cTn id="7" dur="500"/>
+                                        <p:tgtEl>
+                                          <p:spTgt spid="80"/>
+                                        </p:tgtEl>
+                                      </p:cBhvr>
+                                    </p:animEffect>
+                                  </p:childTnLst>
+                                </p:cTn>
+                              </p:par>
+                              <p:par>
+                                <p:cTn id="8" presetID="10" presetClass="entr" presetSubtype="0" fill="hold" nodeType="withEffect">
+                                  <p:stCondLst>
+                                    <p:cond delay="0"/>
+                                  </p:stCondLst>
+                                  <p:childTnLst>
+                                    <p:set>
+                                      <p:cBhvr>
+                                        <p:cTn id="9" dur="1" fill="hold">
+                                          <p:stCondLst>
+                                            <p:cond delay="0"/>
+                                          </p:stCondLst>
+                                        </p:cTn>
+                                        <p:tgtEl>
+                                          <p:spTgt spid="81"/>
+                                        </p:tgtEl>
+                                        <p:attrNameLst>
+                                          <p:attrName>style.visibility</p:attrName>
+                                        </p:attrNameLst>
+                                      </p:cBhvr>
+                                      <p:to>
+                                        <p:strVal val="visible"/>
+                                      </p:to>
+                                    </p:set>
+                                    <p:animEffect transition="in" filter="fade">
+                                      <p:cBhvr>
+                                        <p:cTn id="10" dur="500"/>
+                                        <p:tgtEl>
+                                          <p:spTgt spid="81"/>
+                                        </p:tgtEl>
+                                      </p:cBhvr>
+                                    </p:animEffect>
+                                  </p:childTnLst>
+                                </p:cTn>
+                              </p:par>
+                              <p:par>
+                                <p:cTn id="11" presetID="10" presetClass="entr" presetSubtype="0" fill="hold" nodeType="withEffect">
+                                  <p:stCondLst>
+                                    <p:cond delay="0"/>
+                                  </p:stCondLst>
+                                  <p:childTnLst>
+                                    <p:set>
+                                      <p:cBhvr>
+                                        <p:cTn id="12" dur="1" fill="hold">
+                                          <p:stCondLst>
+                                            <p:cond delay="0"/>
+                                          </p:stCondLst>
+                                        </p:cTn>
+                                        <p:tgtEl>
+                                          <p:spTgt spid="82"/>
+                                        </p:tgtEl>
+                                        <p:attrNameLst>
+                                          <p:attrName>style.visibility</p:attrName>
+                                        </p:attrNameLst>
+                                      </p:cBhvr>
+                                      <p:to>
+                                        <p:strVal val="visible"/>
+                                      </p:to>
+                                    </p:set>
+                                    <p:animEffect transition="in" filter="fade">
+                                      <p:cBhvr>
+                                        <p:cTn id="13" dur="500"/>
+                                        <p:tgtEl>
+                                          <p:spTgt spid="82"/>
+                                        </p:tgtEl>
+                                      </p:cBhvr>
+                                    </p:animEffect>
+                                  </p:childTnLst>
+                                </p:cTn>
+                              </p:par>
+                            </p:childTnLst>
+                          </p:cTn>
+                        </p:par>
+                      </p:childTnLst>
+                    </p:cTn>
+                  </p:par>
+                  <p:par>
+                    <p:cTn id="14" fill="hold">
+                      <p:stCondLst>
+                        <p:cond delay="indefinite"/>
+                      </p:stCondLst>
+                      <p:childTnLst>
+                        <p:par>
+                          <p:cTn id="15" fill="hold">
+                            <p:stCondLst>
+                              <p:cond delay="0"/>
+                            </p:stCondLst>
+                            <p:childTnLst>
+                              <p:par>
+                                <p:cTn id="16" presetID="10" presetClass="entr" presetSubtype="0" fill="hold" nodeType="clickEffect">
+                                  <p:stCondLst>
+                                    <p:cond delay="0"/>
+                                  </p:stCondLst>
+                                  <p:childTnLst>
+                                    <p:set>
+                                      <p:cBhvr>
+                                        <p:cTn id="17" dur="1" fill="hold">
+                                          <p:stCondLst>
+                                            <p:cond delay="0"/>
+                                          </p:stCondLst>
+                                        </p:cTn>
+                                        <p:tgtEl>
+                                          <p:spTgt spid="90"/>
+                                        </p:tgtEl>
+                                        <p:attrNameLst>
+                                          <p:attrName>style.visibility</p:attrName>
+                                        </p:attrNameLst>
+                                      </p:cBhvr>
+                                      <p:to>
+                                        <p:strVal val="visible"/>
+                                      </p:to>
+                                    </p:set>
+                                    <p:animEffect transition="in" filter="fade">
+                                      <p:cBhvr>
+                                        <p:cTn id="18" dur="500"/>
+                                        <p:tgtEl>
+                                          <p:spTgt spid="90"/>
+                                        </p:tgtEl>
+                                      </p:cBhvr>
+                                    </p:animEffect>
+                                  </p:childTnLst>
+                                </p:cTn>
+                              </p:par>
+                              <p:par>
+                                <p:cTn id="19" presetID="10" presetClass="entr" presetSubtype="0" fill="hold" nodeType="withEffect">
+                                  <p:stCondLst>
+                                    <p:cond delay="0"/>
+                                  </p:stCondLst>
+                                  <p:childTnLst>
+                                    <p:set>
+                                      <p:cBhvr>
+                                        <p:cTn id="20" dur="1" fill="hold">
+                                          <p:stCondLst>
+                                            <p:cond delay="0"/>
+                                          </p:stCondLst>
+                                        </p:cTn>
+                                        <p:tgtEl>
+                                          <p:spTgt spid="91"/>
+                                        </p:tgtEl>
+                                        <p:attrNameLst>
+                                          <p:attrName>style.visibility</p:attrName>
+                                        </p:attrNameLst>
+                                      </p:cBhvr>
+                                      <p:to>
+                                        <p:strVal val="visible"/>
+                                      </p:to>
+                                    </p:set>
+                                    <p:animEffect transition="in" filter="fade">
+                                      <p:cBhvr>
+                                        <p:cTn id="21" dur="500"/>
+                                        <p:tgtEl>
+                                          <p:spTgt spid="91"/>
+                                        </p:tgtEl>
+                                      </p:cBhvr>
+                                    </p:animEffect>
+                                  </p:childTnLst>
+                                </p:cTn>
+                              </p:par>
+                              <p:par>
+                                <p:cTn id="22" presetID="10" presetClass="entr" presetSubtype="0" fill="hold" nodeType="withEffect">
+                                  <p:stCondLst>
+                                    <p:cond delay="0"/>
+                                  </p:stCondLst>
+                                  <p:childTnLst>
+                                    <p:set>
+                                      <p:cBhvr>
+                                        <p:cTn id="23" dur="1" fill="hold">
+                                          <p:stCondLst>
+                                            <p:cond delay="0"/>
+                                          </p:stCondLst>
+                                        </p:cTn>
+                                        <p:tgtEl>
+                                          <p:spTgt spid="92"/>
+                                        </p:tgtEl>
+                                        <p:attrNameLst>
+                                          <p:attrName>style.visibility</p:attrName>
+                                        </p:attrNameLst>
+                                      </p:cBhvr>
+                                      <p:to>
+                                        <p:strVal val="visible"/>
+                                      </p:to>
+                                    </p:set>
+                                    <p:animEffect transition="in" filter="fade">
+                                      <p:cBhvr>
+                                        <p:cTn id="24" dur="500"/>
+                                        <p:tgtEl>
+                                          <p:spTgt spid="92"/>
+                                        </p:tgtEl>
+                                      </p:cBhvr>
+                                    </p:animEffect>
+                                  </p:childTnLst>
+                                </p:cTn>
+                              </p:par>
+                            </p:childTnLst>
+                          </p:cTn>
+                        </p:par>
+                      </p:childTnLst>
+                    </p:cTn>
+                  </p:par>
+                </p:childTnLst>
+              </p:cTn>
+              <p:prevCondLst>
+                <p:cond evt="onPrev" delay="0">
+                  <p:tgtEl>
+                    <p:sldTgt/>
+                  </p:tgtEl>
+                </p:cond>
+              </p:prevCondLst>
+              <p:nextCondLst>
+                <p:cond evt="onNext" delay="0">
+                  <p:tgtEl>
+                    <p:sldTgt/>
+                  </p:tgtEl>
+                </p:cond>
+              </p:nextCondLst>
+            </p:seq>
+          </p:childTnLst>
+        </p:cTn>
+      </p:par>
+    </p:tnLst>
+  </p:timing>
 </p:sld>
 </file>
 

--- a/course/lectures/act-2-delegation-and-control/02-modeling/2-2-Modeling-1-Purposeful-Reduction.pptx
+++ b/course/lectures/act-2-delegation-and-control/02-modeling/2-2-Modeling-1-Purposeful-Reduction.pptx
@@ -24375,8 +24375,8 @@
         </p:blipFill>
         <p:spPr>
           <a:xfrm>
-            <a:off x="1231776" y="868680"/>
-            <a:ext cx="6680447" cy="3200400"/>
+            <a:off x="1327211" y="868680"/>
+            <a:ext cx="6489577" cy="3108960"/>
           </a:xfrm>
           <a:prstGeom prst="rect">
             <a:avLst/>
@@ -24396,8 +24396,8 @@
         </p:nvSpPr>
         <p:spPr>
           <a:xfrm>
-            <a:off x="1231776" y="4114800"/>
-            <a:ext cx="7637904" cy="251460"/>
+            <a:off x="1327211" y="4023360"/>
+            <a:ext cx="7542469" cy="251460"/>
           </a:xfrm>
           <a:prstGeom prst="rect">
             <a:avLst/>
@@ -24445,7 +24445,7 @@
         </p:nvSpPr>
         <p:spPr>
           <a:xfrm>
-            <a:off x="365760" y="4434840"/>
+            <a:off x="365760" y="4343400"/>
             <a:ext cx="3566160" cy="205740"/>
           </a:xfrm>
           <a:prstGeom prst="rect">
@@ -24485,7 +24485,7 @@
         </p:nvSpPr>
         <p:spPr>
           <a:xfrm>
-            <a:off x="365760" y="4686300"/>
+            <a:off x="365760" y="4594860"/>
             <a:ext cx="3566160" cy="320040"/>
           </a:xfrm>
           <a:prstGeom prst="rect">
@@ -24557,7 +24557,7 @@
         </p:nvSpPr>
         <p:spPr>
           <a:xfrm>
-            <a:off x="365760" y="5326380"/>
+            <a:off x="365760" y="5234940"/>
             <a:ext cx="3566160" cy="457200"/>
           </a:xfrm>
           <a:prstGeom prst="rect">
@@ -24662,7 +24662,7 @@
         </p:nvSpPr>
         <p:spPr>
           <a:xfrm>
-            <a:off x="4114800" y="4434840"/>
+            <a:off x="4114800" y="4343400"/>
             <a:ext cx="3017520" cy="548640"/>
           </a:xfrm>
           <a:prstGeom prst="roundRect">
@@ -24735,7 +24735,7 @@
         </p:nvSpPr>
         <p:spPr>
           <a:xfrm>
-            <a:off x="4114800" y="5074920"/>
+            <a:off x="4114800" y="4983480"/>
             <a:ext cx="4754880" cy="205740"/>
           </a:xfrm>
           <a:prstGeom prst="rect">
@@ -24762,7 +24762,7 @@
                   <a:srgbClr val="8E6F3E"/>
                 </a:solidFill>
               </a:rPr>
-              <a:t xml:space="preserve">IN CABOT'S PROCESS</a:t>
+              <a:t xml:space="preserve">IN CABOT’S PROCESS</a:t>
             </a:r>
           </a:p>
         </p:txBody>
@@ -24775,7 +24775,7 @@
         </p:nvSpPr>
         <p:spPr>
           <a:xfrm>
-            <a:off x="4114800" y="5326380"/>
+            <a:off x="4114800" y="5234940"/>
             <a:ext cx="4754880" cy="457200"/>
           </a:xfrm>
           <a:prstGeom prst="rect">

--- a/course/lectures/act-2-delegation-and-control/02-modeling/2-2-Modeling-1-Purposeful-Reduction.pptx
+++ b/course/lectures/act-2-delegation-and-control/02-modeling/2-2-Modeling-1-Purposeful-Reduction.pptx
@@ -23713,8 +23713,8 @@
         </p:nvSpPr>
         <p:spPr>
           <a:xfrm>
-            <a:off x="342900" y="1783080"/>
-            <a:ext cx="4023360" cy="2528320"/>
+            <a:off x="288040" y="1737360"/>
+            <a:ext cx="4133080" cy="2638040"/>
           </a:xfrm>
           <a:prstGeom prst="rect">
             <a:avLst/>
@@ -23747,7 +23747,7 @@
         </p:nvSpPr>
         <p:spPr>
           <a:xfrm>
-            <a:off x="562360" y="1947680"/>
+            <a:off x="562360" y="1943100"/>
             <a:ext cx="3584440" cy="2157980"/>
           </a:xfrm>
           <a:prstGeom prst="rect">
@@ -23781,7 +23781,7 @@
         </p:nvSpPr>
         <p:spPr>
           <a:xfrm>
-            <a:off x="1330460" y="2587760"/>
+            <a:off x="1312160" y="2583180"/>
             <a:ext cx="2084840" cy="804680"/>
           </a:xfrm>
           <a:prstGeom prst="rect">
@@ -23823,7 +23823,7 @@
         </p:nvSpPr>
         <p:spPr>
           <a:xfrm>
-            <a:off x="1330460" y="3623320"/>
+            <a:off x="1312160" y="3618740"/>
             <a:ext cx="2084840" cy="251460"/>
           </a:xfrm>
           <a:prstGeom prst="rect">
@@ -23863,8 +23863,8 @@
         </p:nvSpPr>
         <p:spPr>
           <a:xfrm>
-            <a:off x="342900" y="4105660"/>
-            <a:ext cx="4023360" cy="205740"/>
+            <a:off x="288040" y="4101080"/>
+            <a:ext cx="4133080" cy="274320"/>
           </a:xfrm>
           <a:prstGeom prst="rect">
             <a:avLst/>
@@ -23897,13 +23897,13 @@
       </p:sp>
       <p:sp>
         <p:nvSpPr>
-          <p:cNvPr id="26" name="ColCap1"/>
+          <p:cNvPr id="27" name="ColCap1"/>
           <p:cNvSpPr txBox="1"/>
           <p:nvPr/>
         </p:nvSpPr>
         <p:spPr>
           <a:xfrm>
-            <a:off x="274320" y="4419600"/>
+            <a:off x="274320" y="4457700"/>
             <a:ext cx="4160520" cy="502920"/>
           </a:xfrm>
           <a:prstGeom prst="rect">
@@ -23983,8 +23983,8 @@
         </p:nvSpPr>
         <p:spPr>
           <a:xfrm>
-            <a:off x="4777740" y="1783080"/>
-            <a:ext cx="4023360" cy="2528320"/>
+            <a:off x="4722880" y="1737360"/>
+            <a:ext cx="4133080" cy="2638040"/>
           </a:xfrm>
           <a:prstGeom prst="rect">
             <a:avLst/>
@@ -24011,13 +24011,46 @@
       </p:sp>
       <p:sp>
         <p:nvSpPr>
+          <p:cNvPr id="46" name="Ghost2"/>
+          <p:cNvSpPr/>
+          <p:nvPr/>
+        </p:nvSpPr>
+        <p:spPr>
+          <a:xfrm>
+            <a:off x="4997200" y="1943100"/>
+            <a:ext cx="3584440" cy="2157980"/>
+          </a:xfrm>
+          <a:prstGeom prst="rect">
+            <a:avLst/>
+          </a:prstGeom>
+          <a:noFill/>
+          <a:ln w="28575">
+            <a:solidFill>
+              <a:srgbClr val="8E6F3E"/>
+            </a:solidFill>
+            <a:prstDash val="dash"/>
+          </a:ln>
+        </p:spPr>
+        <p:txBody>
+          <a:bodyPr wrap="square" lIns="27432" tIns="22860" rIns="27432" bIns="22860" anchor="ctr"/>
+          <a:lstStyle/>
+          <a:p>
+            <a:pPr>
+              <a:buNone/>
+            </a:pPr>
+            <a:endParaRPr lang="en-US"/>
+          </a:p>
+        </p:txBody>
+      </p:sp>
+      <p:sp>
+        <p:nvSpPr>
           <p:cNvPr id="42" name="Scaf2"/>
           <p:cNvSpPr/>
           <p:nvPr/>
         </p:nvSpPr>
         <p:spPr>
           <a:xfrm>
-            <a:off x="5399540" y="2222000"/>
+            <a:off x="5381240" y="2180850"/>
             <a:ext cx="2816360" cy="1609340"/>
           </a:xfrm>
           <a:prstGeom prst="rect">
@@ -24051,7 +24084,7 @@
         </p:nvSpPr>
         <p:spPr>
           <a:xfrm>
-            <a:off x="5765300" y="2587760"/>
+            <a:off x="5747000" y="2583180"/>
             <a:ext cx="2084840" cy="804680"/>
           </a:xfrm>
           <a:prstGeom prst="rect">
@@ -24093,7 +24126,7 @@
         </p:nvSpPr>
         <p:spPr>
           <a:xfrm>
-            <a:off x="5765300" y="3486160"/>
+            <a:off x="5747000" y="3463295"/>
             <a:ext cx="2084840" cy="251460"/>
           </a:xfrm>
           <a:prstGeom prst="rect">
@@ -24133,8 +24166,8 @@
         </p:nvSpPr>
         <p:spPr>
           <a:xfrm>
-            <a:off x="4777740" y="4105660"/>
-            <a:ext cx="4023360" cy="205740"/>
+            <a:off x="4722880" y="4101080"/>
+            <a:ext cx="4133080" cy="274320"/>
           </a:xfrm>
           <a:prstGeom prst="rect">
             <a:avLst/>
@@ -24167,13 +24200,13 @@
       </p:sp>
       <p:sp>
         <p:nvSpPr>
-          <p:cNvPr id="46" name="ColCap2"/>
+          <p:cNvPr id="47" name="ColCap2"/>
           <p:cNvSpPr txBox="1"/>
           <p:nvPr/>
         </p:nvSpPr>
         <p:spPr>
           <a:xfrm>
-            <a:off x="4709160" y="4419600"/>
+            <a:off x="4709160" y="4457700"/>
             <a:ext cx="4160520" cy="502920"/>
           </a:xfrm>
           <a:prstGeom prst="rect">
@@ -24375,8 +24408,8 @@
         </p:blipFill>
         <p:spPr>
           <a:xfrm>
-            <a:off x="1327211" y="868680"/>
-            <a:ext cx="6489577" cy="3108960"/>
+            <a:off x="1422646" y="868680"/>
+            <a:ext cx="6298707" cy="3017520"/>
           </a:xfrm>
           <a:prstGeom prst="rect">
             <a:avLst/>
@@ -24396,8 +24429,8 @@
         </p:nvSpPr>
         <p:spPr>
           <a:xfrm>
-            <a:off x="1327211" y="4023360"/>
-            <a:ext cx="7542469" cy="251460"/>
+            <a:off x="1422646" y="3931920"/>
+            <a:ext cx="7447034" cy="251460"/>
           </a:xfrm>
           <a:prstGeom prst="rect">
             <a:avLst/>
@@ -24445,7 +24478,7 @@
         </p:nvSpPr>
         <p:spPr>
           <a:xfrm>
-            <a:off x="365760" y="4343400"/>
+            <a:off x="365760" y="4229100"/>
             <a:ext cx="3566160" cy="205740"/>
           </a:xfrm>
           <a:prstGeom prst="rect">
@@ -24485,7 +24518,7 @@
         </p:nvSpPr>
         <p:spPr>
           <a:xfrm>
-            <a:off x="365760" y="4594860"/>
+            <a:off x="365760" y="4480560"/>
             <a:ext cx="3566160" cy="320040"/>
           </a:xfrm>
           <a:prstGeom prst="rect">
@@ -24528,23 +24561,7 @@
                   <a:srgbClr val="5C4826"/>
                 </a:solidFill>
               </a:rPr>
-              <a:t xml:space="preserve"> = </a:t>
-            </a:r>
-            <a:r>
-              <a:rPr lang="en-US" sz="1300" b="1" i="1" dirty="0">
-                <a:solidFill>
-                  <a:srgbClr val="5C4826"/>
-                </a:solidFill>
-              </a:rPr>
-              <a:t xml:space="preserve">P(E | R)</a:t>
-            </a:r>
-            <a:r>
-              <a:rPr lang="en-US" sz="1300" b="0" i="1" dirty="0">
-                <a:solidFill>
-                  <a:srgbClr val="5C4826"/>
-                </a:solidFill>
-              </a:rPr>
-              <a:t xml:space="preserve"> · P(I | E, R) · P(L | I, E, R)</a:t>
+              <a:t xml:space="preserve"> = P(E | R) · P(I | E, R) · P(L | I, E, R)</a:t>
             </a:r>
           </a:p>
         </p:txBody>
@@ -24557,8 +24574,8 @@
         </p:nvSpPr>
         <p:spPr>
           <a:xfrm>
-            <a:off x="365760" y="5234940"/>
-            <a:ext cx="3566160" cy="457200"/>
+            <a:off x="365760" y="5097780"/>
+            <a:ext cx="3566160" cy="548640"/>
           </a:xfrm>
           <a:prstGeom prst="rect">
             <a:avLst/>
@@ -24662,7 +24679,7 @@
         </p:nvSpPr>
         <p:spPr>
           <a:xfrm>
-            <a:off x="4114800" y="4343400"/>
+            <a:off x="4114800" y="4229100"/>
             <a:ext cx="3017520" cy="548640"/>
           </a:xfrm>
           <a:prstGeom prst="roundRect">
@@ -24735,7 +24752,7 @@
         </p:nvSpPr>
         <p:spPr>
           <a:xfrm>
-            <a:off x="4114800" y="4983480"/>
+            <a:off x="4114800" y="4846320"/>
             <a:ext cx="4754880" cy="205740"/>
           </a:xfrm>
           <a:prstGeom prst="rect">
@@ -24775,8 +24792,8 @@
         </p:nvSpPr>
         <p:spPr>
           <a:xfrm>
-            <a:off x="4114800" y="5234940"/>
-            <a:ext cx="4754880" cy="457200"/>
+            <a:off x="4114800" y="5097780"/>
+            <a:ext cx="4754880" cy="548640"/>
           </a:xfrm>
           <a:prstGeom prst="rect">
             <a:avLst/>

--- a/course/lectures/act-2-delegation-and-control/02-modeling/2-2-Modeling-1-Purposeful-Reduction.pptx
+++ b/course/lectures/act-2-delegation-and-control/02-modeling/2-2-Modeling-1-Purposeful-Reduction.pptx
@@ -16259,7 +16259,7 @@
                   <a:srgbClr val="8E6F3E"/>
                 </a:solidFill>
               </a:rPr>
-              <a:t>✗ a distinction</a:t>
+              <a:t>✗ unlimited</a:t>
             </a:r>
           </a:p>
         </p:txBody>

--- a/course/lectures/act-2-delegation-and-control/02-modeling/2-2-Modeling-1-Purposeful-Reduction.pptx
+++ b/course/lectures/act-2-delegation-and-control/02-modeling/2-2-Modeling-1-Purposeful-Reduction.pptx
@@ -710,13 +710,7 @@
           <a:p>
             <a:r>
               <a:rPr lang="en-US" dirty="0"/>
-              <a:t>Five artifacts. One territory. Not one of them is the system, and not one of them is wrong.</a:t>
-            </a:r>
-          </a:p>
-          <a:p>
-            <a:r>
-              <a:rPr lang="en-US" dirty="0"/>
-              <a:t>The spoken line, and it is the section's thesis: hold the system constant, change the question, watch the model change. Different questions preserve different distinctions.</a:t>
+              <a:t>Five artifacts. One territory. Not one of them is the system, and not one of them is wrong. The spoken line, and it is the section's thesis: hold the system constant, change the question, watch the model change. Different questions preserve different distinctions.</a:t>
             </a:r>
           </a:p>
           <a:p>
@@ -728,7 +722,7 @@
           <a:p>
             <a:r>
               <a:rPr lang="en-US" dirty="0"/>
-              <a:t>Do not walk all five again. Point, land the thesis, move. Forty-five seconds.</a:t>
+              <a:t>The evidence is on the slide now. Each card carries its question and, in the pill beneath it, what that view keeps: STRUCTURE, ORDER, LIFECYCLE, BRANCHING, INTENT. Read the pill row left to right, once — do not walk all five diagrams again. For one concrete beat, contrast the first two cards: the class view records that one Section has many Enrollments and nothing about when; the sequence view records that register precedes enrolled and nothing about how many. The pictures themselves are small on purpose, and their fine labels do not carry past the front rows, so do not ask the room to read them. They are recall of five slides just seen full-size; the pills carry the claim. Forty-five seconds. Point, land the thesis, move.</a:t>
             </a:r>
           </a:p>
           <a:p>
@@ -740,7 +734,7 @@
           <a:p>
             <a:r>
               <a:rPr lang="en-US" dirty="0"/>
-              <a:t>NAME THE FIVE DISTINCTIONS ALOUD while pointing, one per card — this is the evidence for the second half of the thesis, and the thumbnails are too small to carry it on their own: structure, order, lifecycle, branching, intent. Five questions, five things worth keeping, one territory.</a:t>
+              <a:t>Five questions, five things worth keeping, one territory.</a:t>
             </a:r>
           </a:p>
         </p:txBody>
@@ -7672,7 +7666,7 @@
       </p:sp>
       <p:pic>
         <p:nvPicPr>
-          <p:cNvPr id="60" name="ThumbFigure" descr="Five models of one course-registration system shown together: the class diagram, the sequence diagram, the state machine, the activity diagram and the use-case diagram, each captioned with the question it answers."/>
+          <p:cNvPr id="60" name="ThumbFigure" descr="Five views of one course-registration system side by side, each trimmed to a readable fragment and captioned with the engineering question it answers: what exists, who talks to whom, what states, what paths, who needs what. Beneath each view a pill names what that view preserves: structure, order, lifecycle, branching, intent."/>
           <p:cNvPicPr>
             <a:picLocks noChangeAspect="1"/>
           </p:cNvPicPr>
@@ -7686,8 +7680,8 @@
         </p:blipFill>
         <p:spPr>
           <a:xfrm>
-            <a:off x="1349594" y="1341120"/>
-            <a:ext cx="6444813" cy="4373880"/>
+            <a:off x="274320" y="1454084"/>
+            <a:ext cx="8595360" cy="4285143"/>
           </a:xfrm>
           <a:prstGeom prst="rect">
             <a:avLst/>

--- a/course/lectures/act-2-delegation-and-control/02-modeling/2-2-Modeling-1-Purposeful-Reduction.pptx
+++ b/course/lectures/act-2-delegation-and-control/02-modeling/2-2-Modeling-1-Purposeful-Reduction.pptx
@@ -539,7 +539,7 @@
           <a:p>
             <a:r>
               <a:rPr dirty="0"/>
-              <a:t>Today’s spine is the production equation from the theory chapter. Delegation introduced that picture qualitatively; today we bring it back quantified and point at the one term Modeling acts on; Alignment will return to the same drawing from the other side. Open on it deliberately: the next three slides are the map for the whole of Act II, not a warm-up.</a:t>
+              <a:t>Today’s spine is the production equation from the theory chapter. Delegation introduced that picture qualitatively; today we bring it back quantified and point at the one term Modeling acts on; Alignment will return to the same drawing from the other side. Open on it deliberately: the environment picture, the production equation and “Open the box” are the map for the whole of Act II, not a warm-up.</a:t>
             </a:r>
           </a:p>
         </p:txBody>
@@ -598,7 +598,7 @@
           <a:p>
             <a:r>
               <a:rPr lang="en-US" dirty="0"/>
-              <a:t>Both diagrams are correct. Neither is more true. They preserve different distinctions because they were built to answer different questions — which is the thesis two slides from now, arriving by demonstration rather than by assertion.</a:t>
+              <a:t>Both diagrams are correct. Neither is more true. They preserve different distinctions because they were built to answer different questions — which is the thesis of “Same territory, different questions”, arriving by demonstration rather than by assertion.</a:t>
             </a:r>
           </a:p>
         </p:txBody>
@@ -663,7 +663,7 @@
           <a:p>
             <a:r>
               <a:rPr lang="en-US" dirty="0"/>
-              <a:t>Last tour beat. The next slide is the punchline — do not deliver it here.</a:t>
+              <a:t>Last tour beat. “Same territory, different questions” is the punchline — do not deliver it here.</a:t>
             </a:r>
           </a:p>
         </p:txBody>
@@ -941,7 +941,7 @@
           <a:p>
             <a:r>
               <a:rPr dirty="0"/>
-              <a:t>Spine strip: MODEL stage highlighted (stage 2 of the recurring discipline from slide 9).</a:t>
+              <a:t>Spine strip: MODEL stage highlighted (stage 2 of the four-question discipline named on “Modeling is purposeful reduction”).</a:t>
             </a:r>
           </a:p>
           <a:p>
@@ -1281,7 +1281,7 @@
           <a:p>
             <a:r>
               <a:rPr dirty="0"/>
-              <a:t>- Leave the space under the station row empty and do not fill it. Two slides from here, on "Open the box", that is exactly where the arithmetic arrives.</a:t>
+              <a:t>- Leave the space under the station row empty and do not fill it. On "Open the box", that is exactly where the arithmetic arrives.</a:t>
             </a:r>
           </a:p>
           <a:p>
@@ -1464,7 +1464,7 @@
           <a:p>
             <a:r>
               <a:rPr dirty="0"/>
-              <a:t>Watch what did NOT move: the core. That is the next slide.</a:t>
+              <a:t>Watch what did NOT move: the core. That is “Capability can reduce scaffolding”.</a:t>
             </a:r>
           </a:p>
         </p:txBody>
@@ -1954,7 +1954,7 @@
           <a:p>
             <a:r>
               <a:rPr dirty="0"/>
-              <a:t>Modeling is named on the picture behind you, but do not yet say which term it acts on. Naming the lever here spends the next slide’s move, which is to open the probability and point at the one term Modeling acts on. About 2.5 minutes including the naming exchange.</a:t>
+              <a:t>Modeling is named on the picture behind you, but do not yet say which term it acts on. Naming the lever here spends the move of “Open the box”, which is to open the probability and point at the one term Modeling acts on. About 2.5 minutes including the naming exchange.</a:t>
             </a:r>
           </a:p>
         </p:txBody>
@@ -2432,7 +2432,7 @@
           <a:p>
             <a:r>
               <a:rPr dirty="0"/>
-              <a:t>Retitle rationale: the previous two slides just named the problem as representational, not merely informational. The hop is not a bandwidth shortage; it is an encode-and-recover chain. The engineer encodes (E), the agent interprets (I), so this picture is the first two factors of the decomposition drawn as people rather than as arithmetic. That is why the gap now carries E and I tags.</a:t>
+              <a:t>Retitle rationale: “The production equation” and “Open the box” just named the problem as representational, not merely informational. The hop is not a bandwidth shortage; it is an encode-and-recover chain. The engineer encodes (E), the agent interprets (I), so this picture is the first two factors of the decomposition drawn as people rather than as arithmetic. That is why the gap now carries E and I tags.</a:t>
             </a:r>
           </a:p>
           <a:p>
@@ -2574,7 +2574,7 @@
           <a:p>
             <a:r>
               <a:rPr lang="en-US" dirty="0"/>
-              <a:t>What this diagram preserves: which things exist and how they connect. What it throws away: order, timing, state, who wants what. Every one of those omissions is deliberate, and the next four slides each rescue exactly one of them.</a:t>
+              <a:t>What this diagram preserves: which things exist and how they connect. What it throws away: order, timing, state, who wants what. Every one of those omissions is deliberate, and the remaining four tour slides each rescue exactly one of them.</a:t>
             </a:r>
           </a:p>
         </p:txBody>

--- a/course/lectures/act-2-delegation-and-control/02-modeling/2-2-Modeling-1-Purposeful-Reduction.pptx
+++ b/course/lectures/act-2-delegation-and-control/02-modeling/2-2-Modeling-1-Purposeful-Reduction.pptx
@@ -7903,7 +7903,7 @@
                   <a:srgbClr val="555960"/>
                 </a:solidFill>
               </a:rPr>
-              <a:t>BESSER — BESSER-PEARL (Jordi Cabot's group), MIT licence · github.com/BESSER-PEARL/BESSER</a:t>
+              <a:t>BESSER — BESSER-PEARL (Jordi Cabot's group), MIT License · github.com/BESSER-PEARL/BESSER</a:t>
             </a:r>
           </a:p>
         </p:txBody>

--- a/course/lectures/act-2-delegation-and-control/02-modeling/2-2-Modeling-1-Purposeful-Reduction.pptx
+++ b/course/lectures/act-2-delegation-and-control/02-modeling/2-2-Modeling-1-Purposeful-Reduction.pptx
@@ -1640,14 +1640,26 @@
           <a:lstStyle/>
           <a:p>
             <a:r>
-              <a:rPr dirty="0"/>
-              <a:t>ROLE CHANGE, stated aloud: Section 2's controller taught how to reason. These two cases show how you find out whether the reasoning was right — a different job, not a second pass of the same lesson.</a:t>
-            </a:r>
-          </a:p>
-          <a:p>
-            <a:r>
-              <a:rPr dirty="0"/>
-              <a:t>Both production cases come from the instructor's production system. The lease's omission was vindicated; the account quota's was refuted. A hypothetical can teach judgment; only production can grade it. (Plan §7 — this section break exists to make the method/evidence split visible.)</a:t>
+              <a:rPr lang="en-US" dirty="0"/>
+              <a:t>ROLE CHANGE, stated aloud: Section 2 taught how to reason about a reduction. This section asks what connects a model to the things it deliberately left free, and how you find out whether that connection holds.</a:t>
+            </a:r>
+          </a:p>
+          <a:p>
+            <a:r>
+              <a:rPr lang="en-US" dirty="0"/>
+              <a:t>Three beats, in this order: one model with several legitimate implementations; models that refine into other models; then two production cases that graded a correspondence claim. The section is named for the claim, not for the evidence.</a:t>
+            </a:r>
+          </a:p>
+          <a:p>
+            <a:r>
+              <a:rPr lang="en-US" dirty="0"/>
+              <a:t>Both production cases come from the instructor's production system. The lease's omission was vindicated; the account quota's was refuted. A hypothetical can teach judgment; only production can grade it.</a:t>
+            </a:r>
+          </a:p>
+          <a:p>
+            <a:r>
+              <a:rPr lang="en-US" dirty="0"/>
+              <a:t>TERMINOLOGY GUARD, for your own speech as much as for the slides: model refinement, or a system of models. Never use the meta- prefix here — a model of a modeling language is a different idea and not what this section is about.</a:t>
             </a:r>
           </a:p>
         </p:txBody>
@@ -16976,7 +16988,7 @@
                   <a:srgbClr val="000000"/>
                 </a:solidFill>
               </a:rPr>
-              <a:t>THE EVIDENCE</a:t>
+              <a:t>CORRESPONDENCE</a:t>
             </a:r>
           </a:p>
         </p:txBody>
@@ -17012,8 +17024,8 @@
         </p:nvSpPr>
         <p:spPr>
           <a:xfrm>
-            <a:off x="685800" y="2798064"/>
-            <a:ext cx="7772400" cy="475488"/>
+            <a:off x="274320" y="2798064"/>
+            <a:ext cx="8595360" cy="475488"/>
           </a:xfrm>
           <a:prstGeom prst="rect">
             <a:avLst/>
@@ -17036,7 +17048,7 @@
                   <a:srgbClr val="5C4826"/>
                 </a:solidFill>
               </a:rPr>
-              <a:t>How do you find out whether you left out the right things?</a:t>
+              <a:t>A model is useful because something else corresponds to it.</a:t>
             </a:r>
           </a:p>
         </p:txBody>
@@ -17309,8 +17321,8 @@
         </p:nvSpPr>
         <p:spPr>
           <a:xfrm>
-            <a:off x="685800" y="3657600"/>
-            <a:ext cx="7772400" cy="274320"/>
+            <a:off x="274320" y="3657600"/>
+            <a:ext cx="8595360" cy="274320"/>
           </a:xfrm>
           <a:prstGeom prst="rect">
             <a:avLst/>
@@ -17336,21 +17348,21 @@
                   <a:srgbClr val="555960"/>
                 </a:solidFill>
               </a:rPr>
-              <a:t>Two production reductions — one vindicated, one refuted.</a:t>
-            </a:r>
-          </a:p>
-        </p:txBody>
-      </p:sp>
-      <p:sp>
-        <p:nvSpPr>
-          <p:cNvPr id="131" name="VTagL"/>
-          <p:cNvSpPr/>
-          <p:nvPr/>
-        </p:nvSpPr>
-        <p:spPr>
-          <a:xfrm>
-            <a:off x="2011680" y="3977640"/>
-            <a:ext cx="2286000" cy="365760"/>
+              <a:t>How do you find out whether you left out the right things? Ask what corresponds.</a:t>
+            </a:r>
+          </a:p>
+        </p:txBody>
+      </p:sp>
+      <p:sp>
+        <p:nvSpPr>
+          <p:cNvPr id="131" name="VTag1"/>
+          <p:cNvSpPr txBox="1"/>
+          <p:nvPr/>
+        </p:nvSpPr>
+        <p:spPr>
+          <a:xfrm>
+            <a:off x="274320" y="3977640"/>
+            <a:ext cx="2743200" cy="640080"/>
           </a:xfrm>
           <a:prstGeom prst="rect">
             <a:avLst/>
@@ -17361,7 +17373,7 @@
           </a:ln>
         </p:spPr>
         <p:txBody>
-          <a:bodyPr wrap="square" lIns="27432" tIns="22860" rIns="27432" bIns="22860" anchor="ctr"/>
+          <a:bodyPr wrap="square" lIns="0" tIns="0" rIns="0" bIns="0" anchor="ctr"/>
           <a:lstStyle/>
           <a:p>
             <a:pPr algn="ctr">
@@ -17371,26 +17383,42 @@
               <a:buNone/>
             </a:pPr>
             <a:r>
-              <a:rPr lang="en-US" sz="1600" b="1" dirty="0">
+              <a:rPr lang="en-US" sz="1600" b="1" i="0" dirty="0">
                 <a:solidFill>
                   <a:srgbClr val="8E6F3E"/>
                 </a:solidFill>
               </a:rPr>
-              <a:t>✓ THE LEASE</a:t>
-            </a:r>
-          </a:p>
-        </p:txBody>
-      </p:sp>
-      <p:sp>
-        <p:nvSpPr>
-          <p:cNvPr id="132" name="VTagR"/>
-          <p:cNvSpPr/>
-          <p:nvPr/>
-        </p:nvSpPr>
-        <p:spPr>
-          <a:xfrm>
-            <a:off x="4846320" y="3977640"/>
-            <a:ext cx="2286000" cy="365760"/>
+              <a:t xml:space="preserve">MODEL → IMPLEMENTATIONS</a:t>
+            </a:r>
+          </a:p>
+          <a:p>
+            <a:pPr algn="ctr">
+              <a:spcAft>
+                <a:spcPts val="0"/>
+              </a:spcAft>
+              <a:buNone/>
+            </a:pPr>
+            <a:r>
+              <a:rPr lang="en-US" sz="1400" b="0" i="0" dirty="0">
+                <a:solidFill>
+                  <a:srgbClr val="555960"/>
+                </a:solidFill>
+              </a:rPr>
+              <a:t xml:space="preserve">one model, many realizations</a:t>
+            </a:r>
+          </a:p>
+        </p:txBody>
+      </p:sp>
+      <p:sp>
+        <p:nvSpPr>
+          <p:cNvPr id="132" name="VTag2"/>
+          <p:cNvSpPr txBox="1"/>
+          <p:nvPr/>
+        </p:nvSpPr>
+        <p:spPr>
+          <a:xfrm>
+            <a:off x="3200400" y="3977640"/>
+            <a:ext cx="2743200" cy="640080"/>
           </a:xfrm>
           <a:prstGeom prst="rect">
             <a:avLst/>
@@ -17401,7 +17429,7 @@
           </a:ln>
         </p:spPr>
         <p:txBody>
-          <a:bodyPr wrap="square" lIns="27432" tIns="22860" rIns="27432" bIns="22860" anchor="ctr"/>
+          <a:bodyPr wrap="square" lIns="0" tIns="0" rIns="0" bIns="0" anchor="ctr"/>
           <a:lstStyle/>
           <a:p>
             <a:pPr algn="ctr">
@@ -17411,12 +17439,84 @@
               <a:buNone/>
             </a:pPr>
             <a:r>
-              <a:rPr lang="en-US" sz="1600" b="1" dirty="0">
+              <a:rPr lang="en-US" sz="1600" b="1" i="0" dirty="0">
                 <a:solidFill>
                   <a:srgbClr val="8E6F3E"/>
                 </a:solidFill>
               </a:rPr>
-              <a:t>✗ ACCOUNT QUOTA</a:t>
+              <a:t xml:space="preserve">MODEL → MODEL</a:t>
+            </a:r>
+          </a:p>
+          <a:p>
+            <a:pPr algn="ctr">
+              <a:spcAft>
+                <a:spcPts val="0"/>
+              </a:spcAft>
+              <a:buNone/>
+            </a:pPr>
+            <a:r>
+              <a:rPr lang="en-US" sz="1400" b="0" i="0" dirty="0">
+                <a:solidFill>
+                  <a:srgbClr val="555960"/>
+                </a:solidFill>
+              </a:rPr>
+              <a:t xml:space="preserve">refinement into a system of models</a:t>
+            </a:r>
+          </a:p>
+        </p:txBody>
+      </p:sp>
+      <p:sp>
+        <p:nvSpPr>
+          <p:cNvPr id="133" name="VTag3"/>
+          <p:cNvSpPr txBox="1"/>
+          <p:nvPr/>
+        </p:nvSpPr>
+        <p:spPr>
+          <a:xfrm>
+            <a:off x="6126480" y="3977640"/>
+            <a:ext cx="2743200" cy="640080"/>
+          </a:xfrm>
+          <a:prstGeom prst="rect">
+            <a:avLst/>
+          </a:prstGeom>
+          <a:noFill/>
+          <a:ln>
+            <a:noFill/>
+          </a:ln>
+        </p:spPr>
+        <p:txBody>
+          <a:bodyPr wrap="square" lIns="0" tIns="0" rIns="0" bIns="0" anchor="ctr"/>
+          <a:lstStyle/>
+          <a:p>
+            <a:pPr algn="ctr">
+              <a:spcAft>
+                <a:spcPts val="0"/>
+              </a:spcAft>
+              <a:buNone/>
+            </a:pPr>
+            <a:r>
+              <a:rPr lang="en-US" sz="1600" b="1" i="0" dirty="0">
+                <a:solidFill>
+                  <a:srgbClr val="8E6F3E"/>
+                </a:solidFill>
+              </a:rPr>
+              <a:t xml:space="preserve">MODEL → EVIDENCE</a:t>
+            </a:r>
+          </a:p>
+          <a:p>
+            <a:pPr algn="ctr">
+              <a:spcAft>
+                <a:spcPts val="0"/>
+              </a:spcAft>
+              <a:buNone/>
+            </a:pPr>
+            <a:r>
+              <a:rPr lang="en-US" sz="1400" b="0" i="0" dirty="0">
+                <a:solidFill>
+                  <a:srgbClr val="555960"/>
+                </a:solidFill>
+              </a:rPr>
+              <a:t xml:space="preserve">✓ the lease  ·  ✗ the quota</a:t>
             </a:r>
           </a:p>
         </p:txBody>

--- a/course/lectures/act-2-delegation-and-control/02-modeling/2-2-Modeling-1-Purposeful-Reduction.pptx
+++ b/course/lectures/act-2-delegation-and-control/02-modeling/2-2-Modeling-1-Purposeful-Reduction.pptx
@@ -33,6 +33,7 @@
     <p:sldId id="290" r:id="rId24"/>
     <p:sldId id="282" r:id="rId25"/>
     <p:sldId id="276" r:id="rId26"/>
+    <p:sldId id="292" r:id="rId42"/>
     <p:sldId id="277" r:id="rId27"/>
     <p:sldId id="278" r:id="rId28"/>
     <p:sldId id="279" r:id="rId29"/>
@@ -2309,6 +2310,77 @@
             <a:r>
               <a:rPr dirty="0"/>
               <a:t>[QR placeholder — feedback form URL pending per plan §8.2; a finisher unit drops in the real QR PNG with alt text = URL.]</a:t>
+            </a:r>
+          </a:p>
+        </p:txBody>
+      </p:sp>
+    </p:spTree>
+  </p:cSld>
+  <p:clrMapOvr>
+    <a:masterClrMapping/>
+  </p:clrMapOvr>
+</p:notes>
+</file>
+
+<file path=ppt/notesSlides/notesSlide36.xml><?xml version="1.0" encoding="utf-8"?>
+<p:notes xmlns:a="http://schemas.openxmlformats.org/drawingml/2006/main" xmlns:r="http://schemas.openxmlformats.org/officeDocument/2006/relationships" xmlns:p="http://schemas.openxmlformats.org/presentationml/2006/main">
+  <p:cSld>
+    <p:spTree>
+      <p:nvGrpSpPr>
+        <p:cNvPr id="1" name=""/>
+        <p:cNvGrpSpPr/>
+        <p:nvPr/>
+      </p:nvGrpSpPr>
+      <p:grpSpPr>
+        <a:xfrm>
+          <a:off x="0" y="0"/>
+          <a:ext cx="0" cy="0"/>
+          <a:chOff x="0" y="0"/>
+          <a:chExt cx="0" cy="0"/>
+        </a:xfrm>
+      </p:grpSpPr>
+      <p:sp>
+        <p:nvSpPr>
+          <p:cNvPr id="2" name="Notes Placeholder 1"/>
+          <p:cNvSpPr>
+            <a:spLocks noGrp="1"/>
+          </p:cNvSpPr>
+          <p:nvPr>
+            <p:ph type="body" idx="1"/>
+          </p:nvPr>
+        </p:nvSpPr>
+        <p:spPr/>
+        <p:txBody>
+          <a:bodyPr/>
+          <a:lstStyle/>
+          <a:p>
+            <a:r>
+              <a:rPr lang="en-US" dirty="0"/>
+              <a:t>This is the same state machine they saw on the tour — the same image, not a redrawing. Say so: "you have seen this one." The recognition is the setup. If they think it is a new diagram, the slide does not work.</a:t>
+            </a:r>
+          </a:p>
+          <a:p>
+            <a:r>
+              <a:rPr lang="en-US" dirty="0"/>
+              <a:t>Three realizations, all on screen together. A state field plus transition logic; State objects, one class per state; a transition table an engine reads at runtime. None is more correct than the others, and the model does not choose between them.</a:t>
+            </a:r>
+          </a:p>
+          <a:p>
+            <a:r>
+              <a:rPr lang="en-US" dirty="0"/>
+              <a:t>Then the class question, and let it breathe — about a minute, no more. What has to remain true for each of these to correspond to the model? The answers you are fishing for: the four states exist and are distinguishable; the legal transitions are exactly those and no others; there is no path from Draft to Published.</a:t>
+            </a:r>
+          </a:p>
+          <a:p>
+            <a:r>
+              <a:rPr lang="en-US" dirty="0"/>
+              <a:t>This is what makes degrees of freedom concrete. Between the boundaries the model establishes, the implementation has enormous freedom — and that freedom is not sloppiness, it is what the reduction bought.</a:t>
+            </a:r>
+          </a:p>
+          <a:p>
+            <a:r>
+              <a:rPr lang="en-US" dirty="0"/>
+              <a:t>One sentence toward Alignment, then stop: Modeling says what correspondence MEANS; Alignment will ask how we establish and enforce it.</a:t>
             </a:r>
           </a:p>
         </p:txBody>
@@ -24058,6 +24130,536 @@
                 </a:solidFill>
               </a:rPr>
               <a:t>one model can be useful. How do many models remain trustworthy together?</a:t>
+            </a:r>
+          </a:p>
+        </p:txBody>
+      </p:sp>
+    </p:spTree>
+  </p:cSld>
+  <p:clrMapOvr>
+    <a:masterClrMapping/>
+  </p:clrMapOvr>
+</p:sld>
+</file>
+
+<file path=ppt/slides/slide36.xml><?xml version="1.0" encoding="utf-8"?>
+<p:sld xmlns:a="http://schemas.openxmlformats.org/drawingml/2006/main" xmlns:r="http://schemas.openxmlformats.org/officeDocument/2006/relationships" xmlns:p="http://schemas.openxmlformats.org/presentationml/2006/main">
+  <p:cSld>
+    <p:spTree>
+      <p:nvGrpSpPr>
+        <p:cNvPr id="1" name=""/>
+        <p:cNvGrpSpPr/>
+        <p:nvPr/>
+      </p:nvGrpSpPr>
+      <p:grpSpPr>
+        <a:xfrm>
+          <a:off x="0" y="0"/>
+          <a:ext cx="0" cy="0"/>
+          <a:chOff x="0" y="0"/>
+          <a:chExt cx="0" cy="0"/>
+        </a:xfrm>
+      </p:grpSpPr>
+      <p:sp>
+        <p:nvSpPr>
+          <p:cNvPr id="2" name="Title 1"/>
+          <p:cNvSpPr>
+            <a:spLocks noGrp="1"/>
+          </p:cNvSpPr>
+          <p:nvPr>
+            <p:ph type="title"/>
+          </p:nvPr>
+        </p:nvSpPr>
+        <p:spPr/>
+        <p:txBody>
+          <a:bodyPr>
+            <a:normAutofit/>
+          </a:bodyPr>
+          <a:lstStyle/>
+          <a:p>
+            <a:r>
+              <a:rPr lang="en-US" dirty="0"/>
+              <a:t>One model, many implementations</a:t>
+            </a:r>
+          </a:p>
+        </p:txBody>
+      </p:sp>
+      <p:sp>
+        <p:nvSpPr>
+          <p:cNvPr id="3" name="Slide Number Placeholder 3"/>
+          <p:cNvSpPr>
+            <a:spLocks noGrp="1"/>
+          </p:cNvSpPr>
+          <p:nvPr>
+            <p:ph type="sldNum" sz="quarter" idx="4"/>
+          </p:nvPr>
+        </p:nvSpPr>
+        <p:spPr/>
+        <p:txBody>
+          <a:bodyPr/>
+          <a:lstStyle/>
+          <a:p>
+            <a:fld id="{B7EB45DA-9A0D-DC49-8E02-F30A5DDC21C3}" type="slidenum">
+              <a:rPr lang="en-US" smtClean="0"/>
+              <a:t>26</a:t>
+            </a:fld>
+            <a:endParaRPr lang="en-US"/>
+          </a:p>
+        </p:txBody>
+      </p:sp>
+      <p:sp>
+        <p:nvSpPr>
+          <p:cNvPr id="20" name="ModelKick"/>
+          <p:cNvSpPr txBox="1"/>
+          <p:nvPr/>
+        </p:nvSpPr>
+        <p:spPr>
+          <a:xfrm>
+            <a:off x="274320" y="868680"/>
+            <a:ext cx="8595360" cy="256032"/>
+          </a:xfrm>
+          <a:prstGeom prst="rect">
+            <a:avLst/>
+          </a:prstGeom>
+          <a:noFill/>
+          <a:ln>
+            <a:noFill/>
+          </a:ln>
+        </p:spPr>
+        <p:txBody>
+          <a:bodyPr wrap="square" lIns="0" tIns="0" rIns="0" bIns="0" anchor="t"/>
+          <a:lstStyle/>
+          <a:p>
+            <a:pPr algn="ctr">
+              <a:spcAft>
+                <a:spcPts val="0"/>
+              </a:spcAft>
+              <a:buNone/>
+            </a:pPr>
+            <a:r>
+              <a:rPr lang="en-US" sz="1600" b="1" i="0" dirty="0">
+                <a:solidFill>
+                  <a:srgbClr val="8E6F3E"/>
+                </a:solidFill>
+              </a:rPr>
+              <a:t xml:space="preserve">THE MODEL  ·  unchanged from the tour</a:t>
+            </a:r>
+          </a:p>
+        </p:txBody>
+      </p:sp>
+      <p:sp>
+        <p:nvSpPr>
+          <p:cNvPr id="50" name="FigPanel"/>
+          <p:cNvSpPr/>
+          <p:nvPr/>
+        </p:nvSpPr>
+        <p:spPr>
+          <a:xfrm>
+            <a:off x="2437130" y="1115568"/>
+            <a:ext cx="4269740" cy="2103120"/>
+          </a:xfrm>
+          <a:prstGeom prst="rect">
+            <a:avLst/>
+          </a:prstGeom>
+          <a:solidFill>
+            <a:srgbClr val="FDFCF9"/>
+          </a:solidFill>
+          <a:ln>
+            <a:noFill/>
+          </a:ln>
+        </p:spPr>
+        <p:txBody>
+          <a:bodyPr wrap="square" lIns="27432" tIns="22860" rIns="27432" bIns="22860" anchor="ctr"/>
+          <a:lstStyle/>
+          <a:p>
+            <a:pPr>
+              <a:buNone/>
+            </a:pPr>
+            <a:endParaRPr lang="en-US"/>
+          </a:p>
+        </p:txBody>
+      </p:sp>
+      <p:pic>
+        <p:nvPicPr>
+          <p:cNvPr id="60" name="TourFigure" descr="A UML state machine for a course proposal: Draft to Submitted to Approved to Published, with a revise transition returning Submitted to Draft, and a final state after Published."/>
+          <p:cNvPicPr>
+            <a:picLocks noChangeAspect="1"/>
+          </p:cNvPicPr>
+          <p:nvPr/>
+        </p:nvPicPr>
+        <p:blipFill>
+          <a:blip r:embed="rId2"/>
+          <a:stretch>
+            <a:fillRect/>
+          </a:stretch>
+        </p:blipFill>
+        <p:spPr>
+          <a:xfrm>
+            <a:off x="2529070" y="1207008"/>
+            <a:ext cx="4085860" cy="1920240"/>
+          </a:xfrm>
+          <a:prstGeom prst="rect">
+            <a:avLst/>
+          </a:prstGeom>
+        </p:spPr>
+      </p:pic>
+      <p:sp>
+        <p:nvSpPr>
+          <p:cNvPr id="70" name="CardA"/>
+          <p:cNvSpPr/>
+          <p:nvPr/>
+        </p:nvSpPr>
+        <p:spPr>
+          <a:xfrm>
+            <a:off x="274320" y="3364992"/>
+            <a:ext cx="2743200" cy="1481328"/>
+          </a:xfrm>
+          <a:prstGeom prst="rect">
+            <a:avLst/>
+          </a:prstGeom>
+          <a:solidFill>
+            <a:srgbClr val="FBF8F2"/>
+          </a:solidFill>
+          <a:ln w="12700">
+            <a:solidFill>
+              <a:srgbClr val="C9B991"/>
+            </a:solidFill>
+          </a:ln>
+        </p:spPr>
+        <p:txBody>
+          <a:bodyPr wrap="square" lIns="27432" tIns="22860" rIns="27432" bIns="22860" anchor="ctr"/>
+          <a:lstStyle/>
+          <a:p>
+            <a:pPr algn="ctr">
+              <a:spcAft>
+                <a:spcPts val="400"/>
+              </a:spcAft>
+              <a:buNone/>
+            </a:pPr>
+            <a:r>
+              <a:rPr lang="en-US" sz="1600" b="1" i="0" dirty="0">
+                <a:solidFill>
+                  <a:srgbClr val="8E6F3E"/>
+                </a:solidFill>
+              </a:rPr>
+              <a:t xml:space="preserve">A  STATE ENUM</a:t>
+            </a:r>
+          </a:p>
+          <a:p>
+            <a:pPr algn="ctr">
+              <a:spcAft>
+                <a:spcPts val="0"/>
+              </a:spcAft>
+              <a:buNone/>
+            </a:pPr>
+            <a:r>
+              <a:rPr lang="en-US" sz="1400" b="0" i="0" dirty="0">
+                <a:solidFill>
+                  <a:srgbClr val="5C4826"/>
+                </a:solidFill>
+              </a:rPr>
+              <a:t xml:space="preserve">status = Draft</a:t>
+            </a:r>
+          </a:p>
+          <a:p>
+            <a:pPr algn="ctr">
+              <a:spcAft>
+                <a:spcPts val="0"/>
+              </a:spcAft>
+              <a:buNone/>
+            </a:pPr>
+            <a:r>
+              <a:rPr lang="en-US" sz="1400" b="0" i="0" dirty="0">
+                <a:solidFill>
+                  <a:srgbClr val="5C4826"/>
+                </a:solidFill>
+              </a:rPr>
+              <a:t xml:space="preserve">status = Submitted</a:t>
+            </a:r>
+          </a:p>
+          <a:p>
+            <a:pPr algn="ctr">
+              <a:spcAft>
+                <a:spcPts val="0"/>
+              </a:spcAft>
+              <a:buNone/>
+            </a:pPr>
+            <a:r>
+              <a:rPr lang="en-US" sz="1400" b="0" i="1" dirty="0">
+                <a:solidFill>
+                  <a:srgbClr val="555960"/>
+                </a:solidFill>
+              </a:rPr>
+              <a:t xml:space="preserve">one field, plus transition logic</a:t>
+            </a:r>
+          </a:p>
+        </p:txBody>
+      </p:sp>
+      <p:sp>
+        <p:nvSpPr>
+          <p:cNvPr id="71" name="CardB"/>
+          <p:cNvSpPr/>
+          <p:nvPr/>
+        </p:nvSpPr>
+        <p:spPr>
+          <a:xfrm>
+            <a:off x="3200400" y="3364992"/>
+            <a:ext cx="2743200" cy="1481328"/>
+          </a:xfrm>
+          <a:prstGeom prst="rect">
+            <a:avLst/>
+          </a:prstGeom>
+          <a:solidFill>
+            <a:srgbClr val="FBF8F2"/>
+          </a:solidFill>
+          <a:ln w="12700">
+            <a:solidFill>
+              <a:srgbClr val="C9B991"/>
+            </a:solidFill>
+          </a:ln>
+        </p:spPr>
+        <p:txBody>
+          <a:bodyPr wrap="square" lIns="27432" tIns="22860" rIns="27432" bIns="22860" anchor="ctr"/>
+          <a:lstStyle/>
+          <a:p>
+            <a:pPr algn="ctr">
+              <a:spcAft>
+                <a:spcPts val="400"/>
+              </a:spcAft>
+              <a:buNone/>
+            </a:pPr>
+            <a:r>
+              <a:rPr lang="en-US" sz="1600" b="1" i="0" dirty="0">
+                <a:solidFill>
+                  <a:srgbClr val="8E6F3E"/>
+                </a:solidFill>
+              </a:rPr>
+              <a:t xml:space="preserve">B  STATE OBJECTS</a:t>
+            </a:r>
+          </a:p>
+          <a:p>
+            <a:pPr algn="ctr">
+              <a:spcAft>
+                <a:spcPts val="0"/>
+              </a:spcAft>
+              <a:buNone/>
+            </a:pPr>
+            <a:r>
+              <a:rPr lang="en-US" sz="1400" b="0" i="0" dirty="0">
+                <a:solidFill>
+                  <a:srgbClr val="5C4826"/>
+                </a:solidFill>
+              </a:rPr>
+              <a:t xml:space="preserve">class DraftState:</a:t>
+            </a:r>
+          </a:p>
+          <a:p>
+            <a:pPr algn="ctr">
+              <a:spcAft>
+                <a:spcPts val="0"/>
+              </a:spcAft>
+              <a:buNone/>
+            </a:pPr>
+            <a:r>
+              <a:rPr lang="en-US" sz="1400" b="0" i="0" dirty="0">
+                <a:solidFill>
+                  <a:srgbClr val="5C4826"/>
+                </a:solidFill>
+              </a:rPr>
+              <a:t xml:space="preserve">def submit(self): …</a:t>
+            </a:r>
+          </a:p>
+          <a:p>
+            <a:pPr algn="ctr">
+              <a:spcAft>
+                <a:spcPts val="0"/>
+              </a:spcAft>
+              <a:buNone/>
+            </a:pPr>
+            <a:r>
+              <a:rPr lang="en-US" sz="1400" b="0" i="1" dirty="0">
+                <a:solidFill>
+                  <a:srgbClr val="555960"/>
+                </a:solidFill>
+              </a:rPr>
+              <a:t xml:space="preserve">one class per state</a:t>
+            </a:r>
+          </a:p>
+        </p:txBody>
+      </p:sp>
+      <p:sp>
+        <p:nvSpPr>
+          <p:cNvPr id="72" name="CardC"/>
+          <p:cNvSpPr/>
+          <p:nvPr/>
+        </p:nvSpPr>
+        <p:spPr>
+          <a:xfrm>
+            <a:off x="6126480" y="3364992"/>
+            <a:ext cx="2743200" cy="1481328"/>
+          </a:xfrm>
+          <a:prstGeom prst="rect">
+            <a:avLst/>
+          </a:prstGeom>
+          <a:solidFill>
+            <a:srgbClr val="FBF8F2"/>
+          </a:solidFill>
+          <a:ln w="12700">
+            <a:solidFill>
+              <a:srgbClr val="C9B991"/>
+            </a:solidFill>
+          </a:ln>
+        </p:spPr>
+        <p:txBody>
+          <a:bodyPr wrap="square" lIns="27432" tIns="22860" rIns="27432" bIns="22860" anchor="ctr"/>
+          <a:lstStyle/>
+          <a:p>
+            <a:pPr algn="ctr">
+              <a:spcAft>
+                <a:spcPts val="400"/>
+              </a:spcAft>
+              <a:buNone/>
+            </a:pPr>
+            <a:r>
+              <a:rPr lang="en-US" sz="1600" b="1" i="0" dirty="0">
+                <a:solidFill>
+                  <a:srgbClr val="8E6F3E"/>
+                </a:solidFill>
+              </a:rPr>
+              <a:t xml:space="preserve">C  TRANSITION TABLE</a:t>
+            </a:r>
+          </a:p>
+          <a:p>
+            <a:pPr algn="ctr">
+              <a:spcAft>
+                <a:spcPts val="0"/>
+              </a:spcAft>
+              <a:buNone/>
+            </a:pPr>
+            <a:r>
+              <a:rPr lang="en-US" sz="1400" b="0" i="0" dirty="0">
+                <a:solidFill>
+                  <a:srgbClr val="5C4826"/>
+                </a:solidFill>
+              </a:rPr>
+              <a:t xml:space="preserve">(Draft, submit) → Submitted</a:t>
+            </a:r>
+          </a:p>
+          <a:p>
+            <a:pPr algn="ctr">
+              <a:spcAft>
+                <a:spcPts val="0"/>
+              </a:spcAft>
+              <a:buNone/>
+            </a:pPr>
+            <a:r>
+              <a:rPr lang="en-US" sz="1400" b="0" i="0" dirty="0">
+                <a:solidFill>
+                  <a:srgbClr val="5C4826"/>
+                </a:solidFill>
+              </a:rPr>
+              <a:t xml:space="preserve">(Submitted, approve) → Approved</a:t>
+            </a:r>
+          </a:p>
+          <a:p>
+            <a:pPr algn="ctr">
+              <a:spcAft>
+                <a:spcPts val="0"/>
+              </a:spcAft>
+              <a:buNone/>
+            </a:pPr>
+            <a:r>
+              <a:rPr lang="en-US" sz="1400" b="0" i="1" dirty="0">
+                <a:solidFill>
+                  <a:srgbClr val="555960"/>
+                </a:solidFill>
+              </a:rPr>
+              <a:t xml:space="preserve">read by a workflow engine</a:t>
+            </a:r>
+          </a:p>
+        </p:txBody>
+      </p:sp>
+      <p:sp>
+        <p:nvSpPr>
+          <p:cNvPr id="80" name="ClassQ"/>
+          <p:cNvSpPr/>
+          <p:nvPr/>
+        </p:nvSpPr>
+        <p:spPr>
+          <a:xfrm>
+            <a:off x="274320" y="4983480"/>
+            <a:ext cx="8595360" cy="502920"/>
+          </a:xfrm>
+          <a:prstGeom prst="rect">
+            <a:avLst/>
+          </a:prstGeom>
+          <a:solidFill>
+            <a:srgbClr val="FBF8F2"/>
+          </a:solidFill>
+          <a:ln w="12700">
+            <a:solidFill>
+              <a:srgbClr val="C9B991"/>
+            </a:solidFill>
+          </a:ln>
+        </p:spPr>
+        <p:txBody>
+          <a:bodyPr wrap="square" lIns="27432" tIns="22860" rIns="27432" bIns="22860" anchor="ctr"/>
+          <a:lstStyle/>
+          <a:p>
+            <a:pPr algn="ctr">
+              <a:spcAft>
+                <a:spcPts val="0"/>
+              </a:spcAft>
+              <a:buNone/>
+            </a:pPr>
+            <a:r>
+              <a:rPr lang="en-US" sz="1800" b="0" i="0" dirty="0">
+                <a:solidFill>
+                  <a:srgbClr val="5C4826"/>
+                </a:solidFill>
+              </a:rPr>
+              <a:t xml:space="preserve">What has to remain true for each implementation to correspond to the model?</a:t>
+            </a:r>
+          </a:p>
+        </p:txBody>
+      </p:sp>
+      <p:sp>
+        <p:nvSpPr>
+          <p:cNvPr id="199" name="FooterBand"/>
+          <p:cNvSpPr/>
+          <p:nvPr/>
+        </p:nvSpPr>
+        <p:spPr>
+          <a:xfrm>
+            <a:off x="274320" y="5852160"/>
+            <a:ext cx="8595360" cy="566928"/>
+          </a:xfrm>
+          <a:prstGeom prst="rect">
+            <a:avLst/>
+          </a:prstGeom>
+          <a:solidFill>
+            <a:srgbClr val="8E6F3E"/>
+          </a:solidFill>
+          <a:ln>
+            <a:noFill/>
+          </a:ln>
+        </p:spPr>
+        <p:txBody>
+          <a:bodyPr wrap="square" lIns="27432" tIns="22860" rIns="27432" bIns="22860" anchor="ctr"/>
+          <a:lstStyle/>
+          <a:p>
+            <a:pPr algn="ctr">
+              <a:spcAft>
+                <a:spcPts val="0"/>
+              </a:spcAft>
+              <a:buNone/>
+            </a:pPr>
+            <a:r>
+              <a:rPr lang="en-US" sz="2000" b="1" i="0" dirty="0">
+                <a:solidFill>
+                  <a:srgbClr val="FFFFFF"/>
+                </a:solidFill>
+              </a:rPr>
+              <a:t xml:space="preserve">A model constrains implementation without determining implementation.</a:t>
             </a:r>
           </a:p>
         </p:txBody>

--- a/course/lectures/act-2-delegation-and-control/02-modeling/2-2-Modeling-1-Purposeful-Reduction.pptx
+++ b/course/lectures/act-2-delegation-and-control/02-modeling/2-2-Modeling-1-Purposeful-Reduction.pptx
@@ -34,6 +34,7 @@
     <p:sldId id="282" r:id="rId25"/>
     <p:sldId id="276" r:id="rId26"/>
     <p:sldId id="292" r:id="rId42"/>
+    <p:sldId id="293" r:id="rId43"/>
     <p:sldId id="277" r:id="rId27"/>
     <p:sldId id="278" r:id="rId28"/>
     <p:sldId id="279" r:id="rId29"/>
@@ -2381,6 +2382,77 @@
             <a:r>
               <a:rPr lang="en-US" dirty="0"/>
               <a:t>One sentence toward Alignment, then stop: Modeling says what correspondence MEANS; Alignment will ask how we establish and enforce it.</a:t>
+            </a:r>
+          </a:p>
+        </p:txBody>
+      </p:sp>
+    </p:spTree>
+  </p:cSld>
+  <p:clrMapOvr>
+    <a:masterClrMapping/>
+  </p:clrMapOvr>
+</p:notes>
+</file>
+
+<file path=ppt/notesSlides/notesSlide37.xml><?xml version="1.0" encoding="utf-8"?>
+<p:notes xmlns:a="http://schemas.openxmlformats.org/drawingml/2006/main" xmlns:r="http://schemas.openxmlformats.org/officeDocument/2006/relationships" xmlns:p="http://schemas.openxmlformats.org/presentationml/2006/main">
+  <p:cSld>
+    <p:spTree>
+      <p:nvGrpSpPr>
+        <p:cNvPr id="1" name=""/>
+        <p:cNvGrpSpPr/>
+        <p:nvPr/>
+      </p:nvGrpSpPr>
+      <p:grpSpPr>
+        <a:xfrm>
+          <a:off x="0" y="0"/>
+          <a:ext cx="0" cy="0"/>
+          <a:chOff x="0" y="0"/>
+          <a:chExt cx="0" cy="0"/>
+        </a:xfrm>
+      </p:grpSpPr>
+      <p:sp>
+        <p:nvSpPr>
+          <p:cNvPr id="2" name="Notes Placeholder 1"/>
+          <p:cNvSpPr>
+            <a:spLocks noGrp="1"/>
+          </p:cNvSpPr>
+          <p:nvPr>
+            <p:ph type="body" idx="1"/>
+          </p:nvPr>
+        </p:nvSpPr>
+        <p:spPr/>
+        <p:txBody>
+          <a:bodyPr/>
+          <a:lstStyle/>
+          <a:p>
+            <a:r>
+              <a:rPr lang="en-US" dirty="0"/>
+              <a:t>Start at the accented use case — Drop a course, the one drawn slightly accented back on the use-case tour slide. This is the callback that slide set up; now it pays.</a:t>
+            </a:r>
+          </a:p>
+          <a:p>
+            <a:r>
+              <a:rPr lang="en-US" dirty="0"/>
+              <a:t>Walk the chain downward once: the use case says what interaction must be supported; the sequence model says who collaborates; the state model says which transitions are legal; the data model says what must persist; then implementation.</a:t>
+            </a:r>
+          </a:p>
+          <a:p>
+            <a:r>
+              <a:rPr lang="en-US" dirty="0"/>
+              <a:t>Then immediately break the line. Two gold arrows leave the accented use case, so Drop a course induces more than one model. Then point at the three lighter arrows, which are the ones that break the single column: a second use case feeding the state model, the state model branching sideways to an interface model, and a second path into implementation. Say the words — this is NOT a mandatory waterfall.</a:t>
+            </a:r>
+          </a:p>
+          <a:p>
+            <a:r>
+              <a:rPr lang="en-US" dirty="0"/>
+              <a:t>TERMINOLOGY GUARD: model refinement, a system of models. Do NOT reach for the meta- prefix. A model of a modeling language — UML described in terms of its own constructs — is a different idea entirely.</a:t>
+            </a:r>
+          </a:p>
+          <a:p>
+            <a:r>
+              <a:rPr lang="en-US" dirty="0"/>
+              <a:t>Cliffhanger into the next lecture, one sentence, then move: one useful model is easy. A real system has many, and their meanings overlap.</a:t>
             </a:r>
           </a:p>
         </p:txBody>
@@ -24660,6 +24732,660 @@
                 </a:solidFill>
               </a:rPr>
               <a:t xml:space="preserve">A model constrains implementation without determining implementation.</a:t>
+            </a:r>
+          </a:p>
+        </p:txBody>
+      </p:sp>
+    </p:spTree>
+  </p:cSld>
+  <p:clrMapOvr>
+    <a:masterClrMapping/>
+  </p:clrMapOvr>
+</p:sld>
+</file>
+
+<file path=ppt/slides/slide37.xml><?xml version="1.0" encoding="utf-8"?>
+<p:sld xmlns:a="http://schemas.openxmlformats.org/drawingml/2006/main" xmlns:r="http://schemas.openxmlformats.org/officeDocument/2006/relationships" xmlns:p="http://schemas.openxmlformats.org/presentationml/2006/main">
+  <p:cSld>
+    <p:spTree>
+      <p:nvGrpSpPr>
+        <p:cNvPr id="1" name=""/>
+        <p:cNvGrpSpPr/>
+        <p:nvPr/>
+      </p:nvGrpSpPr>
+      <p:grpSpPr>
+        <a:xfrm>
+          <a:off x="0" y="0"/>
+          <a:ext cx="0" cy="0"/>
+          <a:chOff x="0" y="0"/>
+          <a:chExt cx="0" cy="0"/>
+        </a:xfrm>
+      </p:grpSpPr>
+      <p:sp>
+        <p:nvSpPr>
+          <p:cNvPr id="2" name="Title 1"/>
+          <p:cNvSpPr>
+            <a:spLocks noGrp="1"/>
+          </p:cNvSpPr>
+          <p:nvPr>
+            <p:ph type="title"/>
+          </p:nvPr>
+        </p:nvSpPr>
+        <p:spPr/>
+        <p:txBody>
+          <a:bodyPr>
+            <a:normAutofit/>
+          </a:bodyPr>
+          <a:lstStyle/>
+          <a:p>
+            <a:r>
+              <a:rPr lang="en-US" dirty="0"/>
+              <a:t>Models refine into models</a:t>
+            </a:r>
+          </a:p>
+        </p:txBody>
+      </p:sp>
+      <p:sp>
+        <p:nvSpPr>
+          <p:cNvPr id="3" name="Slide Number Placeholder 3"/>
+          <p:cNvSpPr>
+            <a:spLocks noGrp="1"/>
+          </p:cNvSpPr>
+          <p:nvPr>
+            <p:ph type="sldNum" sz="quarter" idx="4"/>
+          </p:nvPr>
+        </p:nvSpPr>
+        <p:spPr/>
+        <p:txBody>
+          <a:bodyPr/>
+          <a:lstStyle/>
+          <a:p>
+            <a:fld id="{B7EB45DA-9A0D-DC49-8E02-F30A5DDC21C3}" type="slidenum">
+              <a:rPr lang="en-US" smtClean="0"/>
+              <a:t>27</a:t>
+            </a:fld>
+            <a:endParaRPr lang="en-US"/>
+          </a:p>
+        </p:txBody>
+      </p:sp>
+      <p:sp>
+        <p:nvSpPr>
+          <p:cNvPr id="40" name="UC1"/>
+          <p:cNvSpPr/>
+          <p:nvPr/>
+        </p:nvSpPr>
+        <p:spPr>
+          <a:xfrm>
+            <a:off x="822960" y="1143000"/>
+            <a:ext cx="2834640" cy="502920"/>
+          </a:xfrm>
+          <a:prstGeom prst="rect">
+            <a:avLst/>
+          </a:prstGeom>
+          <a:solidFill>
+            <a:srgbClr val="F5F1E8"/>
+          </a:solidFill>
+          <a:ln w="25400">
+            <a:solidFill>
+              <a:srgbClr val="8E6F3E"/>
+            </a:solidFill>
+          </a:ln>
+        </p:spPr>
+        <p:txBody>
+          <a:bodyPr wrap="square" lIns="27432" tIns="22860" rIns="27432" bIns="22860" anchor="ctr"/>
+          <a:lstStyle/>
+          <a:p>
+            <a:pPr algn="ctr">
+              <a:spcAft>
+                <a:spcPts val="0"/>
+              </a:spcAft>
+              <a:buNone/>
+            </a:pPr>
+            <a:r>
+              <a:rPr lang="en-US" sz="1600" b="1" i="0" dirty="0">
+                <a:solidFill>
+                  <a:srgbClr val="8E6F3E"/>
+                </a:solidFill>
+              </a:rPr>
+              <a:t xml:space="preserve">USE CASE  </a:t>
+            </a:r>
+            <a:r>
+              <a:rPr lang="en-US" sz="1600" b="1" i="0" dirty="0">
+                <a:solidFill>
+                  <a:srgbClr val="5C4826"/>
+                </a:solidFill>
+              </a:rPr>
+              <a:t xml:space="preserve">Drop a course</a:t>
+            </a:r>
+          </a:p>
+        </p:txBody>
+      </p:sp>
+      <p:sp>
+        <p:nvSpPr>
+          <p:cNvPr id="41" name="UC2"/>
+          <p:cNvSpPr/>
+          <p:nvPr/>
+        </p:nvSpPr>
+        <p:spPr>
+          <a:xfrm>
+            <a:off x="5029200" y="1143000"/>
+            <a:ext cx="3017520" cy="502920"/>
+          </a:xfrm>
+          <a:prstGeom prst="rect">
+            <a:avLst/>
+          </a:prstGeom>
+          <a:solidFill>
+            <a:srgbClr val="FBF8F2"/>
+          </a:solidFill>
+          <a:ln w="12700">
+            <a:solidFill>
+              <a:srgbClr val="C9B991"/>
+            </a:solidFill>
+          </a:ln>
+        </p:spPr>
+        <p:txBody>
+          <a:bodyPr wrap="square" lIns="27432" tIns="22860" rIns="27432" bIns="22860" anchor="ctr"/>
+          <a:lstStyle/>
+          <a:p>
+            <a:pPr algn="ctr">
+              <a:spcAft>
+                <a:spcPts val="0"/>
+              </a:spcAft>
+              <a:buNone/>
+            </a:pPr>
+            <a:r>
+              <a:rPr lang="en-US" sz="1600" b="1" i="0" dirty="0">
+                <a:solidFill>
+                  <a:srgbClr val="8E6F3E"/>
+                </a:solidFill>
+              </a:rPr>
+              <a:t xml:space="preserve">USE CASE  </a:t>
+            </a:r>
+            <a:r>
+              <a:rPr lang="en-US" sz="1600" b="1" i="0" dirty="0">
+                <a:solidFill>
+                  <a:srgbClr val="5C4826"/>
+                </a:solidFill>
+              </a:rPr>
+              <a:t xml:space="preserve">Register for a section</a:t>
+            </a:r>
+          </a:p>
+        </p:txBody>
+      </p:sp>
+      <p:sp>
+        <p:nvSpPr>
+          <p:cNvPr id="42" name="SEQ"/>
+          <p:cNvSpPr/>
+          <p:nvPr/>
+        </p:nvSpPr>
+        <p:spPr>
+          <a:xfrm>
+            <a:off x="502920" y="2148840"/>
+            <a:ext cx="2377440" cy="502920"/>
+          </a:xfrm>
+          <a:prstGeom prst="rect">
+            <a:avLst/>
+          </a:prstGeom>
+          <a:solidFill>
+            <a:srgbClr val="FBF8F2"/>
+          </a:solidFill>
+          <a:ln w="12700">
+            <a:solidFill>
+              <a:srgbClr val="C9B991"/>
+            </a:solidFill>
+          </a:ln>
+        </p:spPr>
+        <p:txBody>
+          <a:bodyPr wrap="square" lIns="27432" tIns="22860" rIns="27432" bIns="22860" anchor="ctr"/>
+          <a:lstStyle/>
+          <a:p>
+            <a:pPr algn="ctr">
+              <a:spcAft>
+                <a:spcPts val="0"/>
+              </a:spcAft>
+              <a:buNone/>
+            </a:pPr>
+            <a:r>
+              <a:rPr lang="en-US" sz="1600" b="1" i="0" dirty="0">
+                <a:solidFill>
+                  <a:srgbClr val="5C4826"/>
+                </a:solidFill>
+              </a:rPr>
+              <a:t xml:space="preserve">SEQUENCE MODEL</a:t>
+            </a:r>
+          </a:p>
+        </p:txBody>
+      </p:sp>
+      <p:sp>
+        <p:nvSpPr>
+          <p:cNvPr id="43" name="STATE"/>
+          <p:cNvSpPr/>
+          <p:nvPr/>
+        </p:nvSpPr>
+        <p:spPr>
+          <a:xfrm>
+            <a:off x="3566160" y="2148840"/>
+            <a:ext cx="2377440" cy="502920"/>
+          </a:xfrm>
+          <a:prstGeom prst="rect">
+            <a:avLst/>
+          </a:prstGeom>
+          <a:solidFill>
+            <a:srgbClr val="FBF8F2"/>
+          </a:solidFill>
+          <a:ln w="12700">
+            <a:solidFill>
+              <a:srgbClr val="C9B991"/>
+            </a:solidFill>
+          </a:ln>
+        </p:spPr>
+        <p:txBody>
+          <a:bodyPr wrap="square" lIns="27432" tIns="22860" rIns="27432" bIns="22860" anchor="ctr"/>
+          <a:lstStyle/>
+          <a:p>
+            <a:pPr algn="ctr">
+              <a:spcAft>
+                <a:spcPts val="0"/>
+              </a:spcAft>
+              <a:buNone/>
+            </a:pPr>
+            <a:r>
+              <a:rPr lang="en-US" sz="1600" b="1" i="0" dirty="0">
+                <a:solidFill>
+                  <a:srgbClr val="5C4826"/>
+                </a:solidFill>
+              </a:rPr>
+              <a:t xml:space="preserve">STATE MODEL</a:t>
+            </a:r>
+          </a:p>
+        </p:txBody>
+      </p:sp>
+      <p:sp>
+        <p:nvSpPr>
+          <p:cNvPr id="44" name="DATA"/>
+          <p:cNvSpPr/>
+          <p:nvPr/>
+        </p:nvSpPr>
+        <p:spPr>
+          <a:xfrm>
+            <a:off x="1874520" y="3154680"/>
+            <a:ext cx="2651760" cy="502920"/>
+          </a:xfrm>
+          <a:prstGeom prst="rect">
+            <a:avLst/>
+          </a:prstGeom>
+          <a:solidFill>
+            <a:srgbClr val="FBF8F2"/>
+          </a:solidFill>
+          <a:ln w="12700">
+            <a:solidFill>
+              <a:srgbClr val="C9B991"/>
+            </a:solidFill>
+          </a:ln>
+        </p:spPr>
+        <p:txBody>
+          <a:bodyPr wrap="square" lIns="27432" tIns="22860" rIns="27432" bIns="22860" anchor="ctr"/>
+          <a:lstStyle/>
+          <a:p>
+            <a:pPr algn="ctr">
+              <a:spcAft>
+                <a:spcPts val="0"/>
+              </a:spcAft>
+              <a:buNone/>
+            </a:pPr>
+            <a:r>
+              <a:rPr lang="en-US" sz="1600" b="1" i="0" dirty="0">
+                <a:solidFill>
+                  <a:srgbClr val="5C4826"/>
+                </a:solidFill>
+              </a:rPr>
+              <a:t xml:space="preserve">DATA / CLASS MODEL</a:t>
+            </a:r>
+          </a:p>
+        </p:txBody>
+      </p:sp>
+      <p:sp>
+        <p:nvSpPr>
+          <p:cNvPr id="45" name="INTF"/>
+          <p:cNvSpPr/>
+          <p:nvPr/>
+        </p:nvSpPr>
+        <p:spPr>
+          <a:xfrm>
+            <a:off x="5212080" y="3154680"/>
+            <a:ext cx="2377440" cy="502920"/>
+          </a:xfrm>
+          <a:prstGeom prst="rect">
+            <a:avLst/>
+          </a:prstGeom>
+          <a:solidFill>
+            <a:srgbClr val="FBF8F2"/>
+          </a:solidFill>
+          <a:ln w="12700">
+            <a:solidFill>
+              <a:srgbClr val="C9B991"/>
+            </a:solidFill>
+          </a:ln>
+        </p:spPr>
+        <p:txBody>
+          <a:bodyPr wrap="square" lIns="27432" tIns="22860" rIns="27432" bIns="22860" anchor="ctr"/>
+          <a:lstStyle/>
+          <a:p>
+            <a:pPr algn="ctr">
+              <a:spcAft>
+                <a:spcPts val="0"/>
+              </a:spcAft>
+              <a:buNone/>
+            </a:pPr>
+            <a:r>
+              <a:rPr lang="en-US" sz="1600" b="1" i="0" dirty="0">
+                <a:solidFill>
+                  <a:srgbClr val="5C4826"/>
+                </a:solidFill>
+              </a:rPr>
+              <a:t xml:space="preserve">INTERFACE MODEL</a:t>
+            </a:r>
+          </a:p>
+        </p:txBody>
+      </p:sp>
+      <p:sp>
+        <p:nvSpPr>
+          <p:cNvPr id="46" name="IMPL"/>
+          <p:cNvSpPr/>
+          <p:nvPr/>
+        </p:nvSpPr>
+        <p:spPr>
+          <a:xfrm>
+            <a:off x="2926080" y="4160520"/>
+            <a:ext cx="2834640" cy="502920"/>
+          </a:xfrm>
+          <a:prstGeom prst="rect">
+            <a:avLst/>
+          </a:prstGeom>
+          <a:solidFill>
+            <a:srgbClr val="FBF8F2"/>
+          </a:solidFill>
+          <a:ln w="12700">
+            <a:solidFill>
+              <a:srgbClr val="C9B991"/>
+            </a:solidFill>
+          </a:ln>
+        </p:spPr>
+        <p:txBody>
+          <a:bodyPr wrap="square" lIns="27432" tIns="22860" rIns="27432" bIns="22860" anchor="ctr"/>
+          <a:lstStyle/>
+          <a:p>
+            <a:pPr algn="ctr">
+              <a:spcAft>
+                <a:spcPts val="0"/>
+              </a:spcAft>
+              <a:buNone/>
+            </a:pPr>
+            <a:r>
+              <a:rPr lang="en-US" sz="1600" b="1" i="0" dirty="0">
+                <a:solidFill>
+                  <a:srgbClr val="5C4826"/>
+                </a:solidFill>
+              </a:rPr>
+              <a:t xml:space="preserve">IMPLEMENTATION</a:t>
+            </a:r>
+          </a:p>
+        </p:txBody>
+      </p:sp>
+      <p:cxnSp>
+        <p:nvCxnSpPr>
+          <p:cNvPr id="150" name="A1"/>
+          <p:cNvCxnSpPr/>
+          <p:nvPr/>
+        </p:nvCxnSpPr>
+        <p:spPr>
+          <a:xfrm flipH="1">
+            <a:off x="1691640" y="1645920"/>
+            <a:ext cx="548640" cy="502920"/>
+          </a:xfrm>
+          <a:prstGeom prst="straightConnector1">
+            <a:avLst/>
+          </a:prstGeom>
+          <a:ln w="19050">
+            <a:solidFill>
+              <a:srgbClr val="8E6F3E"/>
+            </a:solidFill>
+            <a:tailEnd type="triangle" w="med" len="med"/>
+          </a:ln>
+        </p:spPr>
+      </p:cxnSp>
+      <p:cxnSp>
+        <p:nvCxnSpPr>
+          <p:cNvPr id="151" name="A2"/>
+          <p:cNvCxnSpPr/>
+          <p:nvPr/>
+        </p:nvCxnSpPr>
+        <p:spPr>
+          <a:xfrm>
+            <a:off x="2240280" y="1645920"/>
+            <a:ext cx="2331720" cy="502920"/>
+          </a:xfrm>
+          <a:prstGeom prst="straightConnector1">
+            <a:avLst/>
+          </a:prstGeom>
+          <a:ln w="19050">
+            <a:solidFill>
+              <a:srgbClr val="8E6F3E"/>
+            </a:solidFill>
+            <a:tailEnd type="triangle" w="med" len="med"/>
+          </a:ln>
+        </p:spPr>
+      </p:cxnSp>
+      <p:cxnSp>
+        <p:nvCxnSpPr>
+          <p:cNvPr id="152" name="A3"/>
+          <p:cNvCxnSpPr/>
+          <p:nvPr/>
+        </p:nvCxnSpPr>
+        <p:spPr>
+          <a:xfrm flipH="1">
+            <a:off x="4572000" y="1645920"/>
+            <a:ext cx="1965960" cy="502920"/>
+          </a:xfrm>
+          <a:prstGeom prst="straightConnector1">
+            <a:avLst/>
+          </a:prstGeom>
+          <a:ln w="19050">
+            <a:solidFill>
+              <a:srgbClr val="C9B991"/>
+            </a:solidFill>
+            <a:tailEnd type="triangle" w="med" len="med"/>
+          </a:ln>
+        </p:spPr>
+      </p:cxnSp>
+      <p:cxnSp>
+        <p:nvCxnSpPr>
+          <p:cNvPr id="153" name="A4"/>
+          <p:cNvCxnSpPr/>
+          <p:nvPr/>
+        </p:nvCxnSpPr>
+        <p:spPr>
+          <a:xfrm>
+            <a:off x="1691640" y="2651760"/>
+            <a:ext cx="1508760" cy="502920"/>
+          </a:xfrm>
+          <a:prstGeom prst="straightConnector1">
+            <a:avLst/>
+          </a:prstGeom>
+          <a:ln w="19050">
+            <a:solidFill>
+              <a:srgbClr val="8E6F3E"/>
+            </a:solidFill>
+            <a:tailEnd type="triangle" w="med" len="med"/>
+          </a:ln>
+        </p:spPr>
+      </p:cxnSp>
+      <p:cxnSp>
+        <p:nvCxnSpPr>
+          <p:cNvPr id="154" name="A5"/>
+          <p:cNvCxnSpPr/>
+          <p:nvPr/>
+        </p:nvCxnSpPr>
+        <p:spPr>
+          <a:xfrm flipH="1">
+            <a:off x="3200400" y="2651760"/>
+            <a:ext cx="1371600" cy="502920"/>
+          </a:xfrm>
+          <a:prstGeom prst="straightConnector1">
+            <a:avLst/>
+          </a:prstGeom>
+          <a:ln w="19050">
+            <a:solidFill>
+              <a:srgbClr val="8E6F3E"/>
+            </a:solidFill>
+            <a:tailEnd type="triangle" w="med" len="med"/>
+          </a:ln>
+        </p:spPr>
+      </p:cxnSp>
+      <p:cxnSp>
+        <p:nvCxnSpPr>
+          <p:cNvPr id="155" name="A6"/>
+          <p:cNvCxnSpPr/>
+          <p:nvPr/>
+        </p:nvCxnSpPr>
+        <p:spPr>
+          <a:xfrm>
+            <a:off x="4572000" y="2651760"/>
+            <a:ext cx="1828800" cy="502920"/>
+          </a:xfrm>
+          <a:prstGeom prst="straightConnector1">
+            <a:avLst/>
+          </a:prstGeom>
+          <a:ln w="19050">
+            <a:solidFill>
+              <a:srgbClr val="C9B991"/>
+            </a:solidFill>
+            <a:tailEnd type="triangle" w="med" len="med"/>
+          </a:ln>
+        </p:spPr>
+      </p:cxnSp>
+      <p:cxnSp>
+        <p:nvCxnSpPr>
+          <p:cNvPr id="156" name="A7"/>
+          <p:cNvCxnSpPr/>
+          <p:nvPr/>
+        </p:nvCxnSpPr>
+        <p:spPr>
+          <a:xfrm>
+            <a:off x="3200400" y="3566160"/>
+            <a:ext cx="1143000" cy="594360"/>
+          </a:xfrm>
+          <a:prstGeom prst="straightConnector1">
+            <a:avLst/>
+          </a:prstGeom>
+          <a:ln w="19050">
+            <a:solidFill>
+              <a:srgbClr val="8E6F3E"/>
+            </a:solidFill>
+            <a:tailEnd type="triangle" w="med" len="med"/>
+          </a:ln>
+        </p:spPr>
+      </p:cxnSp>
+      <p:cxnSp>
+        <p:nvCxnSpPr>
+          <p:cNvPr id="157" name="A8"/>
+          <p:cNvCxnSpPr/>
+          <p:nvPr/>
+        </p:nvCxnSpPr>
+        <p:spPr>
+          <a:xfrm flipH="1">
+            <a:off x="4343400" y="3566160"/>
+            <a:ext cx="2057400" cy="594360"/>
+          </a:xfrm>
+          <a:prstGeom prst="straightConnector1">
+            <a:avLst/>
+          </a:prstGeom>
+          <a:ln w="19050">
+            <a:solidFill>
+              <a:srgbClr val="C9B991"/>
+            </a:solidFill>
+            <a:tailEnd type="triangle" w="med" len="med"/>
+          </a:ln>
+        </p:spPr>
+      </p:cxnSp>
+      <p:sp>
+        <p:nvSpPr>
+          <p:cNvPr id="90" name="Caption"/>
+          <p:cNvSpPr txBox="1"/>
+          <p:nvPr/>
+        </p:nvSpPr>
+        <p:spPr>
+          <a:xfrm>
+            <a:off x="274320" y="4892040"/>
+            <a:ext cx="8595360" cy="365760"/>
+          </a:xfrm>
+          <a:prstGeom prst="rect">
+            <a:avLst/>
+          </a:prstGeom>
+          <a:noFill/>
+          <a:ln>
+            <a:noFill/>
+          </a:ln>
+        </p:spPr>
+        <p:txBody>
+          <a:bodyPr wrap="square" lIns="0" tIns="0" rIns="0" bIns="0" anchor="t"/>
+          <a:lstStyle/>
+          <a:p>
+            <a:pPr algn="ctr">
+              <a:spcAft>
+                <a:spcPts val="0"/>
+              </a:spcAft>
+              <a:buNone/>
+            </a:pPr>
+            <a:r>
+              <a:rPr lang="en-US" sz="1800" b="0" i="1" dirty="0">
+                <a:solidFill>
+                  <a:srgbClr val="555960"/>
+                </a:solidFill>
+              </a:rPr>
+              <a:t xml:space="preserve">One use case induces several models. One model serves several use cases.</a:t>
+            </a:r>
+          </a:p>
+        </p:txBody>
+      </p:sp>
+      <p:sp>
+        <p:nvSpPr>
+          <p:cNvPr id="199" name="FooterBand"/>
+          <p:cNvSpPr/>
+          <p:nvPr/>
+        </p:nvSpPr>
+        <p:spPr>
+          <a:xfrm>
+            <a:off x="274320" y="5852160"/>
+            <a:ext cx="8595360" cy="566928"/>
+          </a:xfrm>
+          <a:prstGeom prst="rect">
+            <a:avLst/>
+          </a:prstGeom>
+          <a:solidFill>
+            <a:srgbClr val="8E6F3E"/>
+          </a:solidFill>
+          <a:ln>
+            <a:noFill/>
+          </a:ln>
+        </p:spPr>
+        <p:txBody>
+          <a:bodyPr wrap="square" lIns="27432" tIns="22860" rIns="27432" bIns="22860" anchor="ctr"/>
+          <a:lstStyle/>
+          <a:p>
+            <a:pPr algn="ctr">
+              <a:spcAft>
+                <a:spcPts val="0"/>
+              </a:spcAft>
+              <a:buNone/>
+            </a:pPr>
+            <a:r>
+              <a:rPr lang="en-US" sz="2000" b="1" i="0" dirty="0">
+                <a:solidFill>
+                  <a:srgbClr val="FFFFFF"/>
+                </a:solidFill>
+              </a:rPr>
+              <a:t xml:space="preserve">Not a mandatory waterfall. A system of models.</a:t>
             </a:r>
           </a:p>
         </p:txBody>

--- a/course/lectures/act-2-delegation-and-control/02-modeling/2-2-Modeling-1-Purposeful-Reduction.pptx
+++ b/course/lectures/act-2-delegation-and-control/02-modeling/2-2-Modeling-1-Purposeful-Reduction.pptx
@@ -1723,6 +1723,12 @@
               <a:t>Once a distinction is discarded, no downstream reasoning can recover it. That is the limit you stated on “Capability cannot reduce what must be true” — here it is reaching production.</a:t>
             </a:r>
           </a:p>
+          <a:p>
+            <a:r>
+              <a:rPr lang="en-US" dirty="0"/>
+              <a:t>Name it as correspondence: the model and the implementation disagreed about a distinction the obligation required, and production is where that disagreement surfaced. This is failed correspondence, not a bug.</a:t>
+            </a:r>
+          </a:p>
         </p:txBody>
       </p:sp>
     </p:spTree>
@@ -1780,6 +1786,12 @@
             <a:r>
               <a:rPr dirty="0"/>
               <a:t>The footer line is verbatim from the team.</a:t>
+            </a:r>
+          </a:p>
+          <a:p>
+            <a:r>
+              <a:rPr lang="en-US" dirty="0"/>
+              <a:t>Name it as correspondence too, and tie it back three slides: the realization changed and the modeled property held. That is exactly what "one model, many implementations" claimed, now graded by production instead of asserted on a slide.</a:t>
             </a:r>
           </a:p>
         </p:txBody>
@@ -18204,6 +18216,46 @@
           </a:p>
         </p:txBody>
       </p:sp>
+      <p:sp>
+        <p:nvSpPr>
+          <p:cNvPr id="140" name="EvTag"/>
+          <p:cNvSpPr txBox="1"/>
+          <p:nvPr/>
+        </p:nvSpPr>
+        <p:spPr>
+          <a:xfrm>
+            <a:off x="5943600" y="5440680"/>
+            <a:ext cx="2926080" cy="274320"/>
+          </a:xfrm>
+          <a:prstGeom prst="rect">
+            <a:avLst/>
+          </a:prstGeom>
+          <a:noFill/>
+          <a:ln>
+            <a:noFill/>
+          </a:ln>
+        </p:spPr>
+        <p:txBody>
+          <a:bodyPr wrap="square" lIns="0" tIns="0" rIns="0" bIns="0" anchor="t"/>
+          <a:lstStyle/>
+          <a:p>
+            <a:pPr algn="r">
+              <a:spcAft>
+                <a:spcPts val="0"/>
+              </a:spcAft>
+              <a:buNone/>
+            </a:pPr>
+            <a:r>
+              <a:rPr lang="en-US" sz="1400" b="1" i="0" dirty="0">
+                <a:solidFill>
+                  <a:srgbClr val="8E6F3E"/>
+                </a:solidFill>
+              </a:rPr>
+              <a:t xml:space="preserve">CORRESPONDENCE FAILED</a:t>
+            </a:r>
+          </a:p>
+        </p:txBody>
+      </p:sp>
     </p:spTree>
   </p:cSld>
   <p:clrMapOvr>
@@ -18792,6 +18844,46 @@
                 </a:solidFill>
               </a:rPr>
               <a:t>“We changed the pointers to the code, but not the model.”</a:t>
+            </a:r>
+          </a:p>
+        </p:txBody>
+      </p:sp>
+      <p:sp>
+        <p:nvSpPr>
+          <p:cNvPr id="140" name="EvTag"/>
+          <p:cNvSpPr txBox="1"/>
+          <p:nvPr/>
+        </p:nvSpPr>
+        <p:spPr>
+          <a:xfrm>
+            <a:off x="5943600" y="5532120"/>
+            <a:ext cx="2926080" cy="274320"/>
+          </a:xfrm>
+          <a:prstGeom prst="rect">
+            <a:avLst/>
+          </a:prstGeom>
+          <a:noFill/>
+          <a:ln>
+            <a:noFill/>
+          </a:ln>
+        </p:spPr>
+        <p:txBody>
+          <a:bodyPr wrap="square" lIns="0" tIns="0" rIns="0" bIns="0" anchor="t"/>
+          <a:lstStyle/>
+          <a:p>
+            <a:pPr algn="r">
+              <a:spcAft>
+                <a:spcPts val="0"/>
+              </a:spcAft>
+              <a:buNone/>
+            </a:pPr>
+            <a:r>
+              <a:rPr lang="en-US" sz="1400" b="1" i="0" dirty="0">
+                <a:solidFill>
+                  <a:srgbClr val="8E6F3E"/>
+                </a:solidFill>
+              </a:rPr>
+              <a:t xml:space="preserve">CORRESPONDENCE HELD</a:t>
             </a:r>
           </a:p>
         </p:txBody>

--- a/course/lectures/act-2-delegation-and-control/02-modeling/2-2-Modeling-1-Purposeful-Reduction.pptx
+++ b/course/lectures/act-2-delegation-and-control/02-modeling/2-2-Modeling-1-Purposeful-Reduction.pptx
@@ -7834,7 +7834,7 @@
       </p:sp>
       <p:pic>
         <p:nvPicPr>
-          <p:cNvPr id="60" name="ThumbFigure" descr="Five views of one course-registration system side by side, each trimmed to a readable fragment and captioned with the engineering question it answers: what exists, who talks to whom, what states, what paths, who needs what. Beneath each view a pill names what that view preserves: structure, order, lifecycle, branching, intent."/>
+          <p:cNvPr id="60" name="ThumbFigure" descr="Five views of one course-registration system side by side, each reduced to a readable fragment and captioned with the engineering question it answers: what exists, who talks to whom, what states, what paths, who needs what. The first view shows Course, Section and Enrollment as class boxes with an attribute compartment each; the last shows a Student wanting to drop a course, drawn in the same accent the full use-case diagram gives that goal. Beneath each view a pill names what that view preserves: structure, order, lifecycle, branching, intent."/>
           <p:cNvPicPr>
             <a:picLocks noChangeAspect="1"/>
           </p:cNvPicPr>
@@ -7848,8 +7848,8 @@
         </p:blipFill>
         <p:spPr>
           <a:xfrm>
-            <a:off x="274320" y="1454084"/>
-            <a:ext cx="8595360" cy="4285143"/>
+            <a:off x="274320" y="1427453"/>
+            <a:ext cx="8595360" cy="4338404"/>
           </a:xfrm>
           <a:prstGeom prst="rect">
             <a:avLst/>

--- a/course/lectures/act-2-delegation-and-control/02-modeling/2-2-Modeling-1-Purposeful-Reduction.pptx
+++ b/course/lectures/act-2-delegation-and-control/02-modeling/2-2-Modeling-1-Purposeful-Reduction.pptx
@@ -996,7 +996,7 @@
           <a:p>
             <a:r>
               <a:rPr dirty="0"/>
-              <a:t>Question to ask of every model: what must this model preserve? (R1.s15)</a:t>
+              <a:t>Question to ask of every model: what must this model preserve?</a:t>
             </a:r>
           </a:p>
           <a:p>
@@ -1061,7 +1061,7 @@
           <a:p>
             <a:r>
               <a:rPr dirty="0"/>
-              <a:t>The correction matters (R1.s17): the target is the smallest model adequate to purpose, not the smallest model. Below adequate, the obligation is lost.</a:t>
+              <a:t>The correction matters: the target is the smallest model adequate to purpose, not the smallest model. Below adequate, the obligation is lost.</a:t>
             </a:r>
           </a:p>
           <a:p>
@@ -1114,7 +1114,7 @@
           <a:p>
             <a:r>
               <a:rPr dirty="0"/>
-              <a:t>Territory an ECE student grasps in thirty seconds - that is why it, and not a software system, carries the method (plan section 7).</a:t>
+              <a:t>Territory an ECE student grasps in thirty seconds - that is why it, and not a software system, carries the method.</a:t>
             </a:r>
           </a:p>
           <a:p>
@@ -1126,7 +1126,7 @@
           <a:p>
             <a:r>
               <a:rPr dirty="0"/>
-              <a:t>Exactly one engineering question (R4 verbatim): can the controller exhaust the battery before completing an 8-hour operating period?</a:t>
+              <a:t>Exactly one engineering question (verbatim): can the controller exhaust the battery before completing an 8-hour operating period?</a:t>
             </a:r>
           </a:p>
         </p:txBody>
@@ -1185,7 +1185,7 @@
           <a:p>
             <a:r>
               <a:rPr dirty="0"/>
-              <a:t>The system has become a small quantitative model; keep the math no harder than the sum (R4). The PROPERTY beat of the spine happens here - point at it.</a:t>
+              <a:t>The system has become a small quantitative model; keep the math no harder than the sum. The PROPERTY beat of the spine happens here - point at it.</a:t>
             </a:r>
           </a:p>
         </p:txBody>
@@ -1342,7 +1342,7 @@
           <a:p>
             <a:r>
               <a:rPr dirty="0"/>
-              <a:t>The genuinely useful discussion (R4): if estimated power already incorporates CPU frequency, fan PWM, and Wi-Fi state, those details may be needed to DERIVE the estimate without living in THIS model.</a:t>
+              <a:t>The genuinely useful discussion: if estimated power already incorporates CPU frequency, fan PWM, and Wi-Fi state, those details may be needed to DERIVE the estimate without living in THIS model.</a:t>
             </a:r>
           </a:p>
           <a:p>
@@ -2033,7 +2033,7 @@
           <a:p>
             <a:r>
               <a:rPr dirty="0"/>
-              <a:t>Debrief challenge sequence (R4, verbatim): Do you need the RTOS scheduler algorithm? Maybe — not if a justified worst-case delay is already carried. The temperature? Only as the trigger. Wi-Fi? Only if it can interfere with timing. Battery voltage? Not for this question — unless voltage affects actuator response inside the envelope. That last chain is the judgment being practiced.</a:t>
+              <a:t>Debrief challenge sequence (verbatim): Do you need the RTOS scheduler algorithm? Maybe — not if a justified worst-case delay is already carried. The temperature? Only as the trigger. Wi-Fi? Only if it can interfere with timing. Battery voltage? Not for this question — unless voltage affects actuator response inside the envelope. That last chain is the judgment being practiced.</a:t>
             </a:r>
           </a:p>
           <a:p>
@@ -8233,8 +8233,8 @@
         </p:nvSpPr>
         <p:spPr>
           <a:xfrm>
-            <a:off x="1371600" y="1554480"/>
-            <a:ext cx="6400800" cy="1920240"/>
+            <a:off x="365760" y="1554480"/>
+            <a:ext cx="8412480" cy="1920240"/>
           </a:xfrm>
           <a:prstGeom prst="rect">
             <a:avLst/>
@@ -12472,8 +12472,8 @@
         </p:nvSpPr>
         <p:spPr>
           <a:xfrm>
-            <a:off x="274320" y="5603443"/>
-            <a:ext cx="8595360" cy="777240"/>
+            <a:off x="274320" y="5852160"/>
+            <a:ext cx="8595360" cy="566928"/>
           </a:xfrm>
           <a:prstGeom prst="rect">
             <a:avLst/>
@@ -27648,7 +27648,7 @@
                   <a:srgbClr val="5C4826"/>
                 </a:solidFill>
               </a:rPr>
-              <a:t>What states can this thing occupy, and which transitions are legal?</a:t>
+              <a:t>What states can a course proposal occupy, and which transitions are legal?</a:t>
             </a:r>
           </a:p>
         </p:txBody>

--- a/course/lectures/act-2-delegation-and-control/02-modeling/2-2-Modeling-1-Purposeful-Reduction.pptx
+++ b/course/lectures/act-2-delegation-and-control/02-modeling/2-2-Modeling-1-Purposeful-Reduction.pptx
@@ -2452,7 +2452,7 @@
           <a:p>
             <a:r>
               <a:rPr lang="en-US" dirty="0"/>
-              <a:t>Then immediately break the line. Two gold arrows leave the accented use case, so Drop a course induces more than one model. Then point at the three lighter arrows, which are the ones that break the single column: a second use case feeding the state model, the state model branching sideways to an interface model, and a second path into implementation. Say the words — this is NOT a mandatory waterfall.</a:t>
+              <a:t>Then immediately break the line. Two gold arrows leave the accented use case, so Drop a course induces more than one model. Then point at the three dashed arrows, which are the ones that break the single column: a second use case feeding the state model, the state model branching sideways to an interface model, and a second path into implementation. Say the words — this is NOT a mandatory waterfall.</a:t>
             </a:r>
           </a:p>
           <a:p>
@@ -17672,7 +17672,7 @@
                   <a:srgbClr val="555960"/>
                 </a:solidFill>
               </a:rPr>
-              <a:t xml:space="preserve">✓ the lease  ·  ✗ the quota</a:t>
+              <a:t xml:space="preserve">✗ the quota  ·  ✓ the lease</a:t>
             </a:r>
           </a:p>
         </p:txBody>
@@ -24908,7 +24908,7 @@
         </p:nvSpPr>
         <p:spPr>
           <a:xfrm>
-            <a:off x="822960" y="1143000"/>
+            <a:off x="1120140" y="1143000"/>
             <a:ext cx="2834640" cy="502920"/>
           </a:xfrm>
           <a:prstGeom prst="rect">
@@ -24960,7 +24960,7 @@
         </p:nvSpPr>
         <p:spPr>
           <a:xfrm>
-            <a:off x="5029200" y="1143000"/>
+            <a:off x="5326380" y="1143000"/>
             <a:ext cx="3017520" cy="502920"/>
           </a:xfrm>
           <a:prstGeom prst="rect">
@@ -25012,7 +25012,7 @@
         </p:nvSpPr>
         <p:spPr>
           <a:xfrm>
-            <a:off x="502920" y="2148840"/>
+            <a:off x="800100" y="2148840"/>
             <a:ext cx="2377440" cy="502920"/>
           </a:xfrm>
           <a:prstGeom prst="rect">
@@ -25056,7 +25056,7 @@
         </p:nvSpPr>
         <p:spPr>
           <a:xfrm>
-            <a:off x="3566160" y="2148840"/>
+            <a:off x="3863340" y="2148840"/>
             <a:ext cx="2377440" cy="502920"/>
           </a:xfrm>
           <a:prstGeom prst="rect">
@@ -25100,7 +25100,7 @@
         </p:nvSpPr>
         <p:spPr>
           <a:xfrm>
-            <a:off x="1874520" y="3154680"/>
+            <a:off x="2171700" y="3154680"/>
             <a:ext cx="2651760" cy="502920"/>
           </a:xfrm>
           <a:prstGeom prst="rect">
@@ -25144,7 +25144,7 @@
         </p:nvSpPr>
         <p:spPr>
           <a:xfrm>
-            <a:off x="5212080" y="3154680"/>
+            <a:off x="5509260" y="3154680"/>
             <a:ext cx="2377440" cy="502920"/>
           </a:xfrm>
           <a:prstGeom prst="rect">
@@ -25188,7 +25188,7 @@
         </p:nvSpPr>
         <p:spPr>
           <a:xfrm>
-            <a:off x="2926080" y="4160520"/>
+            <a:off x="3223260" y="4160520"/>
             <a:ext cx="2834640" cy="502920"/>
           </a:xfrm>
           <a:prstGeom prst="rect">
@@ -25231,9 +25231,9 @@
           <p:nvPr/>
         </p:nvCxnSpPr>
         <p:spPr>
-          <a:xfrm flipH="1">
-            <a:off x="1691640" y="1645920"/>
-            <a:ext cx="548640" cy="502920"/>
+          <a:xfrm>
+            <a:off x="1828800" y="1645920"/>
+            <a:ext cx="160020" cy="502920"/>
           </a:xfrm>
           <a:prstGeom prst="straightConnector1">
             <a:avLst/>
@@ -25254,8 +25254,8 @@
         </p:nvCxnSpPr>
         <p:spPr>
           <a:xfrm>
-            <a:off x="2240280" y="1645920"/>
-            <a:ext cx="2331720" cy="502920"/>
+            <a:off x="3017520" y="1645920"/>
+            <a:ext cx="1371600" cy="502920"/>
           </a:xfrm>
           <a:prstGeom prst="straightConnector1">
             <a:avLst/>
@@ -25276,16 +25276,17 @@
         </p:nvCxnSpPr>
         <p:spPr>
           <a:xfrm flipH="1">
-            <a:off x="4572000" y="1645920"/>
-            <a:ext cx="1965960" cy="502920"/>
+            <a:off x="5715000" y="1645920"/>
+            <a:ext cx="1120140" cy="502920"/>
           </a:xfrm>
           <a:prstGeom prst="straightConnector1">
             <a:avLst/>
           </a:prstGeom>
           <a:ln w="19050">
             <a:solidFill>
-              <a:srgbClr val="C9B991"/>
+              <a:srgbClr val="8E6F3E"/>
             </a:solidFill>
+            <a:prstDash val="dash"/>
             <a:tailEnd type="triangle" w="med" len="med"/>
           </a:ln>
         </p:spPr>
@@ -25298,8 +25299,8 @@
         </p:nvCxnSpPr>
         <p:spPr>
           <a:xfrm>
-            <a:off x="1691640" y="2651760"/>
-            <a:ext cx="1508760" cy="502920"/>
+            <a:off x="1988820" y="2651760"/>
+            <a:ext cx="937260" cy="502920"/>
           </a:xfrm>
           <a:prstGeom prst="straightConnector1">
             <a:avLst/>
@@ -25320,8 +25321,8 @@
         </p:nvCxnSpPr>
         <p:spPr>
           <a:xfrm flipH="1">
-            <a:off x="3200400" y="2651760"/>
-            <a:ext cx="1371600" cy="502920"/>
+            <a:off x="4069080" y="2651760"/>
+            <a:ext cx="502920" cy="502920"/>
           </a:xfrm>
           <a:prstGeom prst="straightConnector1">
             <a:avLst/>
@@ -25342,16 +25343,17 @@
         </p:nvCxnSpPr>
         <p:spPr>
           <a:xfrm>
-            <a:off x="4572000" y="2651760"/>
-            <a:ext cx="1828800" cy="502920"/>
+            <a:off x="5486400" y="2651760"/>
+            <a:ext cx="731520" cy="502920"/>
           </a:xfrm>
           <a:prstGeom prst="straightConnector1">
             <a:avLst/>
           </a:prstGeom>
           <a:ln w="19050">
             <a:solidFill>
-              <a:srgbClr val="C9B991"/>
+              <a:srgbClr val="8E6F3E"/>
             </a:solidFill>
+            <a:prstDash val="dash"/>
             <a:tailEnd type="triangle" w="med" len="med"/>
           </a:ln>
         </p:spPr>
@@ -25364,8 +25366,8 @@
         </p:nvCxnSpPr>
         <p:spPr>
           <a:xfrm>
-            <a:off x="3200400" y="3566160"/>
-            <a:ext cx="1143000" cy="594360"/>
+            <a:off x="3497580" y="3657600"/>
+            <a:ext cx="434340" cy="502920"/>
           </a:xfrm>
           <a:prstGeom prst="straightConnector1">
             <a:avLst/>
@@ -25386,16 +25388,17 @@
         </p:nvCxnSpPr>
         <p:spPr>
           <a:xfrm flipH="1">
-            <a:off x="4343400" y="3566160"/>
-            <a:ext cx="2057400" cy="594360"/>
+            <a:off x="5303520" y="3657600"/>
+            <a:ext cx="1394460" cy="502920"/>
           </a:xfrm>
           <a:prstGeom prst="straightConnector1">
             <a:avLst/>
           </a:prstGeom>
           <a:ln w="19050">
             <a:solidFill>
-              <a:srgbClr val="C9B991"/>
+              <a:srgbClr val="8E6F3E"/>
             </a:solidFill>
+            <a:prstDash val="dash"/>
             <a:tailEnd type="triangle" w="med" len="med"/>
           </a:ln>
         </p:spPr>

--- a/course/lectures/act-2-delegation-and-control/02-modeling/2-2-Modeling-1-Purposeful-Reduction.pptx
+++ b/course/lectures/act-2-delegation-and-control/02-modeling/2-2-Modeling-1-Purposeful-Reduction.pptx
@@ -2452,7 +2452,7 @@
           <a:p>
             <a:r>
               <a:rPr lang="en-US" dirty="0"/>
-              <a:t>Then immediately break the line. Two gold arrows leave the accented use case, so Drop a course induces more than one model. Then point at the three dashed arrows, which are the ones that break the single column: a second use case feeding the state model, the state model branching sideways to an interface model, and a second path into implementation. Say the words — this is NOT a mandatory waterfall.</a:t>
+              <a:t>Then immediately break the line. Two solid arrows leave the accented use case, so Drop a course induces more than one model. Then point at the three dashed arrows, which are the ones that break the single column: a second use case feeding the state model, the state model branching sideways to an interface model, and a second path into implementation. Say the words — this is NOT a mandatory waterfall.</a:t>
             </a:r>
           </a:p>
           <a:p>

--- a/course/lectures/act-2-delegation-and-control/02-modeling/2-2-Modeling-1-Purposeful-Reduction.pptx
+++ b/course/lectures/act-2-delegation-and-control/02-modeling/2-2-Modeling-1-Purposeful-Reduction.pptx
@@ -13713,7 +13713,7 @@
                   <a:srgbClr val="FFFFFF"/>
                 </a:solidFill>
               </a:rPr>
-              <a:t>Nine distinctions walked in. Three survived.</a:t>
+              <a:t>Nine distinctions walked in. Two survived.</a:t>
             </a:r>
           </a:p>
         </p:txBody>
@@ -17382,6 +17382,67 @@
             <a:avLst/>
           </a:prstGeom>
           <a:solidFill>
+            <a:srgbClr val="8E6F3E"/>
+          </a:solidFill>
+          <a:ln>
+            <a:noFill/>
+          </a:ln>
+        </p:spPr>
+        <p:txBody>
+          <a:bodyPr wrap="square" lIns="27432" tIns="22860" rIns="27432" bIns="22860" anchor="ctr"/>
+          <a:lstStyle/>
+          <a:p>
+            <a:pPr algn="ctr">
+              <a:buNone/>
+            </a:pPr>
+            <a:r>
+              <a:rPr lang="en-US" sz="1800" b="1" i="0" dirty="0">
+                <a:solidFill>
+                  <a:srgbClr val="FFFFFF"/>
+                </a:solidFill>
+              </a:rPr>
+              <a:t>PROPERTY</a:t>
+            </a:r>
+          </a:p>
+        </p:txBody>
+      </p:sp>
+      <p:cxnSp>
+        <p:nvCxnSpPr>
+          <p:cNvPr id="122" name="NA2"/>
+          <p:cNvCxnSpPr/>
+          <p:nvPr/>
+        </p:nvCxnSpPr>
+        <p:spPr>
+          <a:xfrm>
+            <a:off x="6437376" y="5001768"/>
+            <a:ext cx="274320" cy="0"/>
+          </a:xfrm>
+          <a:prstGeom prst="straightConnector1">
+            <a:avLst/>
+          </a:prstGeom>
+          <a:ln w="19050">
+            <a:solidFill>
+              <a:srgbClr val="C9B991"/>
+            </a:solidFill>
+            <a:tailEnd type="triangle" w="med" len="med"/>
+          </a:ln>
+        </p:spPr>
+      </p:cxnSp>
+      <p:sp>
+        <p:nvSpPr>
+          <p:cNvPr id="113" name="N3"/>
+          <p:cNvSpPr/>
+          <p:nvPr/>
+        </p:nvSpPr>
+        <p:spPr>
+          <a:xfrm>
+            <a:off x="6729984" y="4718304"/>
+            <a:ext cx="1700784" cy="566928"/>
+          </a:xfrm>
+          <a:prstGeom prst="rect">
+            <a:avLst/>
+          </a:prstGeom>
+          <a:solidFill>
             <a:srgbClr val="FBF8F2"/>
           </a:solidFill>
           <a:ln w="12700">
@@ -17403,67 +17464,6 @@
                   <a:srgbClr val="555960"/>
                 </a:solidFill>
               </a:rPr>
-              <a:t>PROPERTY</a:t>
-            </a:r>
-          </a:p>
-        </p:txBody>
-      </p:sp>
-      <p:cxnSp>
-        <p:nvCxnSpPr>
-          <p:cNvPr id="122" name="NA2"/>
-          <p:cNvCxnSpPr/>
-          <p:nvPr/>
-        </p:nvCxnSpPr>
-        <p:spPr>
-          <a:xfrm>
-            <a:off x="6437376" y="5001768"/>
-            <a:ext cx="274320" cy="0"/>
-          </a:xfrm>
-          <a:prstGeom prst="straightConnector1">
-            <a:avLst/>
-          </a:prstGeom>
-          <a:ln w="19050">
-            <a:solidFill>
-              <a:srgbClr val="C9B991"/>
-            </a:solidFill>
-            <a:tailEnd type="triangle" w="med" len="med"/>
-          </a:ln>
-        </p:spPr>
-      </p:cxnSp>
-      <p:sp>
-        <p:nvSpPr>
-          <p:cNvPr id="113" name="N3"/>
-          <p:cNvSpPr/>
-          <p:nvPr/>
-        </p:nvSpPr>
-        <p:spPr>
-          <a:xfrm>
-            <a:off x="6729984" y="4718304"/>
-            <a:ext cx="1700784" cy="566928"/>
-          </a:xfrm>
-          <a:prstGeom prst="rect">
-            <a:avLst/>
-          </a:prstGeom>
-          <a:solidFill>
-            <a:srgbClr val="8E6F3E"/>
-          </a:solidFill>
-          <a:ln>
-            <a:noFill/>
-          </a:ln>
-        </p:spPr>
-        <p:txBody>
-          <a:bodyPr wrap="square" lIns="27432" tIns="22860" rIns="27432" bIns="22860" anchor="ctr"/>
-          <a:lstStyle/>
-          <a:p>
-            <a:pPr algn="ctr">
-              <a:buNone/>
-            </a:pPr>
-            <a:r>
-              <a:rPr lang="en-US" sz="1800" b="1" i="0" dirty="0">
-                <a:solidFill>
-                  <a:srgbClr val="FFFFFF"/>
-                </a:solidFill>
-              </a:rPr>
               <a:t>QUALITY</a:t>
             </a:r>
           </a:p>
@@ -17560,7 +17560,7 @@
                   <a:srgbClr val="555960"/>
                 </a:solidFill>
               </a:rPr>
-              <a:t xml:space="preserve">one model, many realizations</a:t>
+              <a:t xml:space="preserve">one model, many implementations</a:t>
             </a:r>
           </a:p>
         </p:txBody>

--- a/course/lectures/act-2-delegation-and-control/02-modeling/2-2-Modeling-1-Purposeful-Reduction.pptx
+++ b/course/lectures/act-2-delegation-and-control/02-modeling/2-2-Modeling-1-Purposeful-Reduction.pptx
@@ -1575,19 +1575,43 @@
           <a:p>
             <a:r>
               <a:rPr lang="en-US" dirty="0"/>
-              <a:t>This is the same state machine they saw on the tour — the same image, not a redrawing. Say so: "you have seen this one." The recognition is the setup. If they think it is a new diagram, the slide does not work.</a:t>
+              <a:t>This slide is the answer to the previous one. Before clicking anything, name the approaches the room just gave you and say that they are about to appear. The cards are not new information; they are the room’s own answers, tidied.</a:t>
             </a:r>
           </a:p>
           <a:p>
             <a:r>
               <a:rPr lang="en-US" dirty="0"/>
-              <a:t>Three realizations, all on screen together. A state field plus transition logic; State objects, one class per state; a transition table an engine reads at runtime. None is more correct than the others, and the model does not choose between them.</a:t>
+              <a:t>Same state machine again — the same image file, not a redrawing. Third sighting: the tour, the exercise, and now the reveal. Say so if it helps: the model has not changed once.</a:t>
             </a:r>
           </a:p>
           <a:p>
             <a:r>
               <a:rPr lang="en-US" dirty="0"/>
-              <a:t>Then the class question, and let it breathe — about a minute, no more. What has to remain true for each of these to correspond to the model? The answers you are fishing for: the four states exist and are distinguishable; the legal transitions are exactly those and no others; there is no path from Draft to Published.</a:t>
+              <a:t>Click one: all three realizations at once, not in sequence. The simultaneity is the claim. A state field plus transition logic; State objects, one class per state; a transition table an engine reads at runtime. None is more correct than the others, and the model does not choose between them.</a:t>
+            </a:r>
+          </a:p>
+          <a:p>
+            <a:r>
+              <a:rPr lang="en-US" dirty="0"/>
+              <a:t>If a student supplied a fourth approach — a database row with a status column, a workflow service, an event log — credit it out loud and leave the slide alone. A fourth box would say the set is closed, which is the opposite of the point.</a:t>
+            </a:r>
+          </a:p>
+          <a:p>
+            <a:r>
+              <a:rPr lang="en-US" dirty="0"/>
+              <a:t>THE SUBTLE CLAIM, and a sharp student will push on it. We are NOT saying that every implementation compatible with the model’s syntax is good engineering; plenty of them would be bad code. We are saying the model deliberately leaves some realization decisions unconstrained, and that a reasonable engineer exercises judgment inside that space. The model bounds the judgment. It does not replace it.</a:t>
+            </a:r>
+          </a:p>
+          <a:p>
+            <a:r>
+              <a:rPr lang="en-US" dirty="0"/>
+              <a:t>Click two, then click three: “All are reasonable. All can correspond to the model,” then the footer. Read the footer; do not paraphrase it.</a:t>
+            </a:r>
+          </a:p>
+          <a:p>
+            <a:r>
+              <a:rPr lang="en-US" dirty="0"/>
+              <a:t>Ask the correspondence question orally and hold it to half a minute: what has to remain true for each of these to correspond to the model? The answers you are fishing for are that the four states exist and are distinguishable, that the legal transitions are exactly those and no others, and that there is no path from Draft to Published. It is off the slide on purpose — the room has just spent three minutes answering one question, and a second open question here costs a minute the section does not have.</a:t>
             </a:r>
           </a:p>
           <a:p>
@@ -1599,7 +1623,7 @@
           <a:p>
             <a:r>
               <a:rPr lang="en-US" dirty="0"/>
-              <a:t>One sentence toward Alignment, then stop: Modeling says what correspondence MEANS; Alignment will ask how we establish and enforce it.</a:t>
+              <a:t>Hand off to the next slide rather than forward to Alignment: if the model admits all three, why does anyone bother writing the code at all? That is the next slide’s first question.</a:t>
             </a:r>
           </a:p>
         </p:txBody>
@@ -1692,8 +1716,32 @@
           <a:lstStyle/>
           <a:p>
             <a:r>
-              <a:rPr dirty="0"/>
-              <a:t>PLACEHOLDER — skeleton only (U-1′). N2: “MODELS CONSTRAIN IMPLEMENTATION”. Content and speaker notes owed by U-2 per restructure plan v2 §2.</a:t>
+              <a:rPr lang="en-US" dirty="0"/>
+              <a:t>Section 2 is the hinge between seeing models and designing them. It makes one claim and then tests it on the room: a model fixes what must be true and deliberately leaves the rest free.</a:t>
+            </a:r>
+          </a:p>
+          <a:p>
+            <a:r>
+              <a:rPr lang="en-US" dirty="0"/>
+              <a:t>Three slides, and the room does most of the work. First they implement a model they already know. Then we show three realizations of it. Then we ask why we do not simply hand the model over and skip the coding — and we leave that question open.</a:t>
+            </a:r>
+          </a:p>
+          <a:p>
+            <a:r>
+              <a:rPr lang="en-US" dirty="0"/>
+              <a:t>Say the section title and the line under it, and move. Thirty seconds. The claim is not argued here; it is demonstrated on the next three slides.</a:t>
+            </a:r>
+          </a:p>
+          <a:p>
+            <a:r>
+              <a:rPr lang="en-US" dirty="0"/>
+              <a:t>Spine strip: the PROPERTY stage is highlighted. FLAGGED, not a styling preference — Correspondence also highlights PROPERTY, so the strip does not advance monotonically across the four section headers. The tail reconciliation unit owns the ruling (Q-E).</a:t>
+            </a:r>
+          </a:p>
+          <a:p>
+            <a:r>
+              <a:rPr lang="en-US" dirty="0"/>
+              <a:t>Budget for the section: about eleven minutes. Header 0.5, the exercise 4-5, the reveal 1.5, the closing questions 4-5.</a:t>
             </a:r>
           </a:p>
         </p:txBody>
@@ -1822,8 +1870,38 @@
           <a:lstStyle/>
           <a:p>
             <a:r>
-              <a:rPr dirty="0"/>
-              <a:t>PLACEHOLDER — skeleton only (U-1′). N3: “How would you implement this?”. Content and speaker notes owed by U-2 per restructure plan v2 §2.</a:t>
+              <a:rPr lang="en-US" dirty="0"/>
+              <a:t>The figure is the same part as the state slide on the tour — literally the same image file, not a redrawing. Open with that: “you have seen this one.” The recognition is the setup. If they think it is a new diagram, the exercise loses its point.</a:t>
+            </a:r>
+          </a:p>
+          <a:p>
+            <a:r>
+              <a:rPr lang="en-US" dirty="0"/>
+              <a:t>Do not name an implementation. No enum, no State pattern, no transition table — those are the next slide, and naming one here collapses the exercise into a guessing game about what you have in mind. If the room stalls, ask one student what language they would reach for and build from there.</a:t>
+            </a:r>
+          </a:p>
+          <a:p>
+            <a:r>
+              <a:rPr lang="en-US" dirty="0"/>
+              <a:t>THINK, one minute, silent and written. Insist on the note; students who only think about it will not commit to anything, and the commitment is what makes the reveal land. “Concrete enough that another engineer could recognize your approach” is the bar — a data structure and a place the logic lives, not “I’d use objects.”</a:t>
+            </a:r>
+          </a:p>
+          <a:p>
+            <a:r>
+              <a:rPr lang="en-US" dirty="0"/>
+              <a:t>PAIR, one minute. The outcome you want is disagreement between neighbours. Walk one row, listen, and remember two names.</a:t>
+            </a:r>
+          </a:p>
+          <a:p>
+            <a:r>
+              <a:rPr lang="en-US" dirty="0"/>
+              <a:t>SHARE, one minute. Take two or three answers, no more. Write the approach names on the board — you will point back at them on the next slide. Do not evaluate any answer here; the next slide evaluates all of them at once by showing three side by side.</a:t>
+            </a:r>
+          </a:p>
+          <a:p>
+            <a:r>
+              <a:rPr lang="en-US" dirty="0"/>
+              <a:t>Timebox the whole slide at four to five minutes and move even if the room is enjoying itself. The teaching is in the reveal, not in the share-out.</a:t>
             </a:r>
           </a:p>
         </p:txBody>
@@ -1869,8 +1947,50 @@
           <a:lstStyle/>
           <a:p>
             <a:r>
-              <a:rPr dirty="0"/>
-              <a:t>PLACEHOLDER — skeleton only (U-1′). N4: “Why don’t we just hand off the model?”. Content and speaker notes owed by U-2 per restructure plan v2 §2.</a:t>
+              <a:rPr lang="en-US" dirty="0"/>
+              <a:t>First question, and let it sit. We have just argued that a model constrains implementation without determining it — so why does anybody spend a day on boxes and arrows and then a week writing code? Let them answer. Their answers are the content of this slide.</a:t>
+            </a:r>
+          </a:p>
+          <a:p>
+            <a:r>
+              <a:rPr lang="en-US" dirty="0"/>
+              <a:t>Answers to collect rather than supply: the model leaves out most of what has to be decided; the decisions it leaves free still have to be made by someone competent; the model says nothing about how to make them well; and nothing in the drawing tells you whether what you built actually matches it.</a:t>
+            </a:r>
+          </a:p>
+          <a:p>
+            <a:r>
+              <a:rPr lang="en-US" dirty="0"/>
+              <a:t>Second question: outsourcing. This one usually lands harder, because several students have lived it. Steer toward specification cost and recovered intent — not toward time zones, not toward language.</a:t>
+            </a:r>
+          </a:p>
+          <a:p>
+            <a:r>
+              <a:rPr lang="en-US" dirty="0"/>
+              <a:t>Then the figure. It is deliberately the slide-5 picture again, one layer finer. The first engineer’s intent, context and judgment do not travel. Only the representation travels. What arrives is whatever the second engineer can reconstruct from it, and the reconstruction is not guaranteed to recover the part that mattered.</a:t>
+            </a:r>
+          </a:p>
+          <a:p>
+            <a:r>
+              <a:rPr lang="en-US" dirty="0"/>
+              <a:t>Say the mind-meld line out loud and keep it off the slide: we cannot transfer understanding directly, so we encode it, ship it, and hope interpretation recovers the consequential part. That is the whole problem of delegation, human or otherwise.</a:t>
+            </a:r>
+          </a:p>
+          <a:p>
+            <a:r>
+              <a:rPr lang="en-US" dirty="0"/>
+              <a:t>Last click, then STOP. Do not answer “does GenAI change this?” here. The cost discussion and the coda are the answer, and the question earns its weight by staying open for the next half hour. If a student answers it, thank them and write it on the board unresolved.</a:t>
+            </a:r>
+          </a:p>
+          <a:p>
+            <a:r>
+              <a:rPr lang="en-US" dirty="0"/>
+              <a:t>No equation on this slide, on purpose. The decomposition comes back once, at the cost discussion, where “but you forgot cost” is exactly the objection you want.</a:t>
+            </a:r>
+          </a:p>
+          <a:p>
+            <a:r>
+              <a:rPr lang="en-US" dirty="0"/>
+              <a:t>About four to five minutes, nearly all of it discussion. These three questions return verbatim at the cost discussion — keep the wording stable.</a:t>
             </a:r>
           </a:p>
         </p:txBody>
@@ -15092,7 +15212,7 @@
                   <a:srgbClr val="8E6F3E"/>
                 </a:solidFill>
               </a:rPr>
-              <a:t xml:space="preserve">THE MODEL  ·  unchanged from the tour</a:t>
+              <a:t xml:space="preserve">THE MODEL  ·  the one you just implemented</a:t>
             </a:r>
           </a:p>
         </p:txBody>
@@ -15431,8 +15551,8 @@
       </p:sp>
       <p:sp>
         <p:nvSpPr>
-          <p:cNvPr id="80" name="ClassQ"/>
-          <p:cNvSpPr/>
+          <p:cNvPr id="80" name="PunchA"/>
+          <p:cNvSpPr txBox="1"/>
           <p:nvPr/>
         </p:nvSpPr>
         <p:spPr>
@@ -15446,9 +15566,9 @@
           <a:solidFill>
             <a:srgbClr val="FBF8F2"/>
           </a:solidFill>
-          <a:ln w="12700">
+          <a:ln w="19050">
             <a:solidFill>
-              <a:srgbClr val="C9B991"/>
+              <a:srgbClr val="8E6F3E"/>
             </a:solidFill>
           </a:ln>
         </p:spPr>
@@ -15463,12 +15583,12 @@
               <a:buNone/>
             </a:pPr>
             <a:r>
-              <a:rPr lang="en-US" sz="1800" b="0" i="0" dirty="0">
-                <a:solidFill>
-                  <a:srgbClr val="5C4826"/>
-                </a:solidFill>
-              </a:rPr>
-              <a:t xml:space="preserve">What has to remain true for each implementation to correspond to the model?</a:t>
+              <a:rPr lang="en-US" sz="2000" b="1" i="0" dirty="0">
+                <a:solidFill>
+                  <a:srgbClr val="8E6F3E"/>
+                </a:solidFill>
+              </a:rPr>
+              <a:t xml:space="preserve">All are reasonable. All can correspond to the model.</a:t>
             </a:r>
           </a:p>
         </p:txBody>
@@ -15520,6 +15640,265 @@
   <p:clrMapOvr>
     <a:masterClrMapping/>
   </p:clrMapOvr>
+  <p:timing>
+    <p:tnLst>
+      <p:par>
+        <p:cTn id="1" dur="indefinite" restart="never" nodeType="tmRoot">
+          <p:childTnLst>
+            <p:seq concurrent="1" nextAc="seek">
+              <p:cTn id="2" dur="indefinite" nodeType="mainSeq">
+                <p:childTnLst>
+                  <p:par>
+                    <p:cTn id="3" fill="hold">
+                      <p:stCondLst>
+                        <p:cond delay="indefinite"/>
+                      </p:stCondLst>
+                      <p:childTnLst>
+                        <p:par>
+                          <p:cTn id="4" fill="hold">
+                            <p:stCondLst>
+                              <p:cond delay="0"/>
+                            </p:stCondLst>
+                            <p:childTnLst>
+                              <p:par>
+                                <p:cTn id="5" presetID="10" presetClass="entr" presetSubtype="0" fill="hold" nodeType="clickEffect">
+                                  <p:stCondLst>
+                                    <p:cond delay="0"/>
+                                  </p:stCondLst>
+                                  <p:childTnLst>
+                                    <p:set>
+                                      <p:cBhvr>
+                                        <p:cTn id="6" dur="1" fill="hold">
+                                          <p:stCondLst>
+                                            <p:cond delay="0"/>
+                                          </p:stCondLst>
+                                        </p:cTn>
+                                        <p:tgtEl>
+                                          <p:spTgt spid="70"/>
+                                        </p:tgtEl>
+                                        <p:attrNameLst>
+                                          <p:attrName>style.visibility</p:attrName>
+                                        </p:attrNameLst>
+                                      </p:cBhvr>
+                                      <p:to>
+                                        <p:strVal val="visible"/>
+                                      </p:to>
+                                    </p:set>
+                                    <p:animEffect transition="in" filter="fade">
+                                      <p:cBhvr>
+                                        <p:cTn id="7" dur="500"/>
+                                        <p:tgtEl>
+                                          <p:spTgt spid="70"/>
+                                        </p:tgtEl>
+                                      </p:cBhvr>
+                                    </p:animEffect>
+                                  </p:childTnLst>
+                                </p:cTn>
+                              </p:par>
+                              <p:par>
+                                <p:cTn id="8" presetID="10" presetClass="entr" presetSubtype="0" fill="hold" nodeType="withEffect">
+                                  <p:stCondLst>
+                                    <p:cond delay="0"/>
+                                  </p:stCondLst>
+                                  <p:childTnLst>
+                                    <p:set>
+                                      <p:cBhvr>
+                                        <p:cTn id="9" dur="1" fill="hold">
+                                          <p:stCondLst>
+                                            <p:cond delay="0"/>
+                                          </p:stCondLst>
+                                        </p:cTn>
+                                        <p:tgtEl>
+                                          <p:spTgt spid="71"/>
+                                        </p:tgtEl>
+                                        <p:attrNameLst>
+                                          <p:attrName>style.visibility</p:attrName>
+                                        </p:attrNameLst>
+                                      </p:cBhvr>
+                                      <p:to>
+                                        <p:strVal val="visible"/>
+                                      </p:to>
+                                    </p:set>
+                                    <p:animEffect transition="in" filter="fade">
+                                      <p:cBhvr>
+                                        <p:cTn id="10" dur="500"/>
+                                        <p:tgtEl>
+                                          <p:spTgt spid="71"/>
+                                        </p:tgtEl>
+                                      </p:cBhvr>
+                                    </p:animEffect>
+                                  </p:childTnLst>
+                                </p:cTn>
+                              </p:par>
+                              <p:par>
+                                <p:cTn id="11" presetID="10" presetClass="entr" presetSubtype="0" fill="hold" nodeType="withEffect">
+                                  <p:stCondLst>
+                                    <p:cond delay="0"/>
+                                  </p:stCondLst>
+                                  <p:childTnLst>
+                                    <p:set>
+                                      <p:cBhvr>
+                                        <p:cTn id="12" dur="1" fill="hold">
+                                          <p:stCondLst>
+                                            <p:cond delay="0"/>
+                                          </p:stCondLst>
+                                        </p:cTn>
+                                        <p:tgtEl>
+                                          <p:spTgt spid="72"/>
+                                        </p:tgtEl>
+                                        <p:attrNameLst>
+                                          <p:attrName>style.visibility</p:attrName>
+                                        </p:attrNameLst>
+                                      </p:cBhvr>
+                                      <p:to>
+                                        <p:strVal val="visible"/>
+                                      </p:to>
+                                    </p:set>
+                                    <p:animEffect transition="in" filter="fade">
+                                      <p:cBhvr>
+                                        <p:cTn id="13" dur="500"/>
+                                        <p:tgtEl>
+                                          <p:spTgt spid="72"/>
+                                        </p:tgtEl>
+                                      </p:cBhvr>
+                                    </p:animEffect>
+                                  </p:childTnLst>
+                                </p:cTn>
+                              </p:par>
+                            </p:childTnLst>
+                          </p:cTn>
+                        </p:par>
+                      </p:childTnLst>
+                    </p:cTn>
+                  </p:par>
+                  <p:par>
+                    <p:cTn id="14" fill="hold">
+                      <p:stCondLst>
+                        <p:cond delay="indefinite"/>
+                      </p:stCondLst>
+                      <p:childTnLst>
+                        <p:par>
+                          <p:cTn id="15" fill="hold">
+                            <p:stCondLst>
+                              <p:cond delay="0"/>
+                            </p:stCondLst>
+                            <p:childTnLst>
+                              <p:par>
+                                <p:cTn id="16" presetID="10" presetClass="entr" presetSubtype="0" fill="hold" nodeType="clickEffect">
+                                  <p:stCondLst>
+                                    <p:cond delay="0"/>
+                                  </p:stCondLst>
+                                  <p:childTnLst>
+                                    <p:set>
+                                      <p:cBhvr>
+                                        <p:cTn id="17" dur="1" fill="hold">
+                                          <p:stCondLst>
+                                            <p:cond delay="0"/>
+                                          </p:stCondLst>
+                                        </p:cTn>
+                                        <p:tgtEl>
+                                          <p:spTgt spid="80"/>
+                                        </p:tgtEl>
+                                        <p:attrNameLst>
+                                          <p:attrName>style.visibility</p:attrName>
+                                        </p:attrNameLst>
+                                      </p:cBhvr>
+                                      <p:to>
+                                        <p:strVal val="visible"/>
+                                      </p:to>
+                                    </p:set>
+                                    <p:animEffect transition="in" filter="fade">
+                                      <p:cBhvr>
+                                        <p:cTn id="18" dur="500"/>
+                                        <p:tgtEl>
+                                          <p:spTgt spid="80"/>
+                                        </p:tgtEl>
+                                      </p:cBhvr>
+                                    </p:animEffect>
+                                  </p:childTnLst>
+                                </p:cTn>
+                              </p:par>
+                            </p:childTnLst>
+                          </p:cTn>
+                        </p:par>
+                      </p:childTnLst>
+                    </p:cTn>
+                  </p:par>
+                  <p:par>
+                    <p:cTn id="19" fill="hold">
+                      <p:stCondLst>
+                        <p:cond delay="indefinite"/>
+                      </p:stCondLst>
+                      <p:childTnLst>
+                        <p:par>
+                          <p:cTn id="20" fill="hold">
+                            <p:stCondLst>
+                              <p:cond delay="0"/>
+                            </p:stCondLst>
+                            <p:childTnLst>
+                              <p:par>
+                                <p:cTn id="21" presetID="10" presetClass="entr" presetSubtype="0" fill="hold" nodeType="clickEffect">
+                                  <p:stCondLst>
+                                    <p:cond delay="0"/>
+                                  </p:stCondLst>
+                                  <p:childTnLst>
+                                    <p:set>
+                                      <p:cBhvr>
+                                        <p:cTn id="22" dur="1" fill="hold">
+                                          <p:stCondLst>
+                                            <p:cond delay="0"/>
+                                          </p:stCondLst>
+                                        </p:cTn>
+                                        <p:tgtEl>
+                                          <p:spTgt spid="199"/>
+                                        </p:tgtEl>
+                                        <p:attrNameLst>
+                                          <p:attrName>style.visibility</p:attrName>
+                                        </p:attrNameLst>
+                                      </p:cBhvr>
+                                      <p:to>
+                                        <p:strVal val="visible"/>
+                                      </p:to>
+                                    </p:set>
+                                    <p:animEffect transition="in" filter="fade">
+                                      <p:cBhvr>
+                                        <p:cTn id="23" dur="500"/>
+                                        <p:tgtEl>
+                                          <p:spTgt spid="199"/>
+                                        </p:tgtEl>
+                                      </p:cBhvr>
+                                    </p:animEffect>
+                                  </p:childTnLst>
+                                </p:cTn>
+                              </p:par>
+                            </p:childTnLst>
+                          </p:cTn>
+                        </p:par>
+                      </p:childTnLst>
+                    </p:cTn>
+                  </p:par>
+                </p:childTnLst>
+              </p:cTn>
+              <p:prevCondLst>
+                <p:cond evt="onPrev" delay="0">
+                  <p:tgtEl>
+                    <p:sldTgt/>
+                  </p:tgtEl>
+                </p:cond>
+              </p:prevCondLst>
+              <p:nextCondLst>
+                <p:cond evt="onNext" delay="0">
+                  <p:tgtEl>
+                    <p:sldTgt/>
+                  </p:tgtEl>
+                </p:cond>
+              </p:nextCondLst>
+            </p:seq>
+          </p:childTnLst>
+        </p:cTn>
+      </p:par>
+    </p:tnLst>
+  </p:timing>
 </p:sld>
 </file>
 
@@ -16779,11 +17158,619 @@
           </a:p>
         </p:txBody>
       </p:sp>
+      <p:sp>
+        <p:nvSpPr>
+          <p:cNvPr id="50" name="FigPanel"/>
+          <p:cNvSpPr/>
+          <p:nvPr/>
+        </p:nvSpPr>
+        <p:spPr>
+          <a:xfrm>
+            <a:off x="1026947" y="868680"/>
+            <a:ext cx="7090107" cy="3429000"/>
+          </a:xfrm>
+          <a:prstGeom prst="rect">
+            <a:avLst/>
+          </a:prstGeom>
+          <a:solidFill>
+            <a:srgbClr val="FDFCF9"/>
+          </a:solidFill>
+          <a:ln>
+            <a:noFill/>
+          </a:ln>
+        </p:spPr>
+        <p:txBody>
+          <a:bodyPr/>
+          <a:lstStyle/>
+          <a:p>
+            <a:pPr>
+              <a:buNone/>
+            </a:pPr>
+            <a:endParaRPr lang="en-US"/>
+          </a:p>
+        </p:txBody>
+      </p:sp>
+      <p:pic>
+        <p:nvPicPr>
+          <p:cNvPr id="60" name="TourFigure" descr="A UML state machine for a course proposal: Draft to Submitted to Approved to Published, with a revise transition returning Submitted to Draft, and a final state after Published."/>
+          <p:cNvPicPr>
+            <a:picLocks noChangeAspect="1"/>
+          </p:cNvPicPr>
+          <p:nvPr/>
+        </p:nvPicPr>
+        <p:blipFill>
+          <a:blip r:embed="rId3"/>
+          <a:stretch>
+            <a:fillRect/>
+          </a:stretch>
+        </p:blipFill>
+        <p:spPr>
+          <a:xfrm>
+            <a:off x="1118387" y="960120"/>
+            <a:ext cx="6907227" cy="3246120"/>
+          </a:xfrm>
+          <a:prstGeom prst="rect">
+            <a:avLst/>
+          </a:prstGeom>
+        </p:spPr>
+      </p:pic>
+      <p:sp>
+        <p:nvSpPr>
+          <p:cNvPr id="110" name="Chip110"/>
+          <p:cNvSpPr txBox="1"/>
+          <p:nvPr/>
+        </p:nvSpPr>
+        <p:spPr>
+          <a:xfrm>
+            <a:off x="274320" y="4389120"/>
+            <a:ext cx="1920240" cy="713232"/>
+          </a:xfrm>
+          <a:prstGeom prst="rect">
+            <a:avLst/>
+          </a:prstGeom>
+          <a:solidFill>
+            <a:srgbClr val="8E6F3E"/>
+          </a:solidFill>
+          <a:ln>
+            <a:noFill/>
+          </a:ln>
+        </p:spPr>
+        <p:txBody>
+          <a:bodyPr wrap="square" lIns="27432" tIns="22860" rIns="27432" bIns="22860" anchor="ctr"/>
+          <a:lstStyle/>
+          <a:p>
+            <a:pPr algn="ctr">
+              <a:spcAft>
+                <a:spcPts val="0"/>
+              </a:spcAft>
+              <a:buNone/>
+            </a:pPr>
+            <a:r>
+              <a:rPr lang="en-US" sz="1600" b="1" i="0" dirty="0">
+                <a:solidFill>
+                  <a:srgbClr val="FFFFFF"/>
+                </a:solidFill>
+              </a:rPr>
+              <a:t xml:space="preserve">THINK  ·  1 minute</a:t>
+            </a:r>
+          </a:p>
+        </p:txBody>
+      </p:sp>
+      <p:sp>
+        <p:nvSpPr>
+          <p:cNvPr id="120" name="Prompt120"/>
+          <p:cNvSpPr txBox="1"/>
+          <p:nvPr/>
+        </p:nvSpPr>
+        <p:spPr>
+          <a:xfrm>
+            <a:off x="2331720" y="4389120"/>
+            <a:ext cx="6537960" cy="713232"/>
+          </a:xfrm>
+          <a:prstGeom prst="rect">
+            <a:avLst/>
+          </a:prstGeom>
+          <a:solidFill>
+            <a:srgbClr val="FBF8F2"/>
+          </a:solidFill>
+          <a:ln w="12700">
+            <a:solidFill>
+              <a:srgbClr val="C9B991"/>
+            </a:solidFill>
+          </a:ln>
+        </p:spPr>
+        <p:txBody>
+          <a:bodyPr wrap="square" lIns="27432" tIns="22860" rIns="27432" bIns="22860" anchor="ctr"/>
+          <a:lstStyle/>
+          <a:p>
+            <a:pPr algn="l">
+              <a:spcAft>
+                <a:spcPts val="0"/>
+              </a:spcAft>
+              <a:buNone/>
+            </a:pPr>
+            <a:r>
+              <a:rPr lang="en-US" sz="1400" b="0" i="0" dirty="0">
+                <a:solidFill>
+                  <a:srgbClr val="5C4826"/>
+                </a:solidFill>
+              </a:rPr>
+              <a:t xml:space="preserve">How would you implement this model? Take a note. Be concrete enough that another engineer could recognize your approach.</a:t>
+            </a:r>
+          </a:p>
+        </p:txBody>
+      </p:sp>
+      <p:sp>
+        <p:nvSpPr>
+          <p:cNvPr id="111" name="Chip111"/>
+          <p:cNvSpPr txBox="1"/>
+          <p:nvPr/>
+        </p:nvSpPr>
+        <p:spPr>
+          <a:xfrm>
+            <a:off x="274320" y="5193792"/>
+            <a:ext cx="1920240" cy="493776"/>
+          </a:xfrm>
+          <a:prstGeom prst="rect">
+            <a:avLst/>
+          </a:prstGeom>
+          <a:solidFill>
+            <a:srgbClr val="8E6F3E"/>
+          </a:solidFill>
+          <a:ln>
+            <a:noFill/>
+          </a:ln>
+        </p:spPr>
+        <p:txBody>
+          <a:bodyPr wrap="square" lIns="27432" tIns="22860" rIns="27432" bIns="22860" anchor="ctr"/>
+          <a:lstStyle/>
+          <a:p>
+            <a:pPr algn="ctr">
+              <a:spcAft>
+                <a:spcPts val="0"/>
+              </a:spcAft>
+              <a:buNone/>
+            </a:pPr>
+            <a:r>
+              <a:rPr lang="en-US" sz="1600" b="1" i="0" dirty="0">
+                <a:solidFill>
+                  <a:srgbClr val="FFFFFF"/>
+                </a:solidFill>
+              </a:rPr>
+              <a:t xml:space="preserve">PAIR  ·  1 minute</a:t>
+            </a:r>
+          </a:p>
+        </p:txBody>
+      </p:sp>
+      <p:sp>
+        <p:nvSpPr>
+          <p:cNvPr id="121" name="Prompt121"/>
+          <p:cNvSpPr txBox="1"/>
+          <p:nvPr/>
+        </p:nvSpPr>
+        <p:spPr>
+          <a:xfrm>
+            <a:off x="2331720" y="5193792"/>
+            <a:ext cx="6537960" cy="493776"/>
+          </a:xfrm>
+          <a:prstGeom prst="rect">
+            <a:avLst/>
+          </a:prstGeom>
+          <a:solidFill>
+            <a:srgbClr val="FBF8F2"/>
+          </a:solidFill>
+          <a:ln w="12700">
+            <a:solidFill>
+              <a:srgbClr val="C9B991"/>
+            </a:solidFill>
+          </a:ln>
+        </p:spPr>
+        <p:txBody>
+          <a:bodyPr wrap="square" lIns="27432" tIns="22860" rIns="27432" bIns="22860" anchor="ctr"/>
+          <a:lstStyle/>
+          <a:p>
+            <a:pPr algn="l">
+              <a:spcAft>
+                <a:spcPts val="0"/>
+              </a:spcAft>
+              <a:buNone/>
+            </a:pPr>
+            <a:r>
+              <a:rPr lang="en-US" sz="1400" b="0" i="0" dirty="0">
+                <a:solidFill>
+                  <a:srgbClr val="5C4826"/>
+                </a:solidFill>
+              </a:rPr>
+              <a:t xml:space="preserve">Compare with your neighbour. Did you choose the same implementation?</a:t>
+            </a:r>
+          </a:p>
+        </p:txBody>
+      </p:sp>
+      <p:sp>
+        <p:nvSpPr>
+          <p:cNvPr id="112" name="Chip112"/>
+          <p:cNvSpPr txBox="1"/>
+          <p:nvPr/>
+        </p:nvSpPr>
+        <p:spPr>
+          <a:xfrm>
+            <a:off x="274320" y="5779008"/>
+            <a:ext cx="1920240" cy="493776"/>
+          </a:xfrm>
+          <a:prstGeom prst="rect">
+            <a:avLst/>
+          </a:prstGeom>
+          <a:solidFill>
+            <a:srgbClr val="8E6F3E"/>
+          </a:solidFill>
+          <a:ln>
+            <a:noFill/>
+          </a:ln>
+        </p:spPr>
+        <p:txBody>
+          <a:bodyPr wrap="square" lIns="27432" tIns="22860" rIns="27432" bIns="22860" anchor="ctr"/>
+          <a:lstStyle/>
+          <a:p>
+            <a:pPr algn="ctr">
+              <a:spcAft>
+                <a:spcPts val="0"/>
+              </a:spcAft>
+              <a:buNone/>
+            </a:pPr>
+            <a:r>
+              <a:rPr lang="en-US" sz="1600" b="1" i="0" dirty="0">
+                <a:solidFill>
+                  <a:srgbClr val="FFFFFF"/>
+                </a:solidFill>
+              </a:rPr>
+              <a:t xml:space="preserve">SHARE  ·  1 minute</a:t>
+            </a:r>
+          </a:p>
+        </p:txBody>
+      </p:sp>
+      <p:sp>
+        <p:nvSpPr>
+          <p:cNvPr id="122" name="Prompt122"/>
+          <p:cNvSpPr txBox="1"/>
+          <p:nvPr/>
+        </p:nvSpPr>
+        <p:spPr>
+          <a:xfrm>
+            <a:off x="2331720" y="5779008"/>
+            <a:ext cx="6537960" cy="493776"/>
+          </a:xfrm>
+          <a:prstGeom prst="rect">
+            <a:avLst/>
+          </a:prstGeom>
+          <a:solidFill>
+            <a:srgbClr val="FBF8F2"/>
+          </a:solidFill>
+          <a:ln w="12700">
+            <a:solidFill>
+              <a:srgbClr val="C9B991"/>
+            </a:solidFill>
+          </a:ln>
+        </p:spPr>
+        <p:txBody>
+          <a:bodyPr wrap="square" lIns="27432" tIns="22860" rIns="27432" bIns="22860" anchor="ctr"/>
+          <a:lstStyle/>
+          <a:p>
+            <a:pPr algn="l">
+              <a:spcAft>
+                <a:spcPts val="0"/>
+              </a:spcAft>
+              <a:buNone/>
+            </a:pPr>
+            <a:r>
+              <a:rPr lang="en-US" sz="1400" b="0" i="0" dirty="0">
+                <a:solidFill>
+                  <a:srgbClr val="5C4826"/>
+                </a:solidFill>
+              </a:rPr>
+              <a:t xml:space="preserve">What did you choose?</a:t>
+            </a:r>
+          </a:p>
+        </p:txBody>
+      </p:sp>
     </p:spTree>
   </p:cSld>
   <p:clrMapOvr>
     <a:masterClrMapping/>
   </p:clrMapOvr>
+  <p:timing>
+    <p:tnLst>
+      <p:par>
+        <p:cTn id="1" dur="indefinite" restart="never" nodeType="tmRoot">
+          <p:childTnLst>
+            <p:seq concurrent="1" nextAc="seek">
+              <p:cTn id="2" dur="indefinite" nodeType="mainSeq">
+                <p:childTnLst>
+                  <p:par>
+                    <p:cTn id="3" fill="hold">
+                      <p:stCondLst>
+                        <p:cond delay="indefinite"/>
+                      </p:stCondLst>
+                      <p:childTnLst>
+                        <p:par>
+                          <p:cTn id="4" fill="hold">
+                            <p:stCondLst>
+                              <p:cond delay="0"/>
+                            </p:stCondLst>
+                            <p:childTnLst>
+                              <p:par>
+                                <p:cTn id="5" presetID="10" presetClass="entr" presetSubtype="0" fill="hold" nodeType="clickEffect">
+                                  <p:stCondLst>
+                                    <p:cond delay="0"/>
+                                  </p:stCondLst>
+                                  <p:childTnLst>
+                                    <p:set>
+                                      <p:cBhvr>
+                                        <p:cTn id="6" dur="1" fill="hold">
+                                          <p:stCondLst>
+                                            <p:cond delay="0"/>
+                                          </p:stCondLst>
+                                        </p:cTn>
+                                        <p:tgtEl>
+                                          <p:spTgt spid="110"/>
+                                        </p:tgtEl>
+                                        <p:attrNameLst>
+                                          <p:attrName>style.visibility</p:attrName>
+                                        </p:attrNameLst>
+                                      </p:cBhvr>
+                                      <p:to>
+                                        <p:strVal val="visible"/>
+                                      </p:to>
+                                    </p:set>
+                                    <p:animEffect transition="in" filter="fade">
+                                      <p:cBhvr>
+                                        <p:cTn id="7" dur="500"/>
+                                        <p:tgtEl>
+                                          <p:spTgt spid="110"/>
+                                        </p:tgtEl>
+                                      </p:cBhvr>
+                                    </p:animEffect>
+                                  </p:childTnLst>
+                                </p:cTn>
+                              </p:par>
+                              <p:par>
+                                <p:cTn id="8" presetID="10" presetClass="entr" presetSubtype="0" fill="hold" nodeType="withEffect">
+                                  <p:stCondLst>
+                                    <p:cond delay="0"/>
+                                  </p:stCondLst>
+                                  <p:childTnLst>
+                                    <p:set>
+                                      <p:cBhvr>
+                                        <p:cTn id="9" dur="1" fill="hold">
+                                          <p:stCondLst>
+                                            <p:cond delay="0"/>
+                                          </p:stCondLst>
+                                        </p:cTn>
+                                        <p:tgtEl>
+                                          <p:spTgt spid="120"/>
+                                        </p:tgtEl>
+                                        <p:attrNameLst>
+                                          <p:attrName>style.visibility</p:attrName>
+                                        </p:attrNameLst>
+                                      </p:cBhvr>
+                                      <p:to>
+                                        <p:strVal val="visible"/>
+                                      </p:to>
+                                    </p:set>
+                                    <p:animEffect transition="in" filter="fade">
+                                      <p:cBhvr>
+                                        <p:cTn id="10" dur="500"/>
+                                        <p:tgtEl>
+                                          <p:spTgt spid="120"/>
+                                        </p:tgtEl>
+                                      </p:cBhvr>
+                                    </p:animEffect>
+                                  </p:childTnLst>
+                                </p:cTn>
+                              </p:par>
+                            </p:childTnLst>
+                          </p:cTn>
+                        </p:par>
+                      </p:childTnLst>
+                    </p:cTn>
+                  </p:par>
+                  <p:par>
+                    <p:cTn id="11" fill="hold">
+                      <p:stCondLst>
+                        <p:cond delay="indefinite"/>
+                      </p:stCondLst>
+                      <p:childTnLst>
+                        <p:par>
+                          <p:cTn id="12" fill="hold">
+                            <p:stCondLst>
+                              <p:cond delay="0"/>
+                            </p:stCondLst>
+                            <p:childTnLst>
+                              <p:par>
+                                <p:cTn id="13" presetID="10" presetClass="entr" presetSubtype="0" fill="hold" nodeType="clickEffect">
+                                  <p:stCondLst>
+                                    <p:cond delay="0"/>
+                                  </p:stCondLst>
+                                  <p:childTnLst>
+                                    <p:set>
+                                      <p:cBhvr>
+                                        <p:cTn id="14" dur="1" fill="hold">
+                                          <p:stCondLst>
+                                            <p:cond delay="0"/>
+                                          </p:stCondLst>
+                                        </p:cTn>
+                                        <p:tgtEl>
+                                          <p:spTgt spid="111"/>
+                                        </p:tgtEl>
+                                        <p:attrNameLst>
+                                          <p:attrName>style.visibility</p:attrName>
+                                        </p:attrNameLst>
+                                      </p:cBhvr>
+                                      <p:to>
+                                        <p:strVal val="visible"/>
+                                      </p:to>
+                                    </p:set>
+                                    <p:animEffect transition="in" filter="fade">
+                                      <p:cBhvr>
+                                        <p:cTn id="15" dur="500"/>
+                                        <p:tgtEl>
+                                          <p:spTgt spid="111"/>
+                                        </p:tgtEl>
+                                      </p:cBhvr>
+                                    </p:animEffect>
+                                  </p:childTnLst>
+                                </p:cTn>
+                              </p:par>
+                              <p:par>
+                                <p:cTn id="16" presetID="10" presetClass="entr" presetSubtype="0" fill="hold" nodeType="withEffect">
+                                  <p:stCondLst>
+                                    <p:cond delay="0"/>
+                                  </p:stCondLst>
+                                  <p:childTnLst>
+                                    <p:set>
+                                      <p:cBhvr>
+                                        <p:cTn id="17" dur="1" fill="hold">
+                                          <p:stCondLst>
+                                            <p:cond delay="0"/>
+                                          </p:stCondLst>
+                                        </p:cTn>
+                                        <p:tgtEl>
+                                          <p:spTgt spid="121"/>
+                                        </p:tgtEl>
+                                        <p:attrNameLst>
+                                          <p:attrName>style.visibility</p:attrName>
+                                        </p:attrNameLst>
+                                      </p:cBhvr>
+                                      <p:to>
+                                        <p:strVal val="visible"/>
+                                      </p:to>
+                                    </p:set>
+                                    <p:animEffect transition="in" filter="fade">
+                                      <p:cBhvr>
+                                        <p:cTn id="18" dur="500"/>
+                                        <p:tgtEl>
+                                          <p:spTgt spid="121"/>
+                                        </p:tgtEl>
+                                      </p:cBhvr>
+                                    </p:animEffect>
+                                  </p:childTnLst>
+                                </p:cTn>
+                              </p:par>
+                            </p:childTnLst>
+                          </p:cTn>
+                        </p:par>
+                      </p:childTnLst>
+                    </p:cTn>
+                  </p:par>
+                  <p:par>
+                    <p:cTn id="19" fill="hold">
+                      <p:stCondLst>
+                        <p:cond delay="indefinite"/>
+                      </p:stCondLst>
+                      <p:childTnLst>
+                        <p:par>
+                          <p:cTn id="20" fill="hold">
+                            <p:stCondLst>
+                              <p:cond delay="0"/>
+                            </p:stCondLst>
+                            <p:childTnLst>
+                              <p:par>
+                                <p:cTn id="21" presetID="10" presetClass="entr" presetSubtype="0" fill="hold" nodeType="clickEffect">
+                                  <p:stCondLst>
+                                    <p:cond delay="0"/>
+                                  </p:stCondLst>
+                                  <p:childTnLst>
+                                    <p:set>
+                                      <p:cBhvr>
+                                        <p:cTn id="22" dur="1" fill="hold">
+                                          <p:stCondLst>
+                                            <p:cond delay="0"/>
+                                          </p:stCondLst>
+                                        </p:cTn>
+                                        <p:tgtEl>
+                                          <p:spTgt spid="112"/>
+                                        </p:tgtEl>
+                                        <p:attrNameLst>
+                                          <p:attrName>style.visibility</p:attrName>
+                                        </p:attrNameLst>
+                                      </p:cBhvr>
+                                      <p:to>
+                                        <p:strVal val="visible"/>
+                                      </p:to>
+                                    </p:set>
+                                    <p:animEffect transition="in" filter="fade">
+                                      <p:cBhvr>
+                                        <p:cTn id="23" dur="500"/>
+                                        <p:tgtEl>
+                                          <p:spTgt spid="112"/>
+                                        </p:tgtEl>
+                                      </p:cBhvr>
+                                    </p:animEffect>
+                                  </p:childTnLst>
+                                </p:cTn>
+                              </p:par>
+                              <p:par>
+                                <p:cTn id="24" presetID="10" presetClass="entr" presetSubtype="0" fill="hold" nodeType="withEffect">
+                                  <p:stCondLst>
+                                    <p:cond delay="0"/>
+                                  </p:stCondLst>
+                                  <p:childTnLst>
+                                    <p:set>
+                                      <p:cBhvr>
+                                        <p:cTn id="25" dur="1" fill="hold">
+                                          <p:stCondLst>
+                                            <p:cond delay="0"/>
+                                          </p:stCondLst>
+                                        </p:cTn>
+                                        <p:tgtEl>
+                                          <p:spTgt spid="122"/>
+                                        </p:tgtEl>
+                                        <p:attrNameLst>
+                                          <p:attrName>style.visibility</p:attrName>
+                                        </p:attrNameLst>
+                                      </p:cBhvr>
+                                      <p:to>
+                                        <p:strVal val="visible"/>
+                                      </p:to>
+                                    </p:set>
+                                    <p:animEffect transition="in" filter="fade">
+                                      <p:cBhvr>
+                                        <p:cTn id="26" dur="500"/>
+                                        <p:tgtEl>
+                                          <p:spTgt spid="122"/>
+                                        </p:tgtEl>
+                                      </p:cBhvr>
+                                    </p:animEffect>
+                                  </p:childTnLst>
+                                </p:cTn>
+                              </p:par>
+                            </p:childTnLst>
+                          </p:cTn>
+                        </p:par>
+                      </p:childTnLst>
+                    </p:cTn>
+                  </p:par>
+                </p:childTnLst>
+              </p:cTn>
+              <p:prevCondLst>
+                <p:cond evt="onPrev" delay="0">
+                  <p:tgtEl>
+                    <p:sldTgt/>
+                  </p:tgtEl>
+                </p:cond>
+              </p:prevCondLst>
+              <p:nextCondLst>
+                <p:cond evt="onNext" delay="0">
+                  <p:tgtEl>
+                    <p:sldTgt/>
+                  </p:tgtEl>
+                </p:cond>
+              </p:nextCondLst>
+            </p:seq>
+          </p:childTnLst>
+        </p:cTn>
+      </p:par>
+    </p:tnLst>
+  </p:timing>
 </p:sld>
 </file>
 
@@ -16851,11 +17838,942 @@
           </a:p>
         </p:txBody>
       </p:sp>
+      <p:sp>
+        <p:nvSpPr>
+          <p:cNvPr id="100" name="Q1"/>
+          <p:cNvSpPr txBox="1"/>
+          <p:nvPr/>
+        </p:nvSpPr>
+        <p:spPr>
+          <a:xfrm>
+            <a:off x="274320" y="896112"/>
+            <a:ext cx="8595360" cy="777240"/>
+          </a:xfrm>
+          <a:prstGeom prst="rect">
+            <a:avLst/>
+          </a:prstGeom>
+          <a:solidFill>
+            <a:srgbClr val="FBF8F2"/>
+          </a:solidFill>
+          <a:ln w="12700">
+            <a:solidFill>
+              <a:srgbClr val="C9B991"/>
+            </a:solidFill>
+          </a:ln>
+        </p:spPr>
+        <p:txBody>
+          <a:bodyPr wrap="square" lIns="27432" tIns="22860" rIns="27432" bIns="22860" anchor="ctr"/>
+          <a:lstStyle/>
+          <a:p>
+            <a:pPr algn="ctr">
+              <a:spcAft>
+                <a:spcPts val="0"/>
+              </a:spcAft>
+              <a:buNone/>
+            </a:pPr>
+            <a:r>
+              <a:rPr lang="en-US" sz="1800" b="0" i="0" dirty="0">
+                <a:solidFill>
+                  <a:srgbClr val="5C4826"/>
+                </a:solidFill>
+              </a:rPr>
+              <a:t xml:space="preserve">If this works, why do software engineers draw boxes and arrows for a day, then go code for a week?</a:t>
+            </a:r>
+          </a:p>
+        </p:txBody>
+      </p:sp>
+      <p:sp>
+        <p:nvSpPr>
+          <p:cNvPr id="101" name="Q2"/>
+          <p:cNvSpPr txBox="1"/>
+          <p:nvPr/>
+        </p:nvSpPr>
+        <p:spPr>
+          <a:xfrm>
+            <a:off x="274320" y="1783080"/>
+            <a:ext cx="8595360" cy="530352"/>
+          </a:xfrm>
+          <a:prstGeom prst="rect">
+            <a:avLst/>
+          </a:prstGeom>
+          <a:solidFill>
+            <a:srgbClr val="FBF8F2"/>
+          </a:solidFill>
+          <a:ln w="12700">
+            <a:solidFill>
+              <a:srgbClr val="C9B991"/>
+            </a:solidFill>
+          </a:ln>
+        </p:spPr>
+        <p:txBody>
+          <a:bodyPr wrap="square" lIns="27432" tIns="22860" rIns="27432" bIns="22860" anchor="ctr"/>
+          <a:lstStyle/>
+          <a:p>
+            <a:pPr algn="ctr">
+              <a:spcAft>
+                <a:spcPts val="0"/>
+              </a:spcAft>
+              <a:buNone/>
+            </a:pPr>
+            <a:r>
+              <a:rPr lang="en-US" sz="1800" b="0" i="0" dirty="0">
+                <a:solidFill>
+                  <a:srgbClr val="5C4826"/>
+                </a:solidFill>
+              </a:rPr>
+              <a:t xml:space="preserve">And why is outsourcing software development so hard?</a:t>
+            </a:r>
+          </a:p>
+        </p:txBody>
+      </p:sp>
+      <p:sp>
+        <p:nvSpPr>
+          <p:cNvPr id="130" name="EncodeLbl"/>
+          <p:cNvSpPr txBox="1"/>
+          <p:nvPr/>
+        </p:nvSpPr>
+        <p:spPr>
+          <a:xfrm>
+            <a:off x="2240280" y="2724912"/>
+            <a:ext cx="1417320" cy="274320"/>
+          </a:xfrm>
+          <a:prstGeom prst="rect">
+            <a:avLst/>
+          </a:prstGeom>
+          <a:noFill/>
+          <a:ln>
+            <a:noFill/>
+          </a:ln>
+        </p:spPr>
+        <p:txBody>
+          <a:bodyPr wrap="square" lIns="0" tIns="0" rIns="0" bIns="0" anchor="t"/>
+          <a:lstStyle/>
+          <a:p>
+            <a:pPr algn="ctr">
+              <a:spcAft>
+                <a:spcPts val="0"/>
+              </a:spcAft>
+              <a:buNone/>
+            </a:pPr>
+            <a:r>
+              <a:rPr lang="en-US" sz="1400" b="0" i="0" dirty="0">
+                <a:solidFill>
+                  <a:srgbClr val="555960"/>
+                </a:solidFill>
+              </a:rPr>
+              <a:t xml:space="preserve">ENCODE</a:t>
+            </a:r>
+          </a:p>
+        </p:txBody>
+      </p:sp>
+      <p:sp>
+        <p:nvSpPr>
+          <p:cNvPr id="131" name="InterpretLbl"/>
+          <p:cNvSpPr txBox="1"/>
+          <p:nvPr/>
+        </p:nvSpPr>
+        <p:spPr>
+          <a:xfrm>
+            <a:off x="5486400" y="2724912"/>
+            <a:ext cx="1417320" cy="274320"/>
+          </a:xfrm>
+          <a:prstGeom prst="rect">
+            <a:avLst/>
+          </a:prstGeom>
+          <a:noFill/>
+          <a:ln>
+            <a:noFill/>
+          </a:ln>
+        </p:spPr>
+        <p:txBody>
+          <a:bodyPr wrap="square" lIns="0" tIns="0" rIns="0" bIns="0" anchor="t"/>
+          <a:lstStyle/>
+          <a:p>
+            <a:pPr algn="ctr">
+              <a:spcAft>
+                <a:spcPts val="0"/>
+              </a:spcAft>
+              <a:buNone/>
+            </a:pPr>
+            <a:r>
+              <a:rPr lang="en-US" sz="1400" b="0" i="0" dirty="0">
+                <a:solidFill>
+                  <a:srgbClr val="555960"/>
+                </a:solidFill>
+              </a:rPr>
+              <a:t xml:space="preserve">INTERPRET</a:t>
+            </a:r>
+          </a:p>
+        </p:txBody>
+      </p:sp>
+      <p:sp>
+        <p:nvSpPr>
+          <p:cNvPr id="110" name="EngineerA"/>
+          <p:cNvSpPr txBox="1"/>
+          <p:nvPr/>
+        </p:nvSpPr>
+        <p:spPr>
+          <a:xfrm>
+            <a:off x="274320" y="3063240"/>
+            <a:ext cx="2103120" cy="1005840"/>
+          </a:xfrm>
+          <a:prstGeom prst="rect">
+            <a:avLst/>
+          </a:prstGeom>
+          <a:solidFill>
+            <a:srgbClr val="F5F1E8"/>
+          </a:solidFill>
+          <a:ln w="12700">
+            <a:solidFill>
+              <a:srgbClr val="C9B991"/>
+            </a:solidFill>
+          </a:ln>
+        </p:spPr>
+        <p:txBody>
+          <a:bodyPr wrap="square" lIns="27432" tIns="22860" rIns="27432" bIns="22860" anchor="ctr"/>
+          <a:lstStyle/>
+          <a:p>
+            <a:pPr algn="ctr">
+              <a:spcAft>
+                <a:spcPts val="200"/>
+              </a:spcAft>
+              <a:buNone/>
+            </a:pPr>
+            <a:r>
+              <a:rPr lang="en-US" sz="1800" b="1" i="0" dirty="0">
+                <a:solidFill>
+                  <a:srgbClr val="5C4826"/>
+                </a:solidFill>
+              </a:rPr>
+              <a:t xml:space="preserve">ENGINEER A</a:t>
+            </a:r>
+          </a:p>
+          <a:p>
+            <a:pPr algn="ctr">
+              <a:spcAft>
+                <a:spcPts val="0"/>
+              </a:spcAft>
+              <a:buNone/>
+            </a:pPr>
+            <a:r>
+              <a:rPr lang="en-US" sz="1100" b="0" i="1" dirty="0">
+                <a:solidFill>
+                  <a:srgbClr val="555960"/>
+                </a:solidFill>
+              </a:rPr>
+              <a:t xml:space="preserve">intent · context · judgment</a:t>
+            </a:r>
+          </a:p>
+        </p:txBody>
+      </p:sp>
+      <p:cxnSp>
+        <p:nvCxnSpPr>
+          <p:cNvPr id="120" name="Hop1"/>
+          <p:cNvCxnSpPr/>
+          <p:nvPr/>
+        </p:nvCxnSpPr>
+        <p:spPr>
+          <a:xfrm>
+            <a:off x="2468880" y="3566160"/>
+            <a:ext cx="960120" cy="0"/>
+          </a:xfrm>
+          <a:prstGeom prst="straightConnector1">
+            <a:avLst/>
+          </a:prstGeom>
+          <a:ln w="28575">
+            <a:solidFill>
+              <a:srgbClr val="8E6F3E"/>
+            </a:solidFill>
+            <a:tailEnd type="triangle" w="med" len="med"/>
+          </a:ln>
+        </p:spPr>
+      </p:cxnSp>
+      <p:sp>
+        <p:nvSpPr>
+          <p:cNvPr id="111" name="Representation"/>
+          <p:cNvSpPr txBox="1"/>
+          <p:nvPr/>
+        </p:nvSpPr>
+        <p:spPr>
+          <a:xfrm>
+            <a:off x="3520440" y="3063240"/>
+            <a:ext cx="2103120" cy="1005840"/>
+          </a:xfrm>
+          <a:prstGeom prst="rect">
+            <a:avLst/>
+          </a:prstGeom>
+          <a:solidFill>
+            <a:srgbClr val="F5F1E8"/>
+          </a:solidFill>
+          <a:ln w="19050">
+            <a:solidFill>
+              <a:srgbClr val="8E6F3E"/>
+            </a:solidFill>
+          </a:ln>
+        </p:spPr>
+        <p:txBody>
+          <a:bodyPr wrap="square" lIns="27432" tIns="22860" rIns="27432" bIns="22860" anchor="ctr"/>
+          <a:lstStyle/>
+          <a:p>
+            <a:pPr algn="ctr">
+              <a:spcAft>
+                <a:spcPts val="0"/>
+              </a:spcAft>
+              <a:buNone/>
+            </a:pPr>
+            <a:r>
+              <a:rPr lang="en-US" sz="1800" b="1" i="0" dirty="0">
+                <a:solidFill>
+                  <a:srgbClr val="5C4826"/>
+                </a:solidFill>
+              </a:rPr>
+              <a:t xml:space="preserve">REPRESENTATION</a:t>
+            </a:r>
+          </a:p>
+        </p:txBody>
+      </p:sp>
+      <p:cxnSp>
+        <p:nvCxnSpPr>
+          <p:cNvPr id="121" name="Hop2"/>
+          <p:cNvCxnSpPr/>
+          <p:nvPr/>
+        </p:nvCxnSpPr>
+        <p:spPr>
+          <a:xfrm>
+            <a:off x="5715000" y="3566160"/>
+            <a:ext cx="960120" cy="0"/>
+          </a:xfrm>
+          <a:prstGeom prst="straightConnector1">
+            <a:avLst/>
+          </a:prstGeom>
+          <a:ln w="28575">
+            <a:solidFill>
+              <a:srgbClr val="8E6F3E"/>
+            </a:solidFill>
+            <a:tailEnd type="triangle" w="med" len="med"/>
+          </a:ln>
+        </p:spPr>
+      </p:cxnSp>
+      <p:sp>
+        <p:nvSpPr>
+          <p:cNvPr id="112" name="EngineerB"/>
+          <p:cNvSpPr txBox="1"/>
+          <p:nvPr/>
+        </p:nvSpPr>
+        <p:spPr>
+          <a:xfrm>
+            <a:off x="6766560" y="3063240"/>
+            <a:ext cx="2103120" cy="1005840"/>
+          </a:xfrm>
+          <a:prstGeom prst="rect">
+            <a:avLst/>
+          </a:prstGeom>
+          <a:solidFill>
+            <a:srgbClr val="F5F1E8"/>
+          </a:solidFill>
+          <a:ln w="12700">
+            <a:solidFill>
+              <a:srgbClr val="C9B991"/>
+            </a:solidFill>
+          </a:ln>
+        </p:spPr>
+        <p:txBody>
+          <a:bodyPr wrap="square" lIns="27432" tIns="22860" rIns="27432" bIns="22860" anchor="ctr"/>
+          <a:lstStyle/>
+          <a:p>
+            <a:pPr algn="ctr">
+              <a:spcAft>
+                <a:spcPts val="0"/>
+              </a:spcAft>
+              <a:buNone/>
+            </a:pPr>
+            <a:r>
+              <a:rPr lang="en-US" sz="1800" b="1" i="0" dirty="0">
+                <a:solidFill>
+                  <a:srgbClr val="5C4826"/>
+                </a:solidFill>
+              </a:rPr>
+              <a:t xml:space="preserve">ENGINEER B</a:t>
+            </a:r>
+          </a:p>
+        </p:txBody>
+      </p:sp>
+      <p:sp>
+        <p:nvSpPr>
+          <p:cNvPr id="140" name="Claim"/>
+          <p:cNvSpPr txBox="1"/>
+          <p:nvPr/>
+        </p:nvSpPr>
+        <p:spPr>
+          <a:xfrm>
+            <a:off x="274320" y="4297680"/>
+            <a:ext cx="8595360" cy="603504"/>
+          </a:xfrm>
+          <a:prstGeom prst="rect">
+            <a:avLst/>
+          </a:prstGeom>
+          <a:noFill/>
+          <a:ln>
+            <a:noFill/>
+          </a:ln>
+        </p:spPr>
+        <p:txBody>
+          <a:bodyPr wrap="square" lIns="0" tIns="0" rIns="0" bIns="0" anchor="ctr"/>
+          <a:lstStyle/>
+          <a:p>
+            <a:pPr algn="ctr">
+              <a:spcAft>
+                <a:spcPts val="0"/>
+              </a:spcAft>
+              <a:buNone/>
+            </a:pPr>
+            <a:r>
+              <a:rPr lang="en-US" sz="1800" b="1" i="0" dirty="0">
+                <a:solidFill>
+                  <a:srgbClr val="5C4826"/>
+                </a:solidFill>
+              </a:rPr>
+              <a:t xml:space="preserve">Delegation requires consequential knowledge to survive encoding and interpretation.</a:t>
+            </a:r>
+          </a:p>
+        </p:txBody>
+      </p:sp>
+      <p:sp>
+        <p:nvSpPr>
+          <p:cNvPr id="150" name="Q3"/>
+          <p:cNvSpPr txBox="1"/>
+          <p:nvPr/>
+        </p:nvSpPr>
+        <p:spPr>
+          <a:xfrm>
+            <a:off x="1463040" y="5138928"/>
+            <a:ext cx="6217920" cy="822960"/>
+          </a:xfrm>
+          <a:prstGeom prst="rect">
+            <a:avLst/>
+          </a:prstGeom>
+          <a:solidFill>
+            <a:srgbClr val="FBF8F2"/>
+          </a:solidFill>
+          <a:ln w="19050">
+            <a:solidFill>
+              <a:srgbClr val="8E6F3E"/>
+            </a:solidFill>
+          </a:ln>
+        </p:spPr>
+        <p:txBody>
+          <a:bodyPr wrap="square" lIns="27432" tIns="22860" rIns="27432" bIns="22860" anchor="ctr"/>
+          <a:lstStyle/>
+          <a:p>
+            <a:pPr algn="ctr">
+              <a:spcAft>
+                <a:spcPts val="0"/>
+              </a:spcAft>
+              <a:buNone/>
+            </a:pPr>
+            <a:r>
+              <a:rPr lang="en-US" sz="2400" b="1" i="0" dirty="0">
+                <a:solidFill>
+                  <a:srgbClr val="8E6F3E"/>
+                </a:solidFill>
+              </a:rPr>
+              <a:t xml:space="preserve">And does GenAI change this?</a:t>
+            </a:r>
+          </a:p>
+        </p:txBody>
+      </p:sp>
     </p:spTree>
   </p:cSld>
   <p:clrMapOvr>
     <a:masterClrMapping/>
   </p:clrMapOvr>
+  <p:timing>
+    <p:tnLst>
+      <p:par>
+        <p:cTn id="1" dur="indefinite" restart="never" nodeType="tmRoot">
+          <p:childTnLst>
+            <p:seq concurrent="1" nextAc="seek">
+              <p:cTn id="2" dur="indefinite" nodeType="mainSeq">
+                <p:childTnLst>
+                  <p:par>
+                    <p:cTn id="3" fill="hold">
+                      <p:stCondLst>
+                        <p:cond delay="indefinite"/>
+                      </p:stCondLst>
+                      <p:childTnLst>
+                        <p:par>
+                          <p:cTn id="4" fill="hold">
+                            <p:stCondLst>
+                              <p:cond delay="0"/>
+                            </p:stCondLst>
+                            <p:childTnLst>
+                              <p:par>
+                                <p:cTn id="5" presetID="10" presetClass="entr" presetSubtype="0" fill="hold" nodeType="clickEffect">
+                                  <p:stCondLst>
+                                    <p:cond delay="0"/>
+                                  </p:stCondLst>
+                                  <p:childTnLst>
+                                    <p:set>
+                                      <p:cBhvr>
+                                        <p:cTn id="6" dur="1" fill="hold">
+                                          <p:stCondLst>
+                                            <p:cond delay="0"/>
+                                          </p:stCondLst>
+                                        </p:cTn>
+                                        <p:tgtEl>
+                                          <p:spTgt spid="100"/>
+                                        </p:tgtEl>
+                                        <p:attrNameLst>
+                                          <p:attrName>style.visibility</p:attrName>
+                                        </p:attrNameLst>
+                                      </p:cBhvr>
+                                      <p:to>
+                                        <p:strVal val="visible"/>
+                                      </p:to>
+                                    </p:set>
+                                    <p:animEffect transition="in" filter="fade">
+                                      <p:cBhvr>
+                                        <p:cTn id="7" dur="500"/>
+                                        <p:tgtEl>
+                                          <p:spTgt spid="100"/>
+                                        </p:tgtEl>
+                                      </p:cBhvr>
+                                    </p:animEffect>
+                                  </p:childTnLst>
+                                </p:cTn>
+                              </p:par>
+                            </p:childTnLst>
+                          </p:cTn>
+                        </p:par>
+                      </p:childTnLst>
+                    </p:cTn>
+                  </p:par>
+                  <p:par>
+                    <p:cTn id="8" fill="hold">
+                      <p:stCondLst>
+                        <p:cond delay="indefinite"/>
+                      </p:stCondLst>
+                      <p:childTnLst>
+                        <p:par>
+                          <p:cTn id="9" fill="hold">
+                            <p:stCondLst>
+                              <p:cond delay="0"/>
+                            </p:stCondLst>
+                            <p:childTnLst>
+                              <p:par>
+                                <p:cTn id="10" presetID="10" presetClass="entr" presetSubtype="0" fill="hold" nodeType="clickEffect">
+                                  <p:stCondLst>
+                                    <p:cond delay="0"/>
+                                  </p:stCondLst>
+                                  <p:childTnLst>
+                                    <p:set>
+                                      <p:cBhvr>
+                                        <p:cTn id="11" dur="1" fill="hold">
+                                          <p:stCondLst>
+                                            <p:cond delay="0"/>
+                                          </p:stCondLst>
+                                        </p:cTn>
+                                        <p:tgtEl>
+                                          <p:spTgt spid="101"/>
+                                        </p:tgtEl>
+                                        <p:attrNameLst>
+                                          <p:attrName>style.visibility</p:attrName>
+                                        </p:attrNameLst>
+                                      </p:cBhvr>
+                                      <p:to>
+                                        <p:strVal val="visible"/>
+                                      </p:to>
+                                    </p:set>
+                                    <p:animEffect transition="in" filter="fade">
+                                      <p:cBhvr>
+                                        <p:cTn id="12" dur="500"/>
+                                        <p:tgtEl>
+                                          <p:spTgt spid="101"/>
+                                        </p:tgtEl>
+                                      </p:cBhvr>
+                                    </p:animEffect>
+                                  </p:childTnLst>
+                                </p:cTn>
+                              </p:par>
+                            </p:childTnLst>
+                          </p:cTn>
+                        </p:par>
+                      </p:childTnLst>
+                    </p:cTn>
+                  </p:par>
+                  <p:par>
+                    <p:cTn id="13" fill="hold">
+                      <p:stCondLst>
+                        <p:cond delay="indefinite"/>
+                      </p:stCondLst>
+                      <p:childTnLst>
+                        <p:par>
+                          <p:cTn id="14" fill="hold">
+                            <p:stCondLst>
+                              <p:cond delay="0"/>
+                            </p:stCondLst>
+                            <p:childTnLst>
+                              <p:par>
+                                <p:cTn id="15" presetID="10" presetClass="entr" presetSubtype="0" fill="hold" nodeType="clickEffect">
+                                  <p:stCondLst>
+                                    <p:cond delay="0"/>
+                                  </p:stCondLst>
+                                  <p:childTnLst>
+                                    <p:set>
+                                      <p:cBhvr>
+                                        <p:cTn id="16" dur="1" fill="hold">
+                                          <p:stCondLst>
+                                            <p:cond delay="0"/>
+                                          </p:stCondLst>
+                                        </p:cTn>
+                                        <p:tgtEl>
+                                          <p:spTgt spid="130"/>
+                                        </p:tgtEl>
+                                        <p:attrNameLst>
+                                          <p:attrName>style.visibility</p:attrName>
+                                        </p:attrNameLst>
+                                      </p:cBhvr>
+                                      <p:to>
+                                        <p:strVal val="visible"/>
+                                      </p:to>
+                                    </p:set>
+                                    <p:animEffect transition="in" filter="fade">
+                                      <p:cBhvr>
+                                        <p:cTn id="17" dur="500"/>
+                                        <p:tgtEl>
+                                          <p:spTgt spid="130"/>
+                                        </p:tgtEl>
+                                      </p:cBhvr>
+                                    </p:animEffect>
+                                  </p:childTnLst>
+                                </p:cTn>
+                              </p:par>
+                              <p:par>
+                                <p:cTn id="18" presetID="10" presetClass="entr" presetSubtype="0" fill="hold" nodeType="withEffect">
+                                  <p:stCondLst>
+                                    <p:cond delay="0"/>
+                                  </p:stCondLst>
+                                  <p:childTnLst>
+                                    <p:set>
+                                      <p:cBhvr>
+                                        <p:cTn id="19" dur="1" fill="hold">
+                                          <p:stCondLst>
+                                            <p:cond delay="0"/>
+                                          </p:stCondLst>
+                                        </p:cTn>
+                                        <p:tgtEl>
+                                          <p:spTgt spid="110"/>
+                                        </p:tgtEl>
+                                        <p:attrNameLst>
+                                          <p:attrName>style.visibility</p:attrName>
+                                        </p:attrNameLst>
+                                      </p:cBhvr>
+                                      <p:to>
+                                        <p:strVal val="visible"/>
+                                      </p:to>
+                                    </p:set>
+                                    <p:animEffect transition="in" filter="fade">
+                                      <p:cBhvr>
+                                        <p:cTn id="20" dur="500"/>
+                                        <p:tgtEl>
+                                          <p:spTgt spid="110"/>
+                                        </p:tgtEl>
+                                      </p:cBhvr>
+                                    </p:animEffect>
+                                  </p:childTnLst>
+                                </p:cTn>
+                              </p:par>
+                              <p:par>
+                                <p:cTn id="21" presetID="10" presetClass="entr" presetSubtype="0" fill="hold" nodeType="withEffect">
+                                  <p:stCondLst>
+                                    <p:cond delay="0"/>
+                                  </p:stCondLst>
+                                  <p:childTnLst>
+                                    <p:set>
+                                      <p:cBhvr>
+                                        <p:cTn id="22" dur="1" fill="hold">
+                                          <p:stCondLst>
+                                            <p:cond delay="0"/>
+                                          </p:stCondLst>
+                                        </p:cTn>
+                                        <p:tgtEl>
+                                          <p:spTgt spid="120"/>
+                                        </p:tgtEl>
+                                        <p:attrNameLst>
+                                          <p:attrName>style.visibility</p:attrName>
+                                        </p:attrNameLst>
+                                      </p:cBhvr>
+                                      <p:to>
+                                        <p:strVal val="visible"/>
+                                      </p:to>
+                                    </p:set>
+                                    <p:animEffect transition="in" filter="fade">
+                                      <p:cBhvr>
+                                        <p:cTn id="23" dur="500"/>
+                                        <p:tgtEl>
+                                          <p:spTgt spid="120"/>
+                                        </p:tgtEl>
+                                      </p:cBhvr>
+                                    </p:animEffect>
+                                  </p:childTnLst>
+                                </p:cTn>
+                              </p:par>
+                              <p:par>
+                                <p:cTn id="24" presetID="10" presetClass="entr" presetSubtype="0" fill="hold" nodeType="withEffect">
+                                  <p:stCondLst>
+                                    <p:cond delay="0"/>
+                                  </p:stCondLst>
+                                  <p:childTnLst>
+                                    <p:set>
+                                      <p:cBhvr>
+                                        <p:cTn id="25" dur="1" fill="hold">
+                                          <p:stCondLst>
+                                            <p:cond delay="0"/>
+                                          </p:stCondLst>
+                                        </p:cTn>
+                                        <p:tgtEl>
+                                          <p:spTgt spid="111"/>
+                                        </p:tgtEl>
+                                        <p:attrNameLst>
+                                          <p:attrName>style.visibility</p:attrName>
+                                        </p:attrNameLst>
+                                      </p:cBhvr>
+                                      <p:to>
+                                        <p:strVal val="visible"/>
+                                      </p:to>
+                                    </p:set>
+                                    <p:animEffect transition="in" filter="fade">
+                                      <p:cBhvr>
+                                        <p:cTn id="26" dur="500"/>
+                                        <p:tgtEl>
+                                          <p:spTgt spid="111"/>
+                                        </p:tgtEl>
+                                      </p:cBhvr>
+                                    </p:animEffect>
+                                  </p:childTnLst>
+                                </p:cTn>
+                              </p:par>
+                              <p:par>
+                                <p:cTn id="27" presetID="10" presetClass="entr" presetSubtype="0" fill="hold" nodeType="withEffect">
+                                  <p:stCondLst>
+                                    <p:cond delay="0"/>
+                                  </p:stCondLst>
+                                  <p:childTnLst>
+                                    <p:set>
+                                      <p:cBhvr>
+                                        <p:cTn id="28" dur="1" fill="hold">
+                                          <p:stCondLst>
+                                            <p:cond delay="0"/>
+                                          </p:stCondLst>
+                                        </p:cTn>
+                                        <p:tgtEl>
+                                          <p:spTgt spid="121"/>
+                                        </p:tgtEl>
+                                        <p:attrNameLst>
+                                          <p:attrName>style.visibility</p:attrName>
+                                        </p:attrNameLst>
+                                      </p:cBhvr>
+                                      <p:to>
+                                        <p:strVal val="visible"/>
+                                      </p:to>
+                                    </p:set>
+                                    <p:animEffect transition="in" filter="fade">
+                                      <p:cBhvr>
+                                        <p:cTn id="29" dur="500"/>
+                                        <p:tgtEl>
+                                          <p:spTgt spid="121"/>
+                                        </p:tgtEl>
+                                      </p:cBhvr>
+                                    </p:animEffect>
+                                  </p:childTnLst>
+                                </p:cTn>
+                              </p:par>
+                              <p:par>
+                                <p:cTn id="30" presetID="10" presetClass="entr" presetSubtype="0" fill="hold" nodeType="withEffect">
+                                  <p:stCondLst>
+                                    <p:cond delay="0"/>
+                                  </p:stCondLst>
+                                  <p:childTnLst>
+                                    <p:set>
+                                      <p:cBhvr>
+                                        <p:cTn id="31" dur="1" fill="hold">
+                                          <p:stCondLst>
+                                            <p:cond delay="0"/>
+                                          </p:stCondLst>
+                                        </p:cTn>
+                                        <p:tgtEl>
+                                          <p:spTgt spid="112"/>
+                                        </p:tgtEl>
+                                        <p:attrNameLst>
+                                          <p:attrName>style.visibility</p:attrName>
+                                        </p:attrNameLst>
+                                      </p:cBhvr>
+                                      <p:to>
+                                        <p:strVal val="visible"/>
+                                      </p:to>
+                                    </p:set>
+                                    <p:animEffect transition="in" filter="fade">
+                                      <p:cBhvr>
+                                        <p:cTn id="32" dur="500"/>
+                                        <p:tgtEl>
+                                          <p:spTgt spid="112"/>
+                                        </p:tgtEl>
+                                      </p:cBhvr>
+                                    </p:animEffect>
+                                  </p:childTnLst>
+                                </p:cTn>
+                              </p:par>
+                              <p:par>
+                                <p:cTn id="33" presetID="10" presetClass="entr" presetSubtype="0" fill="hold" nodeType="withEffect">
+                                  <p:stCondLst>
+                                    <p:cond delay="0"/>
+                                  </p:stCondLst>
+                                  <p:childTnLst>
+                                    <p:set>
+                                      <p:cBhvr>
+                                        <p:cTn id="34" dur="1" fill="hold">
+                                          <p:stCondLst>
+                                            <p:cond delay="0"/>
+                                          </p:stCondLst>
+                                        </p:cTn>
+                                        <p:tgtEl>
+                                          <p:spTgt spid="131"/>
+                                        </p:tgtEl>
+                                        <p:attrNameLst>
+                                          <p:attrName>style.visibility</p:attrName>
+                                        </p:attrNameLst>
+                                      </p:cBhvr>
+                                      <p:to>
+                                        <p:strVal val="visible"/>
+                                      </p:to>
+                                    </p:set>
+                                    <p:animEffect transition="in" filter="fade">
+                                      <p:cBhvr>
+                                        <p:cTn id="35" dur="500"/>
+                                        <p:tgtEl>
+                                          <p:spTgt spid="131"/>
+                                        </p:tgtEl>
+                                      </p:cBhvr>
+                                    </p:animEffect>
+                                  </p:childTnLst>
+                                </p:cTn>
+                              </p:par>
+                              <p:par>
+                                <p:cTn id="36" presetID="10" presetClass="entr" presetSubtype="0" fill="hold" nodeType="withEffect">
+                                  <p:stCondLst>
+                                    <p:cond delay="0"/>
+                                  </p:stCondLst>
+                                  <p:childTnLst>
+                                    <p:set>
+                                      <p:cBhvr>
+                                        <p:cTn id="37" dur="1" fill="hold">
+                                          <p:stCondLst>
+                                            <p:cond delay="0"/>
+                                          </p:stCondLst>
+                                        </p:cTn>
+                                        <p:tgtEl>
+                                          <p:spTgt spid="140"/>
+                                        </p:tgtEl>
+                                        <p:attrNameLst>
+                                          <p:attrName>style.visibility</p:attrName>
+                                        </p:attrNameLst>
+                                      </p:cBhvr>
+                                      <p:to>
+                                        <p:strVal val="visible"/>
+                                      </p:to>
+                                    </p:set>
+                                    <p:animEffect transition="in" filter="fade">
+                                      <p:cBhvr>
+                                        <p:cTn id="38" dur="500"/>
+                                        <p:tgtEl>
+                                          <p:spTgt spid="140"/>
+                                        </p:tgtEl>
+                                      </p:cBhvr>
+                                    </p:animEffect>
+                                  </p:childTnLst>
+                                </p:cTn>
+                              </p:par>
+                            </p:childTnLst>
+                          </p:cTn>
+                        </p:par>
+                      </p:childTnLst>
+                    </p:cTn>
+                  </p:par>
+                  <p:par>
+                    <p:cTn id="39" fill="hold">
+                      <p:stCondLst>
+                        <p:cond delay="indefinite"/>
+                      </p:stCondLst>
+                      <p:childTnLst>
+                        <p:par>
+                          <p:cTn id="40" fill="hold">
+                            <p:stCondLst>
+                              <p:cond delay="0"/>
+                            </p:stCondLst>
+                            <p:childTnLst>
+                              <p:par>
+                                <p:cTn id="41" presetID="10" presetClass="entr" presetSubtype="0" fill="hold" nodeType="clickEffect">
+                                  <p:stCondLst>
+                                    <p:cond delay="0"/>
+                                  </p:stCondLst>
+                                  <p:childTnLst>
+                                    <p:set>
+                                      <p:cBhvr>
+                                        <p:cTn id="42" dur="1" fill="hold">
+                                          <p:stCondLst>
+                                            <p:cond delay="0"/>
+                                          </p:stCondLst>
+                                        </p:cTn>
+                                        <p:tgtEl>
+                                          <p:spTgt spid="150"/>
+                                        </p:tgtEl>
+                                        <p:attrNameLst>
+                                          <p:attrName>style.visibility</p:attrName>
+                                        </p:attrNameLst>
+                                      </p:cBhvr>
+                                      <p:to>
+                                        <p:strVal val="visible"/>
+                                      </p:to>
+                                    </p:set>
+                                    <p:animEffect transition="in" filter="fade">
+                                      <p:cBhvr>
+                                        <p:cTn id="43" dur="500"/>
+                                        <p:tgtEl>
+                                          <p:spTgt spid="150"/>
+                                        </p:tgtEl>
+                                      </p:cBhvr>
+                                    </p:animEffect>
+                                  </p:childTnLst>
+                                </p:cTn>
+                              </p:par>
+                            </p:childTnLst>
+                          </p:cTn>
+                        </p:par>
+                      </p:childTnLst>
+                    </p:cTn>
+                  </p:par>
+                </p:childTnLst>
+              </p:cTn>
+              <p:prevCondLst>
+                <p:cond evt="onPrev" delay="0">
+                  <p:tgtEl>
+                    <p:sldTgt/>
+                  </p:tgtEl>
+                </p:cond>
+              </p:prevCondLst>
+              <p:nextCondLst>
+                <p:cond evt="onNext" delay="0">
+                  <p:tgtEl>
+                    <p:sldTgt/>
+                  </p:tgtEl>
+                </p:cond>
+              </p:nextCondLst>
+            </p:seq>
+          </p:childTnLst>
+        </p:cTn>
+      </p:par>
+    </p:tnLst>
+  </p:timing>
 </p:sld>
 </file>
 

--- a/course/lectures/act-2-delegation-and-control/02-modeling/2-2-Modeling-1-Purposeful-Reduction.pptx
+++ b/course/lectures/act-2-delegation-and-control/02-modeling/2-2-Modeling-1-Purposeful-Reduction.pptx
@@ -18321,7 +18321,7 @@
                                           </p:stCondLst>
                                         </p:cTn>
                                         <p:tgtEl>
-                                          <p:spTgt spid="100"/>
+                                          <p:spTgt spid="101"/>
                                         </p:tgtEl>
                                         <p:attrNameLst>
                                           <p:attrName>style.visibility</p:attrName>
@@ -18335,7 +18335,7 @@
                                       <p:cBhvr>
                                         <p:cTn id="7" dur="500"/>
                                         <p:tgtEl>
-                                          <p:spTgt spid="100"/>
+                                          <p:spTgt spid="101"/>
                                         </p:tgtEl>
                                       </p:cBhvr>
                                     </p:animEffect>
@@ -18374,7 +18374,7 @@
                                           </p:stCondLst>
                                         </p:cTn>
                                         <p:tgtEl>
-                                          <p:spTgt spid="101"/>
+                                          <p:spTgt spid="130"/>
                                         </p:tgtEl>
                                         <p:attrNameLst>
                                           <p:attrName>style.visibility</p:attrName>
@@ -18388,59 +18388,6 @@
                                       <p:cBhvr>
                                         <p:cTn id="12" dur="500"/>
                                         <p:tgtEl>
-                                          <p:spTgt spid="101"/>
-                                        </p:tgtEl>
-                                      </p:cBhvr>
-                                    </p:animEffect>
-                                  </p:childTnLst>
-                                </p:cTn>
-                              </p:par>
-                            </p:childTnLst>
-                          </p:cTn>
-                        </p:par>
-                      </p:childTnLst>
-                    </p:cTn>
-                  </p:par>
-                  <p:par>
-                    <p:cTn id="13" fill="hold">
-                      <p:stCondLst>
-                        <p:cond delay="indefinite"/>
-                      </p:stCondLst>
-                      <p:childTnLst>
-                        <p:par>
-                          <p:cTn id="14" fill="hold">
-                            <p:stCondLst>
-                              <p:cond delay="0"/>
-                            </p:stCondLst>
-                            <p:childTnLst>
-                              <p:par>
-                                <p:cTn id="15" presetID="10" presetClass="entr" presetSubtype="0" fill="hold" nodeType="clickEffect">
-                                  <p:stCondLst>
-                                    <p:cond delay="0"/>
-                                  </p:stCondLst>
-                                  <p:childTnLst>
-                                    <p:set>
-                                      <p:cBhvr>
-                                        <p:cTn id="16" dur="1" fill="hold">
-                                          <p:stCondLst>
-                                            <p:cond delay="0"/>
-                                          </p:stCondLst>
-                                        </p:cTn>
-                                        <p:tgtEl>
-                                          <p:spTgt spid="130"/>
-                                        </p:tgtEl>
-                                        <p:attrNameLst>
-                                          <p:attrName>style.visibility</p:attrName>
-                                        </p:attrNameLst>
-                                      </p:cBhvr>
-                                      <p:to>
-                                        <p:strVal val="visible"/>
-                                      </p:to>
-                                    </p:set>
-                                    <p:animEffect transition="in" filter="fade">
-                                      <p:cBhvr>
-                                        <p:cTn id="17" dur="500"/>
-                                        <p:tgtEl>
                                           <p:spTgt spid="130"/>
                                         </p:tgtEl>
                                       </p:cBhvr>
@@ -18449,14 +18396,14 @@
                                 </p:cTn>
                               </p:par>
                               <p:par>
-                                <p:cTn id="18" presetID="10" presetClass="entr" presetSubtype="0" fill="hold" nodeType="withEffect">
+                                <p:cTn id="13" presetID="10" presetClass="entr" presetSubtype="0" fill="hold" nodeType="withEffect">
                                   <p:stCondLst>
                                     <p:cond delay="0"/>
                                   </p:stCondLst>
                                   <p:childTnLst>
                                     <p:set>
                                       <p:cBhvr>
-                                        <p:cTn id="19" dur="1" fill="hold">
+                                        <p:cTn id="14" dur="1" fill="hold">
                                           <p:stCondLst>
                                             <p:cond delay="0"/>
                                           </p:stCondLst>
@@ -18474,7 +18421,7 @@
                                     </p:set>
                                     <p:animEffect transition="in" filter="fade">
                                       <p:cBhvr>
-                                        <p:cTn id="20" dur="500"/>
+                                        <p:cTn id="15" dur="500"/>
                                         <p:tgtEl>
                                           <p:spTgt spid="110"/>
                                         </p:tgtEl>
@@ -18484,14 +18431,14 @@
                                 </p:cTn>
                               </p:par>
                               <p:par>
-                                <p:cTn id="21" presetID="10" presetClass="entr" presetSubtype="0" fill="hold" nodeType="withEffect">
+                                <p:cTn id="16" presetID="10" presetClass="entr" presetSubtype="0" fill="hold" nodeType="withEffect">
                                   <p:stCondLst>
                                     <p:cond delay="0"/>
                                   </p:stCondLst>
                                   <p:childTnLst>
                                     <p:set>
                                       <p:cBhvr>
-                                        <p:cTn id="22" dur="1" fill="hold">
+                                        <p:cTn id="17" dur="1" fill="hold">
                                           <p:stCondLst>
                                             <p:cond delay="0"/>
                                           </p:stCondLst>
@@ -18509,7 +18456,7 @@
                                     </p:set>
                                     <p:animEffect transition="in" filter="fade">
                                       <p:cBhvr>
-                                        <p:cTn id="23" dur="500"/>
+                                        <p:cTn id="18" dur="500"/>
                                         <p:tgtEl>
                                           <p:spTgt spid="120"/>
                                         </p:tgtEl>
@@ -18519,14 +18466,14 @@
                                 </p:cTn>
                               </p:par>
                               <p:par>
-                                <p:cTn id="24" presetID="10" presetClass="entr" presetSubtype="0" fill="hold" nodeType="withEffect">
+                                <p:cTn id="19" presetID="10" presetClass="entr" presetSubtype="0" fill="hold" nodeType="withEffect">
                                   <p:stCondLst>
                                     <p:cond delay="0"/>
                                   </p:stCondLst>
                                   <p:childTnLst>
                                     <p:set>
                                       <p:cBhvr>
-                                        <p:cTn id="25" dur="1" fill="hold">
+                                        <p:cTn id="20" dur="1" fill="hold">
                                           <p:stCondLst>
                                             <p:cond delay="0"/>
                                           </p:stCondLst>
@@ -18544,7 +18491,7 @@
                                     </p:set>
                                     <p:animEffect transition="in" filter="fade">
                                       <p:cBhvr>
-                                        <p:cTn id="26" dur="500"/>
+                                        <p:cTn id="21" dur="500"/>
                                         <p:tgtEl>
                                           <p:spTgt spid="111"/>
                                         </p:tgtEl>
@@ -18554,14 +18501,14 @@
                                 </p:cTn>
                               </p:par>
                               <p:par>
-                                <p:cTn id="27" presetID="10" presetClass="entr" presetSubtype="0" fill="hold" nodeType="withEffect">
+                                <p:cTn id="22" presetID="10" presetClass="entr" presetSubtype="0" fill="hold" nodeType="withEffect">
                                   <p:stCondLst>
                                     <p:cond delay="0"/>
                                   </p:stCondLst>
                                   <p:childTnLst>
                                     <p:set>
                                       <p:cBhvr>
-                                        <p:cTn id="28" dur="1" fill="hold">
+                                        <p:cTn id="23" dur="1" fill="hold">
                                           <p:stCondLst>
                                             <p:cond delay="0"/>
                                           </p:stCondLst>
@@ -18579,7 +18526,7 @@
                                     </p:set>
                                     <p:animEffect transition="in" filter="fade">
                                       <p:cBhvr>
-                                        <p:cTn id="29" dur="500"/>
+                                        <p:cTn id="24" dur="500"/>
                                         <p:tgtEl>
                                           <p:spTgt spid="121"/>
                                         </p:tgtEl>
@@ -18589,14 +18536,14 @@
                                 </p:cTn>
                               </p:par>
                               <p:par>
-                                <p:cTn id="30" presetID="10" presetClass="entr" presetSubtype="0" fill="hold" nodeType="withEffect">
+                                <p:cTn id="25" presetID="10" presetClass="entr" presetSubtype="0" fill="hold" nodeType="withEffect">
                                   <p:stCondLst>
                                     <p:cond delay="0"/>
                                   </p:stCondLst>
                                   <p:childTnLst>
                                     <p:set>
                                       <p:cBhvr>
-                                        <p:cTn id="31" dur="1" fill="hold">
+                                        <p:cTn id="26" dur="1" fill="hold">
                                           <p:stCondLst>
                                             <p:cond delay="0"/>
                                           </p:stCondLst>
@@ -18614,7 +18561,7 @@
                                     </p:set>
                                     <p:animEffect transition="in" filter="fade">
                                       <p:cBhvr>
-                                        <p:cTn id="32" dur="500"/>
+                                        <p:cTn id="27" dur="500"/>
                                         <p:tgtEl>
                                           <p:spTgt spid="112"/>
                                         </p:tgtEl>
@@ -18624,14 +18571,14 @@
                                 </p:cTn>
                               </p:par>
                               <p:par>
-                                <p:cTn id="33" presetID="10" presetClass="entr" presetSubtype="0" fill="hold" nodeType="withEffect">
+                                <p:cTn id="28" presetID="10" presetClass="entr" presetSubtype="0" fill="hold" nodeType="withEffect">
                                   <p:stCondLst>
                                     <p:cond delay="0"/>
                                   </p:stCondLst>
                                   <p:childTnLst>
                                     <p:set>
                                       <p:cBhvr>
-                                        <p:cTn id="34" dur="1" fill="hold">
+                                        <p:cTn id="29" dur="1" fill="hold">
                                           <p:stCondLst>
                                             <p:cond delay="0"/>
                                           </p:stCondLst>
@@ -18649,7 +18596,7 @@
                                     </p:set>
                                     <p:animEffect transition="in" filter="fade">
                                       <p:cBhvr>
-                                        <p:cTn id="35" dur="500"/>
+                                        <p:cTn id="30" dur="500"/>
                                         <p:tgtEl>
                                           <p:spTgt spid="131"/>
                                         </p:tgtEl>
@@ -18659,14 +18606,14 @@
                                 </p:cTn>
                               </p:par>
                               <p:par>
-                                <p:cTn id="36" presetID="10" presetClass="entr" presetSubtype="0" fill="hold" nodeType="withEffect">
+                                <p:cTn id="31" presetID="10" presetClass="entr" presetSubtype="0" fill="hold" nodeType="withEffect">
                                   <p:stCondLst>
                                     <p:cond delay="0"/>
                                   </p:stCondLst>
                                   <p:childTnLst>
                                     <p:set>
                                       <p:cBhvr>
-                                        <p:cTn id="37" dur="1" fill="hold">
+                                        <p:cTn id="32" dur="1" fill="hold">
                                           <p:stCondLst>
                                             <p:cond delay="0"/>
                                           </p:stCondLst>
@@ -18684,7 +18631,7 @@
                                     </p:set>
                                     <p:animEffect transition="in" filter="fade">
                                       <p:cBhvr>
-                                        <p:cTn id="38" dur="500"/>
+                                        <p:cTn id="33" dur="500"/>
                                         <p:tgtEl>
                                           <p:spTgt spid="140"/>
                                         </p:tgtEl>
@@ -18700,26 +18647,26 @@
                     </p:cTn>
                   </p:par>
                   <p:par>
-                    <p:cTn id="39" fill="hold">
+                    <p:cTn id="34" fill="hold">
                       <p:stCondLst>
                         <p:cond delay="indefinite"/>
                       </p:stCondLst>
                       <p:childTnLst>
                         <p:par>
-                          <p:cTn id="40" fill="hold">
+                          <p:cTn id="35" fill="hold">
                             <p:stCondLst>
                               <p:cond delay="0"/>
                             </p:stCondLst>
                             <p:childTnLst>
                               <p:par>
-                                <p:cTn id="41" presetID="10" presetClass="entr" presetSubtype="0" fill="hold" nodeType="clickEffect">
+                                <p:cTn id="36" presetID="10" presetClass="entr" presetSubtype="0" fill="hold" nodeType="clickEffect">
                                   <p:stCondLst>
                                     <p:cond delay="0"/>
                                   </p:stCondLst>
                                   <p:childTnLst>
                                     <p:set>
                                       <p:cBhvr>
-                                        <p:cTn id="42" dur="1" fill="hold">
+                                        <p:cTn id="37" dur="1" fill="hold">
                                           <p:stCondLst>
                                             <p:cond delay="0"/>
                                           </p:stCondLst>
@@ -18737,7 +18684,7 @@
                                     </p:set>
                                     <p:animEffect transition="in" filter="fade">
                                       <p:cBhvr>
-                                        <p:cTn id="43" dur="500"/>
+                                        <p:cTn id="38" dur="500"/>
                                         <p:tgtEl>
                                           <p:spTgt spid="150"/>
                                         </p:tgtEl>

--- a/course/lectures/act-2-delegation-and-control/02-modeling/2-2-Modeling-1-Purposeful-Reduction.pptx
+++ b/course/lectures/act-2-delegation-and-control/02-modeling/2-2-Modeling-1-Purposeful-Reduction.pptx
@@ -1599,7 +1599,7 @@
           <a:p>
             <a:r>
               <a:rPr lang="en-US" dirty="0"/>
-              <a:t>THE SUBTLE CLAIM, and a sharp student will push on it. We are NOT saying that every implementation compatible with the model’s syntax is good engineering; plenty of them would be bad code. We are saying the model deliberately leaves some realization decisions unconstrained, and that a reasonable engineer exercises judgment inside that space. The model bounds the judgment. It does not replace it.</a:t>
+              <a:t>OPTIONAL, IF TIME — THE SUBTLE CLAIM, and a sharp student will push on it. We are NOT saying that every implementation compatible with the model’s syntax is good engineering; plenty of them would be bad code. We are saying the model deliberately leaves some realization decisions unconstrained, and that a reasonable engineer exercises judgment inside that space. The model bounds the judgment. It does not replace it.</a:t>
             </a:r>
           </a:p>
           <a:p>
@@ -1611,7 +1611,7 @@
           <a:p>
             <a:r>
               <a:rPr lang="en-US" dirty="0"/>
-              <a:t>Ask the correspondence question orally and hold it to half a minute: what has to remain true for each of these to correspond to the model? The answers you are fishing for are that the four states exist and are distinguishable, that the legal transitions are exactly those and no others, and that there is no path from Draft to Published. It is off the slide on purpose — the room has just spent three minutes answering one question, and a second open question here costs a minute the section does not have.</a:t>
+              <a:t>OPTIONAL, IF TIME — the correspondence question, asked orally and held to half a minute: what has to remain true for each of these to correspond to the model? The answers you are fishing for are that the four states exist and are distinguishable, that the legal transitions are exactly those and no others, and that there is no path from Draft to Published. It is off the slide on purpose — the room has just spent three minutes answering one question, and a second open question here costs a minute the section does not have.</a:t>
             </a:r>
           </a:p>
           <a:p>
@@ -1623,7 +1623,7 @@
           <a:p>
             <a:r>
               <a:rPr lang="en-US" dirty="0"/>
-              <a:t>Hand off to the next slide rather than forward to Alignment: if the model admits all three, why does anyone bother writing the code at all? That is the next slide’s first question.</a:t>
+              <a:t>Hand off by asking the next slide’s own first question, in its words: if the model admits all three, why do software engineers draw boxes and arrows for a day, then go code for a week? Do not answer it here.</a:t>
             </a:r>
           </a:p>
         </p:txBody>
@@ -1735,13 +1735,13 @@
           <a:p>
             <a:r>
               <a:rPr lang="en-US" dirty="0"/>
-              <a:t>Spine strip: the PROPERTY stage is highlighted. FLAGGED, not a styling preference — Correspondence also highlights PROPERTY, so the strip does not advance monotonically across the four section headers. The tail reconciliation unit owns the ruling (Q-E).</a:t>
+              <a:t>Budget: eleven minutes, twelve if you take both optional beats on the reveal. Header 0.5, the exercise 4-5, the reveal 1.5 (2.5 with the subtle claim and the correspondence question), the closing questions 4-5.</a:t>
             </a:r>
           </a:p>
           <a:p>
             <a:r>
               <a:rPr lang="en-US" dirty="0"/>
-              <a:t>Budget for the section: about eleven minutes. Header 0.5, the exercise 4-5, the reveal 1.5, the closing questions 4-5.</a:t>
+              <a:t>[PRODUCTION — not for delivery] Spine strip: the PROPERTY stage is highlighted, and Correspondence highlights PROPERTY too, so the strip does not advance monotonically across the four section headers. Open question Q-E; the tail reconciliation unit owns the ruling.</a:t>
             </a:r>
           </a:p>
         </p:txBody>
@@ -1901,7 +1901,7 @@
           <a:p>
             <a:r>
               <a:rPr lang="en-US" dirty="0"/>
-              <a:t>Timebox the whole slide at four to five minutes and move even if the room is enjoying itself. The teaching is in the reveal, not in the share-out.</a:t>
+              <a:t>Three minutes of student work; four to five with setup and transitions. Timebox it and move even if the room is enjoying itself — the teaching is in the reveal, not in the share-out.</a:t>
             </a:r>
           </a:p>
         </p:txBody>
@@ -1972,7 +1972,7 @@
           <a:p>
             <a:r>
               <a:rPr lang="en-US" dirty="0"/>
-              <a:t>Say the mind-meld line out loud and keep it off the slide: we cannot transfer understanding directly, so we encode it, ship it, and hope interpretation recovers the consequential part. That is the whole problem of delegation, human or otherwise.</a:t>
+              <a:t>Say the mind-meld line out loud and keep it off the slide: “We cannot merge minds. So we encode what we know, ship the encoding, and hope interpretation recovers the part that mattered.” That is the whole problem of delegation, human or otherwise.</a:t>
             </a:r>
           </a:p>
           <a:p>
@@ -1984,7 +1984,7 @@
           <a:p>
             <a:r>
               <a:rPr lang="en-US" dirty="0"/>
-              <a:t>No equation on this slide, on purpose. The decomposition comes back once, at the cost discussion, where “but you forgot cost” is exactly the objection you want.</a:t>
+              <a:t>No equation on this slide, on purpose. The production equation from the opening comes back once, at the cost discussion, where “but you forgot cost” is exactly the objection you want.</a:t>
             </a:r>
           </a:p>
           <a:p>
@@ -15212,7 +15212,7 @@
                   <a:srgbClr val="8E6F3E"/>
                 </a:solidFill>
               </a:rPr>
-              <a:t xml:space="preserve">THE MODEL  ·  the one you just implemented</a:t>
+              <a:t xml:space="preserve">THE MODEL  ·  the one you just worked on</a:t>
             </a:r>
           </a:p>
         </p:txBody>
@@ -17166,8 +17166,8 @@
         </p:nvSpPr>
         <p:spPr>
           <a:xfrm>
-            <a:off x="1026947" y="868680"/>
-            <a:ext cx="7090107" cy="3429000"/>
+            <a:off x="274320" y="868680"/>
+            <a:ext cx="8595360" cy="3429000"/>
           </a:xfrm>
           <a:prstGeom prst="rect">
             <a:avLst/>
@@ -17467,7 +17467,7 @@
                   <a:srgbClr val="5C4826"/>
                 </a:solidFill>
               </a:rPr>
-              <a:t xml:space="preserve">What did you choose?</a:t>
+              <a:t xml:space="preserve">What did you choose? (take two or three)</a:t>
             </a:r>
           </a:p>
         </p:txBody>
@@ -17921,7 +17921,7 @@
                   <a:srgbClr val="5C4826"/>
                 </a:solidFill>
               </a:rPr>
-              <a:t xml:space="preserve">And why is outsourcing software development so hard?</a:t>
+              <a:t xml:space="preserve">Why is outsourcing software development so hard?</a:t>
             </a:r>
           </a:p>
         </p:txBody>
@@ -17934,7 +17934,7 @@
         </p:nvSpPr>
         <p:spPr>
           <a:xfrm>
-            <a:off x="2240280" y="2724912"/>
+            <a:off x="2286000" y="2724912"/>
             <a:ext cx="1417320" cy="274320"/>
           </a:xfrm>
           <a:prstGeom prst="rect">
@@ -17956,7 +17956,7 @@
               <a:buNone/>
             </a:pPr>
             <a:r>
-              <a:rPr lang="en-US" sz="1400" b="0" i="0" dirty="0">
+              <a:rPr lang="en-US" sz="1500" b="0" i="0" dirty="0">
                 <a:solidFill>
                   <a:srgbClr val="555960"/>
                 </a:solidFill>
@@ -17974,7 +17974,7 @@
         </p:nvSpPr>
         <p:spPr>
           <a:xfrm>
-            <a:off x="5486400" y="2724912"/>
+            <a:off x="5440680" y="2724912"/>
             <a:ext cx="1417320" cy="274320"/>
           </a:xfrm>
           <a:prstGeom prst="rect">
@@ -17996,7 +17996,7 @@
               <a:buNone/>
             </a:pPr>
             <a:r>
-              <a:rPr lang="en-US" sz="1400" b="0" i="0" dirty="0">
+              <a:rPr lang="en-US" sz="1500" b="0" i="0" dirty="0">
                 <a:solidFill>
                   <a:srgbClr val="555960"/>
                 </a:solidFill>
@@ -18015,7 +18015,7 @@
         <p:spPr>
           <a:xfrm>
             <a:off x="274320" y="3063240"/>
-            <a:ext cx="2103120" cy="1005840"/>
+            <a:ext cx="2286000" cy="685800"/>
           </a:xfrm>
           <a:prstGeom prst="rect">
             <a:avLst/>
@@ -18035,33 +18035,17 @@
           <a:p>
             <a:pPr algn="ctr">
               <a:spcAft>
-                <a:spcPts val="200"/>
-              </a:spcAft>
-              <a:buNone/>
-            </a:pPr>
-            <a:r>
-              <a:rPr lang="en-US" sz="1800" b="1" i="0" dirty="0">
-                <a:solidFill>
-                  <a:srgbClr val="5C4826"/>
-                </a:solidFill>
-              </a:rPr>
-              <a:t xml:space="preserve">ENGINEER A</a:t>
-            </a:r>
-          </a:p>
-          <a:p>
-            <a:pPr algn="ctr">
-              <a:spcAft>
                 <a:spcPts val="0"/>
               </a:spcAft>
               <a:buNone/>
             </a:pPr>
             <a:r>
-              <a:rPr lang="en-US" sz="1100" b="0" i="1" dirty="0">
-                <a:solidFill>
-                  <a:srgbClr val="555960"/>
-                </a:solidFill>
-              </a:rPr>
-              <a:t xml:space="preserve">intent · context · judgment</a:t>
+              <a:rPr lang="en-US" sz="1800" b="1" i="0" dirty="0">
+                <a:solidFill>
+                  <a:srgbClr val="5C4826"/>
+                </a:solidFill>
+              </a:rPr>
+              <a:t xml:space="preserve">ENGINEER A</a:t>
             </a:r>
           </a:p>
         </p:txBody>
@@ -18074,8 +18058,8 @@
         </p:nvCxnSpPr>
         <p:spPr>
           <a:xfrm>
-            <a:off x="2468880" y="3566160"/>
-            <a:ext cx="960120" cy="0"/>
+            <a:off x="2651760" y="3406140"/>
+            <a:ext cx="685800" cy="0"/>
           </a:xfrm>
           <a:prstGeom prst="straightConnector1">
             <a:avLst/>
@@ -18096,8 +18080,8 @@
         </p:nvSpPr>
         <p:spPr>
           <a:xfrm>
-            <a:off x="3520440" y="3063240"/>
-            <a:ext cx="2103120" cy="1005840"/>
+            <a:off x="3429000" y="3063240"/>
+            <a:ext cx="2286000" cy="685800"/>
           </a:xfrm>
           <a:prstGeom prst="rect">
             <a:avLst/>
@@ -18140,8 +18124,8 @@
         </p:nvCxnSpPr>
         <p:spPr>
           <a:xfrm>
-            <a:off x="5715000" y="3566160"/>
-            <a:ext cx="960120" cy="0"/>
+            <a:off x="5806440" y="3406140"/>
+            <a:ext cx="685800" cy="0"/>
           </a:xfrm>
           <a:prstGeom prst="straightConnector1">
             <a:avLst/>
@@ -18162,8 +18146,8 @@
         </p:nvSpPr>
         <p:spPr>
           <a:xfrm>
-            <a:off x="6766560" y="3063240"/>
-            <a:ext cx="2103120" cy="1005840"/>
+            <a:off x="6583680" y="3063240"/>
+            <a:ext cx="2286000" cy="685800"/>
           </a:xfrm>
           <a:prstGeom prst="rect">
             <a:avLst/>
@@ -18194,6 +18178,46 @@
                 </a:solidFill>
               </a:rPr>
               <a:t xml:space="preserve">ENGINEER B</a:t>
+            </a:r>
+          </a:p>
+        </p:txBody>
+      </p:sp>
+      <p:sp>
+        <p:nvSpPr>
+          <p:cNvPr id="113" name="EngineerACaption"/>
+          <p:cNvSpPr txBox="1"/>
+          <p:nvPr/>
+        </p:nvSpPr>
+        <p:spPr>
+          <a:xfrm>
+            <a:off x="274320" y="3803904"/>
+            <a:ext cx="2286000" cy="274320"/>
+          </a:xfrm>
+          <a:prstGeom prst="rect">
+            <a:avLst/>
+          </a:prstGeom>
+          <a:noFill/>
+          <a:ln>
+            <a:noFill/>
+          </a:ln>
+        </p:spPr>
+        <p:txBody>
+          <a:bodyPr wrap="square" lIns="0" tIns="0" rIns="0" bIns="0" anchor="t"/>
+          <a:lstStyle/>
+          <a:p>
+            <a:pPr algn="ctr">
+              <a:spcAft>
+                <a:spcPts val="0"/>
+              </a:spcAft>
+              <a:buNone/>
+            </a:pPr>
+            <a:r>
+              <a:rPr lang="en-US" sz="1300" b="0" i="1" dirty="0">
+                <a:solidFill>
+                  <a:srgbClr val="5C4826"/>
+                </a:solidFill>
+              </a:rPr>
+              <a:t xml:space="preserve">intent · context · judgment</a:t>
             </a:r>
           </a:p>
         </p:txBody>
@@ -18444,7 +18468,7 @@
                                           </p:stCondLst>
                                         </p:cTn>
                                         <p:tgtEl>
-                                          <p:spTgt spid="120"/>
+                                          <p:spTgt spid="113"/>
                                         </p:tgtEl>
                                         <p:attrNameLst>
                                           <p:attrName>style.visibility</p:attrName>
@@ -18458,7 +18482,7 @@
                                       <p:cBhvr>
                                         <p:cTn id="18" dur="500"/>
                                         <p:tgtEl>
-                                          <p:spTgt spid="120"/>
+                                          <p:spTgt spid="113"/>
                                         </p:tgtEl>
                                       </p:cBhvr>
                                     </p:animEffect>
@@ -18479,7 +18503,7 @@
                                           </p:stCondLst>
                                         </p:cTn>
                                         <p:tgtEl>
-                                          <p:spTgt spid="111"/>
+                                          <p:spTgt spid="120"/>
                                         </p:tgtEl>
                                         <p:attrNameLst>
                                           <p:attrName>style.visibility</p:attrName>
@@ -18493,7 +18517,7 @@
                                       <p:cBhvr>
                                         <p:cTn id="21" dur="500"/>
                                         <p:tgtEl>
-                                          <p:spTgt spid="111"/>
+                                          <p:spTgt spid="120"/>
                                         </p:tgtEl>
                                       </p:cBhvr>
                                     </p:animEffect>
@@ -18514,7 +18538,7 @@
                                           </p:stCondLst>
                                         </p:cTn>
                                         <p:tgtEl>
-                                          <p:spTgt spid="121"/>
+                                          <p:spTgt spid="111"/>
                                         </p:tgtEl>
                                         <p:attrNameLst>
                                           <p:attrName>style.visibility</p:attrName>
@@ -18528,7 +18552,7 @@
                                       <p:cBhvr>
                                         <p:cTn id="24" dur="500"/>
                                         <p:tgtEl>
-                                          <p:spTgt spid="121"/>
+                                          <p:spTgt spid="111"/>
                                         </p:tgtEl>
                                       </p:cBhvr>
                                     </p:animEffect>
@@ -18549,7 +18573,7 @@
                                           </p:stCondLst>
                                         </p:cTn>
                                         <p:tgtEl>
-                                          <p:spTgt spid="112"/>
+                                          <p:spTgt spid="121"/>
                                         </p:tgtEl>
                                         <p:attrNameLst>
                                           <p:attrName>style.visibility</p:attrName>
@@ -18563,7 +18587,7 @@
                                       <p:cBhvr>
                                         <p:cTn id="27" dur="500"/>
                                         <p:tgtEl>
-                                          <p:spTgt spid="112"/>
+                                          <p:spTgt spid="121"/>
                                         </p:tgtEl>
                                       </p:cBhvr>
                                     </p:animEffect>
@@ -18584,7 +18608,7 @@
                                           </p:stCondLst>
                                         </p:cTn>
                                         <p:tgtEl>
-                                          <p:spTgt spid="131"/>
+                                          <p:spTgt spid="112"/>
                                         </p:tgtEl>
                                         <p:attrNameLst>
                                           <p:attrName>style.visibility</p:attrName>
@@ -18598,7 +18622,7 @@
                                       <p:cBhvr>
                                         <p:cTn id="30" dur="500"/>
                                         <p:tgtEl>
-                                          <p:spTgt spid="131"/>
+                                          <p:spTgt spid="112"/>
                                         </p:tgtEl>
                                       </p:cBhvr>
                                     </p:animEffect>
@@ -18619,7 +18643,7 @@
                                           </p:stCondLst>
                                         </p:cTn>
                                         <p:tgtEl>
-                                          <p:spTgt spid="140"/>
+                                          <p:spTgt spid="131"/>
                                         </p:tgtEl>
                                         <p:attrNameLst>
                                           <p:attrName>style.visibility</p:attrName>
@@ -18633,7 +18657,7 @@
                                       <p:cBhvr>
                                         <p:cTn id="33" dur="500"/>
                                         <p:tgtEl>
-                                          <p:spTgt spid="140"/>
+                                          <p:spTgt spid="131"/>
                                         </p:tgtEl>
                                       </p:cBhvr>
                                     </p:animEffect>
@@ -18672,6 +18696,59 @@
                                           </p:stCondLst>
                                         </p:cTn>
                                         <p:tgtEl>
+                                          <p:spTgt spid="140"/>
+                                        </p:tgtEl>
+                                        <p:attrNameLst>
+                                          <p:attrName>style.visibility</p:attrName>
+                                        </p:attrNameLst>
+                                      </p:cBhvr>
+                                      <p:to>
+                                        <p:strVal val="visible"/>
+                                      </p:to>
+                                    </p:set>
+                                    <p:animEffect transition="in" filter="fade">
+                                      <p:cBhvr>
+                                        <p:cTn id="38" dur="500"/>
+                                        <p:tgtEl>
+                                          <p:spTgt spid="140"/>
+                                        </p:tgtEl>
+                                      </p:cBhvr>
+                                    </p:animEffect>
+                                  </p:childTnLst>
+                                </p:cTn>
+                              </p:par>
+                            </p:childTnLst>
+                          </p:cTn>
+                        </p:par>
+                      </p:childTnLst>
+                    </p:cTn>
+                  </p:par>
+                  <p:par>
+                    <p:cTn id="39" fill="hold">
+                      <p:stCondLst>
+                        <p:cond delay="indefinite"/>
+                      </p:stCondLst>
+                      <p:childTnLst>
+                        <p:par>
+                          <p:cTn id="40" fill="hold">
+                            <p:stCondLst>
+                              <p:cond delay="0"/>
+                            </p:stCondLst>
+                            <p:childTnLst>
+                              <p:par>
+                                <p:cTn id="41" presetID="10" presetClass="entr" presetSubtype="0" fill="hold" nodeType="clickEffect">
+                                  <p:stCondLst>
+                                    <p:cond delay="0"/>
+                                  </p:stCondLst>
+                                  <p:childTnLst>
+                                    <p:set>
+                                      <p:cBhvr>
+                                        <p:cTn id="42" dur="1" fill="hold">
+                                          <p:stCondLst>
+                                            <p:cond delay="0"/>
+                                          </p:stCondLst>
+                                        </p:cTn>
+                                        <p:tgtEl>
                                           <p:spTgt spid="150"/>
                                         </p:tgtEl>
                                         <p:attrNameLst>
@@ -18684,7 +18761,7 @@
                                     </p:set>
                                     <p:animEffect transition="in" filter="fade">
                                       <p:cBhvr>
-                                        <p:cTn id="38" dur="500"/>
+                                        <p:cTn id="43" dur="500"/>
                                         <p:tgtEl>
                                           <p:spTgt spid="150"/>
                                         </p:tgtEl>

--- a/course/lectures/act-2-delegation-and-control/02-modeling/2-2-Modeling-1-Purposeful-Reduction.pptx
+++ b/course/lectures/act-2-delegation-and-control/02-modeling/2-2-Modeling-1-Purposeful-Reduction.pptx
@@ -17467,7 +17467,7 @@
                   <a:srgbClr val="5C4826"/>
                 </a:solidFill>
               </a:rPr>
-              <a:t xml:space="preserve">What did you choose? (take two or three)</a:t>
+              <a:t xml:space="preserve">What did you choose? (two or three)</a:t>
             </a:r>
           </a:p>
         </p:txBody>

--- a/course/lectures/act-2-delegation-and-control/02-modeling/2-2-Modeling-1-Purposeful-Reduction.pptx
+++ b/course/lectures/act-2-delegation-and-control/02-modeling/2-2-Modeling-1-Purposeful-Reduction.pptx
@@ -1623,7 +1623,7 @@
           <a:p>
             <a:r>
               <a:rPr lang="en-US" dirty="0"/>
-              <a:t>Hand off by asking the next slide’s own first question, in its words: if the model admits all three, why do software engineers draw boxes and arrows for a day, then go code for a week? Do not answer it here.</a:t>
+              <a:t>Hand off by asking the next slide’s own first question, in its words: if this works, why do software engineers draw boxes and arrows for a day, then go code for a week? Do not answer it here.</a:t>
             </a:r>
           </a:p>
         </p:txBody>
@@ -1978,7 +1978,13 @@
           <a:p>
             <a:r>
               <a:rPr lang="en-US" dirty="0"/>
-              <a:t>Last click, then STOP. Do not answer “does GenAI change this?” here. The cost discussion and the coda are the answer, and the question earns its weight by staying open for the next half hour. If a student answers it, thank them and write it on the board unresolved.</a:t>
+              <a:t>Then the claim, on its own click, once the figure has been narrated: delegation requires consequential knowledge to survive encoding and interpretation. Read it, do not gloss it — the next two sections are its consequences.</a:t>
+            </a:r>
+          </a:p>
+          <a:p>
+            <a:r>
+              <a:rPr lang="en-US" dirty="0"/>
+              <a:t>Last click brings the GenAI question, and then you STOP. Do not answer “does GenAI change this?” here. The cost discussion and the coda are the answer, and the question earns its weight by staying open for the next half hour. If a student answers it, thank them and write it on the board unresolved.</a:t>
             </a:r>
           </a:p>
           <a:p>

--- a/course/lectures/act-2-delegation-and-control/02-modeling/2-2-Modeling-1-Purposeful-Reduction.pptx
+++ b/course/lectures/act-2-delegation-and-control/02-modeling/2-2-Modeling-1-Purposeful-Reduction.pptx
@@ -2043,7 +2043,31 @@
           <a:p>
             <a:r>
               <a:rPr dirty="0"/>
-              <a:t>PLACEHOLDER — skeleton only (U-1′). N6: “From requirement to specification”. Content and speaker notes owed by U-3 per restructure plan v2 §2.</a:t>
+              <a:t>Why this slide exists: the next slide drops the room into a controller and an 8-hour question. Without this, that question has no provenance.</a:t>
+            </a:r>
+          </a:p>
+          <a:p>
+            <a:r>
+              <a:rPr dirty="0"/>
+              <a:t>Read the three cards in order. The first sentence is what a customer says. The second is what engineers must be able to check. Only the third one is ours.</a:t>
+            </a:r>
+          </a:p>
+          <a:p>
+            <a:r>
+              <a:rPr dirty="0"/>
+              <a:t>Say it once: V_min is the minimum safe voltage - the phrase the next two slides use.</a:t>
+            </a:r>
+          </a:p>
+          <a:p>
+            <a:r>
+              <a:rPr dirty="0"/>
+              <a:t>The footer is the point: students already know requirement, specification, implementation. Modeling is not a new stage bolted on - it sits between the specification and the design, and it is how the obligation gets answered before anything is built.</a:t>
+            </a:r>
+          </a:p>
+          <a:p>
+            <a:r>
+              <a:rPr dirty="0"/>
+              <a:t>Do NOT teach this controller's architecture here. One click per card, then move on. 90 seconds.</a:t>
             </a:r>
           </a:p>
         </p:txBody>
@@ -18871,11 +18895,878 @@
           </a:p>
         </p:txBody>
       </p:sp>
+      <p:sp>
+        <p:nvSpPr>
+          <p:cNvPr id="110" name="Kicker"/>
+          <p:cNvSpPr txBox="1"/>
+          <p:nvPr/>
+        </p:nvSpPr>
+        <p:spPr>
+          <a:xfrm>
+            <a:off x="365760" y="1097280"/>
+            <a:ext cx="8412480" cy="393192"/>
+          </a:xfrm>
+          <a:prstGeom prst="rect">
+            <a:avLst/>
+          </a:prstGeom>
+          <a:noFill/>
+          <a:ln>
+            <a:noFill/>
+          </a:ln>
+        </p:spPr>
+        <p:txBody>
+          <a:bodyPr wrap="square" lIns="18288" tIns="18288" rIns="18288" bIns="18288" anchor="t"/>
+          <a:lstStyle/>
+          <a:p>
+            <a:pPr algn="l">
+              <a:spcAft>
+                <a:spcPts val="0"/>
+              </a:spcAft>
+              <a:buNone/>
+            </a:pPr>
+            <a:r>
+              <a:rPr lang="en-US" sz="2000" b="1" i="0" dirty="0">
+                <a:solidFill>
+                  <a:srgbClr val="8E6F3E"/>
+                </a:solidFill>
+              </a:rPr>
+              <a:t>BEFORE THE MODEL</a:t>
+            </a:r>
+          </a:p>
+        </p:txBody>
+      </p:sp>
+      <p:sp>
+        <p:nvSpPr>
+          <p:cNvPr id="111" name="C1"/>
+          <p:cNvSpPr/>
+          <p:nvPr/>
+        </p:nvSpPr>
+        <p:spPr>
+          <a:xfrm>
+            <a:off x="685800" y="1554480"/>
+            <a:ext cx="7772400" cy="777240"/>
+          </a:xfrm>
+          <a:prstGeom prst="rect">
+            <a:avLst/>
+          </a:prstGeom>
+          <a:solidFill>
+            <a:srgbClr val="F5F1E8"/>
+          </a:solidFill>
+          <a:ln w="12700">
+            <a:solidFill>
+              <a:srgbClr val="C9B991"/>
+            </a:solidFill>
+          </a:ln>
+        </p:spPr>
+        <p:txBody>
+          <a:bodyPr wrap="square" lIns="27432" tIns="22860" rIns="27432" bIns="22860" anchor="ctr"/>
+          <a:lstStyle/>
+          <a:p>
+            <a:pPr algn="l">
+              <a:spcAft>
+                <a:spcPts val="300"/>
+              </a:spcAft>
+              <a:buNone/>
+            </a:pPr>
+            <a:r>
+              <a:rPr lang="en-US" sz="1300" b="1" i="0" dirty="0">
+                <a:solidFill>
+                  <a:srgbClr val="8E6F3E"/>
+                </a:solidFill>
+              </a:rPr>
+              <a:t>CUSTOMER REQUIREMENT</a:t>
+            </a:r>
+          </a:p>
+          <a:p>
+            <a:pPr algn="l">
+              <a:spcAft>
+                <a:spcPts val="0"/>
+              </a:spcAft>
+              <a:buNone/>
+            </a:pPr>
+            <a:r>
+              <a:rPr lang="en-US" sz="1600" b="0" i="0" dirty="0">
+                <a:solidFill>
+                  <a:srgbClr val="5C4826"/>
+                </a:solidFill>
+              </a:rPr>
+              <a:t>The controller must operate for a full 8-hour shift without battery replacement.</a:t>
+            </a:r>
+          </a:p>
+        </p:txBody>
+      </p:sp>
+      <p:cxnSp>
+        <p:nvCxnSpPr>
+          <p:cNvPr id="112" name="A1"/>
+          <p:cNvCxnSpPr/>
+          <p:nvPr/>
+        </p:nvCxnSpPr>
+        <p:spPr>
+          <a:xfrm>
+            <a:off x="4572000" y="2331720"/>
+            <a:ext cx="0" cy="228600"/>
+          </a:xfrm>
+          <a:prstGeom prst="straightConnector1">
+            <a:avLst/>
+          </a:prstGeom>
+          <a:ln w="28575">
+            <a:solidFill>
+              <a:srgbClr val="8E6F3E"/>
+            </a:solidFill>
+            <a:tailEnd type="triangle" w="med" len="med"/>
+          </a:ln>
+        </p:spPr>
+      </p:cxnSp>
+      <p:sp>
+        <p:nvSpPr>
+          <p:cNvPr id="113" name="C2"/>
+          <p:cNvSpPr/>
+          <p:nvPr/>
+        </p:nvSpPr>
+        <p:spPr>
+          <a:xfrm>
+            <a:off x="685800" y="2560320"/>
+            <a:ext cx="7772400" cy="822960"/>
+          </a:xfrm>
+          <a:prstGeom prst="rect">
+            <a:avLst/>
+          </a:prstGeom>
+          <a:solidFill>
+            <a:srgbClr val="F5F1E8"/>
+          </a:solidFill>
+          <a:ln w="12700">
+            <a:solidFill>
+              <a:srgbClr val="C9B991"/>
+            </a:solidFill>
+          </a:ln>
+        </p:spPr>
+        <p:txBody>
+          <a:bodyPr wrap="square" lIns="27432" tIns="22860" rIns="27432" bIns="22860" anchor="ctr"/>
+          <a:lstStyle/>
+          <a:p>
+            <a:pPr algn="l">
+              <a:spcAft>
+                <a:spcPts val="300"/>
+              </a:spcAft>
+              <a:buNone/>
+            </a:pPr>
+            <a:r>
+              <a:rPr lang="en-US" sz="1300" b="1" i="0" dirty="0">
+                <a:solidFill>
+                  <a:srgbClr val="8E6F3E"/>
+                </a:solidFill>
+              </a:rPr>
+              <a:t>TOP-LEVEL SPECIFICATION</a:t>
+            </a:r>
+          </a:p>
+          <a:p>
+            <a:pPr algn="l">
+              <a:spcAft>
+                <a:spcPts val="0"/>
+              </a:spcAft>
+              <a:buNone/>
+            </a:pPr>
+            <a:r>
+              <a:rPr lang="en-US" sz="1600" b="0" i="0" dirty="0">
+                <a:solidFill>
+                  <a:srgbClr val="5C4826"/>
+                </a:solidFill>
+              </a:rPr>
+              <a:t>Under the specified operating profile, battery voltage shall remain above V_min for at least 8 hours.</a:t>
+            </a:r>
+          </a:p>
+        </p:txBody>
+      </p:sp>
+      <p:cxnSp>
+        <p:nvCxnSpPr>
+          <p:cNvPr id="114" name="A2"/>
+          <p:cNvCxnSpPr/>
+          <p:nvPr/>
+        </p:nvCxnSpPr>
+        <p:spPr>
+          <a:xfrm>
+            <a:off x="4572000" y="3383280"/>
+            <a:ext cx="0" cy="228600"/>
+          </a:xfrm>
+          <a:prstGeom prst="straightConnector1">
+            <a:avLst/>
+          </a:prstGeom>
+          <a:ln w="28575">
+            <a:solidFill>
+              <a:srgbClr val="8E6F3E"/>
+            </a:solidFill>
+            <a:tailEnd type="triangle" w="med" len="med"/>
+          </a:ln>
+        </p:spPr>
+      </p:cxnSp>
+      <p:sp>
+        <p:nvSpPr>
+          <p:cNvPr id="115" name="C3"/>
+          <p:cNvSpPr/>
+          <p:nvPr/>
+        </p:nvSpPr>
+        <p:spPr>
+          <a:xfrm>
+            <a:off x="685800" y="3611880"/>
+            <a:ext cx="5029200" cy="685800"/>
+          </a:xfrm>
+          <a:prstGeom prst="rect">
+            <a:avLst/>
+          </a:prstGeom>
+          <a:solidFill>
+            <a:srgbClr val="8E6F3E"/>
+          </a:solidFill>
+          <a:ln>
+            <a:noFill/>
+          </a:ln>
+        </p:spPr>
+        <p:txBody>
+          <a:bodyPr wrap="square" lIns="27432" tIns="22860" rIns="27432" bIns="22860" anchor="ctr"/>
+          <a:lstStyle/>
+          <a:p>
+            <a:pPr algn="l">
+              <a:spcAft>
+                <a:spcPts val="300"/>
+              </a:spcAft>
+              <a:buNone/>
+            </a:pPr>
+            <a:r>
+              <a:rPr lang="en-US" sz="1300" b="1" i="0" dirty="0">
+                <a:solidFill>
+                  <a:srgbClr val="F5F1E8"/>
+                </a:solidFill>
+              </a:rPr>
+              <a:t>ENGINEERING QUESTION</a:t>
+            </a:r>
+          </a:p>
+          <a:p>
+            <a:pPr algn="l">
+              <a:spcAft>
+                <a:spcPts val="0"/>
+              </a:spcAft>
+              <a:buNone/>
+            </a:pPr>
+            <a:r>
+              <a:rPr lang="en-US" sz="1800" b="1" i="0" dirty="0">
+                <a:solidFill>
+                  <a:srgbClr val="FFFFFF"/>
+                </a:solidFill>
+              </a:rPr>
+              <a:t>Can this design satisfy the 8-hour obligation?</a:t>
+            </a:r>
+          </a:p>
+        </p:txBody>
+      </p:sp>
+      <p:sp>
+        <p:nvSpPr>
+          <p:cNvPr id="116" name="Ctrl"/>
+          <p:cNvSpPr/>
+          <p:nvPr/>
+        </p:nvSpPr>
+        <p:spPr>
+          <a:xfrm>
+            <a:off x="5943600" y="3726180"/>
+            <a:ext cx="1143000" cy="457200"/>
+          </a:xfrm>
+          <a:prstGeom prst="rect">
+            <a:avLst/>
+          </a:prstGeom>
+          <a:solidFill>
+            <a:srgbClr val="5C4826"/>
+          </a:solidFill>
+          <a:ln>
+            <a:noFill/>
+          </a:ln>
+        </p:spPr>
+        <p:txBody>
+          <a:bodyPr wrap="square" lIns="27432" tIns="22860" rIns="27432" bIns="22860" anchor="ctr"/>
+          <a:lstStyle/>
+          <a:p>
+            <a:pPr algn="ctr">
+              <a:spcAft>
+                <a:spcPts val="0"/>
+              </a:spcAft>
+              <a:buNone/>
+            </a:pPr>
+            <a:r>
+              <a:rPr lang="en-US" sz="1200" b="1" i="0" dirty="0">
+                <a:solidFill>
+                  <a:srgbClr val="FFFFFF"/>
+                </a:solidFill>
+              </a:rPr>
+              <a:t>CONTROLLER</a:t>
+            </a:r>
+          </a:p>
+        </p:txBody>
+      </p:sp>
+      <p:cxnSp>
+        <p:nvCxnSpPr>
+          <p:cNvPr id="117" name="CB"/>
+          <p:cNvCxnSpPr/>
+          <p:nvPr/>
+        </p:nvCxnSpPr>
+        <p:spPr>
+          <a:xfrm>
+            <a:off x="7086600" y="3954780"/>
+            <a:ext cx="228600" cy="0"/>
+          </a:xfrm>
+          <a:prstGeom prst="straightConnector1">
+            <a:avLst/>
+          </a:prstGeom>
+          <a:ln w="19050">
+            <a:solidFill>
+              <a:srgbClr val="C9B991"/>
+            </a:solidFill>
+            <a:tailEnd type="triangle" w="med" len="med"/>
+          </a:ln>
+        </p:spPr>
+      </p:cxnSp>
+      <p:sp>
+        <p:nvSpPr>
+          <p:cNvPr id="118" name="Bat"/>
+          <p:cNvSpPr/>
+          <p:nvPr/>
+        </p:nvSpPr>
+        <p:spPr>
+          <a:xfrm>
+            <a:off x="7315200" y="3726180"/>
+            <a:ext cx="1143000" cy="457200"/>
+          </a:xfrm>
+          <a:prstGeom prst="rect">
+            <a:avLst/>
+          </a:prstGeom>
+          <a:solidFill>
+            <a:srgbClr val="F5F1E8"/>
+          </a:solidFill>
+          <a:ln w="12700">
+            <a:solidFill>
+              <a:srgbClr val="C9B991"/>
+            </a:solidFill>
+          </a:ln>
+        </p:spPr>
+        <p:txBody>
+          <a:bodyPr wrap="square" lIns="27432" tIns="22860" rIns="27432" bIns="22860" anchor="ctr"/>
+          <a:lstStyle/>
+          <a:p>
+            <a:pPr algn="ctr">
+              <a:spcAft>
+                <a:spcPts val="0"/>
+              </a:spcAft>
+              <a:buNone/>
+            </a:pPr>
+            <a:r>
+              <a:rPr lang="en-US" sz="1200" b="1" i="0" dirty="0">
+                <a:solidFill>
+                  <a:srgbClr val="5C4826"/>
+                </a:solidFill>
+              </a:rPr>
+              <a:t>BATTERY</a:t>
+            </a:r>
+          </a:p>
+        </p:txBody>
+      </p:sp>
+      <p:sp>
+        <p:nvSpPr>
+          <p:cNvPr id="119" name="Ital"/>
+          <p:cNvSpPr txBox="1"/>
+          <p:nvPr/>
+        </p:nvSpPr>
+        <p:spPr>
+          <a:xfrm>
+            <a:off x="685800" y="4663440"/>
+            <a:ext cx="7772400" cy="594360"/>
+          </a:xfrm>
+          <a:prstGeom prst="rect">
+            <a:avLst/>
+          </a:prstGeom>
+          <a:noFill/>
+          <a:ln>
+            <a:noFill/>
+          </a:ln>
+        </p:spPr>
+        <p:txBody>
+          <a:bodyPr wrap="square" lIns="0" tIns="0" rIns="0" bIns="0" anchor="t"/>
+          <a:lstStyle/>
+          <a:p>
+            <a:pPr algn="ctr">
+              <a:spcAft>
+                <a:spcPts val="0"/>
+              </a:spcAft>
+              <a:buNone/>
+            </a:pPr>
+            <a:r>
+              <a:rPr lang="en-US" sz="1500" b="0" i="1" dirty="0">
+                <a:solidFill>
+                  <a:srgbClr val="555960"/>
+                </a:solidFill>
+              </a:rPr>
+              <a:t>The specification states the obligation. A model is how we find out whether the design meets it.</a:t>
+            </a:r>
+          </a:p>
+        </p:txBody>
+      </p:sp>
+      <p:sp>
+        <p:nvSpPr>
+          <p:cNvPr id="120" name="FooterBand"/>
+          <p:cNvSpPr/>
+          <p:nvPr/>
+        </p:nvSpPr>
+        <p:spPr>
+          <a:xfrm>
+            <a:off x="274320" y="5852160"/>
+            <a:ext cx="8595360" cy="566928"/>
+          </a:xfrm>
+          <a:prstGeom prst="rect">
+            <a:avLst/>
+          </a:prstGeom>
+          <a:solidFill>
+            <a:srgbClr val="8E6F3E"/>
+          </a:solidFill>
+          <a:ln>
+            <a:noFill/>
+          </a:ln>
+        </p:spPr>
+        <p:txBody>
+          <a:bodyPr wrap="square" lIns="27432" tIns="22860" rIns="27432" bIns="22860" anchor="ctr"/>
+          <a:lstStyle/>
+          <a:p>
+            <a:pPr algn="ctr">
+              <a:spcAft>
+                <a:spcPts val="0"/>
+              </a:spcAft>
+              <a:buNone/>
+            </a:pPr>
+            <a:r>
+              <a:rPr lang="en-US" sz="1600" b="1" i="0" dirty="0">
+                <a:solidFill>
+                  <a:srgbClr val="FFFFFF"/>
+                </a:solidFill>
+              </a:rPr>
+              <a:t>REQUIREMENT  →  SPECIFICATION  →  [ </a:t>
+            </a:r>
+            <a:r>
+              <a:rPr lang="en-US" sz="2000" b="1" i="0" dirty="0">
+                <a:solidFill>
+                  <a:srgbClr val="FFFFFF"/>
+                </a:solidFill>
+              </a:rPr>
+              <a:t>MODELING</a:t>
+            </a:r>
+            <a:r>
+              <a:rPr lang="en-US" sz="1600" b="1" i="0" dirty="0">
+                <a:solidFill>
+                  <a:srgbClr val="FFFFFF"/>
+                </a:solidFill>
+              </a:rPr>
+              <a:t> ]  →  IMPLEMENTATION</a:t>
+            </a:r>
+          </a:p>
+        </p:txBody>
+      </p:sp>
     </p:spTree>
   </p:cSld>
   <p:clrMapOvr>
     <a:masterClrMapping/>
   </p:clrMapOvr>
+  <p:timing>
+    <p:tnLst>
+      <p:par>
+        <p:cTn id="1" dur="indefinite" restart="never" nodeType="tmRoot">
+          <p:childTnLst>
+            <p:seq concurrent="1" nextAc="seek">
+              <p:cTn id="2" dur="indefinite" nodeType="mainSeq">
+                <p:childTnLst>
+                  <p:par>
+                    <p:cTn id="3" fill="hold">
+                      <p:stCondLst>
+                        <p:cond delay="indefinite"/>
+                      </p:stCondLst>
+                      <p:childTnLst>
+                        <p:par>
+                          <p:cTn id="4" fill="hold">
+                            <p:stCondLst>
+                              <p:cond delay="0"/>
+                            </p:stCondLst>
+                            <p:childTnLst>
+                              <p:par>
+                                <p:cTn id="5" presetID="10" presetClass="entr" presetSubtype="0" fill="hold" nodeType="clickEffect">
+                                  <p:stCondLst>
+                                    <p:cond delay="0"/>
+                                  </p:stCondLst>
+                                  <p:childTnLst>
+                                    <p:set>
+                                      <p:cBhvr>
+                                        <p:cTn id="6" dur="1" fill="hold">
+                                          <p:stCondLst>
+                                            <p:cond delay="0"/>
+                                          </p:stCondLst>
+                                        </p:cTn>
+                                        <p:tgtEl>
+                                          <p:spTgt spid="112"/>
+                                        </p:tgtEl>
+                                        <p:attrNameLst>
+                                          <p:attrName>style.visibility</p:attrName>
+                                        </p:attrNameLst>
+                                      </p:cBhvr>
+                                      <p:to>
+                                        <p:strVal val="visible"/>
+                                      </p:to>
+                                    </p:set>
+                                    <p:animEffect transition="in" filter="fade">
+                                      <p:cBhvr>
+                                        <p:cTn id="7" dur="500"/>
+                                        <p:tgtEl>
+                                          <p:spTgt spid="112"/>
+                                        </p:tgtEl>
+                                      </p:cBhvr>
+                                    </p:animEffect>
+                                  </p:childTnLst>
+                                </p:cTn>
+                              </p:par>
+                              <p:par>
+                                <p:cTn id="8" presetID="10" presetClass="entr" presetSubtype="0" fill="hold" nodeType="withEffect">
+                                  <p:stCondLst>
+                                    <p:cond delay="0"/>
+                                  </p:stCondLst>
+                                  <p:childTnLst>
+                                    <p:set>
+                                      <p:cBhvr>
+                                        <p:cTn id="9" dur="1" fill="hold">
+                                          <p:stCondLst>
+                                            <p:cond delay="0"/>
+                                          </p:stCondLst>
+                                        </p:cTn>
+                                        <p:tgtEl>
+                                          <p:spTgt spid="113"/>
+                                        </p:tgtEl>
+                                        <p:attrNameLst>
+                                          <p:attrName>style.visibility</p:attrName>
+                                        </p:attrNameLst>
+                                      </p:cBhvr>
+                                      <p:to>
+                                        <p:strVal val="visible"/>
+                                      </p:to>
+                                    </p:set>
+                                    <p:animEffect transition="in" filter="fade">
+                                      <p:cBhvr>
+                                        <p:cTn id="10" dur="500"/>
+                                        <p:tgtEl>
+                                          <p:spTgt spid="113"/>
+                                        </p:tgtEl>
+                                      </p:cBhvr>
+                                    </p:animEffect>
+                                  </p:childTnLst>
+                                </p:cTn>
+                              </p:par>
+                            </p:childTnLst>
+                          </p:cTn>
+                        </p:par>
+                      </p:childTnLst>
+                    </p:cTn>
+                  </p:par>
+                  <p:par>
+                    <p:cTn id="11" fill="hold">
+                      <p:stCondLst>
+                        <p:cond delay="indefinite"/>
+                      </p:stCondLst>
+                      <p:childTnLst>
+                        <p:par>
+                          <p:cTn id="12" fill="hold">
+                            <p:stCondLst>
+                              <p:cond delay="0"/>
+                            </p:stCondLst>
+                            <p:childTnLst>
+                              <p:par>
+                                <p:cTn id="13" presetID="10" presetClass="entr" presetSubtype="0" fill="hold" nodeType="clickEffect">
+                                  <p:stCondLst>
+                                    <p:cond delay="0"/>
+                                  </p:stCondLst>
+                                  <p:childTnLst>
+                                    <p:set>
+                                      <p:cBhvr>
+                                        <p:cTn id="14" dur="1" fill="hold">
+                                          <p:stCondLst>
+                                            <p:cond delay="0"/>
+                                          </p:stCondLst>
+                                        </p:cTn>
+                                        <p:tgtEl>
+                                          <p:spTgt spid="114"/>
+                                        </p:tgtEl>
+                                        <p:attrNameLst>
+                                          <p:attrName>style.visibility</p:attrName>
+                                        </p:attrNameLst>
+                                      </p:cBhvr>
+                                      <p:to>
+                                        <p:strVal val="visible"/>
+                                      </p:to>
+                                    </p:set>
+                                    <p:animEffect transition="in" filter="fade">
+                                      <p:cBhvr>
+                                        <p:cTn id="15" dur="500"/>
+                                        <p:tgtEl>
+                                          <p:spTgt spid="114"/>
+                                        </p:tgtEl>
+                                      </p:cBhvr>
+                                    </p:animEffect>
+                                  </p:childTnLst>
+                                </p:cTn>
+                              </p:par>
+                              <p:par>
+                                <p:cTn id="16" presetID="10" presetClass="entr" presetSubtype="0" fill="hold" nodeType="withEffect">
+                                  <p:stCondLst>
+                                    <p:cond delay="0"/>
+                                  </p:stCondLst>
+                                  <p:childTnLst>
+                                    <p:set>
+                                      <p:cBhvr>
+                                        <p:cTn id="17" dur="1" fill="hold">
+                                          <p:stCondLst>
+                                            <p:cond delay="0"/>
+                                          </p:stCondLst>
+                                        </p:cTn>
+                                        <p:tgtEl>
+                                          <p:spTgt spid="115"/>
+                                        </p:tgtEl>
+                                        <p:attrNameLst>
+                                          <p:attrName>style.visibility</p:attrName>
+                                        </p:attrNameLst>
+                                      </p:cBhvr>
+                                      <p:to>
+                                        <p:strVal val="visible"/>
+                                      </p:to>
+                                    </p:set>
+                                    <p:animEffect transition="in" filter="fade">
+                                      <p:cBhvr>
+                                        <p:cTn id="18" dur="500"/>
+                                        <p:tgtEl>
+                                          <p:spTgt spid="115"/>
+                                        </p:tgtEl>
+                                      </p:cBhvr>
+                                    </p:animEffect>
+                                  </p:childTnLst>
+                                </p:cTn>
+                              </p:par>
+                              <p:par>
+                                <p:cTn id="19" presetID="10" presetClass="entr" presetSubtype="0" fill="hold" nodeType="withEffect">
+                                  <p:stCondLst>
+                                    <p:cond delay="0"/>
+                                  </p:stCondLst>
+                                  <p:childTnLst>
+                                    <p:set>
+                                      <p:cBhvr>
+                                        <p:cTn id="20" dur="1" fill="hold">
+                                          <p:stCondLst>
+                                            <p:cond delay="0"/>
+                                          </p:stCondLst>
+                                        </p:cTn>
+                                        <p:tgtEl>
+                                          <p:spTgt spid="116"/>
+                                        </p:tgtEl>
+                                        <p:attrNameLst>
+                                          <p:attrName>style.visibility</p:attrName>
+                                        </p:attrNameLst>
+                                      </p:cBhvr>
+                                      <p:to>
+                                        <p:strVal val="visible"/>
+                                      </p:to>
+                                    </p:set>
+                                    <p:animEffect transition="in" filter="fade">
+                                      <p:cBhvr>
+                                        <p:cTn id="21" dur="500"/>
+                                        <p:tgtEl>
+                                          <p:spTgt spid="116"/>
+                                        </p:tgtEl>
+                                      </p:cBhvr>
+                                    </p:animEffect>
+                                  </p:childTnLst>
+                                </p:cTn>
+                              </p:par>
+                              <p:par>
+                                <p:cTn id="22" presetID="10" presetClass="entr" presetSubtype="0" fill="hold" nodeType="withEffect">
+                                  <p:stCondLst>
+                                    <p:cond delay="0"/>
+                                  </p:stCondLst>
+                                  <p:childTnLst>
+                                    <p:set>
+                                      <p:cBhvr>
+                                        <p:cTn id="23" dur="1" fill="hold">
+                                          <p:stCondLst>
+                                            <p:cond delay="0"/>
+                                          </p:stCondLst>
+                                        </p:cTn>
+                                        <p:tgtEl>
+                                          <p:spTgt spid="117"/>
+                                        </p:tgtEl>
+                                        <p:attrNameLst>
+                                          <p:attrName>style.visibility</p:attrName>
+                                        </p:attrNameLst>
+                                      </p:cBhvr>
+                                      <p:to>
+                                        <p:strVal val="visible"/>
+                                      </p:to>
+                                    </p:set>
+                                    <p:animEffect transition="in" filter="fade">
+                                      <p:cBhvr>
+                                        <p:cTn id="24" dur="500"/>
+                                        <p:tgtEl>
+                                          <p:spTgt spid="117"/>
+                                        </p:tgtEl>
+                                      </p:cBhvr>
+                                    </p:animEffect>
+                                  </p:childTnLst>
+                                </p:cTn>
+                              </p:par>
+                              <p:par>
+                                <p:cTn id="25" presetID="10" presetClass="entr" presetSubtype="0" fill="hold" nodeType="withEffect">
+                                  <p:stCondLst>
+                                    <p:cond delay="0"/>
+                                  </p:stCondLst>
+                                  <p:childTnLst>
+                                    <p:set>
+                                      <p:cBhvr>
+                                        <p:cTn id="26" dur="1" fill="hold">
+                                          <p:stCondLst>
+                                            <p:cond delay="0"/>
+                                          </p:stCondLst>
+                                        </p:cTn>
+                                        <p:tgtEl>
+                                          <p:spTgt spid="118"/>
+                                        </p:tgtEl>
+                                        <p:attrNameLst>
+                                          <p:attrName>style.visibility</p:attrName>
+                                        </p:attrNameLst>
+                                      </p:cBhvr>
+                                      <p:to>
+                                        <p:strVal val="visible"/>
+                                      </p:to>
+                                    </p:set>
+                                    <p:animEffect transition="in" filter="fade">
+                                      <p:cBhvr>
+                                        <p:cTn id="27" dur="500"/>
+                                        <p:tgtEl>
+                                          <p:spTgt spid="118"/>
+                                        </p:tgtEl>
+                                      </p:cBhvr>
+                                    </p:animEffect>
+                                  </p:childTnLst>
+                                </p:cTn>
+                              </p:par>
+                            </p:childTnLst>
+                          </p:cTn>
+                        </p:par>
+                      </p:childTnLst>
+                    </p:cTn>
+                  </p:par>
+                  <p:par>
+                    <p:cTn id="28" fill="hold">
+                      <p:stCondLst>
+                        <p:cond delay="indefinite"/>
+                      </p:stCondLst>
+                      <p:childTnLst>
+                        <p:par>
+                          <p:cTn id="29" fill="hold">
+                            <p:stCondLst>
+                              <p:cond delay="0"/>
+                            </p:stCondLst>
+                            <p:childTnLst>
+                              <p:par>
+                                <p:cTn id="30" presetID="10" presetClass="entr" presetSubtype="0" fill="hold" nodeType="clickEffect">
+                                  <p:stCondLst>
+                                    <p:cond delay="0"/>
+                                  </p:stCondLst>
+                                  <p:childTnLst>
+                                    <p:set>
+                                      <p:cBhvr>
+                                        <p:cTn id="31" dur="1" fill="hold">
+                                          <p:stCondLst>
+                                            <p:cond delay="0"/>
+                                          </p:stCondLst>
+                                        </p:cTn>
+                                        <p:tgtEl>
+                                          <p:spTgt spid="119"/>
+                                        </p:tgtEl>
+                                        <p:attrNameLst>
+                                          <p:attrName>style.visibility</p:attrName>
+                                        </p:attrNameLst>
+                                      </p:cBhvr>
+                                      <p:to>
+                                        <p:strVal val="visible"/>
+                                      </p:to>
+                                    </p:set>
+                                    <p:animEffect transition="in" filter="fade">
+                                      <p:cBhvr>
+                                        <p:cTn id="32" dur="500"/>
+                                        <p:tgtEl>
+                                          <p:spTgt spid="119"/>
+                                        </p:tgtEl>
+                                      </p:cBhvr>
+                                    </p:animEffect>
+                                  </p:childTnLst>
+                                </p:cTn>
+                              </p:par>
+                              <p:par>
+                                <p:cTn id="33" presetID="10" presetClass="entr" presetSubtype="0" fill="hold" nodeType="withEffect">
+                                  <p:stCondLst>
+                                    <p:cond delay="0"/>
+                                  </p:stCondLst>
+                                  <p:childTnLst>
+                                    <p:set>
+                                      <p:cBhvr>
+                                        <p:cTn id="34" dur="1" fill="hold">
+                                          <p:stCondLst>
+                                            <p:cond delay="0"/>
+                                          </p:stCondLst>
+                                        </p:cTn>
+                                        <p:tgtEl>
+                                          <p:spTgt spid="120"/>
+                                        </p:tgtEl>
+                                        <p:attrNameLst>
+                                          <p:attrName>style.visibility</p:attrName>
+                                        </p:attrNameLst>
+                                      </p:cBhvr>
+                                      <p:to>
+                                        <p:strVal val="visible"/>
+                                      </p:to>
+                                    </p:set>
+                                    <p:animEffect transition="in" filter="fade">
+                                      <p:cBhvr>
+                                        <p:cTn id="35" dur="500"/>
+                                        <p:tgtEl>
+                                          <p:spTgt spid="120"/>
+                                        </p:tgtEl>
+                                      </p:cBhvr>
+                                    </p:animEffect>
+                                  </p:childTnLst>
+                                </p:cTn>
+                              </p:par>
+                            </p:childTnLst>
+                          </p:cTn>
+                        </p:par>
+                      </p:childTnLst>
+                    </p:cTn>
+                  </p:par>
+                </p:childTnLst>
+              </p:cTn>
+              <p:prevCondLst>
+                <p:cond evt="onPrev" delay="0">
+                  <p:tgtEl>
+                    <p:sldTgt/>
+                  </p:tgtEl>
+                </p:cond>
+              </p:prevCondLst>
+              <p:nextCondLst>
+                <p:cond evt="onNext" delay="0">
+                  <p:tgtEl>
+                    <p:sldTgt/>
+                  </p:tgtEl>
+                </p:cond>
+              </p:nextCondLst>
+            </p:seq>
+          </p:childTnLst>
+        </p:cTn>
+      </p:par>
+    </p:tnLst>
+  </p:timing>
 </p:sld>
 </file>
 

--- a/course/lectures/act-2-delegation-and-control/02-modeling/2-2-Modeling-1-Purposeful-Reduction.pptx
+++ b/course/lectures/act-2-delegation-and-control/02-modeling/2-2-Modeling-1-Purposeful-Reduction.pptx
@@ -975,6 +975,12 @@
           <a:p>
             <a:r>
               <a:rPr dirty="0"/>
+              <a:t>The previous slide posed the question. This slide answers 'of what?' - here is the design the 8-hour obligation is about.</a:t>
+            </a:r>
+          </a:p>
+          <a:p>
+            <a:r>
+              <a:rPr dirty="0"/>
               <a:t>Territory an ECE student grasps in thirty seconds - that is why it, and not a software system, carries the method.</a:t>
             </a:r>
           </a:p>
@@ -987,7 +993,7 @@
           <a:p>
             <a:r>
               <a:rPr dirty="0"/>
-              <a:t>Exactly one engineering question (verbatim): can the controller exhaust the battery before completing an 8-hour operating period?</a:t>
+              <a:t>The footer restates the specification in the room's own words: can the battery run out before the 8 hours end? Same obligation, informal register.</a:t>
             </a:r>
           </a:p>
         </p:txBody>
@@ -9156,7 +9162,7 @@
                   <a:srgbClr val="8E6F3E"/>
                 </a:solidFill>
               </a:rPr>
-              <a:t>THE METHOD, WORKED</a:t>
+              <a:t>THE DESIGN, BEFORE ANY MODEL</a:t>
             </a:r>
           </a:p>
         </p:txBody>

--- a/course/lectures/act-2-delegation-and-control/02-modeling/2-2-Modeling-1-Purposeful-Reduction.pptx
+++ b/course/lectures/act-2-delegation-and-control/02-modeling/2-2-Modeling-1-Purposeful-Reduction.pptx
@@ -916,7 +916,19 @@
           <a:p>
             <a:r>
               <a:rPr dirty="0"/>
+              <a:t>This slide teaches the general pattern; the next one instantiates it. Walk the left column and the right rail together, one click at a time - the pattern, then its instance.</a:t>
+            </a:r>
+          </a:p>
+          <a:p>
+            <a:r>
+              <a:rPr dirty="0"/>
               <a:t>Question to ask of every model: what must this model preserve?</a:t>
+            </a:r>
+          </a:p>
+          <a:p>
+            <a:r>
+              <a:rPr dirty="0"/>
+              <a:t>The MODEL row is the one to dwell on: the obligation picks the distinctions, and the distinctions decide what the model has to say. Nothing is in the model because it happened to be available. The rail compresses the property to fit the column; the next slide writes it out in full.</a:t>
             </a:r>
           </a:p>
           <a:p>
@@ -8755,14 +8767,129 @@
       </p:sp>
       <p:sp>
         <p:nvSpPr>
-          <p:cNvPr id="101" name="B0"/>
+          <p:cNvPr id="100" name="HeadL"/>
+          <p:cNvSpPr txBox="1"/>
+          <p:nvPr/>
+        </p:nvSpPr>
+        <p:spPr>
+          <a:xfrm>
+            <a:off x="685800" y="1188720"/>
+            <a:ext cx="4983480" cy="251460"/>
+          </a:xfrm>
+          <a:prstGeom prst="rect">
+            <a:avLst/>
+          </a:prstGeom>
+          <a:noFill/>
+          <a:ln>
+            <a:noFill/>
+          </a:ln>
+        </p:spPr>
+        <p:txBody>
+          <a:bodyPr wrap="square" lIns="0" tIns="0" rIns="0" bIns="0" anchor="t"/>
+          <a:lstStyle/>
+          <a:p>
+            <a:pPr algn="l">
+              <a:spcAft>
+                <a:spcPts val="0"/>
+              </a:spcAft>
+              <a:buNone/>
+            </a:pPr>
+            <a:r>
+              <a:rPr lang="en-US" sz="1300" b="1" i="0" dirty="0">
+                <a:solidFill>
+                  <a:srgbClr val="8E6F3E"/>
+                </a:solidFill>
+              </a:rPr>
+              <a:t>THE PATTERN</a:t>
+            </a:r>
+          </a:p>
+        </p:txBody>
+      </p:sp>
+      <p:sp>
+        <p:nvSpPr>
+          <p:cNvPr id="101" name="HeadR"/>
+          <p:cNvSpPr txBox="1"/>
+          <p:nvPr/>
+        </p:nvSpPr>
+        <p:spPr>
+          <a:xfrm>
+            <a:off x="5852160" y="1188720"/>
+            <a:ext cx="2606040" cy="251460"/>
+          </a:xfrm>
+          <a:prstGeom prst="rect">
+            <a:avLst/>
+          </a:prstGeom>
+          <a:noFill/>
+          <a:ln>
+            <a:noFill/>
+          </a:ln>
+        </p:spPr>
+        <p:txBody>
+          <a:bodyPr wrap="square" lIns="0" tIns="0" rIns="0" bIns="0" anchor="t"/>
+          <a:lstStyle/>
+          <a:p>
+            <a:pPr algn="l">
+              <a:spcAft>
+                <a:spcPts val="0"/>
+              </a:spcAft>
+              <a:buNone/>
+            </a:pPr>
+            <a:r>
+              <a:rPr lang="en-US" sz="1300" b="1" i="0" dirty="0">
+                <a:solidFill>
+                  <a:srgbClr val="8E6F3E"/>
+                </a:solidFill>
+              </a:rPr>
+              <a:t>THE BATTERY</a:t>
+            </a:r>
+          </a:p>
+        </p:txBody>
+      </p:sp>
+      <p:sp>
+        <p:nvSpPr>
+          <p:cNvPr id="105" name="Rail"/>
           <p:cNvSpPr/>
           <p:nvPr/>
         </p:nvSpPr>
         <p:spPr>
           <a:xfrm>
-            <a:off x="914400" y="1143000"/>
-            <a:ext cx="7315200" cy="822960"/>
+            <a:off x="5749290" y="1188720"/>
+            <a:ext cx="22860" cy="3726180"/>
+          </a:xfrm>
+          <a:prstGeom prst="rect">
+            <a:avLst/>
+          </a:prstGeom>
+          <a:solidFill>
+            <a:srgbClr val="C9B991"/>
+          </a:solidFill>
+          <a:ln>
+            <a:noFill/>
+          </a:ln>
+        </p:spPr>
+        <p:txBody>
+          <a:bodyPr wrap="square" lIns="27432" tIns="22860" rIns="27432" bIns="22860" anchor="ctr"/>
+          <a:lstStyle/>
+          <a:p>
+            <a:pPr algn="l">
+              <a:spcAft>
+                <a:spcPts val="0"/>
+              </a:spcAft>
+              <a:buNone/>
+            </a:pPr>
+            <a:endParaRPr lang="en-US"/>
+          </a:p>
+        </p:txBody>
+      </p:sp>
+      <p:sp>
+        <p:nvSpPr>
+          <p:cNvPr id="110" name="B110"/>
+          <p:cNvSpPr/>
+          <p:nvPr/>
+        </p:nvSpPr>
+        <p:spPr>
+          <a:xfrm>
+            <a:off x="685800" y="1508760"/>
+            <a:ext cx="4983480" cy="731520"/>
           </a:xfrm>
           <a:prstGeom prst="rect">
             <a:avLst/>
@@ -8780,12 +8907,12 @@
           <a:p>
             <a:pPr algn="ctr">
               <a:spcAft>
-                <a:spcPts val="400"/>
+                <a:spcPts val="300"/>
               </a:spcAft>
               <a:buNone/>
             </a:pPr>
             <a:r>
-              <a:rPr lang="en-US" sz="2000" b="1" dirty="0">
+              <a:rPr lang="en-US" sz="1800" b="1" i="0" dirty="0">
                 <a:solidFill>
                   <a:srgbClr val="FFFFFF"/>
                 </a:solidFill>
@@ -8801,26 +8928,376 @@
               <a:buNone/>
             </a:pPr>
             <a:r>
-              <a:rPr lang="en-US" sz="1600" b="0" dirty="0">
+              <a:rPr lang="en-US" sz="1300" b="0" i="0" dirty="0">
                 <a:solidFill>
                   <a:srgbClr val="FFFFFF"/>
                 </a:solidFill>
               </a:rPr>
               <a:t>what the system must guarantee</a:t>
+            </a:r>
+          </a:p>
+        </p:txBody>
+      </p:sp>
+      <p:sp>
+        <p:nvSpPr>
+          <p:cNvPr id="111" name="R111"/>
+          <p:cNvSpPr/>
+          <p:nvPr/>
+        </p:nvSpPr>
+        <p:spPr>
+          <a:xfrm>
+            <a:off x="5852160" y="1508760"/>
+            <a:ext cx="2606040" cy="731520"/>
+          </a:xfrm>
+          <a:prstGeom prst="rect">
+            <a:avLst/>
+          </a:prstGeom>
+          <a:solidFill>
+            <a:srgbClr val="FBF8F2"/>
+          </a:solidFill>
+          <a:ln w="12700">
+            <a:solidFill>
+              <a:srgbClr val="C9B991"/>
+            </a:solidFill>
+          </a:ln>
+        </p:spPr>
+        <p:txBody>
+          <a:bodyPr wrap="square" lIns="27432" tIns="22860" rIns="27432" bIns="22860" anchor="ctr"/>
+          <a:lstStyle/>
+          <a:p>
+            <a:pPr algn="ctr">
+              <a:spcAft>
+                <a:spcPts val="0"/>
+              </a:spcAft>
+              <a:buNone/>
+            </a:pPr>
+            <a:r>
+              <a:rPr lang="en-US" sz="1400" b="1" i="0" dirty="0">
+                <a:solidFill>
+                  <a:srgbClr val="5C4826"/>
+                </a:solidFill>
+              </a:rPr>
+              <a:t>≥ 8 h above V_min</a:t>
+            </a:r>
+          </a:p>
+        </p:txBody>
+      </p:sp>
+      <p:sp>
+        <p:nvSpPr>
+          <p:cNvPr id="112" name="B112"/>
+          <p:cNvSpPr/>
+          <p:nvPr/>
+        </p:nvSpPr>
+        <p:spPr>
+          <a:xfrm>
+            <a:off x="685800" y="2400300"/>
+            <a:ext cx="4983480" cy="731520"/>
+          </a:xfrm>
+          <a:prstGeom prst="rect">
+            <a:avLst/>
+          </a:prstGeom>
+          <a:solidFill>
+            <a:srgbClr val="555960"/>
+          </a:solidFill>
+          <a:ln>
+            <a:noFill/>
+          </a:ln>
+        </p:spPr>
+        <p:txBody>
+          <a:bodyPr wrap="square" lIns="27432" tIns="22860" rIns="27432" bIns="22860" anchor="ctr"/>
+          <a:lstStyle/>
+          <a:p>
+            <a:pPr algn="ctr">
+              <a:spcAft>
+                <a:spcPts val="300"/>
+              </a:spcAft>
+              <a:buNone/>
+            </a:pPr>
+            <a:r>
+              <a:rPr lang="en-US" sz="1800" b="1" i="0" dirty="0">
+                <a:solidFill>
+                  <a:srgbClr val="FFFFFF"/>
+                </a:solidFill>
+              </a:rPr>
+              <a:t>REQUIRED DISTINCTIONS</a:t>
+            </a:r>
+          </a:p>
+          <a:p>
+            <a:pPr algn="ctr">
+              <a:spcAft>
+                <a:spcPts val="0"/>
+              </a:spcAft>
+              <a:buNone/>
+            </a:pPr>
+            <a:r>
+              <a:rPr lang="en-US" sz="1300" b="0" i="0" dirty="0">
+                <a:solidFill>
+                  <a:srgbClr val="FFFFFF"/>
+                </a:solidFill>
+              </a:rPr>
+              <a:t>what the model must preserve</a:t>
+            </a:r>
+          </a:p>
+        </p:txBody>
+      </p:sp>
+      <p:sp>
+        <p:nvSpPr>
+          <p:cNvPr id="113" name="R113"/>
+          <p:cNvSpPr/>
+          <p:nvPr/>
+        </p:nvSpPr>
+        <p:spPr>
+          <a:xfrm>
+            <a:off x="5852160" y="2400300"/>
+            <a:ext cx="2606040" cy="731520"/>
+          </a:xfrm>
+          <a:prstGeom prst="rect">
+            <a:avLst/>
+          </a:prstGeom>
+          <a:solidFill>
+            <a:srgbClr val="FBF8F2"/>
+          </a:solidFill>
+          <a:ln w="12700">
+            <a:solidFill>
+              <a:srgbClr val="C9B991"/>
+            </a:solidFill>
+          </a:ln>
+        </p:spPr>
+        <p:txBody>
+          <a:bodyPr wrap="square" lIns="27432" tIns="22860" rIns="27432" bIns="22860" anchor="ctr"/>
+          <a:lstStyle/>
+          <a:p>
+            <a:pPr algn="ctr">
+              <a:spcAft>
+                <a:spcPts val="0"/>
+              </a:spcAft>
+              <a:buNone/>
+            </a:pPr>
+            <a:r>
+              <a:rPr lang="en-US" sz="1200" b="0" i="0" dirty="0">
+                <a:solidFill>
+                  <a:srgbClr val="5C4826"/>
+                </a:solidFill>
+              </a:rPr>
+              <a:t>operating mode · power · duration · usable energy</a:t>
+            </a:r>
+          </a:p>
+        </p:txBody>
+      </p:sp>
+      <p:sp>
+        <p:nvSpPr>
+          <p:cNvPr id="114" name="B114"/>
+          <p:cNvSpPr/>
+          <p:nvPr/>
+        </p:nvSpPr>
+        <p:spPr>
+          <a:xfrm>
+            <a:off x="685800" y="3291840"/>
+            <a:ext cx="4983480" cy="731520"/>
+          </a:xfrm>
+          <a:prstGeom prst="rect">
+            <a:avLst/>
+          </a:prstGeom>
+          <a:solidFill>
+            <a:srgbClr val="8E6F3E"/>
+          </a:solidFill>
+          <a:ln>
+            <a:noFill/>
+          </a:ln>
+        </p:spPr>
+        <p:txBody>
+          <a:bodyPr wrap="square" lIns="27432" tIns="22860" rIns="27432" bIns="22860" anchor="ctr"/>
+          <a:lstStyle/>
+          <a:p>
+            <a:pPr algn="ctr">
+              <a:spcAft>
+                <a:spcPts val="300"/>
+              </a:spcAft>
+              <a:buNone/>
+            </a:pPr>
+            <a:r>
+              <a:rPr lang="en-US" sz="1800" b="1" i="0" dirty="0">
+                <a:solidFill>
+                  <a:srgbClr val="FFFFFF"/>
+                </a:solidFill>
+              </a:rPr>
+              <a:t>MODEL</a:t>
+            </a:r>
+          </a:p>
+          <a:p>
+            <a:pPr algn="ctr">
+              <a:spcAft>
+                <a:spcPts val="0"/>
+              </a:spcAft>
+              <a:buNone/>
+            </a:pPr>
+            <a:r>
+              <a:rPr lang="en-US" sz="1300" b="0" i="0" dirty="0">
+                <a:solidFill>
+                  <a:srgbClr val="FFFFFF"/>
+                </a:solidFill>
+              </a:rPr>
+              <a:t>the smallest statement that answers the question</a:t>
+            </a:r>
+          </a:p>
+        </p:txBody>
+      </p:sp>
+      <p:sp>
+        <p:nvSpPr>
+          <p:cNvPr id="115" name="R115"/>
+          <p:cNvSpPr/>
+          <p:nvPr/>
+        </p:nvSpPr>
+        <p:spPr>
+          <a:xfrm>
+            <a:off x="5852160" y="3291840"/>
+            <a:ext cx="2606040" cy="731520"/>
+          </a:xfrm>
+          <a:prstGeom prst="rect">
+            <a:avLst/>
+          </a:prstGeom>
+          <a:solidFill>
+            <a:srgbClr val="FBF8F2"/>
+          </a:solidFill>
+          <a:ln w="12700">
+            <a:solidFill>
+              <a:srgbClr val="C9B991"/>
+            </a:solidFill>
+          </a:ln>
+        </p:spPr>
+        <p:txBody>
+          <a:bodyPr wrap="square" lIns="27432" tIns="22860" rIns="27432" bIns="22860" anchor="ctr"/>
+          <a:lstStyle/>
+          <a:p>
+            <a:pPr algn="ctr">
+              <a:spcAft>
+                <a:spcPts val="0"/>
+              </a:spcAft>
+              <a:buNone/>
+            </a:pPr>
+            <a:r>
+              <a:rPr lang="en-US" sz="1300" b="1" i="0" dirty="0">
+                <a:solidFill>
+                  <a:srgbClr val="5C4826"/>
+                </a:solidFill>
+              </a:rPr>
+              <a:t>Σ P(m)·t(m)  ≤  E_usable</a:t>
+            </a:r>
+          </a:p>
+        </p:txBody>
+      </p:sp>
+      <p:sp>
+        <p:nvSpPr>
+          <p:cNvPr id="116" name="B116"/>
+          <p:cNvSpPr/>
+          <p:nvPr/>
+        </p:nvSpPr>
+        <p:spPr>
+          <a:xfrm>
+            <a:off x="685800" y="4183380"/>
+            <a:ext cx="4983480" cy="731520"/>
+          </a:xfrm>
+          <a:prstGeom prst="rect">
+            <a:avLst/>
+          </a:prstGeom>
+          <a:solidFill>
+            <a:srgbClr val="C9B991"/>
+          </a:solidFill>
+          <a:ln>
+            <a:noFill/>
+          </a:ln>
+        </p:spPr>
+        <p:txBody>
+          <a:bodyPr wrap="square" lIns="27432" tIns="22860" rIns="27432" bIns="22860" anchor="ctr"/>
+          <a:lstStyle/>
+          <a:p>
+            <a:pPr algn="ctr">
+              <a:spcAft>
+                <a:spcPts val="300"/>
+              </a:spcAft>
+              <a:buNone/>
+            </a:pPr>
+            <a:r>
+              <a:rPr lang="en-US" sz="1800" b="1" i="0" dirty="0">
+                <a:solidFill>
+                  <a:srgbClr val="5C4826"/>
+                </a:solidFill>
+              </a:rPr>
+              <a:t>LEGITIMATE FREEDOM</a:t>
+            </a:r>
+          </a:p>
+          <a:p>
+            <a:pPr algn="ctr">
+              <a:spcAft>
+                <a:spcPts val="0"/>
+              </a:spcAft>
+              <a:buNone/>
+            </a:pPr>
+            <a:r>
+              <a:rPr lang="en-US" sz="1300" b="0" i="0" dirty="0">
+                <a:solidFill>
+                  <a:srgbClr val="353638"/>
+                </a:solidFill>
+              </a:rPr>
+              <a:t>everything else: the agent’s degrees of freedom</a:t>
+            </a:r>
+          </a:p>
+        </p:txBody>
+      </p:sp>
+      <p:sp>
+        <p:nvSpPr>
+          <p:cNvPr id="117" name="R117"/>
+          <p:cNvSpPr/>
+          <p:nvPr/>
+        </p:nvSpPr>
+        <p:spPr>
+          <a:xfrm>
+            <a:off x="5852160" y="4183380"/>
+            <a:ext cx="2606040" cy="731520"/>
+          </a:xfrm>
+          <a:prstGeom prst="rect">
+            <a:avLst/>
+          </a:prstGeom>
+          <a:solidFill>
+            <a:srgbClr val="FBF8F2"/>
+          </a:solidFill>
+          <a:ln w="12700">
+            <a:solidFill>
+              <a:srgbClr val="C9B991"/>
+            </a:solidFill>
+          </a:ln>
+        </p:spPr>
+        <p:txBody>
+          <a:bodyPr wrap="square" lIns="27432" tIns="22860" rIns="27432" bIns="22860" anchor="ctr"/>
+          <a:lstStyle/>
+          <a:p>
+            <a:pPr algn="ctr">
+              <a:spcAft>
+                <a:spcPts val="0"/>
+              </a:spcAft>
+              <a:buNone/>
+            </a:pPr>
+            <a:r>
+              <a:rPr lang="en-US" sz="1200" b="0" i="0" dirty="0">
+                <a:solidFill>
+                  <a:srgbClr val="5C4826"/>
+                </a:solidFill>
+              </a:rPr>
+              <a:t>packet format · task names · PWM internals · display contents</a:t>
             </a:r>
           </a:p>
         </p:txBody>
       </p:sp>
       <p:cxnSp>
         <p:nvCxnSpPr>
-          <p:cNvPr id="102" name="AR0"/>
+          <p:cNvPr id="120" name="A0"/>
           <p:cNvCxnSpPr/>
           <p:nvPr/>
         </p:nvCxnSpPr>
         <p:spPr>
           <a:xfrm>
-            <a:off x="4572000" y="1965960"/>
-            <a:ext cx="0" cy="320040"/>
+            <a:off x="3177540" y="2240280"/>
+            <a:ext cx="0" cy="160020"/>
           </a:xfrm>
           <a:prstGeom prst="straightConnector1">
             <a:avLst/>
@@ -8833,74 +9310,16 @@
           </a:ln>
         </p:spPr>
       </p:cxnSp>
-      <p:sp>
-        <p:nvSpPr>
-          <p:cNvPr id="103" name="B1"/>
-          <p:cNvSpPr/>
-          <p:nvPr/>
-        </p:nvSpPr>
-        <p:spPr>
-          <a:xfrm>
-            <a:off x="914400" y="2286000"/>
-            <a:ext cx="7315200" cy="822960"/>
-          </a:xfrm>
-          <a:prstGeom prst="rect">
-            <a:avLst/>
-          </a:prstGeom>
-          <a:solidFill>
-            <a:srgbClr val="555960"/>
-          </a:solidFill>
-          <a:ln>
-            <a:noFill/>
-          </a:ln>
-        </p:spPr>
-        <p:txBody>
-          <a:bodyPr wrap="square" lIns="27432" tIns="22860" rIns="27432" bIns="22860" anchor="ctr"/>
-          <a:lstStyle/>
-          <a:p>
-            <a:pPr algn="ctr">
-              <a:spcAft>
-                <a:spcPts val="400"/>
-              </a:spcAft>
-              <a:buNone/>
-            </a:pPr>
-            <a:r>
-              <a:rPr lang="en-US" sz="2000" b="1" dirty="0">
-                <a:solidFill>
-                  <a:srgbClr val="FFFFFF"/>
-                </a:solidFill>
-              </a:rPr>
-              <a:t>REQUIRED DISTINCTIONS</a:t>
-            </a:r>
-          </a:p>
-          <a:p>
-            <a:pPr algn="ctr">
-              <a:spcAft>
-                <a:spcPts val="0"/>
-              </a:spcAft>
-              <a:buNone/>
-            </a:pPr>
-            <a:r>
-              <a:rPr lang="en-US" sz="1600" b="0" dirty="0">
-                <a:solidFill>
-                  <a:srgbClr val="FFFFFF"/>
-                </a:solidFill>
-              </a:rPr>
-              <a:t>what the model must preserve</a:t>
-            </a:r>
-          </a:p>
-        </p:txBody>
-      </p:sp>
       <p:cxnSp>
         <p:nvCxnSpPr>
-          <p:cNvPr id="104" name="AR1"/>
+          <p:cNvPr id="121" name="A1"/>
           <p:cNvCxnSpPr/>
           <p:nvPr/>
         </p:nvCxnSpPr>
         <p:spPr>
           <a:xfrm>
-            <a:off x="4572000" y="3108960"/>
-            <a:ext cx="0" cy="320040"/>
+            <a:off x="3177540" y="3131820"/>
+            <a:ext cx="0" cy="160020"/>
           </a:xfrm>
           <a:prstGeom prst="straightConnector1">
             <a:avLst/>
@@ -8913,46 +9332,50 @@
           </a:ln>
         </p:spPr>
       </p:cxnSp>
-      <p:sp>
-        <p:nvSpPr>
-          <p:cNvPr id="105" name="B2"/>
-          <p:cNvSpPr/>
-          <p:nvPr/>
-        </p:nvSpPr>
-        <p:spPr>
-          <a:xfrm>
-            <a:off x="914400" y="3429000"/>
-            <a:ext cx="7315200" cy="822960"/>
-          </a:xfrm>
-          <a:prstGeom prst="rect">
-            <a:avLst/>
-          </a:prstGeom>
-          <a:solidFill>
-            <a:srgbClr val="C9B991"/>
-          </a:solidFill>
+      <p:cxnSp>
+        <p:nvCxnSpPr>
+          <p:cNvPr id="122" name="A2"/>
+          <p:cNvCxnSpPr/>
+          <p:nvPr/>
+        </p:nvCxnSpPr>
+        <p:spPr>
+          <a:xfrm>
+            <a:off x="3177540" y="4023360"/>
+            <a:ext cx="0" cy="160020"/>
+          </a:xfrm>
+          <a:prstGeom prst="straightConnector1">
+            <a:avLst/>
+          </a:prstGeom>
+          <a:ln w="28575">
+            <a:solidFill>
+              <a:srgbClr val="8E6F3E"/>
+            </a:solidFill>
+            <a:tailEnd type="triangle" w="med" len="med"/>
+          </a:ln>
+        </p:spPr>
+      </p:cxnSp>
+      <p:sp>
+        <p:nvSpPr>
+          <p:cNvPr id="130" name="Ital"/>
+          <p:cNvSpPr txBox="1"/>
+          <p:nvPr/>
+        </p:nvSpPr>
+        <p:spPr>
+          <a:xfrm>
+            <a:off x="685800" y="5120640"/>
+            <a:ext cx="7772400" cy="365760"/>
+          </a:xfrm>
+          <a:prstGeom prst="rect">
+            <a:avLst/>
+          </a:prstGeom>
+          <a:noFill/>
           <a:ln>
             <a:noFill/>
           </a:ln>
         </p:spPr>
         <p:txBody>
-          <a:bodyPr wrap="square" lIns="27432" tIns="22860" rIns="27432" bIns="22860" anchor="ctr"/>
-          <a:lstStyle/>
-          <a:p>
-            <a:pPr algn="ctr">
-              <a:spcAft>
-                <a:spcPts val="400"/>
-              </a:spcAft>
-              <a:buNone/>
-            </a:pPr>
-            <a:r>
-              <a:rPr lang="en-US" sz="2000" b="1" dirty="0">
-                <a:solidFill>
-                  <a:srgbClr val="5C4826"/>
-                </a:solidFill>
-              </a:rPr>
-              <a:t>LEGITIMATE FREEDOM</a:t>
-            </a:r>
-          </a:p>
+          <a:bodyPr wrap="square" lIns="0" tIns="0" rIns="0" bIns="0" anchor="t"/>
+          <a:lstStyle/>
           <a:p>
             <a:pPr algn="ctr">
               <a:spcAft>
@@ -8961,46 +9384,6 @@
               <a:buNone/>
             </a:pPr>
             <a:r>
-              <a:rPr lang="en-US" sz="1600" dirty="0">
-                <a:solidFill>
-                  <a:srgbClr val="353638"/>
-                </a:solidFill>
-              </a:rPr>
-              <a:t>everything else: the agent’s degrees of freedom</a:t>
-            </a:r>
-          </a:p>
-        </p:txBody>
-      </p:sp>
-      <p:sp>
-        <p:nvSpPr>
-          <p:cNvPr id="106" name="Ital"/>
-          <p:cNvSpPr txBox="1"/>
-          <p:nvPr/>
-        </p:nvSpPr>
-        <p:spPr>
-          <a:xfrm>
-            <a:off x="685800" y="4526280"/>
-            <a:ext cx="7772400" cy="411480"/>
-          </a:xfrm>
-          <a:prstGeom prst="rect">
-            <a:avLst/>
-          </a:prstGeom>
-          <a:noFill/>
-          <a:ln>
-            <a:noFill/>
-          </a:ln>
-        </p:spPr>
-        <p:txBody>
-          <a:bodyPr wrap="square" lIns="0" tIns="0" rIns="0" bIns="0" anchor="t"/>
-          <a:lstStyle/>
-          <a:p>
-            <a:pPr algn="ctr">
-              <a:spcAft>
-                <a:spcPts val="0"/>
-              </a:spcAft>
-              <a:buNone/>
-            </a:pPr>
-            <a:r>
               <a:rPr lang="en-US" sz="1700" b="0" i="1" dirty="0">
                 <a:solidFill>
                   <a:srgbClr val="555960"/>
@@ -9013,7 +9396,7 @@
       </p:sp>
       <p:sp>
         <p:nvSpPr>
-          <p:cNvPr id="107" name="FooterBand"/>
+          <p:cNvPr id="131" name="FooterBand"/>
           <p:cNvSpPr/>
           <p:nvPr/>
         </p:nvSpPr>
@@ -9043,7 +9426,7 @@
               <a:buNone/>
             </a:pPr>
             <a:r>
-              <a:rPr lang="en-US" sz="2000" b="1" dirty="0">
+              <a:rPr lang="en-US" sz="2000" b="1" i="0" dirty="0">
                 <a:solidFill>
                   <a:srgbClr val="FFFFFF"/>
                 </a:solidFill>
@@ -9058,6 +9441,458 @@
   <p:clrMapOvr>
     <a:masterClrMapping/>
   </p:clrMapOvr>
+  <p:timing>
+    <p:tnLst>
+      <p:par>
+        <p:cTn id="1" dur="indefinite" restart="never" nodeType="tmRoot">
+          <p:childTnLst>
+            <p:seq concurrent="1" nextAc="seek">
+              <p:cTn id="2" dur="indefinite" nodeType="mainSeq">
+                <p:childTnLst>
+                  <p:par>
+                    <p:cTn id="3" fill="hold">
+                      <p:stCondLst>
+                        <p:cond delay="indefinite"/>
+                      </p:stCondLst>
+                      <p:childTnLst>
+                        <p:par>
+                          <p:cTn id="4" fill="hold">
+                            <p:stCondLst>
+                              <p:cond delay="0"/>
+                            </p:stCondLst>
+                            <p:childTnLst>
+                              <p:par>
+                                <p:cTn id="5" presetID="10" presetClass="entr" presetSubtype="0" fill="hold" nodeType="clickEffect">
+                                  <p:stCondLst>
+                                    <p:cond delay="0"/>
+                                  </p:stCondLst>
+                                  <p:childTnLst>
+                                    <p:set>
+                                      <p:cBhvr>
+                                        <p:cTn id="6" dur="1" fill="hold">
+                                          <p:stCondLst>
+                                            <p:cond delay="0"/>
+                                          </p:stCondLst>
+                                        </p:cTn>
+                                        <p:tgtEl>
+                                          <p:spTgt spid="120"/>
+                                        </p:tgtEl>
+                                        <p:attrNameLst>
+                                          <p:attrName>style.visibility</p:attrName>
+                                        </p:attrNameLst>
+                                      </p:cBhvr>
+                                      <p:to>
+                                        <p:strVal val="visible"/>
+                                      </p:to>
+                                    </p:set>
+                                    <p:animEffect transition="in" filter="fade">
+                                      <p:cBhvr>
+                                        <p:cTn id="7" dur="500"/>
+                                        <p:tgtEl>
+                                          <p:spTgt spid="120"/>
+                                        </p:tgtEl>
+                                      </p:cBhvr>
+                                    </p:animEffect>
+                                  </p:childTnLst>
+                                </p:cTn>
+                              </p:par>
+                              <p:par>
+                                <p:cTn id="8" presetID="10" presetClass="entr" presetSubtype="0" fill="hold" nodeType="withEffect">
+                                  <p:stCondLst>
+                                    <p:cond delay="0"/>
+                                  </p:stCondLst>
+                                  <p:childTnLst>
+                                    <p:set>
+                                      <p:cBhvr>
+                                        <p:cTn id="9" dur="1" fill="hold">
+                                          <p:stCondLst>
+                                            <p:cond delay="0"/>
+                                          </p:stCondLst>
+                                        </p:cTn>
+                                        <p:tgtEl>
+                                          <p:spTgt spid="112"/>
+                                        </p:tgtEl>
+                                        <p:attrNameLst>
+                                          <p:attrName>style.visibility</p:attrName>
+                                        </p:attrNameLst>
+                                      </p:cBhvr>
+                                      <p:to>
+                                        <p:strVal val="visible"/>
+                                      </p:to>
+                                    </p:set>
+                                    <p:animEffect transition="in" filter="fade">
+                                      <p:cBhvr>
+                                        <p:cTn id="10" dur="500"/>
+                                        <p:tgtEl>
+                                          <p:spTgt spid="112"/>
+                                        </p:tgtEl>
+                                      </p:cBhvr>
+                                    </p:animEffect>
+                                  </p:childTnLst>
+                                </p:cTn>
+                              </p:par>
+                              <p:par>
+                                <p:cTn id="11" presetID="10" presetClass="entr" presetSubtype="0" fill="hold" nodeType="withEffect">
+                                  <p:stCondLst>
+                                    <p:cond delay="0"/>
+                                  </p:stCondLst>
+                                  <p:childTnLst>
+                                    <p:set>
+                                      <p:cBhvr>
+                                        <p:cTn id="12" dur="1" fill="hold">
+                                          <p:stCondLst>
+                                            <p:cond delay="0"/>
+                                          </p:stCondLst>
+                                        </p:cTn>
+                                        <p:tgtEl>
+                                          <p:spTgt spid="113"/>
+                                        </p:tgtEl>
+                                        <p:attrNameLst>
+                                          <p:attrName>style.visibility</p:attrName>
+                                        </p:attrNameLst>
+                                      </p:cBhvr>
+                                      <p:to>
+                                        <p:strVal val="visible"/>
+                                      </p:to>
+                                    </p:set>
+                                    <p:animEffect transition="in" filter="fade">
+                                      <p:cBhvr>
+                                        <p:cTn id="13" dur="500"/>
+                                        <p:tgtEl>
+                                          <p:spTgt spid="113"/>
+                                        </p:tgtEl>
+                                      </p:cBhvr>
+                                    </p:animEffect>
+                                  </p:childTnLst>
+                                </p:cTn>
+                              </p:par>
+                            </p:childTnLst>
+                          </p:cTn>
+                        </p:par>
+                      </p:childTnLst>
+                    </p:cTn>
+                  </p:par>
+                  <p:par>
+                    <p:cTn id="14" fill="hold">
+                      <p:stCondLst>
+                        <p:cond delay="indefinite"/>
+                      </p:stCondLst>
+                      <p:childTnLst>
+                        <p:par>
+                          <p:cTn id="15" fill="hold">
+                            <p:stCondLst>
+                              <p:cond delay="0"/>
+                            </p:stCondLst>
+                            <p:childTnLst>
+                              <p:par>
+                                <p:cTn id="16" presetID="10" presetClass="entr" presetSubtype="0" fill="hold" nodeType="clickEffect">
+                                  <p:stCondLst>
+                                    <p:cond delay="0"/>
+                                  </p:stCondLst>
+                                  <p:childTnLst>
+                                    <p:set>
+                                      <p:cBhvr>
+                                        <p:cTn id="17" dur="1" fill="hold">
+                                          <p:stCondLst>
+                                            <p:cond delay="0"/>
+                                          </p:stCondLst>
+                                        </p:cTn>
+                                        <p:tgtEl>
+                                          <p:spTgt spid="121"/>
+                                        </p:tgtEl>
+                                        <p:attrNameLst>
+                                          <p:attrName>style.visibility</p:attrName>
+                                        </p:attrNameLst>
+                                      </p:cBhvr>
+                                      <p:to>
+                                        <p:strVal val="visible"/>
+                                      </p:to>
+                                    </p:set>
+                                    <p:animEffect transition="in" filter="fade">
+                                      <p:cBhvr>
+                                        <p:cTn id="18" dur="500"/>
+                                        <p:tgtEl>
+                                          <p:spTgt spid="121"/>
+                                        </p:tgtEl>
+                                      </p:cBhvr>
+                                    </p:animEffect>
+                                  </p:childTnLst>
+                                </p:cTn>
+                              </p:par>
+                              <p:par>
+                                <p:cTn id="19" presetID="10" presetClass="entr" presetSubtype="0" fill="hold" nodeType="withEffect">
+                                  <p:stCondLst>
+                                    <p:cond delay="0"/>
+                                  </p:stCondLst>
+                                  <p:childTnLst>
+                                    <p:set>
+                                      <p:cBhvr>
+                                        <p:cTn id="20" dur="1" fill="hold">
+                                          <p:stCondLst>
+                                            <p:cond delay="0"/>
+                                          </p:stCondLst>
+                                        </p:cTn>
+                                        <p:tgtEl>
+                                          <p:spTgt spid="114"/>
+                                        </p:tgtEl>
+                                        <p:attrNameLst>
+                                          <p:attrName>style.visibility</p:attrName>
+                                        </p:attrNameLst>
+                                      </p:cBhvr>
+                                      <p:to>
+                                        <p:strVal val="visible"/>
+                                      </p:to>
+                                    </p:set>
+                                    <p:animEffect transition="in" filter="fade">
+                                      <p:cBhvr>
+                                        <p:cTn id="21" dur="500"/>
+                                        <p:tgtEl>
+                                          <p:spTgt spid="114"/>
+                                        </p:tgtEl>
+                                      </p:cBhvr>
+                                    </p:animEffect>
+                                  </p:childTnLst>
+                                </p:cTn>
+                              </p:par>
+                              <p:par>
+                                <p:cTn id="22" presetID="10" presetClass="entr" presetSubtype="0" fill="hold" nodeType="withEffect">
+                                  <p:stCondLst>
+                                    <p:cond delay="0"/>
+                                  </p:stCondLst>
+                                  <p:childTnLst>
+                                    <p:set>
+                                      <p:cBhvr>
+                                        <p:cTn id="23" dur="1" fill="hold">
+                                          <p:stCondLst>
+                                            <p:cond delay="0"/>
+                                          </p:stCondLst>
+                                        </p:cTn>
+                                        <p:tgtEl>
+                                          <p:spTgt spid="115"/>
+                                        </p:tgtEl>
+                                        <p:attrNameLst>
+                                          <p:attrName>style.visibility</p:attrName>
+                                        </p:attrNameLst>
+                                      </p:cBhvr>
+                                      <p:to>
+                                        <p:strVal val="visible"/>
+                                      </p:to>
+                                    </p:set>
+                                    <p:animEffect transition="in" filter="fade">
+                                      <p:cBhvr>
+                                        <p:cTn id="24" dur="500"/>
+                                        <p:tgtEl>
+                                          <p:spTgt spid="115"/>
+                                        </p:tgtEl>
+                                      </p:cBhvr>
+                                    </p:animEffect>
+                                  </p:childTnLst>
+                                </p:cTn>
+                              </p:par>
+                            </p:childTnLst>
+                          </p:cTn>
+                        </p:par>
+                      </p:childTnLst>
+                    </p:cTn>
+                  </p:par>
+                  <p:par>
+                    <p:cTn id="25" fill="hold">
+                      <p:stCondLst>
+                        <p:cond delay="indefinite"/>
+                      </p:stCondLst>
+                      <p:childTnLst>
+                        <p:par>
+                          <p:cTn id="26" fill="hold">
+                            <p:stCondLst>
+                              <p:cond delay="0"/>
+                            </p:stCondLst>
+                            <p:childTnLst>
+                              <p:par>
+                                <p:cTn id="27" presetID="10" presetClass="entr" presetSubtype="0" fill="hold" nodeType="clickEffect">
+                                  <p:stCondLst>
+                                    <p:cond delay="0"/>
+                                  </p:stCondLst>
+                                  <p:childTnLst>
+                                    <p:set>
+                                      <p:cBhvr>
+                                        <p:cTn id="28" dur="1" fill="hold">
+                                          <p:stCondLst>
+                                            <p:cond delay="0"/>
+                                          </p:stCondLst>
+                                        </p:cTn>
+                                        <p:tgtEl>
+                                          <p:spTgt spid="122"/>
+                                        </p:tgtEl>
+                                        <p:attrNameLst>
+                                          <p:attrName>style.visibility</p:attrName>
+                                        </p:attrNameLst>
+                                      </p:cBhvr>
+                                      <p:to>
+                                        <p:strVal val="visible"/>
+                                      </p:to>
+                                    </p:set>
+                                    <p:animEffect transition="in" filter="fade">
+                                      <p:cBhvr>
+                                        <p:cTn id="29" dur="500"/>
+                                        <p:tgtEl>
+                                          <p:spTgt spid="122"/>
+                                        </p:tgtEl>
+                                      </p:cBhvr>
+                                    </p:animEffect>
+                                  </p:childTnLst>
+                                </p:cTn>
+                              </p:par>
+                              <p:par>
+                                <p:cTn id="30" presetID="10" presetClass="entr" presetSubtype="0" fill="hold" nodeType="withEffect">
+                                  <p:stCondLst>
+                                    <p:cond delay="0"/>
+                                  </p:stCondLst>
+                                  <p:childTnLst>
+                                    <p:set>
+                                      <p:cBhvr>
+                                        <p:cTn id="31" dur="1" fill="hold">
+                                          <p:stCondLst>
+                                            <p:cond delay="0"/>
+                                          </p:stCondLst>
+                                        </p:cTn>
+                                        <p:tgtEl>
+                                          <p:spTgt spid="116"/>
+                                        </p:tgtEl>
+                                        <p:attrNameLst>
+                                          <p:attrName>style.visibility</p:attrName>
+                                        </p:attrNameLst>
+                                      </p:cBhvr>
+                                      <p:to>
+                                        <p:strVal val="visible"/>
+                                      </p:to>
+                                    </p:set>
+                                    <p:animEffect transition="in" filter="fade">
+                                      <p:cBhvr>
+                                        <p:cTn id="32" dur="500"/>
+                                        <p:tgtEl>
+                                          <p:spTgt spid="116"/>
+                                        </p:tgtEl>
+                                      </p:cBhvr>
+                                    </p:animEffect>
+                                  </p:childTnLst>
+                                </p:cTn>
+                              </p:par>
+                              <p:par>
+                                <p:cTn id="33" presetID="10" presetClass="entr" presetSubtype="0" fill="hold" nodeType="withEffect">
+                                  <p:stCondLst>
+                                    <p:cond delay="0"/>
+                                  </p:stCondLst>
+                                  <p:childTnLst>
+                                    <p:set>
+                                      <p:cBhvr>
+                                        <p:cTn id="34" dur="1" fill="hold">
+                                          <p:stCondLst>
+                                            <p:cond delay="0"/>
+                                          </p:stCondLst>
+                                        </p:cTn>
+                                        <p:tgtEl>
+                                          <p:spTgt spid="117"/>
+                                        </p:tgtEl>
+                                        <p:attrNameLst>
+                                          <p:attrName>style.visibility</p:attrName>
+                                        </p:attrNameLst>
+                                      </p:cBhvr>
+                                      <p:to>
+                                        <p:strVal val="visible"/>
+                                      </p:to>
+                                    </p:set>
+                                    <p:animEffect transition="in" filter="fade">
+                                      <p:cBhvr>
+                                        <p:cTn id="35" dur="500"/>
+                                        <p:tgtEl>
+                                          <p:spTgt spid="117"/>
+                                        </p:tgtEl>
+                                      </p:cBhvr>
+                                    </p:animEffect>
+                                  </p:childTnLst>
+                                </p:cTn>
+                              </p:par>
+                            </p:childTnLst>
+                          </p:cTn>
+                        </p:par>
+                      </p:childTnLst>
+                    </p:cTn>
+                  </p:par>
+                  <p:par>
+                    <p:cTn id="36" fill="hold">
+                      <p:stCondLst>
+                        <p:cond delay="indefinite"/>
+                      </p:stCondLst>
+                      <p:childTnLst>
+                        <p:par>
+                          <p:cTn id="37" fill="hold">
+                            <p:stCondLst>
+                              <p:cond delay="0"/>
+                            </p:stCondLst>
+                            <p:childTnLst>
+                              <p:par>
+                                <p:cTn id="38" presetID="10" presetClass="entr" presetSubtype="0" fill="hold" nodeType="clickEffect">
+                                  <p:stCondLst>
+                                    <p:cond delay="0"/>
+                                  </p:stCondLst>
+                                  <p:childTnLst>
+                                    <p:set>
+                                      <p:cBhvr>
+                                        <p:cTn id="39" dur="1" fill="hold">
+                                          <p:stCondLst>
+                                            <p:cond delay="0"/>
+                                          </p:stCondLst>
+                                        </p:cTn>
+                                        <p:tgtEl>
+                                          <p:spTgt spid="130"/>
+                                        </p:tgtEl>
+                                        <p:attrNameLst>
+                                          <p:attrName>style.visibility</p:attrName>
+                                        </p:attrNameLst>
+                                      </p:cBhvr>
+                                      <p:to>
+                                        <p:strVal val="visible"/>
+                                      </p:to>
+                                    </p:set>
+                                    <p:animEffect transition="in" filter="fade">
+                                      <p:cBhvr>
+                                        <p:cTn id="40" dur="500"/>
+                                        <p:tgtEl>
+                                          <p:spTgt spid="130"/>
+                                        </p:tgtEl>
+                                      </p:cBhvr>
+                                    </p:animEffect>
+                                  </p:childTnLst>
+                                </p:cTn>
+                              </p:par>
+                            </p:childTnLst>
+                          </p:cTn>
+                        </p:par>
+                      </p:childTnLst>
+                    </p:cTn>
+                  </p:par>
+                </p:childTnLst>
+              </p:cTn>
+              <p:prevCondLst>
+                <p:cond evt="onPrev" delay="0">
+                  <p:tgtEl>
+                    <p:sldTgt/>
+                  </p:tgtEl>
+                </p:cond>
+              </p:prevCondLst>
+              <p:nextCondLst>
+                <p:cond evt="onNext" delay="0">
+                  <p:tgtEl>
+                    <p:sldTgt/>
+                  </p:tgtEl>
+                </p:cond>
+              </p:nextCondLst>
+            </p:seq>
+          </p:childTnLst>
+        </p:cTn>
+      </p:par>
+    </p:tnLst>
+  </p:timing>
 </p:sld>
 </file>
 

--- a/course/lectures/act-2-delegation-and-control/02-modeling/2-2-Modeling-1-Purposeful-Reduction.pptx
+++ b/course/lectures/act-2-delegation-and-control/02-modeling/2-2-Modeling-1-Purposeful-Reduction.pptx
@@ -857,13 +857,19 @@
           <a:p>
             <a:r>
               <a:rPr dirty="0"/>
-              <a:t>The conceptual center of the lecture. Two directions of reasoning - top-down from the obligation, bottom-up from the proposed model - then both worked live on one embedded system.</a:t>
+              <a:t>The conceptual center of the lecture. One direction of reasoning, worked live on one embedded system: start from the engineering obligation, and let it decide what the model must preserve.</a:t>
             </a:r>
           </a:p>
           <a:p>
             <a:r>
               <a:rPr dirty="0"/>
-              <a:t>Spine strip: MODEL stage highlighted (stage 2 of the four-question discipline named on “Modeling is purposeful reduction”).</a:t>
+              <a:t>There is no bottom-up section. The question it used to ask - does every distinction we kept earn its place? - returns at the end of the lecture, as the economics of delegation.</a:t>
+            </a:r>
+          </a:p>
+          <a:p>
+            <a:r>
+              <a:rPr dirty="0"/>
+              <a:t>Spine strip: MODEL stage highlighted, stage 2 of the four-question discipline. The synthesis slide near the end of the lecture names all four; do not promise it here.</a:t>
             </a:r>
           </a:p>
           <a:p>

--- a/course/lectures/act-2-delegation-and-control/02-modeling/2-2-Modeling-1-Purposeful-Reduction.pptx
+++ b/course/lectures/act-2-delegation-and-control/02-modeling/2-2-Modeling-1-Purposeful-Reduction.pptx
@@ -1064,13 +1064,19 @@
           <a:p>
             <a:r>
               <a:rPr dirty="0"/>
+              <a:t>This is the previous slide's pattern instantiated - obligation, required distinctions, model, and an explicit list of what stayed free. Point back at the four-box flow once, then stay here.</a:t>
+            </a:r>
+          </a:p>
+          <a:p>
+            <a:r>
+              <a:rPr dirty="0"/>
               <a:t>The obligation (8+ hours above minimum safe voltage) demands: battery usable energy, power by operating mode, time in each mode, the safety threshold. Nothing else.</a:t>
             </a:r>
           </a:p>
           <a:p>
             <a:r>
               <a:rPr dirty="0"/>
-              <a:t>The system has become a small quantitative model; keep the math no harder than the sum. The PROPERTY beat of the spine happens here - point at it.</a:t>
+              <a:t>The system has become a small quantitative model; keep the math no harder than the sum. The PROPERTY beat of the spine happens here - point at it. It is the same property the previous slide's rail compressed.</a:t>
             </a:r>
           </a:p>
         </p:txBody>

--- a/course/lectures/act-2-delegation-and-control/02-modeling/2-2-Modeling-1-Purposeful-Reduction.pptx
+++ b/course/lectures/act-2-delegation-and-control/02-modeling/2-2-Modeling-1-Purposeful-Reduction.pptx
@@ -19822,7 +19822,7 @@
               <a:buNone/>
             </a:pPr>
             <a:r>
-              <a:rPr lang="en-US" sz="1300" b="1" i="0" dirty="0">
+              <a:rPr lang="en-US" sz="1400" b="1" i="0" dirty="0">
                 <a:solidFill>
                   <a:srgbClr val="8E6F3E"/>
                 </a:solidFill>
@@ -19904,7 +19904,7 @@
               <a:buNone/>
             </a:pPr>
             <a:r>
-              <a:rPr lang="en-US" sz="1300" b="1" i="0" dirty="0">
+              <a:rPr lang="en-US" sz="1400" b="1" i="0" dirty="0">
                 <a:solidFill>
                   <a:srgbClr val="8E6F3E"/>
                 </a:solidFill>
@@ -19938,7 +19938,7 @@
         </p:nvCxnSpPr>
         <p:spPr>
           <a:xfrm>
-            <a:off x="4572000" y="3383280"/>
+            <a:off x="3200400" y="3383280"/>
             <a:ext cx="0" cy="228600"/>
           </a:xfrm>
           <a:prstGeom prst="straightConnector1">
@@ -19984,7 +19984,7 @@
               <a:buNone/>
             </a:pPr>
             <a:r>
-              <a:rPr lang="en-US" sz="1300" b="1" i="0" dirty="0">
+              <a:rPr lang="en-US" sz="1400" b="1" i="0" dirty="0">
                 <a:solidFill>
                   <a:srgbClr val="F5F1E8"/>
                 </a:solidFill>
@@ -20070,7 +20070,7 @@
             <a:solidFill>
               <a:srgbClr val="C9B991"/>
             </a:solidFill>
-            <a:tailEnd type="triangle" w="med" len="med"/>
+            <a:headEnd type="triangle" w="med" len="med"/>
           </a:ln>
         </p:spPr>
       </p:cxnSp>
@@ -20551,41 +20551,6 @@
                                         <p:cTn id="32" dur="500"/>
                                         <p:tgtEl>
                                           <p:spTgt spid="119"/>
-                                        </p:tgtEl>
-                                      </p:cBhvr>
-                                    </p:animEffect>
-                                  </p:childTnLst>
-                                </p:cTn>
-                              </p:par>
-                              <p:par>
-                                <p:cTn id="33" presetID="10" presetClass="entr" presetSubtype="0" fill="hold" nodeType="withEffect">
-                                  <p:stCondLst>
-                                    <p:cond delay="0"/>
-                                  </p:stCondLst>
-                                  <p:childTnLst>
-                                    <p:set>
-                                      <p:cBhvr>
-                                        <p:cTn id="34" dur="1" fill="hold">
-                                          <p:stCondLst>
-                                            <p:cond delay="0"/>
-                                          </p:stCondLst>
-                                        </p:cTn>
-                                        <p:tgtEl>
-                                          <p:spTgt spid="120"/>
-                                        </p:tgtEl>
-                                        <p:attrNameLst>
-                                          <p:attrName>style.visibility</p:attrName>
-                                        </p:attrNameLst>
-                                      </p:cBhvr>
-                                      <p:to>
-                                        <p:strVal val="visible"/>
-                                      </p:to>
-                                    </p:set>
-                                    <p:animEffect transition="in" filter="fade">
-                                      <p:cBhvr>
-                                        <p:cTn id="35" dur="500"/>
-                                        <p:tgtEl>
-                                          <p:spTgt spid="120"/>
                                         </p:tgtEl>
                                       </p:cBhvr>
                                     </p:animEffect>

--- a/course/lectures/act-2-delegation-and-control/02-modeling/2-2-Modeling-1-Purposeful-Reduction.pptx
+++ b/course/lectures/act-2-delegation-and-control/02-modeling/2-2-Modeling-1-Purposeful-Reduction.pptx
@@ -928,19 +928,19 @@
           <a:p>
             <a:r>
               <a:rPr dirty="0"/>
-              <a:t>Question to ask of every model: what must this model preserve?</a:t>
+              <a:t>Row 1 is not the spine's ENGINEERING QUESTION restated. The question asks whether the design holds; the obligation states what holding means. Say which is which.</a:t>
             </a:r>
           </a:p>
           <a:p>
             <a:r>
               <a:rPr dirty="0"/>
-              <a:t>The MODEL row is the one to dwell on: the obligation picks the distinctions, and the distinctions decide what the model has to say. Nothing is in the model because it happened to be available. The rail compresses the property to fit the column; the next slide writes it out in full.</a:t>
+              <a:t>The MODEL row is the one to dwell on - it is the only outlined box: the obligation picks the distinctions, and the distinctions decide what the model has to say. Nothing is in the model because it happened to be available.</a:t>
             </a:r>
           </a:p>
           <a:p>
             <a:r>
               <a:rPr dirty="0"/>
-              <a:t>Degrees of freedom, called back from the Architecture/Design unit: the obligation bounds acceptable realizations without choosing one.</a:t>
+              <a:t>LEGITIMATE FREEDOM is the complement of row 2, not a product of row 3 - everything the required distinctions did not require. Degrees of freedom, called back from the Architecture/Design unit: the obligation bounds acceptable realizations without choosing one.</a:t>
             </a:r>
           </a:p>
           <a:p>
@@ -8992,6 +8992,22 @@
               <a:t>≥ 8 h above V_min</a:t>
             </a:r>
           </a:p>
+          <a:p>
+            <a:pPr algn="ctr">
+              <a:spcAft>
+                <a:spcPts val="0"/>
+              </a:spcAft>
+              <a:buNone/>
+            </a:pPr>
+            <a:r>
+              <a:rPr lang="en-US" sz="1000" b="0" i="0" dirty="0">
+                <a:solidFill>
+                  <a:srgbClr val="555960"/>
+                </a:solidFill>
+              </a:rPr>
+              <a:t>(minimum safe voltage)</a:t>
+            </a:r>
+          </a:p>
         </p:txBody>
       </p:sp>
       <p:sp>
@@ -9086,7 +9102,7 @@
               <a:buNone/>
             </a:pPr>
             <a:r>
-              <a:rPr lang="en-US" sz="1200" b="0" i="0" dirty="0">
+              <a:rPr lang="en-US" sz="1300" b="0" i="0" dirty="0">
                 <a:solidFill>
                   <a:srgbClr val="5C4826"/>
                 </a:solidFill>
@@ -9113,8 +9129,10 @@
           <a:solidFill>
             <a:srgbClr val="8E6F3E"/>
           </a:solidFill>
-          <a:ln>
-            <a:noFill/>
+          <a:ln w="28575">
+            <a:solidFill>
+              <a:srgbClr val="5C4826"/>
+            </a:solidFill>
           </a:ln>
         </p:spPr>
         <p:txBody>
@@ -9193,7 +9211,7 @@
                   <a:srgbClr val="5C4826"/>
                 </a:solidFill>
               </a:rPr>
-              <a:t>Σ P(m)·t(m)  ≤  E_usable</a:t>
+              <a:t>Σ P(mode)·t(mode) ≤ E(usable)</a:t>
             </a:r>
           </a:p>
         </p:txBody>
@@ -9251,7 +9269,7 @@
                   <a:srgbClr val="353638"/>
                 </a:solidFill>
               </a:rPr>
-              <a:t>everything else: the agent’s degrees of freedom</a:t>
+              <a:t>everything the distinctions did not require</a:t>
             </a:r>
           </a:p>
         </p:txBody>
@@ -9290,7 +9308,7 @@
               <a:buNone/>
             </a:pPr>
             <a:r>
-              <a:rPr lang="en-US" sz="1200" b="0" i="0" dirty="0">
+              <a:rPr lang="en-US" sz="1300" b="0" i="0" dirty="0">
                 <a:solidFill>
                   <a:srgbClr val="5C4826"/>
                 </a:solidFill>

--- a/course/lectures/act-2-delegation-and-control/02-modeling/2-2-Modeling-1-Purposeful-Reduction.pptx
+++ b/course/lectures/act-2-delegation-and-control/02-modeling/2-2-Modeling-1-Purposeful-Reduction.pptx
@@ -1058,7 +1058,7 @@
           <a:p>
             <a:r>
               <a:rPr dirty="0"/>
-              <a:t>Ask the room: what do we need to reason about that? BEFORE revealing the model card.</a:t>
+              <a:t>Everything on this slide is visible on arrival; there is no reveal. The previous slide's rail already named the four quantities, so do not ask the room to guess them - ask how six components became four numbers, and walk the fan-in.</a:t>
             </a:r>
           </a:p>
           <a:p>
@@ -1076,7 +1076,7 @@
           <a:p>
             <a:r>
               <a:rPr dirty="0"/>
-              <a:t>The system has become a small quantitative model; keep the math no harder than the sum. The PROPERTY beat of the spine happens here - point at it. It is the same property the previous slide's rail compressed.</a:t>
+              <a:t>The system has become a small quantitative model; keep the math no harder than the sum. The PROPERTY beat of the spine happens here - point at it. Same property, same notation, as the previous slide's rail.</a:t>
             </a:r>
           </a:p>
         </p:txBody>

--- a/course/lectures/act-2-delegation-and-control/02-modeling/2-2-Modeling-1-Purposeful-Reduction.pptx
+++ b/course/lectures/act-2-delegation-and-control/02-modeling/2-2-Modeling-1-Purposeful-Reduction.pptx
@@ -1292,25 +1292,31 @@
           <a:p>
             <a:r>
               <a:rPr lang="en-US" dirty="0"/>
-              <a:t>ROLE CHANGE, stated aloud: Section 2 taught how to reason about a reduction. This section asks what connects a model to the things it deliberately left free, and how you find out whether that connection holds.</a:t>
+              <a:t>ROLE CHANGE, stated aloud: Section 3 taught how to reason about a reduction. This section asks how you find out whether you reduced the right things.</a:t>
             </a:r>
           </a:p>
           <a:p>
             <a:r>
               <a:rPr lang="en-US" dirty="0"/>
-              <a:t>Three beats, in this order: one model with several legitimate implementations; models that refine into other models; then two production cases that graded a correspondence claim. The section is named for the claim, not for the evidence.</a:t>
+              <a:t>The frame: we have spent this lecture telling you to leave things out. Correspondence is the test of whether you left out the right ones. Two cases — one failure, one success.</a:t>
             </a:r>
           </a:p>
           <a:p>
             <a:r>
               <a:rPr lang="en-US" dirty="0"/>
-              <a:t>Both production cases come from the instructor's production system. The lease's omission was vindicated; the account quota's was refuted. A hypothetical can teach judgment; only production can grade it.</a:t>
+              <a:t>Both cases use the same three tiers: the facts, then the model itself, then the consequence. The models are deliberately different kinds — a data schema and a behavioural model — so nobody leaves thinking "model" means boxes and arrows.</a:t>
             </a:r>
           </a:p>
           <a:p>
             <a:r>
               <a:rPr lang="en-US" dirty="0"/>
-              <a:t>TERMINOLOGY GUARD, for your own speech as much as for the slides: model refinement, or a system of models. Never use the meta- prefix here — a model of a modeling language is a different idea and not what this section is about.</a:t>
+              <a:t>Both cases are self-contained. Neither needs any project background to tell; if you find yourself explaining where they came from, you have added something the case does not need.</a:t>
+            </a:r>
+          </a:p>
+          <a:p>
+            <a:r>
+              <a:rPr lang="en-US" dirty="0"/>
+              <a:t>TERMINOLOGY GUARD, for your own speech as much as for the slides: this section is about correspondence between a model and whatever realizes it. Model refinement — one model inducing others — is Lecture 2, and this deck no longer promises it. Never use the meta- prefix here.</a:t>
             </a:r>
           </a:p>
         </p:txBody>
@@ -13922,8 +13928,8 @@
         </p:nvSpPr>
         <p:spPr>
           <a:xfrm>
-            <a:off x="274320" y="3977640"/>
-            <a:ext cx="2743200" cy="640080"/>
+            <a:off x="1143000" y="3977640"/>
+            <a:ext cx="3200400" cy="640080"/>
           </a:xfrm>
           <a:prstGeom prst="rect">
             <a:avLst/>
@@ -13949,7 +13955,7 @@
                   <a:srgbClr val="8E6F3E"/>
                 </a:solidFill>
               </a:rPr>
-              <a:t xml:space="preserve">MODEL → IMPLEMENTATIONS</a:t>
+              <a:t xml:space="preserve">✗  TOO MUCH REDUCTION</a:t>
             </a:r>
           </a:p>
           <a:p>
@@ -13965,21 +13971,21 @@
                   <a:srgbClr val="555960"/>
                 </a:solidFill>
               </a:rPr>
-              <a:t xml:space="preserve">one model, many implementations</a:t>
-            </a:r>
-          </a:p>
-        </p:txBody>
-      </p:sp>
-      <p:sp>
-        <p:nvSpPr>
-          <p:cNvPr id="132" name="VTag2"/>
+              <a:t xml:space="preserve">a required distinction, erased</a:t>
+            </a:r>
+          </a:p>
+        </p:txBody>
+      </p:sp>
+      <p:sp>
+        <p:nvSpPr>
+          <p:cNvPr id="133" name="VTag3"/>
           <p:cNvSpPr txBox="1"/>
           <p:nvPr/>
         </p:nvSpPr>
         <p:spPr>
           <a:xfrm>
-            <a:off x="3200400" y="3977640"/>
-            <a:ext cx="2743200" cy="640080"/>
+            <a:off x="4800600" y="3977640"/>
+            <a:ext cx="3200400" cy="640080"/>
           </a:xfrm>
           <a:prstGeom prst="rect">
             <a:avLst/>
@@ -14005,7 +14011,7 @@
                   <a:srgbClr val="8E6F3E"/>
                 </a:solidFill>
               </a:rPr>
-              <a:t xml:space="preserve">MODEL → MODEL</a:t>
+              <a:t xml:space="preserve">✓  GOOD REDUCTION</a:t>
             </a:r>
           </a:p>
           <a:p>
@@ -14021,63 +14027,7 @@
                   <a:srgbClr val="555960"/>
                 </a:solidFill>
               </a:rPr>
-              <a:t xml:space="preserve">refinement into a system of models</a:t>
-            </a:r>
-          </a:p>
-        </p:txBody>
-      </p:sp>
-      <p:sp>
-        <p:nvSpPr>
-          <p:cNvPr id="133" name="VTag3"/>
-          <p:cNvSpPr txBox="1"/>
-          <p:nvPr/>
-        </p:nvSpPr>
-        <p:spPr>
-          <a:xfrm>
-            <a:off x="6126480" y="3977640"/>
-            <a:ext cx="2743200" cy="640080"/>
-          </a:xfrm>
-          <a:prstGeom prst="rect">
-            <a:avLst/>
-          </a:prstGeom>
-          <a:noFill/>
-          <a:ln>
-            <a:noFill/>
-          </a:ln>
-        </p:spPr>
-        <p:txBody>
-          <a:bodyPr wrap="square" lIns="0" tIns="0" rIns="0" bIns="0" anchor="ctr"/>
-          <a:lstStyle/>
-          <a:p>
-            <a:pPr algn="ctr">
-              <a:spcAft>
-                <a:spcPts val="0"/>
-              </a:spcAft>
-              <a:buNone/>
-            </a:pPr>
-            <a:r>
-              <a:rPr lang="en-US" sz="1600" b="1" i="0" dirty="0">
-                <a:solidFill>
-                  <a:srgbClr val="8E6F3E"/>
-                </a:solidFill>
-              </a:rPr>
-              <a:t xml:space="preserve">MODEL → EVIDENCE</a:t>
-            </a:r>
-          </a:p>
-          <a:p>
-            <a:pPr algn="ctr">
-              <a:spcAft>
-                <a:spcPts val="0"/>
-              </a:spcAft>
-              <a:buNone/>
-            </a:pPr>
-            <a:r>
-              <a:rPr lang="en-US" sz="1400" b="0" i="0" dirty="0">
-                <a:solidFill>
-                  <a:srgbClr val="555960"/>
-                </a:solidFill>
-              </a:rPr>
-              <a:t xml:space="preserve">✗ the quota  ·  ✓ the lease</a:t>
+              <a:t xml:space="preserve">a free choice, safely changed</a:t>
             </a:r>
           </a:p>
         </p:txBody>

--- a/course/lectures/act-2-delegation-and-control/02-modeling/2-2-Modeling-1-Purposeful-Reduction.pptx
+++ b/course/lectures/act-2-delegation-and-control/02-modeling/2-2-Modeling-1-Purposeful-Reduction.pptx
@@ -1362,26 +1362,38 @@
           <a:lstStyle/>
           <a:p>
             <a:r>
-              <a:rPr dirty="0"/>
-              <a:t>The account carried a quota; the reduction kept one scalar, credits_remaining. Unlimited and exhausted are two different states of that account, and a single integer has room for only one of them — both arrive at the model as 0.</a:t>
-            </a:r>
-          </a:p>
-          <a:p>
-            <a:r>
-              <a:rPr dirty="0"/>
-              <a:t>Keep this off the user: the failure is not that somebody was refused, it is that the representation could not express a distinction the obligation required. Bottom-up said removable; the obligation said no. This is refutation — the omitted distinction actually mattered, and production said so.</a:t>
-            </a:r>
-          </a:p>
-          <a:p>
-            <a:r>
-              <a:rPr dirty="0"/>
-              <a:t>Once a distinction is discarded, no downstream reasoning can recover it. That is the limit you stated on “Capability cannot reduce what must be true” — here it is reaching production.</a:t>
-            </a:r>
-          </a:p>
-          <a:p>
-            <a:r>
               <a:rPr lang="en-US" dirty="0"/>
-              <a:t>Name it as correspondence: the model and the implementation disagreed about a distinction the obligation required, and production is where that disagreement surfaced. This is failed correspondence, not a bug.</a:t>
+              <a:t>Walk the three tiers in order. FACTS: an account is either metered or unlimited; a metered account can run out; and those two states require different behavior from the system. That last line is the obligation.</a:t>
+            </a:r>
+          </a:p>
+          <a:p>
+            <a:r>
+              <a:rPr lang="en-US" dirty="0"/>
+              <a:t>MODEL: the point of this tier is that BOTH boxes are models. The richer one names a quota type, a credit balance, and a renewal rule. Someone proposes reducing it to one integer. Say "reduce" out loud as a modeling decision, not a coding decision.</a:t>
+            </a:r>
+          </a:p>
+          <a:p>
+            <a:r>
+              <a:rPr lang="en-US" dirty="0"/>
+              <a:t>Read the callout aloud, then add the oral line: models don't have to be boxes and arrows — a schema is a model. Hand this schema to two competent engineers and you will get two quite different databases that both faithfully realize it. That is the think-pair-share from Section 2, in a second notation.</a:t>
+            </a:r>
+          </a:p>
+          <a:p>
+            <a:r>
+              <a:rPr lang="en-US" dirty="0"/>
+              <a:t>The collision is the whole case. An unlimited account has no credit balance to report, so it arrives as 0. An exhausted account has run out, so it arrives as 0. Two states the obligation says must behave differently, one model state. Let the room sit with it for a beat before you say the bottom line.</a:t>
+            </a:r>
+          </a:p>
+          <a:p>
+            <a:r>
+              <a:rPr lang="en-US" dirty="0"/>
+              <a:t>CONSEQUENCE: name it as correspondence, not as a bug. The model and the obligation disagree about which distinctions exist. Once a distinction is discarded, no amount of downstream reasoning recovers it — a more capable implementer cannot restore what the representation never encoded.</a:t>
+            </a:r>
+          </a:p>
+          <a:p>
+            <a:r>
+              <a:rPr lang="en-US" dirty="0"/>
+              <a:t>Keep this schema's wording stable: a later slide quotes it as a hypothetical. Nothing to foreshadow here.</a:t>
             </a:r>
           </a:p>
         </p:txBody>
@@ -14106,14 +14118,78 @@
       </p:sp>
       <p:sp>
         <p:nvSpPr>
-          <p:cNvPr id="10" name="Intro"/>
+          <p:cNvPr id="100" name="TierRule1"/>
+          <p:cNvSpPr/>
+          <p:nvPr/>
+        </p:nvSpPr>
+        <p:spPr>
+          <a:xfrm>
+            <a:off x="1188720" y="2301240"/>
+            <a:ext cx="7680960" cy="12700"/>
+          </a:xfrm>
+          <a:prstGeom prst="rect">
+            <a:avLst/>
+          </a:prstGeom>
+          <a:solidFill>
+            <a:srgbClr val="C9B991"/>
+          </a:solidFill>
+          <a:ln>
+            <a:noFill/>
+          </a:ln>
+        </p:spPr>
+        <p:txBody>
+          <a:bodyPr wrap="square" lIns="27432" tIns="22860" rIns="27432" bIns="22860" anchor="ctr"/>
+          <a:lstStyle/>
+          <a:p>
+            <a:pPr>
+              <a:buNone/>
+            </a:pPr>
+            <a:endParaRPr lang="en-US"/>
+          </a:p>
+        </p:txBody>
+      </p:sp>
+      <p:sp>
+        <p:nvSpPr>
+          <p:cNvPr id="101" name="TierRule2"/>
+          <p:cNvSpPr/>
+          <p:nvPr/>
+        </p:nvSpPr>
+        <p:spPr>
+          <a:xfrm>
+            <a:off x="1188720" y="4526280"/>
+            <a:ext cx="7680960" cy="12700"/>
+          </a:xfrm>
+          <a:prstGeom prst="rect">
+            <a:avLst/>
+          </a:prstGeom>
+          <a:solidFill>
+            <a:srgbClr val="C9B991"/>
+          </a:solidFill>
+          <a:ln>
+            <a:noFill/>
+          </a:ln>
+        </p:spPr>
+        <p:txBody>
+          <a:bodyPr wrap="square" lIns="27432" tIns="22860" rIns="27432" bIns="22860" anchor="ctr"/>
+          <a:lstStyle/>
+          <a:p>
+            <a:pPr>
+              <a:buNone/>
+            </a:pPr>
+            <a:endParaRPr lang="en-US"/>
+          </a:p>
+        </p:txBody>
+      </p:sp>
+      <p:sp>
+        <p:nvSpPr>
+          <p:cNvPr id="102" name="TierFacts"/>
           <p:cNvSpPr txBox="1"/>
           <p:nvPr/>
         </p:nvSpPr>
         <p:spPr>
           <a:xfrm>
-            <a:off x="365760" y="1097280"/>
-            <a:ext cx="8412480" cy="365760"/>
+            <a:off x="274320" y="1501140"/>
+            <a:ext cx="822960" cy="213360"/>
           </a:xfrm>
           <a:prstGeom prst="rect">
             <a:avLst/>
@@ -14124,9 +14200,7 @@
           </a:ln>
         </p:spPr>
         <p:txBody>
-          <a:bodyPr wrap="square" lIns="18288" tIns="18288" rIns="18288" bIns="18288" anchor="t">
-            <a:spAutoFit/>
-          </a:bodyPr>
+          <a:bodyPr wrap="square" lIns="0" tIns="0" rIns="0" bIns="0" anchor="ctr"/>
           <a:lstStyle/>
           <a:p>
             <a:pPr algn="l">
@@ -14136,26 +14210,178 @@
               <a:buNone/>
             </a:pPr>
             <a:r>
-              <a:rPr lang="en-US" sz="1800" b="0" dirty="0">
+              <a:rPr lang="en-US" sz="900" b="1" i="0" dirty="0">
+                <a:solidFill>
+                  <a:srgbClr val="8E6F3E"/>
+                </a:solidFill>
+              </a:rPr>
+              <a:t>FACTS</a:t>
+            </a:r>
+          </a:p>
+        </p:txBody>
+      </p:sp>
+      <p:sp>
+        <p:nvSpPr>
+          <p:cNvPr id="103" name="TierModel"/>
+          <p:cNvSpPr txBox="1"/>
+          <p:nvPr/>
+        </p:nvSpPr>
+        <p:spPr>
+          <a:xfrm>
+            <a:off x="274320" y="3307080"/>
+            <a:ext cx="822960" cy="213360"/>
+          </a:xfrm>
+          <a:prstGeom prst="rect">
+            <a:avLst/>
+          </a:prstGeom>
+          <a:noFill/>
+          <a:ln>
+            <a:noFill/>
+          </a:ln>
+        </p:spPr>
+        <p:txBody>
+          <a:bodyPr wrap="square" lIns="0" tIns="0" rIns="0" bIns="0" anchor="ctr"/>
+          <a:lstStyle/>
+          <a:p>
+            <a:pPr algn="l">
+              <a:spcAft>
+                <a:spcPts val="0"/>
+              </a:spcAft>
+              <a:buNone/>
+            </a:pPr>
+            <a:r>
+              <a:rPr lang="en-US" sz="900" b="1" i="0" dirty="0">
+                <a:solidFill>
+                  <a:srgbClr val="8E6F3E"/>
+                </a:solidFill>
+              </a:rPr>
+              <a:t>MODEL</a:t>
+            </a:r>
+          </a:p>
+        </p:txBody>
+      </p:sp>
+      <p:sp>
+        <p:nvSpPr>
+          <p:cNvPr id="104" name="TierConsequence"/>
+          <p:cNvSpPr txBox="1"/>
+          <p:nvPr/>
+        </p:nvSpPr>
+        <p:spPr>
+          <a:xfrm>
+            <a:off x="274320" y="5082540"/>
+            <a:ext cx="822960" cy="213360"/>
+          </a:xfrm>
+          <a:prstGeom prst="rect">
+            <a:avLst/>
+          </a:prstGeom>
+          <a:noFill/>
+          <a:ln>
+            <a:noFill/>
+          </a:ln>
+        </p:spPr>
+        <p:txBody>
+          <a:bodyPr wrap="square" lIns="0" tIns="0" rIns="0" bIns="0" anchor="ctr"/>
+          <a:lstStyle/>
+          <a:p>
+            <a:pPr algn="l">
+              <a:spcAft>
+                <a:spcPts val="0"/>
+              </a:spcAft>
+              <a:buNone/>
+            </a:pPr>
+            <a:r>
+              <a:rPr lang="en-US" sz="900" b="1" i="0" dirty="0">
+                <a:solidFill>
+                  <a:srgbClr val="8E6F3E"/>
+                </a:solidFill>
+              </a:rPr>
+              <a:t>CONSEQUENCE</a:t>
+            </a:r>
+          </a:p>
+        </p:txBody>
+      </p:sp>
+      <p:sp>
+        <p:nvSpPr>
+          <p:cNvPr id="110" name="Facts"/>
+          <p:cNvSpPr txBox="1"/>
+          <p:nvPr/>
+        </p:nvSpPr>
+        <p:spPr>
+          <a:xfrm>
+            <a:off x="1188720" y="1005840"/>
+            <a:ext cx="7680960" cy="1188720"/>
+          </a:xfrm>
+          <a:prstGeom prst="rect">
+            <a:avLst/>
+          </a:prstGeom>
+          <a:noFill/>
+          <a:ln>
+            <a:noFill/>
+          </a:ln>
+        </p:spPr>
+        <p:txBody>
+          <a:bodyPr wrap="square" lIns="0" tIns="0" rIns="0" bIns="0" anchor="t"/>
+          <a:lstStyle/>
+          <a:p>
+            <a:pPr algn="l">
+              <a:spcAft>
+                <a:spcPts val="700"/>
+              </a:spcAft>
+              <a:buNone/>
+            </a:pPr>
+            <a:r>
+              <a:rPr lang="en-US" sz="1600" b="0" i="0" dirty="0">
                 <a:solidFill>
                   <a:srgbClr val="555960"/>
                 </a:solidFill>
               </a:rPr>
-              <a:t>An account quota was reduced to a single credit count.</a:t>
-            </a:r>
-          </a:p>
-        </p:txBody>
-      </p:sp>
-      <p:sp>
-        <p:nvSpPr>
-          <p:cNvPr id="11" name="Acct1"/>
+              <a:t>Accounts may be metered or unlimited</a:t>
+            </a:r>
+          </a:p>
+          <a:p>
+            <a:pPr algn="l">
+              <a:spcAft>
+                <a:spcPts val="700"/>
+              </a:spcAft>
+              <a:buNone/>
+            </a:pPr>
+            <a:r>
+              <a:rPr lang="en-US" sz="1600" b="0" i="0" dirty="0">
+                <a:solidFill>
+                  <a:srgbClr val="555960"/>
+                </a:solidFill>
+              </a:rPr>
+              <a:t>Metered accounts can become exhausted</a:t>
+            </a:r>
+          </a:p>
+          <a:p>
+            <a:pPr algn="l">
+              <a:spcAft>
+                <a:spcPts val="700"/>
+              </a:spcAft>
+              <a:buNone/>
+            </a:pPr>
+            <a:r>
+              <a:rPr lang="en-US" sz="1600" b="0" i="0" dirty="0">
+                <a:solidFill>
+                  <a:srgbClr val="555960"/>
+                </a:solidFill>
+              </a:rPr>
+              <a:t>These states require different behavior</a:t>
+            </a:r>
+          </a:p>
+        </p:txBody>
+      </p:sp>
+      <p:sp>
+        <p:nvSpPr>
+          <p:cNvPr id="120" name="SchemaBox"/>
           <p:cNvSpPr/>
           <p:nvPr/>
         </p:nvSpPr>
         <p:spPr>
           <a:xfrm>
-            <a:off x="411480" y="1691640"/>
-            <a:ext cx="2971800" cy="2468880"/>
+            <a:off x="1188720" y="2362200"/>
+            <a:ext cx="2194560" cy="1005840"/>
           </a:xfrm>
           <a:prstGeom prst="rect">
             <a:avLst/>
@@ -14170,56 +14396,128 @@
           </a:ln>
         </p:spPr>
         <p:txBody>
+          <a:bodyPr wrap="square" lIns="27432" tIns="22860" rIns="27432" bIns="22860" anchor="t"/>
+          <a:lstStyle/>
+          <a:p>
+            <a:pPr algn="l">
+              <a:spcAft>
+                <a:spcPts val="900"/>
+              </a:spcAft>
+              <a:buNone/>
+            </a:pPr>
+            <a:r>
+              <a:rPr lang="en-US" sz="1300" b="1" i="0" dirty="0">
+                <a:solidFill>
+                  <a:srgbClr val="8E6F3E"/>
+                </a:solidFill>
+              </a:rPr>
+              <a:t>ACCOUNT</a:t>
+            </a:r>
+          </a:p>
+          <a:p>
+            <a:pPr algn="l">
+              <a:spcAft>
+                <a:spcPts val="250"/>
+              </a:spcAft>
+              <a:buNone/>
+            </a:pPr>
+            <a:r>
+              <a:rPr lang="en-US" sz="1000" b="0" i="0" dirty="0">
+                <a:solidFill>
+                  <a:srgbClr val="5C4826"/>
+                </a:solidFill>
+              </a:rPr>
+              <a:t>quota_type  {metered, unlimited}</a:t>
+            </a:r>
+          </a:p>
+          <a:p>
+            <a:pPr algn="l">
+              <a:spcAft>
+                <a:spcPts val="250"/>
+              </a:spcAft>
+              <a:buNone/>
+            </a:pPr>
+            <a:r>
+              <a:rPr lang="en-US" sz="1000" b="0" i="0" dirty="0">
+                <a:solidFill>
+                  <a:srgbClr val="5C4826"/>
+                </a:solidFill>
+              </a:rPr>
+              <a:t>credits_remaining</a:t>
+            </a:r>
+          </a:p>
+          <a:p>
+            <a:pPr algn="l">
+              <a:spcAft>
+                <a:spcPts val="0"/>
+              </a:spcAft>
+              <a:buNone/>
+            </a:pPr>
+            <a:r>
+              <a:rPr lang="en-US" sz="1000" b="0" i="0" dirty="0">
+                <a:solidFill>
+                  <a:srgbClr val="5C4826"/>
+                </a:solidFill>
+              </a:rPr>
+              <a:t>renewal</a:t>
+            </a:r>
+          </a:p>
+        </p:txBody>
+      </p:sp>
+      <p:sp>
+        <p:nvSpPr>
+          <p:cNvPr id="121" name="SchemaRule"/>
+          <p:cNvSpPr/>
+          <p:nvPr/>
+        </p:nvSpPr>
+        <p:spPr>
+          <a:xfrm>
+            <a:off x="1280160" y="2649220"/>
+            <a:ext cx="2011680" cy="9525"/>
+          </a:xfrm>
+          <a:prstGeom prst="rect">
+            <a:avLst/>
+          </a:prstGeom>
+          <a:solidFill>
+            <a:srgbClr val="C9B991"/>
+          </a:solidFill>
+          <a:ln>
+            <a:noFill/>
+          </a:ln>
+        </p:spPr>
+        <p:txBody>
           <a:bodyPr wrap="square" lIns="27432" tIns="22860" rIns="27432" bIns="22860" anchor="ctr"/>
           <a:lstStyle/>
           <a:p>
-            <a:pPr algn="ctr">
-              <a:spcAft>
-                <a:spcPts val="800"/>
-              </a:spcAft>
-              <a:buNone/>
-            </a:pPr>
-            <a:r>
-              <a:rPr lang="en-US" sz="1600" b="1" dirty="0">
-                <a:solidFill>
-                  <a:srgbClr val="8E6F3E"/>
-                </a:solidFill>
-              </a:rPr>
-              <a:t>THE ACCOUNT</a:t>
-            </a:r>
-          </a:p>
-          <a:p>
-            <a:pPr algn="ctr">
-              <a:spcAft>
-                <a:spcPts val="600"/>
-              </a:spcAft>
-              <a:buNone/>
-            </a:pPr>
-            <a:r>
-              <a:rPr lang="en-US" sz="1500" b="1" dirty="0">
-                <a:solidFill>
-                  <a:srgbClr val="5C4826"/>
-                </a:solidFill>
-              </a:rPr>
-              <a:t>quota: unlimited</a:t>
-            </a:r>
-          </a:p>
-          <a:p>
-            <a:pPr algn="ctr">
-              <a:spcAft>
-                <a:spcPts val="600"/>
-              </a:spcAft>
-              <a:buNone/>
-            </a:pPr>
-            <a:r>
-              <a:rPr lang="en-US" sz="1500" b="0" dirty="0">
-                <a:solidFill>
-                  <a:srgbClr val="555960"/>
-                </a:solidFill>
-              </a:rPr>
-              <a:t>renewal: monthly</a:t>
-            </a:r>
-          </a:p>
+            <a:pPr>
+              <a:buNone/>
+            </a:pPr>
+            <a:endParaRPr lang="en-US"/>
+          </a:p>
+        </p:txBody>
+      </p:sp>
+      <p:sp>
+        <p:nvSpPr>
+          <p:cNvPr id="122" name="ReduceLbl"/>
+          <p:cNvSpPr txBox="1"/>
+          <p:nvPr/>
+        </p:nvSpPr>
+        <p:spPr>
+          <a:xfrm>
+            <a:off x="3474720" y="2362200"/>
+            <a:ext cx="822960" cy="457200"/>
+          </a:xfrm>
+          <a:prstGeom prst="rect">
+            <a:avLst/>
+          </a:prstGeom>
+          <a:noFill/>
+          <a:ln>
+            <a:noFill/>
+          </a:ln>
+        </p:spPr>
+        <p:txBody>
+          <a:bodyPr wrap="square" lIns="0" tIns="0" rIns="0" bIns="0" anchor="t"/>
+          <a:lstStyle/>
           <a:p>
             <a:pPr algn="ctr">
               <a:spcAft>
@@ -14228,38 +14526,14 @@
               <a:buNone/>
             </a:pPr>
             <a:r>
-              <a:rPr lang="en-US" sz="1500" b="0" dirty="0">
-                <a:solidFill>
-                  <a:srgbClr val="555960"/>
-                </a:solidFill>
-              </a:rPr>
-              <a:t>usage history …</a:t>
-            </a:r>
-          </a:p>
-        </p:txBody>
-      </p:sp>
-      <p:sp>
-        <p:nvSpPr>
-          <p:cNvPr id="12" name="ArrLbl"/>
-          <p:cNvSpPr txBox="1"/>
-          <p:nvPr/>
-        </p:nvSpPr>
-        <p:spPr>
-          <a:xfrm>
-            <a:off x="3474720" y="2560320"/>
-            <a:ext cx="2057400" cy="274320"/>
-          </a:xfrm>
-          <a:prstGeom prst="rect">
-            <a:avLst/>
-          </a:prstGeom>
-          <a:noFill/>
-          <a:ln>
-            <a:noFill/>
-          </a:ln>
-        </p:spPr>
-        <p:txBody>
-          <a:bodyPr wrap="square" lIns="0" tIns="0" rIns="0" bIns="0" anchor="t"/>
-          <a:lstStyle/>
+              <a:rPr lang="en-US" sz="900" b="1" i="0" dirty="0">
+                <a:solidFill>
+                  <a:srgbClr val="8E6F3E"/>
+                </a:solidFill>
+              </a:rPr>
+              <a:t>PROPOSED</a:t>
+            </a:r>
+          </a:p>
           <a:p>
             <a:pPr algn="ctr">
               <a:spcAft>
@@ -14268,26 +14542,26 @@
               <a:buNone/>
             </a:pPr>
             <a:r>
-              <a:rPr lang="en-US" sz="1400" b="1" dirty="0">
+              <a:rPr lang="en-US" sz="900" b="1" i="0" dirty="0">
                 <a:solidFill>
                   <a:srgbClr val="8E6F3E"/>
                 </a:solidFill>
               </a:rPr>
-              <a:t>REDUCE TO A SCALAR</a:t>
+              <a:t>REDUCTION</a:t>
             </a:r>
           </a:p>
         </p:txBody>
       </p:sp>
       <p:cxnSp>
         <p:nvCxnSpPr>
-          <p:cNvPr id="13" name="AR1"/>
+          <p:cNvPr id="123" name="ReduceArrow"/>
           <p:cNvCxnSpPr/>
           <p:nvPr/>
         </p:nvCxnSpPr>
         <p:spPr>
           <a:xfrm>
-            <a:off x="3474720" y="2926080"/>
-            <a:ext cx="2057400" cy="0"/>
+            <a:off x="3474720" y="2865120"/>
+            <a:ext cx="822960" cy="0"/>
           </a:xfrm>
           <a:prstGeom prst="straightConnector1">
             <a:avLst/>
@@ -14302,14 +14576,14 @@
       </p:cxnSp>
       <p:sp>
         <p:nvSpPr>
-          <p:cNvPr id="14" name="Card1"/>
+          <p:cNvPr id="124" name="ScalarBox"/>
           <p:cNvSpPr/>
           <p:nvPr/>
         </p:nvSpPr>
         <p:spPr>
           <a:xfrm>
-            <a:off x="5623560" y="2560320"/>
-            <a:ext cx="3062280" cy="731520"/>
+            <a:off x="4389120" y="2651760"/>
+            <a:ext cx="2011680" cy="548640"/>
           </a:xfrm>
           <a:prstGeom prst="rect">
             <a:avLst/>
@@ -14332,26 +14606,26 @@
               <a:buNone/>
             </a:pPr>
             <a:r>
-              <a:rPr lang="en-US" sz="1800" b="1" dirty="0">
+              <a:rPr lang="en-US" sz="1050" b="1" i="0" dirty="0">
                 <a:solidFill>
                   <a:srgbClr val="FFFFFF"/>
                 </a:solidFill>
               </a:rPr>
-              <a:t>credits_remaining: 0</a:t>
-            </a:r>
-          </a:p>
-        </p:txBody>
-      </p:sp>
-      <p:sp>
-        <p:nvSpPr>
-          <p:cNvPr id="15" name="CLbl1"/>
+              <a:t>credits_remaining : integer</a:t>
+            </a:r>
+          </a:p>
+        </p:txBody>
+      </p:sp>
+      <p:sp>
+        <p:nvSpPr>
+          <p:cNvPr id="125" name="ScalarCap"/>
           <p:cNvSpPr txBox="1"/>
           <p:nvPr/>
         </p:nvSpPr>
         <p:spPr>
           <a:xfrm>
-            <a:off x="5623560" y="3383280"/>
-            <a:ext cx="3062280" cy="274320"/>
+            <a:off x="4389120" y="3246120"/>
+            <a:ext cx="2011680" cy="182880"/>
           </a:xfrm>
           <a:prstGeom prst="rect">
             <a:avLst/>
@@ -14372,49 +14646,86 @@
               <a:buNone/>
             </a:pPr>
             <a:r>
-              <a:rPr lang="en-US" sz="1400" b="0" i="1" dirty="0">
+              <a:rPr lang="en-US" sz="1000" b="0" i="1" dirty="0">
                 <a:solidFill>
                   <a:srgbClr val="555960"/>
                 </a:solidFill>
               </a:rPr>
-              <a:t>the whole model of the quota</a:t>
-            </a:r>
-          </a:p>
-        </p:txBody>
-      </p:sp>
-      <p:cxnSp>
-        <p:nvCxnSpPr>
-          <p:cNvPr id="16" name="DropC"/>
-          <p:cNvCxnSpPr/>
-          <p:nvPr/>
-        </p:nvCxnSpPr>
-        <p:spPr>
-          <a:xfrm>
-            <a:off x="4503420" y="2926080"/>
-            <a:ext cx="0" cy="868680"/>
-          </a:xfrm>
-          <a:prstGeom prst="straightConnector1">
-            <a:avLst/>
-          </a:prstGeom>
+              <a:t>the whole model of the account</a:t>
+            </a:r>
+          </a:p>
+        </p:txBody>
+      </p:sp>
+      <p:sp>
+        <p:nvSpPr>
+          <p:cNvPr id="126" name="Callout"/>
+          <p:cNvSpPr/>
+          <p:nvPr/>
+        </p:nvSpPr>
+        <p:spPr>
+          <a:xfrm>
+            <a:off x="6492240" y="2362200"/>
+            <a:ext cx="2377440" cy="1051560"/>
+          </a:xfrm>
+          <a:prstGeom prst="rect">
+            <a:avLst/>
+          </a:prstGeom>
+          <a:solidFill>
+            <a:srgbClr val="FDFCF9"/>
+          </a:solidFill>
           <a:ln w="12700">
             <a:solidFill>
               <a:srgbClr val="8E6F3E"/>
             </a:solidFill>
-            <a:prstDash val="dash"/>
-            <a:tailEnd type="triangle" w="med" len="med"/>
-          </a:ln>
-        </p:spPr>
-      </p:cxnSp>
-      <p:sp>
-        <p:nvSpPr>
-          <p:cNvPr id="17" name="Drop1"/>
+          </a:ln>
+        </p:spPr>
+        <p:txBody>
+          <a:bodyPr wrap="square" lIns="27432" tIns="22860" rIns="27432" bIns="22860" anchor="t"/>
+          <a:lstStyle/>
+          <a:p>
+            <a:pPr algn="l">
+              <a:spcAft>
+                <a:spcPts val="400"/>
+              </a:spcAft>
+              <a:buNone/>
+            </a:pPr>
+            <a:r>
+              <a:rPr lang="en-US" sz="1050" b="1" i="0" dirty="0">
+                <a:solidFill>
+                  <a:srgbClr val="8E6F3E"/>
+                </a:solidFill>
+              </a:rPr>
+              <a:t>Yes, this is a model.</a:t>
+            </a:r>
+          </a:p>
+          <a:p>
+            <a:pPr algn="l">
+              <a:spcAft>
+                <a:spcPts val="0"/>
+              </a:spcAft>
+              <a:buNone/>
+            </a:pPr>
+            <a:r>
+              <a:rPr lang="en-US" sz="1000" b="0" i="0" dirty="0">
+                <a:solidFill>
+                  <a:srgbClr val="5C4826"/>
+                </a:solidFill>
+              </a:rPr>
+              <a:t>It constrains the data the system must represent. It does not determine the database design, indexes, queries, joins, caching, or migration strategy.</a:t>
+            </a:r>
+          </a:p>
+        </p:txBody>
+      </p:sp>
+      <p:sp>
+        <p:nvSpPr>
+          <p:cNvPr id="130" name="CollidePanel"/>
           <p:cNvSpPr/>
           <p:nvPr/>
         </p:nvSpPr>
         <p:spPr>
           <a:xfrm>
-            <a:off x="3611880" y="3886200"/>
-            <a:ext cx="1783080" cy="402336"/>
+            <a:off x="1188720" y="3474720"/>
+            <a:ext cx="7680960" cy="1051560"/>
           </a:xfrm>
           <a:prstGeom prst="rect">
             <a:avLst/>
@@ -14432,6 +14743,132 @@
           <a:bodyPr wrap="square" lIns="27432" tIns="22860" rIns="27432" bIns="22860" anchor="ctr"/>
           <a:lstStyle/>
           <a:p>
+            <a:pPr>
+              <a:buNone/>
+            </a:pPr>
+            <a:endParaRPr lang="en-US"/>
+          </a:p>
+        </p:txBody>
+      </p:sp>
+      <p:sp>
+        <p:nvSpPr>
+          <p:cNvPr id="131" name="InstLbl"/>
+          <p:cNvSpPr txBox="1"/>
+          <p:nvPr/>
+        </p:nvSpPr>
+        <p:spPr>
+          <a:xfrm>
+            <a:off x="1371600" y="3589020"/>
+            <a:ext cx="1737360" cy="548640"/>
+          </a:xfrm>
+          <a:prstGeom prst="rect">
+            <a:avLst/>
+          </a:prstGeom>
+          <a:noFill/>
+          <a:ln>
+            <a:noFill/>
+          </a:ln>
+        </p:spPr>
+        <p:txBody>
+          <a:bodyPr wrap="square" lIns="0" tIns="0" rIns="0" bIns="0" anchor="ctr"/>
+          <a:lstStyle/>
+          <a:p>
+            <a:pPr algn="l">
+              <a:spcAft>
+                <a:spcPts val="0"/>
+              </a:spcAft>
+              <a:buNone/>
+            </a:pPr>
+            <a:r>
+              <a:rPr lang="en-US" sz="1200" b="1" i="0" dirty="0">
+                <a:solidFill>
+                  <a:srgbClr val="8E6F3E"/>
+                </a:solidFill>
+              </a:rPr>
+              <a:t>INSTANTIATE</a:t>
+            </a:r>
+          </a:p>
+          <a:p>
+            <a:pPr algn="l">
+              <a:spcAft>
+                <a:spcPts val="0"/>
+              </a:spcAft>
+              <a:buNone/>
+            </a:pPr>
+            <a:r>
+              <a:rPr lang="en-US" sz="1200" b="1" i="0" dirty="0">
+                <a:solidFill>
+                  <a:srgbClr val="8E6F3E"/>
+                </a:solidFill>
+              </a:rPr>
+              <a:t>THE SCALAR MODEL</a:t>
+            </a:r>
+          </a:p>
+        </p:txBody>
+      </p:sp>
+      <p:sp>
+        <p:nvSpPr>
+          <p:cNvPr id="132" name="CLbl0"/>
+          <p:cNvSpPr txBox="1"/>
+          <p:nvPr/>
+        </p:nvSpPr>
+        <p:spPr>
+          <a:xfrm>
+            <a:off x="3337560" y="3520440"/>
+            <a:ext cx="2286000" cy="320040"/>
+          </a:xfrm>
+          <a:prstGeom prst="rect">
+            <a:avLst/>
+          </a:prstGeom>
+          <a:noFill/>
+          <a:ln>
+            <a:noFill/>
+          </a:ln>
+        </p:spPr>
+        <p:txBody>
+          <a:bodyPr wrap="square" lIns="0" tIns="0" rIns="0" bIns="0" anchor="ctr"/>
+          <a:lstStyle/>
+          <a:p>
+            <a:pPr algn="r">
+              <a:spcAft>
+                <a:spcPts val="0"/>
+              </a:spcAft>
+              <a:buNone/>
+            </a:pPr>
+            <a:r>
+              <a:rPr lang="en-US" sz="1600" b="0" i="0" dirty="0">
+                <a:solidFill>
+                  <a:srgbClr val="555960"/>
+                </a:solidFill>
+              </a:rPr>
+              <a:t>Unlimited account</a:t>
+            </a:r>
+          </a:p>
+        </p:txBody>
+      </p:sp>
+      <p:sp>
+        <p:nvSpPr>
+          <p:cNvPr id="133" name="CArr0"/>
+          <p:cNvSpPr txBox="1"/>
+          <p:nvPr/>
+        </p:nvSpPr>
+        <p:spPr>
+          <a:xfrm>
+            <a:off x="5623560" y="3520440"/>
+            <a:ext cx="457200" cy="320040"/>
+          </a:xfrm>
+          <a:prstGeom prst="rect">
+            <a:avLst/>
+          </a:prstGeom>
+          <a:noFill/>
+          <a:ln>
+            <a:noFill/>
+          </a:ln>
+        </p:spPr>
+        <p:txBody>
+          <a:bodyPr wrap="square" lIns="0" tIns="0" rIns="0" bIns="0" anchor="ctr"/>
+          <a:lstStyle/>
+          <a:p>
             <a:pPr algn="ctr">
               <a:spcAft>
                 <a:spcPts val="0"/>
@@ -14439,26 +14876,26 @@
               <a:buNone/>
             </a:pPr>
             <a:r>
-              <a:rPr lang="en-US" sz="1600" b="1" dirty="0">
+              <a:rPr lang="en-US" sz="1600" b="1" i="0" dirty="0">
                 <a:solidFill>
                   <a:srgbClr val="8E6F3E"/>
                 </a:solidFill>
               </a:rPr>
-              <a:t>✗ unlimited</a:t>
-            </a:r>
-          </a:p>
-        </p:txBody>
-      </p:sp>
-      <p:sp>
-        <p:nvSpPr>
-          <p:cNvPr id="18" name="Note1"/>
+              <a:t>→</a:t>
+            </a:r>
+          </a:p>
+        </p:txBody>
+      </p:sp>
+      <p:sp>
+        <p:nvSpPr>
+          <p:cNvPr id="134" name="CZero0"/>
           <p:cNvSpPr txBox="1"/>
           <p:nvPr/>
         </p:nvSpPr>
         <p:spPr>
           <a:xfrm>
-            <a:off x="5486400" y="3931920"/>
-            <a:ext cx="3200400" cy="365760"/>
+            <a:off x="6080760" y="3520440"/>
+            <a:ext cx="640080" cy="320040"/>
           </a:xfrm>
           <a:prstGeom prst="rect">
             <a:avLst/>
@@ -14469,47 +14906,7 @@
           </a:ln>
         </p:spPr>
         <p:txBody>
-          <a:bodyPr wrap="square" lIns="0" tIns="0" rIns="0" bIns="0" anchor="t"/>
-          <a:lstStyle/>
-          <a:p>
-            <a:pPr algn="l">
-              <a:spcAft>
-                <a:spcPts val="0"/>
-              </a:spcAft>
-              <a:buNone/>
-            </a:pPr>
-            <a:r>
-              <a:rPr lang="en-US" sz="1500" b="0" i="1" dirty="0">
-                <a:solidFill>
-                  <a:srgbClr val="555960"/>
-                </a:solidFill>
-              </a:rPr>
-              <a:t>has nowhere to live in a scalar</a:t>
-            </a:r>
-          </a:p>
-        </p:txBody>
-      </p:sp>
-      <p:sp>
-        <p:nvSpPr>
-          <p:cNvPr id="19" name="Outcome"/>
-          <p:cNvSpPr txBox="1"/>
-          <p:nvPr/>
-        </p:nvSpPr>
-        <p:spPr>
-          <a:xfrm>
-            <a:off x="365760" y="4709160"/>
-            <a:ext cx="8412480" cy="640080"/>
-          </a:xfrm>
-          <a:prstGeom prst="rect">
-            <a:avLst/>
-          </a:prstGeom>
-          <a:noFill/>
-          <a:ln>
-            <a:noFill/>
-          </a:ln>
-        </p:spPr>
-        <p:txBody>
-          <a:bodyPr wrap="square" lIns="18288" tIns="18288" rIns="18288" bIns="18288" anchor="t"/>
+          <a:bodyPr wrap="square" lIns="0" tIns="0" rIns="0" bIns="0" anchor="ctr"/>
           <a:lstStyle/>
           <a:p>
             <a:pPr algn="ctr">
@@ -14519,19 +14916,281 @@
               <a:buNone/>
             </a:pPr>
             <a:r>
-              <a:rPr lang="en-US" sz="1800" b="0" dirty="0">
+              <a:rPr lang="en-US" sz="2000" b="1" i="0" dirty="0">
+                <a:solidFill>
+                  <a:srgbClr val="5C4826"/>
+                </a:solidFill>
+              </a:rPr>
+              <a:t>0</a:t>
+            </a:r>
+          </a:p>
+        </p:txBody>
+      </p:sp>
+      <p:sp>
+        <p:nvSpPr>
+          <p:cNvPr id="135" name="CLbl1"/>
+          <p:cNvSpPr txBox="1"/>
+          <p:nvPr/>
+        </p:nvSpPr>
+        <p:spPr>
+          <a:xfrm>
+            <a:off x="3337560" y="3886200"/>
+            <a:ext cx="2286000" cy="320040"/>
+          </a:xfrm>
+          <a:prstGeom prst="rect">
+            <a:avLst/>
+          </a:prstGeom>
+          <a:noFill/>
+          <a:ln>
+            <a:noFill/>
+          </a:ln>
+        </p:spPr>
+        <p:txBody>
+          <a:bodyPr wrap="square" lIns="0" tIns="0" rIns="0" bIns="0" anchor="ctr"/>
+          <a:lstStyle/>
+          <a:p>
+            <a:pPr algn="r">
+              <a:spcAft>
+                <a:spcPts val="0"/>
+              </a:spcAft>
+              <a:buNone/>
+            </a:pPr>
+            <a:r>
+              <a:rPr lang="en-US" sz="1600" b="0" i="0" dirty="0">
                 <a:solidFill>
                   <a:srgbClr val="555960"/>
                 </a:solidFill>
               </a:rPr>
-              <a:t>The implementation distinguished unlimited from exhausted. The model represented both as 0.</a:t>
-            </a:r>
-          </a:p>
-        </p:txBody>
-      </p:sp>
-      <p:sp>
-        <p:nvSpPr>
-          <p:cNvPr id="199" name="FooterBand"/>
+              <a:t>Exhausted account</a:t>
+            </a:r>
+          </a:p>
+        </p:txBody>
+      </p:sp>
+      <p:sp>
+        <p:nvSpPr>
+          <p:cNvPr id="136" name="CArr1"/>
+          <p:cNvSpPr txBox="1"/>
+          <p:nvPr/>
+        </p:nvSpPr>
+        <p:spPr>
+          <a:xfrm>
+            <a:off x="5623560" y="3886200"/>
+            <a:ext cx="457200" cy="320040"/>
+          </a:xfrm>
+          <a:prstGeom prst="rect">
+            <a:avLst/>
+          </a:prstGeom>
+          <a:noFill/>
+          <a:ln>
+            <a:noFill/>
+          </a:ln>
+        </p:spPr>
+        <p:txBody>
+          <a:bodyPr wrap="square" lIns="0" tIns="0" rIns="0" bIns="0" anchor="ctr"/>
+          <a:lstStyle/>
+          <a:p>
+            <a:pPr algn="ctr">
+              <a:spcAft>
+                <a:spcPts val="0"/>
+              </a:spcAft>
+              <a:buNone/>
+            </a:pPr>
+            <a:r>
+              <a:rPr lang="en-US" sz="1600" b="1" i="0" dirty="0">
+                <a:solidFill>
+                  <a:srgbClr val="8E6F3E"/>
+                </a:solidFill>
+              </a:rPr>
+              <a:t>→</a:t>
+            </a:r>
+          </a:p>
+        </p:txBody>
+      </p:sp>
+      <p:sp>
+        <p:nvSpPr>
+          <p:cNvPr id="137" name="CZero1"/>
+          <p:cNvSpPr txBox="1"/>
+          <p:nvPr/>
+        </p:nvSpPr>
+        <p:spPr>
+          <a:xfrm>
+            <a:off x="6080760" y="3886200"/>
+            <a:ext cx="640080" cy="320040"/>
+          </a:xfrm>
+          <a:prstGeom prst="rect">
+            <a:avLst/>
+          </a:prstGeom>
+          <a:noFill/>
+          <a:ln>
+            <a:noFill/>
+          </a:ln>
+        </p:spPr>
+        <p:txBody>
+          <a:bodyPr wrap="square" lIns="0" tIns="0" rIns="0" bIns="0" anchor="ctr"/>
+          <a:lstStyle/>
+          <a:p>
+            <a:pPr algn="ctr">
+              <a:spcAft>
+                <a:spcPts val="0"/>
+              </a:spcAft>
+              <a:buNone/>
+            </a:pPr>
+            <a:r>
+              <a:rPr lang="en-US" sz="2000" b="1" i="0" dirty="0">
+                <a:solidFill>
+                  <a:srgbClr val="5C4826"/>
+                </a:solidFill>
+              </a:rPr>
+              <a:t>0</a:t>
+            </a:r>
+          </a:p>
+        </p:txBody>
+      </p:sp>
+      <p:cxnSp>
+        <p:nvCxnSpPr>
+          <p:cNvPr id="140" name="SameUp"/>
+          <p:cNvCxnSpPr/>
+          <p:nvPr/>
+        </p:nvCxnSpPr>
+        <p:spPr>
+          <a:xfrm flipV="1">
+            <a:off x="6400800" y="4206240"/>
+            <a:ext cx="0" cy="91440"/>
+          </a:xfrm>
+          <a:prstGeom prst="straightConnector1">
+            <a:avLst/>
+          </a:prstGeom>
+          <a:ln w="19050">
+            <a:solidFill>
+              <a:srgbClr val="8E6F3E"/>
+            </a:solidFill>
+            <a:tailEnd type="triangle" w="med" len="med"/>
+          </a:ln>
+        </p:spPr>
+      </p:cxnSp>
+      <p:sp>
+        <p:nvSpPr>
+          <p:cNvPr id="141" name="SameLbl"/>
+          <p:cNvSpPr txBox="1"/>
+          <p:nvPr/>
+        </p:nvSpPr>
+        <p:spPr>
+          <a:xfrm>
+            <a:off x="5181600" y="4297680"/>
+            <a:ext cx="2438400" cy="182880"/>
+          </a:xfrm>
+          <a:prstGeom prst="rect">
+            <a:avLst/>
+          </a:prstGeom>
+          <a:noFill/>
+          <a:ln>
+            <a:noFill/>
+          </a:ln>
+        </p:spPr>
+        <p:txBody>
+          <a:bodyPr wrap="square" lIns="0" tIns="0" rIns="0" bIns="0" anchor="t"/>
+          <a:lstStyle/>
+          <a:p>
+            <a:pPr algn="ctr">
+              <a:spcAft>
+                <a:spcPts val="0"/>
+              </a:spcAft>
+              <a:buNone/>
+            </a:pPr>
+            <a:r>
+              <a:rPr lang="en-US" sz="1200" b="1" i="0" dirty="0">
+                <a:solidFill>
+                  <a:srgbClr val="8E6F3E"/>
+                </a:solidFill>
+              </a:rPr>
+              <a:t>same model state</a:t>
+            </a:r>
+          </a:p>
+        </p:txBody>
+      </p:sp>
+      <p:sp>
+        <p:nvSpPr>
+          <p:cNvPr id="150" name="ConseqLine"/>
+          <p:cNvSpPr txBox="1"/>
+          <p:nvPr/>
+        </p:nvSpPr>
+        <p:spPr>
+          <a:xfrm>
+            <a:off x="1188720" y="4663440"/>
+            <a:ext cx="7680960" cy="548640"/>
+          </a:xfrm>
+          <a:prstGeom prst="rect">
+            <a:avLst/>
+          </a:prstGeom>
+          <a:noFill/>
+          <a:ln>
+            <a:noFill/>
+          </a:ln>
+        </p:spPr>
+        <p:txBody>
+          <a:bodyPr wrap="square" lIns="18288" tIns="18288" rIns="18288" bIns="18288" anchor="t"/>
+          <a:lstStyle/>
+          <a:p>
+            <a:pPr algn="ctr">
+              <a:spcAft>
+                <a:spcPts val="0"/>
+              </a:spcAft>
+              <a:buNone/>
+            </a:pPr>
+            <a:r>
+              <a:rPr lang="en-US" sz="1800" b="0" i="0" dirty="0">
+                <a:solidFill>
+                  <a:srgbClr val="555960"/>
+                </a:solidFill>
+              </a:rPr>
+              <a:t>The model cannot distinguish states with different required behavior.</a:t>
+            </a:r>
+          </a:p>
+        </p:txBody>
+      </p:sp>
+      <p:sp>
+        <p:nvSpPr>
+          <p:cNvPr id="151" name="EvTag"/>
+          <p:cNvSpPr txBox="1"/>
+          <p:nvPr/>
+        </p:nvSpPr>
+        <p:spPr>
+          <a:xfrm>
+            <a:off x="5943600" y="5440680"/>
+            <a:ext cx="2926080" cy="274320"/>
+          </a:xfrm>
+          <a:prstGeom prst="rect">
+            <a:avLst/>
+          </a:prstGeom>
+          <a:noFill/>
+          <a:ln>
+            <a:noFill/>
+          </a:ln>
+        </p:spPr>
+        <p:txBody>
+          <a:bodyPr wrap="square" lIns="0" tIns="0" rIns="0" bIns="0" anchor="t"/>
+          <a:lstStyle/>
+          <a:p>
+            <a:pPr algn="r">
+              <a:spcAft>
+                <a:spcPts val="0"/>
+              </a:spcAft>
+              <a:buNone/>
+            </a:pPr>
+            <a:r>
+              <a:rPr lang="en-US" sz="1400" b="1" i="0" dirty="0">
+                <a:solidFill>
+                  <a:srgbClr val="8E6F3E"/>
+                </a:solidFill>
+              </a:rPr>
+              <a:t xml:space="preserve">CORRESPONDENCE FAILED  ✗</a:t>
+            </a:r>
+          </a:p>
+        </p:txBody>
+      </p:sp>
+      <p:sp>
+        <p:nvSpPr>
+          <p:cNvPr id="152" name="FooterBand"/>
           <p:cNvSpPr/>
           <p:nvPr/>
         </p:nvSpPr>
@@ -14561,52 +15220,12 @@
               <a:buNone/>
             </a:pPr>
             <a:r>
-              <a:rPr lang="en-US" sz="2000" b="1" dirty="0">
+              <a:rPr lang="en-US" sz="2000" b="1" i="0" dirty="0">
                 <a:solidFill>
                   <a:srgbClr val="FFFFFF"/>
                 </a:solidFill>
               </a:rPr>
               <a:t>The reduction erased a distinction the obligation required.</a:t>
-            </a:r>
-          </a:p>
-        </p:txBody>
-      </p:sp>
-      <p:sp>
-        <p:nvSpPr>
-          <p:cNvPr id="140" name="EvTag"/>
-          <p:cNvSpPr txBox="1"/>
-          <p:nvPr/>
-        </p:nvSpPr>
-        <p:spPr>
-          <a:xfrm>
-            <a:off x="5943600" y="5440680"/>
-            <a:ext cx="2926080" cy="274320"/>
-          </a:xfrm>
-          <a:prstGeom prst="rect">
-            <a:avLst/>
-          </a:prstGeom>
-          <a:noFill/>
-          <a:ln>
-            <a:noFill/>
-          </a:ln>
-        </p:spPr>
-        <p:txBody>
-          <a:bodyPr wrap="square" lIns="0" tIns="0" rIns="0" bIns="0" anchor="t"/>
-          <a:lstStyle/>
-          <a:p>
-            <a:pPr algn="r">
-              <a:spcAft>
-                <a:spcPts val="0"/>
-              </a:spcAft>
-              <a:buNone/>
-            </a:pPr>
-            <a:r>
-              <a:rPr lang="en-US" sz="1400" b="1" i="0" dirty="0">
-                <a:solidFill>
-                  <a:srgbClr val="8E6F3E"/>
-                </a:solidFill>
-              </a:rPr>
-              <a:t xml:space="preserve">CORRESPONDENCE FAILED</a:t>
             </a:r>
           </a:p>
         </p:txBody>

--- a/course/lectures/act-2-delegation-and-control/02-modeling/2-2-Modeling-1-Purposeful-Reduction.pptx
+++ b/course/lectures/act-2-delegation-and-control/02-modeling/2-2-Modeling-1-Purposeful-Reduction.pptx
@@ -1439,26 +1439,38 @@
           <a:lstStyle/>
           <a:p>
             <a:r>
-              <a:rPr dirty="0"/>
-              <a:t>The lease model preserved owner, generation, lifetime, reclamation, and the forbidden transition: releasing a lease under a stale generation. It omitted the processing topology on purpose.</a:t>
-            </a:r>
-          </a:p>
-          <a:p>
-            <a:r>
-              <a:rPr dirty="0"/>
-              <a:t>The topology then really changed — the work was re-chunked and services rearranged — and nothing in the model moved. Vindication: the omission was tested by reality and passed. The omitted detail really was a degree of freedom, not something forgotten.</a:t>
-            </a:r>
-          </a:p>
-          <a:p>
-            <a:r>
-              <a:rPr dirty="0"/>
-              <a:t>The footer line is verbatim from the team.</a:t>
-            </a:r>
-          </a:p>
-          <a:p>
-            <a:r>
               <a:rPr lang="en-US" dirty="0"/>
-              <a:t>Name it as correspondence too, and tie it back three slides: the realization changed and the modeled property held. That is exactly what "one model, many implementations" claimed, now graded by production instead of asserted on a slide.</a:t>
+              <a:t>Same three tiers, deliberately a different kind of model. FACTS: a lease records who owns it, a generation, a lifetime, and a reclamation rule. One thing is forbidden outright — a holder on a stale generation must never release the current lease. How the work is spread out is not part of that obligation.</a:t>
+            </a:r>
+          </a:p>
+          <a:p>
+            <a:r>
+              <a:rPr lang="en-US" dirty="0"/>
+              <a:t>MODEL: this is not a schema, and say so. It is a relationship with a prohibition in it. Worker owns Lease; the lease carries generation, lifetime, reclamation; and the dashed edge is the one move the model forbids. Point at the dashed edge: a model can constrain behaviour, not just data.</a:t>
+            </a:r>
+          </a:p>
+          <a:p>
+            <a:r>
+              <a:rPr lang="en-US" dirty="0"/>
+              <a:t>Then the two realizations beneath. Both satisfy the same lease model — one service making a single pass, and a coordinator fanning work across chunk workers and merging the results. The dashed "realized by" lines are the claim. This is exactly what one-model-many-implementations asserted back in Section 2, now graded by evidence instead of asserted on a slide.</a:t>
+            </a:r>
+          </a:p>
+          <a:p>
+            <a:r>
+              <a:rPr lang="en-US" dirty="0"/>
+              <a:t>The topology changed in a dimension the model deliberately left free, and nothing in the model had to move. That is what a good omission looks like after the fact: it was a degree of freedom, not an oversight.</a:t>
+            </a:r>
+          </a:p>
+          <a:p>
+            <a:r>
+              <a:rPr lang="en-US" dirty="0"/>
+              <a:t>The pair's spoken payoff — say it here, once, as the conclusion of both cases: "Represent no more than the question requires, but no less than the obligation requires."</a:t>
+            </a:r>
+          </a:p>
+          <a:p>
+            <a:r>
+              <a:rPr lang="en-US" dirty="0"/>
+              <a:t>Keep both cases portable. Neither needs provenance; if you catch yourself saying where these came from, cut it.</a:t>
             </a:r>
           </a:p>
         </p:txBody>
@@ -15304,14 +15316,780 @@
       </p:sp>
       <p:sp>
         <p:nvSpPr>
-          <p:cNvPr id="10" name="LeaseC"/>
+          <p:cNvPr id="100" name="TierRule1"/>
           <p:cNvSpPr/>
           <p:nvPr/>
         </p:nvSpPr>
         <p:spPr>
           <a:xfrm>
-            <a:off x="1874520" y="1188720"/>
-            <a:ext cx="5394960" cy="1234440"/>
+            <a:off x="1188720" y="2301240"/>
+            <a:ext cx="7680960" cy="12700"/>
+          </a:xfrm>
+          <a:prstGeom prst="rect">
+            <a:avLst/>
+          </a:prstGeom>
+          <a:solidFill>
+            <a:srgbClr val="C9B991"/>
+          </a:solidFill>
+          <a:ln>
+            <a:noFill/>
+          </a:ln>
+        </p:spPr>
+        <p:txBody>
+          <a:bodyPr wrap="square" lIns="27432" tIns="22860" rIns="27432" bIns="22860" anchor="ctr"/>
+          <a:lstStyle/>
+          <a:p>
+            <a:pPr>
+              <a:buNone/>
+            </a:pPr>
+            <a:endParaRPr lang="en-US"/>
+          </a:p>
+        </p:txBody>
+      </p:sp>
+      <p:sp>
+        <p:nvSpPr>
+          <p:cNvPr id="101" name="TierRule2"/>
+          <p:cNvSpPr/>
+          <p:nvPr/>
+        </p:nvSpPr>
+        <p:spPr>
+          <a:xfrm>
+            <a:off x="1188720" y="4526280"/>
+            <a:ext cx="7680960" cy="12700"/>
+          </a:xfrm>
+          <a:prstGeom prst="rect">
+            <a:avLst/>
+          </a:prstGeom>
+          <a:solidFill>
+            <a:srgbClr val="C9B991"/>
+          </a:solidFill>
+          <a:ln>
+            <a:noFill/>
+          </a:ln>
+        </p:spPr>
+        <p:txBody>
+          <a:bodyPr wrap="square" lIns="27432" tIns="22860" rIns="27432" bIns="22860" anchor="ctr"/>
+          <a:lstStyle/>
+          <a:p>
+            <a:pPr>
+              <a:buNone/>
+            </a:pPr>
+            <a:endParaRPr lang="en-US"/>
+          </a:p>
+        </p:txBody>
+      </p:sp>
+      <p:sp>
+        <p:nvSpPr>
+          <p:cNvPr id="102" name="TierFacts"/>
+          <p:cNvSpPr txBox="1"/>
+          <p:nvPr/>
+        </p:nvSpPr>
+        <p:spPr>
+          <a:xfrm>
+            <a:off x="274320" y="1501140"/>
+            <a:ext cx="822960" cy="213360"/>
+          </a:xfrm>
+          <a:prstGeom prst="rect">
+            <a:avLst/>
+          </a:prstGeom>
+          <a:noFill/>
+          <a:ln>
+            <a:noFill/>
+          </a:ln>
+        </p:spPr>
+        <p:txBody>
+          <a:bodyPr wrap="square" lIns="0" tIns="0" rIns="0" bIns="0" anchor="ctr"/>
+          <a:lstStyle/>
+          <a:p>
+            <a:pPr algn="l">
+              <a:spcAft>
+                <a:spcPts val="0"/>
+              </a:spcAft>
+              <a:buNone/>
+            </a:pPr>
+            <a:r>
+              <a:rPr lang="en-US" sz="900" b="1" i="0" dirty="0">
+                <a:solidFill>
+                  <a:srgbClr val="8E6F3E"/>
+                </a:solidFill>
+              </a:rPr>
+              <a:t>FACTS</a:t>
+            </a:r>
+          </a:p>
+        </p:txBody>
+      </p:sp>
+      <p:sp>
+        <p:nvSpPr>
+          <p:cNvPr id="103" name="TierModel"/>
+          <p:cNvSpPr txBox="1"/>
+          <p:nvPr/>
+        </p:nvSpPr>
+        <p:spPr>
+          <a:xfrm>
+            <a:off x="274320" y="3307080"/>
+            <a:ext cx="822960" cy="213360"/>
+          </a:xfrm>
+          <a:prstGeom prst="rect">
+            <a:avLst/>
+          </a:prstGeom>
+          <a:noFill/>
+          <a:ln>
+            <a:noFill/>
+          </a:ln>
+        </p:spPr>
+        <p:txBody>
+          <a:bodyPr wrap="square" lIns="0" tIns="0" rIns="0" bIns="0" anchor="ctr"/>
+          <a:lstStyle/>
+          <a:p>
+            <a:pPr algn="l">
+              <a:spcAft>
+                <a:spcPts val="0"/>
+              </a:spcAft>
+              <a:buNone/>
+            </a:pPr>
+            <a:r>
+              <a:rPr lang="en-US" sz="900" b="1" i="0" dirty="0">
+                <a:solidFill>
+                  <a:srgbClr val="8E6F3E"/>
+                </a:solidFill>
+              </a:rPr>
+              <a:t>MODEL</a:t>
+            </a:r>
+          </a:p>
+        </p:txBody>
+      </p:sp>
+      <p:sp>
+        <p:nvSpPr>
+          <p:cNvPr id="104" name="TierConsequence"/>
+          <p:cNvSpPr txBox="1"/>
+          <p:nvPr/>
+        </p:nvSpPr>
+        <p:spPr>
+          <a:xfrm>
+            <a:off x="274320" y="5082540"/>
+            <a:ext cx="822960" cy="213360"/>
+          </a:xfrm>
+          <a:prstGeom prst="rect">
+            <a:avLst/>
+          </a:prstGeom>
+          <a:noFill/>
+          <a:ln>
+            <a:noFill/>
+          </a:ln>
+        </p:spPr>
+        <p:txBody>
+          <a:bodyPr wrap="square" lIns="0" tIns="0" rIns="0" bIns="0" anchor="ctr"/>
+          <a:lstStyle/>
+          <a:p>
+            <a:pPr algn="l">
+              <a:spcAft>
+                <a:spcPts val="0"/>
+              </a:spcAft>
+              <a:buNone/>
+            </a:pPr>
+            <a:r>
+              <a:rPr lang="en-US" sz="900" b="1" i="0" dirty="0">
+                <a:solidFill>
+                  <a:srgbClr val="8E6F3E"/>
+                </a:solidFill>
+              </a:rPr>
+              <a:t>CONSEQUENCE</a:t>
+            </a:r>
+          </a:p>
+        </p:txBody>
+      </p:sp>
+      <p:sp>
+        <p:nvSpPr>
+          <p:cNvPr id="110" name="Facts"/>
+          <p:cNvSpPr txBox="1"/>
+          <p:nvPr/>
+        </p:nvSpPr>
+        <p:spPr>
+          <a:xfrm>
+            <a:off x="1188720" y="1005840"/>
+            <a:ext cx="7680960" cy="1188720"/>
+          </a:xfrm>
+          <a:prstGeom prst="rect">
+            <a:avLst/>
+          </a:prstGeom>
+          <a:noFill/>
+          <a:ln>
+            <a:noFill/>
+          </a:ln>
+        </p:spPr>
+        <p:txBody>
+          <a:bodyPr wrap="square" lIns="0" tIns="0" rIns="0" bIns="0" anchor="t"/>
+          <a:lstStyle/>
+          <a:p>
+            <a:pPr algn="l">
+              <a:spcAft>
+                <a:spcPts val="700"/>
+              </a:spcAft>
+              <a:buNone/>
+            </a:pPr>
+            <a:r>
+              <a:rPr lang="en-US" sz="1600" b="0" i="0" dirty="0">
+                <a:solidFill>
+                  <a:srgbClr val="555960"/>
+                </a:solidFill>
+              </a:rPr>
+              <a:t>A resource lease has an owner, generation, lifetime, and reclamation rule</a:t>
+            </a:r>
+          </a:p>
+          <a:p>
+            <a:pPr algn="l">
+              <a:spcAft>
+                <a:spcPts val="700"/>
+              </a:spcAft>
+              <a:buNone/>
+            </a:pPr>
+            <a:r>
+              <a:rPr lang="en-US" sz="1600" b="0" i="0" dirty="0">
+                <a:solidFill>
+                  <a:srgbClr val="555960"/>
+                </a:solidFill>
+              </a:rPr>
+              <a:t>A stale generation must never release the current lease</a:t>
+            </a:r>
+          </a:p>
+          <a:p>
+            <a:pPr algn="l">
+              <a:spcAft>
+                <a:spcPts val="700"/>
+              </a:spcAft>
+              <a:buNone/>
+            </a:pPr>
+            <a:r>
+              <a:rPr lang="en-US" sz="1600" b="0" i="0" dirty="0">
+                <a:solidFill>
+                  <a:srgbClr val="555960"/>
+                </a:solidFill>
+              </a:rPr>
+              <a:t>Processing topology is not part of that obligation</a:t>
+            </a:r>
+          </a:p>
+        </p:txBody>
+      </p:sp>
+      <p:sp>
+        <p:nvSpPr>
+          <p:cNvPr id="120" name="WorkerNode"/>
+          <p:cNvSpPr/>
+          <p:nvPr/>
+        </p:nvSpPr>
+        <p:spPr>
+          <a:xfrm>
+            <a:off x="1188720" y="2423160"/>
+            <a:ext cx="1371600" cy="594360"/>
+          </a:xfrm>
+          <a:prstGeom prst="roundRect">
+            <a:avLst/>
+          </a:prstGeom>
+          <a:solidFill>
+            <a:srgbClr val="FBF8F2"/>
+          </a:solidFill>
+          <a:ln w="12700">
+            <a:solidFill>
+              <a:srgbClr val="C9B991"/>
+            </a:solidFill>
+          </a:ln>
+        </p:spPr>
+        <p:txBody>
+          <a:bodyPr wrap="square" lIns="27432" tIns="22860" rIns="27432" bIns="22860" anchor="ctr"/>
+          <a:lstStyle/>
+          <a:p>
+            <a:pPr algn="ctr">
+              <a:spcAft>
+                <a:spcPts val="300"/>
+              </a:spcAft>
+              <a:buNone/>
+            </a:pPr>
+            <a:r>
+              <a:rPr lang="en-US" sz="1200" b="1" i="0" dirty="0">
+                <a:solidFill>
+                  <a:srgbClr val="5C4826"/>
+                </a:solidFill>
+              </a:rPr>
+              <a:t>WORKER</a:t>
+            </a:r>
+          </a:p>
+          <a:p>
+            <a:pPr algn="ctr">
+              <a:spcAft>
+                <a:spcPts val="0"/>
+              </a:spcAft>
+              <a:buNone/>
+            </a:pPr>
+            <a:r>
+              <a:rPr lang="en-US" sz="900" b="0" i="1" dirty="0">
+                <a:solidFill>
+                  <a:srgbClr val="555960"/>
+                </a:solidFill>
+              </a:rPr>
+              <a:t>the owner</a:t>
+            </a:r>
+          </a:p>
+        </p:txBody>
+      </p:sp>
+      <p:sp>
+        <p:nvSpPr>
+          <p:cNvPr id="121" name="OwnsLbl"/>
+          <p:cNvSpPr txBox="1"/>
+          <p:nvPr/>
+        </p:nvSpPr>
+        <p:spPr>
+          <a:xfrm>
+            <a:off x="2651760" y="2468880"/>
+            <a:ext cx="640080" cy="182880"/>
+          </a:xfrm>
+          <a:prstGeom prst="rect">
+            <a:avLst/>
+          </a:prstGeom>
+          <a:noFill/>
+          <a:ln>
+            <a:noFill/>
+          </a:ln>
+        </p:spPr>
+        <p:txBody>
+          <a:bodyPr wrap="square" lIns="0" tIns="0" rIns="0" bIns="0" anchor="t"/>
+          <a:lstStyle/>
+          <a:p>
+            <a:pPr algn="ctr">
+              <a:spcAft>
+                <a:spcPts val="0"/>
+              </a:spcAft>
+              <a:buNone/>
+            </a:pPr>
+            <a:r>
+              <a:rPr lang="en-US" sz="900" b="1" i="0" dirty="0">
+                <a:solidFill>
+                  <a:srgbClr val="8E6F3E"/>
+                </a:solidFill>
+              </a:rPr>
+              <a:t>OWNS</a:t>
+            </a:r>
+          </a:p>
+        </p:txBody>
+      </p:sp>
+      <p:cxnSp>
+        <p:nvCxnSpPr>
+          <p:cNvPr id="122" name="OwnsArrow"/>
+          <p:cNvCxnSpPr/>
+          <p:nvPr/>
+        </p:nvCxnSpPr>
+        <p:spPr>
+          <a:xfrm>
+            <a:off x="2651760" y="2720340"/>
+            <a:ext cx="640080" cy="0"/>
+          </a:xfrm>
+          <a:prstGeom prst="straightConnector1">
+            <a:avLst/>
+          </a:prstGeom>
+          <a:ln w="28575">
+            <a:solidFill>
+              <a:srgbClr val="8E6F3E"/>
+            </a:solidFill>
+            <a:tailEnd type="triangle" w="med" len="med"/>
+          </a:ln>
+        </p:spPr>
+      </p:cxnSp>
+      <p:sp>
+        <p:nvSpPr>
+          <p:cNvPr id="123" name="LeaseNode"/>
+          <p:cNvSpPr/>
+          <p:nvPr/>
+        </p:nvSpPr>
+        <p:spPr>
+          <a:xfrm>
+            <a:off x="3383280" y="2377440"/>
+            <a:ext cx="2560320" cy="685800"/>
+          </a:xfrm>
+          <a:prstGeom prst="roundRect">
+            <a:avLst/>
+          </a:prstGeom>
+          <a:solidFill>
+            <a:srgbClr val="F5F1E8"/>
+          </a:solidFill>
+          <a:ln w="19050">
+            <a:solidFill>
+              <a:srgbClr val="8E6F3E"/>
+            </a:solidFill>
+          </a:ln>
+        </p:spPr>
+        <p:txBody>
+          <a:bodyPr wrap="square" lIns="27432" tIns="22860" rIns="27432" bIns="22860" anchor="ctr"/>
+          <a:lstStyle/>
+          <a:p>
+            <a:pPr algn="ctr">
+              <a:spcAft>
+                <a:spcPts val="400"/>
+              </a:spcAft>
+              <a:buNone/>
+            </a:pPr>
+            <a:r>
+              <a:rPr lang="en-US" sz="1400" b="1" i="0" dirty="0">
+                <a:solidFill>
+                  <a:srgbClr val="8E6F3E"/>
+                </a:solidFill>
+              </a:rPr>
+              <a:t>LEASE</a:t>
+            </a:r>
+          </a:p>
+          <a:p>
+            <a:pPr algn="ctr">
+              <a:spcAft>
+                <a:spcPts val="0"/>
+              </a:spcAft>
+              <a:buNone/>
+            </a:pPr>
+            <a:r>
+              <a:rPr lang="en-US" sz="1000" b="0" i="0" dirty="0">
+                <a:solidFill>
+                  <a:srgbClr val="5C4826"/>
+                </a:solidFill>
+              </a:rPr>
+              <a:t>generation  ·  lifetime  ·  reclamation</a:t>
+            </a:r>
+          </a:p>
+        </p:txBody>
+      </p:sp>
+      <p:sp>
+        <p:nvSpPr>
+          <p:cNvPr id="124" name="ForbidMark"/>
+          <p:cNvSpPr txBox="1"/>
+          <p:nvPr/>
+        </p:nvSpPr>
+        <p:spPr>
+          <a:xfrm>
+            <a:off x="6035040" y="2468880"/>
+            <a:ext cx="548640" cy="182880"/>
+          </a:xfrm>
+          <a:prstGeom prst="rect">
+            <a:avLst/>
+          </a:prstGeom>
+          <a:noFill/>
+          <a:ln>
+            <a:noFill/>
+          </a:ln>
+        </p:spPr>
+        <p:txBody>
+          <a:bodyPr wrap="square" lIns="0" tIns="0" rIns="0" bIns="0" anchor="t"/>
+          <a:lstStyle/>
+          <a:p>
+            <a:pPr algn="ctr">
+              <a:spcAft>
+                <a:spcPts val="0"/>
+              </a:spcAft>
+              <a:buNone/>
+            </a:pPr>
+            <a:r>
+              <a:rPr lang="en-US" sz="1600" b="1" i="0" dirty="0">
+                <a:solidFill>
+                  <a:srgbClr val="5C4826"/>
+                </a:solidFill>
+              </a:rPr>
+              <a:t>✗</a:t>
+            </a:r>
+          </a:p>
+        </p:txBody>
+      </p:sp>
+      <p:cxnSp>
+        <p:nvCxnSpPr>
+          <p:cNvPr id="125" name="ForbidArrow"/>
+          <p:cNvCxnSpPr/>
+          <p:nvPr/>
+        </p:nvCxnSpPr>
+        <p:spPr>
+          <a:xfrm flipH="1">
+            <a:off x="5943600" y="2720340"/>
+            <a:ext cx="731520" cy="0"/>
+          </a:xfrm>
+          <a:prstGeom prst="straightConnector1">
+            <a:avLst/>
+          </a:prstGeom>
+          <a:ln w="28575">
+            <a:solidFill>
+              <a:srgbClr val="5C4826"/>
+            </a:solidFill>
+            <a:prstDash val="dash"/>
+            <a:tailEnd type="triangle" w="med" len="med"/>
+          </a:ln>
+        </p:spPr>
+      </p:cxnSp>
+      <p:sp>
+        <p:nvSpPr>
+          <p:cNvPr id="126" name="StaleNode"/>
+          <p:cNvSpPr/>
+          <p:nvPr/>
+        </p:nvSpPr>
+        <p:spPr>
+          <a:xfrm>
+            <a:off x="6675120" y="2423160"/>
+            <a:ext cx="2194560" cy="594360"/>
+          </a:xfrm>
+          <a:prstGeom prst="roundRect">
+            <a:avLst/>
+          </a:prstGeom>
+          <a:solidFill>
+            <a:srgbClr val="FDFCF9"/>
+          </a:solidFill>
+          <a:ln w="12700">
+            <a:solidFill>
+              <a:srgbClr val="C9B991"/>
+            </a:solidFill>
+            <a:prstDash val="dash"/>
+          </a:ln>
+        </p:spPr>
+        <p:txBody>
+          <a:bodyPr wrap="square" lIns="27432" tIns="22860" rIns="27432" bIns="22860" anchor="ctr"/>
+          <a:lstStyle/>
+          <a:p>
+            <a:pPr algn="ctr">
+              <a:spcAft>
+                <a:spcPts val="300"/>
+              </a:spcAft>
+              <a:buNone/>
+            </a:pPr>
+            <a:r>
+              <a:rPr lang="en-US" sz="1100" b="1" i="0" dirty="0">
+                <a:solidFill>
+                  <a:srgbClr val="5C4826"/>
+                </a:solidFill>
+              </a:rPr>
+              <a:t>STALE GENERATION</a:t>
+            </a:r>
+          </a:p>
+          <a:p>
+            <a:pPr algn="ctr">
+              <a:spcAft>
+                <a:spcPts val="0"/>
+              </a:spcAft>
+              <a:buNone/>
+            </a:pPr>
+            <a:r>
+              <a:rPr lang="en-US" sz="900" b="0" i="1" dirty="0">
+                <a:solidFill>
+                  <a:srgbClr val="555960"/>
+                </a:solidFill>
+              </a:rPr>
+              <a:t>cannot release the current lease</a:t>
+            </a:r>
+          </a:p>
+        </p:txBody>
+      </p:sp>
+      <p:cxnSp>
+        <p:nvCxnSpPr>
+          <p:cNvPr id="130" name="RbStem"/>
+          <p:cNvCxnSpPr/>
+          <p:nvPr/>
+        </p:nvCxnSpPr>
+        <p:spPr>
+          <a:xfrm>
+            <a:off x="4663440" y="3063240"/>
+            <a:ext cx="0" cy="137160"/>
+          </a:xfrm>
+          <a:prstGeom prst="straightConnector1">
+            <a:avLst/>
+          </a:prstGeom>
+          <a:ln w="12700">
+            <a:solidFill>
+              <a:srgbClr val="C9B991"/>
+            </a:solidFill>
+            <a:prstDash val="dash"/>
+          </a:ln>
+        </p:spPr>
+      </p:cxnSp>
+      <p:cxnSp>
+        <p:nvCxnSpPr>
+          <p:cNvPr id="131" name="RbBus"/>
+          <p:cNvCxnSpPr/>
+          <p:nvPr/>
+        </p:nvCxnSpPr>
+        <p:spPr>
+          <a:xfrm>
+            <a:off x="2971800" y="3200400"/>
+            <a:ext cx="4114800" cy="0"/>
+          </a:xfrm>
+          <a:prstGeom prst="straightConnector1">
+            <a:avLst/>
+          </a:prstGeom>
+          <a:ln w="12700">
+            <a:solidFill>
+              <a:srgbClr val="C9B991"/>
+            </a:solidFill>
+            <a:prstDash val="dash"/>
+          </a:ln>
+        </p:spPr>
+      </p:cxnSp>
+      <p:cxnSp>
+        <p:nvCxnSpPr>
+          <p:cNvPr id="132" name="RbDropL"/>
+          <p:cNvCxnSpPr/>
+          <p:nvPr/>
+        </p:nvCxnSpPr>
+        <p:spPr>
+          <a:xfrm>
+            <a:off x="2971800" y="3200400"/>
+            <a:ext cx="0" cy="137160"/>
+          </a:xfrm>
+          <a:prstGeom prst="straightConnector1">
+            <a:avLst/>
+          </a:prstGeom>
+          <a:ln w="12700">
+            <a:solidFill>
+              <a:srgbClr val="C9B991"/>
+            </a:solidFill>
+            <a:prstDash val="dash"/>
+            <a:tailEnd type="triangle" w="med" len="med"/>
+          </a:ln>
+        </p:spPr>
+      </p:cxnSp>
+      <p:cxnSp>
+        <p:nvCxnSpPr>
+          <p:cNvPr id="133" name="RbDropR"/>
+          <p:cNvCxnSpPr/>
+          <p:nvPr/>
+        </p:nvCxnSpPr>
+        <p:spPr>
+          <a:xfrm>
+            <a:off x="7086600" y="3200400"/>
+            <a:ext cx="0" cy="137160"/>
+          </a:xfrm>
+          <a:prstGeom prst="straightConnector1">
+            <a:avLst/>
+          </a:prstGeom>
+          <a:ln w="12700">
+            <a:solidFill>
+              <a:srgbClr val="C9B991"/>
+            </a:solidFill>
+            <a:prstDash val="dash"/>
+            <a:tailEnd type="triangle" w="med" len="med"/>
+          </a:ln>
+        </p:spPr>
+      </p:cxnSp>
+      <p:sp>
+        <p:nvSpPr>
+          <p:cNvPr id="134" name="RbLbl"/>
+          <p:cNvSpPr txBox="1"/>
+          <p:nvPr/>
+        </p:nvSpPr>
+        <p:spPr>
+          <a:xfrm>
+            <a:off x="1188720" y="3131880"/>
+            <a:ext cx="1600200" cy="182880"/>
+          </a:xfrm>
+          <a:prstGeom prst="rect">
+            <a:avLst/>
+          </a:prstGeom>
+          <a:noFill/>
+          <a:ln>
+            <a:noFill/>
+          </a:ln>
+        </p:spPr>
+        <p:txBody>
+          <a:bodyPr wrap="square" lIns="0" tIns="0" rIns="0" bIns="0" anchor="t"/>
+          <a:lstStyle/>
+          <a:p>
+            <a:pPr algn="l">
+              <a:spcAft>
+                <a:spcPts val="0"/>
+              </a:spcAft>
+              <a:buNone/>
+            </a:pPr>
+            <a:r>
+              <a:rPr lang="en-US" sz="900" b="0" i="1" dirty="0">
+                <a:solidFill>
+                  <a:srgbClr val="555960"/>
+                </a:solidFill>
+              </a:rPr>
+              <a:t>realized by</a:t>
+            </a:r>
+          </a:p>
+        </p:txBody>
+      </p:sp>
+      <p:sp>
+        <p:nvSpPr>
+          <p:cNvPr id="140" name="PanB"/>
+          <p:cNvSpPr/>
+          <p:nvPr/>
+        </p:nvSpPr>
+        <p:spPr>
+          <a:xfrm>
+            <a:off x="1188720" y="3337560"/>
+            <a:ext cx="3566160" cy="1188720"/>
+          </a:xfrm>
+          <a:prstGeom prst="rect">
+            <a:avLst/>
+          </a:prstGeom>
+          <a:solidFill>
+            <a:srgbClr val="FDFCF9"/>
+          </a:solidFill>
+          <a:ln w="12700">
+            <a:solidFill>
+              <a:srgbClr val="C9B991"/>
+            </a:solidFill>
+          </a:ln>
+        </p:spPr>
+        <p:txBody>
+          <a:bodyPr wrap="square" lIns="27432" tIns="22860" rIns="27432" bIns="22860" anchor="ctr"/>
+          <a:lstStyle/>
+          <a:p>
+            <a:pPr>
+              <a:buNone/>
+            </a:pPr>
+            <a:endParaRPr lang="en-US"/>
+          </a:p>
+        </p:txBody>
+      </p:sp>
+      <p:sp>
+        <p:nvSpPr>
+          <p:cNvPr id="141" name="PanBLbl"/>
+          <p:cNvSpPr txBox="1"/>
+          <p:nvPr/>
+        </p:nvSpPr>
+        <p:spPr>
+          <a:xfrm>
+            <a:off x="1280160" y="3383280"/>
+            <a:ext cx="3383280" cy="182880"/>
+          </a:xfrm>
+          <a:prstGeom prst="rect">
+            <a:avLst/>
+          </a:prstGeom>
+          <a:noFill/>
+          <a:ln>
+            <a:noFill/>
+          </a:ln>
+        </p:spPr>
+        <p:txBody>
+          <a:bodyPr wrap="square" lIns="0" tIns="0" rIns="0" bIns="0" anchor="t"/>
+          <a:lstStyle/>
+          <a:p>
+            <a:pPr algn="l">
+              <a:spcAft>
+                <a:spcPts val="0"/>
+              </a:spcAft>
+              <a:buNone/>
+            </a:pPr>
+            <a:r>
+              <a:rPr lang="en-US" sz="1100" b="1" i="0" dirty="0">
+                <a:solidFill>
+                  <a:srgbClr val="8E6F3E"/>
+                </a:solidFill>
+              </a:rPr>
+              <a:t>BEFORE</a:t>
+            </a:r>
+          </a:p>
+        </p:txBody>
+      </p:sp>
+      <p:sp>
+        <p:nvSpPr>
+          <p:cNvPr id="142" name="BSvc"/>
+          <p:cNvSpPr/>
+          <p:nvPr/>
+        </p:nvSpPr>
+        <p:spPr>
+          <a:xfrm>
+            <a:off x="1417320" y="3703320"/>
+            <a:ext cx="1188720" cy="365760"/>
           </a:xfrm>
           <a:prstGeom prst="rect">
             <a:avLst/>
@@ -15331,187 +16109,53 @@
           <a:p>
             <a:pPr algn="ctr">
               <a:spcAft>
-                <a:spcPts val="600"/>
-              </a:spcAft>
-              <a:buNone/>
-            </a:pPr>
-            <a:r>
-              <a:rPr lang="en-US" sz="1600" b="1" dirty="0">
-                <a:solidFill>
-                  <a:srgbClr val="8E6F3E"/>
-                </a:solidFill>
-              </a:rPr>
-              <a:t>THE LEASE MODEL</a:t>
-            </a:r>
-          </a:p>
-          <a:p>
-            <a:pPr algn="ctr">
-              <a:spcAft>
-                <a:spcPts val="600"/>
-              </a:spcAft>
-              <a:buNone/>
-            </a:pPr>
-            <a:r>
-              <a:rPr lang="en-US" sz="1500" b="1" dirty="0">
-                <a:solidFill>
-                  <a:srgbClr val="5C4826"/>
-                </a:solidFill>
-              </a:rPr>
-              <a:t>owner · generation · lifetime · reclamation</a:t>
-            </a:r>
-          </a:p>
-          <a:p>
-            <a:pPr algn="ctr">
-              <a:spcAft>
                 <a:spcPts val="0"/>
               </a:spcAft>
               <a:buNone/>
             </a:pPr>
             <a:r>
-              <a:rPr lang="en-US" sz="1500" b="0" dirty="0">
-                <a:solidFill>
-                  <a:srgbClr val="555960"/>
-                </a:solidFill>
-              </a:rPr>
-              <a:t>forbidden: releasing a lease under a stale generation</a:t>
-            </a:r>
-          </a:p>
-        </p:txBody>
-      </p:sp>
-      <p:sp>
-        <p:nvSpPr>
-          <p:cNvPr id="11" name="CapC"/>
-          <p:cNvSpPr txBox="1"/>
-          <p:nvPr/>
-        </p:nvSpPr>
-        <p:spPr>
-          <a:xfrm>
-            <a:off x="1874520" y="2514600"/>
-            <a:ext cx="5394960" cy="274320"/>
-          </a:xfrm>
-          <a:prstGeom prst="rect">
-            <a:avLst/>
-          </a:prstGeom>
-          <a:noFill/>
-          <a:ln>
-            <a:noFill/>
-          </a:ln>
-        </p:spPr>
-        <p:txBody>
-          <a:bodyPr wrap="square" lIns="0" tIns="0" rIns="0" bIns="0" anchor="t"/>
-          <a:lstStyle/>
-          <a:p>
-            <a:pPr algn="ctr">
-              <a:spcAft>
-                <a:spcPts val="0"/>
-              </a:spcAft>
-              <a:buNone/>
-            </a:pPr>
-            <a:r>
-              <a:rPr lang="en-US" sz="1500" b="1" dirty="0">
-                <a:solidFill>
-                  <a:srgbClr val="8E6F3E"/>
-                </a:solidFill>
-              </a:rPr>
-              <a:t>✓ unchanged — the model did not move</a:t>
-            </a:r>
-          </a:p>
-        </p:txBody>
-      </p:sp>
-      <p:sp>
-        <p:nvSpPr>
-          <p:cNvPr id="12" name="OmitL"/>
-          <p:cNvSpPr txBox="1"/>
-          <p:nvPr/>
-        </p:nvSpPr>
-        <p:spPr>
-          <a:xfrm>
-            <a:off x="365760" y="2971800"/>
-            <a:ext cx="8412480" cy="274320"/>
-          </a:xfrm>
-          <a:prstGeom prst="rect">
-            <a:avLst/>
-          </a:prstGeom>
-          <a:noFill/>
-          <a:ln>
-            <a:noFill/>
-          </a:ln>
-        </p:spPr>
-        <p:txBody>
-          <a:bodyPr wrap="square" lIns="0" tIns="0" rIns="0" bIns="0" anchor="t"/>
-          <a:lstStyle/>
-          <a:p>
-            <a:pPr algn="ctr">
-              <a:spcAft>
-                <a:spcPts val="0"/>
-              </a:spcAft>
-              <a:buNone/>
-            </a:pPr>
-            <a:r>
-              <a:rPr lang="en-US" sz="1600" b="0" i="1" dirty="0">
-                <a:solidFill>
-                  <a:srgbClr val="555960"/>
-                </a:solidFill>
-              </a:rPr>
-              <a:t>omitted from the model: the processing topology</a:t>
-            </a:r>
-          </a:p>
-        </p:txBody>
-      </p:sp>
-      <p:sp>
-        <p:nvSpPr>
-          <p:cNvPr id="13" name="PanB"/>
-          <p:cNvSpPr/>
-          <p:nvPr/>
-        </p:nvSpPr>
-        <p:spPr>
-          <a:xfrm>
-            <a:off x="640080" y="3337560"/>
-            <a:ext cx="3383280" cy="1371600"/>
-          </a:xfrm>
-          <a:prstGeom prst="rect">
-            <a:avLst/>
-          </a:prstGeom>
-          <a:solidFill>
-            <a:srgbClr val="FBF8F2"/>
-          </a:solidFill>
+              <a:rPr lang="en-US" sz="1000" b="1" i="0" dirty="0">
+                <a:solidFill>
+                  <a:srgbClr val="5C4826"/>
+                </a:solidFill>
+              </a:rPr>
+              <a:t>SERVICE</a:t>
+            </a:r>
+          </a:p>
+        </p:txBody>
+      </p:sp>
+      <p:cxnSp>
+        <p:nvCxnSpPr>
+          <p:cNvPr id="143" name="BArr"/>
+          <p:cNvCxnSpPr/>
+          <p:nvPr/>
+        </p:nvCxnSpPr>
+        <p:spPr>
+          <a:xfrm>
+            <a:off x="2651760" y="3886200"/>
+            <a:ext cx="365760" cy="0"/>
+          </a:xfrm>
+          <a:prstGeom prst="straightConnector1">
+            <a:avLst/>
+          </a:prstGeom>
           <a:ln w="12700">
             <a:solidFill>
-              <a:srgbClr val="C9B991"/>
+              <a:srgbClr val="8E6F3E"/>
             </a:solidFill>
-          </a:ln>
-        </p:spPr>
-        <p:txBody>
-          <a:bodyPr wrap="square" lIns="27432" tIns="22860" rIns="27432" bIns="22860" anchor="t"/>
-          <a:lstStyle/>
-          <a:p>
-            <a:pPr algn="ctr">
-              <a:spcAft>
-                <a:spcPts val="0"/>
-              </a:spcAft>
-              <a:buNone/>
-            </a:pPr>
-            <a:r>
-              <a:rPr lang="en-US" sz="1400" b="1" dirty="0">
-                <a:solidFill>
-                  <a:srgbClr val="555960"/>
-                </a:solidFill>
-              </a:rPr>
-              <a:t>BEFORE</a:t>
-            </a:r>
-          </a:p>
-        </p:txBody>
-      </p:sp>
-      <p:sp>
-        <p:nvSpPr>
-          <p:cNvPr id="14" name="Mb1"/>
+            <a:tailEnd type="triangle" w="med" len="med"/>
+          </a:ln>
+        </p:spPr>
+      </p:cxnSp>
+      <p:sp>
+        <p:nvSpPr>
+          <p:cNvPr id="144" name="BDoc"/>
           <p:cNvSpPr/>
           <p:nvPr/>
         </p:nvSpPr>
         <p:spPr>
           <a:xfrm>
-            <a:off x="868680" y="3908520"/>
-            <a:ext cx="2926080" cy="548640"/>
+            <a:off x="3063240" y="3703320"/>
+            <a:ext cx="1371600" cy="365760"/>
           </a:xfrm>
           <a:prstGeom prst="rect">
             <a:avLst/>
@@ -15536,11 +16180,51 @@
               <a:buNone/>
             </a:pPr>
             <a:r>
-              <a:rPr lang="en-US" sz="1400" b="0" dirty="0">
+              <a:rPr lang="en-US" sz="1000" b="1" i="0" dirty="0">
                 <a:solidFill>
                   <a:srgbClr val="5C4826"/>
                 </a:solidFill>
               </a:rPr>
+              <a:t>DOCUMENT</a:t>
+            </a:r>
+          </a:p>
+        </p:txBody>
+      </p:sp>
+      <p:sp>
+        <p:nvSpPr>
+          <p:cNvPr id="145" name="BCap"/>
+          <p:cNvSpPr txBox="1"/>
+          <p:nvPr/>
+        </p:nvSpPr>
+        <p:spPr>
+          <a:xfrm>
+            <a:off x="1280160" y="4320540"/>
+            <a:ext cx="3383280" cy="182880"/>
+          </a:xfrm>
+          <a:prstGeom prst="rect">
+            <a:avLst/>
+          </a:prstGeom>
+          <a:noFill/>
+          <a:ln>
+            <a:noFill/>
+          </a:ln>
+        </p:spPr>
+        <p:txBody>
+          <a:bodyPr wrap="square" lIns="0" tIns="0" rIns="0" bIns="0" anchor="t"/>
+          <a:lstStyle/>
+          <a:p>
+            <a:pPr algn="l">
+              <a:spcAft>
+                <a:spcPts val="0"/>
+              </a:spcAft>
+              <a:buNone/>
+            </a:pPr>
+            <a:r>
+              <a:rPr lang="en-US" sz="900" b="0" i="1" dirty="0">
+                <a:solidFill>
+                  <a:srgbClr val="555960"/>
+                </a:solidFill>
+              </a:rPr>
               <a:t>one service, one pass over the document</a:t>
             </a:r>
           </a:p>
@@ -15548,20 +16232,20 @@
       </p:sp>
       <p:sp>
         <p:nvSpPr>
-          <p:cNvPr id="15" name="PanA"/>
+          <p:cNvPr id="150" name="PanA"/>
           <p:cNvSpPr/>
           <p:nvPr/>
         </p:nvSpPr>
         <p:spPr>
           <a:xfrm>
-            <a:off x="5120640" y="3337560"/>
-            <a:ext cx="3383280" cy="1371600"/>
+            <a:off x="5303520" y="3337560"/>
+            <a:ext cx="3566160" cy="1188720"/>
           </a:xfrm>
           <a:prstGeom prst="rect">
             <a:avLst/>
           </a:prstGeom>
           <a:solidFill>
-            <a:srgbClr val="FBF8F2"/>
+            <a:srgbClr val="FDFCF9"/>
           </a:solidFill>
           <a:ln w="12700">
             <a:solidFill>
@@ -15570,19 +16254,49 @@
           </a:ln>
         </p:spPr>
         <p:txBody>
-          <a:bodyPr wrap="square" lIns="27432" tIns="22860" rIns="27432" bIns="22860" anchor="t"/>
-          <a:lstStyle/>
-          <a:p>
-            <a:pPr algn="ctr">
+          <a:bodyPr wrap="square" lIns="27432" tIns="22860" rIns="27432" bIns="22860" anchor="ctr"/>
+          <a:lstStyle/>
+          <a:p>
+            <a:pPr>
+              <a:buNone/>
+            </a:pPr>
+            <a:endParaRPr lang="en-US"/>
+          </a:p>
+        </p:txBody>
+      </p:sp>
+      <p:sp>
+        <p:nvSpPr>
+          <p:cNvPr id="151" name="PanALbl"/>
+          <p:cNvSpPr txBox="1"/>
+          <p:nvPr/>
+        </p:nvSpPr>
+        <p:spPr>
+          <a:xfrm>
+            <a:off x="5394960" y="3383280"/>
+            <a:ext cx="3383280" cy="182880"/>
+          </a:xfrm>
+          <a:prstGeom prst="rect">
+            <a:avLst/>
+          </a:prstGeom>
+          <a:noFill/>
+          <a:ln>
+            <a:noFill/>
+          </a:ln>
+        </p:spPr>
+        <p:txBody>
+          <a:bodyPr wrap="square" lIns="0" tIns="0" rIns="0" bIns="0" anchor="t"/>
+          <a:lstStyle/>
+          <a:p>
+            <a:pPr algn="l">
               <a:spcAft>
                 <a:spcPts val="0"/>
               </a:spcAft>
               <a:buNone/>
             </a:pPr>
             <a:r>
-              <a:rPr lang="en-US" sz="1400" b="1" dirty="0">
-                <a:solidFill>
-                  <a:srgbClr val="555960"/>
+              <a:rPr lang="en-US" sz="1100" b="1" i="0" dirty="0">
+                <a:solidFill>
+                  <a:srgbClr val="8E6F3E"/>
                 </a:solidFill>
               </a:rPr>
               <a:t>AFTER</a:t>
@@ -15592,14 +16306,14 @@
       </p:sp>
       <p:sp>
         <p:nvSpPr>
-          <p:cNvPr id="16" name="Mb2"/>
+          <p:cNvPr id="152" name="ACoord"/>
           <p:cNvSpPr/>
           <p:nvPr/>
         </p:nvSpPr>
         <p:spPr>
           <a:xfrm>
-            <a:off x="5349240" y="3794760"/>
-            <a:ext cx="2926080" cy="384048"/>
+            <a:off x="5486400" y="3566160"/>
+            <a:ext cx="1097280" cy="320040"/>
           </a:xfrm>
           <a:prstGeom prst="rect">
             <a:avLst/>
@@ -15624,26 +16338,26 @@
               <a:buNone/>
             </a:pPr>
             <a:r>
-              <a:rPr lang="en-US" sz="1400" b="0" dirty="0">
+              <a:rPr lang="en-US" sz="900" b="1" i="0" dirty="0">
                 <a:solidFill>
                   <a:srgbClr val="5C4826"/>
                 </a:solidFill>
               </a:rPr>
-              <a:t>fan out across chunk workers</a:t>
-            </a:r>
-          </a:p>
-        </p:txBody>
-      </p:sp>
-      <p:sp>
-        <p:nvSpPr>
-          <p:cNvPr id="17" name="Mb3"/>
+              <a:t>COORDINATOR</a:t>
+            </a:r>
+          </a:p>
+        </p:txBody>
+      </p:sp>
+      <p:sp>
+        <p:nvSpPr>
+          <p:cNvPr id="153" name="AChunk0"/>
           <p:cNvSpPr/>
           <p:nvPr/>
         </p:nvSpPr>
         <p:spPr>
           <a:xfrm>
-            <a:off x="5349240" y="4270248"/>
-            <a:ext cx="2926080" cy="384048"/>
+            <a:off x="6858000" y="3520440"/>
+            <a:ext cx="640080" cy="228600"/>
           </a:xfrm>
           <a:prstGeom prst="rect">
             <a:avLst/>
@@ -15668,59 +16382,41 @@
               <a:buNone/>
             </a:pPr>
             <a:r>
-              <a:rPr lang="en-US" sz="1400" b="0" dirty="0">
+              <a:rPr lang="en-US" sz="900" b="0" i="0" dirty="0">
                 <a:solidFill>
                   <a:srgbClr val="5C4826"/>
                 </a:solidFill>
               </a:rPr>
-              <a:t>merge the results</a:t>
-            </a:r>
-          </a:p>
-        </p:txBody>
-      </p:sp>
-      <p:cxnSp>
-        <p:nvCxnSpPr>
-          <p:cNvPr id="18" name="ChgA"/>
-          <p:cNvCxnSpPr/>
-          <p:nvPr/>
-        </p:nvCxnSpPr>
-        <p:spPr>
-          <a:xfrm>
-            <a:off x="4023360" y="4023360"/>
-            <a:ext cx="1097280" cy="0"/>
-          </a:xfrm>
-          <a:prstGeom prst="straightConnector1">
-            <a:avLst/>
-          </a:prstGeom>
-          <a:ln w="28575">
+              <a:t>chunk</a:t>
+            </a:r>
+          </a:p>
+        </p:txBody>
+      </p:sp>
+      <p:sp>
+        <p:nvSpPr>
+          <p:cNvPr id="154" name="AChunk1"/>
+          <p:cNvSpPr/>
+          <p:nvPr/>
+        </p:nvSpPr>
+        <p:spPr>
+          <a:xfrm>
+            <a:off x="6858000" y="3794760"/>
+            <a:ext cx="640080" cy="228600"/>
+          </a:xfrm>
+          <a:prstGeom prst="rect">
+            <a:avLst/>
+          </a:prstGeom>
+          <a:solidFill>
+            <a:srgbClr val="F5F1E8"/>
+          </a:solidFill>
+          <a:ln w="12700">
             <a:solidFill>
-              <a:srgbClr val="8E6F3E"/>
+              <a:srgbClr val="C9B991"/>
             </a:solidFill>
-            <a:tailEnd type="triangle" w="med" len="med"/>
-          </a:ln>
-        </p:spPr>
-      </p:cxnSp>
-      <p:sp>
-        <p:nvSpPr>
-          <p:cNvPr id="19" name="ChgL"/>
-          <p:cNvSpPr txBox="1"/>
-          <p:nvPr/>
-        </p:nvSpPr>
-        <p:spPr>
-          <a:xfrm>
-            <a:off x="4046220" y="3437890"/>
-            <a:ext cx="1051560" cy="548640"/>
-          </a:xfrm>
-          <a:prstGeom prst="rect">
-            <a:avLst/>
-          </a:prstGeom>
-          <a:noFill/>
-          <a:ln>
-            <a:noFill/>
-          </a:ln>
-        </p:spPr>
-        <p:txBody>
-          <a:bodyPr wrap="square" lIns="0" tIns="0" rIns="0" bIns="0" anchor="t"/>
+          </a:ln>
+        </p:spPr>
+        <p:txBody>
+          <a:bodyPr wrap="square" lIns="27432" tIns="22860" rIns="27432" bIns="22860" anchor="ctr"/>
           <a:lstStyle/>
           <a:p>
             <a:pPr algn="ctr">
@@ -15730,37 +16426,41 @@
               <a:buNone/>
             </a:pPr>
             <a:r>
-              <a:rPr lang="en-US" sz="1400" b="1" dirty="0">
-                <a:solidFill>
-                  <a:srgbClr val="8E6F3E"/>
-                </a:solidFill>
-              </a:rPr>
-              <a:t>the topology changed</a:t>
-            </a:r>
-          </a:p>
-        </p:txBody>
-      </p:sp>
-      <p:sp>
-        <p:nvSpPr>
-          <p:cNvPr id="150" name="Ital"/>
-          <p:cNvSpPr txBox="1"/>
-          <p:nvPr/>
-        </p:nvSpPr>
-        <p:spPr>
-          <a:xfrm>
-            <a:off x="274320" y="4983480"/>
-            <a:ext cx="8595360" cy="457200"/>
-          </a:xfrm>
-          <a:prstGeom prst="rect">
-            <a:avLst/>
-          </a:prstGeom>
-          <a:noFill/>
-          <a:ln>
-            <a:noFill/>
-          </a:ln>
-        </p:spPr>
-        <p:txBody>
-          <a:bodyPr wrap="square" lIns="0" tIns="0" rIns="0" bIns="0" anchor="t"/>
+              <a:rPr lang="en-US" sz="900" b="0" i="0" dirty="0">
+                <a:solidFill>
+                  <a:srgbClr val="5C4826"/>
+                </a:solidFill>
+              </a:rPr>
+              <a:t>chunk</a:t>
+            </a:r>
+          </a:p>
+        </p:txBody>
+      </p:sp>
+      <p:sp>
+        <p:nvSpPr>
+          <p:cNvPr id="155" name="AChunk2"/>
+          <p:cNvSpPr/>
+          <p:nvPr/>
+        </p:nvSpPr>
+        <p:spPr>
+          <a:xfrm>
+            <a:off x="6858000" y="4069080"/>
+            <a:ext cx="640080" cy="228600"/>
+          </a:xfrm>
+          <a:prstGeom prst="rect">
+            <a:avLst/>
+          </a:prstGeom>
+          <a:solidFill>
+            <a:srgbClr val="F5F1E8"/>
+          </a:solidFill>
+          <a:ln w="12700">
+            <a:solidFill>
+              <a:srgbClr val="C9B991"/>
+            </a:solidFill>
+          </a:ln>
+        </p:spPr>
+        <p:txBody>
+          <a:bodyPr wrap="square" lIns="27432" tIns="22860" rIns="27432" bIns="22860" anchor="ctr"/>
           <a:lstStyle/>
           <a:p>
             <a:pPr algn="ctr">
@@ -15770,19 +16470,309 @@
               <a:buNone/>
             </a:pPr>
             <a:r>
-              <a:rPr lang="en-US" sz="1700" b="0" i="1" dirty="0">
+              <a:rPr lang="en-US" sz="900" b="0" i="0" dirty="0">
+                <a:solidFill>
+                  <a:srgbClr val="5C4826"/>
+                </a:solidFill>
+              </a:rPr>
+              <a:t>chunk</a:t>
+            </a:r>
+          </a:p>
+        </p:txBody>
+      </p:sp>
+      <p:sp>
+        <p:nvSpPr>
+          <p:cNvPr id="156" name="AMerge"/>
+          <p:cNvSpPr/>
+          <p:nvPr/>
+        </p:nvSpPr>
+        <p:spPr>
+          <a:xfrm>
+            <a:off x="7772400" y="3794760"/>
+            <a:ext cx="914400" cy="320040"/>
+          </a:xfrm>
+          <a:prstGeom prst="rect">
+            <a:avLst/>
+          </a:prstGeom>
+          <a:solidFill>
+            <a:srgbClr val="F5F1E8"/>
+          </a:solidFill>
+          <a:ln w="12700">
+            <a:solidFill>
+              <a:srgbClr val="C9B991"/>
+            </a:solidFill>
+          </a:ln>
+        </p:spPr>
+        <p:txBody>
+          <a:bodyPr wrap="square" lIns="27432" tIns="22860" rIns="27432" bIns="22860" anchor="ctr"/>
+          <a:lstStyle/>
+          <a:p>
+            <a:pPr algn="ctr">
+              <a:spcAft>
+                <a:spcPts val="0"/>
+              </a:spcAft>
+              <a:buNone/>
+            </a:pPr>
+            <a:r>
+              <a:rPr lang="en-US" sz="900" b="1" i="0" dirty="0">
+                <a:solidFill>
+                  <a:srgbClr val="5C4826"/>
+                </a:solidFill>
+              </a:rPr>
+              <a:t>MERGE</a:t>
+            </a:r>
+          </a:p>
+        </p:txBody>
+      </p:sp>
+      <p:cxnSp>
+        <p:nvCxnSpPr>
+          <p:cNvPr id="160" name="AF1"/>
+          <p:cNvCxnSpPr/>
+          <p:nvPr/>
+        </p:nvCxnSpPr>
+        <p:spPr>
+          <a:xfrm flipV="1">
+            <a:off x="6583680" y="3634740"/>
+            <a:ext cx="274320" cy="91440"/>
+          </a:xfrm>
+          <a:prstGeom prst="straightConnector1">
+            <a:avLst/>
+          </a:prstGeom>
+          <a:ln w="12700">
+            <a:solidFill>
+              <a:srgbClr val="8E6F3E"/>
+            </a:solidFill>
+          </a:ln>
+        </p:spPr>
+      </p:cxnSp>
+      <p:cxnSp>
+        <p:nvCxnSpPr>
+          <p:cNvPr id="161" name="AF2"/>
+          <p:cNvCxnSpPr/>
+          <p:nvPr/>
+        </p:nvCxnSpPr>
+        <p:spPr>
+          <a:xfrm>
+            <a:off x="6583680" y="3726180"/>
+            <a:ext cx="274320" cy="182880"/>
+          </a:xfrm>
+          <a:prstGeom prst="straightConnector1">
+            <a:avLst/>
+          </a:prstGeom>
+          <a:ln w="12700">
+            <a:solidFill>
+              <a:srgbClr val="8E6F3E"/>
+            </a:solidFill>
+          </a:ln>
+        </p:spPr>
+      </p:cxnSp>
+      <p:cxnSp>
+        <p:nvCxnSpPr>
+          <p:cNvPr id="162" name="AF3"/>
+          <p:cNvCxnSpPr/>
+          <p:nvPr/>
+        </p:nvCxnSpPr>
+        <p:spPr>
+          <a:xfrm>
+            <a:off x="6583680" y="3726180"/>
+            <a:ext cx="274320" cy="457200"/>
+          </a:xfrm>
+          <a:prstGeom prst="straightConnector1">
+            <a:avLst/>
+          </a:prstGeom>
+          <a:ln w="12700">
+            <a:solidFill>
+              <a:srgbClr val="8E6F3E"/>
+            </a:solidFill>
+          </a:ln>
+        </p:spPr>
+      </p:cxnSp>
+      <p:cxnSp>
+        <p:nvCxnSpPr>
+          <p:cNvPr id="163" name="AM1"/>
+          <p:cNvCxnSpPr/>
+          <p:nvPr/>
+        </p:nvCxnSpPr>
+        <p:spPr>
+          <a:xfrm>
+            <a:off x="7498080" y="3634740"/>
+            <a:ext cx="274320" cy="320040"/>
+          </a:xfrm>
+          <a:prstGeom prst="straightConnector1">
+            <a:avLst/>
+          </a:prstGeom>
+          <a:ln w="12700">
+            <a:solidFill>
+              <a:srgbClr val="8E6F3E"/>
+            </a:solidFill>
+          </a:ln>
+        </p:spPr>
+      </p:cxnSp>
+      <p:cxnSp>
+        <p:nvCxnSpPr>
+          <p:cNvPr id="164" name="AM2"/>
+          <p:cNvCxnSpPr/>
+          <p:nvPr/>
+        </p:nvCxnSpPr>
+        <p:spPr>
+          <a:xfrm>
+            <a:off x="7498080" y="3909060"/>
+            <a:ext cx="274320" cy="45720"/>
+          </a:xfrm>
+          <a:prstGeom prst="straightConnector1">
+            <a:avLst/>
+          </a:prstGeom>
+          <a:ln w="12700">
+            <a:solidFill>
+              <a:srgbClr val="8E6F3E"/>
+            </a:solidFill>
+          </a:ln>
+        </p:spPr>
+      </p:cxnSp>
+      <p:cxnSp>
+        <p:nvCxnSpPr>
+          <p:cNvPr id="165" name="AM3"/>
+          <p:cNvCxnSpPr/>
+          <p:nvPr/>
+        </p:nvCxnSpPr>
+        <p:spPr>
+          <a:xfrm flipV="1">
+            <a:off x="7498080" y="3954780"/>
+            <a:ext cx="274320" cy="228600"/>
+          </a:xfrm>
+          <a:prstGeom prst="straightConnector1">
+            <a:avLst/>
+          </a:prstGeom>
+          <a:ln w="12700">
+            <a:solidFill>
+              <a:srgbClr val="8E6F3E"/>
+            </a:solidFill>
+          </a:ln>
+        </p:spPr>
+      </p:cxnSp>
+      <p:sp>
+        <p:nvSpPr>
+          <p:cNvPr id="166" name="ACap"/>
+          <p:cNvSpPr txBox="1"/>
+          <p:nvPr/>
+        </p:nvSpPr>
+        <p:spPr>
+          <a:xfrm>
+            <a:off x="5394960" y="4320540"/>
+            <a:ext cx="3383280" cy="182880"/>
+          </a:xfrm>
+          <a:prstGeom prst="rect">
+            <a:avLst/>
+          </a:prstGeom>
+          <a:noFill/>
+          <a:ln>
+            <a:noFill/>
+          </a:ln>
+        </p:spPr>
+        <p:txBody>
+          <a:bodyPr wrap="square" lIns="0" tIns="0" rIns="0" bIns="0" anchor="t"/>
+          <a:lstStyle/>
+          <a:p>
+            <a:pPr algn="l">
+              <a:spcAft>
+                <a:spcPts val="0"/>
+              </a:spcAft>
+              <a:buNone/>
+            </a:pPr>
+            <a:r>
+              <a:rPr lang="en-US" sz="900" b="0" i="1" dirty="0">
                 <a:solidFill>
                   <a:srgbClr val="555960"/>
                 </a:solidFill>
               </a:rPr>
-              <a:t>The omission was tested by reality, and passed.</a:t>
-            </a:r>
-          </a:p>
-        </p:txBody>
-      </p:sp>
-      <p:sp>
-        <p:nvSpPr>
-          <p:cNvPr id="199" name="FooterBand"/>
+              <a:t>fan out across chunk workers, then merge</a:t>
+            </a:r>
+          </a:p>
+        </p:txBody>
+      </p:sp>
+      <p:sp>
+        <p:nvSpPr>
+          <p:cNvPr id="170" name="ConseqLine"/>
+          <p:cNvSpPr txBox="1"/>
+          <p:nvPr/>
+        </p:nvSpPr>
+        <p:spPr>
+          <a:xfrm>
+            <a:off x="1188720" y="4663440"/>
+            <a:ext cx="7680960" cy="548640"/>
+          </a:xfrm>
+          <a:prstGeom prst="rect">
+            <a:avLst/>
+          </a:prstGeom>
+          <a:noFill/>
+          <a:ln>
+            <a:noFill/>
+          </a:ln>
+        </p:spPr>
+        <p:txBody>
+          <a:bodyPr wrap="square" lIns="18288" tIns="18288" rIns="18288" bIns="18288" anchor="t"/>
+          <a:lstStyle/>
+          <a:p>
+            <a:pPr algn="ctr">
+              <a:spcAft>
+                <a:spcPts val="0"/>
+              </a:spcAft>
+              <a:buNone/>
+            </a:pPr>
+            <a:r>
+              <a:rPr lang="en-US" sz="1800" b="0" i="0" dirty="0">
+                <a:solidFill>
+                  <a:srgbClr val="555960"/>
+                </a:solidFill>
+              </a:rPr>
+              <a:t>Topology changed. The model did not.</a:t>
+            </a:r>
+          </a:p>
+        </p:txBody>
+      </p:sp>
+      <p:sp>
+        <p:nvSpPr>
+          <p:cNvPr id="171" name="EvTag"/>
+          <p:cNvSpPr txBox="1"/>
+          <p:nvPr/>
+        </p:nvSpPr>
+        <p:spPr>
+          <a:xfrm>
+            <a:off x="5943600" y="5440680"/>
+            <a:ext cx="2926080" cy="274320"/>
+          </a:xfrm>
+          <a:prstGeom prst="rect">
+            <a:avLst/>
+          </a:prstGeom>
+          <a:noFill/>
+          <a:ln>
+            <a:noFill/>
+          </a:ln>
+        </p:spPr>
+        <p:txBody>
+          <a:bodyPr wrap="square" lIns="0" tIns="0" rIns="0" bIns="0" anchor="t"/>
+          <a:lstStyle/>
+          <a:p>
+            <a:pPr algn="r">
+              <a:spcAft>
+                <a:spcPts val="0"/>
+              </a:spcAft>
+              <a:buNone/>
+            </a:pPr>
+            <a:r>
+              <a:rPr lang="en-US" sz="1400" b="1" i="0" dirty="0">
+                <a:solidFill>
+                  <a:srgbClr val="8E6F3E"/>
+                </a:solidFill>
+              </a:rPr>
+              <a:t xml:space="preserve">CORRESPONDENCE HELD  ✓</a:t>
+            </a:r>
+          </a:p>
+        </p:txBody>
+      </p:sp>
+      <p:sp>
+        <p:nvSpPr>
+          <p:cNvPr id="172" name="FooterBand"/>
           <p:cNvSpPr/>
           <p:nvPr/>
         </p:nvSpPr>
@@ -15812,52 +16802,12 @@
               <a:buNone/>
             </a:pPr>
             <a:r>
-              <a:rPr lang="en-US" sz="2000" b="1" dirty="0">
+              <a:rPr lang="en-US" sz="2000" b="1" i="0" dirty="0">
                 <a:solidFill>
                   <a:srgbClr val="FFFFFF"/>
                 </a:solidFill>
               </a:rPr>
-              <a:t>“We changed the pointers to the code, but not the model.”</a:t>
-            </a:r>
-          </a:p>
-        </p:txBody>
-      </p:sp>
-      <p:sp>
-        <p:nvSpPr>
-          <p:cNvPr id="140" name="EvTag"/>
-          <p:cNvSpPr txBox="1"/>
-          <p:nvPr/>
-        </p:nvSpPr>
-        <p:spPr>
-          <a:xfrm>
-            <a:off x="5943600" y="5532120"/>
-            <a:ext cx="2926080" cy="274320"/>
-          </a:xfrm>
-          <a:prstGeom prst="rect">
-            <a:avLst/>
-          </a:prstGeom>
-          <a:noFill/>
-          <a:ln>
-            <a:noFill/>
-          </a:ln>
-        </p:spPr>
-        <p:txBody>
-          <a:bodyPr wrap="square" lIns="0" tIns="0" rIns="0" bIns="0" anchor="t"/>
-          <a:lstStyle/>
-          <a:p>
-            <a:pPr algn="r">
-              <a:spcAft>
-                <a:spcPts val="0"/>
-              </a:spcAft>
-              <a:buNone/>
-            </a:pPr>
-            <a:r>
-              <a:rPr lang="en-US" sz="1400" b="1" i="0" dirty="0">
-                <a:solidFill>
-                  <a:srgbClr val="8E6F3E"/>
-                </a:solidFill>
-              </a:rPr>
-              <a:t xml:space="preserve">CORRESPONDENCE HELD</a:t>
+              <a:t>A good omission survives change.</a:t>
             </a:r>
           </a:p>
         </p:txBody>

--- a/course/lectures/act-2-delegation-and-control/02-modeling/2-2-Modeling-1-Purposeful-Reduction.pptx
+++ b/course/lectures/act-2-delegation-and-control/02-modeling/2-2-Modeling-1-Purposeful-Reduction.pptx
@@ -1305,6 +1305,12 @@
             <a:r>
               <a:rPr lang="en-US" dirty="0"/>
               <a:t>Both cases use the same three tiers: the facts, then the model itself, then the consequence. The models are deliberately different kinds — a data schema and a behavioural model — so nobody leaves thinking "model" means boxes and arrows.</a:t>
+            </a:r>
+          </a:p>
+          <a:p>
+            <a:r>
+              <a:rPr lang="en-US" dirty="0"/>
+              <a:t>The two cards at the foot of this slide are the whole section: one failure, one success. Name them on the way past - do not explain them here.</a:t>
             </a:r>
           </a:p>
           <a:p>
@@ -13946,112 +13952,76 @@
       </p:sp>
       <p:sp>
         <p:nvSpPr>
-          <p:cNvPr id="131" name="VTag1"/>
-          <p:cNvSpPr txBox="1"/>
-          <p:nvPr/>
-        </p:nvSpPr>
-        <p:spPr>
-          <a:xfrm>
-            <a:off x="1143000" y="3977640"/>
-            <a:ext cx="3200400" cy="640080"/>
-          </a:xfrm>
-          <a:prstGeom prst="rect">
-            <a:avLst/>
-          </a:prstGeom>
-          <a:noFill/>
-          <a:ln>
-            <a:noFill/>
-          </a:ln>
-        </p:spPr>
-        <p:txBody>
-          <a:bodyPr wrap="square" lIns="0" tIns="0" rIns="0" bIns="0" anchor="ctr"/>
+          <p:cNvPr id="131" name="CasePreview"/>
+          <p:cNvSpPr/>
+          <p:nvPr/>
+        </p:nvSpPr>
+        <p:spPr>
+          <a:xfrm>
+            <a:off x="1828800" y="5577840"/>
+            <a:ext cx="5486400" cy="640080"/>
+          </a:xfrm>
+          <a:prstGeom prst="rect">
+            <a:avLst/>
+          </a:prstGeom>
+          <a:solidFill>
+            <a:srgbClr val="FBF8F2"/>
+          </a:solidFill>
+          <a:ln w="12700">
+            <a:solidFill>
+              <a:srgbClr val="C9B991"/>
+            </a:solidFill>
+          </a:ln>
+        </p:spPr>
+        <p:txBody>
+          <a:bodyPr wrap="square" lIns="27432" tIns="22860" rIns="27432" bIns="22860" anchor="ctr"/>
           <a:lstStyle/>
           <a:p>
             <a:pPr algn="ctr">
               <a:spcAft>
-                <a:spcPts val="0"/>
+                <a:spcPts val="300"/>
               </a:spcAft>
               <a:buNone/>
             </a:pPr>
             <a:r>
-              <a:rPr lang="en-US" sz="1600" b="1" i="0" dirty="0">
+              <a:rPr lang="en-US" sz="1500" b="1" i="0" dirty="0">
                 <a:solidFill>
                   <a:srgbClr val="8E6F3E"/>
                 </a:solidFill>
               </a:rPr>
               <a:t xml:space="preserve">✗  TOO MUCH REDUCTION</a:t>
+            </a:r>
+            <a:r>
+              <a:rPr lang="en-US" sz="1300" b="0" i="0" dirty="0">
+                <a:solidFill>
+                  <a:srgbClr val="555960"/>
+                </a:solidFill>
+              </a:rPr>
+              <a:t xml:space="preserve">   a required distinction, erased</a:t>
             </a:r>
           </a:p>
           <a:p>
             <a:pPr algn="ctr">
               <a:spcAft>
-                <a:spcPts val="0"/>
+                <a:spcPts val="300"/>
               </a:spcAft>
               <a:buNone/>
             </a:pPr>
             <a:r>
-              <a:rPr lang="en-US" sz="1400" b="0" i="0" dirty="0">
+              <a:rPr lang="en-US" sz="1500" b="1" i="0" dirty="0">
+                <a:solidFill>
+                  <a:srgbClr val="8E6F3E"/>
+                </a:solidFill>
+              </a:rPr>
+              <a:t xml:space="preserve">✓  GOOD REDUCTION</a:t>
+            </a:r>
+            <a:r>
+              <a:rPr lang="en-US" sz="1300" b="0" i="0" dirty="0">
                 <a:solidFill>
                   <a:srgbClr val="555960"/>
                 </a:solidFill>
               </a:rPr>
-              <a:t xml:space="preserve">a required distinction, erased</a:t>
-            </a:r>
-          </a:p>
-        </p:txBody>
-      </p:sp>
-      <p:sp>
-        <p:nvSpPr>
-          <p:cNvPr id="133" name="VTag3"/>
-          <p:cNvSpPr txBox="1"/>
-          <p:nvPr/>
-        </p:nvSpPr>
-        <p:spPr>
-          <a:xfrm>
-            <a:off x="4800600" y="3977640"/>
-            <a:ext cx="3200400" cy="640080"/>
-          </a:xfrm>
-          <a:prstGeom prst="rect">
-            <a:avLst/>
-          </a:prstGeom>
-          <a:noFill/>
-          <a:ln>
-            <a:noFill/>
-          </a:ln>
-        </p:spPr>
-        <p:txBody>
-          <a:bodyPr wrap="square" lIns="0" tIns="0" rIns="0" bIns="0" anchor="ctr"/>
-          <a:lstStyle/>
-          <a:p>
-            <a:pPr algn="ctr">
-              <a:spcAft>
-                <a:spcPts val="0"/>
-              </a:spcAft>
-              <a:buNone/>
-            </a:pPr>
-            <a:r>
-              <a:rPr lang="en-US" sz="1600" b="1" i="0" dirty="0">
-                <a:solidFill>
-                  <a:srgbClr val="8E6F3E"/>
-                </a:solidFill>
-              </a:rPr>
-              <a:t xml:space="preserve">✓  GOOD REDUCTION</a:t>
-            </a:r>
-          </a:p>
-          <a:p>
-            <a:pPr algn="ctr">
-              <a:spcAft>
-                <a:spcPts val="0"/>
-              </a:spcAft>
-              <a:buNone/>
-            </a:pPr>
-            <a:r>
-              <a:rPr lang="en-US" sz="1400" b="0" i="0" dirty="0">
-                <a:solidFill>
-                  <a:srgbClr val="555960"/>
-                </a:solidFill>
-              </a:rPr>
-              <a:t xml:space="preserve">a free choice, safely changed</a:t>
+              <a:t xml:space="preserve">   a free choice, safely changed</a:t>
             </a:r>
           </a:p>
         </p:txBody>

--- a/course/lectures/act-2-delegation-and-control/02-modeling/2-2-Modeling-1-Purposeful-Reduction.pptx
+++ b/course/lectures/act-2-delegation-and-control/02-modeling/2-2-Modeling-1-Purposeful-Reduction.pptx
@@ -14363,7 +14363,7 @@
         <p:spPr>
           <a:xfrm>
             <a:off x="1188720" y="2362200"/>
-            <a:ext cx="2194560" cy="1005840"/>
+            <a:ext cx="2377440" cy="1005840"/>
           </a:xfrm>
           <a:prstGeom prst="rect">
             <a:avLst/>
@@ -14404,12 +14404,12 @@
               <a:buNone/>
             </a:pPr>
             <a:r>
-              <a:rPr lang="en-US" sz="1000" b="0" i="0" dirty="0">
+              <a:rPr lang="en-US" sz="1050" b="0" i="0" dirty="0">
                 <a:solidFill>
                   <a:srgbClr val="5C4826"/>
                 </a:solidFill>
               </a:rPr>
-              <a:t>quota_type  {metered, unlimited}</a:t>
+              <a:t>quota_type {metered, unlimited}</a:t>
             </a:r>
           </a:p>
           <a:p>
@@ -14420,7 +14420,7 @@
               <a:buNone/>
             </a:pPr>
             <a:r>
-              <a:rPr lang="en-US" sz="1000" b="0" i="0" dirty="0">
+              <a:rPr lang="en-US" sz="1050" b="0" i="0" dirty="0">
                 <a:solidFill>
                   <a:srgbClr val="5C4826"/>
                 </a:solidFill>
@@ -14436,7 +14436,7 @@
               <a:buNone/>
             </a:pPr>
             <a:r>
-              <a:rPr lang="en-US" sz="1000" b="0" i="0" dirty="0">
+              <a:rPr lang="en-US" sz="1050" b="0" i="0" dirty="0">
                 <a:solidFill>
                   <a:srgbClr val="5C4826"/>
                 </a:solidFill>
@@ -14455,7 +14455,7 @@
         <p:spPr>
           <a:xfrm>
             <a:off x="1280160" y="2649220"/>
-            <a:ext cx="2011680" cy="9525"/>
+            <a:ext cx="2194560" cy="9525"/>
           </a:xfrm>
           <a:prstGeom prst="rect">
             <a:avLst/>
@@ -14486,8 +14486,8 @@
         </p:nvSpPr>
         <p:spPr>
           <a:xfrm>
-            <a:off x="3474720" y="2362200"/>
-            <a:ext cx="822960" cy="457200"/>
+            <a:off x="3657600" y="2362200"/>
+            <a:ext cx="640080" cy="457200"/>
           </a:xfrm>
           <a:prstGeom prst="rect">
             <a:avLst/>
@@ -14542,8 +14542,8 @@
         </p:nvCxnSpPr>
         <p:spPr>
           <a:xfrm>
-            <a:off x="3474720" y="2865120"/>
-            <a:ext cx="822960" cy="0"/>
+            <a:off x="3657600" y="2865120"/>
+            <a:ext cx="640080" cy="0"/>
           </a:xfrm>
           <a:prstGeom prst="straightConnector1">
             <a:avLst/>
@@ -14565,7 +14565,7 @@
         <p:spPr>
           <a:xfrm>
             <a:off x="4389120" y="2651760"/>
-            <a:ext cx="2011680" cy="548640"/>
+            <a:ext cx="1737360" cy="548640"/>
           </a:xfrm>
           <a:prstGeom prst="rect">
             <a:avLst/>
@@ -14588,38 +14588,14 @@
               <a:buNone/>
             </a:pPr>
             <a:r>
-              <a:rPr lang="en-US" sz="1050" b="1" i="0" dirty="0">
+              <a:rPr lang="en-US" sz="1200" b="1" i="0" dirty="0">
                 <a:solidFill>
                   <a:srgbClr val="FFFFFF"/>
                 </a:solidFill>
               </a:rPr>
-              <a:t>credits_remaining : integer</a:t>
-            </a:r>
-          </a:p>
-        </p:txBody>
-      </p:sp>
-      <p:sp>
-        <p:nvSpPr>
-          <p:cNvPr id="125" name="ScalarCap"/>
-          <p:cNvSpPr txBox="1"/>
-          <p:nvPr/>
-        </p:nvSpPr>
-        <p:spPr>
-          <a:xfrm>
-            <a:off x="4389120" y="3246120"/>
-            <a:ext cx="2011680" cy="182880"/>
-          </a:xfrm>
-          <a:prstGeom prst="rect">
-            <a:avLst/>
-          </a:prstGeom>
-          <a:noFill/>
-          <a:ln>
-            <a:noFill/>
-          </a:ln>
-        </p:spPr>
-        <p:txBody>
-          <a:bodyPr wrap="square" lIns="0" tIns="0" rIns="0" bIns="0" anchor="t"/>
-          <a:lstStyle/>
+              <a:t>credits_remaining</a:t>
+            </a:r>
+          </a:p>
           <a:p>
             <a:pPr algn="ctr">
               <a:spcAft>
@@ -14628,12 +14604,52 @@
               <a:buNone/>
             </a:pPr>
             <a:r>
-              <a:rPr lang="en-US" sz="1000" b="0" i="1" dirty="0">
+              <a:rPr lang="en-US" sz="1100" b="0" i="0" dirty="0">
+                <a:solidFill>
+                  <a:srgbClr val="FFFFFF"/>
+                </a:solidFill>
+              </a:rPr>
+              <a:t>: integer</a:t>
+            </a:r>
+          </a:p>
+        </p:txBody>
+      </p:sp>
+      <p:sp>
+        <p:nvSpPr>
+          <p:cNvPr id="125" name="ScalarCap"/>
+          <p:cNvSpPr txBox="1"/>
+          <p:nvPr/>
+        </p:nvSpPr>
+        <p:spPr>
+          <a:xfrm>
+            <a:off x="4389120" y="3246120"/>
+            <a:ext cx="1737360" cy="182880"/>
+          </a:xfrm>
+          <a:prstGeom prst="rect">
+            <a:avLst/>
+          </a:prstGeom>
+          <a:noFill/>
+          <a:ln>
+            <a:noFill/>
+          </a:ln>
+        </p:spPr>
+        <p:txBody>
+          <a:bodyPr wrap="square" lIns="0" tIns="0" rIns="0" bIns="0" anchor="t"/>
+          <a:lstStyle/>
+          <a:p>
+            <a:pPr algn="ctr">
+              <a:spcAft>
+                <a:spcPts val="0"/>
+              </a:spcAft>
+              <a:buNone/>
+            </a:pPr>
+            <a:r>
+              <a:rPr lang="en-US" sz="1100" b="0" i="1" dirty="0">
                 <a:solidFill>
                   <a:srgbClr val="555960"/>
                 </a:solidFill>
               </a:rPr>
-              <a:t>the whole model of the account</a:t>
+              <a:t>the whole model</a:t>
             </a:r>
           </a:p>
         </p:txBody>
@@ -14646,8 +14662,8 @@
         </p:nvSpPr>
         <p:spPr>
           <a:xfrm>
-            <a:off x="6492240" y="2362200"/>
-            <a:ext cx="2377440" cy="1051560"/>
+            <a:off x="6309360" y="2362200"/>
+            <a:ext cx="2560320" cy="1097280"/>
           </a:xfrm>
           <a:prstGeom prst="rect">
             <a:avLst/>
@@ -14672,12 +14688,12 @@
               <a:buNone/>
             </a:pPr>
             <a:r>
-              <a:rPr lang="en-US" sz="1050" b="1" i="0" dirty="0">
+              <a:rPr lang="en-US" sz="1100" b="1" i="0" dirty="0">
                 <a:solidFill>
                   <a:srgbClr val="8E6F3E"/>
                 </a:solidFill>
               </a:rPr>
-              <a:t>Yes, this is a model.</a:t>
+              <a:t>Yes, this schema is a model.</a:t>
             </a:r>
           </a:p>
           <a:p>
@@ -14688,7 +14704,7 @@
               <a:buNone/>
             </a:pPr>
             <a:r>
-              <a:rPr lang="en-US" sz="1000" b="0" i="0" dirty="0">
+              <a:rPr lang="en-US" sz="1050" b="0" i="0" dirty="0">
                 <a:solidFill>
                   <a:srgbClr val="5C4826"/>
                 </a:solidFill>
@@ -14870,14 +14886,54 @@
       </p:sp>
       <p:sp>
         <p:nvSpPr>
-          <p:cNvPr id="134" name="CZero0"/>
+          <p:cNvPr id="134" name="CLbl1"/>
           <p:cNvSpPr txBox="1"/>
           <p:nvPr/>
         </p:nvSpPr>
         <p:spPr>
           <a:xfrm>
-            <a:off x="6080760" y="3520440"/>
-            <a:ext cx="640080" cy="320040"/>
+            <a:off x="3337560" y="3886200"/>
+            <a:ext cx="2286000" cy="320040"/>
+          </a:xfrm>
+          <a:prstGeom prst="rect">
+            <a:avLst/>
+          </a:prstGeom>
+          <a:noFill/>
+          <a:ln>
+            <a:noFill/>
+          </a:ln>
+        </p:spPr>
+        <p:txBody>
+          <a:bodyPr wrap="square" lIns="0" tIns="0" rIns="0" bIns="0" anchor="ctr"/>
+          <a:lstStyle/>
+          <a:p>
+            <a:pPr algn="r">
+              <a:spcAft>
+                <a:spcPts val="0"/>
+              </a:spcAft>
+              <a:buNone/>
+            </a:pPr>
+            <a:r>
+              <a:rPr lang="en-US" sz="1600" b="0" i="0" dirty="0">
+                <a:solidFill>
+                  <a:srgbClr val="555960"/>
+                </a:solidFill>
+              </a:rPr>
+              <a:t>Exhausted account</a:t>
+            </a:r>
+          </a:p>
+        </p:txBody>
+      </p:sp>
+      <p:sp>
+        <p:nvSpPr>
+          <p:cNvPr id="135" name="CArr1"/>
+          <p:cNvSpPr txBox="1"/>
+          <p:nvPr/>
+        </p:nvSpPr>
+        <p:spPr>
+          <a:xfrm>
+            <a:off x="5623560" y="3886200"/>
+            <a:ext cx="457200" cy="320040"/>
           </a:xfrm>
           <a:prstGeom prst="rect">
             <a:avLst/>
@@ -14898,77 +14954,39 @@
               <a:buNone/>
             </a:pPr>
             <a:r>
-              <a:rPr lang="en-US" sz="2000" b="1" i="0" dirty="0">
-                <a:solidFill>
-                  <a:srgbClr val="5C4826"/>
-                </a:solidFill>
-              </a:rPr>
-              <a:t>0</a:t>
-            </a:r>
-          </a:p>
-        </p:txBody>
-      </p:sp>
-      <p:sp>
-        <p:nvSpPr>
-          <p:cNvPr id="135" name="CLbl1"/>
-          <p:cNvSpPr txBox="1"/>
-          <p:nvPr/>
-        </p:nvSpPr>
-        <p:spPr>
-          <a:xfrm>
-            <a:off x="3337560" y="3886200"/>
-            <a:ext cx="2286000" cy="320040"/>
-          </a:xfrm>
-          <a:prstGeom prst="rect">
-            <a:avLst/>
-          </a:prstGeom>
-          <a:noFill/>
+              <a:rPr lang="en-US" sz="1600" b="1" i="0" dirty="0">
+                <a:solidFill>
+                  <a:srgbClr val="8E6F3E"/>
+                </a:solidFill>
+              </a:rPr>
+              <a:t>→</a:t>
+            </a:r>
+          </a:p>
+        </p:txBody>
+      </p:sp>
+      <p:sp>
+        <p:nvSpPr>
+          <p:cNvPr id="140" name="SameState"/>
+          <p:cNvSpPr/>
+          <p:nvPr/>
+        </p:nvSpPr>
+        <p:spPr>
+          <a:xfrm>
+            <a:off x="6080760" y="3520440"/>
+            <a:ext cx="640080" cy="685800"/>
+          </a:xfrm>
+          <a:prstGeom prst="rect">
+            <a:avLst/>
+          </a:prstGeom>
+          <a:solidFill>
+            <a:srgbClr val="5C4826"/>
+          </a:solidFill>
           <a:ln>
             <a:noFill/>
           </a:ln>
         </p:spPr>
         <p:txBody>
-          <a:bodyPr wrap="square" lIns="0" tIns="0" rIns="0" bIns="0" anchor="ctr"/>
-          <a:lstStyle/>
-          <a:p>
-            <a:pPr algn="r">
-              <a:spcAft>
-                <a:spcPts val="0"/>
-              </a:spcAft>
-              <a:buNone/>
-            </a:pPr>
-            <a:r>
-              <a:rPr lang="en-US" sz="1600" b="0" i="0" dirty="0">
-                <a:solidFill>
-                  <a:srgbClr val="555960"/>
-                </a:solidFill>
-              </a:rPr>
-              <a:t>Exhausted account</a:t>
-            </a:r>
-          </a:p>
-        </p:txBody>
-      </p:sp>
-      <p:sp>
-        <p:nvSpPr>
-          <p:cNvPr id="136" name="CArr1"/>
-          <p:cNvSpPr txBox="1"/>
-          <p:nvPr/>
-        </p:nvSpPr>
-        <p:spPr>
-          <a:xfrm>
-            <a:off x="5623560" y="3886200"/>
-            <a:ext cx="457200" cy="320040"/>
-          </a:xfrm>
-          <a:prstGeom prst="rect">
-            <a:avLst/>
-          </a:prstGeom>
-          <a:noFill/>
-          <a:ln>
-            <a:noFill/>
-          </a:ln>
-        </p:spPr>
-        <p:txBody>
-          <a:bodyPr wrap="square" lIns="0" tIns="0" rIns="0" bIns="0" anchor="ctr"/>
+          <a:bodyPr wrap="square" lIns="27432" tIns="22860" rIns="27432" bIns="22860" anchor="ctr"/>
           <a:lstStyle/>
           <a:p>
             <a:pPr algn="ctr">
@@ -14978,38 +14996,14 @@
               <a:buNone/>
             </a:pPr>
             <a:r>
-              <a:rPr lang="en-US" sz="1600" b="1" i="0" dirty="0">
-                <a:solidFill>
-                  <a:srgbClr val="8E6F3E"/>
-                </a:solidFill>
-              </a:rPr>
-              <a:t>→</a:t>
-            </a:r>
-          </a:p>
-        </p:txBody>
-      </p:sp>
-      <p:sp>
-        <p:nvSpPr>
-          <p:cNvPr id="137" name="CZero1"/>
-          <p:cNvSpPr txBox="1"/>
-          <p:nvPr/>
-        </p:nvSpPr>
-        <p:spPr>
-          <a:xfrm>
-            <a:off x="6080760" y="3886200"/>
-            <a:ext cx="640080" cy="320040"/>
-          </a:xfrm>
-          <a:prstGeom prst="rect">
-            <a:avLst/>
-          </a:prstGeom>
-          <a:noFill/>
-          <a:ln>
-            <a:noFill/>
-          </a:ln>
-        </p:spPr>
-        <p:txBody>
-          <a:bodyPr wrap="square" lIns="0" tIns="0" rIns="0" bIns="0" anchor="ctr"/>
-          <a:lstStyle/>
+              <a:rPr lang="en-US" sz="2400" b="1" i="0" dirty="0">
+                <a:solidFill>
+                  <a:srgbClr val="FFFFFF"/>
+                </a:solidFill>
+              </a:rPr>
+              <a:t>0</a:t>
+            </a:r>
+          </a:p>
           <a:p>
             <a:pPr algn="ctr">
               <a:spcAft>
@@ -15018,9 +15012,9 @@
               <a:buNone/>
             </a:pPr>
             <a:r>
-              <a:rPr lang="en-US" sz="2000" b="1" i="0" dirty="0">
-                <a:solidFill>
-                  <a:srgbClr val="5C4826"/>
+              <a:rPr lang="en-US" sz="2400" b="1" i="0" dirty="0">
+                <a:solidFill>
+                  <a:srgbClr val="FFFFFF"/>
                 </a:solidFill>
               </a:rPr>
               <a:t>0</a:t>
@@ -15028,28 +15022,6 @@
           </a:p>
         </p:txBody>
       </p:sp>
-      <p:cxnSp>
-        <p:nvCxnSpPr>
-          <p:cNvPr id="140" name="SameUp"/>
-          <p:cNvCxnSpPr/>
-          <p:nvPr/>
-        </p:nvCxnSpPr>
-        <p:spPr>
-          <a:xfrm flipV="1">
-            <a:off x="6400800" y="4206240"/>
-            <a:ext cx="0" cy="91440"/>
-          </a:xfrm>
-          <a:prstGeom prst="straightConnector1">
-            <a:avLst/>
-          </a:prstGeom>
-          <a:ln w="19050">
-            <a:solidFill>
-              <a:srgbClr val="8E6F3E"/>
-            </a:solidFill>
-            <a:tailEnd type="triangle" w="med" len="med"/>
-          </a:ln>
-        </p:spPr>
-      </p:cxnSp>
       <p:sp>
         <p:nvSpPr>
           <p:cNvPr id="141" name="SameLbl"/>
@@ -15058,8 +15030,8 @@
         </p:nvSpPr>
         <p:spPr>
           <a:xfrm>
-            <a:off x="5181600" y="4297680"/>
-            <a:ext cx="2438400" cy="182880"/>
+            <a:off x="6949440" y="3772020"/>
+            <a:ext cx="1737360" cy="182880"/>
           </a:xfrm>
           <a:prstGeom prst="rect">
             <a:avLst/>
@@ -15070,7 +15042,47 @@
           </a:ln>
         </p:spPr>
         <p:txBody>
-          <a:bodyPr wrap="square" lIns="0" tIns="0" rIns="0" bIns="0" anchor="t"/>
+          <a:bodyPr wrap="square" lIns="0" tIns="0" rIns="0" bIns="0" anchor="ctr"/>
+          <a:lstStyle/>
+          <a:p>
+            <a:pPr algn="l">
+              <a:spcAft>
+                <a:spcPts val="0"/>
+              </a:spcAft>
+              <a:buNone/>
+            </a:pPr>
+            <a:r>
+              <a:rPr lang="en-US" sz="1200" b="1" i="0" dirty="0">
+                <a:solidFill>
+                  <a:srgbClr val="8E6F3E"/>
+                </a:solidFill>
+              </a:rPr>
+              <a:t>same model state</a:t>
+            </a:r>
+          </a:p>
+        </p:txBody>
+      </p:sp>
+      <p:sp>
+        <p:nvSpPr>
+          <p:cNvPr id="150" name="ConseqLine"/>
+          <p:cNvSpPr txBox="1"/>
+          <p:nvPr/>
+        </p:nvSpPr>
+        <p:spPr>
+          <a:xfrm>
+            <a:off x="1188720" y="4663440"/>
+            <a:ext cx="7680960" cy="548640"/>
+          </a:xfrm>
+          <a:prstGeom prst="rect">
+            <a:avLst/>
+          </a:prstGeom>
+          <a:noFill/>
+          <a:ln>
+            <a:noFill/>
+          </a:ln>
+        </p:spPr>
+        <p:txBody>
+          <a:bodyPr wrap="square" lIns="18288" tIns="18288" rIns="18288" bIns="18288" anchor="t"/>
           <a:lstStyle/>
           <a:p>
             <a:pPr algn="ctr">
@@ -15080,52 +15092,12 @@
               <a:buNone/>
             </a:pPr>
             <a:r>
-              <a:rPr lang="en-US" sz="1200" b="1" i="0" dirty="0">
-                <a:solidFill>
-                  <a:srgbClr val="8E6F3E"/>
-                </a:solidFill>
-              </a:rPr>
-              <a:t>same model state</a:t>
-            </a:r>
-          </a:p>
-        </p:txBody>
-      </p:sp>
-      <p:sp>
-        <p:nvSpPr>
-          <p:cNvPr id="150" name="ConseqLine"/>
-          <p:cNvSpPr txBox="1"/>
-          <p:nvPr/>
-        </p:nvSpPr>
-        <p:spPr>
-          <a:xfrm>
-            <a:off x="1188720" y="4663440"/>
-            <a:ext cx="7680960" cy="548640"/>
-          </a:xfrm>
-          <a:prstGeom prst="rect">
-            <a:avLst/>
-          </a:prstGeom>
-          <a:noFill/>
-          <a:ln>
-            <a:noFill/>
-          </a:ln>
-        </p:spPr>
-        <p:txBody>
-          <a:bodyPr wrap="square" lIns="18288" tIns="18288" rIns="18288" bIns="18288" anchor="t"/>
-          <a:lstStyle/>
-          <a:p>
-            <a:pPr algn="ctr">
-              <a:spcAft>
-                <a:spcPts val="0"/>
-              </a:spcAft>
-              <a:buNone/>
-            </a:pPr>
-            <a:r>
               <a:rPr lang="en-US" sz="1800" b="0" i="0" dirty="0">
                 <a:solidFill>
                   <a:srgbClr val="555960"/>
                 </a:solidFill>
               </a:rPr>
-              <a:t>The model cannot distinguish states with different required behavior.</a:t>
+              <a:t>The model cannot distinguish states the obligation requires to differ.</a:t>
             </a:r>
           </a:p>
         </p:txBody>
@@ -15138,7 +15110,7 @@
         </p:nvSpPr>
         <p:spPr>
           <a:xfrm>
-            <a:off x="5943600" y="5440680"/>
+            <a:off x="5943600" y="5227320"/>
             <a:ext cx="2926080" cy="274320"/>
           </a:xfrm>
           <a:prstGeom prst="rect">

--- a/course/lectures/act-2-delegation-and-control/02-modeling/2-2-Modeling-1-Purposeful-Reduction.pptx
+++ b/course/lectures/act-2-delegation-and-control/02-modeling/2-2-Modeling-1-Purposeful-Reduction.pptx
@@ -15562,7 +15562,7 @@
               <a:buNone/>
             </a:pPr>
             <a:r>
-              <a:rPr lang="en-US" sz="900" b="0" i="1" dirty="0">
+              <a:rPr lang="en-US" sz="1100" b="0" i="1" dirty="0">
                 <a:solidFill>
                   <a:srgbClr val="555960"/>
                 </a:solidFill>
@@ -15602,7 +15602,7 @@
               <a:buNone/>
             </a:pPr>
             <a:r>
-              <a:rPr lang="en-US" sz="900" b="1" i="0" dirty="0">
+              <a:rPr lang="en-US" sz="1000" b="1" i="0" dirty="0">
                 <a:solidFill>
                   <a:srgbClr val="8E6F3E"/>
                 </a:solidFill>
@@ -15696,14 +15696,14 @@
       </p:sp>
       <p:sp>
         <p:nvSpPr>
-          <p:cNvPr id="124" name="ForbidMark"/>
+          <p:cNvPr id="124" name="ReleaseLbl"/>
           <p:cNvSpPr txBox="1"/>
           <p:nvPr/>
         </p:nvSpPr>
         <p:spPr>
           <a:xfrm>
-            <a:off x="6035040" y="2468880"/>
-            <a:ext cx="548640" cy="182880"/>
+            <a:off x="5943600" y="2468880"/>
+            <a:ext cx="731520" cy="182880"/>
           </a:xfrm>
           <a:prstGeom prst="rect">
             <a:avLst/>
@@ -15724,7 +15724,49 @@
               <a:buNone/>
             </a:pPr>
             <a:r>
-              <a:rPr lang="en-US" sz="1600" b="1" i="0" dirty="0">
+              <a:rPr lang="en-US" sz="1000" b="1" i="0" dirty="0">
+                <a:solidFill>
+                  <a:srgbClr val="5C4826"/>
+                </a:solidFill>
+              </a:rPr>
+              <a:t>RELEASES</a:t>
+            </a:r>
+          </a:p>
+        </p:txBody>
+      </p:sp>
+      <p:sp>
+        <p:nvSpPr>
+          <p:cNvPr id="127" name="ForbidMark"/>
+          <p:cNvSpPr/>
+          <p:nvPr/>
+        </p:nvSpPr>
+        <p:spPr>
+          <a:xfrm>
+            <a:off x="6217920" y="2628900"/>
+            <a:ext cx="182880" cy="182880"/>
+          </a:xfrm>
+          <a:prstGeom prst="rect">
+            <a:avLst/>
+          </a:prstGeom>
+          <a:solidFill>
+            <a:srgbClr val="FFFFFF"/>
+          </a:solidFill>
+          <a:ln>
+            <a:noFill/>
+          </a:ln>
+        </p:spPr>
+        <p:txBody>
+          <a:bodyPr wrap="square" lIns="27432" tIns="22860" rIns="27432" bIns="22860" anchor="ctr"/>
+          <a:lstStyle/>
+          <a:p>
+            <a:pPr algn="ctr">
+              <a:spcAft>
+                <a:spcPts val="0"/>
+              </a:spcAft>
+              <a:buNone/>
+            </a:pPr>
+            <a:r>
+              <a:rPr lang="en-US" sz="1800" b="1" i="0" dirty="0">
                 <a:solidFill>
                   <a:srgbClr val="5C4826"/>
                 </a:solidFill>
@@ -15808,12 +15850,12 @@
               <a:buNone/>
             </a:pPr>
             <a:r>
-              <a:rPr lang="en-US" sz="900" b="0" i="1" dirty="0">
+              <a:rPr lang="en-US" sz="1100" b="0" i="1" dirty="0">
                 <a:solidFill>
                   <a:srgbClr val="555960"/>
                 </a:solidFill>
               </a:rPr>
-              <a:t>cannot release the current lease</a:t>
+              <a:t>a former owner</a:t>
             </a:r>
           </a:p>
         </p:txBody>
@@ -15827,7 +15869,7 @@
         <p:spPr>
           <a:xfrm>
             <a:off x="4663440" y="3063240"/>
-            <a:ext cx="0" cy="137160"/>
+            <a:ext cx="0" cy="182880"/>
           </a:xfrm>
           <a:prstGeom prst="straightConnector1">
             <a:avLst/>
@@ -15848,7 +15890,7 @@
         </p:nvCxnSpPr>
         <p:spPr>
           <a:xfrm>
-            <a:off x="2971800" y="3200400"/>
+            <a:off x="2971800" y="3246120"/>
             <a:ext cx="4114800" cy="0"/>
           </a:xfrm>
           <a:prstGeom prst="straightConnector1">
@@ -15870,8 +15912,8 @@
         </p:nvCxnSpPr>
         <p:spPr>
           <a:xfrm>
-            <a:off x="2971800" y="3200400"/>
-            <a:ext cx="0" cy="137160"/>
+            <a:off x="2971800" y="3246120"/>
+            <a:ext cx="0" cy="91440"/>
           </a:xfrm>
           <a:prstGeom prst="straightConnector1">
             <a:avLst/>
@@ -15893,8 +15935,8 @@
         </p:nvCxnSpPr>
         <p:spPr>
           <a:xfrm>
-            <a:off x="7086600" y="3200400"/>
-            <a:ext cx="0" cy="137160"/>
+            <a:off x="7086600" y="3246120"/>
+            <a:ext cx="0" cy="91440"/>
           </a:xfrm>
           <a:prstGeom prst="straightConnector1">
             <a:avLst/>
@@ -15916,8 +15958,8 @@
         </p:nvSpPr>
         <p:spPr>
           <a:xfrm>
-            <a:off x="1188720" y="3131880"/>
-            <a:ext cx="1600200" cy="182880"/>
+            <a:off x="4754880" y="3063240"/>
+            <a:ext cx="1188720" cy="182880"/>
           </a:xfrm>
           <a:prstGeom prst="rect">
             <a:avLst/>
@@ -15938,7 +15980,7 @@
               <a:buNone/>
             </a:pPr>
             <a:r>
-              <a:rPr lang="en-US" sz="900" b="0" i="1" dirty="0">
+              <a:rPr lang="en-US" sz="1000" b="0" i="1" dirty="0">
                 <a:solidFill>
                   <a:srgbClr val="555960"/>
                 </a:solidFill>
@@ -16056,7 +16098,7 @@
               <a:buNone/>
             </a:pPr>
             <a:r>
-              <a:rPr lang="en-US" sz="1000" b="1" i="0" dirty="0">
+              <a:rPr lang="en-US" sz="1100" b="1" i="0" dirty="0">
                 <a:solidFill>
                   <a:srgbClr val="5C4826"/>
                 </a:solidFill>
@@ -16122,7 +16164,7 @@
               <a:buNone/>
             </a:pPr>
             <a:r>
-              <a:rPr lang="en-US" sz="1000" b="1" i="0" dirty="0">
+              <a:rPr lang="en-US" sz="1100" b="1" i="0" dirty="0">
                 <a:solidFill>
                   <a:srgbClr val="5C4826"/>
                 </a:solidFill>
@@ -16162,7 +16204,7 @@
               <a:buNone/>
             </a:pPr>
             <a:r>
-              <a:rPr lang="en-US" sz="900" b="0" i="1" dirty="0">
+              <a:rPr lang="en-US" sz="1000" b="0" i="1" dirty="0">
                 <a:solidFill>
                   <a:srgbClr val="555960"/>
                 </a:solidFill>
@@ -16280,7 +16322,7 @@
               <a:buNone/>
             </a:pPr>
             <a:r>
-              <a:rPr lang="en-US" sz="900" b="1" i="0" dirty="0">
+              <a:rPr lang="en-US" sz="1100" b="1" i="0" dirty="0">
                 <a:solidFill>
                   <a:srgbClr val="5C4826"/>
                 </a:solidFill>
@@ -16324,7 +16366,7 @@
               <a:buNone/>
             </a:pPr>
             <a:r>
-              <a:rPr lang="en-US" sz="900" b="0" i="0" dirty="0">
+              <a:rPr lang="en-US" sz="1100" b="0" i="0" dirty="0">
                 <a:solidFill>
                   <a:srgbClr val="5C4826"/>
                 </a:solidFill>
@@ -16368,7 +16410,7 @@
               <a:buNone/>
             </a:pPr>
             <a:r>
-              <a:rPr lang="en-US" sz="900" b="0" i="0" dirty="0">
+              <a:rPr lang="en-US" sz="1100" b="0" i="0" dirty="0">
                 <a:solidFill>
                   <a:srgbClr val="5C4826"/>
                 </a:solidFill>
@@ -16412,7 +16454,7 @@
               <a:buNone/>
             </a:pPr>
             <a:r>
-              <a:rPr lang="en-US" sz="900" b="0" i="0" dirty="0">
+              <a:rPr lang="en-US" sz="1100" b="0" i="0" dirty="0">
                 <a:solidFill>
                   <a:srgbClr val="5C4826"/>
                 </a:solidFill>
@@ -16456,7 +16498,7 @@
               <a:buNone/>
             </a:pPr>
             <a:r>
-              <a:rPr lang="en-US" sz="900" b="1" i="0" dirty="0">
+              <a:rPr lang="en-US" sz="1100" b="1" i="0" dirty="0">
                 <a:solidFill>
                   <a:srgbClr val="5C4826"/>
                 </a:solidFill>
@@ -16622,7 +16664,7 @@
               <a:buNone/>
             </a:pPr>
             <a:r>
-              <a:rPr lang="en-US" sz="900" b="0" i="1" dirty="0">
+              <a:rPr lang="en-US" sz="1000" b="0" i="1" dirty="0">
                 <a:solidFill>
                   <a:srgbClr val="555960"/>
                 </a:solidFill>
@@ -16680,7 +16722,7 @@
         </p:nvSpPr>
         <p:spPr>
           <a:xfrm>
-            <a:off x="5943600" y="5440680"/>
+            <a:off x="5943600" y="5227320"/>
             <a:ext cx="2926080" cy="274320"/>
           </a:xfrm>
           <a:prstGeom prst="rect">
